--- a/decks/04_5限_De-escalation.pptx
+++ b/decks/04_5限_De-escalation.pptx
@@ -1658,7 +1658,7 @@
     <p:bg>
       <p:bgPr>
         <a:solidFill>
-          <a:srgbClr val="0F2D52"/>
+          <a:srgbClr val="093259"/>
         </a:solidFill>
       </p:bgPr>
     </p:bg>
@@ -1698,9 +1698,33 @@
           <a:ln/>
         </p:spPr>
       </p:sp>
-      <p:sp>
-        <p:nvSpPr>
-          <p:cNvPr id="3" name="Text 1"/>
+      <p:pic>
+        <p:nvPicPr>
+          <p:cNvPr id="3" name="Image 0" descr="/home/user/Training-/assets/logo.png">    </p:cNvPr>
+          <p:cNvPicPr>
+            <a:picLocks noChangeAspect="1"/>
+          </p:cNvPicPr>
+          <p:nvPr/>
+        </p:nvPicPr>
+        <p:blipFill>
+          <a:blip r:embed="rId1"/>
+          <a:stretch>
+            <a:fillRect/>
+          </a:stretch>
+        </p:blipFill>
+        <p:spPr>
+          <a:xfrm>
+            <a:off x="10765231" y="332912"/>
+            <a:ext cx="786384" cy="742353"/>
+          </a:xfrm>
+          <a:prstGeom prst="rect">
+            <a:avLst/>
+          </a:prstGeom>
+        </p:spPr>
+      </p:pic>
+      <p:sp>
+        <p:nvSpPr>
+          <p:cNvPr id="4" name="Text 1"/>
           <p:cNvSpPr/>
           <p:nvPr/>
         </p:nvSpPr>
@@ -1725,7 +1749,7 @@
             <a:r>
               <a:rPr lang="en-US" sz="1300" b="1" dirty="0">
                 <a:solidFill>
-                  <a:srgbClr val="17AF98"/>
+                  <a:srgbClr val="12B198"/>
                 </a:solidFill>
                 <a:latin typeface="Yu Gothic" pitchFamily="34" charset="0"/>
                 <a:ea typeface="Yu Gothic" pitchFamily="34" charset="-122"/>
@@ -1756,7 +1780,7 @@
       </p:sp>
       <p:sp>
         <p:nvSpPr>
-          <p:cNvPr id="4" name="Text 2"/>
+          <p:cNvPr id="5" name="Text 2"/>
           <p:cNvSpPr/>
           <p:nvPr/>
         </p:nvSpPr>
@@ -1818,7 +1842,7 @@
       </p:sp>
       <p:sp>
         <p:nvSpPr>
-          <p:cNvPr id="5" name="Text 3"/>
+          <p:cNvPr id="6" name="Text 3"/>
           <p:cNvSpPr/>
           <p:nvPr/>
         </p:nvSpPr>
@@ -1857,7 +1881,7 @@
       </p:sp>
       <p:sp>
         <p:nvSpPr>
-          <p:cNvPr id="6" name="Shape 4"/>
+          <p:cNvPr id="7" name="Shape 4"/>
           <p:cNvSpPr/>
           <p:nvPr/>
         </p:nvSpPr>
@@ -1870,14 +1894,14 @@
             <a:avLst/>
           </a:prstGeom>
           <a:solidFill>
-            <a:srgbClr val="17AF98"/>
+            <a:srgbClr val="12B198"/>
           </a:solidFill>
           <a:ln/>
         </p:spPr>
       </p:sp>
       <p:sp>
         <p:nvSpPr>
-          <p:cNvPr id="7" name="Text 5"/>
+          <p:cNvPr id="8" name="Text 5"/>
           <p:cNvSpPr/>
           <p:nvPr/>
         </p:nvSpPr>
@@ -1945,7 +1969,7 @@
     <p:bg>
       <p:bgPr>
         <a:solidFill>
-          <a:srgbClr val="0F2D52"/>
+          <a:srgbClr val="093259"/>
         </a:solidFill>
       </p:bgPr>
     </p:bg>
@@ -1985,9 +2009,33 @@
           <a:ln/>
         </p:spPr>
       </p:sp>
-      <p:sp>
-        <p:nvSpPr>
-          <p:cNvPr id="3" name="Text 1"/>
+      <p:pic>
+        <p:nvPicPr>
+          <p:cNvPr id="3" name="Image 0" descr="/home/user/Training-/assets/logo.png">    </p:cNvPr>
+          <p:cNvPicPr>
+            <a:picLocks noChangeAspect="1"/>
+          </p:cNvPicPr>
+          <p:nvPr/>
+        </p:nvPicPr>
+        <p:blipFill>
+          <a:blip r:embed="rId1"/>
+          <a:stretch>
+            <a:fillRect/>
+          </a:stretch>
+        </p:blipFill>
+        <p:spPr>
+          <a:xfrm>
+            <a:off x="10765231" y="332912"/>
+            <a:ext cx="786384" cy="742353"/>
+          </a:xfrm>
+          <a:prstGeom prst="rect">
+            <a:avLst/>
+          </a:prstGeom>
+        </p:spPr>
+      </p:pic>
+      <p:sp>
+        <p:nvSpPr>
+          <p:cNvPr id="4" name="Text 1"/>
           <p:cNvSpPr/>
           <p:nvPr/>
         </p:nvSpPr>
@@ -2041,7 +2089,7 @@
                 <a:ea typeface="Calibri" pitchFamily="34" charset="-122"/>
                 <a:cs typeface="Calibri" pitchFamily="34" charset="-120"/>
               </a:rPr>
-              <a:t>TTX ③ — What We Are Looking For</a:t>
+              <a:t>TTX ③ — Assessment Points</a:t>
             </a:r>
             <a:endParaRPr lang="en-US" sz="3000" dirty="0"/>
           </a:p>
@@ -2049,7 +2097,7 @@
       </p:sp>
       <p:sp>
         <p:nvSpPr>
-          <p:cNvPr id="4" name="Shape 2"/>
+          <p:cNvPr id="5" name="Shape 2"/>
           <p:cNvSpPr/>
           <p:nvPr/>
         </p:nvSpPr>
@@ -2064,14 +2112,14 @@
             </a:avLst>
           </a:prstGeom>
           <a:solidFill>
-            <a:srgbClr val="0A2039"/>
+            <a:srgbClr val="06223D"/>
           </a:solidFill>
           <a:ln/>
         </p:spPr>
       </p:sp>
       <p:sp>
         <p:nvSpPr>
-          <p:cNvPr id="5" name="Shape 3"/>
+          <p:cNvPr id="6" name="Shape 3"/>
           <p:cNvSpPr/>
           <p:nvPr/>
         </p:nvSpPr>
@@ -2084,14 +2132,14 @@
             <a:avLst/>
           </a:prstGeom>
           <a:solidFill>
-            <a:srgbClr val="17AF98"/>
+            <a:srgbClr val="12B198"/>
           </a:solidFill>
           <a:ln/>
         </p:spPr>
       </p:sp>
       <p:sp>
         <p:nvSpPr>
-          <p:cNvPr id="6" name="Text 4"/>
+          <p:cNvPr id="7" name="Text 4"/>
           <p:cNvSpPr/>
           <p:nvPr/>
         </p:nvSpPr>
@@ -2130,7 +2178,7 @@
       </p:sp>
       <p:sp>
         <p:nvSpPr>
-          <p:cNvPr id="7" name="Text 5"/>
+          <p:cNvPr id="8" name="Text 5"/>
           <p:cNvSpPr/>
           <p:nvPr/>
         </p:nvSpPr>
@@ -2164,7 +2212,7 @@
                 <a:ea typeface="Yu Gothic" pitchFamily="34" charset="-122"/>
                 <a:cs typeface="Yu Gothic" pitchFamily="34" charset="-120"/>
               </a:rPr>
-              <a:t>選んだ台詞は「拒否」ではなく「手続きへの誘導」になっているか。</a:t>
+              <a:t>選んだ台詞は、拒否ではなく手続きへの誘導になっているか。</a:t>
             </a:r>
             <a:endParaRPr lang="en-US" sz="1500" dirty="0"/>
           </a:p>
@@ -2184,7 +2232,7 @@
                 <a:ea typeface="Calibri" pitchFamily="34" charset="-122"/>
                 <a:cs typeface="Calibri" pitchFamily="34" charset="-120"/>
               </a:rPr>
-              <a:t>Does your line redirect to a process, rather than simply refuse?</a:t>
+              <a:t>Does your line redirect to a procedure, rather than simply refuse?</a:t>
             </a:r>
             <a:endParaRPr lang="en-US" sz="1500" dirty="0"/>
           </a:p>
@@ -2192,7 +2240,7 @@
       </p:sp>
       <p:sp>
         <p:nvSpPr>
-          <p:cNvPr id="8" name="Shape 6"/>
+          <p:cNvPr id="9" name="Shape 6"/>
           <p:cNvSpPr/>
           <p:nvPr/>
         </p:nvSpPr>
@@ -2207,14 +2255,14 @@
             </a:avLst>
           </a:prstGeom>
           <a:solidFill>
-            <a:srgbClr val="0A2039"/>
+            <a:srgbClr val="06223D"/>
           </a:solidFill>
           <a:ln/>
         </p:spPr>
       </p:sp>
       <p:sp>
         <p:nvSpPr>
-          <p:cNvPr id="9" name="Shape 7"/>
+          <p:cNvPr id="10" name="Shape 7"/>
           <p:cNvSpPr/>
           <p:nvPr/>
         </p:nvSpPr>
@@ -2227,14 +2275,14 @@
             <a:avLst/>
           </a:prstGeom>
           <a:solidFill>
-            <a:srgbClr val="17AF98"/>
+            <a:srgbClr val="12B198"/>
           </a:solidFill>
           <a:ln/>
         </p:spPr>
       </p:sp>
       <p:sp>
         <p:nvSpPr>
-          <p:cNvPr id="10" name="Text 8"/>
+          <p:cNvPr id="11" name="Text 8"/>
           <p:cNvSpPr/>
           <p:nvPr/>
         </p:nvSpPr>
@@ -2273,7 +2321,7 @@
       </p:sp>
       <p:sp>
         <p:nvSpPr>
-          <p:cNvPr id="11" name="Text 9"/>
+          <p:cNvPr id="12" name="Text 9"/>
           <p:cNvSpPr/>
           <p:nvPr/>
         </p:nvSpPr>
@@ -2307,7 +2355,7 @@
                 <a:ea typeface="Yu Gothic" pitchFamily="34" charset="-122"/>
                 <a:cs typeface="Yu Gothic" pitchFamily="34" charset="-120"/>
               </a:rPr>
-              <a:t>有形力（進路に立つ等）に頼っていないか。</a:t>
+              <a:t>有形力（進路に立つ、腕に触れる）に頼っていないか。</a:t>
             </a:r>
             <a:endParaRPr lang="en-US" sz="1500" dirty="0"/>
           </a:p>
@@ -2327,7 +2375,7 @@
                 <a:ea typeface="Calibri" pitchFamily="34" charset="-122"/>
                 <a:cs typeface="Calibri" pitchFamily="34" charset="-120"/>
               </a:rPr>
-              <a:t>Are you leaning on physical means — stepping into their path?</a:t>
+              <a:t>Are you relying on physical means, such as blocking or touching?</a:t>
             </a:r>
             <a:endParaRPr lang="en-US" sz="1500" dirty="0"/>
           </a:p>
@@ -2335,7 +2383,7 @@
       </p:sp>
       <p:sp>
         <p:nvSpPr>
-          <p:cNvPr id="12" name="Shape 10"/>
+          <p:cNvPr id="13" name="Shape 10"/>
           <p:cNvSpPr/>
           <p:nvPr/>
         </p:nvSpPr>
@@ -2350,14 +2398,14 @@
             </a:avLst>
           </a:prstGeom>
           <a:solidFill>
-            <a:srgbClr val="0A2039"/>
+            <a:srgbClr val="06223D"/>
           </a:solidFill>
           <a:ln/>
         </p:spPr>
       </p:sp>
       <p:sp>
         <p:nvSpPr>
-          <p:cNvPr id="13" name="Shape 11"/>
+          <p:cNvPr id="14" name="Shape 11"/>
           <p:cNvSpPr/>
           <p:nvPr/>
         </p:nvSpPr>
@@ -2370,14 +2418,14 @@
             <a:avLst/>
           </a:prstGeom>
           <a:solidFill>
-            <a:srgbClr val="17AF98"/>
+            <a:srgbClr val="12B198"/>
           </a:solidFill>
           <a:ln/>
         </p:spPr>
       </p:sp>
       <p:sp>
         <p:nvSpPr>
-          <p:cNvPr id="14" name="Text 12"/>
+          <p:cNvPr id="15" name="Text 12"/>
           <p:cNvSpPr/>
           <p:nvPr/>
         </p:nvSpPr>
@@ -2416,7 +2464,7 @@
       </p:sp>
       <p:sp>
         <p:nvSpPr>
-          <p:cNvPr id="15" name="Text 13"/>
+          <p:cNvPr id="16" name="Text 13"/>
           <p:cNvSpPr/>
           <p:nvPr/>
         </p:nvSpPr>
@@ -2450,7 +2498,7 @@
                 <a:ea typeface="Yu Gothic" pitchFamily="34" charset="-122"/>
                 <a:cs typeface="Yu Gothic" pitchFamily="34" charset="-120"/>
               </a:rPr>
-              <a:t>逃げ道（面子）を残したか。選択肢を示したか。</a:t>
+              <a:t>引き下がれる形を残し、選択肢を示したか。</a:t>
             </a:r>
             <a:endParaRPr lang="en-US" sz="1500" dirty="0"/>
           </a:p>
@@ -2470,7 +2518,7 @@
                 <a:ea typeface="Calibri" pitchFamily="34" charset="-122"/>
                 <a:cs typeface="Calibri" pitchFamily="34" charset="-120"/>
               </a:rPr>
-              <a:t>Did you leave a face-saving exit? Did you offer a choice?</a:t>
+              <a:t>Did you leave a way to step back, and offer choices?</a:t>
             </a:r>
             <a:endParaRPr lang="en-US" sz="1500" dirty="0"/>
           </a:p>
@@ -2478,7 +2526,7 @@
       </p:sp>
       <p:sp>
         <p:nvSpPr>
-          <p:cNvPr id="16" name="Shape 14"/>
+          <p:cNvPr id="17" name="Shape 14"/>
           <p:cNvSpPr/>
           <p:nvPr/>
         </p:nvSpPr>
@@ -2493,14 +2541,14 @@
             </a:avLst>
           </a:prstGeom>
           <a:solidFill>
-            <a:srgbClr val="0A2039"/>
+            <a:srgbClr val="06223D"/>
           </a:solidFill>
           <a:ln/>
         </p:spPr>
       </p:sp>
       <p:sp>
         <p:nvSpPr>
-          <p:cNvPr id="17" name="Shape 15"/>
+          <p:cNvPr id="18" name="Shape 15"/>
           <p:cNvSpPr/>
           <p:nvPr/>
         </p:nvSpPr>
@@ -2513,14 +2561,14 @@
             <a:avLst/>
           </a:prstGeom>
           <a:solidFill>
-            <a:srgbClr val="17AF98"/>
+            <a:srgbClr val="12B198"/>
           </a:solidFill>
           <a:ln/>
         </p:spPr>
       </p:sp>
       <p:sp>
         <p:nvSpPr>
-          <p:cNvPr id="18" name="Text 16"/>
+          <p:cNvPr id="19" name="Text 16"/>
           <p:cNvSpPr/>
           <p:nvPr/>
         </p:nvSpPr>
@@ -2559,7 +2607,7 @@
       </p:sp>
       <p:sp>
         <p:nvSpPr>
-          <p:cNvPr id="19" name="Text 17"/>
+          <p:cNvPr id="20" name="Text 17"/>
           <p:cNvSpPr/>
           <p:nvPr/>
         </p:nvSpPr>
@@ -2593,7 +2641,7 @@
                 <a:ea typeface="Yu Gothic" pitchFamily="34" charset="-122"/>
                 <a:cs typeface="Yu Gothic" pitchFamily="34" charset="-120"/>
               </a:rPr>
-              <a:t>退き際の基準を、自分の言葉で言えるか。</a:t>
+              <a:t>撮影されている状況で、対応を変えたか。変えるべきか。</a:t>
             </a:r>
             <a:endParaRPr lang="en-US" sz="1500" dirty="0"/>
           </a:p>
@@ -2613,7 +2661,7 @@
                 <a:ea typeface="Calibri" pitchFamily="34" charset="-122"/>
                 <a:cs typeface="Calibri" pitchFamily="34" charset="-120"/>
               </a:rPr>
-              <a:t>Can you state, in your own words, when you would disengage?</a:t>
+              <a:t>Did you change your response while being filmed? Should you?</a:t>
             </a:r>
             <a:endParaRPr lang="en-US" sz="1500" dirty="0"/>
           </a:p>
@@ -2621,7 +2669,7 @@
       </p:sp>
       <p:sp>
         <p:nvSpPr>
-          <p:cNvPr id="20" name="Text 18"/>
+          <p:cNvPr id="21" name="Text 18"/>
           <p:cNvSpPr/>
           <p:nvPr/>
         </p:nvSpPr>
@@ -2646,13 +2694,13 @@
             <a:r>
               <a:rPr lang="en-US" sz="1200" b="1" dirty="0">
                 <a:solidFill>
-                  <a:srgbClr val="17AF98"/>
+                  <a:srgbClr val="12B198"/>
                 </a:solidFill>
                 <a:latin typeface="Yu Gothic" pitchFamily="34" charset="0"/>
                 <a:ea typeface="Yu Gothic" pitchFamily="34" charset="-122"/>
                 <a:cs typeface="Yu Gothic" pitchFamily="34" charset="-120"/>
               </a:rPr>
-              <a:t>午後は他講師が担当します。第9時限で再開 ― 通報と現場保存。</a:t>
+              <a:t>午後は他講師が担当します。第9時限で再開します。</a:t>
             </a:r>
             <a:endParaRPr lang="en-US" sz="1200" dirty="0"/>
           </a:p>
@@ -2669,7 +2717,7 @@
                 <a:ea typeface="Calibri" pitchFamily="34" charset="-122"/>
                 <a:cs typeface="Calibri" pitchFamily="34" charset="-120"/>
               </a:rPr>
-              <a:t>Other instructors take the afternoon. We resume at Period 9 — reporting and scene preservation.</a:t>
+              <a:t>Other instructors take the afternoon. We resume at Period 9.</a:t>
             </a:r>
             <a:endParaRPr lang="en-US" sz="1200" dirty="0"/>
           </a:p>
@@ -2707,9 +2755,33 @@
           <a:chExt cx="0" cy="0"/>
         </a:xfrm>
       </p:grpSpPr>
-      <p:sp>
-        <p:nvSpPr>
-          <p:cNvPr id="2" name="Text 0"/>
+      <p:pic>
+        <p:nvPicPr>
+          <p:cNvPr id="2" name="Image 0" descr="/home/user/Training-/assets/logo.png">    </p:cNvPr>
+          <p:cNvPicPr>
+            <a:picLocks noChangeAspect="1"/>
+          </p:cNvPicPr>
+          <p:nvPr/>
+        </p:nvPicPr>
+        <p:blipFill>
+          <a:blip r:embed="rId1"/>
+          <a:stretch>
+            <a:fillRect/>
+          </a:stretch>
+        </p:blipFill>
+        <p:spPr>
+          <a:xfrm>
+            <a:off x="10765231" y="332912"/>
+            <a:ext cx="786384" cy="742353"/>
+          </a:xfrm>
+          <a:prstGeom prst="rect">
+            <a:avLst/>
+          </a:prstGeom>
+        </p:spPr>
+      </p:pic>
+      <p:sp>
+        <p:nvSpPr>
+          <p:cNvPr id="3" name="Text 0"/>
           <p:cNvSpPr/>
           <p:nvPr/>
         </p:nvSpPr>
@@ -2737,7 +2809,7 @@
             <a:r>
               <a:rPr lang="en-US" sz="2700" b="1" dirty="0">
                 <a:solidFill>
-                  <a:srgbClr val="0F2D52"/>
+                  <a:srgbClr val="093259"/>
                 </a:solidFill>
                 <a:latin typeface="Yu Gothic" pitchFamily="34" charset="0"/>
                 <a:ea typeface="Yu Gothic" pitchFamily="34" charset="-122"/>
@@ -2757,7 +2829,7 @@
             <a:r>
               <a:rPr lang="en-US" sz="1250" i="1" dirty="0">
                 <a:solidFill>
-                  <a:srgbClr val="17AF98"/>
+                  <a:srgbClr val="12B198"/>
                 </a:solidFill>
                 <a:latin typeface="Calibri" pitchFamily="34" charset="0"/>
                 <a:ea typeface="Calibri" pitchFamily="34" charset="-122"/>
@@ -2771,7 +2843,7 @@
       </p:sp>
       <p:sp>
         <p:nvSpPr>
-          <p:cNvPr id="3" name="Shape 1"/>
+          <p:cNvPr id="4" name="Shape 1"/>
           <p:cNvSpPr/>
           <p:nvPr/>
         </p:nvSpPr>
@@ -2786,14 +2858,14 @@
             </a:avLst>
           </a:prstGeom>
           <a:solidFill>
-            <a:srgbClr val="0F2D52"/>
+            <a:srgbClr val="093259"/>
           </a:solidFill>
           <a:ln/>
         </p:spPr>
       </p:sp>
       <p:sp>
         <p:nvSpPr>
-          <p:cNvPr id="4" name="Text 2"/>
+          <p:cNvPr id="5" name="Text 2"/>
           <p:cNvSpPr/>
           <p:nvPr/>
         </p:nvSpPr>
@@ -2819,7 +2891,7 @@
               <a:buNone/>
             </a:pPr>
             <a:r>
-              <a:rPr lang="en-US" sz="1900" b="1" dirty="0">
+              <a:rPr lang="en-US" sz="1800" b="1" dirty="0">
                 <a:solidFill>
                   <a:srgbClr val="FFFFFF"/>
                 </a:solidFill>
@@ -2827,9 +2899,9 @@
                 <a:ea typeface="Yu Gothic" pitchFamily="34" charset="-122"/>
                 <a:cs typeface="Yu Gothic" pitchFamily="34" charset="-120"/>
               </a:rPr>
-              <a:t>有形力を使わずに、緊張を下げる技術。</a:t>
-            </a:r>
-            <a:endParaRPr lang="en-US" sz="1900" dirty="0"/>
+              <a:t>有形力を使わずに、緊張を下げる技術です。</a:t>
+            </a:r>
+            <a:endParaRPr lang="en-US" sz="1800" dirty="0"/>
           </a:p>
           <a:p>
             <a:pPr indent="0" marL="0">
@@ -2839,7 +2911,7 @@
               <a:buNone/>
             </a:pPr>
             <a:r>
-              <a:rPr lang="en-US" sz="1900" b="1" dirty="0">
+              <a:rPr lang="en-US" sz="1800" b="1" dirty="0">
                 <a:solidFill>
                   <a:srgbClr val="FFFFFF"/>
                 </a:solidFill>
@@ -2847,15 +2919,15 @@
                 <a:ea typeface="Yu Gothic" pitchFamily="34" charset="-122"/>
                 <a:cs typeface="Yu Gothic" pitchFamily="34" charset="-120"/>
               </a:rPr>
-              <a:t>目的は「勝つこと」ではなく、「収めること」。</a:t>
-            </a:r>
-            <a:endParaRPr lang="en-US" sz="1900" dirty="0"/>
-          </a:p>
-        </p:txBody>
-      </p:sp>
-      <p:sp>
-        <p:nvSpPr>
-          <p:cNvPr id="5" name="Text 3"/>
+              <a:t>目的は、その場を安全に終えることです。</a:t>
+            </a:r>
+            <a:endParaRPr lang="en-US" sz="1800" dirty="0"/>
+          </a:p>
+        </p:txBody>
+      </p:sp>
+      <p:sp>
+        <p:nvSpPr>
+          <p:cNvPr id="6" name="Text 3"/>
           <p:cNvSpPr/>
           <p:nvPr/>
         </p:nvSpPr>
@@ -2881,7 +2953,7 @@
               <a:buNone/>
             </a:pPr>
             <a:r>
-              <a:rPr lang="en-US" sz="1250" i="1" dirty="0">
+              <a:rPr lang="en-US" sz="1200" i="1" dirty="0">
                 <a:solidFill>
                   <a:srgbClr val="9FD8CD"/>
                 </a:solidFill>
@@ -2889,9 +2961,9 @@
                 <a:ea typeface="Calibri" pitchFamily="34" charset="-122"/>
                 <a:cs typeface="Calibri" pitchFamily="34" charset="-120"/>
               </a:rPr>
-              <a:t>The skill of lowering tension without resorting to physical force.</a:t>
-            </a:r>
-            <a:endParaRPr lang="en-US" sz="1250" dirty="0"/>
+              <a:t>A method of lowering tension without using physical force.</a:t>
+            </a:r>
+            <a:endParaRPr lang="en-US" sz="1200" dirty="0"/>
           </a:p>
           <a:p>
             <a:pPr indent="0" marL="0">
@@ -2901,7 +2973,7 @@
               <a:buNone/>
             </a:pPr>
             <a:r>
-              <a:rPr lang="en-US" sz="1250" i="1" dirty="0">
+              <a:rPr lang="en-US" sz="1200" i="1" dirty="0">
                 <a:solidFill>
                   <a:srgbClr val="9FD8CD"/>
                 </a:solidFill>
@@ -2909,15 +2981,15 @@
                 <a:ea typeface="Calibri" pitchFamily="34" charset="-122"/>
                 <a:cs typeface="Calibri" pitchFamily="34" charset="-120"/>
               </a:rPr>
-              <a:t>The objective is not to win the exchange — it is to end it safely.</a:t>
-            </a:r>
-            <a:endParaRPr lang="en-US" sz="1250" dirty="0"/>
-          </a:p>
-        </p:txBody>
-      </p:sp>
-      <p:sp>
-        <p:nvSpPr>
-          <p:cNvPr id="6" name="Shape 4"/>
+              <a:t>The aim is to end the situation safely.</a:t>
+            </a:r>
+            <a:endParaRPr lang="en-US" sz="1200" dirty="0"/>
+          </a:p>
+        </p:txBody>
+      </p:sp>
+      <p:sp>
+        <p:nvSpPr>
+          <p:cNvPr id="7" name="Shape 4"/>
           <p:cNvSpPr/>
           <p:nvPr/>
         </p:nvSpPr>
@@ -2939,7 +3011,7 @@
       </p:sp>
       <p:sp>
         <p:nvSpPr>
-          <p:cNvPr id="7" name="Shape 5"/>
+          <p:cNvPr id="8" name="Shape 5"/>
           <p:cNvSpPr/>
           <p:nvPr/>
         </p:nvSpPr>
@@ -2952,14 +3024,14 @@
             <a:avLst/>
           </a:prstGeom>
           <a:solidFill>
-            <a:srgbClr val="17AF98"/>
+            <a:srgbClr val="12B198"/>
           </a:solidFill>
           <a:ln/>
         </p:spPr>
       </p:sp>
       <p:sp>
         <p:nvSpPr>
-          <p:cNvPr id="8" name="Text 6"/>
+          <p:cNvPr id="9" name="Text 6"/>
           <p:cNvSpPr/>
           <p:nvPr/>
         </p:nvSpPr>
@@ -2998,7 +3070,7 @@
       </p:sp>
       <p:sp>
         <p:nvSpPr>
-          <p:cNvPr id="9" name="Text 7"/>
+          <p:cNvPr id="10" name="Text 7"/>
           <p:cNvSpPr/>
           <p:nvPr/>
         </p:nvSpPr>
@@ -3026,13 +3098,13 @@
             <a:r>
               <a:rPr lang="en-US" sz="1450" b="1" dirty="0">
                 <a:solidFill>
-                  <a:srgbClr val="0F2D52"/>
+                  <a:srgbClr val="093259"/>
                 </a:solidFill>
                 <a:latin typeface="Yu Gothic" pitchFamily="34" charset="0"/>
                 <a:ea typeface="Yu Gothic" pitchFamily="34" charset="-122"/>
                 <a:cs typeface="Yu Gothic" pitchFamily="34" charset="-120"/>
               </a:rPr>
-              <a:t>議論に勝った警備員は、たいてい状況に負けています。相手を言い負かした瞬間、退路がなくなります。</a:t>
+              <a:t>相手を言い負かすことは目的ではありません。有形力に至らずに終えることが目的です。</a:t>
             </a:r>
             <a:endParaRPr lang="en-US" sz="1450" dirty="0"/>
           </a:p>
@@ -3046,13 +3118,13 @@
             <a:r>
               <a:rPr lang="en-US" sz="1000" i="1" dirty="0">
                 <a:solidFill>
-                  <a:srgbClr val="0E8C79"/>
-                </a:solidFill>
-                <a:latin typeface="Calibri" pitchFamily="34" charset="0"/>
-                <a:ea typeface="Calibri" pitchFamily="34" charset="-122"/>
-                <a:cs typeface="Calibri" pitchFamily="34" charset="-120"/>
-              </a:rPr>
-              <a:t>A guard who wins the argument has usually lost the situation. The moment you defeat someone verbally, they have nowhere to go.</a:t>
+                  <a:srgbClr val="0D8A76"/>
+                </a:solidFill>
+                <a:latin typeface="Calibri" pitchFamily="34" charset="0"/>
+                <a:ea typeface="Calibri" pitchFamily="34" charset="-122"/>
+                <a:cs typeface="Calibri" pitchFamily="34" charset="-120"/>
+              </a:rPr>
+              <a:t>The aim is not to win the exchange. The aim is to finish without using force.</a:t>
             </a:r>
             <a:endParaRPr lang="en-US" sz="1450" dirty="0"/>
           </a:p>
@@ -3060,7 +3132,7 @@
       </p:sp>
       <p:sp>
         <p:nvSpPr>
-          <p:cNvPr id="10" name="Text 8"/>
+          <p:cNvPr id="11" name="Text 8"/>
           <p:cNvSpPr/>
           <p:nvPr/>
         </p:nvSpPr>
@@ -3113,7 +3185,7 @@
       </p:sp>
       <p:sp>
         <p:nvSpPr>
-          <p:cNvPr id="11" name="Text 9"/>
+          <p:cNvPr id="12" name="Text 9"/>
           <p:cNvSpPr/>
           <p:nvPr/>
         </p:nvSpPr>
@@ -3182,9 +3254,33 @@
           <a:chExt cx="0" cy="0"/>
         </a:xfrm>
       </p:grpSpPr>
-      <p:sp>
-        <p:nvSpPr>
-          <p:cNvPr id="2" name="Text 0"/>
+      <p:pic>
+        <p:nvPicPr>
+          <p:cNvPr id="2" name="Image 0" descr="/home/user/Training-/assets/logo.png">    </p:cNvPr>
+          <p:cNvPicPr>
+            <a:picLocks noChangeAspect="1"/>
+          </p:cNvPicPr>
+          <p:nvPr/>
+        </p:nvPicPr>
+        <p:blipFill>
+          <a:blip r:embed="rId1"/>
+          <a:stretch>
+            <a:fillRect/>
+          </a:stretch>
+        </p:blipFill>
+        <p:spPr>
+          <a:xfrm>
+            <a:off x="10765231" y="332912"/>
+            <a:ext cx="786384" cy="742353"/>
+          </a:xfrm>
+          <a:prstGeom prst="rect">
+            <a:avLst/>
+          </a:prstGeom>
+        </p:spPr>
+      </p:pic>
+      <p:sp>
+        <p:nvSpPr>
+          <p:cNvPr id="3" name="Text 0"/>
           <p:cNvSpPr/>
           <p:nvPr/>
         </p:nvSpPr>
@@ -3212,7 +3308,7 @@
             <a:r>
               <a:rPr lang="en-US" sz="2700" b="1" dirty="0">
                 <a:solidFill>
-                  <a:srgbClr val="0F2D52"/>
+                  <a:srgbClr val="093259"/>
                 </a:solidFill>
                 <a:latin typeface="Yu Gothic" pitchFamily="34" charset="0"/>
                 <a:ea typeface="Yu Gothic" pitchFamily="34" charset="-122"/>
@@ -3232,7 +3328,7 @@
             <a:r>
               <a:rPr lang="en-US" sz="1250" i="1" dirty="0">
                 <a:solidFill>
-                  <a:srgbClr val="17AF98"/>
+                  <a:srgbClr val="12B198"/>
                 </a:solidFill>
                 <a:latin typeface="Calibri" pitchFamily="34" charset="0"/>
                 <a:ea typeface="Calibri" pitchFamily="34" charset="-122"/>
@@ -3246,7 +3342,7 @@
       </p:sp>
       <p:sp>
         <p:nvSpPr>
-          <p:cNvPr id="3" name="Shape 1"/>
+          <p:cNvPr id="4" name="Shape 1"/>
           <p:cNvSpPr/>
           <p:nvPr/>
         </p:nvSpPr>
@@ -3268,7 +3364,7 @@
       </p:sp>
       <p:sp>
         <p:nvSpPr>
-          <p:cNvPr id="4" name="Shape 2"/>
+          <p:cNvPr id="5" name="Shape 2"/>
           <p:cNvSpPr/>
           <p:nvPr/>
         </p:nvSpPr>
@@ -3281,14 +3377,14 @@
             <a:avLst/>
           </a:prstGeom>
           <a:solidFill>
-            <a:srgbClr val="0F2D52"/>
+            <a:srgbClr val="093259"/>
           </a:solidFill>
           <a:ln/>
         </p:spPr>
       </p:sp>
       <p:sp>
         <p:nvSpPr>
-          <p:cNvPr id="5" name="Text 3"/>
+          <p:cNvPr id="6" name="Text 3"/>
           <p:cNvSpPr/>
           <p:nvPr/>
         </p:nvSpPr>
@@ -3327,7 +3423,7 @@
       </p:sp>
       <p:sp>
         <p:nvSpPr>
-          <p:cNvPr id="6" name="Text 4"/>
+          <p:cNvPr id="7" name="Text 4"/>
           <p:cNvSpPr/>
           <p:nvPr/>
         </p:nvSpPr>
@@ -3355,7 +3451,7 @@
             <a:r>
               <a:rPr lang="en-US" sz="1600" b="1" dirty="0">
                 <a:solidFill>
-                  <a:srgbClr val="0F2D52"/>
+                  <a:srgbClr val="093259"/>
                 </a:solidFill>
                 <a:latin typeface="Yu Gothic" pitchFamily="34" charset="0"/>
                 <a:ea typeface="Yu Gothic" pitchFamily="34" charset="-122"/>
@@ -3375,7 +3471,7 @@
             <a:r>
               <a:rPr lang="en-US" sz="1000" i="1" dirty="0">
                 <a:solidFill>
-                  <a:srgbClr val="17AF98"/>
+                  <a:srgbClr val="12B198"/>
                 </a:solidFill>
                 <a:latin typeface="Calibri" pitchFamily="34" charset="0"/>
                 <a:ea typeface="Calibri" pitchFamily="34" charset="-122"/>
@@ -3389,7 +3485,7 @@
       </p:sp>
       <p:sp>
         <p:nvSpPr>
-          <p:cNvPr id="7" name="Text 5"/>
+          <p:cNvPr id="8" name="Text 5"/>
           <p:cNvSpPr/>
           <p:nvPr/>
         </p:nvSpPr>
@@ -3423,7 +3519,7 @@
                 <a:ea typeface="Yu Gothic" pitchFamily="34" charset="-122"/>
                 <a:cs typeface="Yu Gothic" pitchFamily="34" charset="-120"/>
               </a:rPr>
-              <a:t>手が届かない距離を保つ（目安1.5〜2m）。</a:t>
+              <a:t>手が届かない距離を保ちます。目安は1.5から2メートルです。</a:t>
             </a:r>
             <a:endParaRPr lang="en-US" sz="1250" dirty="0"/>
           </a:p>
@@ -3435,43 +3531,23 @@
               <a:buNone/>
             </a:pPr>
             <a:r>
-              <a:rPr lang="en-US" sz="1250" dirty="0">
-                <a:solidFill>
-                  <a:srgbClr val="1B2733"/>
-                </a:solidFill>
-                <a:latin typeface="Yu Gothic" pitchFamily="34" charset="0"/>
-                <a:ea typeface="Yu Gothic" pitchFamily="34" charset="-122"/>
-                <a:cs typeface="Yu Gothic" pitchFamily="34" charset="-120"/>
-              </a:rPr>
-              <a:t>距離は安全であり、同時に相手への敬意でもある。</a:t>
+              <a:rPr lang="en-US" sz="950" i="1" dirty="0">
+                <a:solidFill>
+                  <a:srgbClr val="5F7183"/>
+                </a:solidFill>
+                <a:latin typeface="Calibri" pitchFamily="34" charset="0"/>
+                <a:ea typeface="Calibri" pitchFamily="34" charset="-122"/>
+                <a:cs typeface="Calibri" pitchFamily="34" charset="-120"/>
+              </a:rPr>
+              <a:t>Stay beyond arm's reach. About 1.5 to 2 metres.</a:t>
             </a:r>
             <a:endParaRPr lang="en-US" sz="1250" dirty="0"/>
           </a:p>
-          <a:p>
-            <a:pPr indent="0" marL="0">
-              <a:lnSpc>
-                <a:spcPct val="95000"/>
-              </a:lnSpc>
-              <a:buNone/>
-            </a:pPr>
-            <a:r>
-              <a:rPr lang="en-US" sz="950" i="1" dirty="0">
-                <a:solidFill>
-                  <a:srgbClr val="5F7183"/>
-                </a:solidFill>
-                <a:latin typeface="Calibri" pitchFamily="34" charset="0"/>
-                <a:ea typeface="Calibri" pitchFamily="34" charset="-122"/>
-                <a:cs typeface="Calibri" pitchFamily="34" charset="-120"/>
-              </a:rPr>
-              <a:t>Stay beyond arm's reach — roughly 1.5 to 2 metres. Distance is safety, and it also reads as respect.</a:t>
-            </a:r>
-            <a:endParaRPr lang="en-US" sz="1250" dirty="0"/>
-          </a:p>
-        </p:txBody>
-      </p:sp>
-      <p:sp>
-        <p:nvSpPr>
-          <p:cNvPr id="8" name="Shape 6"/>
+        </p:txBody>
+      </p:sp>
+      <p:sp>
+        <p:nvSpPr>
+          <p:cNvPr id="9" name="Shape 6"/>
           <p:cNvSpPr/>
           <p:nvPr/>
         </p:nvSpPr>
@@ -3493,7 +3569,7 @@
       </p:sp>
       <p:sp>
         <p:nvSpPr>
-          <p:cNvPr id="9" name="Shape 7"/>
+          <p:cNvPr id="10" name="Shape 7"/>
           <p:cNvSpPr/>
           <p:nvPr/>
         </p:nvSpPr>
@@ -3506,14 +3582,14 @@
             <a:avLst/>
           </a:prstGeom>
           <a:solidFill>
-            <a:srgbClr val="17AF98"/>
+            <a:srgbClr val="12B198"/>
           </a:solidFill>
           <a:ln/>
         </p:spPr>
       </p:sp>
       <p:sp>
         <p:nvSpPr>
-          <p:cNvPr id="10" name="Text 8"/>
+          <p:cNvPr id="11" name="Text 8"/>
           <p:cNvSpPr/>
           <p:nvPr/>
         </p:nvSpPr>
@@ -3552,7 +3628,7 @@
       </p:sp>
       <p:sp>
         <p:nvSpPr>
-          <p:cNvPr id="11" name="Text 9"/>
+          <p:cNvPr id="12" name="Text 9"/>
           <p:cNvSpPr/>
           <p:nvPr/>
         </p:nvSpPr>
@@ -3580,7 +3656,7 @@
             <a:r>
               <a:rPr lang="en-US" sz="1600" b="1" dirty="0">
                 <a:solidFill>
-                  <a:srgbClr val="0F2D52"/>
+                  <a:srgbClr val="093259"/>
                 </a:solidFill>
                 <a:latin typeface="Yu Gothic" pitchFamily="34" charset="0"/>
                 <a:ea typeface="Yu Gothic" pitchFamily="34" charset="-122"/>
@@ -3600,7 +3676,7 @@
             <a:r>
               <a:rPr lang="en-US" sz="1000" i="1" dirty="0">
                 <a:solidFill>
-                  <a:srgbClr val="17AF98"/>
+                  <a:srgbClr val="12B198"/>
                 </a:solidFill>
                 <a:latin typeface="Calibri" pitchFamily="34" charset="0"/>
                 <a:ea typeface="Calibri" pitchFamily="34" charset="-122"/>
@@ -3614,7 +3690,7 @@
       </p:sp>
       <p:sp>
         <p:nvSpPr>
-          <p:cNvPr id="12" name="Text 10"/>
+          <p:cNvPr id="13" name="Text 10"/>
           <p:cNvSpPr/>
           <p:nvPr/>
         </p:nvSpPr>
@@ -3648,7 +3724,7 @@
                 <a:ea typeface="Yu Gothic" pitchFamily="34" charset="-122"/>
                 <a:cs typeface="Yu Gothic" pitchFamily="34" charset="-120"/>
               </a:rPr>
-              <a:t>正対しない。半身で斜めに立つ。</a:t>
+              <a:t>正対しません。半身で立ちます。手は相手から見える位置に置き、腕を組みません。</a:t>
             </a:r>
             <a:endParaRPr lang="en-US" sz="1250" dirty="0"/>
           </a:p>
@@ -3660,43 +3736,23 @@
               <a:buNone/>
             </a:pPr>
             <a:r>
-              <a:rPr lang="en-US" sz="1250" dirty="0">
-                <a:solidFill>
-                  <a:srgbClr val="1B2733"/>
-                </a:solidFill>
-                <a:latin typeface="Yu Gothic" pitchFamily="34" charset="0"/>
-                <a:ea typeface="Yu Gothic" pitchFamily="34" charset="-122"/>
-                <a:cs typeface="Yu Gothic" pitchFamily="34" charset="-120"/>
-              </a:rPr>
-              <a:t>手は相手から見える位置に。腕を組まない。</a:t>
+              <a:rPr lang="en-US" sz="950" i="1" dirty="0">
+                <a:solidFill>
+                  <a:srgbClr val="5F7183"/>
+                </a:solidFill>
+                <a:latin typeface="Calibri" pitchFamily="34" charset="0"/>
+                <a:ea typeface="Calibri" pitchFamily="34" charset="-122"/>
+                <a:cs typeface="Calibri" pitchFamily="34" charset="-120"/>
+              </a:rPr>
+              <a:t>Do not stand square on. Stand at an angle. Keep your hands visible. Do not fold your arms.</a:t>
             </a:r>
             <a:endParaRPr lang="en-US" sz="1250" dirty="0"/>
           </a:p>
-          <a:p>
-            <a:pPr indent="0" marL="0">
-              <a:lnSpc>
-                <a:spcPct val="95000"/>
-              </a:lnSpc>
-              <a:buNone/>
-            </a:pPr>
-            <a:r>
-              <a:rPr lang="en-US" sz="950" i="1" dirty="0">
-                <a:solidFill>
-                  <a:srgbClr val="5F7183"/>
-                </a:solidFill>
-                <a:latin typeface="Calibri" pitchFamily="34" charset="0"/>
-                <a:ea typeface="Calibri" pitchFamily="34" charset="-122"/>
-                <a:cs typeface="Calibri" pitchFamily="34" charset="-120"/>
-              </a:rPr>
-              <a:t>Do not square up — stand at an angle. Keep your hands visible. Never fold your arms.</a:t>
-            </a:r>
-            <a:endParaRPr lang="en-US" sz="1250" dirty="0"/>
-          </a:p>
-        </p:txBody>
-      </p:sp>
-      <p:sp>
-        <p:nvSpPr>
-          <p:cNvPr id="13" name="Shape 11"/>
+        </p:txBody>
+      </p:sp>
+      <p:sp>
+        <p:nvSpPr>
+          <p:cNvPr id="14" name="Shape 11"/>
           <p:cNvSpPr/>
           <p:nvPr/>
         </p:nvSpPr>
@@ -3718,7 +3774,7 @@
       </p:sp>
       <p:sp>
         <p:nvSpPr>
-          <p:cNvPr id="14" name="Shape 12"/>
+          <p:cNvPr id="15" name="Shape 12"/>
           <p:cNvSpPr/>
           <p:nvPr/>
         </p:nvSpPr>
@@ -3731,14 +3787,14 @@
             <a:avLst/>
           </a:prstGeom>
           <a:solidFill>
-            <a:srgbClr val="0F2D52"/>
+            <a:srgbClr val="093259"/>
           </a:solidFill>
           <a:ln/>
         </p:spPr>
       </p:sp>
       <p:sp>
         <p:nvSpPr>
-          <p:cNvPr id="15" name="Text 13"/>
+          <p:cNvPr id="16" name="Text 13"/>
           <p:cNvSpPr/>
           <p:nvPr/>
         </p:nvSpPr>
@@ -3777,7 +3833,7 @@
       </p:sp>
       <p:sp>
         <p:nvSpPr>
-          <p:cNvPr id="16" name="Text 14"/>
+          <p:cNvPr id="17" name="Text 14"/>
           <p:cNvSpPr/>
           <p:nvPr/>
         </p:nvSpPr>
@@ -3805,7 +3861,7 @@
             <a:r>
               <a:rPr lang="en-US" sz="1600" b="1" dirty="0">
                 <a:solidFill>
-                  <a:srgbClr val="0F2D52"/>
+                  <a:srgbClr val="093259"/>
                 </a:solidFill>
                 <a:latin typeface="Yu Gothic" pitchFamily="34" charset="0"/>
                 <a:ea typeface="Yu Gothic" pitchFamily="34" charset="-122"/>
@@ -3825,7 +3881,7 @@
             <a:r>
               <a:rPr lang="en-US" sz="1000" i="1" dirty="0">
                 <a:solidFill>
-                  <a:srgbClr val="17AF98"/>
+                  <a:srgbClr val="12B198"/>
                 </a:solidFill>
                 <a:latin typeface="Calibri" pitchFamily="34" charset="0"/>
                 <a:ea typeface="Calibri" pitchFamily="34" charset="-122"/>
@@ -3839,7 +3895,7 @@
       </p:sp>
       <p:sp>
         <p:nvSpPr>
-          <p:cNvPr id="17" name="Text 15"/>
+          <p:cNvPr id="18" name="Text 15"/>
           <p:cNvSpPr/>
           <p:nvPr/>
         </p:nvSpPr>
@@ -3873,7 +3929,7 @@
                 <a:ea typeface="Yu Gothic" pitchFamily="34" charset="-122"/>
                 <a:cs typeface="Yu Gothic" pitchFamily="34" charset="-120"/>
               </a:rPr>
-              <a:t>トーン・速度・音量を「下げる」。</a:t>
+              <a:t>トーン、速度、音量を下げます。相手より大きな声を出しません。</a:t>
             </a:r>
             <a:endParaRPr lang="en-US" sz="1250" dirty="0"/>
           </a:p>
@@ -3885,73 +3941,53 @@
               <a:buNone/>
             </a:pPr>
             <a:r>
-              <a:rPr lang="en-US" sz="1250" dirty="0">
-                <a:solidFill>
-                  <a:srgbClr val="1B2733"/>
+              <a:rPr lang="en-US" sz="950" i="1" dirty="0">
+                <a:solidFill>
+                  <a:srgbClr val="5F7183"/>
+                </a:solidFill>
+                <a:latin typeface="Calibri" pitchFamily="34" charset="0"/>
+                <a:ea typeface="Calibri" pitchFamily="34" charset="-122"/>
+                <a:cs typeface="Calibri" pitchFamily="34" charset="-120"/>
+              </a:rPr>
+              <a:t>Lower your tone, speed and volume. Do not speak louder than the other person.</a:t>
+            </a:r>
+            <a:endParaRPr lang="en-US" sz="1250" dirty="0"/>
+          </a:p>
+        </p:txBody>
+      </p:sp>
+      <p:sp>
+        <p:nvSpPr>
+          <p:cNvPr id="19" name="Text 16"/>
+          <p:cNvSpPr/>
+          <p:nvPr/>
+        </p:nvSpPr>
+        <p:spPr>
+          <a:xfrm>
+            <a:off x="640080" y="6382512"/>
+            <a:ext cx="8778240" cy="292608"/>
+          </a:xfrm>
+          <a:prstGeom prst="rect">
+            <a:avLst/>
+          </a:prstGeom>
+          <a:noFill/>
+          <a:ln/>
+        </p:spPr>
+        <p:txBody>
+          <a:bodyPr wrap="square" lIns="0" tIns="0" rIns="0" bIns="0" rtlCol="0" anchor="ctr"/>
+          <a:lstStyle/>
+          <a:p>
+            <a:pPr indent="0" marL="0">
+              <a:buNone/>
+            </a:pPr>
+            <a:r>
+              <a:rPr lang="en-US" sz="900" dirty="0">
+                <a:solidFill>
+                  <a:srgbClr val="5F7183"/>
                 </a:solidFill>
                 <a:latin typeface="Yu Gothic" pitchFamily="34" charset="0"/>
                 <a:ea typeface="Yu Gothic" pitchFamily="34" charset="-122"/>
                 <a:cs typeface="Yu Gothic" pitchFamily="34" charset="-120"/>
               </a:rPr>
-              <a:t>相手より大きな声を出さない。沈黙を怖がらない。</a:t>
-            </a:r>
-            <a:endParaRPr lang="en-US" sz="1250" dirty="0"/>
-          </a:p>
-          <a:p>
-            <a:pPr indent="0" marL="0">
-              <a:lnSpc>
-                <a:spcPct val="95000"/>
-              </a:lnSpc>
-              <a:buNone/>
-            </a:pPr>
-            <a:r>
-              <a:rPr lang="en-US" sz="950" i="1" dirty="0">
-                <a:solidFill>
-                  <a:srgbClr val="5F7183"/>
-                </a:solidFill>
-                <a:latin typeface="Calibri" pitchFamily="34" charset="0"/>
-                <a:ea typeface="Calibri" pitchFamily="34" charset="-122"/>
-                <a:cs typeface="Calibri" pitchFamily="34" charset="-120"/>
-              </a:rPr>
-              <a:t>Lower your tone, pace and volume. Never out-shout them. Do not be afraid of silence.</a:t>
-            </a:r>
-            <a:endParaRPr lang="en-US" sz="1250" dirty="0"/>
-          </a:p>
-        </p:txBody>
-      </p:sp>
-      <p:sp>
-        <p:nvSpPr>
-          <p:cNvPr id="18" name="Text 16"/>
-          <p:cNvSpPr/>
-          <p:nvPr/>
-        </p:nvSpPr>
-        <p:spPr>
-          <a:xfrm>
-            <a:off x="640080" y="6382512"/>
-            <a:ext cx="8778240" cy="292608"/>
-          </a:xfrm>
-          <a:prstGeom prst="rect">
-            <a:avLst/>
-          </a:prstGeom>
-          <a:noFill/>
-          <a:ln/>
-        </p:spPr>
-        <p:txBody>
-          <a:bodyPr wrap="square" lIns="0" tIns="0" rIns="0" bIns="0" rtlCol="0" anchor="ctr"/>
-          <a:lstStyle/>
-          <a:p>
-            <a:pPr indent="0" marL="0">
-              <a:buNone/>
-            </a:pPr>
-            <a:r>
-              <a:rPr lang="en-US" sz="900" dirty="0">
-                <a:solidFill>
-                  <a:srgbClr val="5F7183"/>
-                </a:solidFill>
-                <a:latin typeface="Yu Gothic" pitchFamily="34" charset="0"/>
-                <a:ea typeface="Yu Gothic" pitchFamily="34" charset="-122"/>
-                <a:cs typeface="Yu Gothic" pitchFamily="34" charset="-120"/>
-              </a:rPr>
               <a:t>第5時限｜業務別教育2 その他当該警備業務を適正に実施するため必要な知識及び技能  </a:t>
             </a:r>
             <a:pPr indent="0" marL="0">
@@ -3974,7 +4010,7 @@
       </p:sp>
       <p:sp>
         <p:nvSpPr>
-          <p:cNvPr id="19" name="Text 17"/>
+          <p:cNvPr id="20" name="Text 17"/>
           <p:cNvSpPr/>
           <p:nvPr/>
         </p:nvSpPr>
@@ -4043,9 +4079,33 @@
           <a:chExt cx="0" cy="0"/>
         </a:xfrm>
       </p:grpSpPr>
-      <p:sp>
-        <p:nvSpPr>
-          <p:cNvPr id="2" name="Text 0"/>
+      <p:pic>
+        <p:nvPicPr>
+          <p:cNvPr id="2" name="Image 0" descr="/home/user/Training-/assets/logo.png">    </p:cNvPr>
+          <p:cNvPicPr>
+            <a:picLocks noChangeAspect="1"/>
+          </p:cNvPicPr>
+          <p:nvPr/>
+        </p:nvPicPr>
+        <p:blipFill>
+          <a:blip r:embed="rId1"/>
+          <a:stretch>
+            <a:fillRect/>
+          </a:stretch>
+        </p:blipFill>
+        <p:spPr>
+          <a:xfrm>
+            <a:off x="10765231" y="332912"/>
+            <a:ext cx="786384" cy="742353"/>
+          </a:xfrm>
+          <a:prstGeom prst="rect">
+            <a:avLst/>
+          </a:prstGeom>
+        </p:spPr>
+      </p:pic>
+      <p:sp>
+        <p:nvSpPr>
+          <p:cNvPr id="3" name="Text 0"/>
           <p:cNvSpPr/>
           <p:nvPr/>
         </p:nvSpPr>
@@ -4073,13 +4133,13 @@
             <a:r>
               <a:rPr lang="en-US" sz="2700" b="1" dirty="0">
                 <a:solidFill>
-                  <a:srgbClr val="0F2D52"/>
+                  <a:srgbClr val="093259"/>
                 </a:solidFill>
                 <a:latin typeface="Yu Gothic" pitchFamily="34" charset="0"/>
                 <a:ea typeface="Yu Gothic" pitchFamily="34" charset="-122"/>
                 <a:cs typeface="Yu Gothic" pitchFamily="34" charset="-120"/>
               </a:rPr>
-              <a:t>傾聴と、逃げ道</a:t>
+              <a:t>聞き方と、選択肢の示し方</a:t>
             </a:r>
             <a:endParaRPr lang="en-US" sz="2700" dirty="0"/>
           </a:p>
@@ -4093,13 +4153,13 @@
             <a:r>
               <a:rPr lang="en-US" sz="1250" i="1" dirty="0">
                 <a:solidFill>
-                  <a:srgbClr val="17AF98"/>
-                </a:solidFill>
-                <a:latin typeface="Calibri" pitchFamily="34" charset="0"/>
-                <a:ea typeface="Calibri" pitchFamily="34" charset="-122"/>
-                <a:cs typeface="Calibri" pitchFamily="34" charset="-120"/>
-              </a:rPr>
-              <a:t>Listening, and Leaving a Way Out</a:t>
+                  <a:srgbClr val="12B198"/>
+                </a:solidFill>
+                <a:latin typeface="Calibri" pitchFamily="34" charset="0"/>
+                <a:ea typeface="Calibri" pitchFamily="34" charset="-122"/>
+                <a:cs typeface="Calibri" pitchFamily="34" charset="-120"/>
+              </a:rPr>
+              <a:t>How to Listen, and How to Offer Choices</a:t>
             </a:r>
             <a:endParaRPr lang="en-US" sz="2700" dirty="0"/>
           </a:p>
@@ -4107,7 +4167,7 @@
       </p:sp>
       <p:sp>
         <p:nvSpPr>
-          <p:cNvPr id="3" name="Shape 1"/>
+          <p:cNvPr id="4" name="Shape 1"/>
           <p:cNvSpPr/>
           <p:nvPr/>
         </p:nvSpPr>
@@ -4129,7 +4189,7 @@
       </p:sp>
       <p:sp>
         <p:nvSpPr>
-          <p:cNvPr id="4" name="Shape 2"/>
+          <p:cNvPr id="5" name="Shape 2"/>
           <p:cNvSpPr/>
           <p:nvPr/>
         </p:nvSpPr>
@@ -4142,14 +4202,14 @@
             <a:avLst/>
           </a:prstGeom>
           <a:solidFill>
-            <a:srgbClr val="17AF98"/>
+            <a:srgbClr val="12B198"/>
           </a:solidFill>
           <a:ln/>
         </p:spPr>
       </p:sp>
       <p:sp>
         <p:nvSpPr>
-          <p:cNvPr id="5" name="Text 3"/>
+          <p:cNvPr id="6" name="Text 3"/>
           <p:cNvSpPr/>
           <p:nvPr/>
         </p:nvSpPr>
@@ -4188,7 +4248,7 @@
       </p:sp>
       <p:sp>
         <p:nvSpPr>
-          <p:cNvPr id="6" name="Text 4"/>
+          <p:cNvPr id="7" name="Text 4"/>
           <p:cNvSpPr/>
           <p:nvPr/>
         </p:nvSpPr>
@@ -4222,7 +4282,7 @@
                 <a:ea typeface="Yu Gothic" pitchFamily="34" charset="-122"/>
                 <a:cs typeface="Yu Gothic" pitchFamily="34" charset="-120"/>
               </a:rPr>
-              <a:t>最後まで聞く。遮らない。相手は「聞かれていない」ことに怒っていることが多い。</a:t>
+              <a:t>遮らずに最後まで聞きます。</a:t>
             </a:r>
             <a:endParaRPr lang="en-US" sz="1450" dirty="0"/>
           </a:p>
@@ -4242,7 +4302,7 @@
                 <a:ea typeface="Calibri" pitchFamily="34" charset="-122"/>
                 <a:cs typeface="Calibri" pitchFamily="34" charset="-120"/>
               </a:rPr>
-              <a:t>Listen to the end without interrupting. Often the anger is about not being heard.</a:t>
+              <a:t>Listen to the end. Do not interrupt.</a:t>
             </a:r>
             <a:endParaRPr lang="en-US" sz="1450" dirty="0"/>
           </a:p>
@@ -4250,7 +4310,7 @@
       </p:sp>
       <p:sp>
         <p:nvSpPr>
-          <p:cNvPr id="7" name="Shape 5"/>
+          <p:cNvPr id="8" name="Shape 5"/>
           <p:cNvSpPr/>
           <p:nvPr/>
         </p:nvSpPr>
@@ -4272,7 +4332,7 @@
       </p:sp>
       <p:sp>
         <p:nvSpPr>
-          <p:cNvPr id="8" name="Shape 6"/>
+          <p:cNvPr id="9" name="Shape 6"/>
           <p:cNvSpPr/>
           <p:nvPr/>
         </p:nvSpPr>
@@ -4285,14 +4345,14 @@
             <a:avLst/>
           </a:prstGeom>
           <a:solidFill>
-            <a:srgbClr val="17AF98"/>
+            <a:srgbClr val="12B198"/>
           </a:solidFill>
           <a:ln/>
         </p:spPr>
       </p:sp>
       <p:sp>
         <p:nvSpPr>
-          <p:cNvPr id="9" name="Text 7"/>
+          <p:cNvPr id="10" name="Text 7"/>
           <p:cNvSpPr/>
           <p:nvPr/>
         </p:nvSpPr>
@@ -4331,7 +4391,7 @@
       </p:sp>
       <p:sp>
         <p:nvSpPr>
-          <p:cNvPr id="10" name="Text 8"/>
+          <p:cNvPr id="11" name="Text 8"/>
           <p:cNvSpPr/>
           <p:nvPr/>
         </p:nvSpPr>
@@ -4365,7 +4425,7 @@
                 <a:ea typeface="Yu Gothic" pitchFamily="34" charset="-122"/>
                 <a:cs typeface="Yu Gothic" pitchFamily="34" charset="-120"/>
               </a:rPr>
-              <a:t>要約して返す ―「◯◯ということですね」。承認は同意ではない。</a:t>
+              <a:t>内容を要約して返します。「◯◯ということですね」。承認は同意ではありません。</a:t>
             </a:r>
             <a:endParaRPr lang="en-US" sz="1450" dirty="0"/>
           </a:p>
@@ -4385,7 +4445,7 @@
                 <a:ea typeface="Calibri" pitchFamily="34" charset="-122"/>
                 <a:cs typeface="Calibri" pitchFamily="34" charset="-120"/>
               </a:rPr>
-              <a:t>Reflect it back: "So the issue is X." Acknowledging is not agreeing.</a:t>
+              <a:t>Summarise back: "So the issue is X." Acknowledging is not agreeing.</a:t>
             </a:r>
             <a:endParaRPr lang="en-US" sz="1450" dirty="0"/>
           </a:p>
@@ -4393,7 +4453,7 @@
       </p:sp>
       <p:sp>
         <p:nvSpPr>
-          <p:cNvPr id="11" name="Shape 9"/>
+          <p:cNvPr id="12" name="Shape 9"/>
           <p:cNvSpPr/>
           <p:nvPr/>
         </p:nvSpPr>
@@ -4415,7 +4475,7 @@
       </p:sp>
       <p:sp>
         <p:nvSpPr>
-          <p:cNvPr id="12" name="Shape 10"/>
+          <p:cNvPr id="13" name="Shape 10"/>
           <p:cNvSpPr/>
           <p:nvPr/>
         </p:nvSpPr>
@@ -4428,14 +4488,14 @@
             <a:avLst/>
           </a:prstGeom>
           <a:solidFill>
-            <a:srgbClr val="17AF98"/>
+            <a:srgbClr val="12B198"/>
           </a:solidFill>
           <a:ln/>
         </p:spPr>
       </p:sp>
       <p:sp>
         <p:nvSpPr>
-          <p:cNvPr id="13" name="Text 11"/>
+          <p:cNvPr id="14" name="Text 11"/>
           <p:cNvSpPr/>
           <p:nvPr/>
         </p:nvSpPr>
@@ -4474,7 +4534,7 @@
       </p:sp>
       <p:sp>
         <p:nvSpPr>
-          <p:cNvPr id="14" name="Text 12"/>
+          <p:cNvPr id="15" name="Text 12"/>
           <p:cNvSpPr/>
           <p:nvPr/>
         </p:nvSpPr>
@@ -4508,7 +4568,7 @@
                 <a:ea typeface="Yu Gothic" pitchFamily="34" charset="-122"/>
                 <a:cs typeface="Yu Gothic" pitchFamily="34" charset="-120"/>
               </a:rPr>
-              <a:t>逃げ道（面子）を残す。引き下がっても恥をかかない形を用意する。</a:t>
+              <a:t>引き下がれる形を残します。相手を追い詰めません。</a:t>
             </a:r>
             <a:endParaRPr lang="en-US" sz="1450" dirty="0"/>
           </a:p>
@@ -4528,7 +4588,7 @@
                 <a:ea typeface="Calibri" pitchFamily="34" charset="-122"/>
                 <a:cs typeface="Calibri" pitchFamily="34" charset="-120"/>
               </a:rPr>
-              <a:t>Leave a face-saving exit — a way to back down without humiliation.</a:t>
+              <a:t>Leave a way for the person to step back. Do not corner them.</a:t>
             </a:r>
             <a:endParaRPr lang="en-US" sz="1450" dirty="0"/>
           </a:p>
@@ -4536,7 +4596,7 @@
       </p:sp>
       <p:sp>
         <p:nvSpPr>
-          <p:cNvPr id="15" name="Shape 13"/>
+          <p:cNvPr id="16" name="Shape 13"/>
           <p:cNvSpPr/>
           <p:nvPr/>
         </p:nvSpPr>
@@ -4558,7 +4618,7 @@
       </p:sp>
       <p:sp>
         <p:nvSpPr>
-          <p:cNvPr id="16" name="Shape 14"/>
+          <p:cNvPr id="17" name="Shape 14"/>
           <p:cNvSpPr/>
           <p:nvPr/>
         </p:nvSpPr>
@@ -4571,14 +4631,14 @@
             <a:avLst/>
           </a:prstGeom>
           <a:solidFill>
-            <a:srgbClr val="17AF98"/>
+            <a:srgbClr val="12B198"/>
           </a:solidFill>
           <a:ln/>
         </p:spPr>
       </p:sp>
       <p:sp>
         <p:nvSpPr>
-          <p:cNvPr id="17" name="Text 15"/>
+          <p:cNvPr id="18" name="Text 15"/>
           <p:cNvSpPr/>
           <p:nvPr/>
         </p:nvSpPr>
@@ -4617,7 +4677,7 @@
       </p:sp>
       <p:sp>
         <p:nvSpPr>
-          <p:cNvPr id="18" name="Text 16"/>
+          <p:cNvPr id="19" name="Text 16"/>
           <p:cNvSpPr/>
           <p:nvPr/>
         </p:nvSpPr>
@@ -4651,7 +4711,7 @@
                 <a:ea typeface="Yu Gothic" pitchFamily="34" charset="-122"/>
                 <a:cs typeface="Yu Gothic" pitchFamily="34" charset="-120"/>
               </a:rPr>
-              <a:t>選択肢を2つ示す。選べる人は、戦う必要がなくなる。</a:t>
+              <a:t>選択肢を2つ示します。</a:t>
             </a:r>
             <a:endParaRPr lang="en-US" sz="1450" dirty="0"/>
           </a:p>
@@ -4671,7 +4731,7 @@
                 <a:ea typeface="Calibri" pitchFamily="34" charset="-122"/>
                 <a:cs typeface="Calibri" pitchFamily="34" charset="-120"/>
               </a:rPr>
-              <a:t>Offer two options. A person with a choice no longer needs to fight.</a:t>
+              <a:t>Offer two options.</a:t>
             </a:r>
             <a:endParaRPr lang="en-US" sz="1450" dirty="0"/>
           </a:p>
@@ -4679,7 +4739,7 @@
       </p:sp>
       <p:sp>
         <p:nvSpPr>
-          <p:cNvPr id="19" name="Shape 17"/>
+          <p:cNvPr id="20" name="Shape 17"/>
           <p:cNvSpPr/>
           <p:nvPr/>
         </p:nvSpPr>
@@ -4701,7 +4761,7 @@
       </p:sp>
       <p:sp>
         <p:nvSpPr>
-          <p:cNvPr id="20" name="Shape 18"/>
+          <p:cNvPr id="21" name="Shape 18"/>
           <p:cNvSpPr/>
           <p:nvPr/>
         </p:nvSpPr>
@@ -4714,14 +4774,14 @@
             <a:avLst/>
           </a:prstGeom>
           <a:solidFill>
-            <a:srgbClr val="17AF98"/>
+            <a:srgbClr val="12B198"/>
           </a:solidFill>
           <a:ln/>
         </p:spPr>
       </p:sp>
       <p:sp>
         <p:nvSpPr>
-          <p:cNvPr id="21" name="Text 19"/>
+          <p:cNvPr id="22" name="Text 19"/>
           <p:cNvSpPr/>
           <p:nvPr/>
         </p:nvSpPr>
@@ -4760,7 +4820,7 @@
       </p:sp>
       <p:sp>
         <p:nvSpPr>
-          <p:cNvPr id="22" name="Text 20"/>
+          <p:cNvPr id="23" name="Text 20"/>
           <p:cNvSpPr/>
           <p:nvPr/>
         </p:nvSpPr>
@@ -4794,7 +4854,7 @@
                 <a:ea typeface="Yu Gothic" pitchFamily="34" charset="-122"/>
                 <a:cs typeface="Yu Gothic" pitchFamily="34" charset="-120"/>
               </a:rPr>
-              <a:t>時間を味方にする。急がない。時間はこちらの武器。</a:t>
+              <a:t>急ぎません。時間をかけてかまいません。</a:t>
             </a:r>
             <a:endParaRPr lang="en-US" sz="1300" dirty="0"/>
           </a:p>
@@ -4814,7 +4874,7 @@
                 <a:ea typeface="Calibri" pitchFamily="34" charset="-122"/>
                 <a:cs typeface="Calibri" pitchFamily="34" charset="-120"/>
               </a:rPr>
-              <a:t>Let time work for you. Do not rush — time is your tactic.</a:t>
+              <a:t>Do not rush. You may take time.</a:t>
             </a:r>
             <a:endParaRPr lang="en-US" sz="1300" dirty="0"/>
           </a:p>
@@ -4822,7 +4882,7 @@
       </p:sp>
       <p:sp>
         <p:nvSpPr>
-          <p:cNvPr id="23" name="Text 21"/>
+          <p:cNvPr id="24" name="Text 21"/>
           <p:cNvSpPr/>
           <p:nvPr/>
         </p:nvSpPr>
@@ -4875,7 +4935,7 @@
       </p:sp>
       <p:sp>
         <p:nvSpPr>
-          <p:cNvPr id="24" name="Text 22"/>
+          <p:cNvPr id="25" name="Text 22"/>
           <p:cNvSpPr/>
           <p:nvPr/>
         </p:nvSpPr>
@@ -4944,9 +5004,33 @@
           <a:chExt cx="0" cy="0"/>
         </a:xfrm>
       </p:grpSpPr>
-      <p:sp>
-        <p:nvSpPr>
-          <p:cNvPr id="2" name="Text 0"/>
+      <p:pic>
+        <p:nvPicPr>
+          <p:cNvPr id="2" name="Image 0" descr="/home/user/Training-/assets/logo.png">    </p:cNvPr>
+          <p:cNvPicPr>
+            <a:picLocks noChangeAspect="1"/>
+          </p:cNvPicPr>
+          <p:nvPr/>
+        </p:nvPicPr>
+        <p:blipFill>
+          <a:blip r:embed="rId1"/>
+          <a:stretch>
+            <a:fillRect/>
+          </a:stretch>
+        </p:blipFill>
+        <p:spPr>
+          <a:xfrm>
+            <a:off x="10765231" y="332912"/>
+            <a:ext cx="786384" cy="742353"/>
+          </a:xfrm>
+          <a:prstGeom prst="rect">
+            <a:avLst/>
+          </a:prstGeom>
+        </p:spPr>
+      </p:pic>
+      <p:sp>
+        <p:nvSpPr>
+          <p:cNvPr id="3" name="Text 0"/>
           <p:cNvSpPr/>
           <p:nvPr/>
         </p:nvSpPr>
@@ -4974,13 +5058,13 @@
             <a:r>
               <a:rPr lang="en-US" sz="2700" b="1" dirty="0">
                 <a:solidFill>
-                  <a:srgbClr val="0F2D52"/>
+                  <a:srgbClr val="093259"/>
                 </a:solidFill>
                 <a:latin typeface="Yu Gothic" pitchFamily="34" charset="0"/>
                 <a:ea typeface="Yu Gothic" pitchFamily="34" charset="-122"/>
                 <a:cs typeface="Yu Gothic" pitchFamily="34" charset="-120"/>
               </a:rPr>
-              <a:t>やってはいけない ― 緊張を上げる行動</a:t>
+              <a:t>やってはいけないこと</a:t>
             </a:r>
             <a:endParaRPr lang="en-US" sz="2700" dirty="0"/>
           </a:p>
@@ -4994,13 +5078,13 @@
             <a:r>
               <a:rPr lang="en-US" sz="1250" i="1" dirty="0">
                 <a:solidFill>
-                  <a:srgbClr val="17AF98"/>
-                </a:solidFill>
-                <a:latin typeface="Calibri" pitchFamily="34" charset="0"/>
-                <a:ea typeface="Calibri" pitchFamily="34" charset="-122"/>
-                <a:cs typeface="Calibri" pitchFamily="34" charset="-120"/>
-              </a:rPr>
-              <a:t>What Not To Do — behaviours that raise the temperature</a:t>
+                  <a:srgbClr val="12B198"/>
+                </a:solidFill>
+                <a:latin typeface="Calibri" pitchFamily="34" charset="0"/>
+                <a:ea typeface="Calibri" pitchFamily="34" charset="-122"/>
+                <a:cs typeface="Calibri" pitchFamily="34" charset="-120"/>
+              </a:rPr>
+              <a:t>What Not to Do</a:t>
             </a:r>
             <a:endParaRPr lang="en-US" sz="2700" dirty="0"/>
           </a:p>
@@ -5008,7 +5092,7 @@
       </p:sp>
       <p:sp>
         <p:nvSpPr>
-          <p:cNvPr id="3" name="Text 1"/>
+          <p:cNvPr id="4" name="Text 1"/>
           <p:cNvSpPr/>
           <p:nvPr/>
         </p:nvSpPr>
@@ -5036,13 +5120,13 @@
             <a:r>
               <a:rPr lang="en-US" sz="1300" dirty="0">
                 <a:solidFill>
-                  <a:srgbClr val="0F2D52"/>
+                  <a:srgbClr val="093259"/>
                 </a:solidFill>
                 <a:latin typeface="Yu Gothic" pitchFamily="34" charset="0"/>
                 <a:ea typeface="Yu Gothic" pitchFamily="34" charset="-122"/>
                 <a:cs typeface="Yu Gothic" pitchFamily="34" charset="-120"/>
               </a:rPr>
-              <a:t>いずれも共通して、相手の面子を潰します。</a:t>
+              <a:t>いずれも相手の立場を否定する行為で、緊張を高めます。</a:t>
             </a:r>
             <a:endParaRPr lang="en-US" sz="1300" dirty="0"/>
           </a:p>
@@ -5062,7 +5146,7 @@
                 <a:ea typeface="Calibri" pitchFamily="34" charset="-122"/>
                 <a:cs typeface="Calibri" pitchFamily="34" charset="-120"/>
               </a:rPr>
-              <a:t>What these all share: they take away the other person's dignity.</a:t>
+              <a:t>Each of these denies the other person's position and raises tension.</a:t>
             </a:r>
             <a:endParaRPr lang="en-US" sz="1300" dirty="0"/>
           </a:p>
@@ -5070,7 +5154,7 @@
       </p:sp>
       <p:sp>
         <p:nvSpPr>
-          <p:cNvPr id="4" name="Shape 2"/>
+          <p:cNvPr id="5" name="Shape 2"/>
           <p:cNvSpPr/>
           <p:nvPr/>
         </p:nvSpPr>
@@ -5092,7 +5176,7 @@
       </p:sp>
       <p:sp>
         <p:nvSpPr>
-          <p:cNvPr id="5" name="Shape 3"/>
+          <p:cNvPr id="6" name="Shape 3"/>
           <p:cNvSpPr/>
           <p:nvPr/>
         </p:nvSpPr>
@@ -5105,14 +5189,14 @@
             <a:avLst/>
           </a:prstGeom>
           <a:solidFill>
-            <a:srgbClr val="0F2D52"/>
+            <a:srgbClr val="093259"/>
           </a:solidFill>
           <a:ln/>
         </p:spPr>
       </p:sp>
       <p:sp>
         <p:nvSpPr>
-          <p:cNvPr id="6" name="Text 4"/>
+          <p:cNvPr id="7" name="Text 4"/>
           <p:cNvSpPr/>
           <p:nvPr/>
         </p:nvSpPr>
@@ -5151,7 +5235,7 @@
       </p:sp>
       <p:sp>
         <p:nvSpPr>
-          <p:cNvPr id="7" name="Text 5"/>
+          <p:cNvPr id="8" name="Text 5"/>
           <p:cNvSpPr/>
           <p:nvPr/>
         </p:nvSpPr>
@@ -5185,7 +5269,7 @@
                 <a:ea typeface="Yu Gothic" pitchFamily="34" charset="-122"/>
                 <a:cs typeface="Yu Gothic" pitchFamily="34" charset="-120"/>
               </a:rPr>
-              <a:t>命令口調 ―「下がってください」を繰り返す</a:t>
+              <a:t>命令口調。「下がってください」を繰り返す。</a:t>
             </a:r>
             <a:endParaRPr lang="en-US" sz="1150" dirty="0"/>
           </a:p>
@@ -5205,7 +5289,7 @@
                 <a:ea typeface="Calibri" pitchFamily="34" charset="-122"/>
                 <a:cs typeface="Calibri" pitchFamily="34" charset="-120"/>
               </a:rPr>
-              <a:t>Commanding tone — repeating "step back"</a:t>
+              <a:t>A commanding tone. Repeating "step back".</a:t>
             </a:r>
             <a:endParaRPr lang="en-US" sz="1150" dirty="0"/>
           </a:p>
@@ -5213,7 +5297,7 @@
       </p:sp>
       <p:sp>
         <p:nvSpPr>
-          <p:cNvPr id="8" name="Shape 6"/>
+          <p:cNvPr id="9" name="Shape 6"/>
           <p:cNvSpPr/>
           <p:nvPr/>
         </p:nvSpPr>
@@ -5235,7 +5319,7 @@
       </p:sp>
       <p:sp>
         <p:nvSpPr>
-          <p:cNvPr id="9" name="Shape 7"/>
+          <p:cNvPr id="10" name="Shape 7"/>
           <p:cNvSpPr/>
           <p:nvPr/>
         </p:nvSpPr>
@@ -5248,14 +5332,14 @@
             <a:avLst/>
           </a:prstGeom>
           <a:solidFill>
-            <a:srgbClr val="0F2D52"/>
+            <a:srgbClr val="093259"/>
           </a:solidFill>
           <a:ln/>
         </p:spPr>
       </p:sp>
       <p:sp>
         <p:nvSpPr>
-          <p:cNvPr id="10" name="Text 8"/>
+          <p:cNvPr id="11" name="Text 8"/>
           <p:cNvSpPr/>
           <p:nvPr/>
         </p:nvSpPr>
@@ -5294,7 +5378,7 @@
       </p:sp>
       <p:sp>
         <p:nvSpPr>
-          <p:cNvPr id="11" name="Text 9"/>
+          <p:cNvPr id="12" name="Text 9"/>
           <p:cNvSpPr/>
           <p:nvPr/>
         </p:nvSpPr>
@@ -5328,7 +5412,7 @@
                 <a:ea typeface="Yu Gothic" pitchFamily="34" charset="-122"/>
                 <a:cs typeface="Yu Gothic" pitchFamily="34" charset="-120"/>
               </a:rPr>
-              <a:t>指差し・腕組み・ため息・薄笑い</a:t>
+              <a:t>指差し、腕組み、ため息。</a:t>
             </a:r>
             <a:endParaRPr lang="en-US" sz="1150" dirty="0"/>
           </a:p>
@@ -5348,7 +5432,7 @@
                 <a:ea typeface="Calibri" pitchFamily="34" charset="-122"/>
                 <a:cs typeface="Calibri" pitchFamily="34" charset="-120"/>
               </a:rPr>
-              <a:t>Pointing, folded arms, sighing, smirking</a:t>
+              <a:t>Pointing, folded arms, sighing.</a:t>
             </a:r>
             <a:endParaRPr lang="en-US" sz="1150" dirty="0"/>
           </a:p>
@@ -5356,7 +5440,7 @@
       </p:sp>
       <p:sp>
         <p:nvSpPr>
-          <p:cNvPr id="12" name="Shape 10"/>
+          <p:cNvPr id="13" name="Shape 10"/>
           <p:cNvSpPr/>
           <p:nvPr/>
         </p:nvSpPr>
@@ -5378,7 +5462,7 @@
       </p:sp>
       <p:sp>
         <p:nvSpPr>
-          <p:cNvPr id="13" name="Shape 11"/>
+          <p:cNvPr id="14" name="Shape 11"/>
           <p:cNvSpPr/>
           <p:nvPr/>
         </p:nvSpPr>
@@ -5391,14 +5475,14 @@
             <a:avLst/>
           </a:prstGeom>
           <a:solidFill>
-            <a:srgbClr val="0F2D52"/>
+            <a:srgbClr val="093259"/>
           </a:solidFill>
           <a:ln/>
         </p:spPr>
       </p:sp>
       <p:sp>
         <p:nvSpPr>
-          <p:cNvPr id="14" name="Text 12"/>
+          <p:cNvPr id="15" name="Text 12"/>
           <p:cNvSpPr/>
           <p:nvPr/>
         </p:nvSpPr>
@@ -5437,7 +5521,7 @@
       </p:sp>
       <p:sp>
         <p:nvSpPr>
-          <p:cNvPr id="15" name="Text 13"/>
+          <p:cNvPr id="16" name="Text 13"/>
           <p:cNvSpPr/>
           <p:nvPr/>
         </p:nvSpPr>
@@ -5471,7 +5555,7 @@
                 <a:ea typeface="Yu Gothic" pitchFamily="34" charset="-122"/>
                 <a:cs typeface="Yu Gothic" pitchFamily="34" charset="-120"/>
               </a:rPr>
-              <a:t>「落ち着いてください」</a:t>
+              <a:t>「落ち着いてください」と言う。</a:t>
             </a:r>
             <a:endParaRPr lang="en-US" sz="1150" dirty="0"/>
           </a:p>
@@ -5491,7 +5575,7 @@
                 <a:ea typeface="Calibri" pitchFamily="34" charset="-122"/>
                 <a:cs typeface="Calibri" pitchFamily="34" charset="-120"/>
               </a:rPr>
-              <a:t>"Please calm down"</a:t>
+              <a:t>Saying "please calm down".</a:t>
             </a:r>
             <a:endParaRPr lang="en-US" sz="1150" dirty="0"/>
           </a:p>
@@ -5499,7 +5583,7 @@
       </p:sp>
       <p:sp>
         <p:nvSpPr>
-          <p:cNvPr id="16" name="Shape 14"/>
+          <p:cNvPr id="17" name="Shape 14"/>
           <p:cNvSpPr/>
           <p:nvPr/>
         </p:nvSpPr>
@@ -5521,7 +5605,7 @@
       </p:sp>
       <p:sp>
         <p:nvSpPr>
-          <p:cNvPr id="17" name="Shape 15"/>
+          <p:cNvPr id="18" name="Shape 15"/>
           <p:cNvSpPr/>
           <p:nvPr/>
         </p:nvSpPr>
@@ -5534,14 +5618,14 @@
             <a:avLst/>
           </a:prstGeom>
           <a:solidFill>
-            <a:srgbClr val="0F2D52"/>
+            <a:srgbClr val="093259"/>
           </a:solidFill>
           <a:ln/>
         </p:spPr>
       </p:sp>
       <p:sp>
         <p:nvSpPr>
-          <p:cNvPr id="18" name="Text 16"/>
+          <p:cNvPr id="19" name="Text 16"/>
           <p:cNvSpPr/>
           <p:nvPr/>
         </p:nvSpPr>
@@ -5580,7 +5664,7 @@
       </p:sp>
       <p:sp>
         <p:nvSpPr>
-          <p:cNvPr id="19" name="Text 17"/>
+          <p:cNvPr id="20" name="Text 17"/>
           <p:cNvSpPr/>
           <p:nvPr/>
         </p:nvSpPr>
@@ -5614,7 +5698,7 @@
                 <a:ea typeface="Yu Gothic" pitchFamily="34" charset="-122"/>
                 <a:cs typeface="Yu Gothic" pitchFamily="34" charset="-120"/>
               </a:rPr>
-              <a:t>大勢で囲む・背後に回る</a:t>
+              <a:t>複数人で囲む。背後に回る。</a:t>
             </a:r>
             <a:endParaRPr lang="en-US" sz="1150" dirty="0"/>
           </a:p>
@@ -5634,7 +5718,7 @@
                 <a:ea typeface="Calibri" pitchFamily="34" charset="-122"/>
                 <a:cs typeface="Calibri" pitchFamily="34" charset="-120"/>
               </a:rPr>
-              <a:t>Surrounding them, or moving behind them</a:t>
+              <a:t>Surrounding the person. Moving behind them.</a:t>
             </a:r>
             <a:endParaRPr lang="en-US" sz="1150" dirty="0"/>
           </a:p>
@@ -5642,7 +5726,7 @@
       </p:sp>
       <p:sp>
         <p:nvSpPr>
-          <p:cNvPr id="20" name="Shape 18"/>
+          <p:cNvPr id="21" name="Shape 18"/>
           <p:cNvSpPr/>
           <p:nvPr/>
         </p:nvSpPr>
@@ -5664,7 +5748,7 @@
       </p:sp>
       <p:sp>
         <p:nvSpPr>
-          <p:cNvPr id="21" name="Shape 19"/>
+          <p:cNvPr id="22" name="Shape 19"/>
           <p:cNvSpPr/>
           <p:nvPr/>
         </p:nvSpPr>
@@ -5677,14 +5761,14 @@
             <a:avLst/>
           </a:prstGeom>
           <a:solidFill>
-            <a:srgbClr val="0F2D52"/>
+            <a:srgbClr val="093259"/>
           </a:solidFill>
           <a:ln/>
         </p:spPr>
       </p:sp>
       <p:sp>
         <p:nvSpPr>
-          <p:cNvPr id="22" name="Text 20"/>
+          <p:cNvPr id="23" name="Text 20"/>
           <p:cNvSpPr/>
           <p:nvPr/>
         </p:nvSpPr>
@@ -5723,7 +5807,7 @@
       </p:sp>
       <p:sp>
         <p:nvSpPr>
-          <p:cNvPr id="23" name="Text 21"/>
+          <p:cNvPr id="24" name="Text 21"/>
           <p:cNvSpPr/>
           <p:nvPr/>
         </p:nvSpPr>
@@ -5757,7 +5841,7 @@
                 <a:ea typeface="Yu Gothic" pitchFamily="34" charset="-122"/>
                 <a:cs typeface="Yu Gothic" pitchFamily="34" charset="-120"/>
               </a:rPr>
-              <a:t>「規則ですから」で会話を打ち切る</a:t>
+              <a:t>「規則ですから」で会話を打ち切る。</a:t>
             </a:r>
             <a:endParaRPr lang="en-US" sz="1150" dirty="0"/>
           </a:p>
@@ -5777,7 +5861,7 @@
                 <a:ea typeface="Calibri" pitchFamily="34" charset="-122"/>
                 <a:cs typeface="Calibri" pitchFamily="34" charset="-120"/>
               </a:rPr>
-              <a:t>Ending the conversation with "those are the rules"</a:t>
+              <a:t>Ending the conversation with "those are the rules".</a:t>
             </a:r>
             <a:endParaRPr lang="en-US" sz="1150" dirty="0"/>
           </a:p>
@@ -5785,7 +5869,7 @@
       </p:sp>
       <p:sp>
         <p:nvSpPr>
-          <p:cNvPr id="24" name="Shape 22"/>
+          <p:cNvPr id="25" name="Shape 22"/>
           <p:cNvSpPr/>
           <p:nvPr/>
         </p:nvSpPr>
@@ -5807,7 +5891,7 @@
       </p:sp>
       <p:sp>
         <p:nvSpPr>
-          <p:cNvPr id="25" name="Shape 23"/>
+          <p:cNvPr id="26" name="Shape 23"/>
           <p:cNvSpPr/>
           <p:nvPr/>
         </p:nvSpPr>
@@ -5820,14 +5904,14 @@
             <a:avLst/>
           </a:prstGeom>
           <a:solidFill>
-            <a:srgbClr val="0F2D52"/>
+            <a:srgbClr val="093259"/>
           </a:solidFill>
           <a:ln/>
         </p:spPr>
       </p:sp>
       <p:sp>
         <p:nvSpPr>
-          <p:cNvPr id="26" name="Text 24"/>
+          <p:cNvPr id="27" name="Text 24"/>
           <p:cNvSpPr/>
           <p:nvPr/>
         </p:nvSpPr>
@@ -5866,7 +5950,7 @@
       </p:sp>
       <p:sp>
         <p:nvSpPr>
-          <p:cNvPr id="27" name="Text 25"/>
+          <p:cNvPr id="28" name="Text 25"/>
           <p:cNvSpPr/>
           <p:nvPr/>
         </p:nvSpPr>
@@ -5900,7 +5984,7 @@
                 <a:ea typeface="Yu Gothic" pitchFamily="34" charset="-122"/>
                 <a:cs typeface="Yu Gothic" pitchFamily="34" charset="-120"/>
               </a:rPr>
-              <a:t>自分の意見や会社の見解を口にする</a:t>
+              <a:t>自分の意見や会社の見解を述べる。</a:t>
             </a:r>
             <a:endParaRPr lang="en-US" sz="1150" dirty="0"/>
           </a:p>
@@ -5920,7 +6004,7 @@
                 <a:ea typeface="Calibri" pitchFamily="34" charset="-122"/>
                 <a:cs typeface="Calibri" pitchFamily="34" charset="-120"/>
               </a:rPr>
-              <a:t>Offering your own opinion, or the company's position</a:t>
+              <a:t>Giving your own opinion or the company's position.</a:t>
             </a:r>
             <a:endParaRPr lang="en-US" sz="1150" dirty="0"/>
           </a:p>
@@ -5928,7 +6012,7 @@
       </p:sp>
       <p:sp>
         <p:nvSpPr>
-          <p:cNvPr id="28" name="Text 26"/>
+          <p:cNvPr id="29" name="Text 26"/>
           <p:cNvSpPr/>
           <p:nvPr/>
         </p:nvSpPr>
@@ -5981,7 +6065,7 @@
       </p:sp>
       <p:sp>
         <p:nvSpPr>
-          <p:cNvPr id="29" name="Text 27"/>
+          <p:cNvPr id="30" name="Text 27"/>
           <p:cNvSpPr/>
           <p:nvPr/>
         </p:nvSpPr>
@@ -6050,9 +6134,33 @@
           <a:chExt cx="0" cy="0"/>
         </a:xfrm>
       </p:grpSpPr>
-      <p:sp>
-        <p:nvSpPr>
-          <p:cNvPr id="2" name="Text 0"/>
+      <p:pic>
+        <p:nvPicPr>
+          <p:cNvPr id="2" name="Image 0" descr="/home/user/Training-/assets/logo.png">    </p:cNvPr>
+          <p:cNvPicPr>
+            <a:picLocks noChangeAspect="1"/>
+          </p:cNvPicPr>
+          <p:nvPr/>
+        </p:nvPicPr>
+        <p:blipFill>
+          <a:blip r:embed="rId1"/>
+          <a:stretch>
+            <a:fillRect/>
+          </a:stretch>
+        </p:blipFill>
+        <p:spPr>
+          <a:xfrm>
+            <a:off x="10765231" y="332912"/>
+            <a:ext cx="786384" cy="742353"/>
+          </a:xfrm>
+          <a:prstGeom prst="rect">
+            <a:avLst/>
+          </a:prstGeom>
+        </p:spPr>
+      </p:pic>
+      <p:sp>
+        <p:nvSpPr>
+          <p:cNvPr id="3" name="Text 0"/>
           <p:cNvSpPr/>
           <p:nvPr/>
         </p:nvSpPr>
@@ -6080,13 +6188,13 @@
             <a:r>
               <a:rPr lang="en-US" sz="2700" b="1" dirty="0">
                 <a:solidFill>
-                  <a:srgbClr val="0F2D52"/>
+                  <a:srgbClr val="093259"/>
                 </a:solidFill>
                 <a:latin typeface="Yu Gothic" pitchFamily="34" charset="0"/>
                 <a:ea typeface="Yu Gothic" pitchFamily="34" charset="-122"/>
                 <a:cs typeface="Yu Gothic" pitchFamily="34" charset="-120"/>
               </a:rPr>
-              <a:t>退き際の判断 ― De-escalation は万能ではない</a:t>
+              <a:t>離脱の判断</a:t>
             </a:r>
             <a:endParaRPr lang="en-US" sz="2700" dirty="0"/>
           </a:p>
@@ -6100,13 +6208,13 @@
             <a:r>
               <a:rPr lang="en-US" sz="1250" i="1" dirty="0">
                 <a:solidFill>
-                  <a:srgbClr val="17AF98"/>
-                </a:solidFill>
-                <a:latin typeface="Calibri" pitchFamily="34" charset="0"/>
-                <a:ea typeface="Calibri" pitchFamily="34" charset="-122"/>
-                <a:cs typeface="Calibri" pitchFamily="34" charset="-120"/>
-              </a:rPr>
-              <a:t>Knowing When to Stop — de-escalation is not universal</a:t>
+                  <a:srgbClr val="12B198"/>
+                </a:solidFill>
+                <a:latin typeface="Calibri" pitchFamily="34" charset="0"/>
+                <a:ea typeface="Calibri" pitchFamily="34" charset="-122"/>
+                <a:cs typeface="Calibri" pitchFamily="34" charset="-120"/>
+              </a:rPr>
+              <a:t>When to Disengage</a:t>
             </a:r>
             <a:endParaRPr lang="en-US" sz="2700" dirty="0"/>
           </a:p>
@@ -6114,7 +6222,7 @@
       </p:sp>
       <p:sp>
         <p:nvSpPr>
-          <p:cNvPr id="3" name="Text 1"/>
+          <p:cNvPr id="4" name="Text 1"/>
           <p:cNvSpPr/>
           <p:nvPr/>
         </p:nvSpPr>
@@ -6142,13 +6250,13 @@
             <a:r>
               <a:rPr lang="en-US" sz="1300" dirty="0">
                 <a:solidFill>
-                  <a:srgbClr val="0F2D52"/>
+                  <a:srgbClr val="093259"/>
                 </a:solidFill>
                 <a:latin typeface="Yu Gothic" pitchFamily="34" charset="0"/>
                 <a:ea typeface="Yu Gothic" pitchFamily="34" charset="-122"/>
                 <a:cs typeface="Yu Gothic" pitchFamily="34" charset="-120"/>
               </a:rPr>
-              <a:t>効いていない兆候が出たら、続けるのではなく切り替えます。</a:t>
+              <a:t>次の兆候が出た場合は、対話を続けずに切り替えます。</a:t>
             </a:r>
             <a:endParaRPr lang="en-US" sz="1300" dirty="0"/>
           </a:p>
@@ -6168,7 +6276,7 @@
                 <a:ea typeface="Calibri" pitchFamily="34" charset="-122"/>
                 <a:cs typeface="Calibri" pitchFamily="34" charset="-120"/>
               </a:rPr>
-              <a:t>When these signs appear, switch tactics rather than persisting.</a:t>
+              <a:t>If these signs appear, stop the conversation and change approach.</a:t>
             </a:r>
             <a:endParaRPr lang="en-US" sz="1300" dirty="0"/>
           </a:p>
@@ -6176,7 +6284,7 @@
       </p:sp>
       <p:sp>
         <p:nvSpPr>
-          <p:cNvPr id="4" name="Shape 2"/>
+          <p:cNvPr id="5" name="Shape 2"/>
           <p:cNvSpPr/>
           <p:nvPr/>
         </p:nvSpPr>
@@ -6198,7 +6306,7 @@
       </p:sp>
       <p:sp>
         <p:nvSpPr>
-          <p:cNvPr id="5" name="Shape 3"/>
+          <p:cNvPr id="6" name="Shape 3"/>
           <p:cNvSpPr/>
           <p:nvPr/>
         </p:nvSpPr>
@@ -6211,14 +6319,14 @@
             <a:avLst/>
           </a:prstGeom>
           <a:solidFill>
-            <a:srgbClr val="17AF98"/>
+            <a:srgbClr val="12B198"/>
           </a:solidFill>
           <a:ln/>
         </p:spPr>
       </p:sp>
       <p:sp>
         <p:nvSpPr>
-          <p:cNvPr id="6" name="Text 4"/>
+          <p:cNvPr id="7" name="Text 4"/>
           <p:cNvSpPr/>
           <p:nvPr/>
         </p:nvSpPr>
@@ -6257,7 +6365,7 @@
       </p:sp>
       <p:sp>
         <p:nvSpPr>
-          <p:cNvPr id="7" name="Text 5"/>
+          <p:cNvPr id="8" name="Text 5"/>
           <p:cNvSpPr/>
           <p:nvPr/>
         </p:nvSpPr>
@@ -6291,7 +6399,7 @@
                 <a:ea typeface="Yu Gothic" pitchFamily="34" charset="-122"/>
                 <a:cs typeface="Yu Gothic" pitchFamily="34" charset="-120"/>
               </a:rPr>
-              <a:t>兆候：声が大きくなり続ける／同じ言葉を繰り返す</a:t>
+              <a:t>兆候 ― 声が大きくなり続ける。同じ言葉を繰り返す。</a:t>
             </a:r>
             <a:endParaRPr lang="en-US" sz="1450" dirty="0"/>
           </a:p>
@@ -6311,7 +6419,7 @@
                 <a:ea typeface="Calibri" pitchFamily="34" charset="-122"/>
                 <a:cs typeface="Calibri" pitchFamily="34" charset="-120"/>
               </a:rPr>
-              <a:t>Signs: volume keeps climbing; the same phrase repeats</a:t>
+              <a:t>Signs: the volume keeps rising. The same phrase repeats.</a:t>
             </a:r>
             <a:endParaRPr lang="en-US" sz="1450" dirty="0"/>
           </a:p>
@@ -6319,7 +6427,7 @@
       </p:sp>
       <p:sp>
         <p:nvSpPr>
-          <p:cNvPr id="8" name="Shape 6"/>
+          <p:cNvPr id="9" name="Shape 6"/>
           <p:cNvSpPr/>
           <p:nvPr/>
         </p:nvSpPr>
@@ -6341,7 +6449,7 @@
       </p:sp>
       <p:sp>
         <p:nvSpPr>
-          <p:cNvPr id="9" name="Shape 7"/>
+          <p:cNvPr id="10" name="Shape 7"/>
           <p:cNvSpPr/>
           <p:nvPr/>
         </p:nvSpPr>
@@ -6354,14 +6462,14 @@
             <a:avLst/>
           </a:prstGeom>
           <a:solidFill>
-            <a:srgbClr val="17AF98"/>
+            <a:srgbClr val="12B198"/>
           </a:solidFill>
           <a:ln/>
         </p:spPr>
       </p:sp>
       <p:sp>
         <p:nvSpPr>
-          <p:cNvPr id="10" name="Text 8"/>
+          <p:cNvPr id="11" name="Text 8"/>
           <p:cNvSpPr/>
           <p:nvPr/>
         </p:nvSpPr>
@@ -6400,7 +6508,7 @@
       </p:sp>
       <p:sp>
         <p:nvSpPr>
-          <p:cNvPr id="11" name="Text 9"/>
+          <p:cNvPr id="12" name="Text 9"/>
           <p:cNvSpPr/>
           <p:nvPr/>
         </p:nvSpPr>
@@ -6434,7 +6542,7 @@
                 <a:ea typeface="Yu Gothic" pitchFamily="34" charset="-122"/>
                 <a:cs typeface="Yu Gothic" pitchFamily="34" charset="-120"/>
               </a:rPr>
-              <a:t>兆候：距離を詰めてくる／持ち物を握りしめる／視線を外さない</a:t>
+              <a:t>兆候 ― 距離を詰めてくる。持ち物を握りしめる。視線を外さない。</a:t>
             </a:r>
             <a:endParaRPr lang="en-US" sz="1450" dirty="0"/>
           </a:p>
@@ -6454,7 +6562,7 @@
                 <a:ea typeface="Calibri" pitchFamily="34" charset="-122"/>
                 <a:cs typeface="Calibri" pitchFamily="34" charset="-120"/>
               </a:rPr>
-              <a:t>Signs: closing distance; gripping an object; fixed stare</a:t>
+              <a:t>Signs: closing the distance. Gripping an object. A fixed stare.</a:t>
             </a:r>
             <a:endParaRPr lang="en-US" sz="1450" dirty="0"/>
           </a:p>
@@ -6462,7 +6570,7 @@
       </p:sp>
       <p:sp>
         <p:nvSpPr>
-          <p:cNvPr id="12" name="Shape 10"/>
+          <p:cNvPr id="13" name="Shape 10"/>
           <p:cNvSpPr/>
           <p:nvPr/>
         </p:nvSpPr>
@@ -6484,7 +6592,7 @@
       </p:sp>
       <p:sp>
         <p:nvSpPr>
-          <p:cNvPr id="13" name="Shape 11"/>
+          <p:cNvPr id="14" name="Shape 11"/>
           <p:cNvSpPr/>
           <p:nvPr/>
         </p:nvSpPr>
@@ -6497,14 +6605,14 @@
             <a:avLst/>
           </a:prstGeom>
           <a:solidFill>
-            <a:srgbClr val="17AF98"/>
+            <a:srgbClr val="12B198"/>
           </a:solidFill>
           <a:ln/>
         </p:spPr>
       </p:sp>
       <p:sp>
         <p:nvSpPr>
-          <p:cNvPr id="14" name="Text 12"/>
+          <p:cNvPr id="15" name="Text 12"/>
           <p:cNvSpPr/>
           <p:nvPr/>
         </p:nvSpPr>
@@ -6543,7 +6651,7 @@
       </p:sp>
       <p:sp>
         <p:nvSpPr>
-          <p:cNvPr id="15" name="Text 13"/>
+          <p:cNvPr id="16" name="Text 13"/>
           <p:cNvSpPr/>
           <p:nvPr/>
         </p:nvSpPr>
@@ -6577,7 +6685,7 @@
                 <a:ea typeface="Yu Gothic" pitchFamily="34" charset="-122"/>
                 <a:cs typeface="Yu Gothic" pitchFamily="34" charset="-120"/>
               </a:rPr>
-              <a:t>そのときの順序：離脱 → 応援要請 → 通報</a:t>
+              <a:t>順序 ― 離脱する、応援を要請する、通報する。</a:t>
             </a:r>
             <a:endParaRPr lang="en-US" sz="1450" dirty="0"/>
           </a:p>
@@ -6597,7 +6705,7 @@
                 <a:ea typeface="Calibri" pitchFamily="34" charset="-122"/>
                 <a:cs typeface="Calibri" pitchFamily="34" charset="-120"/>
               </a:rPr>
-              <a:t>The sequence: disengage, call for backup, then report to police</a:t>
+              <a:t>Sequence: disengage, call for backup, then report to police.</a:t>
             </a:r>
             <a:endParaRPr lang="en-US" sz="1450" dirty="0"/>
           </a:p>
@@ -6605,7 +6713,7 @@
       </p:sp>
       <p:sp>
         <p:nvSpPr>
-          <p:cNvPr id="16" name="Shape 14"/>
+          <p:cNvPr id="17" name="Shape 14"/>
           <p:cNvSpPr/>
           <p:nvPr/>
         </p:nvSpPr>
@@ -6627,7 +6735,7 @@
       </p:sp>
       <p:sp>
         <p:nvSpPr>
-          <p:cNvPr id="17" name="Shape 15"/>
+          <p:cNvPr id="18" name="Shape 15"/>
           <p:cNvSpPr/>
           <p:nvPr/>
         </p:nvSpPr>
@@ -6640,14 +6748,14 @@
             <a:avLst/>
           </a:prstGeom>
           <a:solidFill>
-            <a:srgbClr val="17AF98"/>
+            <a:srgbClr val="12B198"/>
           </a:solidFill>
           <a:ln/>
         </p:spPr>
       </p:sp>
       <p:sp>
         <p:nvSpPr>
-          <p:cNvPr id="18" name="Text 16"/>
+          <p:cNvPr id="19" name="Text 16"/>
           <p:cNvSpPr/>
           <p:nvPr/>
         </p:nvSpPr>
@@ -6686,7 +6794,7 @@
       </p:sp>
       <p:sp>
         <p:nvSpPr>
-          <p:cNvPr id="19" name="Text 17"/>
+          <p:cNvPr id="20" name="Text 17"/>
           <p:cNvSpPr/>
           <p:nvPr/>
         </p:nvSpPr>
@@ -6720,7 +6828,7 @@
                 <a:ea typeface="Yu Gothic" pitchFamily="34" charset="-122"/>
                 <a:cs typeface="Yu Gothic" pitchFamily="34" charset="-120"/>
               </a:rPr>
-              <a:t>引くことは負けではありません。引くのも技術です。</a:t>
+              <a:t>効果が見られない場合は離脱します。</a:t>
             </a:r>
             <a:endParaRPr lang="en-US" sz="1450" dirty="0"/>
           </a:p>
@@ -6740,7 +6848,7 @@
                 <a:ea typeface="Calibri" pitchFamily="34" charset="-122"/>
                 <a:cs typeface="Calibri" pitchFamily="34" charset="-120"/>
               </a:rPr>
-              <a:t>Withdrawing is not losing. Withdrawing is a skill.</a:t>
+              <a:t>If it is not working, disengage.</a:t>
             </a:r>
             <a:endParaRPr lang="en-US" sz="1450" dirty="0"/>
           </a:p>
@@ -6748,7 +6856,7 @@
       </p:sp>
       <p:sp>
         <p:nvSpPr>
-          <p:cNvPr id="20" name="Text 18"/>
+          <p:cNvPr id="21" name="Text 18"/>
           <p:cNvSpPr/>
           <p:nvPr/>
         </p:nvSpPr>
@@ -6801,7 +6909,7 @@
       </p:sp>
       <p:sp>
         <p:nvSpPr>
-          <p:cNvPr id="21" name="Text 19"/>
+          <p:cNvPr id="22" name="Text 19"/>
           <p:cNvSpPr/>
           <p:nvPr/>
         </p:nvSpPr>
@@ -6870,9 +6978,33 @@
           <a:chExt cx="0" cy="0"/>
         </a:xfrm>
       </p:grpSpPr>
-      <p:sp>
-        <p:nvSpPr>
-          <p:cNvPr id="2" name="Text 0"/>
+      <p:pic>
+        <p:nvPicPr>
+          <p:cNvPr id="2" name="Image 0" descr="/home/user/Training-/assets/logo.png">    </p:cNvPr>
+          <p:cNvPicPr>
+            <a:picLocks noChangeAspect="1"/>
+          </p:cNvPicPr>
+          <p:nvPr/>
+        </p:nvPicPr>
+        <p:blipFill>
+          <a:blip r:embed="rId1"/>
+          <a:stretch>
+            <a:fillRect/>
+          </a:stretch>
+        </p:blipFill>
+        <p:spPr>
+          <a:xfrm>
+            <a:off x="10765231" y="332912"/>
+            <a:ext cx="786384" cy="742353"/>
+          </a:xfrm>
+          <a:prstGeom prst="rect">
+            <a:avLst/>
+          </a:prstGeom>
+        </p:spPr>
+      </p:pic>
+      <p:sp>
+        <p:nvSpPr>
+          <p:cNvPr id="3" name="Text 0"/>
           <p:cNvSpPr/>
           <p:nvPr/>
         </p:nvSpPr>
@@ -6900,13 +7032,13 @@
             <a:r>
               <a:rPr lang="en-US" sz="2700" b="1" dirty="0">
                 <a:solidFill>
-                  <a:srgbClr val="0F2D52"/>
+                  <a:srgbClr val="093259"/>
                 </a:solidFill>
                 <a:latin typeface="Yu Gothic" pitchFamily="34" charset="0"/>
                 <a:ea typeface="Yu Gothic" pitchFamily="34" charset="-122"/>
                 <a:cs typeface="Yu Gothic" pitchFamily="34" charset="-120"/>
               </a:rPr>
-              <a:t>ソーシャルエンジニアリング ― 5つの典型手口</a:t>
+              <a:t>ソーシャルエンジニアリング</a:t>
             </a:r>
             <a:endParaRPr lang="en-US" sz="2700" dirty="0"/>
           </a:p>
@@ -6920,13 +7052,13 @@
             <a:r>
               <a:rPr lang="en-US" sz="1250" i="1" dirty="0">
                 <a:solidFill>
-                  <a:srgbClr val="17AF98"/>
-                </a:solidFill>
-                <a:latin typeface="Calibri" pitchFamily="34" charset="0"/>
-                <a:ea typeface="Calibri" pitchFamily="34" charset="-122"/>
-                <a:cs typeface="Calibri" pitchFamily="34" charset="-120"/>
-              </a:rPr>
-              <a:t>Social Engineering — five classic approaches</a:t>
+                  <a:srgbClr val="12B198"/>
+                </a:solidFill>
+                <a:latin typeface="Calibri" pitchFamily="34" charset="0"/>
+                <a:ea typeface="Calibri" pitchFamily="34" charset="-122"/>
+                <a:cs typeface="Calibri" pitchFamily="34" charset="-120"/>
+              </a:rPr>
+              <a:t>Social Engineering</a:t>
             </a:r>
             <a:endParaRPr lang="en-US" sz="2700" dirty="0"/>
           </a:p>
@@ -6934,7 +7066,7 @@
       </p:sp>
       <p:sp>
         <p:nvSpPr>
-          <p:cNvPr id="3" name="Text 1"/>
+          <p:cNvPr id="4" name="Text 1"/>
           <p:cNvSpPr/>
           <p:nvPr/>
         </p:nvSpPr>
@@ -6962,13 +7094,13 @@
             <a:r>
               <a:rPr lang="en-US" sz="1300" dirty="0">
                 <a:solidFill>
-                  <a:srgbClr val="0F2D52"/>
+                  <a:srgbClr val="093259"/>
                 </a:solidFill>
                 <a:latin typeface="Yu Gothic" pitchFamily="34" charset="0"/>
                 <a:ea typeface="Yu Gothic" pitchFamily="34" charset="-122"/>
                 <a:cs typeface="Yu Gothic" pitchFamily="34" charset="-120"/>
               </a:rPr>
-              <a:t>いずれも「手続きを飛ばさせる」ことを狙っています。</a:t>
+              <a:t>いずれも、手続きを省略させることを目的とした働きかけです。</a:t>
             </a:r>
             <a:endParaRPr lang="en-US" sz="1300" dirty="0"/>
           </a:p>
@@ -6988,7 +7120,7 @@
                 <a:ea typeface="Calibri" pitchFamily="34" charset="-122"/>
                 <a:cs typeface="Calibri" pitchFamily="34" charset="-120"/>
               </a:rPr>
-              <a:t>Every one of them aims to make you skip a procedure.</a:t>
+              <a:t>All of these aim to make you skip a procedure.</a:t>
             </a:r>
             <a:endParaRPr lang="en-US" sz="1300" dirty="0"/>
           </a:p>
@@ -6996,7 +7128,7 @@
       </p:sp>
       <p:sp>
         <p:nvSpPr>
-          <p:cNvPr id="4" name="Shape 2"/>
+          <p:cNvPr id="5" name="Shape 2"/>
           <p:cNvSpPr/>
           <p:nvPr/>
         </p:nvSpPr>
@@ -7018,7 +7150,7 @@
       </p:sp>
       <p:sp>
         <p:nvSpPr>
-          <p:cNvPr id="5" name="Shape 3"/>
+          <p:cNvPr id="6" name="Shape 3"/>
           <p:cNvSpPr/>
           <p:nvPr/>
         </p:nvSpPr>
@@ -7031,14 +7163,14 @@
             <a:avLst/>
           </a:prstGeom>
           <a:solidFill>
-            <a:srgbClr val="0F2D52"/>
+            <a:srgbClr val="093259"/>
           </a:solidFill>
           <a:ln/>
         </p:spPr>
       </p:sp>
       <p:sp>
         <p:nvSpPr>
-          <p:cNvPr id="6" name="Text 4"/>
+          <p:cNvPr id="7" name="Text 4"/>
           <p:cNvSpPr/>
           <p:nvPr/>
         </p:nvSpPr>
@@ -7077,7 +7209,7 @@
       </p:sp>
       <p:sp>
         <p:nvSpPr>
-          <p:cNvPr id="7" name="Text 5"/>
+          <p:cNvPr id="8" name="Text 5"/>
           <p:cNvSpPr/>
           <p:nvPr/>
         </p:nvSpPr>
@@ -7131,7 +7263,7 @@
                 <a:ea typeface="Calibri" pitchFamily="34" charset="-122"/>
                 <a:cs typeface="Calibri" pitchFamily="34" charset="-120"/>
               </a:rPr>
-              <a:t>Authority — "the director is expecting me"</a:t>
+              <a:t>Authority: "the director is expecting me".</a:t>
             </a:r>
             <a:endParaRPr lang="en-US" sz="1150" dirty="0"/>
           </a:p>
@@ -7139,7 +7271,7 @@
       </p:sp>
       <p:sp>
         <p:nvSpPr>
-          <p:cNvPr id="8" name="Shape 6"/>
+          <p:cNvPr id="9" name="Shape 6"/>
           <p:cNvSpPr/>
           <p:nvPr/>
         </p:nvSpPr>
@@ -7161,7 +7293,7 @@
       </p:sp>
       <p:sp>
         <p:nvSpPr>
-          <p:cNvPr id="9" name="Shape 7"/>
+          <p:cNvPr id="10" name="Shape 7"/>
           <p:cNvSpPr/>
           <p:nvPr/>
         </p:nvSpPr>
@@ -7174,14 +7306,14 @@
             <a:avLst/>
           </a:prstGeom>
           <a:solidFill>
-            <a:srgbClr val="0F2D52"/>
+            <a:srgbClr val="093259"/>
           </a:solidFill>
           <a:ln/>
         </p:spPr>
       </p:sp>
       <p:sp>
         <p:nvSpPr>
-          <p:cNvPr id="10" name="Text 8"/>
+          <p:cNvPr id="11" name="Text 8"/>
           <p:cNvSpPr/>
           <p:nvPr/>
         </p:nvSpPr>
@@ -7220,7 +7352,7 @@
       </p:sp>
       <p:sp>
         <p:nvSpPr>
-          <p:cNvPr id="11" name="Text 9"/>
+          <p:cNvPr id="12" name="Text 9"/>
           <p:cNvSpPr/>
           <p:nvPr/>
         </p:nvSpPr>
@@ -7274,7 +7406,7 @@
                 <a:ea typeface="Calibri" pitchFamily="34" charset="-122"/>
                 <a:cs typeface="Calibri" pitchFamily="34" charset="-120"/>
               </a:rPr>
-              <a:t>Urgency — "if you delay me it will cost the company"</a:t>
+              <a:t>Urgency: "if you delay me it will cost the company".</a:t>
             </a:r>
             <a:endParaRPr lang="en-US" sz="1150" dirty="0"/>
           </a:p>
@@ -7282,7 +7414,7 @@
       </p:sp>
       <p:sp>
         <p:nvSpPr>
-          <p:cNvPr id="12" name="Shape 10"/>
+          <p:cNvPr id="13" name="Shape 10"/>
           <p:cNvSpPr/>
           <p:nvPr/>
         </p:nvSpPr>
@@ -7304,7 +7436,7 @@
       </p:sp>
       <p:sp>
         <p:nvSpPr>
-          <p:cNvPr id="13" name="Shape 11"/>
+          <p:cNvPr id="14" name="Shape 11"/>
           <p:cNvSpPr/>
           <p:nvPr/>
         </p:nvSpPr>
@@ -7317,14 +7449,14 @@
             <a:avLst/>
           </a:prstGeom>
           <a:solidFill>
-            <a:srgbClr val="0F2D52"/>
+            <a:srgbClr val="093259"/>
           </a:solidFill>
           <a:ln/>
         </p:spPr>
       </p:sp>
       <p:sp>
         <p:nvSpPr>
-          <p:cNvPr id="14" name="Text 12"/>
+          <p:cNvPr id="15" name="Text 12"/>
           <p:cNvSpPr/>
           <p:nvPr/>
         </p:nvSpPr>
@@ -7363,7 +7495,7 @@
       </p:sp>
       <p:sp>
         <p:nvSpPr>
-          <p:cNvPr id="15" name="Text 13"/>
+          <p:cNvPr id="16" name="Text 13"/>
           <p:cNvSpPr/>
           <p:nvPr/>
         </p:nvSpPr>
@@ -7417,7 +7549,7 @@
                 <a:ea typeface="Calibri" pitchFamily="34" charset="-122"/>
                 <a:cs typeface="Calibri" pitchFamily="34" charset="-120"/>
               </a:rPr>
-              <a:t>Familiarity — "they let me through last time"</a:t>
+              <a:t>Familiarity: "they let me through last time".</a:t>
             </a:r>
             <a:endParaRPr lang="en-US" sz="1150" dirty="0"/>
           </a:p>
@@ -7425,7 +7557,7 @@
       </p:sp>
       <p:sp>
         <p:nvSpPr>
-          <p:cNvPr id="16" name="Shape 14"/>
+          <p:cNvPr id="17" name="Shape 14"/>
           <p:cNvSpPr/>
           <p:nvPr/>
         </p:nvSpPr>
@@ -7447,7 +7579,7 @@
       </p:sp>
       <p:sp>
         <p:nvSpPr>
-          <p:cNvPr id="17" name="Shape 15"/>
+          <p:cNvPr id="18" name="Shape 15"/>
           <p:cNvSpPr/>
           <p:nvPr/>
         </p:nvSpPr>
@@ -7460,14 +7592,14 @@
             <a:avLst/>
           </a:prstGeom>
           <a:solidFill>
-            <a:srgbClr val="0F2D52"/>
+            <a:srgbClr val="093259"/>
           </a:solidFill>
           <a:ln/>
         </p:spPr>
       </p:sp>
       <p:sp>
         <p:nvSpPr>
-          <p:cNvPr id="18" name="Text 16"/>
+          <p:cNvPr id="19" name="Text 16"/>
           <p:cNvSpPr/>
           <p:nvPr/>
         </p:nvSpPr>
@@ -7506,7 +7638,7 @@
       </p:sp>
       <p:sp>
         <p:nvSpPr>
-          <p:cNvPr id="19" name="Text 17"/>
+          <p:cNvPr id="20" name="Text 17"/>
           <p:cNvSpPr/>
           <p:nvPr/>
         </p:nvSpPr>
@@ -7560,7 +7692,7 @@
                 <a:ea typeface="Calibri" pitchFamily="34" charset="-122"/>
                 <a:cs typeface="Calibri" pitchFamily="34" charset="-120"/>
               </a:rPr>
-              <a:t>Sympathy — "I am soaked" / "I am unwell"</a:t>
+              <a:t>Sympathy: "I am soaked", "I am unwell".</a:t>
             </a:r>
             <a:endParaRPr lang="en-US" sz="1150" dirty="0"/>
           </a:p>
@@ -7568,7 +7700,7 @@
       </p:sp>
       <p:sp>
         <p:nvSpPr>
-          <p:cNvPr id="20" name="Shape 18"/>
+          <p:cNvPr id="21" name="Shape 18"/>
           <p:cNvSpPr/>
           <p:nvPr/>
         </p:nvSpPr>
@@ -7590,7 +7722,7 @@
       </p:sp>
       <p:sp>
         <p:nvSpPr>
-          <p:cNvPr id="21" name="Shape 19"/>
+          <p:cNvPr id="22" name="Shape 19"/>
           <p:cNvSpPr/>
           <p:nvPr/>
         </p:nvSpPr>
@@ -7603,14 +7735,14 @@
             <a:avLst/>
           </a:prstGeom>
           <a:solidFill>
-            <a:srgbClr val="0F2D52"/>
+            <a:srgbClr val="093259"/>
           </a:solidFill>
           <a:ln/>
         </p:spPr>
       </p:sp>
       <p:sp>
         <p:nvSpPr>
-          <p:cNvPr id="22" name="Text 20"/>
+          <p:cNvPr id="23" name="Text 20"/>
           <p:cNvSpPr/>
           <p:nvPr/>
         </p:nvSpPr>
@@ -7649,7 +7781,7 @@
       </p:sp>
       <p:sp>
         <p:nvSpPr>
-          <p:cNvPr id="23" name="Text 21"/>
+          <p:cNvPr id="24" name="Text 21"/>
           <p:cNvSpPr/>
           <p:nvPr/>
         </p:nvSpPr>
@@ -7683,7 +7815,7 @@
                 <a:ea typeface="Yu Gothic" pitchFamily="34" charset="-122"/>
                 <a:cs typeface="Yu Gothic" pitchFamily="34" charset="-120"/>
               </a:rPr>
-              <a:t>共連れ ― 荷物を抱えて後ろにつく</a:t>
+              <a:t>共連れ ― 荷物を持って後ろにつく</a:t>
             </a:r>
             <a:endParaRPr lang="en-US" sz="1150" dirty="0"/>
           </a:p>
@@ -7703,7 +7835,7 @@
                 <a:ea typeface="Calibri" pitchFamily="34" charset="-122"/>
                 <a:cs typeface="Calibri" pitchFamily="34" charset="-120"/>
               </a:rPr>
-              <a:t>Tailgating — following behind with full hands</a:t>
+              <a:t>Tailgating: following behind carrying items.</a:t>
             </a:r>
             <a:endParaRPr lang="en-US" sz="1150" dirty="0"/>
           </a:p>
@@ -7711,7 +7843,7 @@
       </p:sp>
       <p:sp>
         <p:nvSpPr>
-          <p:cNvPr id="24" name="Shape 22"/>
+          <p:cNvPr id="25" name="Shape 22"/>
           <p:cNvSpPr/>
           <p:nvPr/>
         </p:nvSpPr>
@@ -7733,7 +7865,7 @@
       </p:sp>
       <p:sp>
         <p:nvSpPr>
-          <p:cNvPr id="25" name="Shape 23"/>
+          <p:cNvPr id="26" name="Shape 23"/>
           <p:cNvSpPr/>
           <p:nvPr/>
         </p:nvSpPr>
@@ -7746,14 +7878,14 @@
             <a:avLst/>
           </a:prstGeom>
           <a:solidFill>
-            <a:srgbClr val="0F2D52"/>
+            <a:srgbClr val="093259"/>
           </a:solidFill>
           <a:ln/>
         </p:spPr>
       </p:sp>
       <p:sp>
         <p:nvSpPr>
-          <p:cNvPr id="26" name="Text 24"/>
+          <p:cNvPr id="27" name="Text 24"/>
           <p:cNvSpPr/>
           <p:nvPr/>
         </p:nvSpPr>
@@ -7792,7 +7924,7 @@
       </p:sp>
       <p:sp>
         <p:nvSpPr>
-          <p:cNvPr id="27" name="Text 25"/>
+          <p:cNvPr id="28" name="Text 25"/>
           <p:cNvSpPr/>
           <p:nvPr/>
         </p:nvSpPr>
@@ -7826,7 +7958,7 @@
                 <a:ea typeface="Yu Gothic" pitchFamily="34" charset="-122"/>
                 <a:cs typeface="Yu Gothic" pitchFamily="34" charset="-120"/>
               </a:rPr>
-              <a:t>対処は共通：手続きに戻す。「確認します」は失礼ではない。</a:t>
+              <a:t>対応は共通です。手続きに戻します。確認は失礼ではありません。</a:t>
             </a:r>
             <a:endParaRPr lang="en-US" sz="1150" dirty="0"/>
           </a:p>
@@ -7846,7 +7978,7 @@
                 <a:ea typeface="Calibri" pitchFamily="34" charset="-122"/>
                 <a:cs typeface="Calibri" pitchFamily="34" charset="-120"/>
               </a:rPr>
-              <a:t>One answer to all: return to procedure. "Let me verify" is not rude.</a:t>
+              <a:t>One response to all: return to the procedure. Verifying is not rude.</a:t>
             </a:r>
             <a:endParaRPr lang="en-US" sz="1150" dirty="0"/>
           </a:p>
@@ -7854,7 +7986,7 @@
       </p:sp>
       <p:sp>
         <p:nvSpPr>
-          <p:cNvPr id="28" name="Text 26"/>
+          <p:cNvPr id="29" name="Text 26"/>
           <p:cNvSpPr/>
           <p:nvPr/>
         </p:nvSpPr>
@@ -7907,7 +8039,7 @@
       </p:sp>
       <p:sp>
         <p:nvSpPr>
-          <p:cNvPr id="29" name="Text 27"/>
+          <p:cNvPr id="30" name="Text 27"/>
           <p:cNvSpPr/>
           <p:nvPr/>
         </p:nvSpPr>
@@ -7976,9 +8108,33 @@
           <a:chExt cx="0" cy="0"/>
         </a:xfrm>
       </p:grpSpPr>
-      <p:sp>
-        <p:nvSpPr>
-          <p:cNvPr id="2" name="Text 0"/>
+      <p:pic>
+        <p:nvPicPr>
+          <p:cNvPr id="2" name="Image 0" descr="/home/user/Training-/assets/logo.png">    </p:cNvPr>
+          <p:cNvPicPr>
+            <a:picLocks noChangeAspect="1"/>
+          </p:cNvPicPr>
+          <p:nvPr/>
+        </p:nvPicPr>
+        <p:blipFill>
+          <a:blip r:embed="rId1"/>
+          <a:stretch>
+            <a:fillRect/>
+          </a:stretch>
+        </p:blipFill>
+        <p:spPr>
+          <a:xfrm>
+            <a:off x="10765231" y="332912"/>
+            <a:ext cx="786384" cy="742353"/>
+          </a:xfrm>
+          <a:prstGeom prst="rect">
+            <a:avLst/>
+          </a:prstGeom>
+        </p:spPr>
+      </p:pic>
+      <p:sp>
+        <p:nvSpPr>
+          <p:cNvPr id="3" name="Text 0"/>
           <p:cNvSpPr/>
           <p:nvPr/>
         </p:nvSpPr>
@@ -8006,7 +8162,7 @@
             <a:r>
               <a:rPr lang="en-US" sz="2700" b="1" dirty="0">
                 <a:solidFill>
-                  <a:srgbClr val="0F2D52"/>
+                  <a:srgbClr val="093259"/>
                 </a:solidFill>
                 <a:latin typeface="Yu Gothic" pitchFamily="34" charset="0"/>
                 <a:ea typeface="Yu Gothic" pitchFamily="34" charset="-122"/>
@@ -8026,7 +8182,7 @@
             <a:r>
               <a:rPr lang="en-US" sz="1250" i="1" dirty="0">
                 <a:solidFill>
-                  <a:srgbClr val="17AF98"/>
+                  <a:srgbClr val="12B198"/>
                 </a:solidFill>
                 <a:latin typeface="Calibri" pitchFamily="34" charset="0"/>
                 <a:ea typeface="Calibri" pitchFamily="34" charset="-122"/>
@@ -8040,7 +8196,7 @@
       </p:sp>
       <p:sp>
         <p:nvSpPr>
-          <p:cNvPr id="3" name="Shape 1"/>
+          <p:cNvPr id="4" name="Shape 1"/>
           <p:cNvSpPr/>
           <p:nvPr/>
         </p:nvSpPr>
@@ -8062,7 +8218,7 @@
       </p:sp>
       <p:sp>
         <p:nvSpPr>
-          <p:cNvPr id="4" name="Text 2"/>
+          <p:cNvPr id="5" name="Text 2"/>
           <p:cNvSpPr/>
           <p:nvPr/>
         </p:nvSpPr>
@@ -8090,7 +8246,7 @@
             <a:r>
               <a:rPr lang="en-US" sz="1600" b="1" dirty="0">
                 <a:solidFill>
-                  <a:srgbClr val="0F2D52"/>
+                  <a:srgbClr val="093259"/>
                 </a:solidFill>
                 <a:latin typeface="Yu Gothic" pitchFamily="34" charset="0"/>
                 <a:ea typeface="Yu Gothic" pitchFamily="34" charset="-122"/>
@@ -8124,7 +8280,7 @@
       </p:sp>
       <p:sp>
         <p:nvSpPr>
-          <p:cNvPr id="5" name="Text 3"/>
+          <p:cNvPr id="6" name="Text 3"/>
           <p:cNvSpPr/>
           <p:nvPr/>
         </p:nvSpPr>
@@ -8161,7 +8317,7 @@
                 <a:ea typeface="Yu Gothic" pitchFamily="34" charset="-122"/>
                 <a:cs typeface="Yu Gothic" pitchFamily="34" charset="-120"/>
               </a:rPr>
-              <a:t>・退職した時点で「来訪者」</a:t>
+              <a:t>・退職した時点で来訪者です</a:t>
             </a:r>
             <a:endParaRPr lang="en-US" sz="1250" dirty="0"/>
           </a:p>
@@ -8207,7 +8363,7 @@
                 <a:ea typeface="Yu Gothic" pitchFamily="34" charset="-122"/>
                 <a:cs typeface="Yu Gothic" pitchFamily="34" charset="-120"/>
               </a:rPr>
-              <a:t>・入館手続きに戻す。例外を作らない</a:t>
+              <a:t>・入館手続きに戻します。例外を作りません</a:t>
             </a:r>
             <a:endParaRPr lang="en-US" sz="1250" dirty="0"/>
           </a:p>
@@ -8230,7 +8386,7 @@
                 <a:ea typeface="Calibri" pitchFamily="34" charset="-122"/>
                 <a:cs typeface="Calibri" pitchFamily="34" charset="-120"/>
               </a:rPr>
-              <a:t>　 Return them to the visitor process; make no exceptions</a:t>
+              <a:t>　 Return them to the visitor process. Make no exception</a:t>
             </a:r>
             <a:endParaRPr lang="en-US" sz="1250" dirty="0"/>
           </a:p>
@@ -8253,7 +8409,7 @@
                 <a:ea typeface="Yu Gothic" pitchFamily="34" charset="-122"/>
                 <a:cs typeface="Yu Gothic" pitchFamily="34" charset="-120"/>
               </a:rPr>
-              <a:t>・感情に反応しない。経緯に立ち入らない</a:t>
+              <a:t>・経緯には立ち入りません</a:t>
             </a:r>
             <a:endParaRPr lang="en-US" sz="1250" dirty="0"/>
           </a:p>
@@ -8276,7 +8432,7 @@
                 <a:ea typeface="Calibri" pitchFamily="34" charset="-122"/>
                 <a:cs typeface="Calibri" pitchFamily="34" charset="-120"/>
               </a:rPr>
-              <a:t>　 Do not react to emotion, or engage with the history</a:t>
+              <a:t>　 Do not discuss the circumstances of their leaving</a:t>
             </a:r>
             <a:endParaRPr lang="en-US" sz="1250" dirty="0"/>
           </a:p>
@@ -8299,7 +8455,7 @@
                 <a:ea typeface="Yu Gothic" pitchFamily="34" charset="-122"/>
                 <a:cs typeface="Yu Gothic" pitchFamily="34" charset="-120"/>
               </a:rPr>
-              <a:t>・人事へ取り次ぐ</a:t>
+              <a:t>・人事へ取り次ぎます</a:t>
             </a:r>
             <a:endParaRPr lang="en-US" sz="1250" dirty="0"/>
           </a:p>
@@ -8330,7 +8486,7 @@
       </p:sp>
       <p:sp>
         <p:nvSpPr>
-          <p:cNvPr id="6" name="Shape 4"/>
+          <p:cNvPr id="7" name="Shape 4"/>
           <p:cNvSpPr/>
           <p:nvPr/>
         </p:nvSpPr>
@@ -8352,7 +8508,7 @@
       </p:sp>
       <p:sp>
         <p:nvSpPr>
-          <p:cNvPr id="7" name="Text 5"/>
+          <p:cNvPr id="8" name="Text 5"/>
           <p:cNvSpPr/>
           <p:nvPr/>
         </p:nvSpPr>
@@ -8380,7 +8536,7 @@
             <a:r>
               <a:rPr lang="en-US" sz="1600" b="1" dirty="0">
                 <a:solidFill>
-                  <a:srgbClr val="0E8C79"/>
+                  <a:srgbClr val="0D8A76"/>
                 </a:solidFill>
                 <a:latin typeface="Yu Gothic" pitchFamily="34" charset="0"/>
                 <a:ea typeface="Yu Gothic" pitchFamily="34" charset="-122"/>
@@ -8414,7 +8570,7 @@
       </p:sp>
       <p:sp>
         <p:nvSpPr>
-          <p:cNvPr id="8" name="Text 6"/>
+          <p:cNvPr id="9" name="Text 6"/>
           <p:cNvSpPr/>
           <p:nvPr/>
         </p:nvSpPr>
@@ -8451,7 +8607,7 @@
                 <a:ea typeface="Yu Gothic" pitchFamily="34" charset="-122"/>
                 <a:cs typeface="Yu Gothic" pitchFamily="34" charset="-120"/>
               </a:rPr>
-              <a:t>・敷地内では取材に応じない</a:t>
+              <a:t>・敷地内では取材に応じません</a:t>
             </a:r>
             <a:endParaRPr lang="en-US" sz="1250" dirty="0"/>
           </a:p>
@@ -8497,7 +8653,7 @@
                 <a:ea typeface="Yu Gothic" pitchFamily="34" charset="-122"/>
                 <a:cs typeface="Yu Gothic" pitchFamily="34" charset="-120"/>
               </a:rPr>
-              <a:t>・広報へ取り次ぐ。窓口を一本化する</a:t>
+              <a:t>・広報へ取り次ぎます。窓口を一本化します</a:t>
             </a:r>
             <a:endParaRPr lang="en-US" sz="1250" dirty="0"/>
           </a:p>
@@ -8520,7 +8676,7 @@
                 <a:ea typeface="Calibri" pitchFamily="34" charset="-122"/>
                 <a:cs typeface="Calibri" pitchFamily="34" charset="-120"/>
               </a:rPr>
-              <a:t>　 Refer to Communications; keep a single channel</a:t>
+              <a:t>　 Refer to Communications. Keep one channel</a:t>
             </a:r>
             <a:endParaRPr lang="en-US" sz="1250" dirty="0"/>
           </a:p>
@@ -8589,7 +8745,7 @@
                 <a:ea typeface="Yu Gothic" pitchFamily="34" charset="-122"/>
                 <a:cs typeface="Yu Gothic" pitchFamily="34" charset="-120"/>
               </a:rPr>
-              <a:t>・撮影されている前提で振る舞う</a:t>
+              <a:t>・撮影されている前提で行動します</a:t>
             </a:r>
             <a:endParaRPr lang="en-US" sz="1250" dirty="0"/>
           </a:p>
@@ -8612,7 +8768,7 @@
                 <a:ea typeface="Calibri" pitchFamily="34" charset="-122"/>
                 <a:cs typeface="Calibri" pitchFamily="34" charset="-120"/>
               </a:rPr>
-              <a:t>　 Assume you are being filmed</a:t>
+              <a:t>　 Act on the assumption that you are being filmed</a:t>
             </a:r>
             <a:endParaRPr lang="en-US" sz="1250" dirty="0"/>
           </a:p>
@@ -8620,7 +8776,7 @@
       </p:sp>
       <p:sp>
         <p:nvSpPr>
-          <p:cNvPr id="9" name="Text 7"/>
+          <p:cNvPr id="10" name="Text 7"/>
           <p:cNvSpPr/>
           <p:nvPr/>
         </p:nvSpPr>
@@ -8648,13 +8804,13 @@
             <a:r>
               <a:rPr lang="en-US" sz="1300" b="1" dirty="0">
                 <a:solidFill>
-                  <a:srgbClr val="0E8C79"/>
+                  <a:srgbClr val="0D8A76"/>
                 </a:solidFill>
                 <a:latin typeface="Yu Gothic" pitchFamily="34" charset="0"/>
                 <a:ea typeface="Yu Gothic" pitchFamily="34" charset="-122"/>
                 <a:cs typeface="Yu Gothic" pitchFamily="34" charset="-120"/>
               </a:rPr>
-              <a:t>共通原則：自分の意見を言わない。会社の見解をその場で作らない。</a:t>
+              <a:t>共通 ― 自分の意見を述べません。会社の見解をその場で作りません。</a:t>
             </a:r>
             <a:endParaRPr lang="en-US" sz="1300" dirty="0"/>
           </a:p>
@@ -8674,7 +8830,7 @@
                 <a:ea typeface="Calibri" pitchFamily="34" charset="-122"/>
                 <a:cs typeface="Calibri" pitchFamily="34" charset="-120"/>
               </a:rPr>
-              <a:t>The shared rule: never give your own opinion, and never invent the company's position on the spot.</a:t>
+              <a:t>For both: do not give your own opinion, and do not invent the company's position on the spot.</a:t>
             </a:r>
             <a:endParaRPr lang="en-US" sz="1300" dirty="0"/>
           </a:p>
@@ -8682,7 +8838,7 @@
       </p:sp>
       <p:sp>
         <p:nvSpPr>
-          <p:cNvPr id="10" name="Text 8"/>
+          <p:cNvPr id="11" name="Text 8"/>
           <p:cNvSpPr/>
           <p:nvPr/>
         </p:nvSpPr>
@@ -8735,7 +8891,7 @@
       </p:sp>
       <p:sp>
         <p:nvSpPr>
-          <p:cNvPr id="11" name="Text 9"/>
+          <p:cNvPr id="12" name="Text 9"/>
           <p:cNvSpPr/>
           <p:nvPr/>
         </p:nvSpPr>
@@ -8804,9 +8960,33 @@
           <a:chExt cx="0" cy="0"/>
         </a:xfrm>
       </p:grpSpPr>
-      <p:sp>
-        <p:nvSpPr>
-          <p:cNvPr id="2" name="Text 0"/>
+      <p:pic>
+        <p:nvPicPr>
+          <p:cNvPr id="2" name="Image 0" descr="/home/user/Training-/assets/logo.png">    </p:cNvPr>
+          <p:cNvPicPr>
+            <a:picLocks noChangeAspect="1"/>
+          </p:cNvPicPr>
+          <p:nvPr/>
+        </p:nvPicPr>
+        <p:blipFill>
+          <a:blip r:embed="rId1"/>
+          <a:stretch>
+            <a:fillRect/>
+          </a:stretch>
+        </p:blipFill>
+        <p:spPr>
+          <a:xfrm>
+            <a:off x="10765231" y="332912"/>
+            <a:ext cx="786384" cy="742353"/>
+          </a:xfrm>
+          <a:prstGeom prst="rect">
+            <a:avLst/>
+          </a:prstGeom>
+        </p:spPr>
+      </p:pic>
+      <p:sp>
+        <p:nvSpPr>
+          <p:cNvPr id="3" name="Text 0"/>
           <p:cNvSpPr/>
           <p:nvPr/>
         </p:nvSpPr>
@@ -8834,13 +9014,13 @@
             <a:r>
               <a:rPr lang="en-US" sz="2700" b="1" dirty="0">
                 <a:solidFill>
-                  <a:srgbClr val="0F2D52"/>
+                  <a:srgbClr val="093259"/>
                 </a:solidFill>
                 <a:latin typeface="Yu Gothic" pitchFamily="34" charset="0"/>
                 <a:ea typeface="Yu Gothic" pitchFamily="34" charset="-122"/>
                 <a:cs typeface="Yu Gothic" pitchFamily="34" charset="-120"/>
               </a:rPr>
-              <a:t>TTX③ この台詞のうち、どれを選びますか</a:t>
+              <a:t>TTX③ この台詞のうち、どれを選ぶか</a:t>
             </a:r>
             <a:endParaRPr lang="en-US" sz="2700" dirty="0"/>
           </a:p>
@@ -8854,7 +9034,7 @@
             <a:r>
               <a:rPr lang="en-US" sz="1250" i="1" dirty="0">
                 <a:solidFill>
-                  <a:srgbClr val="17AF98"/>
+                  <a:srgbClr val="12B198"/>
                 </a:solidFill>
                 <a:latin typeface="Calibri" pitchFamily="34" charset="0"/>
                 <a:ea typeface="Calibri" pitchFamily="34" charset="-122"/>
@@ -8868,36 +9048,36 @@
       </p:sp>
       <p:sp>
         <p:nvSpPr>
-          <p:cNvPr id="3" name="Shape 1"/>
+          <p:cNvPr id="4" name="Shape 1"/>
           <p:cNvSpPr/>
           <p:nvPr/>
         </p:nvSpPr>
         <p:spPr>
           <a:xfrm>
             <a:off x="640080" y="1627632"/>
-            <a:ext cx="10911535" cy="1481328"/>
+            <a:ext cx="10911535" cy="1700784"/>
           </a:xfrm>
           <a:prstGeom prst="roundRect">
             <a:avLst>
-              <a:gd name="adj" fmla="val 3086"/>
+              <a:gd name="adj" fmla="val 2688"/>
             </a:avLst>
           </a:prstGeom>
           <a:solidFill>
-            <a:srgbClr val="0F2D52"/>
+            <a:srgbClr val="093259"/>
           </a:solidFill>
           <a:ln/>
         </p:spPr>
       </p:sp>
       <p:sp>
         <p:nvSpPr>
-          <p:cNvPr id="4" name="Text 2"/>
+          <p:cNvPr id="5" name="Text 2"/>
           <p:cNvSpPr/>
           <p:nvPr/>
         </p:nvSpPr>
         <p:spPr>
           <a:xfrm>
             <a:off x="1024128" y="1810512"/>
-            <a:ext cx="10143439" cy="1115568"/>
+            <a:ext cx="10143439" cy="1335024"/>
           </a:xfrm>
           <a:prstGeom prst="rect">
             <a:avLst/>
@@ -8918,7 +9098,7 @@
             <a:r>
               <a:rPr lang="en-US" sz="1050" b="1" dirty="0">
                 <a:solidFill>
-                  <a:srgbClr val="17AF98"/>
+                  <a:srgbClr val="12B198"/>
                 </a:solidFill>
                 <a:latin typeface="Yu Gothic" pitchFamily="34" charset="0"/>
                 <a:ea typeface="Yu Gothic" pitchFamily="34" charset="-122"/>
@@ -8935,7 +9115,7 @@
             <a:r>
               <a:rPr lang="en-US" sz="900" dirty="0">
                 <a:solidFill>
-                  <a:srgbClr val="17AF98"/>
+                  <a:srgbClr val="12B198"/>
                 </a:solidFill>
                 <a:latin typeface="Calibri" pitchFamily="34" charset="0"/>
                 <a:ea typeface="Calibri" pitchFamily="34" charset="-122"/>
@@ -8961,7 +9141,7 @@
                 <a:ea typeface="Yu Gothic" pitchFamily="34" charset="-122"/>
                 <a:cs typeface="Yu Gothic" pitchFamily="34" charset="-120"/>
               </a:rPr>
-              <a:t>来訪者が「役員に呼ばれている、急いでいる」と述べ、入館手続きを拒んでいる。声はやや大きく、周囲の来訪者が振り返っている。</a:t>
+              <a:t>来訪者が「役員に呼ばれている、急いでいる」と述べ、入館手続きを拒んでいる。来訪予定表に同姓の記載はあるが、当該役員に電話がつながらない。声はやや大きく、周囲の来訪者が振り返っている。</a:t>
             </a:r>
             <a:endParaRPr lang="en-US" sz="1050" dirty="0"/>
           </a:p>
@@ -8981,7 +9161,7 @@
                 <a:ea typeface="Calibri" pitchFamily="34" charset="-122"/>
                 <a:cs typeface="Calibri" pitchFamily="34" charset="-120"/>
               </a:rPr>
-              <a:t>A visitor says they are expected by an executive and is in a hurry, refusing the sign-in process. Their voice is raised, and other visitors are turning to look.</a:t>
+              <a:t>A visitor says an executive is expecting them and refuses to sign in. The visitor list shows the same family name, but the executive is not answering the phone. Their voice is raised and other visitors are looking.</a:t>
             </a:r>
             <a:endParaRPr lang="en-US" sz="1050" dirty="0"/>
           </a:p>
@@ -8989,18 +9169,18 @@
       </p:sp>
       <p:sp>
         <p:nvSpPr>
-          <p:cNvPr id="5" name="Shape 3"/>
-          <p:cNvSpPr/>
-          <p:nvPr/>
-        </p:nvSpPr>
-        <p:spPr>
-          <a:xfrm>
-            <a:off x="640080" y="3346704"/>
-            <a:ext cx="10911535" cy="429768"/>
+          <p:cNvPr id="6" name="Shape 3"/>
+          <p:cNvSpPr/>
+          <p:nvPr/>
+        </p:nvSpPr>
+        <p:spPr>
+          <a:xfrm>
+            <a:off x="640080" y="3566160"/>
+            <a:ext cx="10911535" cy="374904"/>
           </a:xfrm>
           <a:prstGeom prst="roundRect">
             <a:avLst>
-              <a:gd name="adj" fmla="val 8511"/>
+              <a:gd name="adj" fmla="val 9756"/>
             </a:avLst>
           </a:prstGeom>
           <a:solidFill>
@@ -9011,33 +9191,33 @@
       </p:sp>
       <p:sp>
         <p:nvSpPr>
-          <p:cNvPr id="6" name="Shape 4"/>
-          <p:cNvSpPr/>
-          <p:nvPr/>
-        </p:nvSpPr>
-        <p:spPr>
-          <a:xfrm>
-            <a:off x="859536" y="3396996"/>
+          <p:cNvPr id="7" name="Shape 4"/>
+          <p:cNvSpPr/>
+          <p:nvPr/>
+        </p:nvSpPr>
+        <p:spPr>
+          <a:xfrm>
+            <a:off x="859536" y="3589020"/>
             <a:ext cx="329184" cy="329184"/>
           </a:xfrm>
           <a:prstGeom prst="ellipse">
             <a:avLst/>
           </a:prstGeom>
           <a:solidFill>
-            <a:srgbClr val="17AF98"/>
+            <a:srgbClr val="12B198"/>
           </a:solidFill>
           <a:ln/>
         </p:spPr>
       </p:sp>
       <p:sp>
         <p:nvSpPr>
-          <p:cNvPr id="7" name="Text 5"/>
-          <p:cNvSpPr/>
-          <p:nvPr/>
-        </p:nvSpPr>
-        <p:spPr>
-          <a:xfrm>
-            <a:off x="859536" y="3396996"/>
+          <p:cNvPr id="8" name="Text 5"/>
+          <p:cNvSpPr/>
+          <p:nvPr/>
+        </p:nvSpPr>
+        <p:spPr>
+          <a:xfrm>
+            <a:off x="859536" y="3589020"/>
             <a:ext cx="329184" cy="329184"/>
           </a:xfrm>
           <a:prstGeom prst="rect">
@@ -9070,14 +9250,14 @@
       </p:sp>
       <p:sp>
         <p:nvSpPr>
-          <p:cNvPr id="8" name="Text 6"/>
-          <p:cNvSpPr/>
-          <p:nvPr/>
-        </p:nvSpPr>
-        <p:spPr>
-          <a:xfrm>
-            <a:off x="1335024" y="3401568"/>
-            <a:ext cx="9960559" cy="320040"/>
+          <p:cNvPr id="9" name="Text 6"/>
+          <p:cNvSpPr/>
+          <p:nvPr/>
+        </p:nvSpPr>
+        <p:spPr>
+          <a:xfrm>
+            <a:off x="1335024" y="3621024"/>
+            <a:ext cx="9960559" cy="265176"/>
           </a:xfrm>
           <a:prstGeom prst="rect">
             <a:avLst/>
@@ -9124,7 +9304,7 @@
                 <a:ea typeface="Calibri" pitchFamily="34" charset="-122"/>
                 <a:cs typeface="Calibri" pitchFamily="34" charset="-120"/>
               </a:rPr>
-              <a:t>A: "Rules are rules — I cannot let you through."　B: "I am sorry you are pressed for time. I will check right away — could you wait here?"</a:t>
+              <a:t>A: "Rules are rules, I cannot let you through."　B: "I am sorry you are in a hurry. I will check now. Could you wait here?"</a:t>
             </a:r>
             <a:endParaRPr lang="en-US" sz="1300" dirty="0"/>
           </a:p>
@@ -9132,18 +9312,18 @@
       </p:sp>
       <p:sp>
         <p:nvSpPr>
-          <p:cNvPr id="9" name="Shape 7"/>
-          <p:cNvSpPr/>
-          <p:nvPr/>
-        </p:nvSpPr>
-        <p:spPr>
-          <a:xfrm>
-            <a:off x="640080" y="3867912"/>
-            <a:ext cx="10911535" cy="429768"/>
+          <p:cNvPr id="10" name="Shape 7"/>
+          <p:cNvSpPr/>
+          <p:nvPr/>
+        </p:nvSpPr>
+        <p:spPr>
+          <a:xfrm>
+            <a:off x="640080" y="4032504"/>
+            <a:ext cx="10911535" cy="374904"/>
           </a:xfrm>
           <a:prstGeom prst="roundRect">
             <a:avLst>
-              <a:gd name="adj" fmla="val 8511"/>
+              <a:gd name="adj" fmla="val 9756"/>
             </a:avLst>
           </a:prstGeom>
           <a:solidFill>
@@ -9154,33 +9334,33 @@
       </p:sp>
       <p:sp>
         <p:nvSpPr>
-          <p:cNvPr id="10" name="Shape 8"/>
-          <p:cNvSpPr/>
-          <p:nvPr/>
-        </p:nvSpPr>
-        <p:spPr>
-          <a:xfrm>
-            <a:off x="859536" y="3918204"/>
+          <p:cNvPr id="11" name="Shape 8"/>
+          <p:cNvSpPr/>
+          <p:nvPr/>
+        </p:nvSpPr>
+        <p:spPr>
+          <a:xfrm>
+            <a:off x="859536" y="4055364"/>
             <a:ext cx="329184" cy="329184"/>
           </a:xfrm>
           <a:prstGeom prst="ellipse">
             <a:avLst/>
           </a:prstGeom>
           <a:solidFill>
-            <a:srgbClr val="17AF98"/>
+            <a:srgbClr val="12B198"/>
           </a:solidFill>
           <a:ln/>
         </p:spPr>
       </p:sp>
       <p:sp>
         <p:nvSpPr>
-          <p:cNvPr id="11" name="Text 9"/>
-          <p:cNvSpPr/>
-          <p:nvPr/>
-        </p:nvSpPr>
-        <p:spPr>
-          <a:xfrm>
-            <a:off x="859536" y="3918204"/>
+          <p:cNvPr id="12" name="Text 9"/>
+          <p:cNvSpPr/>
+          <p:nvPr/>
+        </p:nvSpPr>
+        <p:spPr>
+          <a:xfrm>
+            <a:off x="859536" y="4055364"/>
             <a:ext cx="329184" cy="329184"/>
           </a:xfrm>
           <a:prstGeom prst="rect">
@@ -9213,14 +9393,14 @@
       </p:sp>
       <p:sp>
         <p:nvSpPr>
-          <p:cNvPr id="12" name="Text 10"/>
-          <p:cNvSpPr/>
-          <p:nvPr/>
-        </p:nvSpPr>
-        <p:spPr>
-          <a:xfrm>
-            <a:off x="1335024" y="3922776"/>
-            <a:ext cx="9960559" cy="320040"/>
+          <p:cNvPr id="13" name="Text 10"/>
+          <p:cNvSpPr/>
+          <p:nvPr/>
+        </p:nvSpPr>
+        <p:spPr>
+          <a:xfrm>
+            <a:off x="1335024" y="4087368"/>
+            <a:ext cx="9960559" cy="265176"/>
           </a:xfrm>
           <a:prstGeom prst="rect">
             <a:avLst/>
@@ -9267,7 +9447,7 @@
                 <a:ea typeface="Calibri" pitchFamily="34" charset="-122"/>
                 <a:cs typeface="Calibri" pitchFamily="34" charset="-120"/>
               </a:rPr>
-              <a:t>C: "Please calm down."　D: "Which executive is it? If you give me the name I will connect you myself."</a:t>
+              <a:t>C: "Please calm down."　D: "Which executive is it? Give me the name and I will contact them."</a:t>
             </a:r>
             <a:endParaRPr lang="en-US" sz="1300" dirty="0"/>
           </a:p>
@@ -9275,18 +9455,18 @@
       </p:sp>
       <p:sp>
         <p:nvSpPr>
-          <p:cNvPr id="13" name="Shape 11"/>
-          <p:cNvSpPr/>
-          <p:nvPr/>
-        </p:nvSpPr>
-        <p:spPr>
-          <a:xfrm>
-            <a:off x="640080" y="4389120"/>
-            <a:ext cx="10911535" cy="429768"/>
+          <p:cNvPr id="14" name="Shape 11"/>
+          <p:cNvSpPr/>
+          <p:nvPr/>
+        </p:nvSpPr>
+        <p:spPr>
+          <a:xfrm>
+            <a:off x="640080" y="4498848"/>
+            <a:ext cx="10911535" cy="374904"/>
           </a:xfrm>
           <a:prstGeom prst="roundRect">
             <a:avLst>
-              <a:gd name="adj" fmla="val 8511"/>
+              <a:gd name="adj" fmla="val 9756"/>
             </a:avLst>
           </a:prstGeom>
           <a:solidFill>
@@ -9297,33 +9477,33 @@
       </p:sp>
       <p:sp>
         <p:nvSpPr>
-          <p:cNvPr id="14" name="Shape 12"/>
-          <p:cNvSpPr/>
-          <p:nvPr/>
-        </p:nvSpPr>
-        <p:spPr>
-          <a:xfrm>
-            <a:off x="859536" y="4439412"/>
+          <p:cNvPr id="15" name="Shape 12"/>
+          <p:cNvSpPr/>
+          <p:nvPr/>
+        </p:nvSpPr>
+        <p:spPr>
+          <a:xfrm>
+            <a:off x="859536" y="4521708"/>
             <a:ext cx="329184" cy="329184"/>
           </a:xfrm>
           <a:prstGeom prst="ellipse">
             <a:avLst/>
           </a:prstGeom>
           <a:solidFill>
-            <a:srgbClr val="17AF98"/>
+            <a:srgbClr val="12B198"/>
           </a:solidFill>
           <a:ln/>
         </p:spPr>
       </p:sp>
       <p:sp>
         <p:nvSpPr>
-          <p:cNvPr id="15" name="Text 13"/>
-          <p:cNvSpPr/>
-          <p:nvPr/>
-        </p:nvSpPr>
-        <p:spPr>
-          <a:xfrm>
-            <a:off x="859536" y="4439412"/>
+          <p:cNvPr id="16" name="Text 13"/>
+          <p:cNvSpPr/>
+          <p:nvPr/>
+        </p:nvSpPr>
+        <p:spPr>
+          <a:xfrm>
+            <a:off x="859536" y="4521708"/>
             <a:ext cx="329184" cy="329184"/>
           </a:xfrm>
           <a:prstGeom prst="rect">
@@ -9356,14 +9536,14 @@
       </p:sp>
       <p:sp>
         <p:nvSpPr>
-          <p:cNvPr id="16" name="Text 14"/>
-          <p:cNvSpPr/>
-          <p:nvPr/>
-        </p:nvSpPr>
-        <p:spPr>
-          <a:xfrm>
-            <a:off x="1335024" y="4443984"/>
-            <a:ext cx="9960559" cy="320040"/>
+          <p:cNvPr id="17" name="Text 14"/>
+          <p:cNvSpPr/>
+          <p:nvPr/>
+        </p:nvSpPr>
+        <p:spPr>
+          <a:xfrm>
+            <a:off x="1335024" y="4553712"/>
+            <a:ext cx="9960559" cy="265176"/>
           </a:xfrm>
           <a:prstGeom prst="rect">
             <a:avLst/>
@@ -9390,7 +9570,7 @@
                 <a:ea typeface="Yu Gothic" pitchFamily="34" charset="-122"/>
                 <a:cs typeface="Yu Gothic" pitchFamily="34" charset="-120"/>
               </a:rPr>
-              <a:t>どれを選ぶか。そして、ほかはなぜ選ばないのか。</a:t>
+              <a:t>どれを選ぶか。ほかを選ばない理由は何か。</a:t>
             </a:r>
             <a:endParaRPr lang="en-US" sz="1300" dirty="0"/>
           </a:p>
@@ -9410,7 +9590,7 @@
                 <a:ea typeface="Calibri" pitchFamily="34" charset="-122"/>
                 <a:cs typeface="Calibri" pitchFamily="34" charset="-120"/>
               </a:rPr>
-              <a:t>Which do you choose — and why not the others?</a:t>
+              <a:t>Which do you choose? Why not the others?</a:t>
             </a:r>
             <a:endParaRPr lang="en-US" sz="1300" dirty="0"/>
           </a:p>
@@ -9418,18 +9598,18 @@
       </p:sp>
       <p:sp>
         <p:nvSpPr>
-          <p:cNvPr id="17" name="Shape 15"/>
-          <p:cNvSpPr/>
-          <p:nvPr/>
-        </p:nvSpPr>
-        <p:spPr>
-          <a:xfrm>
-            <a:off x="640080" y="4910328"/>
-            <a:ext cx="10911535" cy="429768"/>
+          <p:cNvPr id="18" name="Shape 15"/>
+          <p:cNvSpPr/>
+          <p:nvPr/>
+        </p:nvSpPr>
+        <p:spPr>
+          <a:xfrm>
+            <a:off x="640080" y="4965192"/>
+            <a:ext cx="10911535" cy="374904"/>
           </a:xfrm>
           <a:prstGeom prst="roundRect">
             <a:avLst>
-              <a:gd name="adj" fmla="val 8511"/>
+              <a:gd name="adj" fmla="val 9756"/>
             </a:avLst>
           </a:prstGeom>
           <a:solidFill>
@@ -9440,33 +9620,33 @@
       </p:sp>
       <p:sp>
         <p:nvSpPr>
-          <p:cNvPr id="18" name="Shape 16"/>
-          <p:cNvSpPr/>
-          <p:nvPr/>
-        </p:nvSpPr>
-        <p:spPr>
-          <a:xfrm>
-            <a:off x="859536" y="4960620"/>
+          <p:cNvPr id="19" name="Shape 16"/>
+          <p:cNvSpPr/>
+          <p:nvPr/>
+        </p:nvSpPr>
+        <p:spPr>
+          <a:xfrm>
+            <a:off x="859536" y="4988052"/>
             <a:ext cx="329184" cy="329184"/>
           </a:xfrm>
           <a:prstGeom prst="ellipse">
             <a:avLst/>
           </a:prstGeom>
           <a:solidFill>
-            <a:srgbClr val="17AF98"/>
+            <a:srgbClr val="12B198"/>
           </a:solidFill>
           <a:ln/>
         </p:spPr>
       </p:sp>
       <p:sp>
         <p:nvSpPr>
-          <p:cNvPr id="19" name="Text 17"/>
-          <p:cNvSpPr/>
-          <p:nvPr/>
-        </p:nvSpPr>
-        <p:spPr>
-          <a:xfrm>
-            <a:off x="859536" y="4960620"/>
+          <p:cNvPr id="20" name="Text 17"/>
+          <p:cNvSpPr/>
+          <p:nvPr/>
+        </p:nvSpPr>
+        <p:spPr>
+          <a:xfrm>
+            <a:off x="859536" y="4988052"/>
             <a:ext cx="329184" cy="329184"/>
           </a:xfrm>
           <a:prstGeom prst="rect">
@@ -9499,14 +9679,14 @@
       </p:sp>
       <p:sp>
         <p:nvSpPr>
-          <p:cNvPr id="20" name="Text 18"/>
-          <p:cNvSpPr/>
-          <p:nvPr/>
-        </p:nvSpPr>
-        <p:spPr>
-          <a:xfrm>
-            <a:off x="1335024" y="4965192"/>
-            <a:ext cx="9960559" cy="320040"/>
+          <p:cNvPr id="21" name="Text 18"/>
+          <p:cNvSpPr/>
+          <p:nvPr/>
+        </p:nvSpPr>
+        <p:spPr>
+          <a:xfrm>
+            <a:off x="1335024" y="5020056"/>
+            <a:ext cx="9960559" cy="265176"/>
           </a:xfrm>
           <a:prstGeom prst="rect">
             <a:avLst/>
@@ -9533,7 +9713,7 @@
                 <a:ea typeface="Yu Gothic" pitchFamily="34" charset="-122"/>
                 <a:cs typeface="Yu Gothic" pitchFamily="34" charset="-120"/>
               </a:rPr>
-              <a:t>それでも相手が声を荒げたら、次に何と言うか。</a:t>
+              <a:t>予定表に同姓の記載があることは、判断を変えるか。</a:t>
             </a:r>
             <a:endParaRPr lang="en-US" sz="1300" dirty="0"/>
           </a:p>
@@ -9553,7 +9733,7 @@
                 <a:ea typeface="Calibri" pitchFamily="34" charset="-122"/>
                 <a:cs typeface="Calibri" pitchFamily="34" charset="-120"/>
               </a:rPr>
-              <a:t>If they raise their voice anyway, what do you say next?</a:t>
+              <a:t>The list shows the same family name. Does that change your decision?</a:t>
             </a:r>
             <a:endParaRPr lang="en-US" sz="1300" dirty="0"/>
           </a:p>
@@ -9561,7 +9741,7 @@
       </p:sp>
       <p:sp>
         <p:nvSpPr>
-          <p:cNvPr id="21" name="Shape 19"/>
+          <p:cNvPr id="22" name="Shape 19"/>
           <p:cNvSpPr/>
           <p:nvPr/>
         </p:nvSpPr>
@@ -9583,7 +9763,7 @@
       </p:sp>
       <p:sp>
         <p:nvSpPr>
-          <p:cNvPr id="22" name="Text 20"/>
+          <p:cNvPr id="23" name="Text 20"/>
           <p:cNvSpPr/>
           <p:nvPr/>
         </p:nvSpPr>
@@ -9611,7 +9791,7 @@
             <a:r>
               <a:rPr lang="en-US" sz="1000" b="1" dirty="0">
                 <a:solidFill>
-                  <a:srgbClr val="0E8C79"/>
+                  <a:srgbClr val="0D8A76"/>
                 </a:solidFill>
                 <a:latin typeface="Yu Gothic" pitchFamily="34" charset="0"/>
                 <a:ea typeface="Yu Gothic" pitchFamily="34" charset="-122"/>
@@ -9628,7 +9808,7 @@
             <a:r>
               <a:rPr lang="en-US" sz="850" dirty="0">
                 <a:solidFill>
-                  <a:srgbClr val="0E8C79"/>
+                  <a:srgbClr val="0D8A76"/>
                 </a:solidFill>
                 <a:latin typeface="Calibri" pitchFamily="34" charset="0"/>
                 <a:ea typeface="Calibri" pitchFamily="34" charset="-122"/>
@@ -9651,7 +9831,7 @@
                 <a:ea typeface="Yu Gothic" pitchFamily="34" charset="-122"/>
                 <a:cs typeface="Yu Gothic" pitchFamily="34" charset="-120"/>
               </a:rPr>
-              <a:t>相手が「もういい」と言って、ゲートに向かって歩き出した。</a:t>
+              <a:t>相手がスマートフォンを向け、撮影を始めた。</a:t>
             </a:r>
             <a:endParaRPr lang="en-US" sz="1000" dirty="0"/>
           </a:p>
@@ -9671,7 +9851,7 @@
                 <a:ea typeface="Calibri" pitchFamily="34" charset="-122"/>
                 <a:cs typeface="Calibri" pitchFamily="34" charset="-120"/>
               </a:rPr>
-              <a:t>They say "forget it" and start walking toward the gate.</a:t>
+              <a:t>The visitor points a smartphone at you and starts filming.</a:t>
             </a:r>
             <a:endParaRPr lang="en-US" sz="1000" dirty="0"/>
           </a:p>
@@ -9679,7 +9859,7 @@
       </p:sp>
       <p:sp>
         <p:nvSpPr>
-          <p:cNvPr id="23" name="Text 21"/>
+          <p:cNvPr id="24" name="Text 21"/>
           <p:cNvSpPr/>
           <p:nvPr/>
         </p:nvSpPr>
@@ -9732,7 +9912,7 @@
       </p:sp>
       <p:sp>
         <p:nvSpPr>
-          <p:cNvPr id="24" name="Text 22"/>
+          <p:cNvPr id="25" name="Text 22"/>
           <p:cNvSpPr/>
           <p:nvPr/>
         </p:nvSpPr>

--- a/decks/04_5限_De-escalation.pptx
+++ b/decks/04_5限_De-escalation.pptx
@@ -14,9 +14,11 @@
     <p:sldId id="262" r:id="rId8"/>
     <p:sldId id="263" r:id="rId9"/>
     <p:sldId id="264" r:id="rId10"/>
+    <p:sldId id="265" r:id="rId11"/>
+    <p:sldId id="266" r:id="rId12"/>
   </p:sldIdLst>
   <p:notesMasterIdLst>
-    <p:notesMasterId r:id="rId11"/>
+    <p:notesMasterId r:id="rId13"/>
   </p:notesMasterIdLst>
   <p:sldSz cx="12192000" cy="6858000"/>
   <p:notesSz cx="6858000" cy="12192000"/>
@@ -534,6 +536,182 @@
             <a:fld id="{F7021451-1387-4CA6-816F-3879F97B5CBC}" type="slidenum">
               <a:rPr lang="en-US"/>
               <a:t>1</a:t>
+            </a:fld>
+            <a:endParaRPr lang="en-US"/>
+          </a:p>
+        </p:txBody>
+      </p:sp>
+    </p:spTree>
+    <p:extLst>
+      <p:ext uri="{BB962C8B-B14F-4D97-AF65-F5344CB8AC3E}">
+        <p14:creationId xmlns:p14="http://schemas.microsoft.com/office/powerpoint/2010/main" val="1024086991"/>
+      </p:ext>
+    </p:extLst>
+  </p:cSld>
+  <p:clrMapOvr>
+    <a:masterClrMapping/>
+  </p:clrMapOvr>
+</p:notes>
+</file>
+
+<file path=ppt/notesSlides/notesSlide10.xml><?xml version="1.0" encoding="utf-8"?>
+<p:notes xmlns:a="http://schemas.openxmlformats.org/drawingml/2006/main" xmlns:r="http://schemas.openxmlformats.org/officeDocument/2006/relationships" xmlns:p="http://schemas.openxmlformats.org/presentationml/2006/main">
+  <p:cSld>
+    <p:spTree>
+      <p:nvGrpSpPr>
+        <p:cNvPr id="1" name=""/>
+        <p:cNvGrpSpPr/>
+        <p:nvPr/>
+      </p:nvGrpSpPr>
+      <p:grpSpPr>
+        <a:xfrm>
+          <a:off x="0" y="0"/>
+          <a:ext cx="0" cy="0"/>
+          <a:chOff x="0" y="0"/>
+          <a:chExt cx="0" cy="0"/>
+        </a:xfrm>
+      </p:grpSpPr>
+      <p:sp>
+        <p:nvSpPr>
+          <p:cNvPr id="2" name="Slide Image Placeholder 1"/>
+          <p:cNvSpPr>
+            <a:spLocks noGrp="1" noRot="1" noChangeAspect="1"/>
+          </p:cNvSpPr>
+          <p:nvPr>
+            <p:ph type="sldImg"/>
+          </p:nvPr>
+        </p:nvSpPr>
+        <p:spPr/>
+      </p:sp>
+      <p:sp>
+        <p:nvSpPr>
+          <p:cNvPr id="3" name="Notes Placeholder 2"/>
+          <p:cNvSpPr>
+            <a:spLocks noGrp="1"/>
+          </p:cNvSpPr>
+          <p:nvPr>
+            <p:ph type="body" idx="1"/>
+          </p:nvPr>
+        </p:nvSpPr>
+        <p:spPr/>
+        <p:txBody>
+          <a:bodyPr/>
+          <a:lstStyle/>
+          <a:p>
+            <a:r>
+              <a:rPr lang="en-US" dirty="0"/>
+              <a:t/>
+            </a:r>
+            <a:endParaRPr lang="en-US" dirty="0"/>
+          </a:p>
+        </p:txBody>
+      </p:sp>
+      <p:sp>
+        <p:nvSpPr>
+          <p:cNvPr id="4" name="Slide Number Placeholder 3"/>
+          <p:cNvSpPr>
+            <a:spLocks noGrp="1"/>
+          </p:cNvSpPr>
+          <p:nvPr>
+            <p:ph type="sldNum" sz="quarter" idx="10"/>
+          </p:nvPr>
+        </p:nvSpPr>
+        <p:spPr/>
+        <p:txBody>
+          <a:bodyPr/>
+          <a:lstStyle/>
+          <a:p>
+            <a:fld id="{F7021451-1387-4CA6-816F-3879F97B5CBC}" type="slidenum">
+              <a:rPr lang="en-US"/>
+              <a:t>10</a:t>
+            </a:fld>
+            <a:endParaRPr lang="en-US"/>
+          </a:p>
+        </p:txBody>
+      </p:sp>
+    </p:spTree>
+    <p:extLst>
+      <p:ext uri="{BB962C8B-B14F-4D97-AF65-F5344CB8AC3E}">
+        <p14:creationId xmlns:p14="http://schemas.microsoft.com/office/powerpoint/2010/main" val="1024086991"/>
+      </p:ext>
+    </p:extLst>
+  </p:cSld>
+  <p:clrMapOvr>
+    <a:masterClrMapping/>
+  </p:clrMapOvr>
+</p:notes>
+</file>
+
+<file path=ppt/notesSlides/notesSlide11.xml><?xml version="1.0" encoding="utf-8"?>
+<p:notes xmlns:a="http://schemas.openxmlformats.org/drawingml/2006/main" xmlns:r="http://schemas.openxmlformats.org/officeDocument/2006/relationships" xmlns:p="http://schemas.openxmlformats.org/presentationml/2006/main">
+  <p:cSld>
+    <p:spTree>
+      <p:nvGrpSpPr>
+        <p:cNvPr id="1" name=""/>
+        <p:cNvGrpSpPr/>
+        <p:nvPr/>
+      </p:nvGrpSpPr>
+      <p:grpSpPr>
+        <a:xfrm>
+          <a:off x="0" y="0"/>
+          <a:ext cx="0" cy="0"/>
+          <a:chOff x="0" y="0"/>
+          <a:chExt cx="0" cy="0"/>
+        </a:xfrm>
+      </p:grpSpPr>
+      <p:sp>
+        <p:nvSpPr>
+          <p:cNvPr id="2" name="Slide Image Placeholder 1"/>
+          <p:cNvSpPr>
+            <a:spLocks noGrp="1" noRot="1" noChangeAspect="1"/>
+          </p:cNvSpPr>
+          <p:nvPr>
+            <p:ph type="sldImg"/>
+          </p:nvPr>
+        </p:nvSpPr>
+        <p:spPr/>
+      </p:sp>
+      <p:sp>
+        <p:nvSpPr>
+          <p:cNvPr id="3" name="Notes Placeholder 2"/>
+          <p:cNvSpPr>
+            <a:spLocks noGrp="1"/>
+          </p:cNvSpPr>
+          <p:nvPr>
+            <p:ph type="body" idx="1"/>
+          </p:nvPr>
+        </p:nvSpPr>
+        <p:spPr/>
+        <p:txBody>
+          <a:bodyPr/>
+          <a:lstStyle/>
+          <a:p>
+            <a:r>
+              <a:rPr lang="en-US" dirty="0"/>
+              <a:t/>
+            </a:r>
+            <a:endParaRPr lang="en-US" dirty="0"/>
+          </a:p>
+        </p:txBody>
+      </p:sp>
+      <p:sp>
+        <p:nvSpPr>
+          <p:cNvPr id="4" name="Slide Number Placeholder 3"/>
+          <p:cNvSpPr>
+            <a:spLocks noGrp="1"/>
+          </p:cNvSpPr>
+          <p:nvPr>
+            <p:ph type="sldNum" sz="quarter" idx="10"/>
+          </p:nvPr>
+        </p:nvSpPr>
+        <p:spPr/>
+        <p:txBody>
+          <a:bodyPr/>
+          <a:lstStyle/>
+          <a:p>
+            <a:fld id="{F7021451-1387-4CA6-816F-3879F97B5CBC}" type="slidenum">
+              <a:rPr lang="en-US"/>
+              <a:t>11</a:t>
             </a:fld>
             <a:endParaRPr lang="en-US"/>
           </a:p>
@@ -1874,6 +2052,2489 @@
 </p:sld>
 </file>
 
+<file path=ppt/slides/slide10.xml><?xml version="1.0" encoding="utf-8"?>
+<p:sld xmlns:a="http://schemas.openxmlformats.org/drawingml/2006/main" xmlns:r="http://schemas.openxmlformats.org/officeDocument/2006/relationships" xmlns:p="http://schemas.openxmlformats.org/presentationml/2006/main">
+  <p:cSld name="Slide 10">
+    <p:bg>
+      <p:bgPr>
+        <a:solidFill>
+          <a:srgbClr val="FFFFFF"/>
+        </a:solidFill>
+      </p:bgPr>
+    </p:bg>
+    <p:spTree>
+      <p:nvGrpSpPr>
+        <p:cNvPr id="1" name=""/>
+        <p:cNvGrpSpPr/>
+        <p:nvPr/>
+      </p:nvGrpSpPr>
+      <p:grpSpPr>
+        <a:xfrm>
+          <a:off x="0" y="0"/>
+          <a:ext cx="0" cy="0"/>
+          <a:chOff x="0" y="0"/>
+          <a:chExt cx="0" cy="0"/>
+        </a:xfrm>
+      </p:grpSpPr>
+      <p:pic>
+        <p:nvPicPr>
+          <p:cNvPr id="2" name="Image 0" descr="/home/user/Training-/assets/logo.png">    </p:cNvPr>
+          <p:cNvPicPr>
+            <a:picLocks noChangeAspect="1"/>
+          </p:cNvPicPr>
+          <p:nvPr/>
+        </p:nvPicPr>
+        <p:blipFill>
+          <a:blip r:embed="rId1"/>
+          <a:stretch>
+            <a:fillRect/>
+          </a:stretch>
+        </p:blipFill>
+        <p:spPr>
+          <a:xfrm>
+            <a:off x="10765231" y="332912"/>
+            <a:ext cx="786384" cy="742353"/>
+          </a:xfrm>
+          <a:prstGeom prst="rect">
+            <a:avLst/>
+          </a:prstGeom>
+        </p:spPr>
+      </p:pic>
+      <p:sp>
+        <p:nvSpPr>
+          <p:cNvPr id="3" name="Text 0"/>
+          <p:cNvSpPr/>
+          <p:nvPr/>
+        </p:nvSpPr>
+        <p:spPr>
+          <a:xfrm>
+            <a:off x="640080" y="384048"/>
+            <a:ext cx="8982151" cy="768096"/>
+          </a:xfrm>
+          <a:prstGeom prst="rect">
+            <a:avLst/>
+          </a:prstGeom>
+          <a:noFill/>
+          <a:ln/>
+        </p:spPr>
+        <p:txBody>
+          <a:bodyPr wrap="square" lIns="0" tIns="0" rIns="0" bIns="0" rtlCol="0" anchor="t"/>
+          <a:lstStyle/>
+          <a:p>
+            <a:pPr indent="0" marL="0">
+              <a:lnSpc>
+                <a:spcPct val="94000"/>
+              </a:lnSpc>
+              <a:buNone/>
+            </a:pPr>
+            <a:r>
+              <a:rPr lang="en-US" sz="2300" b="1" dirty="0">
+                <a:solidFill>
+                  <a:srgbClr val="093259"/>
+                </a:solidFill>
+                <a:latin typeface="Yu Gothic" pitchFamily="34" charset="0"/>
+                <a:ea typeface="Yu Gothic" pitchFamily="34" charset="-122"/>
+                <a:cs typeface="Yu Gothic" pitchFamily="34" charset="-120"/>
+              </a:rPr>
+              <a:t>TTX 5-B　退去に応じない元従業員</a:t>
+            </a:r>
+            <a:endParaRPr lang="en-US" sz="2300" dirty="0"/>
+          </a:p>
+          <a:p>
+            <a:pPr indent="0" marL="0">
+              <a:lnSpc>
+                <a:spcPct val="94000"/>
+              </a:lnSpc>
+              <a:buNone/>
+            </a:pPr>
+            <a:r>
+              <a:rPr lang="en-US" sz="1100" i="1" dirty="0">
+                <a:solidFill>
+                  <a:srgbClr val="12B198"/>
+                </a:solidFill>
+                <a:latin typeface="Calibri" pitchFamily="34" charset="0"/>
+                <a:ea typeface="Calibri" pitchFamily="34" charset="-122"/>
+                <a:cs typeface="Calibri" pitchFamily="34" charset="-120"/>
+              </a:rPr>
+              <a:t>TTX 5-B — A Former Employee Who Will Not Leave</a:t>
+            </a:r>
+            <a:endParaRPr lang="en-US" sz="2300" dirty="0"/>
+          </a:p>
+        </p:txBody>
+      </p:sp>
+      <p:sp>
+        <p:nvSpPr>
+          <p:cNvPr id="4" name="Shape 1"/>
+          <p:cNvSpPr/>
+          <p:nvPr/>
+        </p:nvSpPr>
+        <p:spPr>
+          <a:xfrm>
+            <a:off x="9686239" y="438912"/>
+            <a:ext cx="932688" cy="310896"/>
+          </a:xfrm>
+          <a:prstGeom prst="roundRect">
+            <a:avLst>
+              <a:gd name="adj" fmla="val 14706"/>
+            </a:avLst>
+          </a:prstGeom>
+          <a:solidFill>
+            <a:srgbClr val="093259"/>
+          </a:solidFill>
+          <a:ln/>
+        </p:spPr>
+      </p:sp>
+      <p:sp>
+        <p:nvSpPr>
+          <p:cNvPr id="5" name="Text 2"/>
+          <p:cNvSpPr/>
+          <p:nvPr/>
+        </p:nvSpPr>
+        <p:spPr>
+          <a:xfrm>
+            <a:off x="9686239" y="438912"/>
+            <a:ext cx="932688" cy="310896"/>
+          </a:xfrm>
+          <a:prstGeom prst="rect">
+            <a:avLst/>
+          </a:prstGeom>
+          <a:noFill/>
+          <a:ln/>
+        </p:spPr>
+        <p:txBody>
+          <a:bodyPr wrap="square" lIns="0" tIns="0" rIns="0" bIns="0" rtlCol="0" anchor="ctr"/>
+          <a:lstStyle/>
+          <a:p>
+            <a:pPr algn="ctr" indent="0" marL="0">
+              <a:buNone/>
+            </a:pPr>
+            <a:r>
+              <a:rPr lang="en-US" sz="1100" b="1" dirty="0">
+                <a:solidFill>
+                  <a:srgbClr val="FFFFFF"/>
+                </a:solidFill>
+                <a:latin typeface="Calibri" pitchFamily="34" charset="0"/>
+                <a:ea typeface="Calibri" pitchFamily="34" charset="-122"/>
+                <a:cs typeface="Calibri" pitchFamily="34" charset="-120"/>
+              </a:rPr>
+              <a:t>CASE 5-B</a:t>
+            </a:r>
+            <a:endParaRPr lang="en-US" sz="1100" dirty="0"/>
+          </a:p>
+        </p:txBody>
+      </p:sp>
+      <p:sp>
+        <p:nvSpPr>
+          <p:cNvPr id="6" name="Shape 3"/>
+          <p:cNvSpPr/>
+          <p:nvPr/>
+        </p:nvSpPr>
+        <p:spPr>
+          <a:xfrm>
+            <a:off x="640080" y="1188720"/>
+            <a:ext cx="10911535" cy="1124712"/>
+          </a:xfrm>
+          <a:prstGeom prst="roundRect">
+            <a:avLst>
+              <a:gd name="adj" fmla="val 3252"/>
+            </a:avLst>
+          </a:prstGeom>
+          <a:solidFill>
+            <a:srgbClr val="093259"/>
+          </a:solidFill>
+          <a:ln/>
+        </p:spPr>
+      </p:sp>
+      <p:sp>
+        <p:nvSpPr>
+          <p:cNvPr id="7" name="Text 4"/>
+          <p:cNvSpPr/>
+          <p:nvPr/>
+        </p:nvSpPr>
+        <p:spPr>
+          <a:xfrm>
+            <a:off x="950976" y="1316736"/>
+            <a:ext cx="10289743" cy="868680"/>
+          </a:xfrm>
+          <a:prstGeom prst="rect">
+            <a:avLst/>
+          </a:prstGeom>
+          <a:noFill/>
+          <a:ln/>
+        </p:spPr>
+        <p:txBody>
+          <a:bodyPr wrap="square" lIns="0" tIns="0" rIns="0" bIns="0" rtlCol="0" anchor="t"/>
+          <a:lstStyle/>
+          <a:p>
+            <a:pPr indent="0" marL="0">
+              <a:lnSpc>
+                <a:spcPct val="92000"/>
+              </a:lnSpc>
+              <a:buNone/>
+            </a:pPr>
+            <a:r>
+              <a:rPr lang="en-US" sz="950" b="1" dirty="0">
+                <a:solidFill>
+                  <a:srgbClr val="12B198"/>
+                </a:solidFill>
+                <a:latin typeface="Yu Gothic" pitchFamily="34" charset="0"/>
+                <a:ea typeface="Yu Gothic" pitchFamily="34" charset="-122"/>
+                <a:cs typeface="Yu Gothic" pitchFamily="34" charset="-120"/>
+              </a:rPr>
+              <a:t>シナリオ　</a:t>
+            </a:r>
+            <a:pPr indent="0" marL="0">
+              <a:lnSpc>
+                <a:spcPct val="92000"/>
+              </a:lnSpc>
+              <a:buNone/>
+            </a:pPr>
+            <a:r>
+              <a:rPr lang="en-US" sz="800" dirty="0">
+                <a:solidFill>
+                  <a:srgbClr val="12B198"/>
+                </a:solidFill>
+                <a:latin typeface="Calibri" pitchFamily="34" charset="0"/>
+                <a:ea typeface="Calibri" pitchFamily="34" charset="-122"/>
+                <a:cs typeface="Calibri" pitchFamily="34" charset="-120"/>
+              </a:rPr>
+              <a:t>SCENARIO</a:t>
+            </a:r>
+            <a:endParaRPr lang="en-US" sz="950" dirty="0"/>
+          </a:p>
+          <a:p>
+            <a:pPr indent="0" marL="0">
+              <a:lnSpc>
+                <a:spcPct val="92000"/>
+              </a:lnSpc>
+              <a:buNone/>
+            </a:pPr>
+            <a:r>
+              <a:rPr lang="en-US" sz="1150" b="1" dirty="0">
+                <a:solidFill>
+                  <a:srgbClr val="FFFFFF"/>
+                </a:solidFill>
+                <a:latin typeface="Yu Gothic" pitchFamily="34" charset="0"/>
+                <a:ea typeface="Yu Gothic" pitchFamily="34" charset="-122"/>
+                <a:cs typeface="Yu Gothic" pitchFamily="34" charset="-120"/>
+              </a:rPr>
+              <a:t>17時、エントランス。3か月前に退職した元社員が「私物を取りに来た。上司とは話がついている」と述べ、ゲート前に座り込んでいる。人事に連絡したが担当者が不在。退勤する社員が次々に通り、足を止めて見ている。相手は落ち着いているが、動く意思はない。</a:t>
+            </a:r>
+            <a:endParaRPr lang="en-US" sz="950" dirty="0"/>
+          </a:p>
+          <a:p>
+            <a:pPr indent="0" marL="0">
+              <a:lnSpc>
+                <a:spcPct val="92000"/>
+              </a:lnSpc>
+              <a:buNone/>
+            </a:pPr>
+            <a:r>
+              <a:rPr lang="en-US" sz="800" i="1" dirty="0">
+                <a:solidFill>
+                  <a:srgbClr val="9FD8CD"/>
+                </a:solidFill>
+                <a:latin typeface="Calibri" pitchFamily="34" charset="0"/>
+                <a:ea typeface="Calibri" pitchFamily="34" charset="-122"/>
+                <a:cs typeface="Calibri" pitchFamily="34" charset="-120"/>
+              </a:rPr>
+              <a:t>17:00, entrance hall. A former employee who left three months ago says they have come for personal belongings and that it is agreed with their old manager. They have sat down in front of the gate. HR is unreachable. Departing employees are stopping to watch. The person is calm but will not move.</a:t>
+            </a:r>
+            <a:endParaRPr lang="en-US" sz="950" dirty="0"/>
+          </a:p>
+        </p:txBody>
+      </p:sp>
+      <p:sp>
+        <p:nvSpPr>
+          <p:cNvPr id="8" name="Text 5"/>
+          <p:cNvSpPr/>
+          <p:nvPr/>
+        </p:nvSpPr>
+        <p:spPr>
+          <a:xfrm>
+            <a:off x="640080" y="2459736"/>
+            <a:ext cx="10911535" cy="566928"/>
+          </a:xfrm>
+          <a:prstGeom prst="rect">
+            <a:avLst/>
+          </a:prstGeom>
+          <a:noFill/>
+          <a:ln/>
+        </p:spPr>
+        <p:txBody>
+          <a:bodyPr wrap="square" lIns="0" tIns="0" rIns="0" bIns="0" rtlCol="0" anchor="t"/>
+          <a:lstStyle/>
+          <a:p>
+            <a:pPr indent="0" marL="0">
+              <a:lnSpc>
+                <a:spcPct val="90000"/>
+              </a:lnSpc>
+              <a:buNone/>
+            </a:pPr>
+            <a:r>
+              <a:rPr lang="en-US" sz="1000" b="1" dirty="0">
+                <a:solidFill>
+                  <a:srgbClr val="0D8A76"/>
+                </a:solidFill>
+                <a:latin typeface="Yu Gothic" pitchFamily="34" charset="0"/>
+                <a:ea typeface="Yu Gothic" pitchFamily="34" charset="-122"/>
+                <a:cs typeface="Yu Gothic" pitchFamily="34" charset="-120"/>
+              </a:rPr>
+              <a:t>問い　</a:t>
+            </a:r>
+            <a:pPr indent="0" marL="0">
+              <a:lnSpc>
+                <a:spcPct val="90000"/>
+              </a:lnSpc>
+              <a:buNone/>
+            </a:pPr>
+            <a:r>
+              <a:rPr lang="en-US" sz="1250" b="1" dirty="0">
+                <a:solidFill>
+                  <a:srgbClr val="093259"/>
+                </a:solidFill>
+                <a:latin typeface="Yu Gothic" pitchFamily="34" charset="0"/>
+                <a:ea typeface="Yu Gothic" pitchFamily="34" charset="-122"/>
+                <a:cs typeface="Yu Gothic" pitchFamily="34" charset="-120"/>
+              </a:rPr>
+              <a:t>あなたなら次の60秒、何をどう動きますか。</a:t>
+            </a:r>
+            <a:endParaRPr lang="en-US" sz="1000" dirty="0"/>
+          </a:p>
+          <a:p>
+            <a:pPr indent="0" marL="0">
+              <a:lnSpc>
+                <a:spcPct val="90000"/>
+              </a:lnSpc>
+              <a:buNone/>
+            </a:pPr>
+            <a:r>
+              <a:rPr lang="en-US" sz="850" i="1" dirty="0">
+                <a:solidFill>
+                  <a:srgbClr val="5F7183"/>
+                </a:solidFill>
+                <a:latin typeface="Calibri" pitchFamily="34" charset="0"/>
+                <a:ea typeface="Calibri" pitchFamily="34" charset="-122"/>
+                <a:cs typeface="Calibri" pitchFamily="34" charset="-120"/>
+              </a:rPr>
+              <a:t>What do you do in the next sixty seconds?</a:t>
+            </a:r>
+            <a:endParaRPr lang="en-US" sz="1000" dirty="0"/>
+          </a:p>
+        </p:txBody>
+      </p:sp>
+      <p:sp>
+        <p:nvSpPr>
+          <p:cNvPr id="9" name="Shape 6"/>
+          <p:cNvSpPr/>
+          <p:nvPr/>
+        </p:nvSpPr>
+        <p:spPr>
+          <a:xfrm>
+            <a:off x="640080" y="3081528"/>
+            <a:ext cx="5327752" cy="1074420"/>
+          </a:xfrm>
+          <a:prstGeom prst="roundRect">
+            <a:avLst>
+              <a:gd name="adj" fmla="val 3404"/>
+            </a:avLst>
+          </a:prstGeom>
+          <a:solidFill>
+            <a:srgbClr val="EFF4F8"/>
+          </a:solidFill>
+          <a:ln/>
+        </p:spPr>
+      </p:sp>
+      <p:sp>
+        <p:nvSpPr>
+          <p:cNvPr id="10" name="Shape 7"/>
+          <p:cNvSpPr/>
+          <p:nvPr/>
+        </p:nvSpPr>
+        <p:spPr>
+          <a:xfrm>
+            <a:off x="804672" y="3472434"/>
+            <a:ext cx="292608" cy="292608"/>
+          </a:xfrm>
+          <a:prstGeom prst="ellipse">
+            <a:avLst/>
+          </a:prstGeom>
+          <a:solidFill>
+            <a:srgbClr val="12B198"/>
+          </a:solidFill>
+          <a:ln/>
+        </p:spPr>
+      </p:sp>
+      <p:sp>
+        <p:nvSpPr>
+          <p:cNvPr id="11" name="Text 8"/>
+          <p:cNvSpPr/>
+          <p:nvPr/>
+        </p:nvSpPr>
+        <p:spPr>
+          <a:xfrm>
+            <a:off x="804672" y="3472434"/>
+            <a:ext cx="292608" cy="292608"/>
+          </a:xfrm>
+          <a:prstGeom prst="rect">
+            <a:avLst/>
+          </a:prstGeom>
+          <a:noFill/>
+          <a:ln/>
+        </p:spPr>
+        <p:txBody>
+          <a:bodyPr wrap="square" lIns="0" tIns="0" rIns="0" bIns="0" rtlCol="0" anchor="ctr"/>
+          <a:lstStyle/>
+          <a:p>
+            <a:pPr algn="ctr" indent="0" marL="0">
+              <a:buNone/>
+            </a:pPr>
+            <a:r>
+              <a:rPr lang="en-US" sz="1100" b="1" dirty="0">
+                <a:solidFill>
+                  <a:srgbClr val="FFFFFF"/>
+                </a:solidFill>
+                <a:latin typeface="Calibri" pitchFamily="34" charset="0"/>
+                <a:ea typeface="Calibri" pitchFamily="34" charset="-122"/>
+                <a:cs typeface="Calibri" pitchFamily="34" charset="-120"/>
+              </a:rPr>
+              <a:t>1</a:t>
+            </a:r>
+            <a:endParaRPr lang="en-US" sz="1100" dirty="0"/>
+          </a:p>
+        </p:txBody>
+      </p:sp>
+      <p:sp>
+        <p:nvSpPr>
+          <p:cNvPr id="12" name="Text 9"/>
+          <p:cNvSpPr/>
+          <p:nvPr/>
+        </p:nvSpPr>
+        <p:spPr>
+          <a:xfrm>
+            <a:off x="1188720" y="3136392"/>
+            <a:ext cx="4596232" cy="964692"/>
+          </a:xfrm>
+          <a:prstGeom prst="rect">
+            <a:avLst/>
+          </a:prstGeom>
+          <a:noFill/>
+          <a:ln/>
+        </p:spPr>
+        <p:txBody>
+          <a:bodyPr wrap="square" lIns="0" tIns="0" rIns="0" bIns="0" rtlCol="0" anchor="ctr"/>
+          <a:lstStyle/>
+          <a:p>
+            <a:pPr indent="0" marL="0">
+              <a:lnSpc>
+                <a:spcPct val="88000"/>
+              </a:lnSpc>
+              <a:buNone/>
+            </a:pPr>
+            <a:r>
+              <a:rPr lang="en-US" sz="1050" b="1" dirty="0">
+                <a:solidFill>
+                  <a:srgbClr val="1B2733"/>
+                </a:solidFill>
+                <a:latin typeface="Yu Gothic" pitchFamily="34" charset="0"/>
+                <a:ea typeface="Yu Gothic" pitchFamily="34" charset="-122"/>
+                <a:cs typeface="Yu Gothic" pitchFamily="34" charset="-120"/>
+              </a:rPr>
+              <a:t>退去を求める根拠は何か。誰の意思に基づくか。</a:t>
+            </a:r>
+            <a:endParaRPr lang="en-US" sz="1050" dirty="0"/>
+          </a:p>
+          <a:p>
+            <a:pPr indent="0" marL="0">
+              <a:lnSpc>
+                <a:spcPct val="88000"/>
+              </a:lnSpc>
+              <a:buNone/>
+            </a:pPr>
+            <a:r>
+              <a:rPr lang="en-US" sz="800" i="1" dirty="0">
+                <a:solidFill>
+                  <a:srgbClr val="5F7183"/>
+                </a:solidFill>
+                <a:latin typeface="Calibri" pitchFamily="34" charset="0"/>
+                <a:ea typeface="Calibri" pitchFamily="34" charset="-122"/>
+                <a:cs typeface="Calibri" pitchFamily="34" charset="-120"/>
+              </a:rPr>
+              <a:t>On what basis do you ask them to leave? Whose intent does it rest on?</a:t>
+            </a:r>
+            <a:endParaRPr lang="en-US" sz="1050" dirty="0"/>
+          </a:p>
+        </p:txBody>
+      </p:sp>
+      <p:sp>
+        <p:nvSpPr>
+          <p:cNvPr id="13" name="Shape 10"/>
+          <p:cNvSpPr/>
+          <p:nvPr/>
+        </p:nvSpPr>
+        <p:spPr>
+          <a:xfrm>
+            <a:off x="6223864" y="3081528"/>
+            <a:ext cx="5327752" cy="1074420"/>
+          </a:xfrm>
+          <a:prstGeom prst="roundRect">
+            <a:avLst>
+              <a:gd name="adj" fmla="val 3404"/>
+            </a:avLst>
+          </a:prstGeom>
+          <a:solidFill>
+            <a:srgbClr val="EFF4F8"/>
+          </a:solidFill>
+          <a:ln/>
+        </p:spPr>
+      </p:sp>
+      <p:sp>
+        <p:nvSpPr>
+          <p:cNvPr id="14" name="Shape 11"/>
+          <p:cNvSpPr/>
+          <p:nvPr/>
+        </p:nvSpPr>
+        <p:spPr>
+          <a:xfrm>
+            <a:off x="6388456" y="3472434"/>
+            <a:ext cx="292608" cy="292608"/>
+          </a:xfrm>
+          <a:prstGeom prst="ellipse">
+            <a:avLst/>
+          </a:prstGeom>
+          <a:solidFill>
+            <a:srgbClr val="12B198"/>
+          </a:solidFill>
+          <a:ln/>
+        </p:spPr>
+      </p:sp>
+      <p:sp>
+        <p:nvSpPr>
+          <p:cNvPr id="15" name="Text 12"/>
+          <p:cNvSpPr/>
+          <p:nvPr/>
+        </p:nvSpPr>
+        <p:spPr>
+          <a:xfrm>
+            <a:off x="6388456" y="3472434"/>
+            <a:ext cx="292608" cy="292608"/>
+          </a:xfrm>
+          <a:prstGeom prst="rect">
+            <a:avLst/>
+          </a:prstGeom>
+          <a:noFill/>
+          <a:ln/>
+        </p:spPr>
+        <p:txBody>
+          <a:bodyPr wrap="square" lIns="0" tIns="0" rIns="0" bIns="0" rtlCol="0" anchor="ctr"/>
+          <a:lstStyle/>
+          <a:p>
+            <a:pPr algn="ctr" indent="0" marL="0">
+              <a:buNone/>
+            </a:pPr>
+            <a:r>
+              <a:rPr lang="en-US" sz="1100" b="1" dirty="0">
+                <a:solidFill>
+                  <a:srgbClr val="FFFFFF"/>
+                </a:solidFill>
+                <a:latin typeface="Calibri" pitchFamily="34" charset="0"/>
+                <a:ea typeface="Calibri" pitchFamily="34" charset="-122"/>
+                <a:cs typeface="Calibri" pitchFamily="34" charset="-120"/>
+              </a:rPr>
+              <a:t>2</a:t>
+            </a:r>
+            <a:endParaRPr lang="en-US" sz="1100" dirty="0"/>
+          </a:p>
+        </p:txBody>
+      </p:sp>
+      <p:sp>
+        <p:nvSpPr>
+          <p:cNvPr id="16" name="Text 13"/>
+          <p:cNvSpPr/>
+          <p:nvPr/>
+        </p:nvSpPr>
+        <p:spPr>
+          <a:xfrm>
+            <a:off x="6772504" y="3136392"/>
+            <a:ext cx="4596232" cy="964692"/>
+          </a:xfrm>
+          <a:prstGeom prst="rect">
+            <a:avLst/>
+          </a:prstGeom>
+          <a:noFill/>
+          <a:ln/>
+        </p:spPr>
+        <p:txBody>
+          <a:bodyPr wrap="square" lIns="0" tIns="0" rIns="0" bIns="0" rtlCol="0" anchor="ctr"/>
+          <a:lstStyle/>
+          <a:p>
+            <a:pPr indent="0" marL="0">
+              <a:lnSpc>
+                <a:spcPct val="88000"/>
+              </a:lnSpc>
+              <a:buNone/>
+            </a:pPr>
+            <a:r>
+              <a:rPr lang="en-US" sz="1050" b="1" dirty="0">
+                <a:solidFill>
+                  <a:srgbClr val="1B2733"/>
+                </a:solidFill>
+                <a:latin typeface="Yu Gothic" pitchFamily="34" charset="0"/>
+                <a:ea typeface="Yu Gothic" pitchFamily="34" charset="-122"/>
+                <a:cs typeface="Yu Gothic" pitchFamily="34" charset="-120"/>
+              </a:rPr>
+              <a:t>座り込んでいる相手に、有形力を用いてよいか。</a:t>
+            </a:r>
+            <a:endParaRPr lang="en-US" sz="1050" dirty="0"/>
+          </a:p>
+          <a:p>
+            <a:pPr indent="0" marL="0">
+              <a:lnSpc>
+                <a:spcPct val="88000"/>
+              </a:lnSpc>
+              <a:buNone/>
+            </a:pPr>
+            <a:r>
+              <a:rPr lang="en-US" sz="800" i="1" dirty="0">
+                <a:solidFill>
+                  <a:srgbClr val="5F7183"/>
+                </a:solidFill>
+                <a:latin typeface="Calibri" pitchFamily="34" charset="0"/>
+                <a:ea typeface="Calibri" pitchFamily="34" charset="-122"/>
+                <a:cs typeface="Calibri" pitchFamily="34" charset="-120"/>
+              </a:rPr>
+              <a:t>May you use physical force on someone who has sat down?</a:t>
+            </a:r>
+            <a:endParaRPr lang="en-US" sz="1050" dirty="0"/>
+          </a:p>
+        </p:txBody>
+      </p:sp>
+      <p:sp>
+        <p:nvSpPr>
+          <p:cNvPr id="17" name="Shape 14"/>
+          <p:cNvSpPr/>
+          <p:nvPr/>
+        </p:nvSpPr>
+        <p:spPr>
+          <a:xfrm>
+            <a:off x="640080" y="4265676"/>
+            <a:ext cx="5327752" cy="1074420"/>
+          </a:xfrm>
+          <a:prstGeom prst="roundRect">
+            <a:avLst>
+              <a:gd name="adj" fmla="val 3404"/>
+            </a:avLst>
+          </a:prstGeom>
+          <a:solidFill>
+            <a:srgbClr val="EFF4F8"/>
+          </a:solidFill>
+          <a:ln/>
+        </p:spPr>
+      </p:sp>
+      <p:sp>
+        <p:nvSpPr>
+          <p:cNvPr id="18" name="Shape 15"/>
+          <p:cNvSpPr/>
+          <p:nvPr/>
+        </p:nvSpPr>
+        <p:spPr>
+          <a:xfrm>
+            <a:off x="804672" y="4656582"/>
+            <a:ext cx="292608" cy="292608"/>
+          </a:xfrm>
+          <a:prstGeom prst="ellipse">
+            <a:avLst/>
+          </a:prstGeom>
+          <a:solidFill>
+            <a:srgbClr val="12B198"/>
+          </a:solidFill>
+          <a:ln/>
+        </p:spPr>
+      </p:sp>
+      <p:sp>
+        <p:nvSpPr>
+          <p:cNvPr id="19" name="Text 16"/>
+          <p:cNvSpPr/>
+          <p:nvPr/>
+        </p:nvSpPr>
+        <p:spPr>
+          <a:xfrm>
+            <a:off x="804672" y="4656582"/>
+            <a:ext cx="292608" cy="292608"/>
+          </a:xfrm>
+          <a:prstGeom prst="rect">
+            <a:avLst/>
+          </a:prstGeom>
+          <a:noFill/>
+          <a:ln/>
+        </p:spPr>
+        <p:txBody>
+          <a:bodyPr wrap="square" lIns="0" tIns="0" rIns="0" bIns="0" rtlCol="0" anchor="ctr"/>
+          <a:lstStyle/>
+          <a:p>
+            <a:pPr algn="ctr" indent="0" marL="0">
+              <a:buNone/>
+            </a:pPr>
+            <a:r>
+              <a:rPr lang="en-US" sz="1100" b="1" dirty="0">
+                <a:solidFill>
+                  <a:srgbClr val="FFFFFF"/>
+                </a:solidFill>
+                <a:latin typeface="Calibri" pitchFamily="34" charset="0"/>
+                <a:ea typeface="Calibri" pitchFamily="34" charset="-122"/>
+                <a:cs typeface="Calibri" pitchFamily="34" charset="-120"/>
+              </a:rPr>
+              <a:t>3</a:t>
+            </a:r>
+            <a:endParaRPr lang="en-US" sz="1100" dirty="0"/>
+          </a:p>
+        </p:txBody>
+      </p:sp>
+      <p:sp>
+        <p:nvSpPr>
+          <p:cNvPr id="20" name="Text 17"/>
+          <p:cNvSpPr/>
+          <p:nvPr/>
+        </p:nvSpPr>
+        <p:spPr>
+          <a:xfrm>
+            <a:off x="1188720" y="4320540"/>
+            <a:ext cx="4596232" cy="964692"/>
+          </a:xfrm>
+          <a:prstGeom prst="rect">
+            <a:avLst/>
+          </a:prstGeom>
+          <a:noFill/>
+          <a:ln/>
+        </p:spPr>
+        <p:txBody>
+          <a:bodyPr wrap="square" lIns="0" tIns="0" rIns="0" bIns="0" rtlCol="0" anchor="ctr"/>
+          <a:lstStyle/>
+          <a:p>
+            <a:pPr indent="0" marL="0">
+              <a:lnSpc>
+                <a:spcPct val="88000"/>
+              </a:lnSpc>
+              <a:buNone/>
+            </a:pPr>
+            <a:r>
+              <a:rPr lang="en-US" sz="1050" b="1" dirty="0">
+                <a:solidFill>
+                  <a:srgbClr val="1B2733"/>
+                </a:solidFill>
+                <a:latin typeface="Yu Gothic" pitchFamily="34" charset="0"/>
+                <a:ea typeface="Yu Gothic" pitchFamily="34" charset="-122"/>
+                <a:cs typeface="Yu Gothic" pitchFamily="34" charset="-120"/>
+              </a:rPr>
+              <a:t>見ている社員がいることは、People と Reputation にどう関わるか。</a:t>
+            </a:r>
+            <a:endParaRPr lang="en-US" sz="1050" dirty="0"/>
+          </a:p>
+          <a:p>
+            <a:pPr indent="0" marL="0">
+              <a:lnSpc>
+                <a:spcPct val="88000"/>
+              </a:lnSpc>
+              <a:buNone/>
+            </a:pPr>
+            <a:r>
+              <a:rPr lang="en-US" sz="800" i="1" dirty="0">
+                <a:solidFill>
+                  <a:srgbClr val="5F7183"/>
+                </a:solidFill>
+                <a:latin typeface="Calibri" pitchFamily="34" charset="0"/>
+                <a:ea typeface="Calibri" pitchFamily="34" charset="-122"/>
+                <a:cs typeface="Calibri" pitchFamily="34" charset="-120"/>
+              </a:rPr>
+              <a:t>How do the watching employees bear on People and Reputation?</a:t>
+            </a:r>
+            <a:endParaRPr lang="en-US" sz="1050" dirty="0"/>
+          </a:p>
+        </p:txBody>
+      </p:sp>
+      <p:sp>
+        <p:nvSpPr>
+          <p:cNvPr id="21" name="Shape 18"/>
+          <p:cNvSpPr/>
+          <p:nvPr/>
+        </p:nvSpPr>
+        <p:spPr>
+          <a:xfrm>
+            <a:off x="6223864" y="4265676"/>
+            <a:ext cx="5327752" cy="1074420"/>
+          </a:xfrm>
+          <a:prstGeom prst="roundRect">
+            <a:avLst>
+              <a:gd name="adj" fmla="val 3404"/>
+            </a:avLst>
+          </a:prstGeom>
+          <a:solidFill>
+            <a:srgbClr val="EFF4F8"/>
+          </a:solidFill>
+          <a:ln/>
+        </p:spPr>
+      </p:sp>
+      <p:sp>
+        <p:nvSpPr>
+          <p:cNvPr id="22" name="Shape 19"/>
+          <p:cNvSpPr/>
+          <p:nvPr/>
+        </p:nvSpPr>
+        <p:spPr>
+          <a:xfrm>
+            <a:off x="6388456" y="4656582"/>
+            <a:ext cx="292608" cy="292608"/>
+          </a:xfrm>
+          <a:prstGeom prst="ellipse">
+            <a:avLst/>
+          </a:prstGeom>
+          <a:solidFill>
+            <a:srgbClr val="12B198"/>
+          </a:solidFill>
+          <a:ln/>
+        </p:spPr>
+      </p:sp>
+      <p:sp>
+        <p:nvSpPr>
+          <p:cNvPr id="23" name="Text 20"/>
+          <p:cNvSpPr/>
+          <p:nvPr/>
+        </p:nvSpPr>
+        <p:spPr>
+          <a:xfrm>
+            <a:off x="6388456" y="4656582"/>
+            <a:ext cx="292608" cy="292608"/>
+          </a:xfrm>
+          <a:prstGeom prst="rect">
+            <a:avLst/>
+          </a:prstGeom>
+          <a:noFill/>
+          <a:ln/>
+        </p:spPr>
+        <p:txBody>
+          <a:bodyPr wrap="square" lIns="0" tIns="0" rIns="0" bIns="0" rtlCol="0" anchor="ctr"/>
+          <a:lstStyle/>
+          <a:p>
+            <a:pPr algn="ctr" indent="0" marL="0">
+              <a:buNone/>
+            </a:pPr>
+            <a:r>
+              <a:rPr lang="en-US" sz="1100" b="1" dirty="0">
+                <a:solidFill>
+                  <a:srgbClr val="FFFFFF"/>
+                </a:solidFill>
+                <a:latin typeface="Calibri" pitchFamily="34" charset="0"/>
+                <a:ea typeface="Calibri" pitchFamily="34" charset="-122"/>
+                <a:cs typeface="Calibri" pitchFamily="34" charset="-120"/>
+              </a:rPr>
+              <a:t>4</a:t>
+            </a:r>
+            <a:endParaRPr lang="en-US" sz="1100" dirty="0"/>
+          </a:p>
+        </p:txBody>
+      </p:sp>
+      <p:sp>
+        <p:nvSpPr>
+          <p:cNvPr id="24" name="Text 21"/>
+          <p:cNvSpPr/>
+          <p:nvPr/>
+        </p:nvSpPr>
+        <p:spPr>
+          <a:xfrm>
+            <a:off x="6772504" y="4320540"/>
+            <a:ext cx="4596232" cy="964692"/>
+          </a:xfrm>
+          <a:prstGeom prst="rect">
+            <a:avLst/>
+          </a:prstGeom>
+          <a:noFill/>
+          <a:ln/>
+        </p:spPr>
+        <p:txBody>
+          <a:bodyPr wrap="square" lIns="0" tIns="0" rIns="0" bIns="0" rtlCol="0" anchor="ctr"/>
+          <a:lstStyle/>
+          <a:p>
+            <a:pPr indent="0" marL="0">
+              <a:lnSpc>
+                <a:spcPct val="88000"/>
+              </a:lnSpc>
+              <a:buNone/>
+            </a:pPr>
+            <a:r>
+              <a:rPr lang="en-US" sz="1050" b="1" dirty="0">
+                <a:solidFill>
+                  <a:srgbClr val="1B2733"/>
+                </a:solidFill>
+                <a:latin typeface="Yu Gothic" pitchFamily="34" charset="0"/>
+                <a:ea typeface="Yu Gothic" pitchFamily="34" charset="-122"/>
+                <a:cs typeface="Yu Gothic" pitchFamily="34" charset="-120"/>
+              </a:rPr>
+              <a:t>通報するとすれば、どの時点で、何を伝えるか。</a:t>
+            </a:r>
+            <a:endParaRPr lang="en-US" sz="1050" dirty="0"/>
+          </a:p>
+          <a:p>
+            <a:pPr indent="0" marL="0">
+              <a:lnSpc>
+                <a:spcPct val="88000"/>
+              </a:lnSpc>
+              <a:buNone/>
+            </a:pPr>
+            <a:r>
+              <a:rPr lang="en-US" sz="800" i="1" dirty="0">
+                <a:solidFill>
+                  <a:srgbClr val="5F7183"/>
+                </a:solidFill>
+                <a:latin typeface="Calibri" pitchFamily="34" charset="0"/>
+                <a:ea typeface="Calibri" pitchFamily="34" charset="-122"/>
+                <a:cs typeface="Calibri" pitchFamily="34" charset="-120"/>
+              </a:rPr>
+              <a:t>If you call the police, at what point, and what do you say?</a:t>
+            </a:r>
+            <a:endParaRPr lang="en-US" sz="1050" dirty="0"/>
+          </a:p>
+        </p:txBody>
+      </p:sp>
+      <p:sp>
+        <p:nvSpPr>
+          <p:cNvPr id="25" name="Shape 22"/>
+          <p:cNvSpPr/>
+          <p:nvPr/>
+        </p:nvSpPr>
+        <p:spPr>
+          <a:xfrm>
+            <a:off x="640080" y="5394960"/>
+            <a:ext cx="10911535" cy="457200"/>
+          </a:xfrm>
+          <a:prstGeom prst="roundRect">
+            <a:avLst>
+              <a:gd name="adj" fmla="val 8000"/>
+            </a:avLst>
+          </a:prstGeom>
+          <a:solidFill>
+            <a:srgbClr val="E4F4F0"/>
+          </a:solidFill>
+          <a:ln/>
+        </p:spPr>
+      </p:sp>
+      <p:sp>
+        <p:nvSpPr>
+          <p:cNvPr id="26" name="Text 23"/>
+          <p:cNvSpPr/>
+          <p:nvPr/>
+        </p:nvSpPr>
+        <p:spPr>
+          <a:xfrm>
+            <a:off x="877824" y="5431536"/>
+            <a:ext cx="10436047" cy="384048"/>
+          </a:xfrm>
+          <a:prstGeom prst="rect">
+            <a:avLst/>
+          </a:prstGeom>
+          <a:noFill/>
+          <a:ln/>
+        </p:spPr>
+        <p:txBody>
+          <a:bodyPr wrap="square" lIns="0" tIns="0" rIns="0" bIns="0" rtlCol="0" anchor="ctr"/>
+          <a:lstStyle/>
+          <a:p>
+            <a:pPr indent="0" marL="0">
+              <a:lnSpc>
+                <a:spcPct val="86000"/>
+              </a:lnSpc>
+              <a:buNone/>
+            </a:pPr>
+            <a:r>
+              <a:rPr lang="en-US" sz="850" b="1" dirty="0">
+                <a:solidFill>
+                  <a:srgbClr val="0D8A76"/>
+                </a:solidFill>
+                <a:latin typeface="Yu Gothic" pitchFamily="34" charset="0"/>
+                <a:ea typeface="Yu Gothic" pitchFamily="34" charset="-122"/>
+                <a:cs typeface="Yu Gothic" pitchFamily="34" charset="-120"/>
+              </a:rPr>
+              <a:t>追加付与　</a:t>
+            </a:r>
+            <a:pPr indent="0" marL="0">
+              <a:lnSpc>
+                <a:spcPct val="86000"/>
+              </a:lnSpc>
+              <a:buNone/>
+            </a:pPr>
+            <a:r>
+              <a:rPr lang="en-US" sz="1050" b="1" dirty="0">
+                <a:solidFill>
+                  <a:srgbClr val="1B2733"/>
+                </a:solidFill>
+                <a:latin typeface="Yu Gothic" pitchFamily="34" charset="0"/>
+                <a:ea typeface="Yu Gothic" pitchFamily="34" charset="-122"/>
+                <a:cs typeface="Yu Gothic" pitchFamily="34" charset="-120"/>
+              </a:rPr>
+              <a:t>元社員が「不当解雇だ」と大きな声で話し始めた。</a:t>
+            </a:r>
+            <a:endParaRPr lang="en-US" sz="850" dirty="0"/>
+          </a:p>
+          <a:p>
+            <a:pPr indent="0" marL="0">
+              <a:lnSpc>
+                <a:spcPct val="86000"/>
+              </a:lnSpc>
+              <a:buNone/>
+            </a:pPr>
+            <a:r>
+              <a:rPr lang="en-US" sz="750" i="1" dirty="0">
+                <a:solidFill>
+                  <a:srgbClr val="5F7183"/>
+                </a:solidFill>
+                <a:latin typeface="Calibri" pitchFamily="34" charset="0"/>
+                <a:ea typeface="Calibri" pitchFamily="34" charset="-122"/>
+                <a:cs typeface="Calibri" pitchFamily="34" charset="-120"/>
+              </a:rPr>
+              <a:t>They begin loudly saying they were unfairly dismissed.</a:t>
+            </a:r>
+            <a:endParaRPr lang="en-US" sz="850" dirty="0"/>
+          </a:p>
+        </p:txBody>
+      </p:sp>
+      <p:sp>
+        <p:nvSpPr>
+          <p:cNvPr id="27" name="Text 24"/>
+          <p:cNvSpPr/>
+          <p:nvPr/>
+        </p:nvSpPr>
+        <p:spPr>
+          <a:xfrm>
+            <a:off x="640080" y="5907024"/>
+            <a:ext cx="10911535" cy="310896"/>
+          </a:xfrm>
+          <a:prstGeom prst="rect">
+            <a:avLst/>
+          </a:prstGeom>
+          <a:noFill/>
+          <a:ln/>
+        </p:spPr>
+        <p:txBody>
+          <a:bodyPr wrap="square" lIns="0" tIns="0" rIns="0" bIns="0" rtlCol="0" anchor="t"/>
+          <a:lstStyle/>
+          <a:p>
+            <a:pPr indent="0" marL="0">
+              <a:lnSpc>
+                <a:spcPct val="88000"/>
+              </a:lnSpc>
+              <a:buNone/>
+            </a:pPr>
+            <a:r>
+              <a:rPr lang="en-US" sz="900" b="1" dirty="0">
+                <a:solidFill>
+                  <a:srgbClr val="0D8A76"/>
+                </a:solidFill>
+                <a:latin typeface="Yu Gothic" pitchFamily="34" charset="0"/>
+                <a:ea typeface="Yu Gothic" pitchFamily="34" charset="-122"/>
+                <a:cs typeface="Yu Gothic" pitchFamily="34" charset="-120"/>
+              </a:rPr>
+              <a:t>Site SOP優先　</a:t>
+            </a:r>
+            <a:pPr indent="0" marL="0">
+              <a:lnSpc>
+                <a:spcPct val="88000"/>
+              </a:lnSpc>
+              <a:buNone/>
+            </a:pPr>
+            <a:r>
+              <a:rPr lang="en-US" sz="900" dirty="0">
+                <a:solidFill>
+                  <a:srgbClr val="1B2733"/>
+                </a:solidFill>
+                <a:latin typeface="Yu Gothic" pitchFamily="34" charset="0"/>
+                <a:ea typeface="Yu Gothic" pitchFamily="34" charset="-122"/>
+                <a:cs typeface="Yu Gothic" pitchFamily="34" charset="-120"/>
+              </a:rPr>
+              <a:t>退去要請の判断者、人事の緊急連絡先、通報の基準は現場ごとに異なる。Site SOPによる。</a:t>
+            </a:r>
+            <a:endParaRPr lang="en-US" sz="900" dirty="0"/>
+          </a:p>
+          <a:p>
+            <a:pPr indent="0" marL="0">
+              <a:lnSpc>
+                <a:spcPct val="88000"/>
+              </a:lnSpc>
+              <a:buNone/>
+            </a:pPr>
+            <a:r>
+              <a:rPr lang="en-US" sz="750" i="1" dirty="0">
+                <a:solidFill>
+                  <a:srgbClr val="5F7183"/>
+                </a:solidFill>
+                <a:latin typeface="Calibri" pitchFamily="34" charset="0"/>
+                <a:ea typeface="Calibri" pitchFamily="34" charset="-122"/>
+                <a:cs typeface="Calibri" pitchFamily="34" charset="-120"/>
+              </a:rPr>
+              <a:t>Who decides on a removal request, HR emergency contacts, and when to call police differ by site.</a:t>
+            </a:r>
+            <a:endParaRPr lang="en-US" sz="900" dirty="0"/>
+          </a:p>
+        </p:txBody>
+      </p:sp>
+      <p:sp>
+        <p:nvSpPr>
+          <p:cNvPr id="28" name="Text 25"/>
+          <p:cNvSpPr/>
+          <p:nvPr/>
+        </p:nvSpPr>
+        <p:spPr>
+          <a:xfrm>
+            <a:off x="640080" y="6272784"/>
+            <a:ext cx="9905695" cy="237744"/>
+          </a:xfrm>
+          <a:prstGeom prst="rect">
+            <a:avLst/>
+          </a:prstGeom>
+          <a:noFill/>
+          <a:ln/>
+        </p:spPr>
+        <p:txBody>
+          <a:bodyPr wrap="square" lIns="0" tIns="0" rIns="0" bIns="0" rtlCol="0" anchor="t"/>
+          <a:lstStyle/>
+          <a:p>
+            <a:pPr indent="0" marL="0">
+              <a:buNone/>
+            </a:pPr>
+            <a:r>
+              <a:rPr lang="en-US" sz="750" b="1" dirty="0">
+                <a:solidFill>
+                  <a:srgbClr val="D6E0E9"/>
+                </a:solidFill>
+                <a:latin typeface="Yu Gothic" pitchFamily="34" charset="0"/>
+                <a:ea typeface="Yu Gothic" pitchFamily="34" charset="-122"/>
+                <a:cs typeface="Yu Gothic" pitchFamily="34" charset="-120"/>
+              </a:rPr>
+              <a:t>ソース　</a:t>
+            </a:r>
+            <a:pPr indent="0" marL="0">
+              <a:buNone/>
+            </a:pPr>
+            <a:r>
+              <a:rPr lang="en-US" sz="750" dirty="0">
+                <a:solidFill>
+                  <a:srgbClr val="5F7183"/>
+                </a:solidFill>
+                <a:latin typeface="Yu Gothic" pitchFamily="34" charset="0"/>
+                <a:ea typeface="Yu Gothic" pitchFamily="34" charset="-122"/>
+                <a:cs typeface="Yu Gothic" pitchFamily="34" charset="-120"/>
+              </a:rPr>
+              <a:t>警備業法、刑法、警察庁「警備員教育」</a:t>
+            </a:r>
+            <a:endParaRPr lang="en-US" sz="750" dirty="0"/>
+          </a:p>
+        </p:txBody>
+      </p:sp>
+      <p:sp>
+        <p:nvSpPr>
+          <p:cNvPr id="29" name="Text 26"/>
+          <p:cNvSpPr/>
+          <p:nvPr/>
+        </p:nvSpPr>
+        <p:spPr>
+          <a:xfrm>
+            <a:off x="640080" y="6382512"/>
+            <a:ext cx="8778240" cy="292608"/>
+          </a:xfrm>
+          <a:prstGeom prst="rect">
+            <a:avLst/>
+          </a:prstGeom>
+          <a:noFill/>
+          <a:ln/>
+        </p:spPr>
+        <p:txBody>
+          <a:bodyPr wrap="square" lIns="0" tIns="0" rIns="0" bIns="0" rtlCol="0" anchor="ctr"/>
+          <a:lstStyle/>
+          <a:p>
+            <a:pPr indent="0" marL="0">
+              <a:buNone/>
+            </a:pPr>
+            <a:r>
+              <a:rPr lang="en-US" sz="900" dirty="0">
+                <a:solidFill>
+                  <a:srgbClr val="5F7183"/>
+                </a:solidFill>
+                <a:latin typeface="Yu Gothic" pitchFamily="34" charset="0"/>
+                <a:ea typeface="Yu Gothic" pitchFamily="34" charset="-122"/>
+                <a:cs typeface="Yu Gothic" pitchFamily="34" charset="-120"/>
+              </a:rPr>
+              <a:t>第5時限｜業務別教育2 その他当該警備業務を適正に実施するため必要な知識及び技能  </a:t>
+            </a:r>
+            <a:pPr indent="0" marL="0">
+              <a:buNone/>
+            </a:pPr>
+            <a:r>
+              <a:rPr lang="en-US" sz="850" i="1" dirty="0">
+                <a:solidFill>
+                  <a:srgbClr val="D6E0E9"/>
+                </a:solidFill>
+                <a:latin typeface="Calibri" pitchFamily="34" charset="0"/>
+                <a:ea typeface="Calibri" pitchFamily="34" charset="-122"/>
+                <a:cs typeface="Calibri" pitchFamily="34" charset="-120"/>
+              </a:rPr>
+              <a:t>Period 5 | Task-Specific Training 2 — De-escalation</a:t>
+            </a:r>
+            <a:endParaRPr lang="en-US" sz="900" dirty="0"/>
+          </a:p>
+        </p:txBody>
+      </p:sp>
+      <p:sp>
+        <p:nvSpPr>
+          <p:cNvPr id="30" name="Text 27"/>
+          <p:cNvSpPr/>
+          <p:nvPr/>
+        </p:nvSpPr>
+        <p:spPr>
+          <a:xfrm>
+            <a:off x="10637215" y="6382512"/>
+            <a:ext cx="914400" cy="292608"/>
+          </a:xfrm>
+          <a:prstGeom prst="rect">
+            <a:avLst/>
+          </a:prstGeom>
+          <a:noFill/>
+          <a:ln/>
+        </p:spPr>
+        <p:txBody>
+          <a:bodyPr wrap="square" lIns="0" tIns="0" rIns="0" bIns="0" rtlCol="0" anchor="ctr"/>
+          <a:lstStyle/>
+          <a:p>
+            <a:pPr algn="r" indent="0" marL="0">
+              <a:buNone/>
+            </a:pPr>
+            <a:r>
+              <a:rPr lang="en-US" sz="1000" dirty="0">
+                <a:solidFill>
+                  <a:srgbClr val="5F7183"/>
+                </a:solidFill>
+                <a:latin typeface="Calibri" pitchFamily="34" charset="0"/>
+                <a:ea typeface="Calibri" pitchFamily="34" charset="-122"/>
+                <a:cs typeface="Calibri" pitchFamily="34" charset="-120"/>
+              </a:rPr>
+              <a:t>10</a:t>
+            </a:r>
+            <a:endParaRPr lang="en-US" sz="1000" dirty="0"/>
+          </a:p>
+        </p:txBody>
+      </p:sp>
+    </p:spTree>
+  </p:cSld>
+  <p:clrMapOvr>
+    <a:masterClrMapping/>
+  </p:clrMapOvr>
+</p:sld>
+</file>
+
+<file path=ppt/slides/slide11.xml><?xml version="1.0" encoding="utf-8"?>
+<p:sld xmlns:a="http://schemas.openxmlformats.org/drawingml/2006/main" xmlns:r="http://schemas.openxmlformats.org/officeDocument/2006/relationships" xmlns:p="http://schemas.openxmlformats.org/presentationml/2006/main">
+  <p:cSld name="Slide 11">
+    <p:bg>
+      <p:bgPr>
+        <a:solidFill>
+          <a:srgbClr val="FFFFFF"/>
+        </a:solidFill>
+      </p:bgPr>
+    </p:bg>
+    <p:spTree>
+      <p:nvGrpSpPr>
+        <p:cNvPr id="1" name=""/>
+        <p:cNvGrpSpPr/>
+        <p:nvPr/>
+      </p:nvGrpSpPr>
+      <p:grpSpPr>
+        <a:xfrm>
+          <a:off x="0" y="0"/>
+          <a:ext cx="0" cy="0"/>
+          <a:chOff x="0" y="0"/>
+          <a:chExt cx="0" cy="0"/>
+        </a:xfrm>
+      </p:grpSpPr>
+      <p:pic>
+        <p:nvPicPr>
+          <p:cNvPr id="2" name="Image 0" descr="/home/user/Training-/assets/logo.png">    </p:cNvPr>
+          <p:cNvPicPr>
+            <a:picLocks noChangeAspect="1"/>
+          </p:cNvPicPr>
+          <p:nvPr/>
+        </p:nvPicPr>
+        <p:blipFill>
+          <a:blip r:embed="rId1"/>
+          <a:stretch>
+            <a:fillRect/>
+          </a:stretch>
+        </p:blipFill>
+        <p:spPr>
+          <a:xfrm>
+            <a:off x="10765231" y="332912"/>
+            <a:ext cx="786384" cy="742353"/>
+          </a:xfrm>
+          <a:prstGeom prst="rect">
+            <a:avLst/>
+          </a:prstGeom>
+        </p:spPr>
+      </p:pic>
+      <p:sp>
+        <p:nvSpPr>
+          <p:cNvPr id="3" name="Text 0"/>
+          <p:cNvSpPr/>
+          <p:nvPr/>
+        </p:nvSpPr>
+        <p:spPr>
+          <a:xfrm>
+            <a:off x="640080" y="384048"/>
+            <a:ext cx="8982151" cy="768096"/>
+          </a:xfrm>
+          <a:prstGeom prst="rect">
+            <a:avLst/>
+          </a:prstGeom>
+          <a:noFill/>
+          <a:ln/>
+        </p:spPr>
+        <p:txBody>
+          <a:bodyPr wrap="square" lIns="0" tIns="0" rIns="0" bIns="0" rtlCol="0" anchor="t"/>
+          <a:lstStyle/>
+          <a:p>
+            <a:pPr indent="0" marL="0">
+              <a:lnSpc>
+                <a:spcPct val="94000"/>
+              </a:lnSpc>
+              <a:buNone/>
+            </a:pPr>
+            <a:r>
+              <a:rPr lang="en-US" sz="2300" b="1" dirty="0">
+                <a:solidFill>
+                  <a:srgbClr val="093259"/>
+                </a:solidFill>
+                <a:latin typeface="Yu Gothic" pitchFamily="34" charset="0"/>
+                <a:ea typeface="Yu Gothic" pitchFamily="34" charset="-122"/>
+                <a:cs typeface="Yu Gothic" pitchFamily="34" charset="-120"/>
+              </a:rPr>
+              <a:t>TTX 5-B 講評 ― 模範解答</a:t>
+            </a:r>
+            <a:endParaRPr lang="en-US" sz="2300" dirty="0"/>
+          </a:p>
+          <a:p>
+            <a:pPr indent="0" marL="0">
+              <a:lnSpc>
+                <a:spcPct val="94000"/>
+              </a:lnSpc>
+              <a:buNone/>
+            </a:pPr>
+            <a:r>
+              <a:rPr lang="en-US" sz="1100" i="1" dirty="0">
+                <a:solidFill>
+                  <a:srgbClr val="12B198"/>
+                </a:solidFill>
+                <a:latin typeface="Calibri" pitchFamily="34" charset="0"/>
+                <a:ea typeface="Calibri" pitchFamily="34" charset="-122"/>
+                <a:cs typeface="Calibri" pitchFamily="34" charset="-120"/>
+              </a:rPr>
+              <a:t>TTX 5-B Debrief — Model Answer</a:t>
+            </a:r>
+            <a:endParaRPr lang="en-US" sz="2300" dirty="0"/>
+          </a:p>
+        </p:txBody>
+      </p:sp>
+      <p:sp>
+        <p:nvSpPr>
+          <p:cNvPr id="4" name="Shape 1"/>
+          <p:cNvSpPr/>
+          <p:nvPr/>
+        </p:nvSpPr>
+        <p:spPr>
+          <a:xfrm>
+            <a:off x="9686239" y="438912"/>
+            <a:ext cx="932688" cy="310896"/>
+          </a:xfrm>
+          <a:prstGeom prst="roundRect">
+            <a:avLst>
+              <a:gd name="adj" fmla="val 14706"/>
+            </a:avLst>
+          </a:prstGeom>
+          <a:solidFill>
+            <a:srgbClr val="093259"/>
+          </a:solidFill>
+          <a:ln/>
+        </p:spPr>
+      </p:sp>
+      <p:sp>
+        <p:nvSpPr>
+          <p:cNvPr id="5" name="Text 2"/>
+          <p:cNvSpPr/>
+          <p:nvPr/>
+        </p:nvSpPr>
+        <p:spPr>
+          <a:xfrm>
+            <a:off x="9686239" y="438912"/>
+            <a:ext cx="932688" cy="310896"/>
+          </a:xfrm>
+          <a:prstGeom prst="rect">
+            <a:avLst/>
+          </a:prstGeom>
+          <a:noFill/>
+          <a:ln/>
+        </p:spPr>
+        <p:txBody>
+          <a:bodyPr wrap="square" lIns="0" tIns="0" rIns="0" bIns="0" rtlCol="0" anchor="ctr"/>
+          <a:lstStyle/>
+          <a:p>
+            <a:pPr algn="ctr" indent="0" marL="0">
+              <a:buNone/>
+            </a:pPr>
+            <a:r>
+              <a:rPr lang="en-US" sz="1100" b="1" dirty="0">
+                <a:solidFill>
+                  <a:srgbClr val="FFFFFF"/>
+                </a:solidFill>
+                <a:latin typeface="Calibri" pitchFamily="34" charset="0"/>
+                <a:ea typeface="Calibri" pitchFamily="34" charset="-122"/>
+                <a:cs typeface="Calibri" pitchFamily="34" charset="-120"/>
+              </a:rPr>
+              <a:t>DEBRIEF</a:t>
+            </a:r>
+            <a:endParaRPr lang="en-US" sz="1100" dirty="0"/>
+          </a:p>
+        </p:txBody>
+      </p:sp>
+      <p:sp>
+        <p:nvSpPr>
+          <p:cNvPr id="6" name="Text 3"/>
+          <p:cNvSpPr/>
+          <p:nvPr/>
+        </p:nvSpPr>
+        <p:spPr>
+          <a:xfrm>
+            <a:off x="640080" y="1188720"/>
+            <a:ext cx="10911535" cy="530352"/>
+          </a:xfrm>
+          <a:prstGeom prst="rect">
+            <a:avLst/>
+          </a:prstGeom>
+          <a:noFill/>
+          <a:ln/>
+        </p:spPr>
+        <p:txBody>
+          <a:bodyPr wrap="square" lIns="0" tIns="0" rIns="0" bIns="0" rtlCol="0" anchor="t"/>
+          <a:lstStyle/>
+          <a:p>
+            <a:pPr indent="0" marL="0">
+              <a:lnSpc>
+                <a:spcPct val="90000"/>
+              </a:lnSpc>
+              <a:buNone/>
+            </a:pPr>
+            <a:r>
+              <a:rPr lang="en-US" sz="1000" b="1" dirty="0">
+                <a:solidFill>
+                  <a:srgbClr val="0D8A76"/>
+                </a:solidFill>
+                <a:latin typeface="Yu Gothic" pitchFamily="34" charset="0"/>
+                <a:ea typeface="Yu Gothic" pitchFamily="34" charset="-122"/>
+                <a:cs typeface="Yu Gothic" pitchFamily="34" charset="-120"/>
+              </a:rPr>
+              <a:t>狙い　</a:t>
+            </a:r>
+            <a:pPr indent="0" marL="0">
+              <a:lnSpc>
+                <a:spcPct val="90000"/>
+              </a:lnSpc>
+              <a:buNone/>
+            </a:pPr>
+            <a:r>
+              <a:rPr lang="en-US" sz="1150" b="1" dirty="0">
+                <a:solidFill>
+                  <a:srgbClr val="093259"/>
+                </a:solidFill>
+                <a:latin typeface="Yu Gothic" pitchFamily="34" charset="0"/>
+                <a:ea typeface="Yu Gothic" pitchFamily="34" charset="-122"/>
+                <a:cs typeface="Yu Gothic" pitchFamily="34" charset="-120"/>
+              </a:rPr>
+              <a:t>座り込みに有形力は使えない。使えない中で何ができるかが答え。</a:t>
+            </a:r>
+            <a:endParaRPr lang="en-US" sz="1000" dirty="0"/>
+          </a:p>
+          <a:p>
+            <a:pPr indent="0" marL="0">
+              <a:lnSpc>
+                <a:spcPct val="90000"/>
+              </a:lnSpc>
+              <a:buNone/>
+            </a:pPr>
+            <a:r>
+              <a:rPr lang="en-US" sz="850" i="1" dirty="0">
+                <a:solidFill>
+                  <a:srgbClr val="5F7183"/>
+                </a:solidFill>
+                <a:latin typeface="Calibri" pitchFamily="34" charset="0"/>
+                <a:ea typeface="Calibri" pitchFamily="34" charset="-122"/>
+                <a:cs typeface="Calibri" pitchFamily="34" charset="-120"/>
+              </a:rPr>
+              <a:t>You cannot use force against someone sitting down. The answer is what you can do without it.</a:t>
+            </a:r>
+            <a:endParaRPr lang="en-US" sz="1000" dirty="0"/>
+          </a:p>
+        </p:txBody>
+      </p:sp>
+      <p:sp>
+        <p:nvSpPr>
+          <p:cNvPr id="7" name="Shape 4"/>
+          <p:cNvSpPr/>
+          <p:nvPr/>
+        </p:nvSpPr>
+        <p:spPr>
+          <a:xfrm>
+            <a:off x="640080" y="1773936"/>
+            <a:ext cx="5327752" cy="1091184"/>
+          </a:xfrm>
+          <a:prstGeom prst="roundRect">
+            <a:avLst>
+              <a:gd name="adj" fmla="val 3352"/>
+            </a:avLst>
+          </a:prstGeom>
+          <a:solidFill>
+            <a:srgbClr val="E4F4F0"/>
+          </a:solidFill>
+          <a:ln/>
+        </p:spPr>
+      </p:sp>
+      <p:sp>
+        <p:nvSpPr>
+          <p:cNvPr id="8" name="Text 5"/>
+          <p:cNvSpPr/>
+          <p:nvPr/>
+        </p:nvSpPr>
+        <p:spPr>
+          <a:xfrm>
+            <a:off x="877824" y="1865376"/>
+            <a:ext cx="4852264" cy="908304"/>
+          </a:xfrm>
+          <a:prstGeom prst="rect">
+            <a:avLst/>
+          </a:prstGeom>
+          <a:noFill/>
+          <a:ln/>
+        </p:spPr>
+        <p:txBody>
+          <a:bodyPr wrap="square" lIns="0" tIns="0" rIns="0" bIns="0" rtlCol="0" anchor="t"/>
+          <a:lstStyle/>
+          <a:p>
+            <a:pPr indent="0" marL="0">
+              <a:lnSpc>
+                <a:spcPct val="90000"/>
+              </a:lnSpc>
+              <a:buNone/>
+            </a:pPr>
+            <a:r>
+              <a:rPr lang="en-US" sz="1050" b="1" dirty="0">
+                <a:solidFill>
+                  <a:srgbClr val="0D8A76"/>
+                </a:solidFill>
+                <a:latin typeface="Yu Gothic" pitchFamily="34" charset="0"/>
+                <a:ea typeface="Yu Gothic" pitchFamily="34" charset="-122"/>
+                <a:cs typeface="Yu Gothic" pitchFamily="34" charset="-120"/>
+              </a:rPr>
+              <a:t>退去要請の根拠</a:t>
+            </a:r>
+            <a:endParaRPr lang="en-US" sz="1050" dirty="0"/>
+          </a:p>
+          <a:p>
+            <a:pPr indent="0" marL="0">
+              <a:lnSpc>
+                <a:spcPct val="90000"/>
+              </a:lnSpc>
+              <a:buNone/>
+            </a:pPr>
+            <a:r>
+              <a:rPr lang="en-US" sz="1050" b="1" dirty="0">
+                <a:solidFill>
+                  <a:srgbClr val="1B2733"/>
+                </a:solidFill>
+                <a:latin typeface="Yu Gothic" pitchFamily="34" charset="0"/>
+                <a:ea typeface="Yu Gothic" pitchFamily="34" charset="-122"/>
+                <a:cs typeface="Yu Gothic" pitchFamily="34" charset="-120"/>
+              </a:rPr>
+              <a:t>管理権者の意思に基づく。自分の判断で命じるものではない。</a:t>
+            </a:r>
+            <a:endParaRPr lang="en-US" sz="1050" dirty="0"/>
+          </a:p>
+          <a:p>
+            <a:pPr indent="0" marL="0">
+              <a:lnSpc>
+                <a:spcPct val="90000"/>
+              </a:lnSpc>
+              <a:buNone/>
+            </a:pPr>
+            <a:r>
+              <a:rPr lang="en-US" sz="800" i="1" dirty="0">
+                <a:solidFill>
+                  <a:srgbClr val="5F7183"/>
+                </a:solidFill>
+                <a:latin typeface="Calibri" pitchFamily="34" charset="0"/>
+                <a:ea typeface="Calibri" pitchFamily="34" charset="-122"/>
+                <a:cs typeface="Calibri" pitchFamily="34" charset="-120"/>
+              </a:rPr>
+              <a:t>It rests on the site authority's intent, not your own judgement.</a:t>
+            </a:r>
+            <a:endParaRPr lang="en-US" sz="1050" dirty="0"/>
+          </a:p>
+        </p:txBody>
+      </p:sp>
+      <p:sp>
+        <p:nvSpPr>
+          <p:cNvPr id="9" name="Shape 6"/>
+          <p:cNvSpPr/>
+          <p:nvPr/>
+        </p:nvSpPr>
+        <p:spPr>
+          <a:xfrm>
+            <a:off x="6223864" y="1773936"/>
+            <a:ext cx="5327752" cy="1091184"/>
+          </a:xfrm>
+          <a:prstGeom prst="roundRect">
+            <a:avLst>
+              <a:gd name="adj" fmla="val 3352"/>
+            </a:avLst>
+          </a:prstGeom>
+          <a:solidFill>
+            <a:srgbClr val="E4F4F0"/>
+          </a:solidFill>
+          <a:ln/>
+        </p:spPr>
+      </p:sp>
+      <p:sp>
+        <p:nvSpPr>
+          <p:cNvPr id="10" name="Text 7"/>
+          <p:cNvSpPr/>
+          <p:nvPr/>
+        </p:nvSpPr>
+        <p:spPr>
+          <a:xfrm>
+            <a:off x="6461608" y="1865376"/>
+            <a:ext cx="4852264" cy="908304"/>
+          </a:xfrm>
+          <a:prstGeom prst="rect">
+            <a:avLst/>
+          </a:prstGeom>
+          <a:noFill/>
+          <a:ln/>
+        </p:spPr>
+        <p:txBody>
+          <a:bodyPr wrap="square" lIns="0" tIns="0" rIns="0" bIns="0" rtlCol="0" anchor="t"/>
+          <a:lstStyle/>
+          <a:p>
+            <a:pPr indent="0" marL="0">
+              <a:lnSpc>
+                <a:spcPct val="90000"/>
+              </a:lnSpc>
+              <a:buNone/>
+            </a:pPr>
+            <a:r>
+              <a:rPr lang="en-US" sz="1050" b="1" dirty="0">
+                <a:solidFill>
+                  <a:srgbClr val="0D8A76"/>
+                </a:solidFill>
+                <a:latin typeface="Yu Gothic" pitchFamily="34" charset="0"/>
+                <a:ea typeface="Yu Gothic" pitchFamily="34" charset="-122"/>
+                <a:cs typeface="Yu Gothic" pitchFamily="34" charset="-120"/>
+              </a:rPr>
+              <a:t>有形力</a:t>
+            </a:r>
+            <a:endParaRPr lang="en-US" sz="1050" dirty="0"/>
+          </a:p>
+          <a:p>
+            <a:pPr indent="0" marL="0">
+              <a:lnSpc>
+                <a:spcPct val="90000"/>
+              </a:lnSpc>
+              <a:buNone/>
+            </a:pPr>
+            <a:r>
+              <a:rPr lang="en-US" sz="1050" b="1" dirty="0">
+                <a:solidFill>
+                  <a:srgbClr val="1B2733"/>
+                </a:solidFill>
+                <a:latin typeface="Yu Gothic" pitchFamily="34" charset="0"/>
+                <a:ea typeface="Yu Gothic" pitchFamily="34" charset="-122"/>
+                <a:cs typeface="Yu Gothic" pitchFamily="34" charset="-120"/>
+              </a:rPr>
+              <a:t>使えない。引き起こす、腕をつかむは暴行になりうる。</a:t>
+            </a:r>
+            <a:endParaRPr lang="en-US" sz="1050" dirty="0"/>
+          </a:p>
+          <a:p>
+            <a:pPr indent="0" marL="0">
+              <a:lnSpc>
+                <a:spcPct val="90000"/>
+              </a:lnSpc>
+              <a:buNone/>
+            </a:pPr>
+            <a:r>
+              <a:rPr lang="en-US" sz="800" i="1" dirty="0">
+                <a:solidFill>
+                  <a:srgbClr val="5F7183"/>
+                </a:solidFill>
+                <a:latin typeface="Calibri" pitchFamily="34" charset="0"/>
+                <a:ea typeface="Calibri" pitchFamily="34" charset="-122"/>
+                <a:cs typeface="Calibri" pitchFamily="34" charset="-120"/>
+              </a:rPr>
+              <a:t>Not available. Pulling them up or grabbing an arm can be assault.</a:t>
+            </a:r>
+            <a:endParaRPr lang="en-US" sz="1050" dirty="0"/>
+          </a:p>
+        </p:txBody>
+      </p:sp>
+      <p:sp>
+        <p:nvSpPr>
+          <p:cNvPr id="11" name="Shape 8"/>
+          <p:cNvSpPr/>
+          <p:nvPr/>
+        </p:nvSpPr>
+        <p:spPr>
+          <a:xfrm>
+            <a:off x="640080" y="2993136"/>
+            <a:ext cx="5327752" cy="1091184"/>
+          </a:xfrm>
+          <a:prstGeom prst="roundRect">
+            <a:avLst>
+              <a:gd name="adj" fmla="val 3352"/>
+            </a:avLst>
+          </a:prstGeom>
+          <a:solidFill>
+            <a:srgbClr val="EFF4F8"/>
+          </a:solidFill>
+          <a:ln/>
+        </p:spPr>
+      </p:sp>
+      <p:sp>
+        <p:nvSpPr>
+          <p:cNvPr id="12" name="Text 9"/>
+          <p:cNvSpPr/>
+          <p:nvPr/>
+        </p:nvSpPr>
+        <p:spPr>
+          <a:xfrm>
+            <a:off x="877824" y="3084576"/>
+            <a:ext cx="4852264" cy="908304"/>
+          </a:xfrm>
+          <a:prstGeom prst="rect">
+            <a:avLst/>
+          </a:prstGeom>
+          <a:noFill/>
+          <a:ln/>
+        </p:spPr>
+        <p:txBody>
+          <a:bodyPr wrap="square" lIns="0" tIns="0" rIns="0" bIns="0" rtlCol="0" anchor="t"/>
+          <a:lstStyle/>
+          <a:p>
+            <a:pPr indent="0" marL="0">
+              <a:lnSpc>
+                <a:spcPct val="90000"/>
+              </a:lnSpc>
+              <a:buNone/>
+            </a:pPr>
+            <a:r>
+              <a:rPr lang="en-US" sz="1050" b="1" dirty="0">
+                <a:solidFill>
+                  <a:srgbClr val="093259"/>
+                </a:solidFill>
+                <a:latin typeface="Yu Gothic" pitchFamily="34" charset="0"/>
+                <a:ea typeface="Yu Gothic" pitchFamily="34" charset="-122"/>
+                <a:cs typeface="Yu Gothic" pitchFamily="34" charset="-120"/>
+              </a:rPr>
+              <a:t>見ている社員</a:t>
+            </a:r>
+            <a:endParaRPr lang="en-US" sz="1050" dirty="0"/>
+          </a:p>
+          <a:p>
+            <a:pPr indent="0" marL="0">
+              <a:lnSpc>
+                <a:spcPct val="90000"/>
+              </a:lnSpc>
+              <a:buNone/>
+            </a:pPr>
+            <a:r>
+              <a:rPr lang="en-US" sz="1050" b="1" dirty="0">
+                <a:solidFill>
+                  <a:srgbClr val="1B2733"/>
+                </a:solidFill>
+                <a:latin typeface="Yu Gothic" pitchFamily="34" charset="0"/>
+                <a:ea typeface="Yu Gothic" pitchFamily="34" charset="-122"/>
+                <a:cs typeface="Yu Gothic" pitchFamily="34" charset="-120"/>
+              </a:rPr>
+              <a:t>People（安全）と Reputation（対応の質）が同時に問われる。</a:t>
+            </a:r>
+            <a:endParaRPr lang="en-US" sz="1050" dirty="0"/>
+          </a:p>
+          <a:p>
+            <a:pPr indent="0" marL="0">
+              <a:lnSpc>
+                <a:spcPct val="90000"/>
+              </a:lnSpc>
+              <a:buNone/>
+            </a:pPr>
+            <a:r>
+              <a:rPr lang="en-US" sz="800" i="1" dirty="0">
+                <a:solidFill>
+                  <a:srgbClr val="5F7183"/>
+                </a:solidFill>
+                <a:latin typeface="Calibri" pitchFamily="34" charset="0"/>
+                <a:ea typeface="Calibri" pitchFamily="34" charset="-122"/>
+                <a:cs typeface="Calibri" pitchFamily="34" charset="-120"/>
+              </a:rPr>
+              <a:t>Both People and Reputation are in play at once.</a:t>
+            </a:r>
+            <a:endParaRPr lang="en-US" sz="1050" dirty="0"/>
+          </a:p>
+        </p:txBody>
+      </p:sp>
+      <p:sp>
+        <p:nvSpPr>
+          <p:cNvPr id="13" name="Shape 10"/>
+          <p:cNvSpPr/>
+          <p:nvPr/>
+        </p:nvSpPr>
+        <p:spPr>
+          <a:xfrm>
+            <a:off x="6223864" y="2993136"/>
+            <a:ext cx="5327752" cy="1091184"/>
+          </a:xfrm>
+          <a:prstGeom prst="roundRect">
+            <a:avLst>
+              <a:gd name="adj" fmla="val 3352"/>
+            </a:avLst>
+          </a:prstGeom>
+          <a:solidFill>
+            <a:srgbClr val="EFF4F8"/>
+          </a:solidFill>
+          <a:ln/>
+        </p:spPr>
+      </p:sp>
+      <p:sp>
+        <p:nvSpPr>
+          <p:cNvPr id="14" name="Text 11"/>
+          <p:cNvSpPr/>
+          <p:nvPr/>
+        </p:nvSpPr>
+        <p:spPr>
+          <a:xfrm>
+            <a:off x="6461608" y="3084576"/>
+            <a:ext cx="4852264" cy="908304"/>
+          </a:xfrm>
+          <a:prstGeom prst="rect">
+            <a:avLst/>
+          </a:prstGeom>
+          <a:noFill/>
+          <a:ln/>
+        </p:spPr>
+        <p:txBody>
+          <a:bodyPr wrap="square" lIns="0" tIns="0" rIns="0" bIns="0" rtlCol="0" anchor="t"/>
+          <a:lstStyle/>
+          <a:p>
+            <a:pPr indent="0" marL="0">
+              <a:lnSpc>
+                <a:spcPct val="90000"/>
+              </a:lnSpc>
+              <a:buNone/>
+            </a:pPr>
+            <a:r>
+              <a:rPr lang="en-US" sz="1050" b="1" dirty="0">
+                <a:solidFill>
+                  <a:srgbClr val="093259"/>
+                </a:solidFill>
+                <a:latin typeface="Yu Gothic" pitchFamily="34" charset="0"/>
+                <a:ea typeface="Yu Gothic" pitchFamily="34" charset="-122"/>
+                <a:cs typeface="Yu Gothic" pitchFamily="34" charset="-120"/>
+              </a:rPr>
+              <a:t>経緯への対応</a:t>
+            </a:r>
+            <a:endParaRPr lang="en-US" sz="1050" dirty="0"/>
+          </a:p>
+          <a:p>
+            <a:pPr indent="0" marL="0">
+              <a:lnSpc>
+                <a:spcPct val="90000"/>
+              </a:lnSpc>
+              <a:buNone/>
+            </a:pPr>
+            <a:r>
+              <a:rPr lang="en-US" sz="1050" b="1" dirty="0">
+                <a:solidFill>
+                  <a:srgbClr val="1B2733"/>
+                </a:solidFill>
+                <a:latin typeface="Yu Gothic" pitchFamily="34" charset="0"/>
+                <a:ea typeface="Yu Gothic" pitchFamily="34" charset="-122"/>
+                <a:cs typeface="Yu Gothic" pitchFamily="34" charset="-120"/>
+              </a:rPr>
+              <a:t>退職理由に立ち入らない。話を聞く相手にならない。</a:t>
+            </a:r>
+            <a:endParaRPr lang="en-US" sz="1050" dirty="0"/>
+          </a:p>
+          <a:p>
+            <a:pPr indent="0" marL="0">
+              <a:lnSpc>
+                <a:spcPct val="90000"/>
+              </a:lnSpc>
+              <a:buNone/>
+            </a:pPr>
+            <a:r>
+              <a:rPr lang="en-US" sz="800" i="1" dirty="0">
+                <a:solidFill>
+                  <a:srgbClr val="5F7183"/>
+                </a:solidFill>
+                <a:latin typeface="Calibri" pitchFamily="34" charset="0"/>
+                <a:ea typeface="Calibri" pitchFamily="34" charset="-122"/>
+                <a:cs typeface="Calibri" pitchFamily="34" charset="-120"/>
+              </a:rPr>
+              <a:t>Do not engage with why they left. Do not become their audience.</a:t>
+            </a:r>
+            <a:endParaRPr lang="en-US" sz="1050" dirty="0"/>
+          </a:p>
+        </p:txBody>
+      </p:sp>
+      <p:sp>
+        <p:nvSpPr>
+          <p:cNvPr id="15" name="Shape 12"/>
+          <p:cNvSpPr/>
+          <p:nvPr/>
+        </p:nvSpPr>
+        <p:spPr>
+          <a:xfrm>
+            <a:off x="640080" y="4212336"/>
+            <a:ext cx="5327752" cy="1091184"/>
+          </a:xfrm>
+          <a:prstGeom prst="roundRect">
+            <a:avLst>
+              <a:gd name="adj" fmla="val 3352"/>
+            </a:avLst>
+          </a:prstGeom>
+          <a:solidFill>
+            <a:srgbClr val="EFF4F8"/>
+          </a:solidFill>
+          <a:ln/>
+        </p:spPr>
+      </p:sp>
+      <p:sp>
+        <p:nvSpPr>
+          <p:cNvPr id="16" name="Text 13"/>
+          <p:cNvSpPr/>
+          <p:nvPr/>
+        </p:nvSpPr>
+        <p:spPr>
+          <a:xfrm>
+            <a:off x="877824" y="4303776"/>
+            <a:ext cx="4852264" cy="908304"/>
+          </a:xfrm>
+          <a:prstGeom prst="rect">
+            <a:avLst/>
+          </a:prstGeom>
+          <a:noFill/>
+          <a:ln/>
+        </p:spPr>
+        <p:txBody>
+          <a:bodyPr wrap="square" lIns="0" tIns="0" rIns="0" bIns="0" rtlCol="0" anchor="t"/>
+          <a:lstStyle/>
+          <a:p>
+            <a:pPr indent="0" marL="0">
+              <a:lnSpc>
+                <a:spcPct val="90000"/>
+              </a:lnSpc>
+              <a:buNone/>
+            </a:pPr>
+            <a:r>
+              <a:rPr lang="en-US" sz="1050" b="1" dirty="0">
+                <a:solidFill>
+                  <a:srgbClr val="093259"/>
+                </a:solidFill>
+                <a:latin typeface="Yu Gothic" pitchFamily="34" charset="0"/>
+                <a:ea typeface="Yu Gothic" pitchFamily="34" charset="-122"/>
+                <a:cs typeface="Yu Gothic" pitchFamily="34" charset="-120"/>
+              </a:rPr>
+              <a:t>「不当解雇だ」</a:t>
+            </a:r>
+            <a:endParaRPr lang="en-US" sz="1050" dirty="0"/>
+          </a:p>
+          <a:p>
+            <a:pPr indent="0" marL="0">
+              <a:lnSpc>
+                <a:spcPct val="90000"/>
+              </a:lnSpc>
+              <a:buNone/>
+            </a:pPr>
+            <a:r>
+              <a:rPr lang="en-US" sz="1050" b="1" dirty="0">
+                <a:solidFill>
+                  <a:srgbClr val="1B2733"/>
+                </a:solidFill>
+                <a:latin typeface="Yu Gothic" pitchFamily="34" charset="0"/>
+                <a:ea typeface="Yu Gothic" pitchFamily="34" charset="-122"/>
+                <a:cs typeface="Yu Gothic" pitchFamily="34" charset="-120"/>
+              </a:rPr>
+              <a:t>内容に応答しない。「お答えできる立場にありません」で足りる。</a:t>
+            </a:r>
+            <a:endParaRPr lang="en-US" sz="1050" dirty="0"/>
+          </a:p>
+          <a:p>
+            <a:pPr indent="0" marL="0">
+              <a:lnSpc>
+                <a:spcPct val="90000"/>
+              </a:lnSpc>
+              <a:buNone/>
+            </a:pPr>
+            <a:r>
+              <a:rPr lang="en-US" sz="800" i="1" dirty="0">
+                <a:solidFill>
+                  <a:srgbClr val="5F7183"/>
+                </a:solidFill>
+                <a:latin typeface="Calibri" pitchFamily="34" charset="0"/>
+                <a:ea typeface="Calibri" pitchFamily="34" charset="-122"/>
+                <a:cs typeface="Calibri" pitchFamily="34" charset="-120"/>
+              </a:rPr>
+              <a:t>Do not engage. "I am not in a position to comment" is enough.</a:t>
+            </a:r>
+            <a:endParaRPr lang="en-US" sz="1050" dirty="0"/>
+          </a:p>
+        </p:txBody>
+      </p:sp>
+      <p:sp>
+        <p:nvSpPr>
+          <p:cNvPr id="17" name="Shape 14"/>
+          <p:cNvSpPr/>
+          <p:nvPr/>
+        </p:nvSpPr>
+        <p:spPr>
+          <a:xfrm>
+            <a:off x="6223864" y="4212336"/>
+            <a:ext cx="5327752" cy="1091184"/>
+          </a:xfrm>
+          <a:prstGeom prst="roundRect">
+            <a:avLst>
+              <a:gd name="adj" fmla="val 3352"/>
+            </a:avLst>
+          </a:prstGeom>
+          <a:solidFill>
+            <a:srgbClr val="EFF4F8"/>
+          </a:solidFill>
+          <a:ln/>
+        </p:spPr>
+      </p:sp>
+      <p:sp>
+        <p:nvSpPr>
+          <p:cNvPr id="18" name="Text 15"/>
+          <p:cNvSpPr/>
+          <p:nvPr/>
+        </p:nvSpPr>
+        <p:spPr>
+          <a:xfrm>
+            <a:off x="6461608" y="4303776"/>
+            <a:ext cx="4852264" cy="908304"/>
+          </a:xfrm>
+          <a:prstGeom prst="rect">
+            <a:avLst/>
+          </a:prstGeom>
+          <a:noFill/>
+          <a:ln/>
+        </p:spPr>
+        <p:txBody>
+          <a:bodyPr wrap="square" lIns="0" tIns="0" rIns="0" bIns="0" rtlCol="0" anchor="t"/>
+          <a:lstStyle/>
+          <a:p>
+            <a:pPr indent="0" marL="0">
+              <a:lnSpc>
+                <a:spcPct val="90000"/>
+              </a:lnSpc>
+              <a:buNone/>
+            </a:pPr>
+            <a:r>
+              <a:rPr lang="en-US" sz="1050" b="1" dirty="0">
+                <a:solidFill>
+                  <a:srgbClr val="093259"/>
+                </a:solidFill>
+                <a:latin typeface="Yu Gothic" pitchFamily="34" charset="0"/>
+                <a:ea typeface="Yu Gothic" pitchFamily="34" charset="-122"/>
+                <a:cs typeface="Yu Gothic" pitchFamily="34" charset="-120"/>
+              </a:rPr>
+              <a:t>社員が仲裁に入る</a:t>
+            </a:r>
+            <a:endParaRPr lang="en-US" sz="1050" dirty="0"/>
+          </a:p>
+          <a:p>
+            <a:pPr indent="0" marL="0">
+              <a:lnSpc>
+                <a:spcPct val="90000"/>
+              </a:lnSpc>
+              <a:buNone/>
+            </a:pPr>
+            <a:r>
+              <a:rPr lang="en-US" sz="1050" b="1" dirty="0">
+                <a:solidFill>
+                  <a:srgbClr val="1B2733"/>
+                </a:solidFill>
+                <a:latin typeface="Yu Gothic" pitchFamily="34" charset="0"/>
+                <a:ea typeface="Yu Gothic" pitchFamily="34" charset="-122"/>
+                <a:cs typeface="Yu Gothic" pitchFamily="34" charset="-120"/>
+              </a:rPr>
+              <a:t>止める。善意でも当事者が増えると収拾がつかない。</a:t>
+            </a:r>
+            <a:endParaRPr lang="en-US" sz="1050" dirty="0"/>
+          </a:p>
+          <a:p>
+            <a:pPr indent="0" marL="0">
+              <a:lnSpc>
+                <a:spcPct val="90000"/>
+              </a:lnSpc>
+              <a:buNone/>
+            </a:pPr>
+            <a:r>
+              <a:rPr lang="en-US" sz="800" i="1" dirty="0">
+                <a:solidFill>
+                  <a:srgbClr val="5F7183"/>
+                </a:solidFill>
+                <a:latin typeface="Calibri" pitchFamily="34" charset="0"/>
+                <a:ea typeface="Calibri" pitchFamily="34" charset="-122"/>
+                <a:cs typeface="Calibri" pitchFamily="34" charset="-120"/>
+              </a:rPr>
+              <a:t>Stop them. Even well meant, more parties makes it unmanageable.</a:t>
+            </a:r>
+            <a:endParaRPr lang="en-US" sz="1050" dirty="0"/>
+          </a:p>
+        </p:txBody>
+      </p:sp>
+      <p:sp>
+        <p:nvSpPr>
+          <p:cNvPr id="19" name="Shape 16"/>
+          <p:cNvSpPr/>
+          <p:nvPr/>
+        </p:nvSpPr>
+        <p:spPr>
+          <a:xfrm>
+            <a:off x="640080" y="5358384"/>
+            <a:ext cx="10911535" cy="493776"/>
+          </a:xfrm>
+          <a:prstGeom prst="roundRect">
+            <a:avLst>
+              <a:gd name="adj" fmla="val 7407"/>
+            </a:avLst>
+          </a:prstGeom>
+          <a:solidFill>
+            <a:srgbClr val="093259"/>
+          </a:solidFill>
+          <a:ln/>
+        </p:spPr>
+      </p:sp>
+      <p:sp>
+        <p:nvSpPr>
+          <p:cNvPr id="20" name="Text 17"/>
+          <p:cNvSpPr/>
+          <p:nvPr/>
+        </p:nvSpPr>
+        <p:spPr>
+          <a:xfrm>
+            <a:off x="877824" y="5404104"/>
+            <a:ext cx="10436047" cy="402336"/>
+          </a:xfrm>
+          <a:prstGeom prst="rect">
+            <a:avLst/>
+          </a:prstGeom>
+          <a:noFill/>
+          <a:ln/>
+        </p:spPr>
+        <p:txBody>
+          <a:bodyPr wrap="square" lIns="0" tIns="0" rIns="0" bIns="0" rtlCol="0" anchor="ctr"/>
+          <a:lstStyle/>
+          <a:p>
+            <a:pPr indent="0" marL="0">
+              <a:lnSpc>
+                <a:spcPct val="86000"/>
+              </a:lnSpc>
+              <a:buNone/>
+            </a:pPr>
+            <a:r>
+              <a:rPr lang="en-US" sz="950" b="1" dirty="0">
+                <a:solidFill>
+                  <a:srgbClr val="12B198"/>
+                </a:solidFill>
+                <a:latin typeface="Yu Gothic" pitchFamily="34" charset="0"/>
+                <a:ea typeface="Yu Gothic" pitchFamily="34" charset="-122"/>
+                <a:cs typeface="Yu Gothic" pitchFamily="34" charset="-120"/>
+              </a:rPr>
+              <a:t>割れる論点　</a:t>
+            </a:r>
+            <a:pPr indent="0" marL="0">
+              <a:lnSpc>
+                <a:spcPct val="86000"/>
+              </a:lnSpc>
+              <a:buNone/>
+            </a:pPr>
+            <a:r>
+              <a:rPr lang="en-US" sz="1100" b="1" dirty="0">
+                <a:solidFill>
+                  <a:srgbClr val="FFFFFF"/>
+                </a:solidFill>
+                <a:latin typeface="Yu Gothic" pitchFamily="34" charset="0"/>
+                <a:ea typeface="Yu Gothic" pitchFamily="34" charset="-122"/>
+                <a:cs typeface="Yu Gothic" pitchFamily="34" charset="-120"/>
+              </a:rPr>
+              <a:t>どの時点で通報するか。退去要請が明確に拒否され、不退去が続いた時点。その前に上長へ一報。</a:t>
+            </a:r>
+            <a:endParaRPr lang="en-US" sz="950" dirty="0"/>
+          </a:p>
+          <a:p>
+            <a:pPr indent="0" marL="0">
+              <a:lnSpc>
+                <a:spcPct val="86000"/>
+              </a:lnSpc>
+              <a:buNone/>
+            </a:pPr>
+            <a:r>
+              <a:rPr lang="en-US" sz="800" i="1" dirty="0">
+                <a:solidFill>
+                  <a:srgbClr val="9FD8CD"/>
+                </a:solidFill>
+                <a:latin typeface="Calibri" pitchFamily="34" charset="0"/>
+                <a:ea typeface="Calibri" pitchFamily="34" charset="-122"/>
+                <a:cs typeface="Calibri" pitchFamily="34" charset="-120"/>
+              </a:rPr>
+              <a:t>When do you call the police? Once a clear request to leave has been refused and they remain. Notify your supervisor before that.</a:t>
+            </a:r>
+            <a:endParaRPr lang="en-US" sz="950" dirty="0"/>
+          </a:p>
+        </p:txBody>
+      </p:sp>
+      <p:sp>
+        <p:nvSpPr>
+          <p:cNvPr id="21" name="Text 18"/>
+          <p:cNvSpPr/>
+          <p:nvPr/>
+        </p:nvSpPr>
+        <p:spPr>
+          <a:xfrm>
+            <a:off x="640080" y="5907024"/>
+            <a:ext cx="10911535" cy="310896"/>
+          </a:xfrm>
+          <a:prstGeom prst="rect">
+            <a:avLst/>
+          </a:prstGeom>
+          <a:noFill/>
+          <a:ln/>
+        </p:spPr>
+        <p:txBody>
+          <a:bodyPr wrap="square" lIns="0" tIns="0" rIns="0" bIns="0" rtlCol="0" anchor="t"/>
+          <a:lstStyle/>
+          <a:p>
+            <a:pPr indent="0" marL="0">
+              <a:lnSpc>
+                <a:spcPct val="88000"/>
+              </a:lnSpc>
+              <a:buNone/>
+            </a:pPr>
+            <a:r>
+              <a:rPr lang="en-US" sz="900" b="1" dirty="0">
+                <a:solidFill>
+                  <a:srgbClr val="0D8A76"/>
+                </a:solidFill>
+                <a:latin typeface="Yu Gothic" pitchFamily="34" charset="0"/>
+                <a:ea typeface="Yu Gothic" pitchFamily="34" charset="-122"/>
+                <a:cs typeface="Yu Gothic" pitchFamily="34" charset="-120"/>
+              </a:rPr>
+              <a:t>Site SOP優先　</a:t>
+            </a:r>
+            <a:pPr indent="0" marL="0">
+              <a:lnSpc>
+                <a:spcPct val="88000"/>
+              </a:lnSpc>
+              <a:buNone/>
+            </a:pPr>
+            <a:r>
+              <a:rPr lang="en-US" sz="900" dirty="0">
+                <a:solidFill>
+                  <a:srgbClr val="1B2733"/>
+                </a:solidFill>
+                <a:latin typeface="Yu Gothic" pitchFamily="34" charset="0"/>
+                <a:ea typeface="Yu Gothic" pitchFamily="34" charset="-122"/>
+                <a:cs typeface="Yu Gothic" pitchFamily="34" charset="-120"/>
+              </a:rPr>
+              <a:t>退去要請の判断者、人事の緊急連絡先、通報の基準は現場ごとに異なる。</a:t>
+            </a:r>
+            <a:endParaRPr lang="en-US" sz="900" dirty="0"/>
+          </a:p>
+          <a:p>
+            <a:pPr indent="0" marL="0">
+              <a:lnSpc>
+                <a:spcPct val="88000"/>
+              </a:lnSpc>
+              <a:buNone/>
+            </a:pPr>
+            <a:r>
+              <a:rPr lang="en-US" sz="750" i="1" dirty="0">
+                <a:solidFill>
+                  <a:srgbClr val="5F7183"/>
+                </a:solidFill>
+                <a:latin typeface="Calibri" pitchFamily="34" charset="0"/>
+                <a:ea typeface="Calibri" pitchFamily="34" charset="-122"/>
+                <a:cs typeface="Calibri" pitchFamily="34" charset="-120"/>
+              </a:rPr>
+              <a:t>Who authorises a removal request, HR emergency contacts, and when to call police differ by site.</a:t>
+            </a:r>
+            <a:endParaRPr lang="en-US" sz="900" dirty="0"/>
+          </a:p>
+        </p:txBody>
+      </p:sp>
+      <p:sp>
+        <p:nvSpPr>
+          <p:cNvPr id="22" name="Text 19"/>
+          <p:cNvSpPr/>
+          <p:nvPr/>
+        </p:nvSpPr>
+        <p:spPr>
+          <a:xfrm>
+            <a:off x="640080" y="6272784"/>
+            <a:ext cx="9905695" cy="237744"/>
+          </a:xfrm>
+          <a:prstGeom prst="rect">
+            <a:avLst/>
+          </a:prstGeom>
+          <a:noFill/>
+          <a:ln/>
+        </p:spPr>
+        <p:txBody>
+          <a:bodyPr wrap="square" lIns="0" tIns="0" rIns="0" bIns="0" rtlCol="0" anchor="t"/>
+          <a:lstStyle/>
+          <a:p>
+            <a:pPr indent="0" marL="0">
+              <a:buNone/>
+            </a:pPr>
+            <a:r>
+              <a:rPr lang="en-US" sz="750" b="1" dirty="0">
+                <a:solidFill>
+                  <a:srgbClr val="D6E0E9"/>
+                </a:solidFill>
+                <a:latin typeface="Yu Gothic" pitchFamily="34" charset="0"/>
+                <a:ea typeface="Yu Gothic" pitchFamily="34" charset="-122"/>
+                <a:cs typeface="Yu Gothic" pitchFamily="34" charset="-120"/>
+              </a:rPr>
+              <a:t>ソース　</a:t>
+            </a:r>
+            <a:pPr indent="0" marL="0">
+              <a:buNone/>
+            </a:pPr>
+            <a:r>
+              <a:rPr lang="en-US" sz="750" dirty="0">
+                <a:solidFill>
+                  <a:srgbClr val="5F7183"/>
+                </a:solidFill>
+                <a:latin typeface="Yu Gothic" pitchFamily="34" charset="0"/>
+                <a:ea typeface="Yu Gothic" pitchFamily="34" charset="-122"/>
+                <a:cs typeface="Yu Gothic" pitchFamily="34" charset="-120"/>
+              </a:rPr>
+              <a:t>警備業法、刑法（130条後段）</a:t>
+            </a:r>
+            <a:endParaRPr lang="en-US" sz="750" dirty="0"/>
+          </a:p>
+        </p:txBody>
+      </p:sp>
+      <p:sp>
+        <p:nvSpPr>
+          <p:cNvPr id="23" name="Text 20"/>
+          <p:cNvSpPr/>
+          <p:nvPr/>
+        </p:nvSpPr>
+        <p:spPr>
+          <a:xfrm>
+            <a:off x="640080" y="6382512"/>
+            <a:ext cx="8778240" cy="292608"/>
+          </a:xfrm>
+          <a:prstGeom prst="rect">
+            <a:avLst/>
+          </a:prstGeom>
+          <a:noFill/>
+          <a:ln/>
+        </p:spPr>
+        <p:txBody>
+          <a:bodyPr wrap="square" lIns="0" tIns="0" rIns="0" bIns="0" rtlCol="0" anchor="ctr"/>
+          <a:lstStyle/>
+          <a:p>
+            <a:pPr indent="0" marL="0">
+              <a:buNone/>
+            </a:pPr>
+            <a:r>
+              <a:rPr lang="en-US" sz="900" dirty="0">
+                <a:solidFill>
+                  <a:srgbClr val="5F7183"/>
+                </a:solidFill>
+                <a:latin typeface="Yu Gothic" pitchFamily="34" charset="0"/>
+                <a:ea typeface="Yu Gothic" pitchFamily="34" charset="-122"/>
+                <a:cs typeface="Yu Gothic" pitchFamily="34" charset="-120"/>
+              </a:rPr>
+              <a:t>第5時限｜業務別教育2 その他当該警備業務を適正に実施するため必要な知識及び技能  </a:t>
+            </a:r>
+            <a:pPr indent="0" marL="0">
+              <a:buNone/>
+            </a:pPr>
+            <a:r>
+              <a:rPr lang="en-US" sz="850" i="1" dirty="0">
+                <a:solidFill>
+                  <a:srgbClr val="D6E0E9"/>
+                </a:solidFill>
+                <a:latin typeface="Calibri" pitchFamily="34" charset="0"/>
+                <a:ea typeface="Calibri" pitchFamily="34" charset="-122"/>
+                <a:cs typeface="Calibri" pitchFamily="34" charset="-120"/>
+              </a:rPr>
+              <a:t>Period 5 | Task-Specific Training 2 — De-escalation</a:t>
+            </a:r>
+            <a:endParaRPr lang="en-US" sz="900" dirty="0"/>
+          </a:p>
+        </p:txBody>
+      </p:sp>
+      <p:sp>
+        <p:nvSpPr>
+          <p:cNvPr id="24" name="Text 21"/>
+          <p:cNvSpPr/>
+          <p:nvPr/>
+        </p:nvSpPr>
+        <p:spPr>
+          <a:xfrm>
+            <a:off x="10637215" y="6382512"/>
+            <a:ext cx="914400" cy="292608"/>
+          </a:xfrm>
+          <a:prstGeom prst="rect">
+            <a:avLst/>
+          </a:prstGeom>
+          <a:noFill/>
+          <a:ln/>
+        </p:spPr>
+        <p:txBody>
+          <a:bodyPr wrap="square" lIns="0" tIns="0" rIns="0" bIns="0" rtlCol="0" anchor="ctr"/>
+          <a:lstStyle/>
+          <a:p>
+            <a:pPr algn="r" indent="0" marL="0">
+              <a:buNone/>
+            </a:pPr>
+            <a:r>
+              <a:rPr lang="en-US" sz="1000" dirty="0">
+                <a:solidFill>
+                  <a:srgbClr val="5F7183"/>
+                </a:solidFill>
+                <a:latin typeface="Calibri" pitchFamily="34" charset="0"/>
+                <a:ea typeface="Calibri" pitchFamily="34" charset="-122"/>
+                <a:cs typeface="Calibri" pitchFamily="34" charset="-120"/>
+              </a:rPr>
+              <a:t>11</a:t>
+            </a:r>
+            <a:endParaRPr lang="en-US" sz="1000" dirty="0"/>
+          </a:p>
+        </p:txBody>
+      </p:sp>
+    </p:spTree>
+  </p:cSld>
+  <p:clrMapOvr>
+    <a:masterClrMapping/>
+  </p:clrMapOvr>
+</p:sld>
+</file>
+
 <file path=ppt/slides/slide2.xml><?xml version="1.0" encoding="utf-8"?>
 <p:sld xmlns:a="http://schemas.openxmlformats.org/drawingml/2006/main" xmlns:r="http://schemas.openxmlformats.org/officeDocument/2006/relationships" xmlns:p="http://schemas.openxmlformats.org/presentationml/2006/main">
   <p:cSld name="Slide 2">
@@ -2368,7 +5029,7 @@
                 <a:ea typeface="Calibri" pitchFamily="34" charset="-122"/>
                 <a:cs typeface="Calibri" pitchFamily="34" charset="-120"/>
               </a:rPr>
-              <a:t>　This Act confers no special authority on you</a:t>
+              <a:t>  This Act confers no special authority on you</a:t>
             </a:r>
             <a:endParaRPr lang="en-US" sz="950" dirty="0"/>
           </a:p>
@@ -2414,7 +5075,7 @@
                 <a:ea typeface="Calibri" pitchFamily="34" charset="-122"/>
                 <a:cs typeface="Calibri" pitchFamily="34" charset="-120"/>
               </a:rPr>
-              <a:t>　You must not infringe the rights or freedoms of others</a:t>
+              <a:t>  You must not infringe the rights or freedoms of others</a:t>
             </a:r>
             <a:endParaRPr lang="en-US" sz="950" dirty="0"/>
           </a:p>
@@ -2460,7 +5121,7 @@
                 <a:ea typeface="Calibri" pitchFamily="34" charset="-122"/>
                 <a:cs typeface="Calibri" pitchFamily="34" charset="-120"/>
               </a:rPr>
-              <a:t>　A guard is a private citizen in law. The uniform adds no authority</a:t>
+              <a:t>  A guard is a private citizen in law. The uniform adds no authority</a:t>
             </a:r>
             <a:endParaRPr lang="en-US" sz="950" dirty="0"/>
           </a:p>
@@ -2506,7 +5167,7 @@
                 <a:ea typeface="Calibri" pitchFamily="34" charset="-122"/>
                 <a:cs typeface="Calibri" pitchFamily="34" charset="-120"/>
               </a:rPr>
-              <a:t>　Art. 16 — the uniform must be clearly distinguishable from a public official's</a:t>
+              <a:t>  Art. 16 — the uniform must be clearly distinguishable from a public official's</a:t>
             </a:r>
             <a:endParaRPr lang="en-US" sz="950" dirty="0"/>
           </a:p>
@@ -2717,7 +5378,7 @@
                 <a:ea typeface="Calibri" pitchFamily="34" charset="-122"/>
                 <a:cs typeface="Calibri" pitchFamily="34" charset="-120"/>
               </a:rPr>
-              <a:t>　Stop and question (Art. 2), protective custody (Art. 3)</a:t>
+              <a:t>  Stop and question (Art. 2), protective custody (Art. 3)</a:t>
             </a:r>
             <a:endParaRPr lang="en-US" sz="950" dirty="0"/>
           </a:p>
@@ -2763,7 +5424,7 @@
                 <a:ea typeface="Calibri" pitchFamily="34" charset="-122"/>
                 <a:cs typeface="Calibri" pitchFamily="34" charset="-120"/>
               </a:rPr>
-              <a:t>　Order evacuation (Art. 4), prevent and stop a crime (Art. 5)</a:t>
+              <a:t>  Order evacuation (Art. 4), prevent and stop a crime (Art. 5)</a:t>
             </a:r>
             <a:endParaRPr lang="en-US" sz="950" dirty="0"/>
           </a:p>
@@ -2809,7 +5470,7 @@
                 <a:ea typeface="Calibri" pitchFamily="34" charset="-122"/>
                 <a:cs typeface="Calibri" pitchFamily="34" charset="-120"/>
               </a:rPr>
-              <a:t>　Enter premises (Art. 6), use weapons (Art. 7)</a:t>
+              <a:t>  Enter premises (Art. 6), use weapons (Art. 7)</a:t>
             </a:r>
             <a:endParaRPr lang="en-US" sz="950" dirty="0"/>
           </a:p>
@@ -2855,7 +5516,7 @@
                 <a:ea typeface="Calibri" pitchFamily="34" charset="-122"/>
                 <a:cs typeface="Calibri" pitchFamily="34" charset="-120"/>
               </a:rPr>
-              <a:t>　Arrest by warrant, and interrogation. A guard has none of these</a:t>
+              <a:t>  Arrest by warrant, and interrogation. A guard has none of these</a:t>
             </a:r>
             <a:endParaRPr lang="en-US" sz="950" dirty="0"/>
           </a:p>
@@ -3066,7 +5727,7 @@
                 <a:ea typeface="Calibri" pitchFamily="34" charset="-122"/>
                 <a:cs typeface="Calibri" pitchFamily="34" charset="-120"/>
               </a:rPr>
-              <a:t>　What anyone may do: citizen's arrest, self-defence, necessity</a:t>
+              <a:t>  What anyone may do: citizen's arrest, self-defence, necessity</a:t>
             </a:r>
             <a:endParaRPr lang="en-US" sz="950" dirty="0"/>
           </a:p>
@@ -3112,7 +5773,7 @@
                 <a:ea typeface="Calibri" pitchFamily="34" charset="-122"/>
                 <a:cs typeface="Calibri" pitchFamily="34" charset="-120"/>
               </a:rPr>
-              <a:t>　What is delegated: admission, requests to leave, access limits, records</a:t>
+              <a:t>  What is delegated: admission, requests to leave, access limits, records</a:t>
             </a:r>
             <a:endParaRPr lang="en-US" sz="950" dirty="0"/>
           </a:p>
@@ -3158,7 +5819,7 @@
                 <a:ea typeface="Calibri" pitchFamily="34" charset="-122"/>
                 <a:cs typeface="Calibri" pitchFamily="34" charset="-120"/>
               </a:rPr>
-              <a:t>　Not available: forced bag checks, interrogation, recovery by force</a:t>
+              <a:t>  Not available: forced bag checks, interrogation, recovery by force</a:t>
             </a:r>
             <a:endParaRPr lang="en-US" sz="950" dirty="0"/>
           </a:p>
@@ -3204,7 +5865,7 @@
                 <a:ea typeface="Calibri" pitchFamily="34" charset="-122"/>
                 <a:cs typeface="Calibri" pitchFamily="34" charset="-120"/>
               </a:rPr>
-              <a:t>　If you exceed it: unlawful confinement, assault, injury, coercion</a:t>
+              <a:t>  If you exceed it: unlawful confinement, assault, injury, coercion</a:t>
             </a:r>
             <a:endParaRPr lang="en-US" sz="950" dirty="0"/>
           </a:p>
@@ -3415,7 +6076,7 @@
                 <a:ea typeface="Calibri" pitchFamily="34" charset="-122"/>
                 <a:cs typeface="Calibri" pitchFamily="34" charset="-120"/>
               </a:rPr>
-              <a:t>　Speaking to someone. Not force</a:t>
+              <a:t>  Speaking to someone. Not force</a:t>
             </a:r>
             <a:endParaRPr lang="en-US" sz="950" dirty="0"/>
           </a:p>
@@ -3461,7 +6122,7 @@
                 <a:ea typeface="Calibri" pitchFamily="34" charset="-122"/>
                 <a:cs typeface="Calibri" pitchFamily="34" charset="-120"/>
               </a:rPr>
-              <a:t>　Positioning yourself. Still not force</a:t>
+              <a:t>  Positioning yourself. Still not force</a:t>
             </a:r>
             <a:endParaRPr lang="en-US" sz="950" dirty="0"/>
           </a:p>
@@ -3507,7 +6168,7 @@
                 <a:ea typeface="Calibri" pitchFamily="34" charset="-122"/>
                 <a:cs typeface="Calibri" pitchFamily="34" charset="-120"/>
               </a:rPr>
-              <a:t>　Blocking the path. This is the boundary</a:t>
+              <a:t>  Blocking the path. This is the boundary</a:t>
             </a:r>
             <a:endParaRPr lang="en-US" sz="950" dirty="0"/>
           </a:p>
@@ -3553,7 +6214,7 @@
                 <a:ea typeface="Calibri" pitchFamily="34" charset="-122"/>
                 <a:cs typeface="Calibri" pitchFamily="34" charset="-120"/>
               </a:rPr>
-              <a:t>　Touching or seizing. Only incidental to self-defence or a lawful arrest</a:t>
+              <a:t>  Touching or seizing. Only incidental to self-defence or a lawful arrest</a:t>
             </a:r>
             <a:endParaRPr lang="en-US" sz="950" dirty="0"/>
           </a:p>
@@ -5701,7 +8362,7 @@
                 <a:ea typeface="Calibri" pitchFamily="34" charset="-122"/>
                 <a:cs typeface="Calibri" pitchFamily="34" charset="-120"/>
               </a:rPr>
-              <a:t>　A method of lowering tension without using physical force</a:t>
+              <a:t>  A method of lowering tension without using physical force</a:t>
             </a:r>
             <a:endParaRPr lang="en-US" sz="950" dirty="0"/>
           </a:p>
@@ -5747,7 +8408,7 @@
                 <a:ea typeface="Calibri" pitchFamily="34" charset="-122"/>
                 <a:cs typeface="Calibri" pitchFamily="34" charset="-120"/>
               </a:rPr>
-              <a:t>　The aim is to end the situation safely</a:t>
+              <a:t>  The aim is to end the situation safely</a:t>
             </a:r>
             <a:endParaRPr lang="en-US" sz="950" dirty="0"/>
           </a:p>
@@ -5793,7 +8454,7 @@
                 <a:ea typeface="Calibri" pitchFamily="34" charset="-122"/>
                 <a:cs typeface="Calibri" pitchFamily="34" charset="-120"/>
               </a:rPr>
-              <a:t>　It is not to win the exchange</a:t>
+              <a:t>  It is not to win the exchange</a:t>
             </a:r>
             <a:endParaRPr lang="en-US" sz="950" dirty="0"/>
           </a:p>
@@ -5839,7 +8500,7 @@
                 <a:ea typeface="Calibri" pitchFamily="34" charset="-122"/>
                 <a:cs typeface="Calibri" pitchFamily="34" charset="-120"/>
               </a:rPr>
-              <a:t>　Precisely because a guard's powers are limited, the skill is necessary</a:t>
+              <a:t>  Precisely because a guard's powers are limited, the skill is necessary</a:t>
             </a:r>
             <a:endParaRPr lang="en-US" sz="950" dirty="0"/>
           </a:p>
@@ -6050,7 +8711,7 @@
                 <a:ea typeface="Calibri" pitchFamily="34" charset="-122"/>
                 <a:cs typeface="Calibri" pitchFamily="34" charset="-120"/>
               </a:rPr>
-              <a:t>　Stay beyond arm's reach. About 1.5 to 2 metres</a:t>
+              <a:t>  Stay beyond arm's reach. About 1.5 to 2 metres</a:t>
             </a:r>
             <a:endParaRPr lang="en-US" sz="950" dirty="0"/>
           </a:p>
@@ -6096,7 +8757,7 @@
                 <a:ea typeface="Calibri" pitchFamily="34" charset="-122"/>
                 <a:cs typeface="Calibri" pitchFamily="34" charset="-120"/>
               </a:rPr>
-              <a:t>　Do not stand behind them, or where you block their exit</a:t>
+              <a:t>  Do not stand behind them, or where you block their exit</a:t>
             </a:r>
             <a:endParaRPr lang="en-US" sz="950" dirty="0"/>
           </a:p>
@@ -6142,7 +8803,7 @@
                 <a:ea typeface="Calibri" pitchFamily="34" charset="-122"/>
                 <a:cs typeface="Calibri" pitchFamily="34" charset="-120"/>
               </a:rPr>
-              <a:t>　Keep your own way out clear</a:t>
+              <a:t>  Keep your own way out clear</a:t>
             </a:r>
             <a:endParaRPr lang="en-US" sz="950" dirty="0"/>
           </a:p>
@@ -6188,7 +8849,7 @@
                 <a:ea typeface="Calibri" pitchFamily="34" charset="-122"/>
                 <a:cs typeface="Calibri" pitchFamily="34" charset="-120"/>
               </a:rPr>
-              <a:t>　Even with several guards, do not surround the person</a:t>
+              <a:t>  Even with several guards, do not surround the person</a:t>
             </a:r>
             <a:endParaRPr lang="en-US" sz="950" dirty="0"/>
           </a:p>
@@ -6399,7 +9060,7 @@
                 <a:ea typeface="Calibri" pitchFamily="34" charset="-122"/>
                 <a:cs typeface="Calibri" pitchFamily="34" charset="-120"/>
               </a:rPr>
-              <a:t>　Do not stand square on. Stand at an angle</a:t>
+              <a:t>  Do not stand square on. Stand at an angle</a:t>
             </a:r>
             <a:endParaRPr lang="en-US" sz="950" dirty="0"/>
           </a:p>
@@ -6445,7 +9106,7 @@
                 <a:ea typeface="Calibri" pitchFamily="34" charset="-122"/>
                 <a:cs typeface="Calibri" pitchFamily="34" charset="-120"/>
               </a:rPr>
-              <a:t>　Keep your hands visible. Do not fold your arms</a:t>
+              <a:t>  Keep your hands visible. Do not fold your arms</a:t>
             </a:r>
             <a:endParaRPr lang="en-US" sz="950" dirty="0"/>
           </a:p>
@@ -6491,7 +9152,7 @@
                 <a:ea typeface="Calibri" pitchFamily="34" charset="-122"/>
                 <a:cs typeface="Calibri" pitchFamily="34" charset="-120"/>
               </a:rPr>
-              <a:t>　Do not point. Do not talk while holding an object</a:t>
+              <a:t>  Do not point. Do not talk while holding an object</a:t>
             </a:r>
             <a:endParaRPr lang="en-US" sz="950" dirty="0"/>
           </a:p>
@@ -6537,7 +9198,7 @@
                 <a:ea typeface="Calibri" pitchFamily="34" charset="-122"/>
                 <a:cs typeface="Calibri" pitchFamily="34" charset="-120"/>
               </a:rPr>
-              <a:t>　If they are seated, bring your eye level closer to theirs</a:t>
+              <a:t>  If they are seated, bring your eye level closer to theirs</a:t>
             </a:r>
             <a:endParaRPr lang="en-US" sz="950" dirty="0"/>
           </a:p>
@@ -6748,7 +9409,7 @@
                 <a:ea typeface="Calibri" pitchFamily="34" charset="-122"/>
                 <a:cs typeface="Calibri" pitchFamily="34" charset="-120"/>
               </a:rPr>
-              <a:t>　Lower your tone, speed and volume</a:t>
+              <a:t>  Lower your tone, speed and volume</a:t>
             </a:r>
             <a:endParaRPr lang="en-US" sz="950" dirty="0"/>
           </a:p>
@@ -6794,7 +9455,7 @@
                 <a:ea typeface="Calibri" pitchFamily="34" charset="-122"/>
                 <a:cs typeface="Calibri" pitchFamily="34" charset="-120"/>
               </a:rPr>
-              <a:t>　Do not speak louder than the other person</a:t>
+              <a:t>  Do not speak louder than the other person</a:t>
             </a:r>
             <a:endParaRPr lang="en-US" sz="950" dirty="0"/>
           </a:p>
@@ -6840,7 +9501,7 @@
                 <a:ea typeface="Calibri" pitchFamily="34" charset="-122"/>
                 <a:cs typeface="Calibri" pitchFamily="34" charset="-120"/>
               </a:rPr>
-              <a:t>　Silence is acceptable. Do not rush to fill it</a:t>
+              <a:t>  Silence is acceptable. Do not rush to fill it</a:t>
             </a:r>
             <a:endParaRPr lang="en-US" sz="950" dirty="0"/>
           </a:p>
@@ -6886,7 +9547,7 @@
                 <a:ea typeface="Calibri" pitchFamily="34" charset="-122"/>
                 <a:cs typeface="Calibri" pitchFamily="34" charset="-120"/>
               </a:rPr>
-              <a:t>　If you speak in another language, slowing down carries more than fluency</a:t>
+              <a:t>  If you speak in another language, slowing down carries more than fluency</a:t>
             </a:r>
             <a:endParaRPr lang="en-US" sz="950" dirty="0"/>
           </a:p>
@@ -7618,7 +10279,7 @@
                 <a:ea typeface="Calibri" pitchFamily="34" charset="-122"/>
                 <a:cs typeface="Calibri" pitchFamily="34" charset="-120"/>
               </a:rPr>
-              <a:t>　Listen to the end without interrupting</a:t>
+              <a:t>  Listen to the end without interrupting</a:t>
             </a:r>
             <a:endParaRPr lang="en-US" sz="950" dirty="0"/>
           </a:p>
@@ -7664,7 +10325,7 @@
                 <a:ea typeface="Calibri" pitchFamily="34" charset="-122"/>
                 <a:cs typeface="Calibri" pitchFamily="34" charset="-120"/>
               </a:rPr>
-              <a:t>　Summarise it back: "So the issue is X"</a:t>
+              <a:t>  Summarise it back: "So the issue is X"</a:t>
             </a:r>
             <a:endParaRPr lang="en-US" sz="950" dirty="0"/>
           </a:p>
@@ -7710,7 +10371,7 @@
                 <a:ea typeface="Calibri" pitchFamily="34" charset="-122"/>
                 <a:cs typeface="Calibri" pitchFamily="34" charset="-120"/>
               </a:rPr>
-              <a:t>　Acknowledging is not agreeing. Say only that you understood</a:t>
+              <a:t>  Acknowledging is not agreeing. Say only that you understood</a:t>
             </a:r>
             <a:endParaRPr lang="en-US" sz="950" dirty="0"/>
           </a:p>
@@ -7756,7 +10417,7 @@
                 <a:ea typeface="Calibri" pitchFamily="34" charset="-122"/>
                 <a:cs typeface="Calibri" pitchFamily="34" charset="-120"/>
               </a:rPr>
-              <a:t>　Do not end the conversation with "those are the rules"</a:t>
+              <a:t>  Do not end the conversation with "those are the rules"</a:t>
             </a:r>
             <a:endParaRPr lang="en-US" sz="950" dirty="0"/>
           </a:p>
@@ -7967,7 +10628,7 @@
                 <a:ea typeface="Calibri" pitchFamily="34" charset="-122"/>
                 <a:cs typeface="Calibri" pitchFamily="34" charset="-120"/>
               </a:rPr>
-              <a:t>　Leave a way to step back. Do not corner them</a:t>
+              <a:t>  Leave a way to step back. Do not corner them</a:t>
             </a:r>
             <a:endParaRPr lang="en-US" sz="950" dirty="0"/>
           </a:p>
@@ -8013,7 +10674,7 @@
                 <a:ea typeface="Calibri" pitchFamily="34" charset="-122"/>
                 <a:cs typeface="Calibri" pitchFamily="34" charset="-120"/>
               </a:rPr>
-              <a:t>　Offer two options. Both must be inside the procedure</a:t>
+              <a:t>  Offer two options. Both must be inside the procedure</a:t>
             </a:r>
             <a:endParaRPr lang="en-US" sz="950" dirty="0"/>
           </a:p>
@@ -8059,7 +10720,7 @@
                 <a:ea typeface="Calibri" pitchFamily="34" charset="-122"/>
                 <a:cs typeface="Calibri" pitchFamily="34" charset="-120"/>
               </a:rPr>
-              <a:t>　Frame it as a route into the process, not as a refusal</a:t>
+              <a:t>  Frame it as a route into the process, not as a refusal</a:t>
             </a:r>
             <a:endParaRPr lang="en-US" sz="950" dirty="0"/>
           </a:p>
@@ -8105,7 +10766,7 @@
                 <a:ea typeface="Calibri" pitchFamily="34" charset="-122"/>
                 <a:cs typeface="Calibri" pitchFamily="34" charset="-120"/>
               </a:rPr>
-              <a:t>　Do not rush. You may take time</a:t>
+              <a:t>  Do not rush. You may take time</a:t>
             </a:r>
             <a:endParaRPr lang="en-US" sz="950" dirty="0"/>
           </a:p>
@@ -8316,7 +10977,7 @@
                 <a:ea typeface="Calibri" pitchFamily="34" charset="-122"/>
                 <a:cs typeface="Calibri" pitchFamily="34" charset="-120"/>
               </a:rPr>
-              <a:t>　A commanding tone. Repeating "step back"</a:t>
+              <a:t>  A commanding tone. Repeating "step back"</a:t>
             </a:r>
             <a:endParaRPr lang="en-US" sz="950" dirty="0"/>
           </a:p>
@@ -8362,7 +11023,7 @@
                 <a:ea typeface="Calibri" pitchFamily="34" charset="-122"/>
                 <a:cs typeface="Calibri" pitchFamily="34" charset="-120"/>
               </a:rPr>
-              <a:t>　Saying "please calm down"</a:t>
+              <a:t>  Saying "please calm down"</a:t>
             </a:r>
             <a:endParaRPr lang="en-US" sz="950" dirty="0"/>
           </a:p>
@@ -8408,7 +11069,7 @@
                 <a:ea typeface="Calibri" pitchFamily="34" charset="-122"/>
                 <a:cs typeface="Calibri" pitchFamily="34" charset="-120"/>
               </a:rPr>
-              <a:t>　Pointing, folded arms, sighing, laughing</a:t>
+              <a:t>  Pointing, folded arms, sighing, laughing</a:t>
             </a:r>
             <a:endParaRPr lang="en-US" sz="950" dirty="0"/>
           </a:p>
@@ -8454,7 +11115,7 @@
                 <a:ea typeface="Calibri" pitchFamily="34" charset="-122"/>
                 <a:cs typeface="Calibri" pitchFamily="34" charset="-120"/>
               </a:rPr>
-              <a:t>　Giving your own opinion or the company's position</a:t>
+              <a:t>  Giving your own opinion or the company's position</a:t>
             </a:r>
             <a:endParaRPr lang="en-US" sz="950" dirty="0"/>
           </a:p>
@@ -8665,7 +11326,7 @@
                 <a:ea typeface="Calibri" pitchFamily="34" charset="-122"/>
                 <a:cs typeface="Calibri" pitchFamily="34" charset="-120"/>
               </a:rPr>
-              <a:t>　The volume keeps rising. The same phrase repeats</a:t>
+              <a:t>  The volume keeps rising. The same phrase repeats</a:t>
             </a:r>
             <a:endParaRPr lang="en-US" sz="950" dirty="0"/>
           </a:p>
@@ -8711,7 +11372,7 @@
                 <a:ea typeface="Calibri" pitchFamily="34" charset="-122"/>
                 <a:cs typeface="Calibri" pitchFamily="34" charset="-120"/>
               </a:rPr>
-              <a:t>　They close the distance, grip an object, or stare fixedly</a:t>
+              <a:t>  They close the distance, grip an object, or stare fixedly</a:t>
             </a:r>
             <a:endParaRPr lang="en-US" sz="950" dirty="0"/>
           </a:p>
@@ -8757,7 +11418,7 @@
                 <a:ea typeface="Calibri" pitchFamily="34" charset="-122"/>
                 <a:cs typeface="Calibri" pitchFamily="34" charset="-120"/>
               </a:rPr>
-              <a:t>　The order is: disengage, call for backup, report to police</a:t>
+              <a:t>  The order is: disengage, call for backup, report to police</a:t>
             </a:r>
             <a:endParaRPr lang="en-US" sz="950" dirty="0"/>
           </a:p>
@@ -8803,7 +11464,7 @@
                 <a:ea typeface="Calibri" pitchFamily="34" charset="-122"/>
                 <a:cs typeface="Calibri" pitchFamily="34" charset="-120"/>
               </a:rPr>
-              <a:t>　If it is not working, disengage</a:t>
+              <a:t>  If it is not working, disengage</a:t>
             </a:r>
             <a:endParaRPr lang="en-US" sz="950" dirty="0"/>
           </a:p>
@@ -9535,7 +12196,7 @@
                 <a:ea typeface="Calibri" pitchFamily="34" charset="-122"/>
                 <a:cs typeface="Calibri" pitchFamily="34" charset="-120"/>
               </a:rPr>
-              <a:t>　Authority: "the director is expecting me", "it is already approved"</a:t>
+              <a:t>  Authority: "the director is expecting me", "it is already approved"</a:t>
             </a:r>
             <a:endParaRPr lang="en-US" sz="950" dirty="0"/>
           </a:p>
@@ -9581,7 +12242,7 @@
                 <a:ea typeface="Calibri" pitchFamily="34" charset="-122"/>
                 <a:cs typeface="Calibri" pitchFamily="34" charset="-120"/>
               </a:rPr>
-              <a:t>　Urgency: "if you delay me it will cost the company"</a:t>
+              <a:t>  Urgency: "if you delay me it will cost the company"</a:t>
             </a:r>
             <a:endParaRPr lang="en-US" sz="950" dirty="0"/>
           </a:p>
@@ -9627,7 +12288,7 @@
                 <a:ea typeface="Calibri" pitchFamily="34" charset="-122"/>
                 <a:cs typeface="Calibri" pitchFamily="34" charset="-120"/>
               </a:rPr>
-              <a:t>　Familiarity: "they let me through last time", "I know Mr X"</a:t>
+              <a:t>  Familiarity: "they let me through last time", "I know Mr X"</a:t>
             </a:r>
             <a:endParaRPr lang="en-US" sz="950" dirty="0"/>
           </a:p>
@@ -9673,7 +12334,7 @@
                 <a:ea typeface="Calibri" pitchFamily="34" charset="-122"/>
                 <a:cs typeface="Calibri" pitchFamily="34" charset="-120"/>
               </a:rPr>
-              <a:t>　Sympathy: "I am soaked", "I am unwell"</a:t>
+              <a:t>  Sympathy: "I am soaked", "I am unwell"</a:t>
             </a:r>
             <a:endParaRPr lang="en-US" sz="950" dirty="0"/>
           </a:p>
@@ -9884,7 +12545,7 @@
                 <a:ea typeface="Calibri" pitchFamily="34" charset="-122"/>
                 <a:cs typeface="Calibri" pitchFamily="34" charset="-120"/>
               </a:rPr>
-              <a:t>　Tailgating: following behind with full hands</a:t>
+              <a:t>  Tailgating: following behind with full hands</a:t>
             </a:r>
             <a:endParaRPr lang="en-US" sz="950" dirty="0"/>
           </a:p>
@@ -9930,7 +12591,7 @@
                 <a:ea typeface="Calibri" pitchFamily="34" charset="-122"/>
                 <a:cs typeface="Calibri" pitchFamily="34" charset="-120"/>
               </a:rPr>
-              <a:t>　Posing as a contractor: workwear, trolley, toolbox</a:t>
+              <a:t>  Posing as a contractor: workwear, trolley, toolbox</a:t>
             </a:r>
             <a:endParaRPr lang="en-US" sz="950" dirty="0"/>
           </a:p>
@@ -9976,7 +12637,7 @@
                 <a:ea typeface="Calibri" pitchFamily="34" charset="-122"/>
                 <a:cs typeface="Calibri" pitchFamily="34" charset="-120"/>
               </a:rPr>
-              <a:t>　Timing the approach for shift change or peak flow</a:t>
+              <a:t>  Timing the approach for shift change or peak flow</a:t>
             </a:r>
             <a:endParaRPr lang="en-US" sz="950" dirty="0"/>
           </a:p>
@@ -10022,7 +12683,7 @@
                 <a:ea typeface="Calibri" pitchFamily="34" charset="-122"/>
                 <a:cs typeface="Calibri" pitchFamily="34" charset="-120"/>
               </a:rPr>
-              <a:t>　Entering by smoking areas or loading bays rather than the front</a:t>
+              <a:t>  Entering by smoking areas or loading bays rather than the front</a:t>
             </a:r>
             <a:endParaRPr lang="en-US" sz="950" dirty="0"/>
           </a:p>
@@ -10233,7 +12894,7 @@
                 <a:ea typeface="Calibri" pitchFamily="34" charset="-122"/>
                 <a:cs typeface="Calibri" pitchFamily="34" charset="-120"/>
               </a:rPr>
-              <a:t>　Return to the procedure. That is the single answer</a:t>
+              <a:t>  Return to the procedure. That is the single answer</a:t>
             </a:r>
             <a:endParaRPr lang="en-US" sz="950" dirty="0"/>
           </a:p>
@@ -10279,7 +12940,7 @@
                 <a:ea typeface="Calibri" pitchFamily="34" charset="-122"/>
                 <a:cs typeface="Calibri" pitchFamily="34" charset="-120"/>
               </a:rPr>
-              <a:t>　Asking to verify is not rude</a:t>
+              <a:t>  Asking to verify is not rude</a:t>
             </a:r>
             <a:endParaRPr lang="en-US" sz="950" dirty="0"/>
           </a:p>
@@ -10325,7 +12986,7 @@
                 <a:ea typeface="Calibri" pitchFamily="34" charset="-122"/>
                 <a:cs typeface="Calibri" pitchFamily="34" charset="-120"/>
               </a:rPr>
-              <a:t>　Make no exception. One exception becomes a precedent</a:t>
+              <a:t>  Make no exception. One exception becomes a precedent</a:t>
             </a:r>
             <a:endParaRPr lang="en-US" sz="950" dirty="0"/>
           </a:p>
@@ -10371,7 +13032,7 @@
                 <a:ea typeface="Calibri" pitchFamily="34" charset="-122"/>
                 <a:cs typeface="Calibri" pitchFamily="34" charset="-120"/>
               </a:rPr>
-              <a:t>　If you cannot decide, do not admit them. Check with your supervisor</a:t>
+              <a:t>  If you cannot decide, do not admit them. Check with your supervisor</a:t>
             </a:r>
             <a:endParaRPr lang="en-US" sz="950" dirty="0"/>
           </a:p>
@@ -10582,7 +13243,7 @@
                 <a:ea typeface="Calibri" pitchFamily="34" charset="-122"/>
                 <a:cs typeface="Calibri" pitchFamily="34" charset="-120"/>
               </a:rPr>
-              <a:t>　"Let me check. Could you wait here?"</a:t>
+              <a:t>  "Let me check. Could you wait here?"</a:t>
             </a:r>
             <a:endParaRPr lang="en-US" sz="950" dirty="0"/>
           </a:p>
@@ -10628,7 +13289,7 @@
                 <a:ea typeface="Calibri" pitchFamily="34" charset="-122"/>
                 <a:cs typeface="Calibri" pitchFamily="34" charset="-120"/>
               </a:rPr>
-              <a:t>　"Which department are you visiting? May I have the name?"</a:t>
+              <a:t>  "Which department are you visiting? May I have the name?"</a:t>
             </a:r>
             <a:endParaRPr lang="en-US" sz="950" dirty="0"/>
           </a:p>
@@ -10674,7 +13335,7 @@
                 <a:ea typeface="Calibri" pitchFamily="34" charset="-122"/>
                 <a:cs typeface="Calibri" pitchFamily="34" charset="-120"/>
               </a:rPr>
-              <a:t>　Not "it is the rule", but "this needs to be verified"</a:t>
+              <a:t>  Not "it is the rule", but "this needs to be verified"</a:t>
             </a:r>
             <a:endParaRPr lang="en-US" sz="950" dirty="0"/>
           </a:p>
@@ -10720,7 +13381,7 @@
                 <a:ea typeface="Calibri" pitchFamily="34" charset="-122"/>
                 <a:cs typeface="Calibri" pitchFamily="34" charset="-120"/>
               </a:rPr>
-              <a:t>　When you refuse, say what you can do instead</a:t>
+              <a:t>  When you refuse, say what you can do instead</a:t>
             </a:r>
             <a:endParaRPr lang="en-US" sz="950" dirty="0"/>
           </a:p>
@@ -11452,7 +14113,7 @@
                 <a:ea typeface="Calibri" pitchFamily="34" charset="-122"/>
                 <a:cs typeface="Calibri" pitchFamily="34" charset="-120"/>
               </a:rPr>
-              <a:t>　Once they have left, they are a visitor</a:t>
+              <a:t>  Once they have left, they are a visitor</a:t>
             </a:r>
             <a:endParaRPr lang="en-US" sz="950" dirty="0"/>
           </a:p>
@@ -11498,7 +14159,7 @@
                 <a:ea typeface="Calibri" pitchFamily="34" charset="-122"/>
                 <a:cs typeface="Calibri" pitchFamily="34" charset="-120"/>
               </a:rPr>
-              <a:t>　Return them to the visitor process. Knowing them is not an exception</a:t>
+              <a:t>  Return them to the visitor process. Knowing them is not an exception</a:t>
             </a:r>
             <a:endParaRPr lang="en-US" sz="950" dirty="0"/>
           </a:p>
@@ -11544,7 +14205,7 @@
                 <a:ea typeface="Calibri" pitchFamily="34" charset="-122"/>
                 <a:cs typeface="Calibri" pitchFamily="34" charset="-120"/>
               </a:rPr>
-              <a:t>　Do not engage with why they left. Do not become their audience</a:t>
+              <a:t>  Do not engage with why they left. Do not become their audience</a:t>
             </a:r>
             <a:endParaRPr lang="en-US" sz="950" dirty="0"/>
           </a:p>
@@ -11590,7 +14251,7 @@
                 <a:ea typeface="Calibri" pitchFamily="34" charset="-122"/>
                 <a:cs typeface="Calibri" pitchFamily="34" charset="-120"/>
               </a:rPr>
-              <a:t>　Refer to HR. Do not respond to emotional statements</a:t>
+              <a:t>  Refer to HR. Do not respond to emotional statements</a:t>
             </a:r>
             <a:endParaRPr lang="en-US" sz="950" dirty="0"/>
           </a:p>
@@ -11801,7 +14462,7 @@
                 <a:ea typeface="Calibri" pitchFamily="34" charset="-122"/>
                 <a:cs typeface="Calibri" pitchFamily="34" charset="-120"/>
               </a:rPr>
-              <a:t>　No interviews on company property</a:t>
+              <a:t>  No interviews on company property</a:t>
             </a:r>
             <a:endParaRPr lang="en-US" sz="950" dirty="0"/>
           </a:p>
@@ -11847,7 +14508,7 @@
                 <a:ea typeface="Calibri" pitchFamily="34" charset="-122"/>
                 <a:cs typeface="Calibri" pitchFamily="34" charset="-120"/>
               </a:rPr>
-              <a:t>　Refer to Communications. Keep a single channel</a:t>
+              <a:t>  Refer to Communications. Keep a single channel</a:t>
             </a:r>
             <a:endParaRPr lang="en-US" sz="950" dirty="0"/>
           </a:p>
@@ -11893,7 +14554,7 @@
                 <a:ea typeface="Calibri" pitchFamily="34" charset="-122"/>
                 <a:cs typeface="Calibri" pitchFamily="34" charset="-120"/>
               </a:rPr>
-              <a:t>　"I am not in a position to comment" is enough</a:t>
+              <a:t>  "I am not in a position to comment" is enough</a:t>
             </a:r>
             <a:endParaRPr lang="en-US" sz="950" dirty="0"/>
           </a:p>
@@ -11939,7 +14600,7 @@
                 <a:ea typeface="Calibri" pitchFamily="34" charset="-122"/>
                 <a:cs typeface="Calibri" pitchFamily="34" charset="-120"/>
               </a:rPr>
-              <a:t>　Act on the assumption that you are being filmed</a:t>
+              <a:t>  Act on the assumption that you are being filmed</a:t>
             </a:r>
             <a:endParaRPr lang="en-US" sz="950" dirty="0"/>
           </a:p>
@@ -12150,7 +14811,7 @@
                 <a:ea typeface="Calibri" pitchFamily="34" charset="-122"/>
                 <a:cs typeface="Calibri" pitchFamily="34" charset="-120"/>
               </a:rPr>
-              <a:t>　Listen to the end. Do not conclude midway</a:t>
+              <a:t>  Listen to the end. Do not conclude midway</a:t>
             </a:r>
             <a:endParaRPr lang="en-US" sz="950" dirty="0"/>
           </a:p>
@@ -12196,7 +14857,7 @@
                 <a:ea typeface="Calibri" pitchFamily="34" charset="-122"/>
                 <a:cs typeface="Calibri" pitchFamily="34" charset="-120"/>
               </a:rPr>
-              <a:t>　Do not invent the company's position on the spot</a:t>
+              <a:t>  Do not invent the company's position on the spot</a:t>
             </a:r>
             <a:endParaRPr lang="en-US" sz="950" dirty="0"/>
           </a:p>
@@ -12242,7 +14903,7 @@
                 <a:ea typeface="Calibri" pitchFamily="34" charset="-122"/>
                 <a:cs typeface="Calibri" pitchFamily="34" charset="-120"/>
               </a:rPr>
-              <a:t>　Make no promises. Say only that you will check and reply</a:t>
+              <a:t>  Make no promises. Say only that you will check and reply</a:t>
             </a:r>
             <a:endParaRPr lang="en-US" sz="950" dirty="0"/>
           </a:p>
@@ -12288,7 +14949,7 @@
                 <a:ea typeface="Calibri" pitchFamily="34" charset="-122"/>
                 <a:cs typeface="Calibri" pitchFamily="34" charset="-120"/>
               </a:rPr>
-              <a:t>　Record what was said, with the time and the actual words</a:t>
+              <a:t>  Record what was said, with the time and the actual words</a:t>
             </a:r>
             <a:endParaRPr lang="en-US" sz="950" dirty="0"/>
           </a:p>
@@ -12499,7 +15160,7 @@
                 <a:ea typeface="Calibri" pitchFamily="34" charset="-122"/>
                 <a:cs typeface="Calibri" pitchFamily="34" charset="-120"/>
               </a:rPr>
-              <a:t>　Do not make them stand or walk</a:t>
+              <a:t>  Do not make them stand or walk</a:t>
             </a:r>
             <a:endParaRPr lang="en-US" sz="950" dirty="0"/>
           </a:p>
@@ -12545,7 +15206,7 @@
                 <a:ea typeface="Calibri" pitchFamily="34" charset="-122"/>
                 <a:cs typeface="Calibri" pitchFamily="34" charset="-120"/>
               </a:rPr>
-              <a:t>　Check consciousness and breathing. If unsure, call for an ambulance</a:t>
+              <a:t>  Check consciousness and breathing. If unsure, call for an ambulance</a:t>
             </a:r>
             <a:endParaRPr lang="en-US" sz="950" dirty="0"/>
           </a:p>
@@ -12591,7 +15252,7 @@
                 <a:ea typeface="Calibri" pitchFamily="34" charset="-122"/>
                 <a:cs typeface="Calibri" pitchFamily="34" charset="-120"/>
               </a:rPr>
-              <a:t>　Do not give food, drink or medication</a:t>
+              <a:t>  Do not give food, drink or medication</a:t>
             </a:r>
             <a:endParaRPr lang="en-US" sz="950" dirty="0"/>
           </a:p>
@@ -12637,7 +15298,7 @@
                 <a:ea typeface="Calibri" pitchFamily="34" charset="-122"/>
                 <a:cs typeface="Calibri" pitchFamily="34" charset="-120"/>
               </a:rPr>
-              <a:t>　Name a specific person to call for help and for the ambulance</a:t>
+              <a:t>  Name a specific person to call for help and for the ambulance</a:t>
             </a:r>
             <a:endParaRPr lang="en-US" sz="950" dirty="0"/>
           </a:p>
@@ -14235,7 +16896,7 @@
                 <a:ea typeface="Yu Gothic" pitchFamily="34" charset="-122"/>
                 <a:cs typeface="Yu Gothic" pitchFamily="34" charset="-120"/>
               </a:rPr>
-              <a:t>TTX 5-B　退去に応じない元従業員</a:t>
+              <a:t>TTX 5-A 講評 ― 模範解答</a:t>
             </a:r>
             <a:endParaRPr lang="en-US" sz="2300" dirty="0"/>
           </a:p>
@@ -14255,7 +16916,7 @@
                 <a:ea typeface="Calibri" pitchFamily="34" charset="-122"/>
                 <a:cs typeface="Calibri" pitchFamily="34" charset="-120"/>
               </a:rPr>
-              <a:t>TTX 5-B — A Former Employee Who Will Not Leave</a:t>
+              <a:t>TTX 5-A Debrief — Model Answer</a:t>
             </a:r>
             <a:endParaRPr lang="en-US" sz="2300" dirty="0"/>
           </a:p>
@@ -14316,7 +16977,7 @@
                 <a:ea typeface="Calibri" pitchFamily="34" charset="-122"/>
                 <a:cs typeface="Calibri" pitchFamily="34" charset="-120"/>
               </a:rPr>
-              <a:t>CASE 5-B</a:t>
+              <a:t>DEBRIEF</a:t>
             </a:r>
             <a:endParaRPr lang="en-US" sz="1100" dirty="0"/>
           </a:p>
@@ -14324,18 +16985,721 @@
       </p:sp>
       <p:sp>
         <p:nvSpPr>
-          <p:cNvPr id="6" name="Shape 3"/>
+          <p:cNvPr id="6" name="Text 3"/>
           <p:cNvSpPr/>
           <p:nvPr/>
         </p:nvSpPr>
         <p:spPr>
           <a:xfrm>
             <a:off x="640080" y="1188720"/>
-            <a:ext cx="10911535" cy="1124712"/>
+            <a:ext cx="10911535" cy="530352"/>
+          </a:xfrm>
+          <a:prstGeom prst="rect">
+            <a:avLst/>
+          </a:prstGeom>
+          <a:noFill/>
+          <a:ln/>
+        </p:spPr>
+        <p:txBody>
+          <a:bodyPr wrap="square" lIns="0" tIns="0" rIns="0" bIns="0" rtlCol="0" anchor="t"/>
+          <a:lstStyle/>
+          <a:p>
+            <a:pPr indent="0" marL="0">
+              <a:lnSpc>
+                <a:spcPct val="90000"/>
+              </a:lnSpc>
+              <a:buNone/>
+            </a:pPr>
+            <a:r>
+              <a:rPr lang="en-US" sz="1000" b="1" dirty="0">
+                <a:solidFill>
+                  <a:srgbClr val="0D8A76"/>
+                </a:solidFill>
+                <a:latin typeface="Yu Gothic" pitchFamily="34" charset="0"/>
+                <a:ea typeface="Yu Gothic" pitchFamily="34" charset="-122"/>
+                <a:cs typeface="Yu Gothic" pitchFamily="34" charset="-120"/>
+              </a:rPr>
+              <a:t>狙い　</a:t>
+            </a:r>
+            <a:pPr indent="0" marL="0">
+              <a:lnSpc>
+                <a:spcPct val="90000"/>
+              </a:lnSpc>
+              <a:buNone/>
+            </a:pPr>
+            <a:r>
+              <a:rPr lang="en-US" sz="1150" b="1" dirty="0">
+                <a:solidFill>
+                  <a:srgbClr val="093259"/>
+                </a:solidFill>
+                <a:latin typeface="Yu Gothic" pitchFamily="34" charset="0"/>
+                <a:ea typeface="Yu Gothic" pitchFamily="34" charset="-122"/>
+                <a:cs typeface="Yu Gothic" pitchFamily="34" charset="-120"/>
+              </a:rPr>
+              <a:t>最良は B のあと D。受け止めてから具体化する。</a:t>
+            </a:r>
+            <a:endParaRPr lang="en-US" sz="1000" dirty="0"/>
+          </a:p>
+          <a:p>
+            <a:pPr indent="0" marL="0">
+              <a:lnSpc>
+                <a:spcPct val="90000"/>
+              </a:lnSpc>
+              <a:buNone/>
+            </a:pPr>
+            <a:r>
+              <a:rPr lang="en-US" sz="850" i="1" dirty="0">
+                <a:solidFill>
+                  <a:srgbClr val="5F7183"/>
+                </a:solidFill>
+                <a:latin typeface="Calibri" pitchFamily="34" charset="0"/>
+                <a:ea typeface="Calibri" pitchFamily="34" charset="-122"/>
+                <a:cs typeface="Calibri" pitchFamily="34" charset="-120"/>
+              </a:rPr>
+              <a:t>The best sequence is B then D: acknowledge first, then make it concrete.</a:t>
+            </a:r>
+            <a:endParaRPr lang="en-US" sz="1000" dirty="0"/>
+          </a:p>
+        </p:txBody>
+      </p:sp>
+      <p:sp>
+        <p:nvSpPr>
+          <p:cNvPr id="7" name="Shape 4"/>
+          <p:cNvSpPr/>
+          <p:nvPr/>
+        </p:nvSpPr>
+        <p:spPr>
+          <a:xfrm>
+            <a:off x="640080" y="1773936"/>
+            <a:ext cx="5327752" cy="1091184"/>
           </a:xfrm>
           <a:prstGeom prst="roundRect">
             <a:avLst>
-              <a:gd name="adj" fmla="val 3252"/>
+              <a:gd name="adj" fmla="val 3352"/>
+            </a:avLst>
+          </a:prstGeom>
+          <a:solidFill>
+            <a:srgbClr val="EFF4F8"/>
+          </a:solidFill>
+          <a:ln/>
+        </p:spPr>
+      </p:sp>
+      <p:sp>
+        <p:nvSpPr>
+          <p:cNvPr id="8" name="Text 5"/>
+          <p:cNvSpPr/>
+          <p:nvPr/>
+        </p:nvSpPr>
+        <p:spPr>
+          <a:xfrm>
+            <a:off x="877824" y="1865376"/>
+            <a:ext cx="4852264" cy="908304"/>
+          </a:xfrm>
+          <a:prstGeom prst="rect">
+            <a:avLst/>
+          </a:prstGeom>
+          <a:noFill/>
+          <a:ln/>
+        </p:spPr>
+        <p:txBody>
+          <a:bodyPr wrap="square" lIns="0" tIns="0" rIns="0" bIns="0" rtlCol="0" anchor="t"/>
+          <a:lstStyle/>
+          <a:p>
+            <a:pPr indent="0" marL="0">
+              <a:lnSpc>
+                <a:spcPct val="90000"/>
+              </a:lnSpc>
+              <a:buNone/>
+            </a:pPr>
+            <a:r>
+              <a:rPr lang="en-US" sz="1050" b="1" dirty="0">
+                <a:solidFill>
+                  <a:srgbClr val="093259"/>
+                </a:solidFill>
+                <a:latin typeface="Yu Gothic" pitchFamily="34" charset="0"/>
+                <a:ea typeface="Yu Gothic" pitchFamily="34" charset="-122"/>
+                <a:cs typeface="Yu Gothic" pitchFamily="34" charset="-120"/>
+              </a:rPr>
+              <a:t>A「規則ですので」</a:t>
+            </a:r>
+            <a:endParaRPr lang="en-US" sz="1050" dirty="0"/>
+          </a:p>
+          <a:p>
+            <a:pPr indent="0" marL="0">
+              <a:lnSpc>
+                <a:spcPct val="90000"/>
+              </a:lnSpc>
+              <a:buNone/>
+            </a:pPr>
+            <a:r>
+              <a:rPr lang="en-US" sz="1050" b="1" dirty="0">
+                <a:solidFill>
+                  <a:srgbClr val="1B2733"/>
+                </a:solidFill>
+                <a:latin typeface="Yu Gothic" pitchFamily="34" charset="0"/>
+                <a:ea typeface="Yu Gothic" pitchFamily="34" charset="-122"/>
+                <a:cs typeface="Yu Gothic" pitchFamily="34" charset="-120"/>
+              </a:rPr>
+              <a:t>拒否のみで、相手が引き下がれる形が残らない。</a:t>
+            </a:r>
+            <a:endParaRPr lang="en-US" sz="1050" dirty="0"/>
+          </a:p>
+          <a:p>
+            <a:pPr indent="0" marL="0">
+              <a:lnSpc>
+                <a:spcPct val="90000"/>
+              </a:lnSpc>
+              <a:buNone/>
+            </a:pPr>
+            <a:r>
+              <a:rPr lang="en-US" sz="800" i="1" dirty="0">
+                <a:solidFill>
+                  <a:srgbClr val="5F7183"/>
+                </a:solidFill>
+                <a:latin typeface="Calibri" pitchFamily="34" charset="0"/>
+                <a:ea typeface="Calibri" pitchFamily="34" charset="-122"/>
+                <a:cs typeface="Calibri" pitchFamily="34" charset="-120"/>
+              </a:rPr>
+              <a:t>A refusal with no way for the person to step back.</a:t>
+            </a:r>
+            <a:endParaRPr lang="en-US" sz="1050" dirty="0"/>
+          </a:p>
+        </p:txBody>
+      </p:sp>
+      <p:sp>
+        <p:nvSpPr>
+          <p:cNvPr id="9" name="Shape 6"/>
+          <p:cNvSpPr/>
+          <p:nvPr/>
+        </p:nvSpPr>
+        <p:spPr>
+          <a:xfrm>
+            <a:off x="6223864" y="1773936"/>
+            <a:ext cx="5327752" cy="1091184"/>
+          </a:xfrm>
+          <a:prstGeom prst="roundRect">
+            <a:avLst>
+              <a:gd name="adj" fmla="val 3352"/>
+            </a:avLst>
+          </a:prstGeom>
+          <a:solidFill>
+            <a:srgbClr val="E4F4F0"/>
+          </a:solidFill>
+          <a:ln/>
+        </p:spPr>
+      </p:sp>
+      <p:sp>
+        <p:nvSpPr>
+          <p:cNvPr id="10" name="Text 7"/>
+          <p:cNvSpPr/>
+          <p:nvPr/>
+        </p:nvSpPr>
+        <p:spPr>
+          <a:xfrm>
+            <a:off x="6461608" y="1865376"/>
+            <a:ext cx="4852264" cy="908304"/>
+          </a:xfrm>
+          <a:prstGeom prst="rect">
+            <a:avLst/>
+          </a:prstGeom>
+          <a:noFill/>
+          <a:ln/>
+        </p:spPr>
+        <p:txBody>
+          <a:bodyPr wrap="square" lIns="0" tIns="0" rIns="0" bIns="0" rtlCol="0" anchor="t"/>
+          <a:lstStyle/>
+          <a:p>
+            <a:pPr indent="0" marL="0">
+              <a:lnSpc>
+                <a:spcPct val="90000"/>
+              </a:lnSpc>
+              <a:buNone/>
+            </a:pPr>
+            <a:r>
+              <a:rPr lang="en-US" sz="1050" b="1" dirty="0">
+                <a:solidFill>
+                  <a:srgbClr val="0D8A76"/>
+                </a:solidFill>
+                <a:latin typeface="Yu Gothic" pitchFamily="34" charset="0"/>
+                <a:ea typeface="Yu Gothic" pitchFamily="34" charset="-122"/>
+                <a:cs typeface="Yu Gothic" pitchFamily="34" charset="-120"/>
+              </a:rPr>
+              <a:t>B と D</a:t>
+            </a:r>
+            <a:endParaRPr lang="en-US" sz="1050" dirty="0"/>
+          </a:p>
+          <a:p>
+            <a:pPr indent="0" marL="0">
+              <a:lnSpc>
+                <a:spcPct val="90000"/>
+              </a:lnSpc>
+              <a:buNone/>
+            </a:pPr>
+            <a:r>
+              <a:rPr lang="en-US" sz="1050" b="1" dirty="0">
+                <a:solidFill>
+                  <a:srgbClr val="1B2733"/>
+                </a:solidFill>
+                <a:latin typeface="Yu Gothic" pitchFamily="34" charset="0"/>
+                <a:ea typeface="Yu Gothic" pitchFamily="34" charset="-122"/>
+                <a:cs typeface="Yu Gothic" pitchFamily="34" charset="-120"/>
+              </a:rPr>
+              <a:t>B で受け止め、D で具体化する。手続きへの誘導になっている。</a:t>
+            </a:r>
+            <a:endParaRPr lang="en-US" sz="1050" dirty="0"/>
+          </a:p>
+          <a:p>
+            <a:pPr indent="0" marL="0">
+              <a:lnSpc>
+                <a:spcPct val="90000"/>
+              </a:lnSpc>
+              <a:buNone/>
+            </a:pPr>
+            <a:r>
+              <a:rPr lang="en-US" sz="800" i="1" dirty="0">
+                <a:solidFill>
+                  <a:srgbClr val="5F7183"/>
+                </a:solidFill>
+                <a:latin typeface="Calibri" pitchFamily="34" charset="0"/>
+                <a:ea typeface="Calibri" pitchFamily="34" charset="-122"/>
+                <a:cs typeface="Calibri" pitchFamily="34" charset="-120"/>
+              </a:rPr>
+              <a:t>B acknowledges, D makes it concrete. Both route into the procedure.</a:t>
+            </a:r>
+            <a:endParaRPr lang="en-US" sz="1050" dirty="0"/>
+          </a:p>
+        </p:txBody>
+      </p:sp>
+      <p:sp>
+        <p:nvSpPr>
+          <p:cNvPr id="11" name="Shape 8"/>
+          <p:cNvSpPr/>
+          <p:nvPr/>
+        </p:nvSpPr>
+        <p:spPr>
+          <a:xfrm>
+            <a:off x="640080" y="2993136"/>
+            <a:ext cx="5327752" cy="1091184"/>
+          </a:xfrm>
+          <a:prstGeom prst="roundRect">
+            <a:avLst>
+              <a:gd name="adj" fmla="val 3352"/>
+            </a:avLst>
+          </a:prstGeom>
+          <a:solidFill>
+            <a:srgbClr val="EFF4F8"/>
+          </a:solidFill>
+          <a:ln/>
+        </p:spPr>
+      </p:sp>
+      <p:sp>
+        <p:nvSpPr>
+          <p:cNvPr id="12" name="Text 9"/>
+          <p:cNvSpPr/>
+          <p:nvPr/>
+        </p:nvSpPr>
+        <p:spPr>
+          <a:xfrm>
+            <a:off x="877824" y="3084576"/>
+            <a:ext cx="4852264" cy="908304"/>
+          </a:xfrm>
+          <a:prstGeom prst="rect">
+            <a:avLst/>
+          </a:prstGeom>
+          <a:noFill/>
+          <a:ln/>
+        </p:spPr>
+        <p:txBody>
+          <a:bodyPr wrap="square" lIns="0" tIns="0" rIns="0" bIns="0" rtlCol="0" anchor="t"/>
+          <a:lstStyle/>
+          <a:p>
+            <a:pPr indent="0" marL="0">
+              <a:lnSpc>
+                <a:spcPct val="90000"/>
+              </a:lnSpc>
+              <a:buNone/>
+            </a:pPr>
+            <a:r>
+              <a:rPr lang="en-US" sz="1050" b="1" dirty="0">
+                <a:solidFill>
+                  <a:srgbClr val="093259"/>
+                </a:solidFill>
+                <a:latin typeface="Yu Gothic" pitchFamily="34" charset="0"/>
+                <a:ea typeface="Yu Gothic" pitchFamily="34" charset="-122"/>
+                <a:cs typeface="Yu Gothic" pitchFamily="34" charset="-120"/>
+              </a:rPr>
+              <a:t>C「落ち着いて」</a:t>
+            </a:r>
+            <a:endParaRPr lang="en-US" sz="1050" dirty="0"/>
+          </a:p>
+          <a:p>
+            <a:pPr indent="0" marL="0">
+              <a:lnSpc>
+                <a:spcPct val="90000"/>
+              </a:lnSpc>
+              <a:buNone/>
+            </a:pPr>
+            <a:r>
+              <a:rPr lang="en-US" sz="1050" b="1" dirty="0">
+                <a:solidFill>
+                  <a:srgbClr val="1B2733"/>
+                </a:solidFill>
+                <a:latin typeface="Yu Gothic" pitchFamily="34" charset="0"/>
+                <a:ea typeface="Yu Gothic" pitchFamily="34" charset="-122"/>
+                <a:cs typeface="Yu Gothic" pitchFamily="34" charset="-120"/>
+              </a:rPr>
+              <a:t>相手の状態を否定している。ほぼ確実に悪化する。</a:t>
+            </a:r>
+            <a:endParaRPr lang="en-US" sz="1050" dirty="0"/>
+          </a:p>
+          <a:p>
+            <a:pPr indent="0" marL="0">
+              <a:lnSpc>
+                <a:spcPct val="90000"/>
+              </a:lnSpc>
+              <a:buNone/>
+            </a:pPr>
+            <a:r>
+              <a:rPr lang="en-US" sz="800" i="1" dirty="0">
+                <a:solidFill>
+                  <a:srgbClr val="5F7183"/>
+                </a:solidFill>
+                <a:latin typeface="Calibri" pitchFamily="34" charset="0"/>
+                <a:ea typeface="Calibri" pitchFamily="34" charset="-122"/>
+                <a:cs typeface="Calibri" pitchFamily="34" charset="-120"/>
+              </a:rPr>
+              <a:t>It denies how they feel, and almost always makes things worse.</a:t>
+            </a:r>
+            <a:endParaRPr lang="en-US" sz="1050" dirty="0"/>
+          </a:p>
+        </p:txBody>
+      </p:sp>
+      <p:sp>
+        <p:nvSpPr>
+          <p:cNvPr id="13" name="Shape 10"/>
+          <p:cNvSpPr/>
+          <p:nvPr/>
+        </p:nvSpPr>
+        <p:spPr>
+          <a:xfrm>
+            <a:off x="6223864" y="2993136"/>
+            <a:ext cx="5327752" cy="1091184"/>
+          </a:xfrm>
+          <a:prstGeom prst="roundRect">
+            <a:avLst>
+              <a:gd name="adj" fmla="val 3352"/>
+            </a:avLst>
+          </a:prstGeom>
+          <a:solidFill>
+            <a:srgbClr val="EFF4F8"/>
+          </a:solidFill>
+          <a:ln/>
+        </p:spPr>
+      </p:sp>
+      <p:sp>
+        <p:nvSpPr>
+          <p:cNvPr id="14" name="Text 11"/>
+          <p:cNvSpPr/>
+          <p:nvPr/>
+        </p:nvSpPr>
+        <p:spPr>
+          <a:xfrm>
+            <a:off x="6461608" y="3084576"/>
+            <a:ext cx="4852264" cy="908304"/>
+          </a:xfrm>
+          <a:prstGeom prst="rect">
+            <a:avLst/>
+          </a:prstGeom>
+          <a:noFill/>
+          <a:ln/>
+        </p:spPr>
+        <p:txBody>
+          <a:bodyPr wrap="square" lIns="0" tIns="0" rIns="0" bIns="0" rtlCol="0" anchor="t"/>
+          <a:lstStyle/>
+          <a:p>
+            <a:pPr indent="0" marL="0">
+              <a:lnSpc>
+                <a:spcPct val="90000"/>
+              </a:lnSpc>
+              <a:buNone/>
+            </a:pPr>
+            <a:r>
+              <a:rPr lang="en-US" sz="1050" b="1" dirty="0">
+                <a:solidFill>
+                  <a:srgbClr val="093259"/>
+                </a:solidFill>
+                <a:latin typeface="Yu Gothic" pitchFamily="34" charset="0"/>
+                <a:ea typeface="Yu Gothic" pitchFamily="34" charset="-122"/>
+                <a:cs typeface="Yu Gothic" pitchFamily="34" charset="-120"/>
+              </a:rPr>
+              <a:t>予定表の同姓</a:t>
+            </a:r>
+            <a:endParaRPr lang="en-US" sz="1050" dirty="0"/>
+          </a:p>
+          <a:p>
+            <a:pPr indent="0" marL="0">
+              <a:lnSpc>
+                <a:spcPct val="90000"/>
+              </a:lnSpc>
+              <a:buNone/>
+            </a:pPr>
+            <a:r>
+              <a:rPr lang="en-US" sz="1050" b="1" dirty="0">
+                <a:solidFill>
+                  <a:srgbClr val="1B2733"/>
+                </a:solidFill>
+                <a:latin typeface="Yu Gothic" pitchFamily="34" charset="0"/>
+                <a:ea typeface="Yu Gothic" pitchFamily="34" charset="-122"/>
+                <a:cs typeface="Yu Gothic" pitchFamily="34" charset="-120"/>
+              </a:rPr>
+              <a:t>通す根拠にならない。同姓の別人がありうる。断定しない。</a:t>
+            </a:r>
+            <a:endParaRPr lang="en-US" sz="1050" dirty="0"/>
+          </a:p>
+          <a:p>
+            <a:pPr indent="0" marL="0">
+              <a:lnSpc>
+                <a:spcPct val="90000"/>
+              </a:lnSpc>
+              <a:buNone/>
+            </a:pPr>
+            <a:r>
+              <a:rPr lang="en-US" sz="800" i="1" dirty="0">
+                <a:solidFill>
+                  <a:srgbClr val="5F7183"/>
+                </a:solidFill>
+                <a:latin typeface="Calibri" pitchFamily="34" charset="0"/>
+                <a:ea typeface="Calibri" pitchFamily="34" charset="-122"/>
+                <a:cs typeface="Calibri" pitchFamily="34" charset="-120"/>
+              </a:rPr>
+              <a:t>Not a basis to admit them. It could be a different person with the same name.</a:t>
+            </a:r>
+            <a:endParaRPr lang="en-US" sz="1050" dirty="0"/>
+          </a:p>
+        </p:txBody>
+      </p:sp>
+      <p:sp>
+        <p:nvSpPr>
+          <p:cNvPr id="15" name="Shape 12"/>
+          <p:cNvSpPr/>
+          <p:nvPr/>
+        </p:nvSpPr>
+        <p:spPr>
+          <a:xfrm>
+            <a:off x="640080" y="4212336"/>
+            <a:ext cx="5327752" cy="1091184"/>
+          </a:xfrm>
+          <a:prstGeom prst="roundRect">
+            <a:avLst>
+              <a:gd name="adj" fmla="val 3352"/>
+            </a:avLst>
+          </a:prstGeom>
+          <a:solidFill>
+            <a:srgbClr val="E4F4F0"/>
+          </a:solidFill>
+          <a:ln/>
+        </p:spPr>
+      </p:sp>
+      <p:sp>
+        <p:nvSpPr>
+          <p:cNvPr id="16" name="Text 13"/>
+          <p:cNvSpPr/>
+          <p:nvPr/>
+        </p:nvSpPr>
+        <p:spPr>
+          <a:xfrm>
+            <a:off x="877824" y="4303776"/>
+            <a:ext cx="4852264" cy="908304"/>
+          </a:xfrm>
+          <a:prstGeom prst="rect">
+            <a:avLst/>
+          </a:prstGeom>
+          <a:noFill/>
+          <a:ln/>
+        </p:spPr>
+        <p:txBody>
+          <a:bodyPr wrap="square" lIns="0" tIns="0" rIns="0" bIns="0" rtlCol="0" anchor="t"/>
+          <a:lstStyle/>
+          <a:p>
+            <a:pPr indent="0" marL="0">
+              <a:lnSpc>
+                <a:spcPct val="90000"/>
+              </a:lnSpc>
+              <a:buNone/>
+            </a:pPr>
+            <a:r>
+              <a:rPr lang="en-US" sz="1050" b="1" dirty="0">
+                <a:solidFill>
+                  <a:srgbClr val="0D8A76"/>
+                </a:solidFill>
+                <a:latin typeface="Yu Gothic" pitchFamily="34" charset="0"/>
+                <a:ea typeface="Yu Gothic" pitchFamily="34" charset="-122"/>
+                <a:cs typeface="Yu Gothic" pitchFamily="34" charset="-120"/>
+              </a:rPr>
+              <a:t>撮影が始まったら</a:t>
+            </a:r>
+            <a:endParaRPr lang="en-US" sz="1050" dirty="0"/>
+          </a:p>
+          <a:p>
+            <a:pPr indent="0" marL="0">
+              <a:lnSpc>
+                <a:spcPct val="90000"/>
+              </a:lnSpc>
+              <a:buNone/>
+            </a:pPr>
+            <a:r>
+              <a:rPr lang="en-US" sz="1050" b="1" dirty="0">
+                <a:solidFill>
+                  <a:srgbClr val="1B2733"/>
+                </a:solidFill>
+                <a:latin typeface="Yu Gothic" pitchFamily="34" charset="0"/>
+                <a:ea typeface="Yu Gothic" pitchFamily="34" charset="-122"/>
+                <a:cs typeface="Yu Gothic" pitchFamily="34" charset="-120"/>
+              </a:rPr>
+              <a:t>対応を変えない。変えたこと自体が後で問題になる。</a:t>
+            </a:r>
+            <a:endParaRPr lang="en-US" sz="1050" dirty="0"/>
+          </a:p>
+          <a:p>
+            <a:pPr indent="0" marL="0">
+              <a:lnSpc>
+                <a:spcPct val="90000"/>
+              </a:lnSpc>
+              <a:buNone/>
+            </a:pPr>
+            <a:r>
+              <a:rPr lang="en-US" sz="800" i="1" dirty="0">
+                <a:solidFill>
+                  <a:srgbClr val="5F7183"/>
+                </a:solidFill>
+                <a:latin typeface="Calibri" pitchFamily="34" charset="0"/>
+                <a:ea typeface="Calibri" pitchFamily="34" charset="-122"/>
+                <a:cs typeface="Calibri" pitchFamily="34" charset="-120"/>
+              </a:rPr>
+              <a:t>Do not change your response. Changing it is what becomes the problem later.</a:t>
+            </a:r>
+            <a:endParaRPr lang="en-US" sz="1050" dirty="0"/>
+          </a:p>
+        </p:txBody>
+      </p:sp>
+      <p:sp>
+        <p:nvSpPr>
+          <p:cNvPr id="17" name="Shape 14"/>
+          <p:cNvSpPr/>
+          <p:nvPr/>
+        </p:nvSpPr>
+        <p:spPr>
+          <a:xfrm>
+            <a:off x="6223864" y="4212336"/>
+            <a:ext cx="5327752" cy="1091184"/>
+          </a:xfrm>
+          <a:prstGeom prst="roundRect">
+            <a:avLst>
+              <a:gd name="adj" fmla="val 3352"/>
+            </a:avLst>
+          </a:prstGeom>
+          <a:solidFill>
+            <a:srgbClr val="EFF4F8"/>
+          </a:solidFill>
+          <a:ln/>
+        </p:spPr>
+      </p:sp>
+      <p:sp>
+        <p:nvSpPr>
+          <p:cNvPr id="18" name="Text 15"/>
+          <p:cNvSpPr/>
+          <p:nvPr/>
+        </p:nvSpPr>
+        <p:spPr>
+          <a:xfrm>
+            <a:off x="6461608" y="4303776"/>
+            <a:ext cx="4852264" cy="908304"/>
+          </a:xfrm>
+          <a:prstGeom prst="rect">
+            <a:avLst/>
+          </a:prstGeom>
+          <a:noFill/>
+          <a:ln/>
+        </p:spPr>
+        <p:txBody>
+          <a:bodyPr wrap="square" lIns="0" tIns="0" rIns="0" bIns="0" rtlCol="0" anchor="t"/>
+          <a:lstStyle/>
+          <a:p>
+            <a:pPr indent="0" marL="0">
+              <a:lnSpc>
+                <a:spcPct val="90000"/>
+              </a:lnSpc>
+              <a:buNone/>
+            </a:pPr>
+            <a:r>
+              <a:rPr lang="en-US" sz="1050" b="1" dirty="0">
+                <a:solidFill>
+                  <a:srgbClr val="093259"/>
+                </a:solidFill>
+                <a:latin typeface="Yu Gothic" pitchFamily="34" charset="0"/>
+                <a:ea typeface="Yu Gothic" pitchFamily="34" charset="-122"/>
+                <a:cs typeface="Yu Gothic" pitchFamily="34" charset="-120"/>
+              </a:rPr>
+              <a:t>第三者が割って入る</a:t>
+            </a:r>
+            <a:endParaRPr lang="en-US" sz="1050" dirty="0"/>
+          </a:p>
+          <a:p>
+            <a:pPr indent="0" marL="0">
+              <a:lnSpc>
+                <a:spcPct val="90000"/>
+              </a:lnSpc>
+              <a:buNone/>
+            </a:pPr>
+            <a:r>
+              <a:rPr lang="en-US" sz="1050" b="1" dirty="0">
+                <a:solidFill>
+                  <a:srgbClr val="1B2733"/>
+                </a:solidFill>
+                <a:latin typeface="Yu Gothic" pitchFamily="34" charset="0"/>
+                <a:ea typeface="Yu Gothic" pitchFamily="34" charset="-122"/>
+                <a:cs typeface="Yu Gothic" pitchFamily="34" charset="-120"/>
+              </a:rPr>
+              <a:t>応答しない。会社の見解を作らない。対応相手を増やさない。</a:t>
+            </a:r>
+            <a:endParaRPr lang="en-US" sz="1050" dirty="0"/>
+          </a:p>
+          <a:p>
+            <a:pPr indent="0" marL="0">
+              <a:lnSpc>
+                <a:spcPct val="90000"/>
+              </a:lnSpc>
+              <a:buNone/>
+            </a:pPr>
+            <a:r>
+              <a:rPr lang="en-US" sz="800" i="1" dirty="0">
+                <a:solidFill>
+                  <a:srgbClr val="5F7183"/>
+                </a:solidFill>
+                <a:latin typeface="Calibri" pitchFamily="34" charset="0"/>
+                <a:ea typeface="Calibri" pitchFamily="34" charset="-122"/>
+                <a:cs typeface="Calibri" pitchFamily="34" charset="-120"/>
+              </a:rPr>
+              <a:t>Do not respond. Do not invent a company position. Do not add parties.</a:t>
+            </a:r>
+            <a:endParaRPr lang="en-US" sz="1050" dirty="0"/>
+          </a:p>
+        </p:txBody>
+      </p:sp>
+      <p:sp>
+        <p:nvSpPr>
+          <p:cNvPr id="19" name="Shape 16"/>
+          <p:cNvSpPr/>
+          <p:nvPr/>
+        </p:nvSpPr>
+        <p:spPr>
+          <a:xfrm>
+            <a:off x="640080" y="5358384"/>
+            <a:ext cx="10911535" cy="493776"/>
+          </a:xfrm>
+          <a:prstGeom prst="roundRect">
+            <a:avLst>
+              <a:gd name="adj" fmla="val 7407"/>
             </a:avLst>
           </a:prstGeom>
           <a:solidFill>
@@ -14346,14 +17710,14 @@
       </p:sp>
       <p:sp>
         <p:nvSpPr>
-          <p:cNvPr id="7" name="Text 4"/>
-          <p:cNvSpPr/>
-          <p:nvPr/>
-        </p:nvSpPr>
-        <p:spPr>
-          <a:xfrm>
-            <a:off x="950976" y="1316736"/>
-            <a:ext cx="10289743" cy="868680"/>
+          <p:cNvPr id="20" name="Text 17"/>
+          <p:cNvSpPr/>
+          <p:nvPr/>
+        </p:nvSpPr>
+        <p:spPr>
+          <a:xfrm>
+            <a:off x="877824" y="5404104"/>
+            <a:ext cx="10436047" cy="402336"/>
           </a:xfrm>
           <a:prstGeom prst="rect">
             <a:avLst/>
@@ -14362,12 +17726,12 @@
           <a:ln/>
         </p:spPr>
         <p:txBody>
-          <a:bodyPr wrap="square" lIns="0" tIns="0" rIns="0" bIns="0" rtlCol="0" anchor="t"/>
-          <a:lstStyle/>
-          <a:p>
-            <a:pPr indent="0" marL="0">
-              <a:lnSpc>
-                <a:spcPct val="92000"/>
+          <a:bodyPr wrap="square" lIns="0" tIns="0" rIns="0" bIns="0" rtlCol="0" anchor="ctr"/>
+          <a:lstStyle/>
+          <a:p>
+            <a:pPr indent="0" marL="0">
+              <a:lnSpc>
+                <a:spcPct val="86000"/>
               </a:lnSpc>
               <a:buNone/>
             </a:pPr>
@@ -14380,824 +17744,52 @@
                 <a:ea typeface="Yu Gothic" pitchFamily="34" charset="-122"/>
                 <a:cs typeface="Yu Gothic" pitchFamily="34" charset="-120"/>
               </a:rPr>
-              <a:t>シナリオ　</a:t>
-            </a:r>
-            <a:pPr indent="0" marL="0">
-              <a:lnSpc>
-                <a:spcPct val="92000"/>
-              </a:lnSpc>
-              <a:buNone/>
-            </a:pPr>
-            <a:r>
-              <a:rPr lang="en-US" sz="800" dirty="0">
-                <a:solidFill>
-                  <a:srgbClr val="12B198"/>
-                </a:solidFill>
-                <a:latin typeface="Calibri" pitchFamily="34" charset="0"/>
-                <a:ea typeface="Calibri" pitchFamily="34" charset="-122"/>
-                <a:cs typeface="Calibri" pitchFamily="34" charset="-120"/>
-              </a:rPr>
-              <a:t>SCENARIO</a:t>
+              <a:t>割れる論点　</a:t>
+            </a:r>
+            <a:pPr indent="0" marL="0">
+              <a:lnSpc>
+                <a:spcPct val="86000"/>
+              </a:lnSpc>
+              <a:buNone/>
+            </a:pPr>
+            <a:r>
+              <a:rPr lang="en-US" sz="1100" b="1" dirty="0">
+                <a:solidFill>
+                  <a:srgbClr val="FFFFFF"/>
+                </a:solidFill>
+                <a:latin typeface="Yu Gothic" pitchFamily="34" charset="0"/>
+                <a:ea typeface="Yu Gothic" pitchFamily="34" charset="-122"/>
+                <a:cs typeface="Yu Gothic" pitchFamily="34" charset="-120"/>
+              </a:rPr>
+              <a:t>ゲートへ向かった場合。追わない。応援要請と通報に切り替える。物理的に止めない。</a:t>
             </a:r>
             <a:endParaRPr lang="en-US" sz="950" dirty="0"/>
           </a:p>
           <a:p>
             <a:pPr indent="0" marL="0">
               <a:lnSpc>
-                <a:spcPct val="92000"/>
-              </a:lnSpc>
-              <a:buNone/>
-            </a:pPr>
-            <a:r>
-              <a:rPr lang="en-US" sz="1150" b="1" dirty="0">
-                <a:solidFill>
-                  <a:srgbClr val="FFFFFF"/>
-                </a:solidFill>
-                <a:latin typeface="Yu Gothic" pitchFamily="34" charset="0"/>
-                <a:ea typeface="Yu Gothic" pitchFamily="34" charset="-122"/>
-                <a:cs typeface="Yu Gothic" pitchFamily="34" charset="-120"/>
-              </a:rPr>
-              <a:t>17時、エントランス。3か月前に退職した元社員が「私物を取りに来た。上司とは話がついている」と述べ、ゲート前に座り込んでいる。人事に連絡したが担当者が不在。退勤する社員が次々に通り、足を止めて見ている。相手は落ち着いているが、動く意思はない。</a:t>
+                <a:spcPct val="86000"/>
+              </a:lnSpc>
+              <a:buNone/>
+            </a:pPr>
+            <a:r>
+              <a:rPr lang="en-US" sz="800" i="1" dirty="0">
+                <a:solidFill>
+                  <a:srgbClr val="9FD8CD"/>
+                </a:solidFill>
+                <a:latin typeface="Calibri" pitchFamily="34" charset="0"/>
+                <a:ea typeface="Calibri" pitchFamily="34" charset="-122"/>
+                <a:cs typeface="Calibri" pitchFamily="34" charset="-120"/>
+              </a:rPr>
+              <a:t>If they head for the gate: do not follow. Switch to backup and a police call. Do not stop them physically.</a:t>
             </a:r>
             <a:endParaRPr lang="en-US" sz="950" dirty="0"/>
           </a:p>
-          <a:p>
-            <a:pPr indent="0" marL="0">
-              <a:lnSpc>
-                <a:spcPct val="92000"/>
-              </a:lnSpc>
-              <a:buNone/>
-            </a:pPr>
-            <a:r>
-              <a:rPr lang="en-US" sz="800" i="1" dirty="0">
-                <a:solidFill>
-                  <a:srgbClr val="9FD8CD"/>
-                </a:solidFill>
-                <a:latin typeface="Calibri" pitchFamily="34" charset="0"/>
-                <a:ea typeface="Calibri" pitchFamily="34" charset="-122"/>
-                <a:cs typeface="Calibri" pitchFamily="34" charset="-120"/>
-              </a:rPr>
-              <a:t>17:00, entrance hall. A former employee who left three months ago says they have come for personal belongings and that it is agreed with their old manager. They have sat down in front of the gate. HR is unreachable. Departing employees are stopping to watch. The person is calm but will not move.</a:t>
-            </a:r>
-            <a:endParaRPr lang="en-US" sz="950" dirty="0"/>
-          </a:p>
-        </p:txBody>
-      </p:sp>
-      <p:sp>
-        <p:nvSpPr>
-          <p:cNvPr id="8" name="Text 5"/>
-          <p:cNvSpPr/>
-          <p:nvPr/>
-        </p:nvSpPr>
-        <p:spPr>
-          <a:xfrm>
-            <a:off x="640080" y="2459736"/>
-            <a:ext cx="10911535" cy="566928"/>
-          </a:xfrm>
-          <a:prstGeom prst="rect">
-            <a:avLst/>
-          </a:prstGeom>
-          <a:noFill/>
-          <a:ln/>
-        </p:spPr>
-        <p:txBody>
-          <a:bodyPr wrap="square" lIns="0" tIns="0" rIns="0" bIns="0" rtlCol="0" anchor="t"/>
-          <a:lstStyle/>
-          <a:p>
-            <a:pPr indent="0" marL="0">
-              <a:lnSpc>
-                <a:spcPct val="90000"/>
-              </a:lnSpc>
-              <a:buNone/>
-            </a:pPr>
-            <a:r>
-              <a:rPr lang="en-US" sz="1000" b="1" dirty="0">
-                <a:solidFill>
-                  <a:srgbClr val="0D8A76"/>
-                </a:solidFill>
-                <a:latin typeface="Yu Gothic" pitchFamily="34" charset="0"/>
-                <a:ea typeface="Yu Gothic" pitchFamily="34" charset="-122"/>
-                <a:cs typeface="Yu Gothic" pitchFamily="34" charset="-120"/>
-              </a:rPr>
-              <a:t>問い　</a:t>
-            </a:r>
-            <a:pPr indent="0" marL="0">
-              <a:lnSpc>
-                <a:spcPct val="90000"/>
-              </a:lnSpc>
-              <a:buNone/>
-            </a:pPr>
-            <a:r>
-              <a:rPr lang="en-US" sz="1250" b="1" dirty="0">
-                <a:solidFill>
-                  <a:srgbClr val="093259"/>
-                </a:solidFill>
-                <a:latin typeface="Yu Gothic" pitchFamily="34" charset="0"/>
-                <a:ea typeface="Yu Gothic" pitchFamily="34" charset="-122"/>
-                <a:cs typeface="Yu Gothic" pitchFamily="34" charset="-120"/>
-              </a:rPr>
-              <a:t>あなたなら次の60秒、何をどう動きますか。</a:t>
-            </a:r>
-            <a:endParaRPr lang="en-US" sz="1000" dirty="0"/>
-          </a:p>
-          <a:p>
-            <a:pPr indent="0" marL="0">
-              <a:lnSpc>
-                <a:spcPct val="90000"/>
-              </a:lnSpc>
-              <a:buNone/>
-            </a:pPr>
-            <a:r>
-              <a:rPr lang="en-US" sz="850" i="1" dirty="0">
-                <a:solidFill>
-                  <a:srgbClr val="5F7183"/>
-                </a:solidFill>
-                <a:latin typeface="Calibri" pitchFamily="34" charset="0"/>
-                <a:ea typeface="Calibri" pitchFamily="34" charset="-122"/>
-                <a:cs typeface="Calibri" pitchFamily="34" charset="-120"/>
-              </a:rPr>
-              <a:t>What do you do in the next sixty seconds?</a:t>
-            </a:r>
-            <a:endParaRPr lang="en-US" sz="1000" dirty="0"/>
-          </a:p>
-        </p:txBody>
-      </p:sp>
-      <p:sp>
-        <p:nvSpPr>
-          <p:cNvPr id="9" name="Shape 6"/>
-          <p:cNvSpPr/>
-          <p:nvPr/>
-        </p:nvSpPr>
-        <p:spPr>
-          <a:xfrm>
-            <a:off x="640080" y="3081528"/>
-            <a:ext cx="5327752" cy="1074420"/>
-          </a:xfrm>
-          <a:prstGeom prst="roundRect">
-            <a:avLst>
-              <a:gd name="adj" fmla="val 3404"/>
-            </a:avLst>
-          </a:prstGeom>
-          <a:solidFill>
-            <a:srgbClr val="EFF4F8"/>
-          </a:solidFill>
-          <a:ln/>
-        </p:spPr>
-      </p:sp>
-      <p:sp>
-        <p:nvSpPr>
-          <p:cNvPr id="10" name="Shape 7"/>
-          <p:cNvSpPr/>
-          <p:nvPr/>
-        </p:nvSpPr>
-        <p:spPr>
-          <a:xfrm>
-            <a:off x="804672" y="3472434"/>
-            <a:ext cx="292608" cy="292608"/>
-          </a:xfrm>
-          <a:prstGeom prst="ellipse">
-            <a:avLst/>
-          </a:prstGeom>
-          <a:solidFill>
-            <a:srgbClr val="12B198"/>
-          </a:solidFill>
-          <a:ln/>
-        </p:spPr>
-      </p:sp>
-      <p:sp>
-        <p:nvSpPr>
-          <p:cNvPr id="11" name="Text 8"/>
-          <p:cNvSpPr/>
-          <p:nvPr/>
-        </p:nvSpPr>
-        <p:spPr>
-          <a:xfrm>
-            <a:off x="804672" y="3472434"/>
-            <a:ext cx="292608" cy="292608"/>
-          </a:xfrm>
-          <a:prstGeom prst="rect">
-            <a:avLst/>
-          </a:prstGeom>
-          <a:noFill/>
-          <a:ln/>
-        </p:spPr>
-        <p:txBody>
-          <a:bodyPr wrap="square" lIns="0" tIns="0" rIns="0" bIns="0" rtlCol="0" anchor="ctr"/>
-          <a:lstStyle/>
-          <a:p>
-            <a:pPr algn="ctr" indent="0" marL="0">
-              <a:buNone/>
-            </a:pPr>
-            <a:r>
-              <a:rPr lang="en-US" sz="1100" b="1" dirty="0">
-                <a:solidFill>
-                  <a:srgbClr val="FFFFFF"/>
-                </a:solidFill>
-                <a:latin typeface="Calibri" pitchFamily="34" charset="0"/>
-                <a:ea typeface="Calibri" pitchFamily="34" charset="-122"/>
-                <a:cs typeface="Calibri" pitchFamily="34" charset="-120"/>
-              </a:rPr>
-              <a:t>1</a:t>
-            </a:r>
-            <a:endParaRPr lang="en-US" sz="1100" dirty="0"/>
-          </a:p>
-        </p:txBody>
-      </p:sp>
-      <p:sp>
-        <p:nvSpPr>
-          <p:cNvPr id="12" name="Text 9"/>
-          <p:cNvSpPr/>
-          <p:nvPr/>
-        </p:nvSpPr>
-        <p:spPr>
-          <a:xfrm>
-            <a:off x="1188720" y="3136392"/>
-            <a:ext cx="4596232" cy="964692"/>
-          </a:xfrm>
-          <a:prstGeom prst="rect">
-            <a:avLst/>
-          </a:prstGeom>
-          <a:noFill/>
-          <a:ln/>
-        </p:spPr>
-        <p:txBody>
-          <a:bodyPr wrap="square" lIns="0" tIns="0" rIns="0" bIns="0" rtlCol="0" anchor="ctr"/>
-          <a:lstStyle/>
-          <a:p>
-            <a:pPr indent="0" marL="0">
-              <a:lnSpc>
-                <a:spcPct val="88000"/>
-              </a:lnSpc>
-              <a:buNone/>
-            </a:pPr>
-            <a:r>
-              <a:rPr lang="en-US" sz="1050" b="1" dirty="0">
-                <a:solidFill>
-                  <a:srgbClr val="1B2733"/>
-                </a:solidFill>
-                <a:latin typeface="Yu Gothic" pitchFamily="34" charset="0"/>
-                <a:ea typeface="Yu Gothic" pitchFamily="34" charset="-122"/>
-                <a:cs typeface="Yu Gothic" pitchFamily="34" charset="-120"/>
-              </a:rPr>
-              <a:t>退去を求める根拠は何か。誰の意思に基づくか。</a:t>
-            </a:r>
-            <a:endParaRPr lang="en-US" sz="1050" dirty="0"/>
-          </a:p>
-          <a:p>
-            <a:pPr indent="0" marL="0">
-              <a:lnSpc>
-                <a:spcPct val="88000"/>
-              </a:lnSpc>
-              <a:buNone/>
-            </a:pPr>
-            <a:r>
-              <a:rPr lang="en-US" sz="800" i="1" dirty="0">
-                <a:solidFill>
-                  <a:srgbClr val="5F7183"/>
-                </a:solidFill>
-                <a:latin typeface="Calibri" pitchFamily="34" charset="0"/>
-                <a:ea typeface="Calibri" pitchFamily="34" charset="-122"/>
-                <a:cs typeface="Calibri" pitchFamily="34" charset="-120"/>
-              </a:rPr>
-              <a:t>On what basis do you ask them to leave? Whose intent does it rest on?</a:t>
-            </a:r>
-            <a:endParaRPr lang="en-US" sz="1050" dirty="0"/>
-          </a:p>
-        </p:txBody>
-      </p:sp>
-      <p:sp>
-        <p:nvSpPr>
-          <p:cNvPr id="13" name="Shape 10"/>
-          <p:cNvSpPr/>
-          <p:nvPr/>
-        </p:nvSpPr>
-        <p:spPr>
-          <a:xfrm>
-            <a:off x="6223864" y="3081528"/>
-            <a:ext cx="5327752" cy="1074420"/>
-          </a:xfrm>
-          <a:prstGeom prst="roundRect">
-            <a:avLst>
-              <a:gd name="adj" fmla="val 3404"/>
-            </a:avLst>
-          </a:prstGeom>
-          <a:solidFill>
-            <a:srgbClr val="EFF4F8"/>
-          </a:solidFill>
-          <a:ln/>
-        </p:spPr>
-      </p:sp>
-      <p:sp>
-        <p:nvSpPr>
-          <p:cNvPr id="14" name="Shape 11"/>
-          <p:cNvSpPr/>
-          <p:nvPr/>
-        </p:nvSpPr>
-        <p:spPr>
-          <a:xfrm>
-            <a:off x="6388456" y="3472434"/>
-            <a:ext cx="292608" cy="292608"/>
-          </a:xfrm>
-          <a:prstGeom prst="ellipse">
-            <a:avLst/>
-          </a:prstGeom>
-          <a:solidFill>
-            <a:srgbClr val="12B198"/>
-          </a:solidFill>
-          <a:ln/>
-        </p:spPr>
-      </p:sp>
-      <p:sp>
-        <p:nvSpPr>
-          <p:cNvPr id="15" name="Text 12"/>
-          <p:cNvSpPr/>
-          <p:nvPr/>
-        </p:nvSpPr>
-        <p:spPr>
-          <a:xfrm>
-            <a:off x="6388456" y="3472434"/>
-            <a:ext cx="292608" cy="292608"/>
-          </a:xfrm>
-          <a:prstGeom prst="rect">
-            <a:avLst/>
-          </a:prstGeom>
-          <a:noFill/>
-          <a:ln/>
-        </p:spPr>
-        <p:txBody>
-          <a:bodyPr wrap="square" lIns="0" tIns="0" rIns="0" bIns="0" rtlCol="0" anchor="ctr"/>
-          <a:lstStyle/>
-          <a:p>
-            <a:pPr algn="ctr" indent="0" marL="0">
-              <a:buNone/>
-            </a:pPr>
-            <a:r>
-              <a:rPr lang="en-US" sz="1100" b="1" dirty="0">
-                <a:solidFill>
-                  <a:srgbClr val="FFFFFF"/>
-                </a:solidFill>
-                <a:latin typeface="Calibri" pitchFamily="34" charset="0"/>
-                <a:ea typeface="Calibri" pitchFamily="34" charset="-122"/>
-                <a:cs typeface="Calibri" pitchFamily="34" charset="-120"/>
-              </a:rPr>
-              <a:t>2</a:t>
-            </a:r>
-            <a:endParaRPr lang="en-US" sz="1100" dirty="0"/>
-          </a:p>
-        </p:txBody>
-      </p:sp>
-      <p:sp>
-        <p:nvSpPr>
-          <p:cNvPr id="16" name="Text 13"/>
-          <p:cNvSpPr/>
-          <p:nvPr/>
-        </p:nvSpPr>
-        <p:spPr>
-          <a:xfrm>
-            <a:off x="6772504" y="3136392"/>
-            <a:ext cx="4596232" cy="964692"/>
-          </a:xfrm>
-          <a:prstGeom prst="rect">
-            <a:avLst/>
-          </a:prstGeom>
-          <a:noFill/>
-          <a:ln/>
-        </p:spPr>
-        <p:txBody>
-          <a:bodyPr wrap="square" lIns="0" tIns="0" rIns="0" bIns="0" rtlCol="0" anchor="ctr"/>
-          <a:lstStyle/>
-          <a:p>
-            <a:pPr indent="0" marL="0">
-              <a:lnSpc>
-                <a:spcPct val="88000"/>
-              </a:lnSpc>
-              <a:buNone/>
-            </a:pPr>
-            <a:r>
-              <a:rPr lang="en-US" sz="1050" b="1" dirty="0">
-                <a:solidFill>
-                  <a:srgbClr val="1B2733"/>
-                </a:solidFill>
-                <a:latin typeface="Yu Gothic" pitchFamily="34" charset="0"/>
-                <a:ea typeface="Yu Gothic" pitchFamily="34" charset="-122"/>
-                <a:cs typeface="Yu Gothic" pitchFamily="34" charset="-120"/>
-              </a:rPr>
-              <a:t>座り込んでいる相手に、有形力を用いてよいか。</a:t>
-            </a:r>
-            <a:endParaRPr lang="en-US" sz="1050" dirty="0"/>
-          </a:p>
-          <a:p>
-            <a:pPr indent="0" marL="0">
-              <a:lnSpc>
-                <a:spcPct val="88000"/>
-              </a:lnSpc>
-              <a:buNone/>
-            </a:pPr>
-            <a:r>
-              <a:rPr lang="en-US" sz="800" i="1" dirty="0">
-                <a:solidFill>
-                  <a:srgbClr val="5F7183"/>
-                </a:solidFill>
-                <a:latin typeface="Calibri" pitchFamily="34" charset="0"/>
-                <a:ea typeface="Calibri" pitchFamily="34" charset="-122"/>
-                <a:cs typeface="Calibri" pitchFamily="34" charset="-120"/>
-              </a:rPr>
-              <a:t>May you use physical force on someone who has sat down?</a:t>
-            </a:r>
-            <a:endParaRPr lang="en-US" sz="1050" dirty="0"/>
-          </a:p>
-        </p:txBody>
-      </p:sp>
-      <p:sp>
-        <p:nvSpPr>
-          <p:cNvPr id="17" name="Shape 14"/>
-          <p:cNvSpPr/>
-          <p:nvPr/>
-        </p:nvSpPr>
-        <p:spPr>
-          <a:xfrm>
-            <a:off x="640080" y="4265676"/>
-            <a:ext cx="5327752" cy="1074420"/>
-          </a:xfrm>
-          <a:prstGeom prst="roundRect">
-            <a:avLst>
-              <a:gd name="adj" fmla="val 3404"/>
-            </a:avLst>
-          </a:prstGeom>
-          <a:solidFill>
-            <a:srgbClr val="EFF4F8"/>
-          </a:solidFill>
-          <a:ln/>
-        </p:spPr>
-      </p:sp>
-      <p:sp>
-        <p:nvSpPr>
-          <p:cNvPr id="18" name="Shape 15"/>
-          <p:cNvSpPr/>
-          <p:nvPr/>
-        </p:nvSpPr>
-        <p:spPr>
-          <a:xfrm>
-            <a:off x="804672" y="4656582"/>
-            <a:ext cx="292608" cy="292608"/>
-          </a:xfrm>
-          <a:prstGeom prst="ellipse">
-            <a:avLst/>
-          </a:prstGeom>
-          <a:solidFill>
-            <a:srgbClr val="12B198"/>
-          </a:solidFill>
-          <a:ln/>
-        </p:spPr>
-      </p:sp>
-      <p:sp>
-        <p:nvSpPr>
-          <p:cNvPr id="19" name="Text 16"/>
-          <p:cNvSpPr/>
-          <p:nvPr/>
-        </p:nvSpPr>
-        <p:spPr>
-          <a:xfrm>
-            <a:off x="804672" y="4656582"/>
-            <a:ext cx="292608" cy="292608"/>
-          </a:xfrm>
-          <a:prstGeom prst="rect">
-            <a:avLst/>
-          </a:prstGeom>
-          <a:noFill/>
-          <a:ln/>
-        </p:spPr>
-        <p:txBody>
-          <a:bodyPr wrap="square" lIns="0" tIns="0" rIns="0" bIns="0" rtlCol="0" anchor="ctr"/>
-          <a:lstStyle/>
-          <a:p>
-            <a:pPr algn="ctr" indent="0" marL="0">
-              <a:buNone/>
-            </a:pPr>
-            <a:r>
-              <a:rPr lang="en-US" sz="1100" b="1" dirty="0">
-                <a:solidFill>
-                  <a:srgbClr val="FFFFFF"/>
-                </a:solidFill>
-                <a:latin typeface="Calibri" pitchFamily="34" charset="0"/>
-                <a:ea typeface="Calibri" pitchFamily="34" charset="-122"/>
-                <a:cs typeface="Calibri" pitchFamily="34" charset="-120"/>
-              </a:rPr>
-              <a:t>3</a:t>
-            </a:r>
-            <a:endParaRPr lang="en-US" sz="1100" dirty="0"/>
-          </a:p>
-        </p:txBody>
-      </p:sp>
-      <p:sp>
-        <p:nvSpPr>
-          <p:cNvPr id="20" name="Text 17"/>
-          <p:cNvSpPr/>
-          <p:nvPr/>
-        </p:nvSpPr>
-        <p:spPr>
-          <a:xfrm>
-            <a:off x="1188720" y="4320540"/>
-            <a:ext cx="4596232" cy="964692"/>
-          </a:xfrm>
-          <a:prstGeom prst="rect">
-            <a:avLst/>
-          </a:prstGeom>
-          <a:noFill/>
-          <a:ln/>
-        </p:spPr>
-        <p:txBody>
-          <a:bodyPr wrap="square" lIns="0" tIns="0" rIns="0" bIns="0" rtlCol="0" anchor="ctr"/>
-          <a:lstStyle/>
-          <a:p>
-            <a:pPr indent="0" marL="0">
-              <a:lnSpc>
-                <a:spcPct val="88000"/>
-              </a:lnSpc>
-              <a:buNone/>
-            </a:pPr>
-            <a:r>
-              <a:rPr lang="en-US" sz="1050" b="1" dirty="0">
-                <a:solidFill>
-                  <a:srgbClr val="1B2733"/>
-                </a:solidFill>
-                <a:latin typeface="Yu Gothic" pitchFamily="34" charset="0"/>
-                <a:ea typeface="Yu Gothic" pitchFamily="34" charset="-122"/>
-                <a:cs typeface="Yu Gothic" pitchFamily="34" charset="-120"/>
-              </a:rPr>
-              <a:t>見ている社員がいることは、People と Reputation にどう関わるか。</a:t>
-            </a:r>
-            <a:endParaRPr lang="en-US" sz="1050" dirty="0"/>
-          </a:p>
-          <a:p>
-            <a:pPr indent="0" marL="0">
-              <a:lnSpc>
-                <a:spcPct val="88000"/>
-              </a:lnSpc>
-              <a:buNone/>
-            </a:pPr>
-            <a:r>
-              <a:rPr lang="en-US" sz="800" i="1" dirty="0">
-                <a:solidFill>
-                  <a:srgbClr val="5F7183"/>
-                </a:solidFill>
-                <a:latin typeface="Calibri" pitchFamily="34" charset="0"/>
-                <a:ea typeface="Calibri" pitchFamily="34" charset="-122"/>
-                <a:cs typeface="Calibri" pitchFamily="34" charset="-120"/>
-              </a:rPr>
-              <a:t>How do the watching employees bear on People and Reputation?</a:t>
-            </a:r>
-            <a:endParaRPr lang="en-US" sz="1050" dirty="0"/>
-          </a:p>
-        </p:txBody>
-      </p:sp>
-      <p:sp>
-        <p:nvSpPr>
-          <p:cNvPr id="21" name="Shape 18"/>
-          <p:cNvSpPr/>
-          <p:nvPr/>
-        </p:nvSpPr>
-        <p:spPr>
-          <a:xfrm>
-            <a:off x="6223864" y="4265676"/>
-            <a:ext cx="5327752" cy="1074420"/>
-          </a:xfrm>
-          <a:prstGeom prst="roundRect">
-            <a:avLst>
-              <a:gd name="adj" fmla="val 3404"/>
-            </a:avLst>
-          </a:prstGeom>
-          <a:solidFill>
-            <a:srgbClr val="EFF4F8"/>
-          </a:solidFill>
-          <a:ln/>
-        </p:spPr>
-      </p:sp>
-      <p:sp>
-        <p:nvSpPr>
-          <p:cNvPr id="22" name="Shape 19"/>
-          <p:cNvSpPr/>
-          <p:nvPr/>
-        </p:nvSpPr>
-        <p:spPr>
-          <a:xfrm>
-            <a:off x="6388456" y="4656582"/>
-            <a:ext cx="292608" cy="292608"/>
-          </a:xfrm>
-          <a:prstGeom prst="ellipse">
-            <a:avLst/>
-          </a:prstGeom>
-          <a:solidFill>
-            <a:srgbClr val="12B198"/>
-          </a:solidFill>
-          <a:ln/>
-        </p:spPr>
-      </p:sp>
-      <p:sp>
-        <p:nvSpPr>
-          <p:cNvPr id="23" name="Text 20"/>
-          <p:cNvSpPr/>
-          <p:nvPr/>
-        </p:nvSpPr>
-        <p:spPr>
-          <a:xfrm>
-            <a:off x="6388456" y="4656582"/>
-            <a:ext cx="292608" cy="292608"/>
-          </a:xfrm>
-          <a:prstGeom prst="rect">
-            <a:avLst/>
-          </a:prstGeom>
-          <a:noFill/>
-          <a:ln/>
-        </p:spPr>
-        <p:txBody>
-          <a:bodyPr wrap="square" lIns="0" tIns="0" rIns="0" bIns="0" rtlCol="0" anchor="ctr"/>
-          <a:lstStyle/>
-          <a:p>
-            <a:pPr algn="ctr" indent="0" marL="0">
-              <a:buNone/>
-            </a:pPr>
-            <a:r>
-              <a:rPr lang="en-US" sz="1100" b="1" dirty="0">
-                <a:solidFill>
-                  <a:srgbClr val="FFFFFF"/>
-                </a:solidFill>
-                <a:latin typeface="Calibri" pitchFamily="34" charset="0"/>
-                <a:ea typeface="Calibri" pitchFamily="34" charset="-122"/>
-                <a:cs typeface="Calibri" pitchFamily="34" charset="-120"/>
-              </a:rPr>
-              <a:t>4</a:t>
-            </a:r>
-            <a:endParaRPr lang="en-US" sz="1100" dirty="0"/>
-          </a:p>
-        </p:txBody>
-      </p:sp>
-      <p:sp>
-        <p:nvSpPr>
-          <p:cNvPr id="24" name="Text 21"/>
-          <p:cNvSpPr/>
-          <p:nvPr/>
-        </p:nvSpPr>
-        <p:spPr>
-          <a:xfrm>
-            <a:off x="6772504" y="4320540"/>
-            <a:ext cx="4596232" cy="964692"/>
-          </a:xfrm>
-          <a:prstGeom prst="rect">
-            <a:avLst/>
-          </a:prstGeom>
-          <a:noFill/>
-          <a:ln/>
-        </p:spPr>
-        <p:txBody>
-          <a:bodyPr wrap="square" lIns="0" tIns="0" rIns="0" bIns="0" rtlCol="0" anchor="ctr"/>
-          <a:lstStyle/>
-          <a:p>
-            <a:pPr indent="0" marL="0">
-              <a:lnSpc>
-                <a:spcPct val="88000"/>
-              </a:lnSpc>
-              <a:buNone/>
-            </a:pPr>
-            <a:r>
-              <a:rPr lang="en-US" sz="1050" b="1" dirty="0">
-                <a:solidFill>
-                  <a:srgbClr val="1B2733"/>
-                </a:solidFill>
-                <a:latin typeface="Yu Gothic" pitchFamily="34" charset="0"/>
-                <a:ea typeface="Yu Gothic" pitchFamily="34" charset="-122"/>
-                <a:cs typeface="Yu Gothic" pitchFamily="34" charset="-120"/>
-              </a:rPr>
-              <a:t>通報するとすれば、どの時点で、何を伝えるか。</a:t>
-            </a:r>
-            <a:endParaRPr lang="en-US" sz="1050" dirty="0"/>
-          </a:p>
-          <a:p>
-            <a:pPr indent="0" marL="0">
-              <a:lnSpc>
-                <a:spcPct val="88000"/>
-              </a:lnSpc>
-              <a:buNone/>
-            </a:pPr>
-            <a:r>
-              <a:rPr lang="en-US" sz="800" i="1" dirty="0">
-                <a:solidFill>
-                  <a:srgbClr val="5F7183"/>
-                </a:solidFill>
-                <a:latin typeface="Calibri" pitchFamily="34" charset="0"/>
-                <a:ea typeface="Calibri" pitchFamily="34" charset="-122"/>
-                <a:cs typeface="Calibri" pitchFamily="34" charset="-120"/>
-              </a:rPr>
-              <a:t>If you call the police, at what point, and what do you say?</a:t>
-            </a:r>
-            <a:endParaRPr lang="en-US" sz="1050" dirty="0"/>
-          </a:p>
-        </p:txBody>
-      </p:sp>
-      <p:sp>
-        <p:nvSpPr>
-          <p:cNvPr id="25" name="Shape 22"/>
-          <p:cNvSpPr/>
-          <p:nvPr/>
-        </p:nvSpPr>
-        <p:spPr>
-          <a:xfrm>
-            <a:off x="640080" y="5394960"/>
-            <a:ext cx="10911535" cy="457200"/>
-          </a:xfrm>
-          <a:prstGeom prst="roundRect">
-            <a:avLst>
-              <a:gd name="adj" fmla="val 8000"/>
-            </a:avLst>
-          </a:prstGeom>
-          <a:solidFill>
-            <a:srgbClr val="E4F4F0"/>
-          </a:solidFill>
-          <a:ln/>
-        </p:spPr>
-      </p:sp>
-      <p:sp>
-        <p:nvSpPr>
-          <p:cNvPr id="26" name="Text 23"/>
-          <p:cNvSpPr/>
-          <p:nvPr/>
-        </p:nvSpPr>
-        <p:spPr>
-          <a:xfrm>
-            <a:off x="877824" y="5431536"/>
-            <a:ext cx="10436047" cy="384048"/>
-          </a:xfrm>
-          <a:prstGeom prst="rect">
-            <a:avLst/>
-          </a:prstGeom>
-          <a:noFill/>
-          <a:ln/>
-        </p:spPr>
-        <p:txBody>
-          <a:bodyPr wrap="square" lIns="0" tIns="0" rIns="0" bIns="0" rtlCol="0" anchor="ctr"/>
-          <a:lstStyle/>
-          <a:p>
-            <a:pPr indent="0" marL="0">
-              <a:lnSpc>
-                <a:spcPct val="86000"/>
-              </a:lnSpc>
-              <a:buNone/>
-            </a:pPr>
-            <a:r>
-              <a:rPr lang="en-US" sz="850" b="1" dirty="0">
-                <a:solidFill>
-                  <a:srgbClr val="0D8A76"/>
-                </a:solidFill>
-                <a:latin typeface="Yu Gothic" pitchFamily="34" charset="0"/>
-                <a:ea typeface="Yu Gothic" pitchFamily="34" charset="-122"/>
-                <a:cs typeface="Yu Gothic" pitchFamily="34" charset="-120"/>
-              </a:rPr>
-              <a:t>追加付与　</a:t>
-            </a:r>
-            <a:pPr indent="0" marL="0">
-              <a:lnSpc>
-                <a:spcPct val="86000"/>
-              </a:lnSpc>
-              <a:buNone/>
-            </a:pPr>
-            <a:r>
-              <a:rPr lang="en-US" sz="1050" b="1" dirty="0">
-                <a:solidFill>
-                  <a:srgbClr val="1B2733"/>
-                </a:solidFill>
-                <a:latin typeface="Yu Gothic" pitchFamily="34" charset="0"/>
-                <a:ea typeface="Yu Gothic" pitchFamily="34" charset="-122"/>
-                <a:cs typeface="Yu Gothic" pitchFamily="34" charset="-120"/>
-              </a:rPr>
-              <a:t>元社員が「不当解雇だ」と大きな声で話し始めた。</a:t>
-            </a:r>
-            <a:endParaRPr lang="en-US" sz="850" dirty="0"/>
-          </a:p>
-          <a:p>
-            <a:pPr indent="0" marL="0">
-              <a:lnSpc>
-                <a:spcPct val="86000"/>
-              </a:lnSpc>
-              <a:buNone/>
-            </a:pPr>
-            <a:r>
-              <a:rPr lang="en-US" sz="750" i="1" dirty="0">
-                <a:solidFill>
-                  <a:srgbClr val="5F7183"/>
-                </a:solidFill>
-                <a:latin typeface="Calibri" pitchFamily="34" charset="0"/>
-                <a:ea typeface="Calibri" pitchFamily="34" charset="-122"/>
-                <a:cs typeface="Calibri" pitchFamily="34" charset="-120"/>
-              </a:rPr>
-              <a:t>They begin loudly saying they were unfairly dismissed.</a:t>
-            </a:r>
-            <a:endParaRPr lang="en-US" sz="850" dirty="0"/>
-          </a:p>
-        </p:txBody>
-      </p:sp>
-      <p:sp>
-        <p:nvSpPr>
-          <p:cNvPr id="27" name="Text 24"/>
+        </p:txBody>
+      </p:sp>
+      <p:sp>
+        <p:nvSpPr>
+          <p:cNvPr id="21" name="Text 18"/>
           <p:cNvSpPr/>
           <p:nvPr/>
         </p:nvSpPr>
@@ -15248,7 +17840,7 @@
                 <a:ea typeface="Yu Gothic" pitchFamily="34" charset="-122"/>
                 <a:cs typeface="Yu Gothic" pitchFamily="34" charset="-120"/>
               </a:rPr>
-              <a:t>退去要請の判断者、人事の緊急連絡先、通報の基準は現場ごとに異なる。Site SOPによる。</a:t>
+              <a:t>来訪者の確認方法、例外を認められる者、応援要請の方法は現場ごとに異なる。</a:t>
             </a:r>
             <a:endParaRPr lang="en-US" sz="900" dirty="0"/>
           </a:p>
@@ -15268,7 +17860,7 @@
                 <a:ea typeface="Calibri" pitchFamily="34" charset="-122"/>
                 <a:cs typeface="Calibri" pitchFamily="34" charset="-120"/>
               </a:rPr>
-              <a:t>Who decides on a removal request, HR emergency contacts, and when to call police differ by site.</a:t>
+              <a:t>Verification, who may approve exceptions, and how to call backup differ by site.</a:t>
             </a:r>
             <a:endParaRPr lang="en-US" sz="900" dirty="0"/>
           </a:p>
@@ -15276,7 +17868,7 @@
       </p:sp>
       <p:sp>
         <p:nvSpPr>
-          <p:cNvPr id="28" name="Text 25"/>
+          <p:cNvPr id="22" name="Text 19"/>
           <p:cNvSpPr/>
           <p:nvPr/>
         </p:nvSpPr>
@@ -15329,7 +17921,7 @@
       </p:sp>
       <p:sp>
         <p:nvSpPr>
-          <p:cNvPr id="29" name="Text 26"/>
+          <p:cNvPr id="23" name="Text 20"/>
           <p:cNvSpPr/>
           <p:nvPr/>
         </p:nvSpPr>
@@ -15382,7 +17974,7 @@
       </p:sp>
       <p:sp>
         <p:nvSpPr>
-          <p:cNvPr id="30" name="Text 27"/>
+          <p:cNvPr id="24" name="Text 21"/>
           <p:cNvSpPr/>
           <p:nvPr/>
         </p:nvSpPr>

--- a/decks/04_5限_De-escalation.pptx
+++ b/decks/04_5限_De-escalation.pptx
@@ -3412,7 +3412,7 @@
                 <a:ea typeface="Yu Gothic" pitchFamily="34" charset="-122"/>
                 <a:cs typeface="Yu Gothic" pitchFamily="34" charset="-120"/>
               </a:rPr>
-              <a:t>TTX 5-B 講評 ― 模範解答</a:t>
+              <a:t>TTX 5-B 模範解答</a:t>
             </a:r>
             <a:endParaRPr lang="en-US" sz="2300" dirty="0"/>
           </a:p>
@@ -3432,7 +3432,7 @@
                 <a:ea typeface="Calibri" pitchFamily="34" charset="-122"/>
                 <a:cs typeface="Calibri" pitchFamily="34" charset="-120"/>
               </a:rPr>
-              <a:t>TTX 5-B Debrief — Model Answer</a:t>
+              <a:t>TTX 5-B — Model Answers</a:t>
             </a:r>
             <a:endParaRPr lang="en-US" sz="2300" dirty="0"/>
           </a:p>
@@ -3501,97 +3501,18 @@
       </p:sp>
       <p:sp>
         <p:nvSpPr>
-          <p:cNvPr id="6" name="Text 3"/>
+          <p:cNvPr id="6" name="Shape 3"/>
           <p:cNvSpPr/>
           <p:nvPr/>
         </p:nvSpPr>
         <p:spPr>
           <a:xfrm>
             <a:off x="640080" y="1188720"/>
-            <a:ext cx="10911535" cy="530352"/>
-          </a:xfrm>
-          <a:prstGeom prst="rect">
-            <a:avLst/>
-          </a:prstGeom>
-          <a:noFill/>
-          <a:ln/>
-        </p:spPr>
-        <p:txBody>
-          <a:bodyPr wrap="square" lIns="0" tIns="0" rIns="0" bIns="0" rtlCol="0" anchor="t"/>
-          <a:lstStyle/>
-          <a:p>
-            <a:pPr indent="0" marL="0">
-              <a:lnSpc>
-                <a:spcPct val="90000"/>
-              </a:lnSpc>
-              <a:buNone/>
-            </a:pPr>
-            <a:r>
-              <a:rPr lang="en-US" sz="1000" b="1" dirty="0">
-                <a:solidFill>
-                  <a:srgbClr val="0D8A76"/>
-                </a:solidFill>
-                <a:latin typeface="Yu Gothic" pitchFamily="34" charset="0"/>
-                <a:ea typeface="Yu Gothic" pitchFamily="34" charset="-122"/>
-                <a:cs typeface="Yu Gothic" pitchFamily="34" charset="-120"/>
-              </a:rPr>
-              <a:t>狙い　</a:t>
-            </a:r>
-            <a:pPr indent="0" marL="0">
-              <a:lnSpc>
-                <a:spcPct val="90000"/>
-              </a:lnSpc>
-              <a:buNone/>
-            </a:pPr>
-            <a:r>
-              <a:rPr lang="en-US" sz="1150" b="1" dirty="0">
-                <a:solidFill>
-                  <a:srgbClr val="093259"/>
-                </a:solidFill>
-                <a:latin typeface="Yu Gothic" pitchFamily="34" charset="0"/>
-                <a:ea typeface="Yu Gothic" pitchFamily="34" charset="-122"/>
-                <a:cs typeface="Yu Gothic" pitchFamily="34" charset="-120"/>
-              </a:rPr>
-              <a:t>座り込みに有形力は使えない。使えない中で何ができるかが答え。</a:t>
-            </a:r>
-            <a:endParaRPr lang="en-US" sz="1000" dirty="0"/>
-          </a:p>
-          <a:p>
-            <a:pPr indent="0" marL="0">
-              <a:lnSpc>
-                <a:spcPct val="90000"/>
-              </a:lnSpc>
-              <a:buNone/>
-            </a:pPr>
-            <a:r>
-              <a:rPr lang="en-US" sz="850" i="1" dirty="0">
-                <a:solidFill>
-                  <a:srgbClr val="5F7183"/>
-                </a:solidFill>
-                <a:latin typeface="Calibri" pitchFamily="34" charset="0"/>
-                <a:ea typeface="Calibri" pitchFamily="34" charset="-122"/>
-                <a:cs typeface="Calibri" pitchFamily="34" charset="-120"/>
-              </a:rPr>
-              <a:t>You cannot use force against someone sitting down. The answer is what you can do without it.</a:t>
-            </a:r>
-            <a:endParaRPr lang="en-US" sz="1000" dirty="0"/>
-          </a:p>
-        </p:txBody>
-      </p:sp>
-      <p:sp>
-        <p:nvSpPr>
-          <p:cNvPr id="7" name="Shape 4"/>
-          <p:cNvSpPr/>
-          <p:nvPr/>
-        </p:nvSpPr>
-        <p:spPr>
-          <a:xfrm>
-            <a:off x="640080" y="1773936"/>
-            <a:ext cx="5327752" cy="1091184"/>
+            <a:ext cx="10911535" cy="825246"/>
           </a:xfrm>
           <a:prstGeom prst="roundRect">
             <a:avLst>
-              <a:gd name="adj" fmla="val 3352"/>
+              <a:gd name="adj" fmla="val 4432"/>
             </a:avLst>
           </a:prstGeom>
           <a:solidFill>
@@ -3602,53 +3523,112 @@
       </p:sp>
       <p:sp>
         <p:nvSpPr>
+          <p:cNvPr id="7" name="Shape 4"/>
+          <p:cNvSpPr/>
+          <p:nvPr/>
+        </p:nvSpPr>
+        <p:spPr>
+          <a:xfrm>
+            <a:off x="841248" y="1427607"/>
+            <a:ext cx="347472" cy="347472"/>
+          </a:xfrm>
+          <a:prstGeom prst="ellipse">
+            <a:avLst/>
+          </a:prstGeom>
+          <a:solidFill>
+            <a:srgbClr val="12B198"/>
+          </a:solidFill>
+          <a:ln/>
+        </p:spPr>
+      </p:sp>
+      <p:sp>
+        <p:nvSpPr>
           <p:cNvPr id="8" name="Text 5"/>
           <p:cNvSpPr/>
           <p:nvPr/>
         </p:nvSpPr>
         <p:spPr>
           <a:xfrm>
-            <a:off x="877824" y="1865376"/>
-            <a:ext cx="4852264" cy="908304"/>
-          </a:xfrm>
-          <a:prstGeom prst="rect">
-            <a:avLst/>
-          </a:prstGeom>
-          <a:noFill/>
-          <a:ln/>
-        </p:spPr>
-        <p:txBody>
-          <a:bodyPr wrap="square" lIns="0" tIns="0" rIns="0" bIns="0" rtlCol="0" anchor="t"/>
-          <a:lstStyle/>
-          <a:p>
-            <a:pPr indent="0" marL="0">
-              <a:lnSpc>
-                <a:spcPct val="90000"/>
-              </a:lnSpc>
-              <a:buNone/>
-            </a:pPr>
-            <a:r>
-              <a:rPr lang="en-US" sz="1050" b="1" dirty="0">
-                <a:solidFill>
-                  <a:srgbClr val="0D8A76"/>
-                </a:solidFill>
-                <a:latin typeface="Yu Gothic" pitchFamily="34" charset="0"/>
-                <a:ea typeface="Yu Gothic" pitchFamily="34" charset="-122"/>
-                <a:cs typeface="Yu Gothic" pitchFamily="34" charset="-120"/>
-              </a:rPr>
-              <a:t>退去要請の根拠</a:t>
-            </a:r>
-            <a:endParaRPr lang="en-US" sz="1050" dirty="0"/>
-          </a:p>
-          <a:p>
-            <a:pPr indent="0" marL="0">
-              <a:lnSpc>
-                <a:spcPct val="90000"/>
-              </a:lnSpc>
-              <a:buNone/>
-            </a:pPr>
-            <a:r>
-              <a:rPr lang="en-US" sz="1050" b="1" dirty="0">
+            <a:off x="841248" y="1427607"/>
+            <a:ext cx="347472" cy="347472"/>
+          </a:xfrm>
+          <a:prstGeom prst="rect">
+            <a:avLst/>
+          </a:prstGeom>
+          <a:noFill/>
+          <a:ln/>
+        </p:spPr>
+        <p:txBody>
+          <a:bodyPr wrap="square" lIns="0" tIns="0" rIns="0" bIns="0" rtlCol="0" anchor="ctr"/>
+          <a:lstStyle/>
+          <a:p>
+            <a:pPr algn="ctr" indent="0" marL="0">
+              <a:buNone/>
+            </a:pPr>
+            <a:r>
+              <a:rPr lang="en-US" sz="1100" b="1" dirty="0">
+                <a:solidFill>
+                  <a:srgbClr val="FFFFFF"/>
+                </a:solidFill>
+                <a:latin typeface="Calibri" pitchFamily="34" charset="0"/>
+                <a:ea typeface="Calibri" pitchFamily="34" charset="-122"/>
+                <a:cs typeface="Calibri" pitchFamily="34" charset="-120"/>
+              </a:rPr>
+              <a:t>1</a:t>
+            </a:r>
+            <a:endParaRPr lang="en-US" sz="1100" dirty="0"/>
+          </a:p>
+        </p:txBody>
+      </p:sp>
+      <p:sp>
+        <p:nvSpPr>
+          <p:cNvPr id="9" name="Text 6"/>
+          <p:cNvSpPr/>
+          <p:nvPr/>
+        </p:nvSpPr>
+        <p:spPr>
+          <a:xfrm>
+            <a:off x="1280160" y="1252728"/>
+            <a:ext cx="10033711" cy="697230"/>
+          </a:xfrm>
+          <a:prstGeom prst="rect">
+            <a:avLst/>
+          </a:prstGeom>
+          <a:noFill/>
+          <a:ln/>
+        </p:spPr>
+        <p:txBody>
+          <a:bodyPr wrap="square" lIns="0" tIns="0" rIns="0" bIns="0" rtlCol="0" anchor="ctr"/>
+          <a:lstStyle/>
+          <a:p>
+            <a:pPr indent="0" marL="0">
+              <a:lnSpc>
+                <a:spcPct val="88000"/>
+              </a:lnSpc>
+              <a:buNone/>
+            </a:pPr>
+            <a:r>
+              <a:rPr lang="en-US" sz="900" dirty="0">
+                <a:solidFill>
+                  <a:srgbClr val="5F7183"/>
+                </a:solidFill>
+                <a:latin typeface="Yu Gothic" pitchFamily="34" charset="0"/>
+                <a:ea typeface="Yu Gothic" pitchFamily="34" charset="-122"/>
+                <a:cs typeface="Yu Gothic" pitchFamily="34" charset="-120"/>
+              </a:rPr>
+              <a:t>問1　退去を求める根拠、誰の意思か</a:t>
+            </a:r>
+            <a:endParaRPr lang="en-US" sz="900" dirty="0"/>
+          </a:p>
+          <a:p>
+            <a:pPr indent="0" marL="0">
+              <a:lnSpc>
+                <a:spcPct val="88000"/>
+              </a:lnSpc>
+              <a:buNone/>
+            </a:pPr>
+            <a:r>
+              <a:rPr lang="en-US" sz="1200" b="1" dirty="0">
                 <a:solidFill>
                   <a:srgbClr val="1B2733"/>
                 </a:solidFill>
@@ -3656,14 +3636,14 @@
                 <a:ea typeface="Yu Gothic" pitchFamily="34" charset="-122"/>
                 <a:cs typeface="Yu Gothic" pitchFamily="34" charset="-120"/>
               </a:rPr>
-              <a:t>管理権者の意思に基づく。自分の判断で命じるものではない。</a:t>
-            </a:r>
-            <a:endParaRPr lang="en-US" sz="1050" dirty="0"/>
-          </a:p>
-          <a:p>
-            <a:pPr indent="0" marL="0">
-              <a:lnSpc>
-                <a:spcPct val="90000"/>
+              <a:t>管理権者の意思に基づく。警備員が自分の判断で命じるものではない。</a:t>
+            </a:r>
+            <a:endParaRPr lang="en-US" sz="900" dirty="0"/>
+          </a:p>
+          <a:p>
+            <a:pPr indent="0" marL="0">
+              <a:lnSpc>
+                <a:spcPct val="88000"/>
               </a:lnSpc>
               <a:buNone/>
             </a:pPr>
@@ -3676,26 +3656,26 @@
                 <a:ea typeface="Calibri" pitchFamily="34" charset="-122"/>
                 <a:cs typeface="Calibri" pitchFamily="34" charset="-120"/>
               </a:rPr>
-              <a:t>It rests on the site authority's intent, not your own judgement.</a:t>
-            </a:r>
-            <a:endParaRPr lang="en-US" sz="1050" dirty="0"/>
-          </a:p>
-        </p:txBody>
-      </p:sp>
-      <p:sp>
-        <p:nvSpPr>
-          <p:cNvPr id="9" name="Shape 6"/>
-          <p:cNvSpPr/>
-          <p:nvPr/>
-        </p:nvSpPr>
-        <p:spPr>
-          <a:xfrm>
-            <a:off x="6223864" y="1773936"/>
-            <a:ext cx="5327752" cy="1091184"/>
+              <a:t>It rests on the site authority's intent. A guard does not order it on their own judgement.</a:t>
+            </a:r>
+            <a:endParaRPr lang="en-US" sz="900" dirty="0"/>
+          </a:p>
+        </p:txBody>
+      </p:sp>
+      <p:sp>
+        <p:nvSpPr>
+          <p:cNvPr id="10" name="Shape 7"/>
+          <p:cNvSpPr/>
+          <p:nvPr/>
+        </p:nvSpPr>
+        <p:spPr>
+          <a:xfrm>
+            <a:off x="640080" y="2114550"/>
+            <a:ext cx="10911535" cy="825246"/>
           </a:xfrm>
           <a:prstGeom prst="roundRect">
             <a:avLst>
-              <a:gd name="adj" fmla="val 3352"/>
+              <a:gd name="adj" fmla="val 4432"/>
             </a:avLst>
           </a:prstGeom>
           <a:solidFill>
@@ -3706,53 +3686,112 @@
       </p:sp>
       <p:sp>
         <p:nvSpPr>
-          <p:cNvPr id="10" name="Text 7"/>
-          <p:cNvSpPr/>
-          <p:nvPr/>
-        </p:nvSpPr>
-        <p:spPr>
-          <a:xfrm>
-            <a:off x="6461608" y="1865376"/>
-            <a:ext cx="4852264" cy="908304"/>
-          </a:xfrm>
-          <a:prstGeom prst="rect">
-            <a:avLst/>
-          </a:prstGeom>
-          <a:noFill/>
-          <a:ln/>
-        </p:spPr>
-        <p:txBody>
-          <a:bodyPr wrap="square" lIns="0" tIns="0" rIns="0" bIns="0" rtlCol="0" anchor="t"/>
-          <a:lstStyle/>
-          <a:p>
-            <a:pPr indent="0" marL="0">
-              <a:lnSpc>
-                <a:spcPct val="90000"/>
-              </a:lnSpc>
-              <a:buNone/>
-            </a:pPr>
-            <a:r>
-              <a:rPr lang="en-US" sz="1050" b="1" dirty="0">
-                <a:solidFill>
-                  <a:srgbClr val="0D8A76"/>
-                </a:solidFill>
-                <a:latin typeface="Yu Gothic" pitchFamily="34" charset="0"/>
-                <a:ea typeface="Yu Gothic" pitchFamily="34" charset="-122"/>
-                <a:cs typeface="Yu Gothic" pitchFamily="34" charset="-120"/>
-              </a:rPr>
-              <a:t>有形力</a:t>
-            </a:r>
-            <a:endParaRPr lang="en-US" sz="1050" dirty="0"/>
-          </a:p>
-          <a:p>
-            <a:pPr indent="0" marL="0">
-              <a:lnSpc>
-                <a:spcPct val="90000"/>
-              </a:lnSpc>
-              <a:buNone/>
-            </a:pPr>
-            <a:r>
-              <a:rPr lang="en-US" sz="1050" b="1" dirty="0">
+          <p:cNvPr id="11" name="Shape 8"/>
+          <p:cNvSpPr/>
+          <p:nvPr/>
+        </p:nvSpPr>
+        <p:spPr>
+          <a:xfrm>
+            <a:off x="841248" y="2353437"/>
+            <a:ext cx="347472" cy="347472"/>
+          </a:xfrm>
+          <a:prstGeom prst="ellipse">
+            <a:avLst/>
+          </a:prstGeom>
+          <a:solidFill>
+            <a:srgbClr val="12B198"/>
+          </a:solidFill>
+          <a:ln/>
+        </p:spPr>
+      </p:sp>
+      <p:sp>
+        <p:nvSpPr>
+          <p:cNvPr id="12" name="Text 9"/>
+          <p:cNvSpPr/>
+          <p:nvPr/>
+        </p:nvSpPr>
+        <p:spPr>
+          <a:xfrm>
+            <a:off x="841248" y="2353437"/>
+            <a:ext cx="347472" cy="347472"/>
+          </a:xfrm>
+          <a:prstGeom prst="rect">
+            <a:avLst/>
+          </a:prstGeom>
+          <a:noFill/>
+          <a:ln/>
+        </p:spPr>
+        <p:txBody>
+          <a:bodyPr wrap="square" lIns="0" tIns="0" rIns="0" bIns="0" rtlCol="0" anchor="ctr"/>
+          <a:lstStyle/>
+          <a:p>
+            <a:pPr algn="ctr" indent="0" marL="0">
+              <a:buNone/>
+            </a:pPr>
+            <a:r>
+              <a:rPr lang="en-US" sz="1100" b="1" dirty="0">
+                <a:solidFill>
+                  <a:srgbClr val="FFFFFF"/>
+                </a:solidFill>
+                <a:latin typeface="Calibri" pitchFamily="34" charset="0"/>
+                <a:ea typeface="Calibri" pitchFamily="34" charset="-122"/>
+                <a:cs typeface="Calibri" pitchFamily="34" charset="-120"/>
+              </a:rPr>
+              <a:t>2</a:t>
+            </a:r>
+            <a:endParaRPr lang="en-US" sz="1100" dirty="0"/>
+          </a:p>
+        </p:txBody>
+      </p:sp>
+      <p:sp>
+        <p:nvSpPr>
+          <p:cNvPr id="13" name="Text 10"/>
+          <p:cNvSpPr/>
+          <p:nvPr/>
+        </p:nvSpPr>
+        <p:spPr>
+          <a:xfrm>
+            <a:off x="1280160" y="2178558"/>
+            <a:ext cx="10033711" cy="697230"/>
+          </a:xfrm>
+          <a:prstGeom prst="rect">
+            <a:avLst/>
+          </a:prstGeom>
+          <a:noFill/>
+          <a:ln/>
+        </p:spPr>
+        <p:txBody>
+          <a:bodyPr wrap="square" lIns="0" tIns="0" rIns="0" bIns="0" rtlCol="0" anchor="ctr"/>
+          <a:lstStyle/>
+          <a:p>
+            <a:pPr indent="0" marL="0">
+              <a:lnSpc>
+                <a:spcPct val="88000"/>
+              </a:lnSpc>
+              <a:buNone/>
+            </a:pPr>
+            <a:r>
+              <a:rPr lang="en-US" sz="900" dirty="0">
+                <a:solidFill>
+                  <a:srgbClr val="5F7183"/>
+                </a:solidFill>
+                <a:latin typeface="Yu Gothic" pitchFamily="34" charset="0"/>
+                <a:ea typeface="Yu Gothic" pitchFamily="34" charset="-122"/>
+                <a:cs typeface="Yu Gothic" pitchFamily="34" charset="-120"/>
+              </a:rPr>
+              <a:t>問2　有形力を用いてよいか</a:t>
+            </a:r>
+            <a:endParaRPr lang="en-US" sz="900" dirty="0"/>
+          </a:p>
+          <a:p>
+            <a:pPr indent="0" marL="0">
+              <a:lnSpc>
+                <a:spcPct val="88000"/>
+              </a:lnSpc>
+              <a:buNone/>
+            </a:pPr>
+            <a:r>
+              <a:rPr lang="en-US" sz="1200" b="1" dirty="0">
                 <a:solidFill>
                   <a:srgbClr val="1B2733"/>
                 </a:solidFill>
@@ -3760,14 +3799,14 @@
                 <a:ea typeface="Yu Gothic" pitchFamily="34" charset="-122"/>
                 <a:cs typeface="Yu Gothic" pitchFamily="34" charset="-120"/>
               </a:rPr>
-              <a:t>使えない。引き起こす、腕をつかむは暴行になりうる。</a:t>
-            </a:r>
-            <a:endParaRPr lang="en-US" sz="1050" dirty="0"/>
-          </a:p>
-          <a:p>
-            <a:pPr indent="0" marL="0">
-              <a:lnSpc>
-                <a:spcPct val="90000"/>
+              <a:t>用いてはいけない。引き起こす、腕をつかむは暴行になりうる。座り込みには使えない。</a:t>
+            </a:r>
+            <a:endParaRPr lang="en-US" sz="900" dirty="0"/>
+          </a:p>
+          <a:p>
+            <a:pPr indent="0" marL="0">
+              <a:lnSpc>
+                <a:spcPct val="88000"/>
               </a:lnSpc>
               <a:buNone/>
             </a:pPr>
@@ -3780,26 +3819,26 @@
                 <a:ea typeface="Calibri" pitchFamily="34" charset="-122"/>
                 <a:cs typeface="Calibri" pitchFamily="34" charset="-120"/>
               </a:rPr>
-              <a:t>Not available. Pulling them up or grabbing an arm can be assault.</a:t>
-            </a:r>
-            <a:endParaRPr lang="en-US" sz="1050" dirty="0"/>
-          </a:p>
-        </p:txBody>
-      </p:sp>
-      <p:sp>
-        <p:nvSpPr>
-          <p:cNvPr id="11" name="Shape 8"/>
-          <p:cNvSpPr/>
-          <p:nvPr/>
-        </p:nvSpPr>
-        <p:spPr>
-          <a:xfrm>
-            <a:off x="640080" y="2993136"/>
-            <a:ext cx="5327752" cy="1091184"/>
+              <a:t>No. Pulling them up or grabbing an arm can be assault. Force is not available here.</a:t>
+            </a:r>
+            <a:endParaRPr lang="en-US" sz="900" dirty="0"/>
+          </a:p>
+        </p:txBody>
+      </p:sp>
+      <p:sp>
+        <p:nvSpPr>
+          <p:cNvPr id="14" name="Shape 11"/>
+          <p:cNvSpPr/>
+          <p:nvPr/>
+        </p:nvSpPr>
+        <p:spPr>
+          <a:xfrm>
+            <a:off x="640080" y="3040380"/>
+            <a:ext cx="10911535" cy="825246"/>
           </a:xfrm>
           <a:prstGeom prst="roundRect">
             <a:avLst>
-              <a:gd name="adj" fmla="val 3352"/>
+              <a:gd name="adj" fmla="val 4432"/>
             </a:avLst>
           </a:prstGeom>
           <a:solidFill>
@@ -3810,53 +3849,112 @@
       </p:sp>
       <p:sp>
         <p:nvSpPr>
-          <p:cNvPr id="12" name="Text 9"/>
-          <p:cNvSpPr/>
-          <p:nvPr/>
-        </p:nvSpPr>
-        <p:spPr>
-          <a:xfrm>
-            <a:off x="877824" y="3084576"/>
-            <a:ext cx="4852264" cy="908304"/>
-          </a:xfrm>
-          <a:prstGeom prst="rect">
-            <a:avLst/>
-          </a:prstGeom>
-          <a:noFill/>
-          <a:ln/>
-        </p:spPr>
-        <p:txBody>
-          <a:bodyPr wrap="square" lIns="0" tIns="0" rIns="0" bIns="0" rtlCol="0" anchor="t"/>
-          <a:lstStyle/>
-          <a:p>
-            <a:pPr indent="0" marL="0">
-              <a:lnSpc>
-                <a:spcPct val="90000"/>
-              </a:lnSpc>
-              <a:buNone/>
-            </a:pPr>
-            <a:r>
-              <a:rPr lang="en-US" sz="1050" b="1" dirty="0">
-                <a:solidFill>
-                  <a:srgbClr val="093259"/>
-                </a:solidFill>
-                <a:latin typeface="Yu Gothic" pitchFamily="34" charset="0"/>
-                <a:ea typeface="Yu Gothic" pitchFamily="34" charset="-122"/>
-                <a:cs typeface="Yu Gothic" pitchFamily="34" charset="-120"/>
-              </a:rPr>
-              <a:t>見ている社員</a:t>
-            </a:r>
-            <a:endParaRPr lang="en-US" sz="1050" dirty="0"/>
-          </a:p>
-          <a:p>
-            <a:pPr indent="0" marL="0">
-              <a:lnSpc>
-                <a:spcPct val="90000"/>
-              </a:lnSpc>
-              <a:buNone/>
-            </a:pPr>
-            <a:r>
-              <a:rPr lang="en-US" sz="1050" b="1" dirty="0">
+          <p:cNvPr id="15" name="Shape 12"/>
+          <p:cNvSpPr/>
+          <p:nvPr/>
+        </p:nvSpPr>
+        <p:spPr>
+          <a:xfrm>
+            <a:off x="841248" y="3279267"/>
+            <a:ext cx="347472" cy="347472"/>
+          </a:xfrm>
+          <a:prstGeom prst="ellipse">
+            <a:avLst/>
+          </a:prstGeom>
+          <a:solidFill>
+            <a:srgbClr val="12B198"/>
+          </a:solidFill>
+          <a:ln/>
+        </p:spPr>
+      </p:sp>
+      <p:sp>
+        <p:nvSpPr>
+          <p:cNvPr id="16" name="Text 13"/>
+          <p:cNvSpPr/>
+          <p:nvPr/>
+        </p:nvSpPr>
+        <p:spPr>
+          <a:xfrm>
+            <a:off x="841248" y="3279267"/>
+            <a:ext cx="347472" cy="347472"/>
+          </a:xfrm>
+          <a:prstGeom prst="rect">
+            <a:avLst/>
+          </a:prstGeom>
+          <a:noFill/>
+          <a:ln/>
+        </p:spPr>
+        <p:txBody>
+          <a:bodyPr wrap="square" lIns="0" tIns="0" rIns="0" bIns="0" rtlCol="0" anchor="ctr"/>
+          <a:lstStyle/>
+          <a:p>
+            <a:pPr algn="ctr" indent="0" marL="0">
+              <a:buNone/>
+            </a:pPr>
+            <a:r>
+              <a:rPr lang="en-US" sz="1100" b="1" dirty="0">
+                <a:solidFill>
+                  <a:srgbClr val="FFFFFF"/>
+                </a:solidFill>
+                <a:latin typeface="Calibri" pitchFamily="34" charset="0"/>
+                <a:ea typeface="Calibri" pitchFamily="34" charset="-122"/>
+                <a:cs typeface="Calibri" pitchFamily="34" charset="-120"/>
+              </a:rPr>
+              <a:t>3</a:t>
+            </a:r>
+            <a:endParaRPr lang="en-US" sz="1100" dirty="0"/>
+          </a:p>
+        </p:txBody>
+      </p:sp>
+      <p:sp>
+        <p:nvSpPr>
+          <p:cNvPr id="17" name="Text 14"/>
+          <p:cNvSpPr/>
+          <p:nvPr/>
+        </p:nvSpPr>
+        <p:spPr>
+          <a:xfrm>
+            <a:off x="1280160" y="3104388"/>
+            <a:ext cx="10033711" cy="697230"/>
+          </a:xfrm>
+          <a:prstGeom prst="rect">
+            <a:avLst/>
+          </a:prstGeom>
+          <a:noFill/>
+          <a:ln/>
+        </p:spPr>
+        <p:txBody>
+          <a:bodyPr wrap="square" lIns="0" tIns="0" rIns="0" bIns="0" rtlCol="0" anchor="ctr"/>
+          <a:lstStyle/>
+          <a:p>
+            <a:pPr indent="0" marL="0">
+              <a:lnSpc>
+                <a:spcPct val="88000"/>
+              </a:lnSpc>
+              <a:buNone/>
+            </a:pPr>
+            <a:r>
+              <a:rPr lang="en-US" sz="900" dirty="0">
+                <a:solidFill>
+                  <a:srgbClr val="5F7183"/>
+                </a:solidFill>
+                <a:latin typeface="Yu Gothic" pitchFamily="34" charset="0"/>
+                <a:ea typeface="Yu Gothic" pitchFamily="34" charset="-122"/>
+                <a:cs typeface="Yu Gothic" pitchFamily="34" charset="-120"/>
+              </a:rPr>
+              <a:t>問3　見ている社員がいることは</a:t>
+            </a:r>
+            <a:endParaRPr lang="en-US" sz="900" dirty="0"/>
+          </a:p>
+          <a:p>
+            <a:pPr indent="0" marL="0">
+              <a:lnSpc>
+                <a:spcPct val="88000"/>
+              </a:lnSpc>
+              <a:buNone/>
+            </a:pPr>
+            <a:r>
+              <a:rPr lang="en-US" sz="1200" b="1" dirty="0">
                 <a:solidFill>
                   <a:srgbClr val="1B2733"/>
                 </a:solidFill>
@@ -3864,14 +3962,14 @@
                 <a:ea typeface="Yu Gothic" pitchFamily="34" charset="-122"/>
                 <a:cs typeface="Yu Gothic" pitchFamily="34" charset="-120"/>
               </a:rPr>
-              <a:t>People（安全）と Reputation（対応の質）が同時に問われる。</a:t>
-            </a:r>
-            <a:endParaRPr lang="en-US" sz="1050" dirty="0"/>
-          </a:p>
-          <a:p>
-            <a:pPr indent="0" marL="0">
-              <a:lnSpc>
-                <a:spcPct val="90000"/>
+              <a:t>People（安全）と Reputation（対応の質）が同時に問われる。滞留させない。</a:t>
+            </a:r>
+            <a:endParaRPr lang="en-US" sz="900" dirty="0"/>
+          </a:p>
+          <a:p>
+            <a:pPr indent="0" marL="0">
+              <a:lnSpc>
+                <a:spcPct val="88000"/>
               </a:lnSpc>
               <a:buNone/>
             </a:pPr>
@@ -3884,26 +3982,26 @@
                 <a:ea typeface="Calibri" pitchFamily="34" charset="-122"/>
                 <a:cs typeface="Calibri" pitchFamily="34" charset="-120"/>
               </a:rPr>
-              <a:t>Both People and Reputation are in play at once.</a:t>
-            </a:r>
-            <a:endParaRPr lang="en-US" sz="1050" dirty="0"/>
-          </a:p>
-        </p:txBody>
-      </p:sp>
-      <p:sp>
-        <p:nvSpPr>
-          <p:cNvPr id="13" name="Shape 10"/>
-          <p:cNvSpPr/>
-          <p:nvPr/>
-        </p:nvSpPr>
-        <p:spPr>
-          <a:xfrm>
-            <a:off x="6223864" y="2993136"/>
-            <a:ext cx="5327752" cy="1091184"/>
+              <a:t>Both People and Reputation are in play. Do not let a crowd form.</a:t>
+            </a:r>
+            <a:endParaRPr lang="en-US" sz="900" dirty="0"/>
+          </a:p>
+        </p:txBody>
+      </p:sp>
+      <p:sp>
+        <p:nvSpPr>
+          <p:cNvPr id="18" name="Shape 15"/>
+          <p:cNvSpPr/>
+          <p:nvPr/>
+        </p:nvSpPr>
+        <p:spPr>
+          <a:xfrm>
+            <a:off x="640080" y="3966210"/>
+            <a:ext cx="10911535" cy="825246"/>
           </a:xfrm>
           <a:prstGeom prst="roundRect">
             <a:avLst>
-              <a:gd name="adj" fmla="val 3352"/>
+              <a:gd name="adj" fmla="val 4432"/>
             </a:avLst>
           </a:prstGeom>
           <a:solidFill>
@@ -3914,53 +4012,112 @@
       </p:sp>
       <p:sp>
         <p:nvSpPr>
-          <p:cNvPr id="14" name="Text 11"/>
-          <p:cNvSpPr/>
-          <p:nvPr/>
-        </p:nvSpPr>
-        <p:spPr>
-          <a:xfrm>
-            <a:off x="6461608" y="3084576"/>
-            <a:ext cx="4852264" cy="908304"/>
-          </a:xfrm>
-          <a:prstGeom prst="rect">
-            <a:avLst/>
-          </a:prstGeom>
-          <a:noFill/>
-          <a:ln/>
-        </p:spPr>
-        <p:txBody>
-          <a:bodyPr wrap="square" lIns="0" tIns="0" rIns="0" bIns="0" rtlCol="0" anchor="t"/>
-          <a:lstStyle/>
-          <a:p>
-            <a:pPr indent="0" marL="0">
-              <a:lnSpc>
-                <a:spcPct val="90000"/>
-              </a:lnSpc>
-              <a:buNone/>
-            </a:pPr>
-            <a:r>
-              <a:rPr lang="en-US" sz="1050" b="1" dirty="0">
-                <a:solidFill>
-                  <a:srgbClr val="093259"/>
-                </a:solidFill>
-                <a:latin typeface="Yu Gothic" pitchFamily="34" charset="0"/>
-                <a:ea typeface="Yu Gothic" pitchFamily="34" charset="-122"/>
-                <a:cs typeface="Yu Gothic" pitchFamily="34" charset="-120"/>
-              </a:rPr>
-              <a:t>経緯への対応</a:t>
-            </a:r>
-            <a:endParaRPr lang="en-US" sz="1050" dirty="0"/>
-          </a:p>
-          <a:p>
-            <a:pPr indent="0" marL="0">
-              <a:lnSpc>
-                <a:spcPct val="90000"/>
-              </a:lnSpc>
-              <a:buNone/>
-            </a:pPr>
-            <a:r>
-              <a:rPr lang="en-US" sz="1050" b="1" dirty="0">
+          <p:cNvPr id="19" name="Shape 16"/>
+          <p:cNvSpPr/>
+          <p:nvPr/>
+        </p:nvSpPr>
+        <p:spPr>
+          <a:xfrm>
+            <a:off x="841248" y="4205097"/>
+            <a:ext cx="347472" cy="347472"/>
+          </a:xfrm>
+          <a:prstGeom prst="ellipse">
+            <a:avLst/>
+          </a:prstGeom>
+          <a:solidFill>
+            <a:srgbClr val="12B198"/>
+          </a:solidFill>
+          <a:ln/>
+        </p:spPr>
+      </p:sp>
+      <p:sp>
+        <p:nvSpPr>
+          <p:cNvPr id="20" name="Text 17"/>
+          <p:cNvSpPr/>
+          <p:nvPr/>
+        </p:nvSpPr>
+        <p:spPr>
+          <a:xfrm>
+            <a:off x="841248" y="4205097"/>
+            <a:ext cx="347472" cy="347472"/>
+          </a:xfrm>
+          <a:prstGeom prst="rect">
+            <a:avLst/>
+          </a:prstGeom>
+          <a:noFill/>
+          <a:ln/>
+        </p:spPr>
+        <p:txBody>
+          <a:bodyPr wrap="square" lIns="0" tIns="0" rIns="0" bIns="0" rtlCol="0" anchor="ctr"/>
+          <a:lstStyle/>
+          <a:p>
+            <a:pPr algn="ctr" indent="0" marL="0">
+              <a:buNone/>
+            </a:pPr>
+            <a:r>
+              <a:rPr lang="en-US" sz="1100" b="1" dirty="0">
+                <a:solidFill>
+                  <a:srgbClr val="FFFFFF"/>
+                </a:solidFill>
+                <a:latin typeface="Calibri" pitchFamily="34" charset="0"/>
+                <a:ea typeface="Calibri" pitchFamily="34" charset="-122"/>
+                <a:cs typeface="Calibri" pitchFamily="34" charset="-120"/>
+              </a:rPr>
+              <a:t>4</a:t>
+            </a:r>
+            <a:endParaRPr lang="en-US" sz="1100" dirty="0"/>
+          </a:p>
+        </p:txBody>
+      </p:sp>
+      <p:sp>
+        <p:nvSpPr>
+          <p:cNvPr id="21" name="Text 18"/>
+          <p:cNvSpPr/>
+          <p:nvPr/>
+        </p:nvSpPr>
+        <p:spPr>
+          <a:xfrm>
+            <a:off x="1280160" y="4030218"/>
+            <a:ext cx="10033711" cy="697230"/>
+          </a:xfrm>
+          <a:prstGeom prst="rect">
+            <a:avLst/>
+          </a:prstGeom>
+          <a:noFill/>
+          <a:ln/>
+        </p:spPr>
+        <p:txBody>
+          <a:bodyPr wrap="square" lIns="0" tIns="0" rIns="0" bIns="0" rtlCol="0" anchor="ctr"/>
+          <a:lstStyle/>
+          <a:p>
+            <a:pPr indent="0" marL="0">
+              <a:lnSpc>
+                <a:spcPct val="88000"/>
+              </a:lnSpc>
+              <a:buNone/>
+            </a:pPr>
+            <a:r>
+              <a:rPr lang="en-US" sz="900" dirty="0">
+                <a:solidFill>
+                  <a:srgbClr val="5F7183"/>
+                </a:solidFill>
+                <a:latin typeface="Yu Gothic" pitchFamily="34" charset="0"/>
+                <a:ea typeface="Yu Gothic" pitchFamily="34" charset="-122"/>
+                <a:cs typeface="Yu Gothic" pitchFamily="34" charset="-120"/>
+              </a:rPr>
+              <a:t>問4　いつ通報するか、何を伝えるか</a:t>
+            </a:r>
+            <a:endParaRPr lang="en-US" sz="900" dirty="0"/>
+          </a:p>
+          <a:p>
+            <a:pPr indent="0" marL="0">
+              <a:lnSpc>
+                <a:spcPct val="88000"/>
+              </a:lnSpc>
+              <a:buNone/>
+            </a:pPr>
+            <a:r>
+              <a:rPr lang="en-US" sz="1200" b="1" dirty="0">
                 <a:solidFill>
                   <a:srgbClr val="1B2733"/>
                 </a:solidFill>
@@ -3968,14 +4125,14 @@
                 <a:ea typeface="Yu Gothic" pitchFamily="34" charset="-122"/>
                 <a:cs typeface="Yu Gothic" pitchFamily="34" charset="-120"/>
               </a:rPr>
-              <a:t>退職理由に立ち入らない。話を聞く相手にならない。</a:t>
-            </a:r>
-            <a:endParaRPr lang="en-US" sz="1050" dirty="0"/>
-          </a:p>
-          <a:p>
-            <a:pPr indent="0" marL="0">
-              <a:lnSpc>
-                <a:spcPct val="90000"/>
+              <a:t>退去要請が明確に拒否され、不退去が続いた時点。その前に上長へ一報を入れておく。</a:t>
+            </a:r>
+            <a:endParaRPr lang="en-US" sz="900" dirty="0"/>
+          </a:p>
+          <a:p>
+            <a:pPr indent="0" marL="0">
+              <a:lnSpc>
+                <a:spcPct val="88000"/>
               </a:lnSpc>
               <a:buNone/>
             </a:pPr>
@@ -3988,83 +4145,97 @@
                 <a:ea typeface="Calibri" pitchFamily="34" charset="-122"/>
                 <a:cs typeface="Calibri" pitchFamily="34" charset="-120"/>
               </a:rPr>
-              <a:t>Do not engage with why they left. Do not become their audience.</a:t>
-            </a:r>
-            <a:endParaRPr lang="en-US" sz="1050" dirty="0"/>
-          </a:p>
-        </p:txBody>
-      </p:sp>
-      <p:sp>
-        <p:nvSpPr>
-          <p:cNvPr id="15" name="Shape 12"/>
-          <p:cNvSpPr/>
-          <p:nvPr/>
-        </p:nvSpPr>
-        <p:spPr>
-          <a:xfrm>
-            <a:off x="640080" y="4212336"/>
-            <a:ext cx="5327752" cy="1091184"/>
+              <a:t>Once a clear request to leave has been refused and they remain. Notify your supervisor before that point.</a:t>
+            </a:r>
+            <a:endParaRPr lang="en-US" sz="900" dirty="0"/>
+          </a:p>
+        </p:txBody>
+      </p:sp>
+      <p:sp>
+        <p:nvSpPr>
+          <p:cNvPr id="22" name="Shape 19"/>
+          <p:cNvSpPr/>
+          <p:nvPr/>
+        </p:nvSpPr>
+        <p:spPr>
+          <a:xfrm>
+            <a:off x="640080" y="4901184"/>
+            <a:ext cx="10911535" cy="420624"/>
           </a:xfrm>
           <a:prstGeom prst="roundRect">
             <a:avLst>
-              <a:gd name="adj" fmla="val 3352"/>
+              <a:gd name="adj" fmla="val 8696"/>
             </a:avLst>
           </a:prstGeom>
           <a:solidFill>
-            <a:srgbClr val="EFF4F8"/>
+            <a:srgbClr val="EEF6FA"/>
           </a:solidFill>
           <a:ln/>
         </p:spPr>
       </p:sp>
       <p:sp>
         <p:nvSpPr>
-          <p:cNvPr id="16" name="Text 13"/>
-          <p:cNvSpPr/>
-          <p:nvPr/>
-        </p:nvSpPr>
-        <p:spPr>
-          <a:xfrm>
-            <a:off x="877824" y="4303776"/>
-            <a:ext cx="4852264" cy="908304"/>
-          </a:xfrm>
-          <a:prstGeom prst="rect">
-            <a:avLst/>
-          </a:prstGeom>
-          <a:noFill/>
-          <a:ln/>
-        </p:spPr>
-        <p:txBody>
-          <a:bodyPr wrap="square" lIns="0" tIns="0" rIns="0" bIns="0" rtlCol="0" anchor="t"/>
-          <a:lstStyle/>
-          <a:p>
-            <a:pPr indent="0" marL="0">
-              <a:lnSpc>
-                <a:spcPct val="90000"/>
-              </a:lnSpc>
-              <a:buNone/>
-            </a:pPr>
-            <a:r>
-              <a:rPr lang="en-US" sz="1050" b="1" dirty="0">
-                <a:solidFill>
-                  <a:srgbClr val="093259"/>
-                </a:solidFill>
-                <a:latin typeface="Yu Gothic" pitchFamily="34" charset="0"/>
-                <a:ea typeface="Yu Gothic" pitchFamily="34" charset="-122"/>
-                <a:cs typeface="Yu Gothic" pitchFamily="34" charset="-120"/>
-              </a:rPr>
-              <a:t>「不当解雇だ」</a:t>
-            </a:r>
-            <a:endParaRPr lang="en-US" sz="1050" dirty="0"/>
-          </a:p>
-          <a:p>
-            <a:pPr indent="0" marL="0">
-              <a:lnSpc>
-                <a:spcPct val="90000"/>
-              </a:lnSpc>
-              <a:buNone/>
-            </a:pPr>
-            <a:r>
-              <a:rPr lang="en-US" sz="1050" b="1" dirty="0">
+          <p:cNvPr id="23" name="Text 20"/>
+          <p:cNvSpPr/>
+          <p:nvPr/>
+        </p:nvSpPr>
+        <p:spPr>
+          <a:xfrm>
+            <a:off x="859536" y="4928616"/>
+            <a:ext cx="10472623" cy="365760"/>
+          </a:xfrm>
+          <a:prstGeom prst="rect">
+            <a:avLst/>
+          </a:prstGeom>
+          <a:noFill/>
+          <a:ln/>
+        </p:spPr>
+        <p:txBody>
+          <a:bodyPr wrap="square" lIns="0" tIns="0" rIns="0" bIns="0" rtlCol="0" anchor="ctr"/>
+          <a:lstStyle/>
+          <a:p>
+            <a:pPr indent="0" marL="0">
+              <a:lnSpc>
+                <a:spcPct val="86000"/>
+              </a:lnSpc>
+              <a:buNone/>
+            </a:pPr>
+            <a:r>
+              <a:rPr lang="en-US" sz="850" b="1" dirty="0">
+                <a:solidFill>
+                  <a:srgbClr val="0D8A76"/>
+                </a:solidFill>
+                <a:latin typeface="Yu Gothic" pitchFamily="34" charset="0"/>
+                <a:ea typeface="Yu Gothic" pitchFamily="34" charset="-122"/>
+                <a:cs typeface="Yu Gothic" pitchFamily="34" charset="-120"/>
+              </a:rPr>
+              <a:t>追加付与①　</a:t>
+            </a:r>
+            <a:pPr indent="0" marL="0">
+              <a:lnSpc>
+                <a:spcPct val="86000"/>
+              </a:lnSpc>
+              <a:buNone/>
+            </a:pPr>
+            <a:r>
+              <a:rPr lang="en-US" sz="850" dirty="0">
+                <a:solidFill>
+                  <a:srgbClr val="5F7183"/>
+                </a:solidFill>
+                <a:latin typeface="Yu Gothic" pitchFamily="34" charset="0"/>
+                <a:ea typeface="Yu Gothic" pitchFamily="34" charset="-122"/>
+                <a:cs typeface="Yu Gothic" pitchFamily="34" charset="-120"/>
+              </a:rPr>
+              <a:t>「不当解雇だ」と大声　→　</a:t>
+            </a:r>
+            <a:pPr indent="0" marL="0">
+              <a:lnSpc>
+                <a:spcPct val="86000"/>
+              </a:lnSpc>
+              <a:buNone/>
+            </a:pPr>
+            <a:r>
+              <a:rPr lang="en-US" sz="1100" b="1" dirty="0">
                 <a:solidFill>
                   <a:srgbClr val="1B2733"/>
                 </a:solidFill>
@@ -4072,19 +4243,19 @@
                 <a:ea typeface="Yu Gothic" pitchFamily="34" charset="-122"/>
                 <a:cs typeface="Yu Gothic" pitchFamily="34" charset="-120"/>
               </a:rPr>
-              <a:t>内容に応答しない。「お答えできる立場にありません」で足りる。</a:t>
-            </a:r>
-            <a:endParaRPr lang="en-US" sz="1050" dirty="0"/>
-          </a:p>
-          <a:p>
-            <a:pPr indent="0" marL="0">
-              <a:lnSpc>
-                <a:spcPct val="90000"/>
-              </a:lnSpc>
-              <a:buNone/>
-            </a:pPr>
-            <a:r>
-              <a:rPr lang="en-US" sz="800" i="1" dirty="0">
+              <a:t>内容に応答しない。「お答えできる立場にありません」で足りる。人事へ取り次ぐ。</a:t>
+            </a:r>
+            <a:endParaRPr lang="en-US" sz="850" dirty="0"/>
+          </a:p>
+          <a:p>
+            <a:pPr indent="0" marL="0">
+              <a:lnSpc>
+                <a:spcPct val="86000"/>
+              </a:lnSpc>
+              <a:buNone/>
+            </a:pPr>
+            <a:r>
+              <a:rPr lang="en-US" sz="750" i="1" dirty="0">
                 <a:solidFill>
                   <a:srgbClr val="5F7183"/>
                 </a:solidFill>
@@ -4092,83 +4263,97 @@
                 <a:ea typeface="Calibri" pitchFamily="34" charset="-122"/>
                 <a:cs typeface="Calibri" pitchFamily="34" charset="-120"/>
               </a:rPr>
-              <a:t>Do not engage. "I am not in a position to comment" is enough.</a:t>
-            </a:r>
-            <a:endParaRPr lang="en-US" sz="1050" dirty="0"/>
-          </a:p>
-        </p:txBody>
-      </p:sp>
-      <p:sp>
-        <p:nvSpPr>
-          <p:cNvPr id="17" name="Shape 14"/>
-          <p:cNvSpPr/>
-          <p:nvPr/>
-        </p:nvSpPr>
-        <p:spPr>
-          <a:xfrm>
-            <a:off x="6223864" y="4212336"/>
-            <a:ext cx="5327752" cy="1091184"/>
+              <a:t>Do not engage with the content. "I am not in a position to comment" is enough. Refer to HR.</a:t>
+            </a:r>
+            <a:endParaRPr lang="en-US" sz="850" dirty="0"/>
+          </a:p>
+        </p:txBody>
+      </p:sp>
+      <p:sp>
+        <p:nvSpPr>
+          <p:cNvPr id="24" name="Shape 21"/>
+          <p:cNvSpPr/>
+          <p:nvPr/>
+        </p:nvSpPr>
+        <p:spPr>
+          <a:xfrm>
+            <a:off x="640080" y="5394960"/>
+            <a:ext cx="10911535" cy="420624"/>
           </a:xfrm>
           <a:prstGeom prst="roundRect">
             <a:avLst>
-              <a:gd name="adj" fmla="val 3352"/>
+              <a:gd name="adj" fmla="val 8696"/>
             </a:avLst>
           </a:prstGeom>
           <a:solidFill>
-            <a:srgbClr val="EFF4F8"/>
+            <a:srgbClr val="EEF6FA"/>
           </a:solidFill>
           <a:ln/>
         </p:spPr>
       </p:sp>
       <p:sp>
         <p:nvSpPr>
-          <p:cNvPr id="18" name="Text 15"/>
-          <p:cNvSpPr/>
-          <p:nvPr/>
-        </p:nvSpPr>
-        <p:spPr>
-          <a:xfrm>
-            <a:off x="6461608" y="4303776"/>
-            <a:ext cx="4852264" cy="908304"/>
-          </a:xfrm>
-          <a:prstGeom prst="rect">
-            <a:avLst/>
-          </a:prstGeom>
-          <a:noFill/>
-          <a:ln/>
-        </p:spPr>
-        <p:txBody>
-          <a:bodyPr wrap="square" lIns="0" tIns="0" rIns="0" bIns="0" rtlCol="0" anchor="t"/>
-          <a:lstStyle/>
-          <a:p>
-            <a:pPr indent="0" marL="0">
-              <a:lnSpc>
-                <a:spcPct val="90000"/>
-              </a:lnSpc>
-              <a:buNone/>
-            </a:pPr>
-            <a:r>
-              <a:rPr lang="en-US" sz="1050" b="1" dirty="0">
-                <a:solidFill>
-                  <a:srgbClr val="093259"/>
-                </a:solidFill>
-                <a:latin typeface="Yu Gothic" pitchFamily="34" charset="0"/>
-                <a:ea typeface="Yu Gothic" pitchFamily="34" charset="-122"/>
-                <a:cs typeface="Yu Gothic" pitchFamily="34" charset="-120"/>
-              </a:rPr>
-              <a:t>社員が仲裁に入る</a:t>
-            </a:r>
-            <a:endParaRPr lang="en-US" sz="1050" dirty="0"/>
-          </a:p>
-          <a:p>
-            <a:pPr indent="0" marL="0">
-              <a:lnSpc>
-                <a:spcPct val="90000"/>
-              </a:lnSpc>
-              <a:buNone/>
-            </a:pPr>
-            <a:r>
-              <a:rPr lang="en-US" sz="1050" b="1" dirty="0">
+          <p:cNvPr id="25" name="Text 22"/>
+          <p:cNvSpPr/>
+          <p:nvPr/>
+        </p:nvSpPr>
+        <p:spPr>
+          <a:xfrm>
+            <a:off x="859536" y="5422392"/>
+            <a:ext cx="10472623" cy="365760"/>
+          </a:xfrm>
+          <a:prstGeom prst="rect">
+            <a:avLst/>
+          </a:prstGeom>
+          <a:noFill/>
+          <a:ln/>
+        </p:spPr>
+        <p:txBody>
+          <a:bodyPr wrap="square" lIns="0" tIns="0" rIns="0" bIns="0" rtlCol="0" anchor="ctr"/>
+          <a:lstStyle/>
+          <a:p>
+            <a:pPr indent="0" marL="0">
+              <a:lnSpc>
+                <a:spcPct val="86000"/>
+              </a:lnSpc>
+              <a:buNone/>
+            </a:pPr>
+            <a:r>
+              <a:rPr lang="en-US" sz="850" b="1" dirty="0">
+                <a:solidFill>
+                  <a:srgbClr val="0D8A76"/>
+                </a:solidFill>
+                <a:latin typeface="Yu Gothic" pitchFamily="34" charset="0"/>
+                <a:ea typeface="Yu Gothic" pitchFamily="34" charset="-122"/>
+                <a:cs typeface="Yu Gothic" pitchFamily="34" charset="-120"/>
+              </a:rPr>
+              <a:t>追加付与②　</a:t>
+            </a:r>
+            <a:pPr indent="0" marL="0">
+              <a:lnSpc>
+                <a:spcPct val="86000"/>
+              </a:lnSpc>
+              <a:buNone/>
+            </a:pPr>
+            <a:r>
+              <a:rPr lang="en-US" sz="850" dirty="0">
+                <a:solidFill>
+                  <a:srgbClr val="5F7183"/>
+                </a:solidFill>
+                <a:latin typeface="Yu Gothic" pitchFamily="34" charset="0"/>
+                <a:ea typeface="Yu Gothic" pitchFamily="34" charset="-122"/>
+                <a:cs typeface="Yu Gothic" pitchFamily="34" charset="-120"/>
+              </a:rPr>
+              <a:t>社員が「私が話します」と仲裁　→　</a:t>
+            </a:r>
+            <a:pPr indent="0" marL="0">
+              <a:lnSpc>
+                <a:spcPct val="86000"/>
+              </a:lnSpc>
+              <a:buNone/>
+            </a:pPr>
+            <a:r>
+              <a:rPr lang="en-US" sz="1100" b="1" dirty="0">
                 <a:solidFill>
                   <a:srgbClr val="1B2733"/>
                 </a:solidFill>
@@ -4176,19 +4361,19 @@
                 <a:ea typeface="Yu Gothic" pitchFamily="34" charset="-122"/>
                 <a:cs typeface="Yu Gothic" pitchFamily="34" charset="-120"/>
               </a:rPr>
-              <a:t>止める。善意でも当事者が増えると収拾がつかない。</a:t>
-            </a:r>
-            <a:endParaRPr lang="en-US" sz="1050" dirty="0"/>
-          </a:p>
-          <a:p>
-            <a:pPr indent="0" marL="0">
-              <a:lnSpc>
-                <a:spcPct val="90000"/>
-              </a:lnSpc>
-              <a:buNone/>
-            </a:pPr>
-            <a:r>
-              <a:rPr lang="en-US" sz="800" i="1" dirty="0">
+              <a:t>止める。善意でも当事者が増えると収拾がつかない。社員の安全も守る対象。</a:t>
+            </a:r>
+            <a:endParaRPr lang="en-US" sz="850" dirty="0"/>
+          </a:p>
+          <a:p>
+            <a:pPr indent="0" marL="0">
+              <a:lnSpc>
+                <a:spcPct val="86000"/>
+              </a:lnSpc>
+              <a:buNone/>
+            </a:pPr>
+            <a:r>
+              <a:rPr lang="en-US" sz="750" i="1" dirty="0">
                 <a:solidFill>
                   <a:srgbClr val="5F7183"/>
                 </a:solidFill>
@@ -4196,116 +4381,15 @@
                 <a:ea typeface="Calibri" pitchFamily="34" charset="-122"/>
                 <a:cs typeface="Calibri" pitchFamily="34" charset="-120"/>
               </a:rPr>
-              <a:t>Stop them. Even well meant, more parties makes it unmanageable.</a:t>
-            </a:r>
-            <a:endParaRPr lang="en-US" sz="1050" dirty="0"/>
-          </a:p>
-        </p:txBody>
-      </p:sp>
-      <p:sp>
-        <p:nvSpPr>
-          <p:cNvPr id="19" name="Shape 16"/>
-          <p:cNvSpPr/>
-          <p:nvPr/>
-        </p:nvSpPr>
-        <p:spPr>
-          <a:xfrm>
-            <a:off x="640080" y="5358384"/>
-            <a:ext cx="10911535" cy="493776"/>
-          </a:xfrm>
-          <a:prstGeom prst="roundRect">
-            <a:avLst>
-              <a:gd name="adj" fmla="val 7407"/>
-            </a:avLst>
-          </a:prstGeom>
-          <a:solidFill>
-            <a:srgbClr val="093259"/>
-          </a:solidFill>
-          <a:ln/>
-        </p:spPr>
-      </p:sp>
-      <p:sp>
-        <p:nvSpPr>
-          <p:cNvPr id="20" name="Text 17"/>
-          <p:cNvSpPr/>
-          <p:nvPr/>
-        </p:nvSpPr>
-        <p:spPr>
-          <a:xfrm>
-            <a:off x="877824" y="5404104"/>
-            <a:ext cx="10436047" cy="402336"/>
-          </a:xfrm>
-          <a:prstGeom prst="rect">
-            <a:avLst/>
-          </a:prstGeom>
-          <a:noFill/>
-          <a:ln/>
-        </p:spPr>
-        <p:txBody>
-          <a:bodyPr wrap="square" lIns="0" tIns="0" rIns="0" bIns="0" rtlCol="0" anchor="ctr"/>
-          <a:lstStyle/>
-          <a:p>
-            <a:pPr indent="0" marL="0">
-              <a:lnSpc>
-                <a:spcPct val="86000"/>
-              </a:lnSpc>
-              <a:buNone/>
-            </a:pPr>
-            <a:r>
-              <a:rPr lang="en-US" sz="950" b="1" dirty="0">
-                <a:solidFill>
-                  <a:srgbClr val="12B198"/>
-                </a:solidFill>
-                <a:latin typeface="Yu Gothic" pitchFamily="34" charset="0"/>
-                <a:ea typeface="Yu Gothic" pitchFamily="34" charset="-122"/>
-                <a:cs typeface="Yu Gothic" pitchFamily="34" charset="-120"/>
-              </a:rPr>
-              <a:t>割れる論点　</a:t>
-            </a:r>
-            <a:pPr indent="0" marL="0">
-              <a:lnSpc>
-                <a:spcPct val="86000"/>
-              </a:lnSpc>
-              <a:buNone/>
-            </a:pPr>
-            <a:r>
-              <a:rPr lang="en-US" sz="1100" b="1" dirty="0">
-                <a:solidFill>
-                  <a:srgbClr val="FFFFFF"/>
-                </a:solidFill>
-                <a:latin typeface="Yu Gothic" pitchFamily="34" charset="0"/>
-                <a:ea typeface="Yu Gothic" pitchFamily="34" charset="-122"/>
-                <a:cs typeface="Yu Gothic" pitchFamily="34" charset="-120"/>
-              </a:rPr>
-              <a:t>どの時点で通報するか。退去要請が明確に拒否され、不退去が続いた時点。その前に上長へ一報。</a:t>
-            </a:r>
-            <a:endParaRPr lang="en-US" sz="950" dirty="0"/>
-          </a:p>
-          <a:p>
-            <a:pPr indent="0" marL="0">
-              <a:lnSpc>
-                <a:spcPct val="86000"/>
-              </a:lnSpc>
-              <a:buNone/>
-            </a:pPr>
-            <a:r>
-              <a:rPr lang="en-US" sz="800" i="1" dirty="0">
-                <a:solidFill>
-                  <a:srgbClr val="9FD8CD"/>
-                </a:solidFill>
-                <a:latin typeface="Calibri" pitchFamily="34" charset="0"/>
-                <a:ea typeface="Calibri" pitchFamily="34" charset="-122"/>
-                <a:cs typeface="Calibri" pitchFamily="34" charset="-120"/>
-              </a:rPr>
-              <a:t>When do you call the police? Once a clear request to leave has been refused and they remain. Notify your supervisor before that.</a:t>
-            </a:r>
-            <a:endParaRPr lang="en-US" sz="950" dirty="0"/>
-          </a:p>
-        </p:txBody>
-      </p:sp>
-      <p:sp>
-        <p:nvSpPr>
-          <p:cNvPr id="21" name="Text 18"/>
+              <a:t>Stop them. Even well meant, more parties makes it unmanageable — and that employee is also yours to protect.</a:t>
+            </a:r>
+            <a:endParaRPr lang="en-US" sz="850" dirty="0"/>
+          </a:p>
+        </p:txBody>
+      </p:sp>
+      <p:sp>
+        <p:nvSpPr>
+          <p:cNvPr id="26" name="Text 23"/>
           <p:cNvSpPr/>
           <p:nvPr/>
         </p:nvSpPr>
@@ -4384,7 +4468,7 @@
       </p:sp>
       <p:sp>
         <p:nvSpPr>
-          <p:cNvPr id="22" name="Text 19"/>
+          <p:cNvPr id="27" name="Text 24"/>
           <p:cNvSpPr/>
           <p:nvPr/>
         </p:nvSpPr>
@@ -4437,7 +4521,7 @@
       </p:sp>
       <p:sp>
         <p:nvSpPr>
-          <p:cNvPr id="23" name="Text 20"/>
+          <p:cNvPr id="28" name="Text 25"/>
           <p:cNvSpPr/>
           <p:nvPr/>
         </p:nvSpPr>
@@ -4490,7 +4574,7 @@
       </p:sp>
       <p:sp>
         <p:nvSpPr>
-          <p:cNvPr id="24" name="Text 21"/>
+          <p:cNvPr id="29" name="Text 26"/>
           <p:cNvSpPr/>
           <p:nvPr/>
         </p:nvSpPr>
@@ -16896,7 +16980,7 @@
                 <a:ea typeface="Yu Gothic" pitchFamily="34" charset="-122"/>
                 <a:cs typeface="Yu Gothic" pitchFamily="34" charset="-120"/>
               </a:rPr>
-              <a:t>TTX 5-A 講評 ― 模範解答</a:t>
+              <a:t>TTX 5-A 模範解答</a:t>
             </a:r>
             <a:endParaRPr lang="en-US" sz="2300" dirty="0"/>
           </a:p>
@@ -16916,7 +17000,7 @@
                 <a:ea typeface="Calibri" pitchFamily="34" charset="-122"/>
                 <a:cs typeface="Calibri" pitchFamily="34" charset="-120"/>
               </a:rPr>
-              <a:t>TTX 5-A Debrief — Model Answer</a:t>
+              <a:t>TTX 5-A — Model Answers</a:t>
             </a:r>
             <a:endParaRPr lang="en-US" sz="2300" dirty="0"/>
           </a:p>
@@ -16985,97 +17069,344 @@
       </p:sp>
       <p:sp>
         <p:nvSpPr>
-          <p:cNvPr id="6" name="Text 3"/>
+          <p:cNvPr id="6" name="Shape 3"/>
           <p:cNvSpPr/>
           <p:nvPr/>
         </p:nvSpPr>
         <p:spPr>
           <a:xfrm>
             <a:off x="640080" y="1188720"/>
-            <a:ext cx="10911535" cy="530352"/>
-          </a:xfrm>
-          <a:prstGeom prst="rect">
-            <a:avLst/>
-          </a:prstGeom>
-          <a:noFill/>
-          <a:ln/>
-        </p:spPr>
-        <p:txBody>
-          <a:bodyPr wrap="square" lIns="0" tIns="0" rIns="0" bIns="0" rtlCol="0" anchor="t"/>
-          <a:lstStyle/>
-          <a:p>
-            <a:pPr indent="0" marL="0">
-              <a:lnSpc>
-                <a:spcPct val="90000"/>
-              </a:lnSpc>
-              <a:buNone/>
-            </a:pPr>
-            <a:r>
-              <a:rPr lang="en-US" sz="1000" b="1" dirty="0">
-                <a:solidFill>
-                  <a:srgbClr val="0D8A76"/>
-                </a:solidFill>
-                <a:latin typeface="Yu Gothic" pitchFamily="34" charset="0"/>
-                <a:ea typeface="Yu Gothic" pitchFamily="34" charset="-122"/>
-                <a:cs typeface="Yu Gothic" pitchFamily="34" charset="-120"/>
-              </a:rPr>
-              <a:t>狙い　</a:t>
-            </a:r>
-            <a:pPr indent="0" marL="0">
-              <a:lnSpc>
-                <a:spcPct val="90000"/>
-              </a:lnSpc>
-              <a:buNone/>
-            </a:pPr>
-            <a:r>
-              <a:rPr lang="en-US" sz="1150" b="1" dirty="0">
-                <a:solidFill>
-                  <a:srgbClr val="093259"/>
-                </a:solidFill>
-                <a:latin typeface="Yu Gothic" pitchFamily="34" charset="0"/>
-                <a:ea typeface="Yu Gothic" pitchFamily="34" charset="-122"/>
-                <a:cs typeface="Yu Gothic" pitchFamily="34" charset="-120"/>
-              </a:rPr>
-              <a:t>最良は B のあと D。受け止めてから具体化する。</a:t>
-            </a:r>
-            <a:endParaRPr lang="en-US" sz="1000" dirty="0"/>
-          </a:p>
-          <a:p>
-            <a:pPr indent="0" marL="0">
-              <a:lnSpc>
-                <a:spcPct val="90000"/>
-              </a:lnSpc>
-              <a:buNone/>
-            </a:pPr>
-            <a:r>
-              <a:rPr lang="en-US" sz="850" i="1" dirty="0">
-                <a:solidFill>
-                  <a:srgbClr val="5F7183"/>
-                </a:solidFill>
-                <a:latin typeface="Calibri" pitchFamily="34" charset="0"/>
-                <a:ea typeface="Calibri" pitchFamily="34" charset="-122"/>
-                <a:cs typeface="Calibri" pitchFamily="34" charset="-120"/>
-              </a:rPr>
-              <a:t>The best sequence is B then D: acknowledge first, then make it concrete.</a:t>
-            </a:r>
-            <a:endParaRPr lang="en-US" sz="1000" dirty="0"/>
-          </a:p>
-        </p:txBody>
-      </p:sp>
-      <p:sp>
-        <p:nvSpPr>
-          <p:cNvPr id="7" name="Shape 4"/>
-          <p:cNvSpPr/>
-          <p:nvPr/>
-        </p:nvSpPr>
-        <p:spPr>
-          <a:xfrm>
-            <a:off x="640080" y="1773936"/>
-            <a:ext cx="5327752" cy="1091184"/>
+            <a:ext cx="10911535" cy="683514"/>
           </a:xfrm>
           <a:prstGeom prst="roundRect">
             <a:avLst>
-              <a:gd name="adj" fmla="val 3352"/>
+              <a:gd name="adj" fmla="val 5351"/>
+            </a:avLst>
+          </a:prstGeom>
+          <a:solidFill>
+            <a:srgbClr val="E4F4F0"/>
+          </a:solidFill>
+          <a:ln/>
+        </p:spPr>
+      </p:sp>
+      <p:sp>
+        <p:nvSpPr>
+          <p:cNvPr id="7" name="Shape 4"/>
+          <p:cNvSpPr/>
+          <p:nvPr/>
+        </p:nvSpPr>
+        <p:spPr>
+          <a:xfrm>
+            <a:off x="841248" y="1356741"/>
+            <a:ext cx="347472" cy="347472"/>
+          </a:xfrm>
+          <a:prstGeom prst="ellipse">
+            <a:avLst/>
+          </a:prstGeom>
+          <a:solidFill>
+            <a:srgbClr val="12B198"/>
+          </a:solidFill>
+          <a:ln/>
+        </p:spPr>
+      </p:sp>
+      <p:sp>
+        <p:nvSpPr>
+          <p:cNvPr id="8" name="Text 5"/>
+          <p:cNvSpPr/>
+          <p:nvPr/>
+        </p:nvSpPr>
+        <p:spPr>
+          <a:xfrm>
+            <a:off x="841248" y="1356741"/>
+            <a:ext cx="347472" cy="347472"/>
+          </a:xfrm>
+          <a:prstGeom prst="rect">
+            <a:avLst/>
+          </a:prstGeom>
+          <a:noFill/>
+          <a:ln/>
+        </p:spPr>
+        <p:txBody>
+          <a:bodyPr wrap="square" lIns="0" tIns="0" rIns="0" bIns="0" rtlCol="0" anchor="ctr"/>
+          <a:lstStyle/>
+          <a:p>
+            <a:pPr algn="ctr" indent="0" marL="0">
+              <a:buNone/>
+            </a:pPr>
+            <a:r>
+              <a:rPr lang="en-US" sz="1100" b="1" dirty="0">
+                <a:solidFill>
+                  <a:srgbClr val="FFFFFF"/>
+                </a:solidFill>
+                <a:latin typeface="Calibri" pitchFamily="34" charset="0"/>
+                <a:ea typeface="Calibri" pitchFamily="34" charset="-122"/>
+                <a:cs typeface="Calibri" pitchFamily="34" charset="-120"/>
+              </a:rPr>
+              <a:t>1</a:t>
+            </a:r>
+            <a:endParaRPr lang="en-US" sz="1100" dirty="0"/>
+          </a:p>
+        </p:txBody>
+      </p:sp>
+      <p:sp>
+        <p:nvSpPr>
+          <p:cNvPr id="9" name="Text 6"/>
+          <p:cNvSpPr/>
+          <p:nvPr/>
+        </p:nvSpPr>
+        <p:spPr>
+          <a:xfrm>
+            <a:off x="1280160" y="1252728"/>
+            <a:ext cx="10033711" cy="555498"/>
+          </a:xfrm>
+          <a:prstGeom prst="rect">
+            <a:avLst/>
+          </a:prstGeom>
+          <a:noFill/>
+          <a:ln/>
+        </p:spPr>
+        <p:txBody>
+          <a:bodyPr wrap="square" lIns="0" tIns="0" rIns="0" bIns="0" rtlCol="0" anchor="ctr"/>
+          <a:lstStyle/>
+          <a:p>
+            <a:pPr indent="0" marL="0">
+              <a:lnSpc>
+                <a:spcPct val="88000"/>
+              </a:lnSpc>
+              <a:buNone/>
+            </a:pPr>
+            <a:r>
+              <a:rPr lang="en-US" sz="900" dirty="0">
+                <a:solidFill>
+                  <a:srgbClr val="5F7183"/>
+                </a:solidFill>
+                <a:latin typeface="Yu Gothic" pitchFamily="34" charset="0"/>
+                <a:ea typeface="Yu Gothic" pitchFamily="34" charset="-122"/>
+                <a:cs typeface="Yu Gothic" pitchFamily="34" charset="-120"/>
+              </a:rPr>
+              <a:t>問1　A と B、どちらを選ぶか</a:t>
+            </a:r>
+            <a:endParaRPr lang="en-US" sz="900" dirty="0"/>
+          </a:p>
+          <a:p>
+            <a:pPr indent="0" marL="0">
+              <a:lnSpc>
+                <a:spcPct val="88000"/>
+              </a:lnSpc>
+              <a:buNone/>
+            </a:pPr>
+            <a:r>
+              <a:rPr lang="en-US" sz="1200" b="1" dirty="0">
+                <a:solidFill>
+                  <a:srgbClr val="1B2733"/>
+                </a:solidFill>
+                <a:latin typeface="Yu Gothic" pitchFamily="34" charset="0"/>
+                <a:ea typeface="Yu Gothic" pitchFamily="34" charset="-122"/>
+                <a:cs typeface="Yu Gothic" pitchFamily="34" charset="-120"/>
+              </a:rPr>
+              <a:t>B を選ぶ。A は拒否のみで、相手が引き下がれる形が残らない。</a:t>
+            </a:r>
+            <a:endParaRPr lang="en-US" sz="900" dirty="0"/>
+          </a:p>
+          <a:p>
+            <a:pPr indent="0" marL="0">
+              <a:lnSpc>
+                <a:spcPct val="88000"/>
+              </a:lnSpc>
+              <a:buNone/>
+            </a:pPr>
+            <a:r>
+              <a:rPr lang="en-US" sz="800" i="1" dirty="0">
+                <a:solidFill>
+                  <a:srgbClr val="5F7183"/>
+                </a:solidFill>
+                <a:latin typeface="Calibri" pitchFamily="34" charset="0"/>
+                <a:ea typeface="Calibri" pitchFamily="34" charset="-122"/>
+                <a:cs typeface="Calibri" pitchFamily="34" charset="-120"/>
+              </a:rPr>
+              <a:t>Choose B. A is a bare refusal that leaves the person no way to step back.</a:t>
+            </a:r>
+            <a:endParaRPr lang="en-US" sz="900" dirty="0"/>
+          </a:p>
+        </p:txBody>
+      </p:sp>
+      <p:sp>
+        <p:nvSpPr>
+          <p:cNvPr id="10" name="Shape 7"/>
+          <p:cNvSpPr/>
+          <p:nvPr/>
+        </p:nvSpPr>
+        <p:spPr>
+          <a:xfrm>
+            <a:off x="640080" y="1972818"/>
+            <a:ext cx="10911535" cy="683514"/>
+          </a:xfrm>
+          <a:prstGeom prst="roundRect">
+            <a:avLst>
+              <a:gd name="adj" fmla="val 5351"/>
+            </a:avLst>
+          </a:prstGeom>
+          <a:solidFill>
+            <a:srgbClr val="E4F4F0"/>
+          </a:solidFill>
+          <a:ln/>
+        </p:spPr>
+      </p:sp>
+      <p:sp>
+        <p:nvSpPr>
+          <p:cNvPr id="11" name="Shape 8"/>
+          <p:cNvSpPr/>
+          <p:nvPr/>
+        </p:nvSpPr>
+        <p:spPr>
+          <a:xfrm>
+            <a:off x="841248" y="2140839"/>
+            <a:ext cx="347472" cy="347472"/>
+          </a:xfrm>
+          <a:prstGeom prst="ellipse">
+            <a:avLst/>
+          </a:prstGeom>
+          <a:solidFill>
+            <a:srgbClr val="12B198"/>
+          </a:solidFill>
+          <a:ln/>
+        </p:spPr>
+      </p:sp>
+      <p:sp>
+        <p:nvSpPr>
+          <p:cNvPr id="12" name="Text 9"/>
+          <p:cNvSpPr/>
+          <p:nvPr/>
+        </p:nvSpPr>
+        <p:spPr>
+          <a:xfrm>
+            <a:off x="841248" y="2140839"/>
+            <a:ext cx="347472" cy="347472"/>
+          </a:xfrm>
+          <a:prstGeom prst="rect">
+            <a:avLst/>
+          </a:prstGeom>
+          <a:noFill/>
+          <a:ln/>
+        </p:spPr>
+        <p:txBody>
+          <a:bodyPr wrap="square" lIns="0" tIns="0" rIns="0" bIns="0" rtlCol="0" anchor="ctr"/>
+          <a:lstStyle/>
+          <a:p>
+            <a:pPr algn="ctr" indent="0" marL="0">
+              <a:buNone/>
+            </a:pPr>
+            <a:r>
+              <a:rPr lang="en-US" sz="1100" b="1" dirty="0">
+                <a:solidFill>
+                  <a:srgbClr val="FFFFFF"/>
+                </a:solidFill>
+                <a:latin typeface="Calibri" pitchFamily="34" charset="0"/>
+                <a:ea typeface="Calibri" pitchFamily="34" charset="-122"/>
+                <a:cs typeface="Calibri" pitchFamily="34" charset="-120"/>
+              </a:rPr>
+              <a:t>2</a:t>
+            </a:r>
+            <a:endParaRPr lang="en-US" sz="1100" dirty="0"/>
+          </a:p>
+        </p:txBody>
+      </p:sp>
+      <p:sp>
+        <p:nvSpPr>
+          <p:cNvPr id="13" name="Text 10"/>
+          <p:cNvSpPr/>
+          <p:nvPr/>
+        </p:nvSpPr>
+        <p:spPr>
+          <a:xfrm>
+            <a:off x="1280160" y="2036826"/>
+            <a:ext cx="10033711" cy="555498"/>
+          </a:xfrm>
+          <a:prstGeom prst="rect">
+            <a:avLst/>
+          </a:prstGeom>
+          <a:noFill/>
+          <a:ln/>
+        </p:spPr>
+        <p:txBody>
+          <a:bodyPr wrap="square" lIns="0" tIns="0" rIns="0" bIns="0" rtlCol="0" anchor="ctr"/>
+          <a:lstStyle/>
+          <a:p>
+            <a:pPr indent="0" marL="0">
+              <a:lnSpc>
+                <a:spcPct val="88000"/>
+              </a:lnSpc>
+              <a:buNone/>
+            </a:pPr>
+            <a:r>
+              <a:rPr lang="en-US" sz="900" dirty="0">
+                <a:solidFill>
+                  <a:srgbClr val="5F7183"/>
+                </a:solidFill>
+                <a:latin typeface="Yu Gothic" pitchFamily="34" charset="0"/>
+                <a:ea typeface="Yu Gothic" pitchFamily="34" charset="-122"/>
+                <a:cs typeface="Yu Gothic" pitchFamily="34" charset="-120"/>
+              </a:rPr>
+              <a:t>問2　C と D、どちらを選ぶか</a:t>
+            </a:r>
+            <a:endParaRPr lang="en-US" sz="900" dirty="0"/>
+          </a:p>
+          <a:p>
+            <a:pPr indent="0" marL="0">
+              <a:lnSpc>
+                <a:spcPct val="88000"/>
+              </a:lnSpc>
+              <a:buNone/>
+            </a:pPr>
+            <a:r>
+              <a:rPr lang="en-US" sz="1200" b="1" dirty="0">
+                <a:solidFill>
+                  <a:srgbClr val="1B2733"/>
+                </a:solidFill>
+                <a:latin typeface="Yu Gothic" pitchFamily="34" charset="0"/>
+                <a:ea typeface="Yu Gothic" pitchFamily="34" charset="-122"/>
+                <a:cs typeface="Yu Gothic" pitchFamily="34" charset="-120"/>
+              </a:rPr>
+              <a:t>D を選ぶ。C は相手の状態を否定している。最良は B のあと D。</a:t>
+            </a:r>
+            <a:endParaRPr lang="en-US" sz="900" dirty="0"/>
+          </a:p>
+          <a:p>
+            <a:pPr indent="0" marL="0">
+              <a:lnSpc>
+                <a:spcPct val="88000"/>
+              </a:lnSpc>
+              <a:buNone/>
+            </a:pPr>
+            <a:r>
+              <a:rPr lang="en-US" sz="800" i="1" dirty="0">
+                <a:solidFill>
+                  <a:srgbClr val="5F7183"/>
+                </a:solidFill>
+                <a:latin typeface="Calibri" pitchFamily="34" charset="0"/>
+                <a:ea typeface="Calibri" pitchFamily="34" charset="-122"/>
+                <a:cs typeface="Calibri" pitchFamily="34" charset="-120"/>
+              </a:rPr>
+              <a:t>Choose D. C denies how they feel. The best sequence is B, then D.</a:t>
+            </a:r>
+            <a:endParaRPr lang="en-US" sz="900" dirty="0"/>
+          </a:p>
+        </p:txBody>
+      </p:sp>
+      <p:sp>
+        <p:nvSpPr>
+          <p:cNvPr id="14" name="Shape 11"/>
+          <p:cNvSpPr/>
+          <p:nvPr/>
+        </p:nvSpPr>
+        <p:spPr>
+          <a:xfrm>
+            <a:off x="640080" y="2756916"/>
+            <a:ext cx="10911535" cy="683514"/>
+          </a:xfrm>
+          <a:prstGeom prst="roundRect">
+            <a:avLst>
+              <a:gd name="adj" fmla="val 5351"/>
             </a:avLst>
           </a:prstGeom>
           <a:solidFill>
@@ -17086,53 +17417,112 @@
       </p:sp>
       <p:sp>
         <p:nvSpPr>
-          <p:cNvPr id="8" name="Text 5"/>
-          <p:cNvSpPr/>
-          <p:nvPr/>
-        </p:nvSpPr>
-        <p:spPr>
-          <a:xfrm>
-            <a:off x="877824" y="1865376"/>
-            <a:ext cx="4852264" cy="908304"/>
-          </a:xfrm>
-          <a:prstGeom prst="rect">
-            <a:avLst/>
-          </a:prstGeom>
-          <a:noFill/>
-          <a:ln/>
-        </p:spPr>
-        <p:txBody>
-          <a:bodyPr wrap="square" lIns="0" tIns="0" rIns="0" bIns="0" rtlCol="0" anchor="t"/>
-          <a:lstStyle/>
-          <a:p>
-            <a:pPr indent="0" marL="0">
-              <a:lnSpc>
-                <a:spcPct val="90000"/>
-              </a:lnSpc>
-              <a:buNone/>
-            </a:pPr>
-            <a:r>
-              <a:rPr lang="en-US" sz="1050" b="1" dirty="0">
-                <a:solidFill>
-                  <a:srgbClr val="093259"/>
-                </a:solidFill>
-                <a:latin typeface="Yu Gothic" pitchFamily="34" charset="0"/>
-                <a:ea typeface="Yu Gothic" pitchFamily="34" charset="-122"/>
-                <a:cs typeface="Yu Gothic" pitchFamily="34" charset="-120"/>
-              </a:rPr>
-              <a:t>A「規則ですので」</a:t>
-            </a:r>
-            <a:endParaRPr lang="en-US" sz="1050" dirty="0"/>
-          </a:p>
-          <a:p>
-            <a:pPr indent="0" marL="0">
-              <a:lnSpc>
-                <a:spcPct val="90000"/>
-              </a:lnSpc>
-              <a:buNone/>
-            </a:pPr>
-            <a:r>
-              <a:rPr lang="en-US" sz="1050" b="1" dirty="0">
+          <p:cNvPr id="15" name="Shape 12"/>
+          <p:cNvSpPr/>
+          <p:nvPr/>
+        </p:nvSpPr>
+        <p:spPr>
+          <a:xfrm>
+            <a:off x="841248" y="2924937"/>
+            <a:ext cx="347472" cy="347472"/>
+          </a:xfrm>
+          <a:prstGeom prst="ellipse">
+            <a:avLst/>
+          </a:prstGeom>
+          <a:solidFill>
+            <a:srgbClr val="12B198"/>
+          </a:solidFill>
+          <a:ln/>
+        </p:spPr>
+      </p:sp>
+      <p:sp>
+        <p:nvSpPr>
+          <p:cNvPr id="16" name="Text 13"/>
+          <p:cNvSpPr/>
+          <p:nvPr/>
+        </p:nvSpPr>
+        <p:spPr>
+          <a:xfrm>
+            <a:off x="841248" y="2924937"/>
+            <a:ext cx="347472" cy="347472"/>
+          </a:xfrm>
+          <a:prstGeom prst="rect">
+            <a:avLst/>
+          </a:prstGeom>
+          <a:noFill/>
+          <a:ln/>
+        </p:spPr>
+        <p:txBody>
+          <a:bodyPr wrap="square" lIns="0" tIns="0" rIns="0" bIns="0" rtlCol="0" anchor="ctr"/>
+          <a:lstStyle/>
+          <a:p>
+            <a:pPr algn="ctr" indent="0" marL="0">
+              <a:buNone/>
+            </a:pPr>
+            <a:r>
+              <a:rPr lang="en-US" sz="1100" b="1" dirty="0">
+                <a:solidFill>
+                  <a:srgbClr val="FFFFFF"/>
+                </a:solidFill>
+                <a:latin typeface="Calibri" pitchFamily="34" charset="0"/>
+                <a:ea typeface="Calibri" pitchFamily="34" charset="-122"/>
+                <a:cs typeface="Calibri" pitchFamily="34" charset="-120"/>
+              </a:rPr>
+              <a:t>3</a:t>
+            </a:r>
+            <a:endParaRPr lang="en-US" sz="1100" dirty="0"/>
+          </a:p>
+        </p:txBody>
+      </p:sp>
+      <p:sp>
+        <p:nvSpPr>
+          <p:cNvPr id="17" name="Text 14"/>
+          <p:cNvSpPr/>
+          <p:nvPr/>
+        </p:nvSpPr>
+        <p:spPr>
+          <a:xfrm>
+            <a:off x="1280160" y="2820924"/>
+            <a:ext cx="10033711" cy="555498"/>
+          </a:xfrm>
+          <a:prstGeom prst="rect">
+            <a:avLst/>
+          </a:prstGeom>
+          <a:noFill/>
+          <a:ln/>
+        </p:spPr>
+        <p:txBody>
+          <a:bodyPr wrap="square" lIns="0" tIns="0" rIns="0" bIns="0" rtlCol="0" anchor="ctr"/>
+          <a:lstStyle/>
+          <a:p>
+            <a:pPr indent="0" marL="0">
+              <a:lnSpc>
+                <a:spcPct val="88000"/>
+              </a:lnSpc>
+              <a:buNone/>
+            </a:pPr>
+            <a:r>
+              <a:rPr lang="en-US" sz="900" dirty="0">
+                <a:solidFill>
+                  <a:srgbClr val="5F7183"/>
+                </a:solidFill>
+                <a:latin typeface="Yu Gothic" pitchFamily="34" charset="0"/>
+                <a:ea typeface="Yu Gothic" pitchFamily="34" charset="-122"/>
+                <a:cs typeface="Yu Gothic" pitchFamily="34" charset="-120"/>
+              </a:rPr>
+              <a:t>問3　予定表の同姓は根拠になるか</a:t>
+            </a:r>
+            <a:endParaRPr lang="en-US" sz="900" dirty="0"/>
+          </a:p>
+          <a:p>
+            <a:pPr indent="0" marL="0">
+              <a:lnSpc>
+                <a:spcPct val="88000"/>
+              </a:lnSpc>
+              <a:buNone/>
+            </a:pPr>
+            <a:r>
+              <a:rPr lang="en-US" sz="1200" b="1" dirty="0">
                 <a:solidFill>
                   <a:srgbClr val="1B2733"/>
                 </a:solidFill>
@@ -17140,14 +17530,14 @@
                 <a:ea typeface="Yu Gothic" pitchFamily="34" charset="-122"/>
                 <a:cs typeface="Yu Gothic" pitchFamily="34" charset="-120"/>
               </a:rPr>
-              <a:t>拒否のみで、相手が引き下がれる形が残らない。</a:t>
-            </a:r>
-            <a:endParaRPr lang="en-US" sz="1050" dirty="0"/>
-          </a:p>
-          <a:p>
-            <a:pPr indent="0" marL="0">
-              <a:lnSpc>
-                <a:spcPct val="90000"/>
+              <a:t>ならない。同姓の別人がありうる。断定せず、役員名を聞いて確認に回す。</a:t>
+            </a:r>
+            <a:endParaRPr lang="en-US" sz="900" dirty="0"/>
+          </a:p>
+          <a:p>
+            <a:pPr indent="0" marL="0">
+              <a:lnSpc>
+                <a:spcPct val="88000"/>
               </a:lnSpc>
               <a:buNone/>
             </a:pPr>
@@ -17160,130 +17550,26 @@
                 <a:ea typeface="Calibri" pitchFamily="34" charset="-122"/>
                 <a:cs typeface="Calibri" pitchFamily="34" charset="-120"/>
               </a:rPr>
-              <a:t>A refusal with no way for the person to step back.</a:t>
-            </a:r>
-            <a:endParaRPr lang="en-US" sz="1050" dirty="0"/>
-          </a:p>
-        </p:txBody>
-      </p:sp>
-      <p:sp>
-        <p:nvSpPr>
-          <p:cNvPr id="9" name="Shape 6"/>
-          <p:cNvSpPr/>
-          <p:nvPr/>
-        </p:nvSpPr>
-        <p:spPr>
-          <a:xfrm>
-            <a:off x="6223864" y="1773936"/>
-            <a:ext cx="5327752" cy="1091184"/>
+              <a:t>No. It could be a different person with the same name. Do not conclude — ask the name and verify.</a:t>
+            </a:r>
+            <a:endParaRPr lang="en-US" sz="900" dirty="0"/>
+          </a:p>
+        </p:txBody>
+      </p:sp>
+      <p:sp>
+        <p:nvSpPr>
+          <p:cNvPr id="18" name="Shape 15"/>
+          <p:cNvSpPr/>
+          <p:nvPr/>
+        </p:nvSpPr>
+        <p:spPr>
+          <a:xfrm>
+            <a:off x="640080" y="3541014"/>
+            <a:ext cx="10911535" cy="683514"/>
           </a:xfrm>
           <a:prstGeom prst="roundRect">
             <a:avLst>
-              <a:gd name="adj" fmla="val 3352"/>
-            </a:avLst>
-          </a:prstGeom>
-          <a:solidFill>
-            <a:srgbClr val="E4F4F0"/>
-          </a:solidFill>
-          <a:ln/>
-        </p:spPr>
-      </p:sp>
-      <p:sp>
-        <p:nvSpPr>
-          <p:cNvPr id="10" name="Text 7"/>
-          <p:cNvSpPr/>
-          <p:nvPr/>
-        </p:nvSpPr>
-        <p:spPr>
-          <a:xfrm>
-            <a:off x="6461608" y="1865376"/>
-            <a:ext cx="4852264" cy="908304"/>
-          </a:xfrm>
-          <a:prstGeom prst="rect">
-            <a:avLst/>
-          </a:prstGeom>
-          <a:noFill/>
-          <a:ln/>
-        </p:spPr>
-        <p:txBody>
-          <a:bodyPr wrap="square" lIns="0" tIns="0" rIns="0" bIns="0" rtlCol="0" anchor="t"/>
-          <a:lstStyle/>
-          <a:p>
-            <a:pPr indent="0" marL="0">
-              <a:lnSpc>
-                <a:spcPct val="90000"/>
-              </a:lnSpc>
-              <a:buNone/>
-            </a:pPr>
-            <a:r>
-              <a:rPr lang="en-US" sz="1050" b="1" dirty="0">
-                <a:solidFill>
-                  <a:srgbClr val="0D8A76"/>
-                </a:solidFill>
-                <a:latin typeface="Yu Gothic" pitchFamily="34" charset="0"/>
-                <a:ea typeface="Yu Gothic" pitchFamily="34" charset="-122"/>
-                <a:cs typeface="Yu Gothic" pitchFamily="34" charset="-120"/>
-              </a:rPr>
-              <a:t>B と D</a:t>
-            </a:r>
-            <a:endParaRPr lang="en-US" sz="1050" dirty="0"/>
-          </a:p>
-          <a:p>
-            <a:pPr indent="0" marL="0">
-              <a:lnSpc>
-                <a:spcPct val="90000"/>
-              </a:lnSpc>
-              <a:buNone/>
-            </a:pPr>
-            <a:r>
-              <a:rPr lang="en-US" sz="1050" b="1" dirty="0">
-                <a:solidFill>
-                  <a:srgbClr val="1B2733"/>
-                </a:solidFill>
-                <a:latin typeface="Yu Gothic" pitchFamily="34" charset="0"/>
-                <a:ea typeface="Yu Gothic" pitchFamily="34" charset="-122"/>
-                <a:cs typeface="Yu Gothic" pitchFamily="34" charset="-120"/>
-              </a:rPr>
-              <a:t>B で受け止め、D で具体化する。手続きへの誘導になっている。</a:t>
-            </a:r>
-            <a:endParaRPr lang="en-US" sz="1050" dirty="0"/>
-          </a:p>
-          <a:p>
-            <a:pPr indent="0" marL="0">
-              <a:lnSpc>
-                <a:spcPct val="90000"/>
-              </a:lnSpc>
-              <a:buNone/>
-            </a:pPr>
-            <a:r>
-              <a:rPr lang="en-US" sz="800" i="1" dirty="0">
-                <a:solidFill>
-                  <a:srgbClr val="5F7183"/>
-                </a:solidFill>
-                <a:latin typeface="Calibri" pitchFamily="34" charset="0"/>
-                <a:ea typeface="Calibri" pitchFamily="34" charset="-122"/>
-                <a:cs typeface="Calibri" pitchFamily="34" charset="-120"/>
-              </a:rPr>
-              <a:t>B acknowledges, D makes it concrete. Both route into the procedure.</a:t>
-            </a:r>
-            <a:endParaRPr lang="en-US" sz="1050" dirty="0"/>
-          </a:p>
-        </p:txBody>
-      </p:sp>
-      <p:sp>
-        <p:nvSpPr>
-          <p:cNvPr id="11" name="Shape 8"/>
-          <p:cNvSpPr/>
-          <p:nvPr/>
-        </p:nvSpPr>
-        <p:spPr>
-          <a:xfrm>
-            <a:off x="640080" y="2993136"/>
-            <a:ext cx="5327752" cy="1091184"/>
-          </a:xfrm>
-          <a:prstGeom prst="roundRect">
-            <a:avLst>
-              <a:gd name="adj" fmla="val 3352"/>
+              <a:gd name="adj" fmla="val 5351"/>
             </a:avLst>
           </a:prstGeom>
           <a:solidFill>
@@ -17294,53 +17580,112 @@
       </p:sp>
       <p:sp>
         <p:nvSpPr>
-          <p:cNvPr id="12" name="Text 9"/>
-          <p:cNvSpPr/>
-          <p:nvPr/>
-        </p:nvSpPr>
-        <p:spPr>
-          <a:xfrm>
-            <a:off x="877824" y="3084576"/>
-            <a:ext cx="4852264" cy="908304"/>
-          </a:xfrm>
-          <a:prstGeom prst="rect">
-            <a:avLst/>
-          </a:prstGeom>
-          <a:noFill/>
-          <a:ln/>
-        </p:spPr>
-        <p:txBody>
-          <a:bodyPr wrap="square" lIns="0" tIns="0" rIns="0" bIns="0" rtlCol="0" anchor="t"/>
-          <a:lstStyle/>
-          <a:p>
-            <a:pPr indent="0" marL="0">
-              <a:lnSpc>
-                <a:spcPct val="90000"/>
-              </a:lnSpc>
-              <a:buNone/>
-            </a:pPr>
-            <a:r>
-              <a:rPr lang="en-US" sz="1050" b="1" dirty="0">
-                <a:solidFill>
-                  <a:srgbClr val="093259"/>
-                </a:solidFill>
-                <a:latin typeface="Yu Gothic" pitchFamily="34" charset="0"/>
-                <a:ea typeface="Yu Gothic" pitchFamily="34" charset="-122"/>
-                <a:cs typeface="Yu Gothic" pitchFamily="34" charset="-120"/>
-              </a:rPr>
-              <a:t>C「落ち着いて」</a:t>
-            </a:r>
-            <a:endParaRPr lang="en-US" sz="1050" dirty="0"/>
-          </a:p>
-          <a:p>
-            <a:pPr indent="0" marL="0">
-              <a:lnSpc>
-                <a:spcPct val="90000"/>
-              </a:lnSpc>
-              <a:buNone/>
-            </a:pPr>
-            <a:r>
-              <a:rPr lang="en-US" sz="1050" b="1" dirty="0">
+          <p:cNvPr id="19" name="Shape 16"/>
+          <p:cNvSpPr/>
+          <p:nvPr/>
+        </p:nvSpPr>
+        <p:spPr>
+          <a:xfrm>
+            <a:off x="841248" y="3709035"/>
+            <a:ext cx="347472" cy="347472"/>
+          </a:xfrm>
+          <a:prstGeom prst="ellipse">
+            <a:avLst/>
+          </a:prstGeom>
+          <a:solidFill>
+            <a:srgbClr val="12B198"/>
+          </a:solidFill>
+          <a:ln/>
+        </p:spPr>
+      </p:sp>
+      <p:sp>
+        <p:nvSpPr>
+          <p:cNvPr id="20" name="Text 17"/>
+          <p:cNvSpPr/>
+          <p:nvPr/>
+        </p:nvSpPr>
+        <p:spPr>
+          <a:xfrm>
+            <a:off x="841248" y="3709035"/>
+            <a:ext cx="347472" cy="347472"/>
+          </a:xfrm>
+          <a:prstGeom prst="rect">
+            <a:avLst/>
+          </a:prstGeom>
+          <a:noFill/>
+          <a:ln/>
+        </p:spPr>
+        <p:txBody>
+          <a:bodyPr wrap="square" lIns="0" tIns="0" rIns="0" bIns="0" rtlCol="0" anchor="ctr"/>
+          <a:lstStyle/>
+          <a:p>
+            <a:pPr algn="ctr" indent="0" marL="0">
+              <a:buNone/>
+            </a:pPr>
+            <a:r>
+              <a:rPr lang="en-US" sz="1100" b="1" dirty="0">
+                <a:solidFill>
+                  <a:srgbClr val="FFFFFF"/>
+                </a:solidFill>
+                <a:latin typeface="Calibri" pitchFamily="34" charset="0"/>
+                <a:ea typeface="Calibri" pitchFamily="34" charset="-122"/>
+                <a:cs typeface="Calibri" pitchFamily="34" charset="-120"/>
+              </a:rPr>
+              <a:t>4</a:t>
+            </a:r>
+            <a:endParaRPr lang="en-US" sz="1100" dirty="0"/>
+          </a:p>
+        </p:txBody>
+      </p:sp>
+      <p:sp>
+        <p:nvSpPr>
+          <p:cNvPr id="21" name="Text 18"/>
+          <p:cNvSpPr/>
+          <p:nvPr/>
+        </p:nvSpPr>
+        <p:spPr>
+          <a:xfrm>
+            <a:off x="1280160" y="3605022"/>
+            <a:ext cx="10033711" cy="555498"/>
+          </a:xfrm>
+          <a:prstGeom prst="rect">
+            <a:avLst/>
+          </a:prstGeom>
+          <a:noFill/>
+          <a:ln/>
+        </p:spPr>
+        <p:txBody>
+          <a:bodyPr wrap="square" lIns="0" tIns="0" rIns="0" bIns="0" rtlCol="0" anchor="ctr"/>
+          <a:lstStyle/>
+          <a:p>
+            <a:pPr indent="0" marL="0">
+              <a:lnSpc>
+                <a:spcPct val="88000"/>
+              </a:lnSpc>
+              <a:buNone/>
+            </a:pPr>
+            <a:r>
+              <a:rPr lang="en-US" sz="900" dirty="0">
+                <a:solidFill>
+                  <a:srgbClr val="5F7183"/>
+                </a:solidFill>
+                <a:latin typeface="Yu Gothic" pitchFamily="34" charset="0"/>
+                <a:ea typeface="Yu Gothic" pitchFamily="34" charset="-122"/>
+                <a:cs typeface="Yu Gothic" pitchFamily="34" charset="-120"/>
+              </a:rPr>
+              <a:t>問4　周囲に来訪者がいることは</a:t>
+            </a:r>
+            <a:endParaRPr lang="en-US" sz="900" dirty="0"/>
+          </a:p>
+          <a:p>
+            <a:pPr indent="0" marL="0">
+              <a:lnSpc>
+                <a:spcPct val="88000"/>
+              </a:lnSpc>
+              <a:buNone/>
+            </a:pPr>
+            <a:r>
+              <a:rPr lang="en-US" sz="1200" b="1" dirty="0">
                 <a:solidFill>
                   <a:srgbClr val="1B2733"/>
                 </a:solidFill>
@@ -17348,14 +17693,14 @@
                 <a:ea typeface="Yu Gothic" pitchFamily="34" charset="-122"/>
                 <a:cs typeface="Yu Gothic" pitchFamily="34" charset="-120"/>
               </a:rPr>
-              <a:t>相手の状態を否定している。ほぼ確実に悪化する。</a:t>
-            </a:r>
-            <a:endParaRPr lang="en-US" sz="1050" dirty="0"/>
-          </a:p>
-          <a:p>
-            <a:pPr indent="0" marL="0">
-              <a:lnSpc>
-                <a:spcPct val="90000"/>
+              <a:t>Reputation の問題。声を下げるのはこちら側から。別室や待機場所へ誘導する。</a:t>
+            </a:r>
+            <a:endParaRPr lang="en-US" sz="900" dirty="0"/>
+          </a:p>
+          <a:p>
+            <a:pPr indent="0" marL="0">
+              <a:lnSpc>
+                <a:spcPct val="88000"/>
               </a:lnSpc>
               <a:buNone/>
             </a:pPr>
@@ -17368,83 +17713,97 @@
                 <a:ea typeface="Calibri" pitchFamily="34" charset="-122"/>
                 <a:cs typeface="Calibri" pitchFamily="34" charset="-120"/>
               </a:rPr>
-              <a:t>It denies how they feel, and almost always makes things worse.</a:t>
-            </a:r>
-            <a:endParaRPr lang="en-US" sz="1050" dirty="0"/>
-          </a:p>
-        </p:txBody>
-      </p:sp>
-      <p:sp>
-        <p:nvSpPr>
-          <p:cNvPr id="13" name="Shape 10"/>
-          <p:cNvSpPr/>
-          <p:nvPr/>
-        </p:nvSpPr>
-        <p:spPr>
-          <a:xfrm>
-            <a:off x="6223864" y="2993136"/>
-            <a:ext cx="5327752" cy="1091184"/>
+              <a:t>A Reputation issue. You lower your voice first, and move them to a waiting area.</a:t>
+            </a:r>
+            <a:endParaRPr lang="en-US" sz="900" dirty="0"/>
+          </a:p>
+        </p:txBody>
+      </p:sp>
+      <p:sp>
+        <p:nvSpPr>
+          <p:cNvPr id="22" name="Shape 19"/>
+          <p:cNvSpPr/>
+          <p:nvPr/>
+        </p:nvSpPr>
+        <p:spPr>
+          <a:xfrm>
+            <a:off x="640080" y="4334256"/>
+            <a:ext cx="10911535" cy="420624"/>
           </a:xfrm>
           <a:prstGeom prst="roundRect">
             <a:avLst>
-              <a:gd name="adj" fmla="val 3352"/>
+              <a:gd name="adj" fmla="val 8696"/>
             </a:avLst>
           </a:prstGeom>
           <a:solidFill>
-            <a:srgbClr val="EFF4F8"/>
+            <a:srgbClr val="EEF6FA"/>
           </a:solidFill>
           <a:ln/>
         </p:spPr>
       </p:sp>
       <p:sp>
         <p:nvSpPr>
-          <p:cNvPr id="14" name="Text 11"/>
-          <p:cNvSpPr/>
-          <p:nvPr/>
-        </p:nvSpPr>
-        <p:spPr>
-          <a:xfrm>
-            <a:off x="6461608" y="3084576"/>
-            <a:ext cx="4852264" cy="908304"/>
-          </a:xfrm>
-          <a:prstGeom prst="rect">
-            <a:avLst/>
-          </a:prstGeom>
-          <a:noFill/>
-          <a:ln/>
-        </p:spPr>
-        <p:txBody>
-          <a:bodyPr wrap="square" lIns="0" tIns="0" rIns="0" bIns="0" rtlCol="0" anchor="t"/>
-          <a:lstStyle/>
-          <a:p>
-            <a:pPr indent="0" marL="0">
-              <a:lnSpc>
-                <a:spcPct val="90000"/>
-              </a:lnSpc>
-              <a:buNone/>
-            </a:pPr>
-            <a:r>
-              <a:rPr lang="en-US" sz="1050" b="1" dirty="0">
-                <a:solidFill>
-                  <a:srgbClr val="093259"/>
-                </a:solidFill>
-                <a:latin typeface="Yu Gothic" pitchFamily="34" charset="0"/>
-                <a:ea typeface="Yu Gothic" pitchFamily="34" charset="-122"/>
-                <a:cs typeface="Yu Gothic" pitchFamily="34" charset="-120"/>
-              </a:rPr>
-              <a:t>予定表の同姓</a:t>
-            </a:r>
-            <a:endParaRPr lang="en-US" sz="1050" dirty="0"/>
-          </a:p>
-          <a:p>
-            <a:pPr indent="0" marL="0">
-              <a:lnSpc>
-                <a:spcPct val="90000"/>
-              </a:lnSpc>
-              <a:buNone/>
-            </a:pPr>
-            <a:r>
-              <a:rPr lang="en-US" sz="1050" b="1" dirty="0">
+          <p:cNvPr id="23" name="Text 20"/>
+          <p:cNvSpPr/>
+          <p:nvPr/>
+        </p:nvSpPr>
+        <p:spPr>
+          <a:xfrm>
+            <a:off x="859536" y="4361688"/>
+            <a:ext cx="10472623" cy="365760"/>
+          </a:xfrm>
+          <a:prstGeom prst="rect">
+            <a:avLst/>
+          </a:prstGeom>
+          <a:noFill/>
+          <a:ln/>
+        </p:spPr>
+        <p:txBody>
+          <a:bodyPr wrap="square" lIns="0" tIns="0" rIns="0" bIns="0" rtlCol="0" anchor="ctr"/>
+          <a:lstStyle/>
+          <a:p>
+            <a:pPr indent="0" marL="0">
+              <a:lnSpc>
+                <a:spcPct val="86000"/>
+              </a:lnSpc>
+              <a:buNone/>
+            </a:pPr>
+            <a:r>
+              <a:rPr lang="en-US" sz="850" b="1" dirty="0">
+                <a:solidFill>
+                  <a:srgbClr val="0D8A76"/>
+                </a:solidFill>
+                <a:latin typeface="Yu Gothic" pitchFamily="34" charset="0"/>
+                <a:ea typeface="Yu Gothic" pitchFamily="34" charset="-122"/>
+                <a:cs typeface="Yu Gothic" pitchFamily="34" charset="-120"/>
+              </a:rPr>
+              <a:t>追加付与①　</a:t>
+            </a:r>
+            <a:pPr indent="0" marL="0">
+              <a:lnSpc>
+                <a:spcPct val="86000"/>
+              </a:lnSpc>
+              <a:buNone/>
+            </a:pPr>
+            <a:r>
+              <a:rPr lang="en-US" sz="850" dirty="0">
+                <a:solidFill>
+                  <a:srgbClr val="5F7183"/>
+                </a:solidFill>
+                <a:latin typeface="Yu Gothic" pitchFamily="34" charset="0"/>
+                <a:ea typeface="Yu Gothic" pitchFamily="34" charset="-122"/>
+                <a:cs typeface="Yu Gothic" pitchFamily="34" charset="-120"/>
+              </a:rPr>
+              <a:t>スマートフォンで撮影開始　→　</a:t>
+            </a:r>
+            <a:pPr indent="0" marL="0">
+              <a:lnSpc>
+                <a:spcPct val="86000"/>
+              </a:lnSpc>
+              <a:buNone/>
+            </a:pPr>
+            <a:r>
+              <a:rPr lang="en-US" sz="1100" b="1" dirty="0">
                 <a:solidFill>
                   <a:srgbClr val="1B2733"/>
                 </a:solidFill>
@@ -17452,19 +17811,19 @@
                 <a:ea typeface="Yu Gothic" pitchFamily="34" charset="-122"/>
                 <a:cs typeface="Yu Gothic" pitchFamily="34" charset="-120"/>
               </a:rPr>
-              <a:t>通す根拠にならない。同姓の別人がありうる。断定しない。</a:t>
-            </a:r>
-            <a:endParaRPr lang="en-US" sz="1050" dirty="0"/>
-          </a:p>
-          <a:p>
-            <a:pPr indent="0" marL="0">
-              <a:lnSpc>
-                <a:spcPct val="90000"/>
-              </a:lnSpc>
-              <a:buNone/>
-            </a:pPr>
-            <a:r>
-              <a:rPr lang="en-US" sz="800" i="1" dirty="0">
+              <a:t>対応を変えない。変えたこと自体が後で問題になる。撮影の中止は求めなくてよい。</a:t>
+            </a:r>
+            <a:endParaRPr lang="en-US" sz="850" dirty="0"/>
+          </a:p>
+          <a:p>
+            <a:pPr indent="0" marL="0">
+              <a:lnSpc>
+                <a:spcPct val="86000"/>
+              </a:lnSpc>
+              <a:buNone/>
+            </a:pPr>
+            <a:r>
+              <a:rPr lang="en-US" sz="750" i="1" dirty="0">
                 <a:solidFill>
                   <a:srgbClr val="5F7183"/>
                 </a:solidFill>
@@ -17472,63 +17831,63 @@
                 <a:ea typeface="Calibri" pitchFamily="34" charset="-122"/>
                 <a:cs typeface="Calibri" pitchFamily="34" charset="-120"/>
               </a:rPr>
-              <a:t>Not a basis to admit them. It could be a different person with the same name.</a:t>
-            </a:r>
-            <a:endParaRPr lang="en-US" sz="1050" dirty="0"/>
-          </a:p>
-        </p:txBody>
-      </p:sp>
-      <p:sp>
-        <p:nvSpPr>
-          <p:cNvPr id="15" name="Shape 12"/>
-          <p:cNvSpPr/>
-          <p:nvPr/>
-        </p:nvSpPr>
-        <p:spPr>
-          <a:xfrm>
-            <a:off x="640080" y="4212336"/>
-            <a:ext cx="5327752" cy="1091184"/>
+              <a:t>Do not change your response — changing it is what becomes the problem. You need not ask them to stop.</a:t>
+            </a:r>
+            <a:endParaRPr lang="en-US" sz="850" dirty="0"/>
+          </a:p>
+        </p:txBody>
+      </p:sp>
+      <p:sp>
+        <p:nvSpPr>
+          <p:cNvPr id="24" name="Shape 21"/>
+          <p:cNvSpPr/>
+          <p:nvPr/>
+        </p:nvSpPr>
+        <p:spPr>
+          <a:xfrm>
+            <a:off x="640080" y="4828032"/>
+            <a:ext cx="10911535" cy="420624"/>
           </a:xfrm>
           <a:prstGeom prst="roundRect">
             <a:avLst>
-              <a:gd name="adj" fmla="val 3352"/>
+              <a:gd name="adj" fmla="val 8696"/>
             </a:avLst>
           </a:prstGeom>
           <a:solidFill>
-            <a:srgbClr val="E4F4F0"/>
+            <a:srgbClr val="EEF6FA"/>
           </a:solidFill>
           <a:ln/>
         </p:spPr>
       </p:sp>
       <p:sp>
         <p:nvSpPr>
-          <p:cNvPr id="16" name="Text 13"/>
-          <p:cNvSpPr/>
-          <p:nvPr/>
-        </p:nvSpPr>
-        <p:spPr>
-          <a:xfrm>
-            <a:off x="877824" y="4303776"/>
-            <a:ext cx="4852264" cy="908304"/>
-          </a:xfrm>
-          <a:prstGeom prst="rect">
-            <a:avLst/>
-          </a:prstGeom>
-          <a:noFill/>
-          <a:ln/>
-        </p:spPr>
-        <p:txBody>
-          <a:bodyPr wrap="square" lIns="0" tIns="0" rIns="0" bIns="0" rtlCol="0" anchor="t"/>
-          <a:lstStyle/>
-          <a:p>
-            <a:pPr indent="0" marL="0">
-              <a:lnSpc>
-                <a:spcPct val="90000"/>
-              </a:lnSpc>
-              <a:buNone/>
-            </a:pPr>
-            <a:r>
-              <a:rPr lang="en-US" sz="1050" b="1" dirty="0">
+          <p:cNvPr id="25" name="Text 22"/>
+          <p:cNvSpPr/>
+          <p:nvPr/>
+        </p:nvSpPr>
+        <p:spPr>
+          <a:xfrm>
+            <a:off x="859536" y="4855464"/>
+            <a:ext cx="10472623" cy="365760"/>
+          </a:xfrm>
+          <a:prstGeom prst="rect">
+            <a:avLst/>
+          </a:prstGeom>
+          <a:noFill/>
+          <a:ln/>
+        </p:spPr>
+        <p:txBody>
+          <a:bodyPr wrap="square" lIns="0" tIns="0" rIns="0" bIns="0" rtlCol="0" anchor="ctr"/>
+          <a:lstStyle/>
+          <a:p>
+            <a:pPr indent="0" marL="0">
+              <a:lnSpc>
+                <a:spcPct val="86000"/>
+              </a:lnSpc>
+              <a:buNone/>
+            </a:pPr>
+            <a:r>
+              <a:rPr lang="en-US" sz="850" b="1" dirty="0">
                 <a:solidFill>
                   <a:srgbClr val="0D8A76"/>
                 </a:solidFill>
@@ -17536,19 +17895,33 @@
                 <a:ea typeface="Yu Gothic" pitchFamily="34" charset="-122"/>
                 <a:cs typeface="Yu Gothic" pitchFamily="34" charset="-120"/>
               </a:rPr>
-              <a:t>撮影が始まったら</a:t>
-            </a:r>
-            <a:endParaRPr lang="en-US" sz="1050" dirty="0"/>
-          </a:p>
-          <a:p>
-            <a:pPr indent="0" marL="0">
-              <a:lnSpc>
-                <a:spcPct val="90000"/>
-              </a:lnSpc>
-              <a:buNone/>
-            </a:pPr>
-            <a:r>
-              <a:rPr lang="en-US" sz="1050" b="1" dirty="0">
+              <a:t>追加付与②　</a:t>
+            </a:r>
+            <a:pPr indent="0" marL="0">
+              <a:lnSpc>
+                <a:spcPct val="86000"/>
+              </a:lnSpc>
+              <a:buNone/>
+            </a:pPr>
+            <a:r>
+              <a:rPr lang="en-US" sz="850" dirty="0">
+                <a:solidFill>
+                  <a:srgbClr val="5F7183"/>
+                </a:solidFill>
+                <a:latin typeface="Yu Gothic" pitchFamily="34" charset="0"/>
+                <a:ea typeface="Yu Gothic" pitchFamily="34" charset="-122"/>
+                <a:cs typeface="Yu Gothic" pitchFamily="34" charset="-120"/>
+              </a:rPr>
+              <a:t>別の来訪者が割って入る　→　</a:t>
+            </a:r>
+            <a:pPr indent="0" marL="0">
+              <a:lnSpc>
+                <a:spcPct val="86000"/>
+              </a:lnSpc>
+              <a:buNone/>
+            </a:pPr>
+            <a:r>
+              <a:rPr lang="en-US" sz="1100" b="1" dirty="0">
                 <a:solidFill>
                   <a:srgbClr val="1B2733"/>
                 </a:solidFill>
@@ -17556,19 +17929,19 @@
                 <a:ea typeface="Yu Gothic" pitchFamily="34" charset="-122"/>
                 <a:cs typeface="Yu Gothic" pitchFamily="34" charset="-120"/>
               </a:rPr>
-              <a:t>対応を変えない。変えたこと自体が後で問題になる。</a:t>
-            </a:r>
-            <a:endParaRPr lang="en-US" sz="1050" dirty="0"/>
-          </a:p>
-          <a:p>
-            <a:pPr indent="0" marL="0">
-              <a:lnSpc>
-                <a:spcPct val="90000"/>
-              </a:lnSpc>
-              <a:buNone/>
-            </a:pPr>
-            <a:r>
-              <a:rPr lang="en-US" sz="800" i="1" dirty="0">
+              <a:t>応答しない。会社の見解を作らない。対応相手を増やさない。</a:t>
+            </a:r>
+            <a:endParaRPr lang="en-US" sz="850" dirty="0"/>
+          </a:p>
+          <a:p>
+            <a:pPr indent="0" marL="0">
+              <a:lnSpc>
+                <a:spcPct val="86000"/>
+              </a:lnSpc>
+              <a:buNone/>
+            </a:pPr>
+            <a:r>
+              <a:rPr lang="en-US" sz="750" i="1" dirty="0">
                 <a:solidFill>
                   <a:srgbClr val="5F7183"/>
                 </a:solidFill>
@@ -17576,130 +17949,26 @@
                 <a:ea typeface="Calibri" pitchFamily="34" charset="-122"/>
                 <a:cs typeface="Calibri" pitchFamily="34" charset="-120"/>
               </a:rPr>
-              <a:t>Do not change your response. Changing it is what becomes the problem later.</a:t>
-            </a:r>
-            <a:endParaRPr lang="en-US" sz="1050" dirty="0"/>
-          </a:p>
-        </p:txBody>
-      </p:sp>
-      <p:sp>
-        <p:nvSpPr>
-          <p:cNvPr id="17" name="Shape 14"/>
-          <p:cNvSpPr/>
-          <p:nvPr/>
-        </p:nvSpPr>
-        <p:spPr>
-          <a:xfrm>
-            <a:off x="6223864" y="4212336"/>
-            <a:ext cx="5327752" cy="1091184"/>
+              <a:t>Do not respond. Do not invent a company position. Do not add parties to the exchange.</a:t>
+            </a:r>
+            <a:endParaRPr lang="en-US" sz="850" dirty="0"/>
+          </a:p>
+        </p:txBody>
+      </p:sp>
+      <p:sp>
+        <p:nvSpPr>
+          <p:cNvPr id="26" name="Shape 23"/>
+          <p:cNvSpPr/>
+          <p:nvPr/>
+        </p:nvSpPr>
+        <p:spPr>
+          <a:xfrm>
+            <a:off x="640080" y="5358384"/>
+            <a:ext cx="10911535" cy="457200"/>
           </a:xfrm>
           <a:prstGeom prst="roundRect">
             <a:avLst>
-              <a:gd name="adj" fmla="val 3352"/>
-            </a:avLst>
-          </a:prstGeom>
-          <a:solidFill>
-            <a:srgbClr val="EFF4F8"/>
-          </a:solidFill>
-          <a:ln/>
-        </p:spPr>
-      </p:sp>
-      <p:sp>
-        <p:nvSpPr>
-          <p:cNvPr id="18" name="Text 15"/>
-          <p:cNvSpPr/>
-          <p:nvPr/>
-        </p:nvSpPr>
-        <p:spPr>
-          <a:xfrm>
-            <a:off x="6461608" y="4303776"/>
-            <a:ext cx="4852264" cy="908304"/>
-          </a:xfrm>
-          <a:prstGeom prst="rect">
-            <a:avLst/>
-          </a:prstGeom>
-          <a:noFill/>
-          <a:ln/>
-        </p:spPr>
-        <p:txBody>
-          <a:bodyPr wrap="square" lIns="0" tIns="0" rIns="0" bIns="0" rtlCol="0" anchor="t"/>
-          <a:lstStyle/>
-          <a:p>
-            <a:pPr indent="0" marL="0">
-              <a:lnSpc>
-                <a:spcPct val="90000"/>
-              </a:lnSpc>
-              <a:buNone/>
-            </a:pPr>
-            <a:r>
-              <a:rPr lang="en-US" sz="1050" b="1" dirty="0">
-                <a:solidFill>
-                  <a:srgbClr val="093259"/>
-                </a:solidFill>
-                <a:latin typeface="Yu Gothic" pitchFamily="34" charset="0"/>
-                <a:ea typeface="Yu Gothic" pitchFamily="34" charset="-122"/>
-                <a:cs typeface="Yu Gothic" pitchFamily="34" charset="-120"/>
-              </a:rPr>
-              <a:t>第三者が割って入る</a:t>
-            </a:r>
-            <a:endParaRPr lang="en-US" sz="1050" dirty="0"/>
-          </a:p>
-          <a:p>
-            <a:pPr indent="0" marL="0">
-              <a:lnSpc>
-                <a:spcPct val="90000"/>
-              </a:lnSpc>
-              <a:buNone/>
-            </a:pPr>
-            <a:r>
-              <a:rPr lang="en-US" sz="1050" b="1" dirty="0">
-                <a:solidFill>
-                  <a:srgbClr val="1B2733"/>
-                </a:solidFill>
-                <a:latin typeface="Yu Gothic" pitchFamily="34" charset="0"/>
-                <a:ea typeface="Yu Gothic" pitchFamily="34" charset="-122"/>
-                <a:cs typeface="Yu Gothic" pitchFamily="34" charset="-120"/>
-              </a:rPr>
-              <a:t>応答しない。会社の見解を作らない。対応相手を増やさない。</a:t>
-            </a:r>
-            <a:endParaRPr lang="en-US" sz="1050" dirty="0"/>
-          </a:p>
-          <a:p>
-            <a:pPr indent="0" marL="0">
-              <a:lnSpc>
-                <a:spcPct val="90000"/>
-              </a:lnSpc>
-              <a:buNone/>
-            </a:pPr>
-            <a:r>
-              <a:rPr lang="en-US" sz="800" i="1" dirty="0">
-                <a:solidFill>
-                  <a:srgbClr val="5F7183"/>
-                </a:solidFill>
-                <a:latin typeface="Calibri" pitchFamily="34" charset="0"/>
-                <a:ea typeface="Calibri" pitchFamily="34" charset="-122"/>
-                <a:cs typeface="Calibri" pitchFamily="34" charset="-120"/>
-              </a:rPr>
-              <a:t>Do not respond. Do not invent a company position. Do not add parties.</a:t>
-            </a:r>
-            <a:endParaRPr lang="en-US" sz="1050" dirty="0"/>
-          </a:p>
-        </p:txBody>
-      </p:sp>
-      <p:sp>
-        <p:nvSpPr>
-          <p:cNvPr id="19" name="Shape 16"/>
-          <p:cNvSpPr/>
-          <p:nvPr/>
-        </p:nvSpPr>
-        <p:spPr>
-          <a:xfrm>
-            <a:off x="640080" y="5358384"/>
-            <a:ext cx="10911535" cy="493776"/>
-          </a:xfrm>
-          <a:prstGeom prst="roundRect">
-            <a:avLst>
-              <a:gd name="adj" fmla="val 7407"/>
+              <a:gd name="adj" fmla="val 8000"/>
             </a:avLst>
           </a:prstGeom>
           <a:solidFill>
@@ -17710,14 +17979,14 @@
       </p:sp>
       <p:sp>
         <p:nvSpPr>
-          <p:cNvPr id="20" name="Text 17"/>
-          <p:cNvSpPr/>
-          <p:nvPr/>
-        </p:nvSpPr>
-        <p:spPr>
-          <a:xfrm>
-            <a:off x="877824" y="5404104"/>
-            <a:ext cx="10436047" cy="402336"/>
+          <p:cNvPr id="27" name="Text 24"/>
+          <p:cNvSpPr/>
+          <p:nvPr/>
+        </p:nvSpPr>
+        <p:spPr>
+          <a:xfrm>
+            <a:off x="859536" y="5385816"/>
+            <a:ext cx="10472623" cy="402336"/>
           </a:xfrm>
           <a:prstGeom prst="rect">
             <a:avLst/>
@@ -17736,7 +18005,7 @@
               <a:buNone/>
             </a:pPr>
             <a:r>
-              <a:rPr lang="en-US" sz="950" b="1" dirty="0">
+              <a:rPr lang="en-US" sz="900" b="1" dirty="0">
                 <a:solidFill>
                   <a:srgbClr val="12B198"/>
                 </a:solidFill>
@@ -17753,7 +18022,7 @@
               <a:buNone/>
             </a:pPr>
             <a:r>
-              <a:rPr lang="en-US" sz="1100" b="1" dirty="0">
+              <a:rPr lang="en-US" sz="1050" b="1" dirty="0">
                 <a:solidFill>
                   <a:srgbClr val="FFFFFF"/>
                 </a:solidFill>
@@ -17763,7 +18032,7 @@
               </a:rPr>
               <a:t>ゲートへ向かった場合。追わない。応援要請と通報に切り替える。物理的に止めない。</a:t>
             </a:r>
-            <a:endParaRPr lang="en-US" sz="950" dirty="0"/>
+            <a:endParaRPr lang="en-US" sz="900" dirty="0"/>
           </a:p>
           <a:p>
             <a:pPr indent="0" marL="0">
@@ -17773,7 +18042,7 @@
               <a:buNone/>
             </a:pPr>
             <a:r>
-              <a:rPr lang="en-US" sz="800" i="1" dirty="0">
+              <a:rPr lang="en-US" sz="750" i="1" dirty="0">
                 <a:solidFill>
                   <a:srgbClr val="9FD8CD"/>
                 </a:solidFill>
@@ -17781,15 +18050,15 @@
                 <a:ea typeface="Calibri" pitchFamily="34" charset="-122"/>
                 <a:cs typeface="Calibri" pitchFamily="34" charset="-120"/>
               </a:rPr>
-              <a:t>If they head for the gate: do not follow. Switch to backup and a police call. Do not stop them physically.</a:t>
-            </a:r>
-            <a:endParaRPr lang="en-US" sz="950" dirty="0"/>
-          </a:p>
-        </p:txBody>
-      </p:sp>
-      <p:sp>
-        <p:nvSpPr>
-          <p:cNvPr id="21" name="Text 18"/>
+              <a:t>If they head for the gate: do not follow. Switch to backup and a police call. Never stop them physically.</a:t>
+            </a:r>
+            <a:endParaRPr lang="en-US" sz="900" dirty="0"/>
+          </a:p>
+        </p:txBody>
+      </p:sp>
+      <p:sp>
+        <p:nvSpPr>
+          <p:cNvPr id="28" name="Text 25"/>
           <p:cNvSpPr/>
           <p:nvPr/>
         </p:nvSpPr>
@@ -17868,7 +18137,7 @@
       </p:sp>
       <p:sp>
         <p:nvSpPr>
-          <p:cNvPr id="22" name="Text 19"/>
+          <p:cNvPr id="29" name="Text 26"/>
           <p:cNvSpPr/>
           <p:nvPr/>
         </p:nvSpPr>
@@ -17921,7 +18190,7 @@
       </p:sp>
       <p:sp>
         <p:nvSpPr>
-          <p:cNvPr id="23" name="Text 20"/>
+          <p:cNvPr id="30" name="Text 27"/>
           <p:cNvSpPr/>
           <p:nvPr/>
         </p:nvSpPr>
@@ -17974,7 +18243,7 @@
       </p:sp>
       <p:sp>
         <p:nvSpPr>
-          <p:cNvPr id="24" name="Text 21"/>
+          <p:cNvPr id="31" name="Text 28"/>
           <p:cNvSpPr/>
           <p:nvPr/>
         </p:nvSpPr>

--- a/decks/04_5限_De-escalation.pptx
+++ b/decks/04_5限_De-escalation.pptx
@@ -2432,11 +2432,11 @@
         <p:spPr>
           <a:xfrm>
             <a:off x="640080" y="3081528"/>
-            <a:ext cx="5327752" cy="1074420"/>
+            <a:ext cx="5327752" cy="836676"/>
           </a:xfrm>
           <a:prstGeom prst="roundRect">
             <a:avLst>
-              <a:gd name="adj" fmla="val 3404"/>
+              <a:gd name="adj" fmla="val 4372"/>
             </a:avLst>
           </a:prstGeom>
           <a:solidFill>
@@ -2453,7 +2453,7 @@
         </p:nvSpPr>
         <p:spPr>
           <a:xfrm>
-            <a:off x="804672" y="3472434"/>
+            <a:off x="804672" y="3353562"/>
             <a:ext cx="292608" cy="292608"/>
           </a:xfrm>
           <a:prstGeom prst="ellipse">
@@ -2473,7 +2473,7 @@
         </p:nvSpPr>
         <p:spPr>
           <a:xfrm>
-            <a:off x="804672" y="3472434"/>
+            <a:off x="804672" y="3353562"/>
             <a:ext cx="292608" cy="292608"/>
           </a:xfrm>
           <a:prstGeom prst="rect">
@@ -2513,7 +2513,7 @@
         <p:spPr>
           <a:xfrm>
             <a:off x="1188720" y="3136392"/>
-            <a:ext cx="4596232" cy="964692"/>
+            <a:ext cx="4596232" cy="726948"/>
           </a:xfrm>
           <a:prstGeom prst="rect">
             <a:avLst/>
@@ -2575,11 +2575,11 @@
         <p:spPr>
           <a:xfrm>
             <a:off x="6223864" y="3081528"/>
-            <a:ext cx="5327752" cy="1074420"/>
+            <a:ext cx="5327752" cy="836676"/>
           </a:xfrm>
           <a:prstGeom prst="roundRect">
             <a:avLst>
-              <a:gd name="adj" fmla="val 3404"/>
+              <a:gd name="adj" fmla="val 4372"/>
             </a:avLst>
           </a:prstGeom>
           <a:solidFill>
@@ -2596,7 +2596,7 @@
         </p:nvSpPr>
         <p:spPr>
           <a:xfrm>
-            <a:off x="6388456" y="3472434"/>
+            <a:off x="6388456" y="3353562"/>
             <a:ext cx="292608" cy="292608"/>
           </a:xfrm>
           <a:prstGeom prst="ellipse">
@@ -2616,7 +2616,7 @@
         </p:nvSpPr>
         <p:spPr>
           <a:xfrm>
-            <a:off x="6388456" y="3472434"/>
+            <a:off x="6388456" y="3353562"/>
             <a:ext cx="292608" cy="292608"/>
           </a:xfrm>
           <a:prstGeom prst="rect">
@@ -2656,7 +2656,7 @@
         <p:spPr>
           <a:xfrm>
             <a:off x="6772504" y="3136392"/>
-            <a:ext cx="4596232" cy="964692"/>
+            <a:ext cx="4596232" cy="726948"/>
           </a:xfrm>
           <a:prstGeom prst="rect">
             <a:avLst/>
@@ -2717,12 +2717,12 @@
         </p:nvSpPr>
         <p:spPr>
           <a:xfrm>
-            <a:off x="640080" y="4265676"/>
-            <a:ext cx="5327752" cy="1074420"/>
+            <a:off x="640080" y="4027932"/>
+            <a:ext cx="5327752" cy="836676"/>
           </a:xfrm>
           <a:prstGeom prst="roundRect">
             <a:avLst>
-              <a:gd name="adj" fmla="val 3404"/>
+              <a:gd name="adj" fmla="val 4372"/>
             </a:avLst>
           </a:prstGeom>
           <a:solidFill>
@@ -2739,7 +2739,7 @@
         </p:nvSpPr>
         <p:spPr>
           <a:xfrm>
-            <a:off x="804672" y="4656582"/>
+            <a:off x="804672" y="4299966"/>
             <a:ext cx="292608" cy="292608"/>
           </a:xfrm>
           <a:prstGeom prst="ellipse">
@@ -2759,7 +2759,7 @@
         </p:nvSpPr>
         <p:spPr>
           <a:xfrm>
-            <a:off x="804672" y="4656582"/>
+            <a:off x="804672" y="4299966"/>
             <a:ext cx="292608" cy="292608"/>
           </a:xfrm>
           <a:prstGeom prst="rect">
@@ -2798,8 +2798,8 @@
         </p:nvSpPr>
         <p:spPr>
           <a:xfrm>
-            <a:off x="1188720" y="4320540"/>
-            <a:ext cx="4596232" cy="964692"/>
+            <a:off x="1188720" y="4082796"/>
+            <a:ext cx="4596232" cy="726948"/>
           </a:xfrm>
           <a:prstGeom prst="rect">
             <a:avLst/>
@@ -2860,12 +2860,12 @@
         </p:nvSpPr>
         <p:spPr>
           <a:xfrm>
-            <a:off x="6223864" y="4265676"/>
-            <a:ext cx="5327752" cy="1074420"/>
+            <a:off x="6223864" y="4027932"/>
+            <a:ext cx="5327752" cy="836676"/>
           </a:xfrm>
           <a:prstGeom prst="roundRect">
             <a:avLst>
-              <a:gd name="adj" fmla="val 3404"/>
+              <a:gd name="adj" fmla="val 4372"/>
             </a:avLst>
           </a:prstGeom>
           <a:solidFill>
@@ -2882,7 +2882,7 @@
         </p:nvSpPr>
         <p:spPr>
           <a:xfrm>
-            <a:off x="6388456" y="4656582"/>
+            <a:off x="6388456" y="4299966"/>
             <a:ext cx="292608" cy="292608"/>
           </a:xfrm>
           <a:prstGeom prst="ellipse">
@@ -2902,7 +2902,7 @@
         </p:nvSpPr>
         <p:spPr>
           <a:xfrm>
-            <a:off x="6388456" y="4656582"/>
+            <a:off x="6388456" y="4299966"/>
             <a:ext cx="292608" cy="292608"/>
           </a:xfrm>
           <a:prstGeom prst="rect">
@@ -2941,8 +2941,8 @@
         </p:nvSpPr>
         <p:spPr>
           <a:xfrm>
-            <a:off x="6772504" y="4320540"/>
-            <a:ext cx="4596232" cy="964692"/>
+            <a:off x="6772504" y="4082796"/>
+            <a:ext cx="4596232" cy="726948"/>
           </a:xfrm>
           <a:prstGeom prst="rect">
             <a:avLst/>
@@ -3003,12 +3003,12 @@
         </p:nvSpPr>
         <p:spPr>
           <a:xfrm>
-            <a:off x="640080" y="5394960"/>
-            <a:ext cx="10911535" cy="457200"/>
+            <a:off x="640080" y="4919472"/>
+            <a:ext cx="10911535" cy="420624"/>
           </a:xfrm>
           <a:prstGeom prst="roundRect">
             <a:avLst>
-              <a:gd name="adj" fmla="val 8000"/>
+              <a:gd name="adj" fmla="val 8696"/>
             </a:avLst>
           </a:prstGeom>
           <a:solidFill>
@@ -3025,8 +3025,8 @@
         </p:nvSpPr>
         <p:spPr>
           <a:xfrm>
-            <a:off x="877824" y="5431536"/>
-            <a:ext cx="10436047" cy="384048"/>
+            <a:off x="877824" y="4946904"/>
+            <a:ext cx="10436047" cy="365760"/>
           </a:xfrm>
           <a:prstGeom prst="rect">
             <a:avLst/>
@@ -3053,7 +3053,7 @@
                 <a:ea typeface="Yu Gothic" pitchFamily="34" charset="-122"/>
                 <a:cs typeface="Yu Gothic" pitchFamily="34" charset="-120"/>
               </a:rPr>
-              <a:t>追加付与　</a:t>
+              <a:t>追加付与①　</a:t>
             </a:r>
             <a:pPr indent="0" marL="0">
               <a:lnSpc>
@@ -3098,7 +3098,108 @@
       </p:sp>
       <p:sp>
         <p:nvSpPr>
-          <p:cNvPr id="27" name="Text 24"/>
+          <p:cNvPr id="27" name="Shape 24"/>
+          <p:cNvSpPr/>
+          <p:nvPr/>
+        </p:nvSpPr>
+        <p:spPr>
+          <a:xfrm>
+            <a:off x="640080" y="5394960"/>
+            <a:ext cx="10911535" cy="420624"/>
+          </a:xfrm>
+          <a:prstGeom prst="roundRect">
+            <a:avLst>
+              <a:gd name="adj" fmla="val 8696"/>
+            </a:avLst>
+          </a:prstGeom>
+          <a:solidFill>
+            <a:srgbClr val="E4F4F0"/>
+          </a:solidFill>
+          <a:ln/>
+        </p:spPr>
+      </p:sp>
+      <p:sp>
+        <p:nvSpPr>
+          <p:cNvPr id="28" name="Text 25"/>
+          <p:cNvSpPr/>
+          <p:nvPr/>
+        </p:nvSpPr>
+        <p:spPr>
+          <a:xfrm>
+            <a:off x="877824" y="5422392"/>
+            <a:ext cx="10436047" cy="365760"/>
+          </a:xfrm>
+          <a:prstGeom prst="rect">
+            <a:avLst/>
+          </a:prstGeom>
+          <a:noFill/>
+          <a:ln/>
+        </p:spPr>
+        <p:txBody>
+          <a:bodyPr wrap="square" lIns="0" tIns="0" rIns="0" bIns="0" rtlCol="0" anchor="ctr"/>
+          <a:lstStyle/>
+          <a:p>
+            <a:pPr indent="0" marL="0">
+              <a:lnSpc>
+                <a:spcPct val="86000"/>
+              </a:lnSpc>
+              <a:buNone/>
+            </a:pPr>
+            <a:r>
+              <a:rPr lang="en-US" sz="850" b="1" dirty="0">
+                <a:solidFill>
+                  <a:srgbClr val="0D8A76"/>
+                </a:solidFill>
+                <a:latin typeface="Yu Gothic" pitchFamily="34" charset="0"/>
+                <a:ea typeface="Yu Gothic" pitchFamily="34" charset="-122"/>
+                <a:cs typeface="Yu Gothic" pitchFamily="34" charset="-120"/>
+              </a:rPr>
+              <a:t>追加付与②　</a:t>
+            </a:r>
+            <a:pPr indent="0" marL="0">
+              <a:lnSpc>
+                <a:spcPct val="86000"/>
+              </a:lnSpc>
+              <a:buNone/>
+            </a:pPr>
+            <a:r>
+              <a:rPr lang="en-US" sz="1050" b="1" dirty="0">
+                <a:solidFill>
+                  <a:srgbClr val="1B2733"/>
+                </a:solidFill>
+                <a:latin typeface="Yu Gothic" pitchFamily="34" charset="0"/>
+                <a:ea typeface="Yu Gothic" pitchFamily="34" charset="-122"/>
+                <a:cs typeface="Yu Gothic" pitchFamily="34" charset="-120"/>
+              </a:rPr>
+              <a:t>通りかかった社員の一人が「私が話しますよ」と間に入ろうとした。</a:t>
+            </a:r>
+            <a:endParaRPr lang="en-US" sz="850" dirty="0"/>
+          </a:p>
+          <a:p>
+            <a:pPr indent="0" marL="0">
+              <a:lnSpc>
+                <a:spcPct val="86000"/>
+              </a:lnSpc>
+              <a:buNone/>
+            </a:pPr>
+            <a:r>
+              <a:rPr lang="en-US" sz="750" i="1" dirty="0">
+                <a:solidFill>
+                  <a:srgbClr val="5F7183"/>
+                </a:solidFill>
+                <a:latin typeface="Calibri" pitchFamily="34" charset="0"/>
+                <a:ea typeface="Calibri" pitchFamily="34" charset="-122"/>
+                <a:cs typeface="Calibri" pitchFamily="34" charset="-120"/>
+              </a:rPr>
+              <a:t>A passing employee offers: "Let me talk to them."</a:t>
+            </a:r>
+            <a:endParaRPr lang="en-US" sz="850" dirty="0"/>
+          </a:p>
+        </p:txBody>
+      </p:sp>
+      <p:sp>
+        <p:nvSpPr>
+          <p:cNvPr id="29" name="Text 26"/>
           <p:cNvSpPr/>
           <p:nvPr/>
         </p:nvSpPr>
@@ -3177,7 +3278,7 @@
       </p:sp>
       <p:sp>
         <p:nvSpPr>
-          <p:cNvPr id="28" name="Text 25"/>
+          <p:cNvPr id="30" name="Text 27"/>
           <p:cNvSpPr/>
           <p:nvPr/>
         </p:nvSpPr>
@@ -3230,7 +3331,7 @@
       </p:sp>
       <p:sp>
         <p:nvSpPr>
-          <p:cNvPr id="29" name="Text 26"/>
+          <p:cNvPr id="31" name="Text 28"/>
           <p:cNvSpPr/>
           <p:nvPr/>
         </p:nvSpPr>
@@ -3283,7 +3384,7 @@
       </p:sp>
       <p:sp>
         <p:nvSpPr>
-          <p:cNvPr id="30" name="Text 27"/>
+          <p:cNvPr id="32" name="Text 29"/>
           <p:cNvSpPr/>
           <p:nvPr/>
         </p:nvSpPr>
@@ -16000,11 +16101,11 @@
         <p:spPr>
           <a:xfrm>
             <a:off x="640080" y="3081528"/>
-            <a:ext cx="5327752" cy="1074420"/>
+            <a:ext cx="5327752" cy="836676"/>
           </a:xfrm>
           <a:prstGeom prst="roundRect">
             <a:avLst>
-              <a:gd name="adj" fmla="val 3404"/>
+              <a:gd name="adj" fmla="val 4372"/>
             </a:avLst>
           </a:prstGeom>
           <a:solidFill>
@@ -16021,7 +16122,7 @@
         </p:nvSpPr>
         <p:spPr>
           <a:xfrm>
-            <a:off x="804672" y="3472434"/>
+            <a:off x="804672" y="3353562"/>
             <a:ext cx="292608" cy="292608"/>
           </a:xfrm>
           <a:prstGeom prst="ellipse">
@@ -16041,7 +16142,7 @@
         </p:nvSpPr>
         <p:spPr>
           <a:xfrm>
-            <a:off x="804672" y="3472434"/>
+            <a:off x="804672" y="3353562"/>
             <a:ext cx="292608" cy="292608"/>
           </a:xfrm>
           <a:prstGeom prst="rect">
@@ -16081,7 +16182,7 @@
         <p:spPr>
           <a:xfrm>
             <a:off x="1188720" y="3136392"/>
-            <a:ext cx="4596232" cy="964692"/>
+            <a:ext cx="4596232" cy="726948"/>
           </a:xfrm>
           <a:prstGeom prst="rect">
             <a:avLst/>
@@ -16143,11 +16244,11 @@
         <p:spPr>
           <a:xfrm>
             <a:off x="6223864" y="3081528"/>
-            <a:ext cx="5327752" cy="1074420"/>
+            <a:ext cx="5327752" cy="836676"/>
           </a:xfrm>
           <a:prstGeom prst="roundRect">
             <a:avLst>
-              <a:gd name="adj" fmla="val 3404"/>
+              <a:gd name="adj" fmla="val 4372"/>
             </a:avLst>
           </a:prstGeom>
           <a:solidFill>
@@ -16164,7 +16265,7 @@
         </p:nvSpPr>
         <p:spPr>
           <a:xfrm>
-            <a:off x="6388456" y="3472434"/>
+            <a:off x="6388456" y="3353562"/>
             <a:ext cx="292608" cy="292608"/>
           </a:xfrm>
           <a:prstGeom prst="ellipse">
@@ -16184,7 +16285,7 @@
         </p:nvSpPr>
         <p:spPr>
           <a:xfrm>
-            <a:off x="6388456" y="3472434"/>
+            <a:off x="6388456" y="3353562"/>
             <a:ext cx="292608" cy="292608"/>
           </a:xfrm>
           <a:prstGeom prst="rect">
@@ -16224,7 +16325,7 @@
         <p:spPr>
           <a:xfrm>
             <a:off x="6772504" y="3136392"/>
-            <a:ext cx="4596232" cy="964692"/>
+            <a:ext cx="4596232" cy="726948"/>
           </a:xfrm>
           <a:prstGeom prst="rect">
             <a:avLst/>
@@ -16285,12 +16386,12 @@
         </p:nvSpPr>
         <p:spPr>
           <a:xfrm>
-            <a:off x="640080" y="4265676"/>
-            <a:ext cx="5327752" cy="1074420"/>
+            <a:off x="640080" y="4027932"/>
+            <a:ext cx="5327752" cy="836676"/>
           </a:xfrm>
           <a:prstGeom prst="roundRect">
             <a:avLst>
-              <a:gd name="adj" fmla="val 3404"/>
+              <a:gd name="adj" fmla="val 4372"/>
             </a:avLst>
           </a:prstGeom>
           <a:solidFill>
@@ -16307,7 +16408,7 @@
         </p:nvSpPr>
         <p:spPr>
           <a:xfrm>
-            <a:off x="804672" y="4656582"/>
+            <a:off x="804672" y="4299966"/>
             <a:ext cx="292608" cy="292608"/>
           </a:xfrm>
           <a:prstGeom prst="ellipse">
@@ -16327,7 +16428,7 @@
         </p:nvSpPr>
         <p:spPr>
           <a:xfrm>
-            <a:off x="804672" y="4656582"/>
+            <a:off x="804672" y="4299966"/>
             <a:ext cx="292608" cy="292608"/>
           </a:xfrm>
           <a:prstGeom prst="rect">
@@ -16366,8 +16467,8 @@
         </p:nvSpPr>
         <p:spPr>
           <a:xfrm>
-            <a:off x="1188720" y="4320540"/>
-            <a:ext cx="4596232" cy="964692"/>
+            <a:off x="1188720" y="4082796"/>
+            <a:ext cx="4596232" cy="726948"/>
           </a:xfrm>
           <a:prstGeom prst="rect">
             <a:avLst/>
@@ -16428,12 +16529,12 @@
         </p:nvSpPr>
         <p:spPr>
           <a:xfrm>
-            <a:off x="6223864" y="4265676"/>
-            <a:ext cx="5327752" cy="1074420"/>
+            <a:off x="6223864" y="4027932"/>
+            <a:ext cx="5327752" cy="836676"/>
           </a:xfrm>
           <a:prstGeom prst="roundRect">
             <a:avLst>
-              <a:gd name="adj" fmla="val 3404"/>
+              <a:gd name="adj" fmla="val 4372"/>
             </a:avLst>
           </a:prstGeom>
           <a:solidFill>
@@ -16450,7 +16551,7 @@
         </p:nvSpPr>
         <p:spPr>
           <a:xfrm>
-            <a:off x="6388456" y="4656582"/>
+            <a:off x="6388456" y="4299966"/>
             <a:ext cx="292608" cy="292608"/>
           </a:xfrm>
           <a:prstGeom prst="ellipse">
@@ -16470,7 +16571,7 @@
         </p:nvSpPr>
         <p:spPr>
           <a:xfrm>
-            <a:off x="6388456" y="4656582"/>
+            <a:off x="6388456" y="4299966"/>
             <a:ext cx="292608" cy="292608"/>
           </a:xfrm>
           <a:prstGeom prst="rect">
@@ -16509,8 +16610,8 @@
         </p:nvSpPr>
         <p:spPr>
           <a:xfrm>
-            <a:off x="6772504" y="4320540"/>
-            <a:ext cx="4596232" cy="964692"/>
+            <a:off x="6772504" y="4082796"/>
+            <a:ext cx="4596232" cy="726948"/>
           </a:xfrm>
           <a:prstGeom prst="rect">
             <a:avLst/>
@@ -16571,12 +16672,12 @@
         </p:nvSpPr>
         <p:spPr>
           <a:xfrm>
-            <a:off x="640080" y="5394960"/>
-            <a:ext cx="10911535" cy="457200"/>
+            <a:off x="640080" y="4919472"/>
+            <a:ext cx="10911535" cy="420624"/>
           </a:xfrm>
           <a:prstGeom prst="roundRect">
             <a:avLst>
-              <a:gd name="adj" fmla="val 8000"/>
+              <a:gd name="adj" fmla="val 8696"/>
             </a:avLst>
           </a:prstGeom>
           <a:solidFill>
@@ -16593,8 +16694,8 @@
         </p:nvSpPr>
         <p:spPr>
           <a:xfrm>
-            <a:off x="877824" y="5431536"/>
-            <a:ext cx="10436047" cy="384048"/>
+            <a:off x="877824" y="4946904"/>
+            <a:ext cx="10436047" cy="365760"/>
           </a:xfrm>
           <a:prstGeom prst="rect">
             <a:avLst/>
@@ -16621,7 +16722,7 @@
                 <a:ea typeface="Yu Gothic" pitchFamily="34" charset="-122"/>
                 <a:cs typeface="Yu Gothic" pitchFamily="34" charset="-120"/>
               </a:rPr>
-              <a:t>追加付与　</a:t>
+              <a:t>追加付与①　</a:t>
             </a:r>
             <a:pPr indent="0" marL="0">
               <a:lnSpc>
@@ -16666,7 +16767,108 @@
       </p:sp>
       <p:sp>
         <p:nvSpPr>
-          <p:cNvPr id="27" name="Text 24"/>
+          <p:cNvPr id="27" name="Shape 24"/>
+          <p:cNvSpPr/>
+          <p:nvPr/>
+        </p:nvSpPr>
+        <p:spPr>
+          <a:xfrm>
+            <a:off x="640080" y="5394960"/>
+            <a:ext cx="10911535" cy="420624"/>
+          </a:xfrm>
+          <a:prstGeom prst="roundRect">
+            <a:avLst>
+              <a:gd name="adj" fmla="val 8696"/>
+            </a:avLst>
+          </a:prstGeom>
+          <a:solidFill>
+            <a:srgbClr val="E4F4F0"/>
+          </a:solidFill>
+          <a:ln/>
+        </p:spPr>
+      </p:sp>
+      <p:sp>
+        <p:nvSpPr>
+          <p:cNvPr id="28" name="Text 25"/>
+          <p:cNvSpPr/>
+          <p:nvPr/>
+        </p:nvSpPr>
+        <p:spPr>
+          <a:xfrm>
+            <a:off x="877824" y="5422392"/>
+            <a:ext cx="10436047" cy="365760"/>
+          </a:xfrm>
+          <a:prstGeom prst="rect">
+            <a:avLst/>
+          </a:prstGeom>
+          <a:noFill/>
+          <a:ln/>
+        </p:spPr>
+        <p:txBody>
+          <a:bodyPr wrap="square" lIns="0" tIns="0" rIns="0" bIns="0" rtlCol="0" anchor="ctr"/>
+          <a:lstStyle/>
+          <a:p>
+            <a:pPr indent="0" marL="0">
+              <a:lnSpc>
+                <a:spcPct val="86000"/>
+              </a:lnSpc>
+              <a:buNone/>
+            </a:pPr>
+            <a:r>
+              <a:rPr lang="en-US" sz="850" b="1" dirty="0">
+                <a:solidFill>
+                  <a:srgbClr val="0D8A76"/>
+                </a:solidFill>
+                <a:latin typeface="Yu Gothic" pitchFamily="34" charset="0"/>
+                <a:ea typeface="Yu Gothic" pitchFamily="34" charset="-122"/>
+                <a:cs typeface="Yu Gothic" pitchFamily="34" charset="-120"/>
+              </a:rPr>
+              <a:t>追加付与②　</a:t>
+            </a:r>
+            <a:pPr indent="0" marL="0">
+              <a:lnSpc>
+                <a:spcPct val="86000"/>
+              </a:lnSpc>
+              <a:buNone/>
+            </a:pPr>
+            <a:r>
+              <a:rPr lang="en-US" sz="1050" b="1" dirty="0">
+                <a:solidFill>
+                  <a:srgbClr val="1B2733"/>
+                </a:solidFill>
+                <a:latin typeface="Yu Gothic" pitchFamily="34" charset="0"/>
+                <a:ea typeface="Yu Gothic" pitchFamily="34" charset="-122"/>
+                <a:cs typeface="Yu Gothic" pitchFamily="34" charset="-120"/>
+              </a:rPr>
+              <a:t>別の来訪者が横から「その対応はおかしいんじゃないの」と割って入った。</a:t>
+            </a:r>
+            <a:endParaRPr lang="en-US" sz="850" dirty="0"/>
+          </a:p>
+          <a:p>
+            <a:pPr indent="0" marL="0">
+              <a:lnSpc>
+                <a:spcPct val="86000"/>
+              </a:lnSpc>
+              <a:buNone/>
+            </a:pPr>
+            <a:r>
+              <a:rPr lang="en-US" sz="750" i="1" dirty="0">
+                <a:solidFill>
+                  <a:srgbClr val="5F7183"/>
+                </a:solidFill>
+                <a:latin typeface="Calibri" pitchFamily="34" charset="0"/>
+                <a:ea typeface="Calibri" pitchFamily="34" charset="-122"/>
+                <a:cs typeface="Calibri" pitchFamily="34" charset="-120"/>
+              </a:rPr>
+              <a:t>Another visitor cuts in: "Isn't that the wrong way to handle it?"</a:t>
+            </a:r>
+            <a:endParaRPr lang="en-US" sz="850" dirty="0"/>
+          </a:p>
+        </p:txBody>
+      </p:sp>
+      <p:sp>
+        <p:nvSpPr>
+          <p:cNvPr id="29" name="Text 26"/>
           <p:cNvSpPr/>
           <p:nvPr/>
         </p:nvSpPr>
@@ -16745,7 +16947,7 @@
       </p:sp>
       <p:sp>
         <p:nvSpPr>
-          <p:cNvPr id="28" name="Text 25"/>
+          <p:cNvPr id="30" name="Text 27"/>
           <p:cNvSpPr/>
           <p:nvPr/>
         </p:nvSpPr>
@@ -16798,7 +17000,7 @@
       </p:sp>
       <p:sp>
         <p:nvSpPr>
-          <p:cNvPr id="29" name="Text 26"/>
+          <p:cNvPr id="31" name="Text 28"/>
           <p:cNvSpPr/>
           <p:nvPr/>
         </p:nvSpPr>
@@ -16851,7 +17053,7 @@
       </p:sp>
       <p:sp>
         <p:nvSpPr>
-          <p:cNvPr id="30" name="Text 27"/>
+          <p:cNvPr id="32" name="Text 29"/>
           <p:cNvSpPr/>
           <p:nvPr/>
         </p:nvSpPr>

--- a/decks/04_5限_De-escalation.pptx
+++ b/decks/04_5限_De-escalation.pptx
@@ -1853,7 +1853,7 @@
               <a:buNone/>
             </a:pPr>
             <a:r>
-              <a:rPr lang="en-US" sz="1050" i="1" dirty="0">
+              <a:rPr lang="en-US" sz="1050" dirty="0">
                 <a:solidFill>
                   <a:srgbClr val="A9BCCE"/>
                 </a:solidFill>
@@ -2030,7 +2030,7 @@
               <a:buNone/>
             </a:pPr>
             <a:r>
-              <a:rPr lang="en-US" sz="1000" i="1" dirty="0">
+              <a:rPr lang="en-US" sz="1000" dirty="0">
                 <a:solidFill>
                   <a:srgbClr val="8EA3B7"/>
                 </a:solidFill>
@@ -2108,8 +2108,8 @@
         </p:nvSpPr>
         <p:spPr>
           <a:xfrm>
-            <a:off x="640080" y="384048"/>
-            <a:ext cx="8982151" cy="768096"/>
+            <a:off x="640080" y="365760"/>
+            <a:ext cx="8982151" cy="749808"/>
           </a:xfrm>
           <a:prstGeom prst="rect">
             <a:avLst/>
@@ -2148,7 +2148,7 @@
               <a:buNone/>
             </a:pPr>
             <a:r>
-              <a:rPr lang="en-US" sz="1100" i="1" dirty="0">
+              <a:rPr lang="en-US" sz="1100" dirty="0">
                 <a:solidFill>
                   <a:srgbClr val="12B198"/>
                 </a:solidFill>
@@ -2170,7 +2170,7 @@
         </p:nvSpPr>
         <p:spPr>
           <a:xfrm>
-            <a:off x="9686239" y="438912"/>
+            <a:off x="9686239" y="420624"/>
             <a:ext cx="932688" cy="310896"/>
           </a:xfrm>
           <a:prstGeom prst="roundRect">
@@ -2192,7 +2192,7 @@
         </p:nvSpPr>
         <p:spPr>
           <a:xfrm>
-            <a:off x="9686239" y="438912"/>
+            <a:off x="9686239" y="420624"/>
             <a:ext cx="932688" cy="310896"/>
           </a:xfrm>
           <a:prstGeom prst="rect">
@@ -2231,7 +2231,7 @@
         </p:nvSpPr>
         <p:spPr>
           <a:xfrm>
-            <a:off x="640080" y="1188720"/>
+            <a:off x="640080" y="1115568"/>
             <a:ext cx="10911535" cy="1124712"/>
           </a:xfrm>
           <a:prstGeom prst="roundRect">
@@ -2253,7 +2253,7 @@
         </p:nvSpPr>
         <p:spPr>
           <a:xfrm>
-            <a:off x="950976" y="1316736"/>
+            <a:off x="950976" y="1243584"/>
             <a:ext cx="10289743" cy="868680"/>
           </a:xfrm>
           <a:prstGeom prst="rect">
@@ -2330,9 +2330,9 @@
               <a:buNone/>
             </a:pPr>
             <a:r>
-              <a:rPr lang="en-US" sz="800" i="1" dirty="0">
-                <a:solidFill>
-                  <a:srgbClr val="9FD8CD"/>
+              <a:rPr lang="en-US" sz="1000" dirty="0">
+                <a:solidFill>
+                  <a:srgbClr val="DCEFEB"/>
                 </a:solidFill>
                 <a:latin typeface="Calibri" pitchFamily="34" charset="0"/>
                 <a:ea typeface="Calibri" pitchFamily="34" charset="-122"/>
@@ -2352,7 +2352,7 @@
         </p:nvSpPr>
         <p:spPr>
           <a:xfrm>
-            <a:off x="640080" y="2459736"/>
+            <a:off x="640080" y="2386584"/>
             <a:ext cx="10911535" cy="566928"/>
           </a:xfrm>
           <a:prstGeom prst="rect">
@@ -2409,9 +2409,9 @@
               <a:buNone/>
             </a:pPr>
             <a:r>
-              <a:rPr lang="en-US" sz="850" i="1" dirty="0">
-                <a:solidFill>
-                  <a:srgbClr val="5F7183"/>
+              <a:rPr lang="en-US" sz="1050" dirty="0">
+                <a:solidFill>
+                  <a:srgbClr val="1B2733"/>
                 </a:solidFill>
                 <a:latin typeface="Calibri" pitchFamily="34" charset="0"/>
                 <a:ea typeface="Calibri" pitchFamily="34" charset="-122"/>
@@ -2431,12 +2431,12 @@
         </p:nvSpPr>
         <p:spPr>
           <a:xfrm>
-            <a:off x="640080" y="3081528"/>
-            <a:ext cx="5327752" cy="836676"/>
+            <a:off x="640080" y="3008376"/>
+            <a:ext cx="5327752" cy="900684"/>
           </a:xfrm>
           <a:prstGeom prst="roundRect">
             <a:avLst>
-              <a:gd name="adj" fmla="val 4372"/>
+              <a:gd name="adj" fmla="val 4061"/>
             </a:avLst>
           </a:prstGeom>
           <a:solidFill>
@@ -2453,7 +2453,7 @@
         </p:nvSpPr>
         <p:spPr>
           <a:xfrm>
-            <a:off x="804672" y="3353562"/>
+            <a:off x="804672" y="3312414"/>
             <a:ext cx="292608" cy="292608"/>
           </a:xfrm>
           <a:prstGeom prst="ellipse">
@@ -2473,7 +2473,7 @@
         </p:nvSpPr>
         <p:spPr>
           <a:xfrm>
-            <a:off x="804672" y="3353562"/>
+            <a:off x="804672" y="3312414"/>
             <a:ext cx="292608" cy="292608"/>
           </a:xfrm>
           <a:prstGeom prst="rect">
@@ -2512,8 +2512,8 @@
         </p:nvSpPr>
         <p:spPr>
           <a:xfrm>
-            <a:off x="1188720" y="3136392"/>
-            <a:ext cx="4596232" cy="726948"/>
+            <a:off x="1188720" y="3063240"/>
+            <a:ext cx="4596232" cy="790956"/>
           </a:xfrm>
           <a:prstGeom prst="rect">
             <a:avLst/>
@@ -2552,9 +2552,9 @@
               <a:buNone/>
             </a:pPr>
             <a:r>
-              <a:rPr lang="en-US" sz="800" i="1" dirty="0">
-                <a:solidFill>
-                  <a:srgbClr val="5F7183"/>
+              <a:rPr lang="en-US" sz="1050" dirty="0">
+                <a:solidFill>
+                  <a:srgbClr val="1B2733"/>
                 </a:solidFill>
                 <a:latin typeface="Calibri" pitchFamily="34" charset="0"/>
                 <a:ea typeface="Calibri" pitchFamily="34" charset="-122"/>
@@ -2574,12 +2574,12 @@
         </p:nvSpPr>
         <p:spPr>
           <a:xfrm>
-            <a:off x="6223864" y="3081528"/>
-            <a:ext cx="5327752" cy="836676"/>
+            <a:off x="6223864" y="3008376"/>
+            <a:ext cx="5327752" cy="900684"/>
           </a:xfrm>
           <a:prstGeom prst="roundRect">
             <a:avLst>
-              <a:gd name="adj" fmla="val 4372"/>
+              <a:gd name="adj" fmla="val 4061"/>
             </a:avLst>
           </a:prstGeom>
           <a:solidFill>
@@ -2596,7 +2596,7 @@
         </p:nvSpPr>
         <p:spPr>
           <a:xfrm>
-            <a:off x="6388456" y="3353562"/>
+            <a:off x="6388456" y="3312414"/>
             <a:ext cx="292608" cy="292608"/>
           </a:xfrm>
           <a:prstGeom prst="ellipse">
@@ -2616,7 +2616,7 @@
         </p:nvSpPr>
         <p:spPr>
           <a:xfrm>
-            <a:off x="6388456" y="3353562"/>
+            <a:off x="6388456" y="3312414"/>
             <a:ext cx="292608" cy="292608"/>
           </a:xfrm>
           <a:prstGeom prst="rect">
@@ -2655,8 +2655,8 @@
         </p:nvSpPr>
         <p:spPr>
           <a:xfrm>
-            <a:off x="6772504" y="3136392"/>
-            <a:ext cx="4596232" cy="726948"/>
+            <a:off x="6772504" y="3063240"/>
+            <a:ext cx="4596232" cy="790956"/>
           </a:xfrm>
           <a:prstGeom prst="rect">
             <a:avLst/>
@@ -2695,9 +2695,9 @@
               <a:buNone/>
             </a:pPr>
             <a:r>
-              <a:rPr lang="en-US" sz="800" i="1" dirty="0">
-                <a:solidFill>
-                  <a:srgbClr val="5F7183"/>
+              <a:rPr lang="en-US" sz="1050" dirty="0">
+                <a:solidFill>
+                  <a:srgbClr val="1B2733"/>
                 </a:solidFill>
                 <a:latin typeface="Calibri" pitchFamily="34" charset="0"/>
                 <a:ea typeface="Calibri" pitchFamily="34" charset="-122"/>
@@ -2717,12 +2717,12 @@
         </p:nvSpPr>
         <p:spPr>
           <a:xfrm>
-            <a:off x="640080" y="4027932"/>
-            <a:ext cx="5327752" cy="836676"/>
+            <a:off x="640080" y="4018788"/>
+            <a:ext cx="5327752" cy="900684"/>
           </a:xfrm>
           <a:prstGeom prst="roundRect">
             <a:avLst>
-              <a:gd name="adj" fmla="val 4372"/>
+              <a:gd name="adj" fmla="val 4061"/>
             </a:avLst>
           </a:prstGeom>
           <a:solidFill>
@@ -2739,7 +2739,7 @@
         </p:nvSpPr>
         <p:spPr>
           <a:xfrm>
-            <a:off x="804672" y="4299966"/>
+            <a:off x="804672" y="4322826"/>
             <a:ext cx="292608" cy="292608"/>
           </a:xfrm>
           <a:prstGeom prst="ellipse">
@@ -2759,7 +2759,7 @@
         </p:nvSpPr>
         <p:spPr>
           <a:xfrm>
-            <a:off x="804672" y="4299966"/>
+            <a:off x="804672" y="4322826"/>
             <a:ext cx="292608" cy="292608"/>
           </a:xfrm>
           <a:prstGeom prst="rect">
@@ -2798,8 +2798,8 @@
         </p:nvSpPr>
         <p:spPr>
           <a:xfrm>
-            <a:off x="1188720" y="4082796"/>
-            <a:ext cx="4596232" cy="726948"/>
+            <a:off x="1188720" y="4073652"/>
+            <a:ext cx="4596232" cy="790956"/>
           </a:xfrm>
           <a:prstGeom prst="rect">
             <a:avLst/>
@@ -2838,9 +2838,9 @@
               <a:buNone/>
             </a:pPr>
             <a:r>
-              <a:rPr lang="en-US" sz="800" i="1" dirty="0">
-                <a:solidFill>
-                  <a:srgbClr val="5F7183"/>
+              <a:rPr lang="en-US" sz="1050" dirty="0">
+                <a:solidFill>
+                  <a:srgbClr val="1B2733"/>
                 </a:solidFill>
                 <a:latin typeface="Calibri" pitchFamily="34" charset="0"/>
                 <a:ea typeface="Calibri" pitchFamily="34" charset="-122"/>
@@ -2860,12 +2860,12 @@
         </p:nvSpPr>
         <p:spPr>
           <a:xfrm>
-            <a:off x="6223864" y="4027932"/>
-            <a:ext cx="5327752" cy="836676"/>
+            <a:off x="6223864" y="4018788"/>
+            <a:ext cx="5327752" cy="900684"/>
           </a:xfrm>
           <a:prstGeom prst="roundRect">
             <a:avLst>
-              <a:gd name="adj" fmla="val 4372"/>
+              <a:gd name="adj" fmla="val 4061"/>
             </a:avLst>
           </a:prstGeom>
           <a:solidFill>
@@ -2882,7 +2882,7 @@
         </p:nvSpPr>
         <p:spPr>
           <a:xfrm>
-            <a:off x="6388456" y="4299966"/>
+            <a:off x="6388456" y="4322826"/>
             <a:ext cx="292608" cy="292608"/>
           </a:xfrm>
           <a:prstGeom prst="ellipse">
@@ -2902,7 +2902,7 @@
         </p:nvSpPr>
         <p:spPr>
           <a:xfrm>
-            <a:off x="6388456" y="4299966"/>
+            <a:off x="6388456" y="4322826"/>
             <a:ext cx="292608" cy="292608"/>
           </a:xfrm>
           <a:prstGeom prst="rect">
@@ -2941,8 +2941,8 @@
         </p:nvSpPr>
         <p:spPr>
           <a:xfrm>
-            <a:off x="6772504" y="4082796"/>
-            <a:ext cx="4596232" cy="726948"/>
+            <a:off x="6772504" y="4073652"/>
+            <a:ext cx="4596232" cy="790956"/>
           </a:xfrm>
           <a:prstGeom prst="rect">
             <a:avLst/>
@@ -2981,9 +2981,9 @@
               <a:buNone/>
             </a:pPr>
             <a:r>
-              <a:rPr lang="en-US" sz="800" i="1" dirty="0">
-                <a:solidFill>
-                  <a:srgbClr val="5F7183"/>
+              <a:rPr lang="en-US" sz="1050" dirty="0">
+                <a:solidFill>
+                  <a:srgbClr val="1B2733"/>
                 </a:solidFill>
                 <a:latin typeface="Calibri" pitchFamily="34" charset="0"/>
                 <a:ea typeface="Calibri" pitchFamily="34" charset="-122"/>
@@ -3003,7 +3003,7 @@
         </p:nvSpPr>
         <p:spPr>
           <a:xfrm>
-            <a:off x="640080" y="4919472"/>
+            <a:off x="640080" y="4974336"/>
             <a:ext cx="10911535" cy="420624"/>
           </a:xfrm>
           <a:prstGeom prst="roundRect">
@@ -3025,7 +3025,7 @@
         </p:nvSpPr>
         <p:spPr>
           <a:xfrm>
-            <a:off x="877824" y="4946904"/>
+            <a:off x="877824" y="5001768"/>
             <a:ext cx="10436047" cy="365760"/>
           </a:xfrm>
           <a:prstGeom prst="rect">
@@ -3082,9 +3082,9 @@
               <a:buNone/>
             </a:pPr>
             <a:r>
-              <a:rPr lang="en-US" sz="750" i="1" dirty="0">
-                <a:solidFill>
-                  <a:srgbClr val="5F7183"/>
+              <a:rPr lang="en-US" sz="950" dirty="0">
+                <a:solidFill>
+                  <a:srgbClr val="1B2733"/>
                 </a:solidFill>
                 <a:latin typeface="Calibri" pitchFamily="34" charset="0"/>
                 <a:ea typeface="Calibri" pitchFamily="34" charset="-122"/>
@@ -3104,7 +3104,7 @@
         </p:nvSpPr>
         <p:spPr>
           <a:xfrm>
-            <a:off x="640080" y="5394960"/>
+            <a:off x="640080" y="5449824"/>
             <a:ext cx="10911535" cy="420624"/>
           </a:xfrm>
           <a:prstGeom prst="roundRect">
@@ -3126,7 +3126,7 @@
         </p:nvSpPr>
         <p:spPr>
           <a:xfrm>
-            <a:off x="877824" y="5422392"/>
+            <a:off x="877824" y="5477256"/>
             <a:ext cx="10436047" cy="365760"/>
           </a:xfrm>
           <a:prstGeom prst="rect">
@@ -3183,7 +3183,86 @@
               <a:buNone/>
             </a:pPr>
             <a:r>
-              <a:rPr lang="en-US" sz="750" i="1" dirty="0">
+              <a:rPr lang="en-US" sz="950" dirty="0">
+                <a:solidFill>
+                  <a:srgbClr val="1B2733"/>
+                </a:solidFill>
+                <a:latin typeface="Calibri" pitchFamily="34" charset="0"/>
+                <a:ea typeface="Calibri" pitchFamily="34" charset="-122"/>
+                <a:cs typeface="Calibri" pitchFamily="34" charset="-120"/>
+              </a:rPr>
+              <a:t>A passing employee offers: "Let me talk to them."</a:t>
+            </a:r>
+            <a:endParaRPr lang="en-US" sz="850" dirty="0"/>
+          </a:p>
+        </p:txBody>
+      </p:sp>
+      <p:sp>
+        <p:nvSpPr>
+          <p:cNvPr id="29" name="Text 26"/>
+          <p:cNvSpPr/>
+          <p:nvPr/>
+        </p:nvSpPr>
+        <p:spPr>
+          <a:xfrm>
+            <a:off x="640080" y="5961888"/>
+            <a:ext cx="10911535" cy="292608"/>
+          </a:xfrm>
+          <a:prstGeom prst="rect">
+            <a:avLst/>
+          </a:prstGeom>
+          <a:noFill/>
+          <a:ln/>
+        </p:spPr>
+        <p:txBody>
+          <a:bodyPr wrap="square" lIns="0" tIns="0" rIns="0" bIns="0" rtlCol="0" anchor="t"/>
+          <a:lstStyle/>
+          <a:p>
+            <a:pPr indent="0" marL="0">
+              <a:lnSpc>
+                <a:spcPct val="88000"/>
+              </a:lnSpc>
+              <a:buNone/>
+            </a:pPr>
+            <a:r>
+              <a:rPr lang="en-US" sz="900" b="1" dirty="0">
+                <a:solidFill>
+                  <a:srgbClr val="0D8A76"/>
+                </a:solidFill>
+                <a:latin typeface="Yu Gothic" pitchFamily="34" charset="0"/>
+                <a:ea typeface="Yu Gothic" pitchFamily="34" charset="-122"/>
+                <a:cs typeface="Yu Gothic" pitchFamily="34" charset="-120"/>
+              </a:rPr>
+              <a:t>Site SOP優先　</a:t>
+            </a:r>
+            <a:pPr indent="0" marL="0">
+              <a:lnSpc>
+                <a:spcPct val="88000"/>
+              </a:lnSpc>
+              <a:buNone/>
+            </a:pPr>
+            <a:r>
+              <a:rPr lang="en-US" sz="900" dirty="0">
+                <a:solidFill>
+                  <a:srgbClr val="1B2733"/>
+                </a:solidFill>
+                <a:latin typeface="Yu Gothic" pitchFamily="34" charset="0"/>
+                <a:ea typeface="Yu Gothic" pitchFamily="34" charset="-122"/>
+                <a:cs typeface="Yu Gothic" pitchFamily="34" charset="-120"/>
+              </a:rPr>
+              <a:t>退去要請の判断者、人事の緊急連絡先、通報の基準は現場ごとに異なる。Site SOPによる。</a:t>
+            </a:r>
+            <a:endParaRPr lang="en-US" sz="900" dirty="0"/>
+          </a:p>
+          <a:p>
+            <a:pPr indent="0" marL="0">
+              <a:lnSpc>
+                <a:spcPct val="88000"/>
+              </a:lnSpc>
+              <a:buNone/>
+            </a:pPr>
+            <a:r>
+              <a:rPr lang="en-US" sz="800" i="1" dirty="0">
                 <a:solidFill>
                   <a:srgbClr val="5F7183"/>
                 </a:solidFill>
@@ -3191,22 +3270,22 @@
                 <a:ea typeface="Calibri" pitchFamily="34" charset="-122"/>
                 <a:cs typeface="Calibri" pitchFamily="34" charset="-120"/>
               </a:rPr>
-              <a:t>A passing employee offers: "Let me talk to them."</a:t>
-            </a:r>
-            <a:endParaRPr lang="en-US" sz="850" dirty="0"/>
-          </a:p>
-        </p:txBody>
-      </p:sp>
-      <p:sp>
-        <p:nvSpPr>
-          <p:cNvPr id="29" name="Text 26"/>
-          <p:cNvSpPr/>
-          <p:nvPr/>
-        </p:nvSpPr>
-        <p:spPr>
-          <a:xfrm>
-            <a:off x="640080" y="5907024"/>
-            <a:ext cx="10911535" cy="310896"/>
+              <a:t>Who decides on a removal request, HR emergency contacts, and when to call police differ by site.</a:t>
+            </a:r>
+            <a:endParaRPr lang="en-US" sz="900" dirty="0"/>
+          </a:p>
+        </p:txBody>
+      </p:sp>
+      <p:sp>
+        <p:nvSpPr>
+          <p:cNvPr id="30" name="Text 27"/>
+          <p:cNvSpPr/>
+          <p:nvPr/>
+        </p:nvSpPr>
+        <p:spPr>
+          <a:xfrm>
+            <a:off x="640080" y="6272784"/>
+            <a:ext cx="9905695" cy="219456"/>
           </a:xfrm>
           <a:prstGeom prst="rect">
             <a:avLst/>
@@ -3219,167 +3298,88 @@
           <a:lstStyle/>
           <a:p>
             <a:pPr indent="0" marL="0">
-              <a:lnSpc>
-                <a:spcPct val="88000"/>
-              </a:lnSpc>
-              <a:buNone/>
-            </a:pPr>
-            <a:r>
-              <a:rPr lang="en-US" sz="900" b="1" dirty="0">
-                <a:solidFill>
-                  <a:srgbClr val="0D8A76"/>
-                </a:solidFill>
-                <a:latin typeface="Yu Gothic" pitchFamily="34" charset="0"/>
-                <a:ea typeface="Yu Gothic" pitchFamily="34" charset="-122"/>
-                <a:cs typeface="Yu Gothic" pitchFamily="34" charset="-120"/>
-              </a:rPr>
-              <a:t>Site SOP優先　</a:t>
-            </a:r>
-            <a:pPr indent="0" marL="0">
-              <a:lnSpc>
-                <a:spcPct val="88000"/>
-              </a:lnSpc>
+              <a:buNone/>
+            </a:pPr>
+            <a:r>
+              <a:rPr lang="en-US" sz="750" b="1" dirty="0">
+                <a:solidFill>
+                  <a:srgbClr val="D6E0E9"/>
+                </a:solidFill>
+                <a:latin typeface="Yu Gothic" pitchFamily="34" charset="0"/>
+                <a:ea typeface="Yu Gothic" pitchFamily="34" charset="-122"/>
+                <a:cs typeface="Yu Gothic" pitchFamily="34" charset="-120"/>
+              </a:rPr>
+              <a:t>ソース　</a:t>
+            </a:r>
+            <a:pPr indent="0" marL="0">
+              <a:buNone/>
+            </a:pPr>
+            <a:r>
+              <a:rPr lang="en-US" sz="750" dirty="0">
+                <a:solidFill>
+                  <a:srgbClr val="5F7183"/>
+                </a:solidFill>
+                <a:latin typeface="Yu Gothic" pitchFamily="34" charset="0"/>
+                <a:ea typeface="Yu Gothic" pitchFamily="34" charset="-122"/>
+                <a:cs typeface="Yu Gothic" pitchFamily="34" charset="-120"/>
+              </a:rPr>
+              <a:t>警備業法、刑法、警察庁「警備員教育」</a:t>
+            </a:r>
+            <a:endParaRPr lang="en-US" sz="750" dirty="0"/>
+          </a:p>
+        </p:txBody>
+      </p:sp>
+      <p:sp>
+        <p:nvSpPr>
+          <p:cNvPr id="31" name="Text 28"/>
+          <p:cNvSpPr/>
+          <p:nvPr/>
+        </p:nvSpPr>
+        <p:spPr>
+          <a:xfrm>
+            <a:off x="640080" y="6492240"/>
+            <a:ext cx="8778240" cy="292608"/>
+          </a:xfrm>
+          <a:prstGeom prst="rect">
+            <a:avLst/>
+          </a:prstGeom>
+          <a:noFill/>
+          <a:ln/>
+        </p:spPr>
+        <p:txBody>
+          <a:bodyPr wrap="square" lIns="0" tIns="0" rIns="0" bIns="0" rtlCol="0" anchor="ctr"/>
+          <a:lstStyle/>
+          <a:p>
+            <a:pPr indent="0" marL="0">
               <a:buNone/>
             </a:pPr>
             <a:r>
               <a:rPr lang="en-US" sz="900" dirty="0">
                 <a:solidFill>
-                  <a:srgbClr val="1B2733"/>
-                </a:solidFill>
-                <a:latin typeface="Yu Gothic" pitchFamily="34" charset="0"/>
-                <a:ea typeface="Yu Gothic" pitchFamily="34" charset="-122"/>
-                <a:cs typeface="Yu Gothic" pitchFamily="34" charset="-120"/>
-              </a:rPr>
-              <a:t>退去要請の判断者、人事の緊急連絡先、通報の基準は現場ごとに異なる。Site SOPによる。</a:t>
+                  <a:srgbClr val="5F7183"/>
+                </a:solidFill>
+                <a:latin typeface="Yu Gothic" pitchFamily="34" charset="0"/>
+                <a:ea typeface="Yu Gothic" pitchFamily="34" charset="-122"/>
+                <a:cs typeface="Yu Gothic" pitchFamily="34" charset="-120"/>
+              </a:rPr>
+              <a:t>第5時限｜業務別教育2 その他当該警備業務を適正に実施するため必要な知識及び技能  </a:t>
+            </a:r>
+            <a:pPr indent="0" marL="0">
+              <a:buNone/>
+            </a:pPr>
+            <a:r>
+              <a:rPr lang="en-US" sz="850" i="1" dirty="0">
+                <a:solidFill>
+                  <a:srgbClr val="D6E0E9"/>
+                </a:solidFill>
+                <a:latin typeface="Calibri" pitchFamily="34" charset="0"/>
+                <a:ea typeface="Calibri" pitchFamily="34" charset="-122"/>
+                <a:cs typeface="Calibri" pitchFamily="34" charset="-120"/>
+              </a:rPr>
+              <a:t>Period 5 | Task-Specific Training 2 — De-escalation</a:t>
             </a:r>
             <a:endParaRPr lang="en-US" sz="900" dirty="0"/>
           </a:p>
-          <a:p>
-            <a:pPr indent="0" marL="0">
-              <a:lnSpc>
-                <a:spcPct val="88000"/>
-              </a:lnSpc>
-              <a:buNone/>
-            </a:pPr>
-            <a:r>
-              <a:rPr lang="en-US" sz="750" i="1" dirty="0">
-                <a:solidFill>
-                  <a:srgbClr val="5F7183"/>
-                </a:solidFill>
-                <a:latin typeface="Calibri" pitchFamily="34" charset="0"/>
-                <a:ea typeface="Calibri" pitchFamily="34" charset="-122"/>
-                <a:cs typeface="Calibri" pitchFamily="34" charset="-120"/>
-              </a:rPr>
-              <a:t>Who decides on a removal request, HR emergency contacts, and when to call police differ by site.</a:t>
-            </a:r>
-            <a:endParaRPr lang="en-US" sz="900" dirty="0"/>
-          </a:p>
-        </p:txBody>
-      </p:sp>
-      <p:sp>
-        <p:nvSpPr>
-          <p:cNvPr id="30" name="Text 27"/>
-          <p:cNvSpPr/>
-          <p:nvPr/>
-        </p:nvSpPr>
-        <p:spPr>
-          <a:xfrm>
-            <a:off x="640080" y="6272784"/>
-            <a:ext cx="9905695" cy="237744"/>
-          </a:xfrm>
-          <a:prstGeom prst="rect">
-            <a:avLst/>
-          </a:prstGeom>
-          <a:noFill/>
-          <a:ln/>
-        </p:spPr>
-        <p:txBody>
-          <a:bodyPr wrap="square" lIns="0" tIns="0" rIns="0" bIns="0" rtlCol="0" anchor="t"/>
-          <a:lstStyle/>
-          <a:p>
-            <a:pPr indent="0" marL="0">
-              <a:buNone/>
-            </a:pPr>
-            <a:r>
-              <a:rPr lang="en-US" sz="750" b="1" dirty="0">
-                <a:solidFill>
-                  <a:srgbClr val="D6E0E9"/>
-                </a:solidFill>
-                <a:latin typeface="Yu Gothic" pitchFamily="34" charset="0"/>
-                <a:ea typeface="Yu Gothic" pitchFamily="34" charset="-122"/>
-                <a:cs typeface="Yu Gothic" pitchFamily="34" charset="-120"/>
-              </a:rPr>
-              <a:t>ソース　</a:t>
-            </a:r>
-            <a:pPr indent="0" marL="0">
-              <a:buNone/>
-            </a:pPr>
-            <a:r>
-              <a:rPr lang="en-US" sz="750" dirty="0">
-                <a:solidFill>
-                  <a:srgbClr val="5F7183"/>
-                </a:solidFill>
-                <a:latin typeface="Yu Gothic" pitchFamily="34" charset="0"/>
-                <a:ea typeface="Yu Gothic" pitchFamily="34" charset="-122"/>
-                <a:cs typeface="Yu Gothic" pitchFamily="34" charset="-120"/>
-              </a:rPr>
-              <a:t>警備業法、刑法、警察庁「警備員教育」</a:t>
-            </a:r>
-            <a:endParaRPr lang="en-US" sz="750" dirty="0"/>
-          </a:p>
-        </p:txBody>
-      </p:sp>
-      <p:sp>
-        <p:nvSpPr>
-          <p:cNvPr id="31" name="Text 28"/>
-          <p:cNvSpPr/>
-          <p:nvPr/>
-        </p:nvSpPr>
-        <p:spPr>
-          <a:xfrm>
-            <a:off x="640080" y="6382512"/>
-            <a:ext cx="8778240" cy="292608"/>
-          </a:xfrm>
-          <a:prstGeom prst="rect">
-            <a:avLst/>
-          </a:prstGeom>
-          <a:noFill/>
-          <a:ln/>
-        </p:spPr>
-        <p:txBody>
-          <a:bodyPr wrap="square" lIns="0" tIns="0" rIns="0" bIns="0" rtlCol="0" anchor="ctr"/>
-          <a:lstStyle/>
-          <a:p>
-            <a:pPr indent="0" marL="0">
-              <a:buNone/>
-            </a:pPr>
-            <a:r>
-              <a:rPr lang="en-US" sz="900" dirty="0">
-                <a:solidFill>
-                  <a:srgbClr val="5F7183"/>
-                </a:solidFill>
-                <a:latin typeface="Yu Gothic" pitchFamily="34" charset="0"/>
-                <a:ea typeface="Yu Gothic" pitchFamily="34" charset="-122"/>
-                <a:cs typeface="Yu Gothic" pitchFamily="34" charset="-120"/>
-              </a:rPr>
-              <a:t>第5時限｜業務別教育2 その他当該警備業務を適正に実施するため必要な知識及び技能  </a:t>
-            </a:r>
-            <a:pPr indent="0" marL="0">
-              <a:buNone/>
-            </a:pPr>
-            <a:r>
-              <a:rPr lang="en-US" sz="850" i="1" dirty="0">
-                <a:solidFill>
-                  <a:srgbClr val="D6E0E9"/>
-                </a:solidFill>
-                <a:latin typeface="Calibri" pitchFamily="34" charset="0"/>
-                <a:ea typeface="Calibri" pitchFamily="34" charset="-122"/>
-                <a:cs typeface="Calibri" pitchFamily="34" charset="-120"/>
-              </a:rPr>
-              <a:t>Period 5 | Task-Specific Training 2 — De-escalation</a:t>
-            </a:r>
-            <a:endParaRPr lang="en-US" sz="900" dirty="0"/>
-          </a:p>
         </p:txBody>
       </p:sp>
       <p:sp>
@@ -3390,7 +3390,7 @@
         </p:nvSpPr>
         <p:spPr>
           <a:xfrm>
-            <a:off x="10637215" y="6382512"/>
+            <a:off x="10637215" y="6492240"/>
             <a:ext cx="914400" cy="292608"/>
           </a:xfrm>
           <a:prstGeom prst="rect">
@@ -3485,8 +3485,8 @@
         </p:nvSpPr>
         <p:spPr>
           <a:xfrm>
-            <a:off x="640080" y="384048"/>
-            <a:ext cx="8982151" cy="768096"/>
+            <a:off x="640080" y="365760"/>
+            <a:ext cx="8982151" cy="749808"/>
           </a:xfrm>
           <a:prstGeom prst="rect">
             <a:avLst/>
@@ -3525,7 +3525,7 @@
               <a:buNone/>
             </a:pPr>
             <a:r>
-              <a:rPr lang="en-US" sz="1100" i="1" dirty="0">
+              <a:rPr lang="en-US" sz="1100" dirty="0">
                 <a:solidFill>
                   <a:srgbClr val="12B198"/>
                 </a:solidFill>
@@ -3547,7 +3547,7 @@
         </p:nvSpPr>
         <p:spPr>
           <a:xfrm>
-            <a:off x="9686239" y="438912"/>
+            <a:off x="9686239" y="420624"/>
             <a:ext cx="932688" cy="310896"/>
           </a:xfrm>
           <a:prstGeom prst="roundRect">
@@ -3569,7 +3569,7 @@
         </p:nvSpPr>
         <p:spPr>
           <a:xfrm>
-            <a:off x="9686239" y="438912"/>
+            <a:off x="9686239" y="420624"/>
             <a:ext cx="932688" cy="310896"/>
           </a:xfrm>
           <a:prstGeom prst="rect">
@@ -3608,12 +3608,12 @@
         </p:nvSpPr>
         <p:spPr>
           <a:xfrm>
-            <a:off x="640080" y="1188720"/>
-            <a:ext cx="10911535" cy="825246"/>
+            <a:off x="640080" y="1115568"/>
+            <a:ext cx="10911535" cy="857250"/>
           </a:xfrm>
           <a:prstGeom prst="roundRect">
             <a:avLst>
-              <a:gd name="adj" fmla="val 4432"/>
+              <a:gd name="adj" fmla="val 4267"/>
             </a:avLst>
           </a:prstGeom>
           <a:solidFill>
@@ -3630,7 +3630,7 @@
         </p:nvSpPr>
         <p:spPr>
           <a:xfrm>
-            <a:off x="841248" y="1427607"/>
+            <a:off x="841248" y="1370457"/>
             <a:ext cx="347472" cy="347472"/>
           </a:xfrm>
           <a:prstGeom prst="ellipse">
@@ -3650,7 +3650,7 @@
         </p:nvSpPr>
         <p:spPr>
           <a:xfrm>
-            <a:off x="841248" y="1427607"/>
+            <a:off x="841248" y="1370457"/>
             <a:ext cx="347472" cy="347472"/>
           </a:xfrm>
           <a:prstGeom prst="rect">
@@ -3689,8 +3689,8 @@
         </p:nvSpPr>
         <p:spPr>
           <a:xfrm>
-            <a:off x="1280160" y="1252728"/>
-            <a:ext cx="10033711" cy="697230"/>
+            <a:off x="1280160" y="1179576"/>
+            <a:ext cx="10033711" cy="729234"/>
           </a:xfrm>
           <a:prstGeom prst="rect">
             <a:avLst/>
@@ -3709,7 +3709,7 @@
               <a:buNone/>
             </a:pPr>
             <a:r>
-              <a:rPr lang="en-US" sz="900" dirty="0">
+              <a:rPr lang="en-US" sz="950" dirty="0">
                 <a:solidFill>
                   <a:srgbClr val="5F7183"/>
                 </a:solidFill>
@@ -3719,7 +3719,7 @@
               </a:rPr>
               <a:t>問1　退去を求める根拠、誰の意思か</a:t>
             </a:r>
-            <a:endParaRPr lang="en-US" sz="900" dirty="0"/>
+            <a:endParaRPr lang="en-US" sz="950" dirty="0"/>
           </a:p>
           <a:p>
             <a:pPr indent="0" marL="0">
@@ -3739,7 +3739,7 @@
               </a:rPr>
               <a:t>管理権者の意思に基づく。警備員が自分の判断で命じるものではない。</a:t>
             </a:r>
-            <a:endParaRPr lang="en-US" sz="900" dirty="0"/>
+            <a:endParaRPr lang="en-US" sz="950" dirty="0"/>
           </a:p>
           <a:p>
             <a:pPr indent="0" marL="0">
@@ -3749,9 +3749,9 @@
               <a:buNone/>
             </a:pPr>
             <a:r>
-              <a:rPr lang="en-US" sz="800" i="1" dirty="0">
-                <a:solidFill>
-                  <a:srgbClr val="5F7183"/>
+              <a:rPr lang="en-US" sz="1100" dirty="0">
+                <a:solidFill>
+                  <a:srgbClr val="1B2733"/>
                 </a:solidFill>
                 <a:latin typeface="Calibri" pitchFamily="34" charset="0"/>
                 <a:ea typeface="Calibri" pitchFamily="34" charset="-122"/>
@@ -3759,7 +3759,7 @@
               </a:rPr>
               <a:t>It rests on the site authority's intent. A guard does not order it on their own judgement.</a:t>
             </a:r>
-            <a:endParaRPr lang="en-US" sz="900" dirty="0"/>
+            <a:endParaRPr lang="en-US" sz="950" dirty="0"/>
           </a:p>
         </p:txBody>
       </p:sp>
@@ -3771,12 +3771,12 @@
         </p:nvSpPr>
         <p:spPr>
           <a:xfrm>
-            <a:off x="640080" y="2114550"/>
-            <a:ext cx="10911535" cy="825246"/>
+            <a:off x="640080" y="2073402"/>
+            <a:ext cx="10911535" cy="857250"/>
           </a:xfrm>
           <a:prstGeom prst="roundRect">
             <a:avLst>
-              <a:gd name="adj" fmla="val 4432"/>
+              <a:gd name="adj" fmla="val 4267"/>
             </a:avLst>
           </a:prstGeom>
           <a:solidFill>
@@ -3793,7 +3793,7 @@
         </p:nvSpPr>
         <p:spPr>
           <a:xfrm>
-            <a:off x="841248" y="2353437"/>
+            <a:off x="841248" y="2328291"/>
             <a:ext cx="347472" cy="347472"/>
           </a:xfrm>
           <a:prstGeom prst="ellipse">
@@ -3813,7 +3813,7 @@
         </p:nvSpPr>
         <p:spPr>
           <a:xfrm>
-            <a:off x="841248" y="2353437"/>
+            <a:off x="841248" y="2328291"/>
             <a:ext cx="347472" cy="347472"/>
           </a:xfrm>
           <a:prstGeom prst="rect">
@@ -3852,8 +3852,8 @@
         </p:nvSpPr>
         <p:spPr>
           <a:xfrm>
-            <a:off x="1280160" y="2178558"/>
-            <a:ext cx="10033711" cy="697230"/>
+            <a:off x="1280160" y="2137410"/>
+            <a:ext cx="10033711" cy="729234"/>
           </a:xfrm>
           <a:prstGeom prst="rect">
             <a:avLst/>
@@ -3872,7 +3872,7 @@
               <a:buNone/>
             </a:pPr>
             <a:r>
-              <a:rPr lang="en-US" sz="900" dirty="0">
+              <a:rPr lang="en-US" sz="950" dirty="0">
                 <a:solidFill>
                   <a:srgbClr val="5F7183"/>
                 </a:solidFill>
@@ -3882,7 +3882,7 @@
               </a:rPr>
               <a:t>問2　有形力を用いてよいか</a:t>
             </a:r>
-            <a:endParaRPr lang="en-US" sz="900" dirty="0"/>
+            <a:endParaRPr lang="en-US" sz="950" dirty="0"/>
           </a:p>
           <a:p>
             <a:pPr indent="0" marL="0">
@@ -3902,7 +3902,7 @@
               </a:rPr>
               <a:t>用いてはいけない。引き起こす、腕をつかむは暴行になりうる。座り込みには使えない。</a:t>
             </a:r>
-            <a:endParaRPr lang="en-US" sz="900" dirty="0"/>
+            <a:endParaRPr lang="en-US" sz="950" dirty="0"/>
           </a:p>
           <a:p>
             <a:pPr indent="0" marL="0">
@@ -3912,9 +3912,9 @@
               <a:buNone/>
             </a:pPr>
             <a:r>
-              <a:rPr lang="en-US" sz="800" i="1" dirty="0">
-                <a:solidFill>
-                  <a:srgbClr val="5F7183"/>
+              <a:rPr lang="en-US" sz="1100" dirty="0">
+                <a:solidFill>
+                  <a:srgbClr val="1B2733"/>
                 </a:solidFill>
                 <a:latin typeface="Calibri" pitchFamily="34" charset="0"/>
                 <a:ea typeface="Calibri" pitchFamily="34" charset="-122"/>
@@ -3922,7 +3922,7 @@
               </a:rPr>
               <a:t>No. Pulling them up or grabbing an arm can be assault. Force is not available here.</a:t>
             </a:r>
-            <a:endParaRPr lang="en-US" sz="900" dirty="0"/>
+            <a:endParaRPr lang="en-US" sz="950" dirty="0"/>
           </a:p>
         </p:txBody>
       </p:sp>
@@ -3934,12 +3934,12 @@
         </p:nvSpPr>
         <p:spPr>
           <a:xfrm>
-            <a:off x="640080" y="3040380"/>
-            <a:ext cx="10911535" cy="825246"/>
+            <a:off x="640080" y="3031236"/>
+            <a:ext cx="10911535" cy="857250"/>
           </a:xfrm>
           <a:prstGeom prst="roundRect">
             <a:avLst>
-              <a:gd name="adj" fmla="val 4432"/>
+              <a:gd name="adj" fmla="val 4267"/>
             </a:avLst>
           </a:prstGeom>
           <a:solidFill>
@@ -3956,7 +3956,7 @@
         </p:nvSpPr>
         <p:spPr>
           <a:xfrm>
-            <a:off x="841248" y="3279267"/>
+            <a:off x="841248" y="3286125"/>
             <a:ext cx="347472" cy="347472"/>
           </a:xfrm>
           <a:prstGeom prst="ellipse">
@@ -3976,7 +3976,7 @@
         </p:nvSpPr>
         <p:spPr>
           <a:xfrm>
-            <a:off x="841248" y="3279267"/>
+            <a:off x="841248" y="3286125"/>
             <a:ext cx="347472" cy="347472"/>
           </a:xfrm>
           <a:prstGeom prst="rect">
@@ -4015,8 +4015,8 @@
         </p:nvSpPr>
         <p:spPr>
           <a:xfrm>
-            <a:off x="1280160" y="3104388"/>
-            <a:ext cx="10033711" cy="697230"/>
+            <a:off x="1280160" y="3095244"/>
+            <a:ext cx="10033711" cy="729234"/>
           </a:xfrm>
           <a:prstGeom prst="rect">
             <a:avLst/>
@@ -4035,7 +4035,7 @@
               <a:buNone/>
             </a:pPr>
             <a:r>
-              <a:rPr lang="en-US" sz="900" dirty="0">
+              <a:rPr lang="en-US" sz="950" dirty="0">
                 <a:solidFill>
                   <a:srgbClr val="5F7183"/>
                 </a:solidFill>
@@ -4045,7 +4045,7 @@
               </a:rPr>
               <a:t>問3　見ている社員がいることは</a:t>
             </a:r>
-            <a:endParaRPr lang="en-US" sz="900" dirty="0"/>
+            <a:endParaRPr lang="en-US" sz="950" dirty="0"/>
           </a:p>
           <a:p>
             <a:pPr indent="0" marL="0">
@@ -4065,7 +4065,7 @@
               </a:rPr>
               <a:t>People（安全）と Reputation（対応の質）が同時に問われる。滞留させない。</a:t>
             </a:r>
-            <a:endParaRPr lang="en-US" sz="900" dirty="0"/>
+            <a:endParaRPr lang="en-US" sz="950" dirty="0"/>
           </a:p>
           <a:p>
             <a:pPr indent="0" marL="0">
@@ -4075,9 +4075,9 @@
               <a:buNone/>
             </a:pPr>
             <a:r>
-              <a:rPr lang="en-US" sz="800" i="1" dirty="0">
-                <a:solidFill>
-                  <a:srgbClr val="5F7183"/>
+              <a:rPr lang="en-US" sz="1100" dirty="0">
+                <a:solidFill>
+                  <a:srgbClr val="1B2733"/>
                 </a:solidFill>
                 <a:latin typeface="Calibri" pitchFamily="34" charset="0"/>
                 <a:ea typeface="Calibri" pitchFamily="34" charset="-122"/>
@@ -4085,7 +4085,7 @@
               </a:rPr>
               <a:t>Both People and Reputation are in play. Do not let a crowd form.</a:t>
             </a:r>
-            <a:endParaRPr lang="en-US" sz="900" dirty="0"/>
+            <a:endParaRPr lang="en-US" sz="950" dirty="0"/>
           </a:p>
         </p:txBody>
       </p:sp>
@@ -4097,12 +4097,12 @@
         </p:nvSpPr>
         <p:spPr>
           <a:xfrm>
-            <a:off x="640080" y="3966210"/>
-            <a:ext cx="10911535" cy="825246"/>
+            <a:off x="640080" y="3989070"/>
+            <a:ext cx="10911535" cy="857250"/>
           </a:xfrm>
           <a:prstGeom prst="roundRect">
             <a:avLst>
-              <a:gd name="adj" fmla="val 4432"/>
+              <a:gd name="adj" fmla="val 4267"/>
             </a:avLst>
           </a:prstGeom>
           <a:solidFill>
@@ -4119,7 +4119,7 @@
         </p:nvSpPr>
         <p:spPr>
           <a:xfrm>
-            <a:off x="841248" y="4205097"/>
+            <a:off x="841248" y="4243959"/>
             <a:ext cx="347472" cy="347472"/>
           </a:xfrm>
           <a:prstGeom prst="ellipse">
@@ -4139,7 +4139,7 @@
         </p:nvSpPr>
         <p:spPr>
           <a:xfrm>
-            <a:off x="841248" y="4205097"/>
+            <a:off x="841248" y="4243959"/>
             <a:ext cx="347472" cy="347472"/>
           </a:xfrm>
           <a:prstGeom prst="rect">
@@ -4178,8 +4178,8 @@
         </p:nvSpPr>
         <p:spPr>
           <a:xfrm>
-            <a:off x="1280160" y="4030218"/>
-            <a:ext cx="10033711" cy="697230"/>
+            <a:off x="1280160" y="4053078"/>
+            <a:ext cx="10033711" cy="729234"/>
           </a:xfrm>
           <a:prstGeom prst="rect">
             <a:avLst/>
@@ -4198,7 +4198,7 @@
               <a:buNone/>
             </a:pPr>
             <a:r>
-              <a:rPr lang="en-US" sz="900" dirty="0">
+              <a:rPr lang="en-US" sz="950" dirty="0">
                 <a:solidFill>
                   <a:srgbClr val="5F7183"/>
                 </a:solidFill>
@@ -4208,7 +4208,7 @@
               </a:rPr>
               <a:t>問4　いつ通報するか、何を伝えるか</a:t>
             </a:r>
-            <a:endParaRPr lang="en-US" sz="900" dirty="0"/>
+            <a:endParaRPr lang="en-US" sz="950" dirty="0"/>
           </a:p>
           <a:p>
             <a:pPr indent="0" marL="0">
@@ -4228,7 +4228,7 @@
               </a:rPr>
               <a:t>退去要請が明確に拒否され、不退去が続いた時点。その前に上長へ一報を入れておく。</a:t>
             </a:r>
-            <a:endParaRPr lang="en-US" sz="900" dirty="0"/>
+            <a:endParaRPr lang="en-US" sz="950" dirty="0"/>
           </a:p>
           <a:p>
             <a:pPr indent="0" marL="0">
@@ -4238,9 +4238,9 @@
               <a:buNone/>
             </a:pPr>
             <a:r>
-              <a:rPr lang="en-US" sz="800" i="1" dirty="0">
-                <a:solidFill>
-                  <a:srgbClr val="5F7183"/>
+              <a:rPr lang="en-US" sz="1100" dirty="0">
+                <a:solidFill>
+                  <a:srgbClr val="1B2733"/>
                 </a:solidFill>
                 <a:latin typeface="Calibri" pitchFamily="34" charset="0"/>
                 <a:ea typeface="Calibri" pitchFamily="34" charset="-122"/>
@@ -4248,7 +4248,7 @@
               </a:rPr>
               <a:t>Once a clear request to leave has been refused and they remain. Notify your supervisor before that point.</a:t>
             </a:r>
-            <a:endParaRPr lang="en-US" sz="900" dirty="0"/>
+            <a:endParaRPr lang="en-US" sz="950" dirty="0"/>
           </a:p>
         </p:txBody>
       </p:sp>
@@ -4260,7 +4260,7 @@
         </p:nvSpPr>
         <p:spPr>
           <a:xfrm>
-            <a:off x="640080" y="4901184"/>
+            <a:off x="640080" y="4956048"/>
             <a:ext cx="10911535" cy="420624"/>
           </a:xfrm>
           <a:prstGeom prst="roundRect">
@@ -4282,7 +4282,7 @@
         </p:nvSpPr>
         <p:spPr>
           <a:xfrm>
-            <a:off x="859536" y="4928616"/>
+            <a:off x="859536" y="4983480"/>
             <a:ext cx="10472623" cy="365760"/>
           </a:xfrm>
           <a:prstGeom prst="rect">
@@ -4356,9 +4356,9 @@
               <a:buNone/>
             </a:pPr>
             <a:r>
-              <a:rPr lang="en-US" sz="750" i="1" dirty="0">
-                <a:solidFill>
-                  <a:srgbClr val="5F7183"/>
+              <a:rPr lang="en-US" sz="950" dirty="0">
+                <a:solidFill>
+                  <a:srgbClr val="1B2733"/>
                 </a:solidFill>
                 <a:latin typeface="Calibri" pitchFamily="34" charset="0"/>
                 <a:ea typeface="Calibri" pitchFamily="34" charset="-122"/>
@@ -4378,7 +4378,7 @@
         </p:nvSpPr>
         <p:spPr>
           <a:xfrm>
-            <a:off x="640080" y="5394960"/>
+            <a:off x="640080" y="5449824"/>
             <a:ext cx="10911535" cy="420624"/>
           </a:xfrm>
           <a:prstGeom prst="roundRect">
@@ -4400,7 +4400,7 @@
         </p:nvSpPr>
         <p:spPr>
           <a:xfrm>
-            <a:off x="859536" y="5422392"/>
+            <a:off x="859536" y="5477256"/>
             <a:ext cx="10472623" cy="365760"/>
           </a:xfrm>
           <a:prstGeom prst="rect">
@@ -4474,7 +4474,86 @@
               <a:buNone/>
             </a:pPr>
             <a:r>
-              <a:rPr lang="en-US" sz="750" i="1" dirty="0">
+              <a:rPr lang="en-US" sz="950" dirty="0">
+                <a:solidFill>
+                  <a:srgbClr val="1B2733"/>
+                </a:solidFill>
+                <a:latin typeface="Calibri" pitchFamily="34" charset="0"/>
+                <a:ea typeface="Calibri" pitchFamily="34" charset="-122"/>
+                <a:cs typeface="Calibri" pitchFamily="34" charset="-120"/>
+              </a:rPr>
+              <a:t>Stop them. Even well meant, more parties makes it unmanageable — and that employee is also yours to protect.</a:t>
+            </a:r>
+            <a:endParaRPr lang="en-US" sz="850" dirty="0"/>
+          </a:p>
+        </p:txBody>
+      </p:sp>
+      <p:sp>
+        <p:nvSpPr>
+          <p:cNvPr id="26" name="Text 23"/>
+          <p:cNvSpPr/>
+          <p:nvPr/>
+        </p:nvSpPr>
+        <p:spPr>
+          <a:xfrm>
+            <a:off x="640080" y="5961888"/>
+            <a:ext cx="10911535" cy="292608"/>
+          </a:xfrm>
+          <a:prstGeom prst="rect">
+            <a:avLst/>
+          </a:prstGeom>
+          <a:noFill/>
+          <a:ln/>
+        </p:spPr>
+        <p:txBody>
+          <a:bodyPr wrap="square" lIns="0" tIns="0" rIns="0" bIns="0" rtlCol="0" anchor="t"/>
+          <a:lstStyle/>
+          <a:p>
+            <a:pPr indent="0" marL="0">
+              <a:lnSpc>
+                <a:spcPct val="88000"/>
+              </a:lnSpc>
+              <a:buNone/>
+            </a:pPr>
+            <a:r>
+              <a:rPr lang="en-US" sz="900" b="1" dirty="0">
+                <a:solidFill>
+                  <a:srgbClr val="0D8A76"/>
+                </a:solidFill>
+                <a:latin typeface="Yu Gothic" pitchFamily="34" charset="0"/>
+                <a:ea typeface="Yu Gothic" pitchFamily="34" charset="-122"/>
+                <a:cs typeface="Yu Gothic" pitchFamily="34" charset="-120"/>
+              </a:rPr>
+              <a:t>Site SOP優先　</a:t>
+            </a:r>
+            <a:pPr indent="0" marL="0">
+              <a:lnSpc>
+                <a:spcPct val="88000"/>
+              </a:lnSpc>
+              <a:buNone/>
+            </a:pPr>
+            <a:r>
+              <a:rPr lang="en-US" sz="900" dirty="0">
+                <a:solidFill>
+                  <a:srgbClr val="1B2733"/>
+                </a:solidFill>
+                <a:latin typeface="Yu Gothic" pitchFamily="34" charset="0"/>
+                <a:ea typeface="Yu Gothic" pitchFamily="34" charset="-122"/>
+                <a:cs typeface="Yu Gothic" pitchFamily="34" charset="-120"/>
+              </a:rPr>
+              <a:t>退去要請の判断者、人事の緊急連絡先、通報の基準は現場ごとに異なる。</a:t>
+            </a:r>
+            <a:endParaRPr lang="en-US" sz="900" dirty="0"/>
+          </a:p>
+          <a:p>
+            <a:pPr indent="0" marL="0">
+              <a:lnSpc>
+                <a:spcPct val="88000"/>
+              </a:lnSpc>
+              <a:buNone/>
+            </a:pPr>
+            <a:r>
+              <a:rPr lang="en-US" sz="800" i="1" dirty="0">
                 <a:solidFill>
                   <a:srgbClr val="5F7183"/>
                 </a:solidFill>
@@ -4482,22 +4561,22 @@
                 <a:ea typeface="Calibri" pitchFamily="34" charset="-122"/>
                 <a:cs typeface="Calibri" pitchFamily="34" charset="-120"/>
               </a:rPr>
-              <a:t>Stop them. Even well meant, more parties makes it unmanageable — and that employee is also yours to protect.</a:t>
-            </a:r>
-            <a:endParaRPr lang="en-US" sz="850" dirty="0"/>
-          </a:p>
-        </p:txBody>
-      </p:sp>
-      <p:sp>
-        <p:nvSpPr>
-          <p:cNvPr id="26" name="Text 23"/>
-          <p:cNvSpPr/>
-          <p:nvPr/>
-        </p:nvSpPr>
-        <p:spPr>
-          <a:xfrm>
-            <a:off x="640080" y="5907024"/>
-            <a:ext cx="10911535" cy="310896"/>
+              <a:t>Who authorises a removal request, HR emergency contacts, and when to call police differ by site.</a:t>
+            </a:r>
+            <a:endParaRPr lang="en-US" sz="900" dirty="0"/>
+          </a:p>
+        </p:txBody>
+      </p:sp>
+      <p:sp>
+        <p:nvSpPr>
+          <p:cNvPr id="27" name="Text 24"/>
+          <p:cNvSpPr/>
+          <p:nvPr/>
+        </p:nvSpPr>
+        <p:spPr>
+          <a:xfrm>
+            <a:off x="640080" y="6272784"/>
+            <a:ext cx="9905695" cy="219456"/>
           </a:xfrm>
           <a:prstGeom prst="rect">
             <a:avLst/>
@@ -4510,167 +4589,88 @@
           <a:lstStyle/>
           <a:p>
             <a:pPr indent="0" marL="0">
-              <a:lnSpc>
-                <a:spcPct val="88000"/>
-              </a:lnSpc>
-              <a:buNone/>
-            </a:pPr>
-            <a:r>
-              <a:rPr lang="en-US" sz="900" b="1" dirty="0">
-                <a:solidFill>
-                  <a:srgbClr val="0D8A76"/>
-                </a:solidFill>
-                <a:latin typeface="Yu Gothic" pitchFamily="34" charset="0"/>
-                <a:ea typeface="Yu Gothic" pitchFamily="34" charset="-122"/>
-                <a:cs typeface="Yu Gothic" pitchFamily="34" charset="-120"/>
-              </a:rPr>
-              <a:t>Site SOP優先　</a:t>
-            </a:r>
-            <a:pPr indent="0" marL="0">
-              <a:lnSpc>
-                <a:spcPct val="88000"/>
-              </a:lnSpc>
+              <a:buNone/>
+            </a:pPr>
+            <a:r>
+              <a:rPr lang="en-US" sz="750" b="1" dirty="0">
+                <a:solidFill>
+                  <a:srgbClr val="D6E0E9"/>
+                </a:solidFill>
+                <a:latin typeface="Yu Gothic" pitchFamily="34" charset="0"/>
+                <a:ea typeface="Yu Gothic" pitchFamily="34" charset="-122"/>
+                <a:cs typeface="Yu Gothic" pitchFamily="34" charset="-120"/>
+              </a:rPr>
+              <a:t>ソース　</a:t>
+            </a:r>
+            <a:pPr indent="0" marL="0">
+              <a:buNone/>
+            </a:pPr>
+            <a:r>
+              <a:rPr lang="en-US" sz="750" dirty="0">
+                <a:solidFill>
+                  <a:srgbClr val="5F7183"/>
+                </a:solidFill>
+                <a:latin typeface="Yu Gothic" pitchFamily="34" charset="0"/>
+                <a:ea typeface="Yu Gothic" pitchFamily="34" charset="-122"/>
+                <a:cs typeface="Yu Gothic" pitchFamily="34" charset="-120"/>
+              </a:rPr>
+              <a:t>警備業法、刑法（130条後段）</a:t>
+            </a:r>
+            <a:endParaRPr lang="en-US" sz="750" dirty="0"/>
+          </a:p>
+        </p:txBody>
+      </p:sp>
+      <p:sp>
+        <p:nvSpPr>
+          <p:cNvPr id="28" name="Text 25"/>
+          <p:cNvSpPr/>
+          <p:nvPr/>
+        </p:nvSpPr>
+        <p:spPr>
+          <a:xfrm>
+            <a:off x="640080" y="6492240"/>
+            <a:ext cx="8778240" cy="292608"/>
+          </a:xfrm>
+          <a:prstGeom prst="rect">
+            <a:avLst/>
+          </a:prstGeom>
+          <a:noFill/>
+          <a:ln/>
+        </p:spPr>
+        <p:txBody>
+          <a:bodyPr wrap="square" lIns="0" tIns="0" rIns="0" bIns="0" rtlCol="0" anchor="ctr"/>
+          <a:lstStyle/>
+          <a:p>
+            <a:pPr indent="0" marL="0">
               <a:buNone/>
             </a:pPr>
             <a:r>
               <a:rPr lang="en-US" sz="900" dirty="0">
                 <a:solidFill>
-                  <a:srgbClr val="1B2733"/>
-                </a:solidFill>
-                <a:latin typeface="Yu Gothic" pitchFamily="34" charset="0"/>
-                <a:ea typeface="Yu Gothic" pitchFamily="34" charset="-122"/>
-                <a:cs typeface="Yu Gothic" pitchFamily="34" charset="-120"/>
-              </a:rPr>
-              <a:t>退去要請の判断者、人事の緊急連絡先、通報の基準は現場ごとに異なる。</a:t>
+                  <a:srgbClr val="5F7183"/>
+                </a:solidFill>
+                <a:latin typeface="Yu Gothic" pitchFamily="34" charset="0"/>
+                <a:ea typeface="Yu Gothic" pitchFamily="34" charset="-122"/>
+                <a:cs typeface="Yu Gothic" pitchFamily="34" charset="-120"/>
+              </a:rPr>
+              <a:t>第5時限｜業務別教育2 その他当該警備業務を適正に実施するため必要な知識及び技能  </a:t>
+            </a:r>
+            <a:pPr indent="0" marL="0">
+              <a:buNone/>
+            </a:pPr>
+            <a:r>
+              <a:rPr lang="en-US" sz="850" i="1" dirty="0">
+                <a:solidFill>
+                  <a:srgbClr val="D6E0E9"/>
+                </a:solidFill>
+                <a:latin typeface="Calibri" pitchFamily="34" charset="0"/>
+                <a:ea typeface="Calibri" pitchFamily="34" charset="-122"/>
+                <a:cs typeface="Calibri" pitchFamily="34" charset="-120"/>
+              </a:rPr>
+              <a:t>Period 5 | Task-Specific Training 2 — De-escalation</a:t>
             </a:r>
             <a:endParaRPr lang="en-US" sz="900" dirty="0"/>
           </a:p>
-          <a:p>
-            <a:pPr indent="0" marL="0">
-              <a:lnSpc>
-                <a:spcPct val="88000"/>
-              </a:lnSpc>
-              <a:buNone/>
-            </a:pPr>
-            <a:r>
-              <a:rPr lang="en-US" sz="750" i="1" dirty="0">
-                <a:solidFill>
-                  <a:srgbClr val="5F7183"/>
-                </a:solidFill>
-                <a:latin typeface="Calibri" pitchFamily="34" charset="0"/>
-                <a:ea typeface="Calibri" pitchFamily="34" charset="-122"/>
-                <a:cs typeface="Calibri" pitchFamily="34" charset="-120"/>
-              </a:rPr>
-              <a:t>Who authorises a removal request, HR emergency contacts, and when to call police differ by site.</a:t>
-            </a:r>
-            <a:endParaRPr lang="en-US" sz="900" dirty="0"/>
-          </a:p>
-        </p:txBody>
-      </p:sp>
-      <p:sp>
-        <p:nvSpPr>
-          <p:cNvPr id="27" name="Text 24"/>
-          <p:cNvSpPr/>
-          <p:nvPr/>
-        </p:nvSpPr>
-        <p:spPr>
-          <a:xfrm>
-            <a:off x="640080" y="6272784"/>
-            <a:ext cx="9905695" cy="237744"/>
-          </a:xfrm>
-          <a:prstGeom prst="rect">
-            <a:avLst/>
-          </a:prstGeom>
-          <a:noFill/>
-          <a:ln/>
-        </p:spPr>
-        <p:txBody>
-          <a:bodyPr wrap="square" lIns="0" tIns="0" rIns="0" bIns="0" rtlCol="0" anchor="t"/>
-          <a:lstStyle/>
-          <a:p>
-            <a:pPr indent="0" marL="0">
-              <a:buNone/>
-            </a:pPr>
-            <a:r>
-              <a:rPr lang="en-US" sz="750" b="1" dirty="0">
-                <a:solidFill>
-                  <a:srgbClr val="D6E0E9"/>
-                </a:solidFill>
-                <a:latin typeface="Yu Gothic" pitchFamily="34" charset="0"/>
-                <a:ea typeface="Yu Gothic" pitchFamily="34" charset="-122"/>
-                <a:cs typeface="Yu Gothic" pitchFamily="34" charset="-120"/>
-              </a:rPr>
-              <a:t>ソース　</a:t>
-            </a:r>
-            <a:pPr indent="0" marL="0">
-              <a:buNone/>
-            </a:pPr>
-            <a:r>
-              <a:rPr lang="en-US" sz="750" dirty="0">
-                <a:solidFill>
-                  <a:srgbClr val="5F7183"/>
-                </a:solidFill>
-                <a:latin typeface="Yu Gothic" pitchFamily="34" charset="0"/>
-                <a:ea typeface="Yu Gothic" pitchFamily="34" charset="-122"/>
-                <a:cs typeface="Yu Gothic" pitchFamily="34" charset="-120"/>
-              </a:rPr>
-              <a:t>警備業法、刑法（130条後段）</a:t>
-            </a:r>
-            <a:endParaRPr lang="en-US" sz="750" dirty="0"/>
-          </a:p>
-        </p:txBody>
-      </p:sp>
-      <p:sp>
-        <p:nvSpPr>
-          <p:cNvPr id="28" name="Text 25"/>
-          <p:cNvSpPr/>
-          <p:nvPr/>
-        </p:nvSpPr>
-        <p:spPr>
-          <a:xfrm>
-            <a:off x="640080" y="6382512"/>
-            <a:ext cx="8778240" cy="292608"/>
-          </a:xfrm>
-          <a:prstGeom prst="rect">
-            <a:avLst/>
-          </a:prstGeom>
-          <a:noFill/>
-          <a:ln/>
-        </p:spPr>
-        <p:txBody>
-          <a:bodyPr wrap="square" lIns="0" tIns="0" rIns="0" bIns="0" rtlCol="0" anchor="ctr"/>
-          <a:lstStyle/>
-          <a:p>
-            <a:pPr indent="0" marL="0">
-              <a:buNone/>
-            </a:pPr>
-            <a:r>
-              <a:rPr lang="en-US" sz="900" dirty="0">
-                <a:solidFill>
-                  <a:srgbClr val="5F7183"/>
-                </a:solidFill>
-                <a:latin typeface="Yu Gothic" pitchFamily="34" charset="0"/>
-                <a:ea typeface="Yu Gothic" pitchFamily="34" charset="-122"/>
-                <a:cs typeface="Yu Gothic" pitchFamily="34" charset="-120"/>
-              </a:rPr>
-              <a:t>第5時限｜業務別教育2 その他当該警備業務を適正に実施するため必要な知識及び技能  </a:t>
-            </a:r>
-            <a:pPr indent="0" marL="0">
-              <a:buNone/>
-            </a:pPr>
-            <a:r>
-              <a:rPr lang="en-US" sz="850" i="1" dirty="0">
-                <a:solidFill>
-                  <a:srgbClr val="D6E0E9"/>
-                </a:solidFill>
-                <a:latin typeface="Calibri" pitchFamily="34" charset="0"/>
-                <a:ea typeface="Calibri" pitchFamily="34" charset="-122"/>
-                <a:cs typeface="Calibri" pitchFamily="34" charset="-120"/>
-              </a:rPr>
-              <a:t>Period 5 | Task-Specific Training 2 — De-escalation</a:t>
-            </a:r>
-            <a:endParaRPr lang="en-US" sz="900" dirty="0"/>
-          </a:p>
         </p:txBody>
       </p:sp>
       <p:sp>
@@ -4681,7 +4681,7 @@
         </p:nvSpPr>
         <p:spPr>
           <a:xfrm>
-            <a:off x="10637215" y="6382512"/>
+            <a:off x="10637215" y="6492240"/>
             <a:ext cx="914400" cy="292608"/>
           </a:xfrm>
           <a:prstGeom prst="rect">
@@ -4776,8 +4776,8 @@
         </p:nvSpPr>
         <p:spPr>
           <a:xfrm>
-            <a:off x="640080" y="384048"/>
-            <a:ext cx="8982151" cy="768096"/>
+            <a:off x="640080" y="365760"/>
+            <a:ext cx="8982151" cy="749808"/>
           </a:xfrm>
           <a:prstGeom prst="rect">
             <a:avLst/>
@@ -4816,7 +4816,7 @@
               <a:buNone/>
             </a:pPr>
             <a:r>
-              <a:rPr lang="en-US" sz="1100" i="1" dirty="0">
+              <a:rPr lang="en-US" sz="1100" dirty="0">
                 <a:solidFill>
                   <a:srgbClr val="12B198"/>
                 </a:solidFill>
@@ -4838,7 +4838,7 @@
         </p:nvSpPr>
         <p:spPr>
           <a:xfrm>
-            <a:off x="9686239" y="438912"/>
+            <a:off x="9686239" y="420624"/>
             <a:ext cx="932688" cy="310896"/>
           </a:xfrm>
           <a:prstGeom prst="roundRect">
@@ -4860,7 +4860,7 @@
         </p:nvSpPr>
         <p:spPr>
           <a:xfrm>
-            <a:off x="9686239" y="438912"/>
+            <a:off x="9686239" y="420624"/>
             <a:ext cx="932688" cy="310896"/>
           </a:xfrm>
           <a:prstGeom prst="rect">
@@ -4899,12 +4899,12 @@
         </p:nvSpPr>
         <p:spPr>
           <a:xfrm>
-            <a:off x="640080" y="1188720"/>
-            <a:ext cx="10911535" cy="530352"/>
+            <a:off x="640080" y="1115568"/>
+            <a:ext cx="10911535" cy="585216"/>
           </a:xfrm>
           <a:prstGeom prst="roundRect">
             <a:avLst>
-              <a:gd name="adj" fmla="val 6897"/>
+              <a:gd name="adj" fmla="val 6250"/>
             </a:avLst>
           </a:prstGeom>
           <a:solidFill>
@@ -4921,8 +4921,8 @@
         </p:nvSpPr>
         <p:spPr>
           <a:xfrm>
-            <a:off x="877824" y="1234440"/>
-            <a:ext cx="10436047" cy="438912"/>
+            <a:off x="877824" y="1161288"/>
+            <a:ext cx="10436047" cy="493776"/>
           </a:xfrm>
           <a:prstGeom prst="rect">
             <a:avLst/>
@@ -4958,7 +4958,7 @@
               <a:buNone/>
             </a:pPr>
             <a:r>
-              <a:rPr lang="en-US" sz="800" dirty="0">
+              <a:rPr lang="en-US" sz="900" dirty="0">
                 <a:solidFill>
                   <a:srgbClr val="0D8A76"/>
                 </a:solidFill>
@@ -4995,9 +4995,9 @@
               <a:buNone/>
             </a:pPr>
             <a:r>
-              <a:rPr lang="en-US" sz="850" i="1" dirty="0">
-                <a:solidFill>
-                  <a:srgbClr val="5F7183"/>
+              <a:rPr lang="en-US" sz="1050" dirty="0">
+                <a:solidFill>
+                  <a:srgbClr val="1B2733"/>
                 </a:solidFill>
                 <a:latin typeface="Calibri" pitchFamily="34" charset="0"/>
                 <a:ea typeface="Calibri" pitchFamily="34" charset="-122"/>
@@ -5017,12 +5017,12 @@
         </p:nvSpPr>
         <p:spPr>
           <a:xfrm>
-            <a:off x="640080" y="1810512"/>
-            <a:ext cx="5327752" cy="1920240"/>
+            <a:off x="640080" y="1773936"/>
+            <a:ext cx="5327752" cy="1965960"/>
           </a:xfrm>
           <a:prstGeom prst="roundRect">
             <a:avLst>
-              <a:gd name="adj" fmla="val 1905"/>
+              <a:gd name="adj" fmla="val 1860"/>
             </a:avLst>
           </a:prstGeom>
           <a:solidFill>
@@ -5039,7 +5039,7 @@
         </p:nvSpPr>
         <p:spPr>
           <a:xfrm>
-            <a:off x="822960" y="1975104"/>
+            <a:off x="822960" y="1938528"/>
             <a:ext cx="310896" cy="310896"/>
           </a:xfrm>
           <a:prstGeom prst="ellipse">
@@ -5059,7 +5059,7 @@
         </p:nvSpPr>
         <p:spPr>
           <a:xfrm>
-            <a:off x="822960" y="1975104"/>
+            <a:off x="822960" y="1938528"/>
             <a:ext cx="310896" cy="310896"/>
           </a:xfrm>
           <a:prstGeom prst="rect">
@@ -5098,7 +5098,7 @@
         </p:nvSpPr>
         <p:spPr>
           <a:xfrm>
-            <a:off x="1207008" y="1938528"/>
+            <a:off x="1207008" y="1901952"/>
             <a:ext cx="4559656" cy="512064"/>
           </a:xfrm>
           <a:prstGeom prst="rect">
@@ -5138,7 +5138,7 @@
               <a:buNone/>
             </a:pPr>
             <a:r>
-              <a:rPr lang="en-US" sz="800" i="1" dirty="0">
+              <a:rPr lang="en-US" sz="1050" dirty="0">
                 <a:solidFill>
                   <a:srgbClr val="12B198"/>
                 </a:solidFill>
@@ -5160,8 +5160,8 @@
         </p:nvSpPr>
         <p:spPr>
           <a:xfrm>
-            <a:off x="859536" y="2487168"/>
-            <a:ext cx="4888840" cy="1097280"/>
+            <a:off x="859536" y="2450592"/>
+            <a:ext cx="4888840" cy="1143000"/>
           </a:xfrm>
           <a:prstGeom prst="rect">
             <a:avLst/>
@@ -5206,9 +5206,9 @@
               <a:buNone/>
             </a:pPr>
             <a:r>
-              <a:rPr lang="en-US" sz="750" i="1" dirty="0">
-                <a:solidFill>
-                  <a:srgbClr val="5F7183"/>
+              <a:rPr lang="en-US" sz="950" dirty="0">
+                <a:solidFill>
+                  <a:srgbClr val="1B2733"/>
                 </a:solidFill>
                 <a:latin typeface="Calibri" pitchFamily="34" charset="0"/>
                 <a:ea typeface="Calibri" pitchFamily="34" charset="-122"/>
@@ -5252,9 +5252,9 @@
               <a:buNone/>
             </a:pPr>
             <a:r>
-              <a:rPr lang="en-US" sz="750" i="1" dirty="0">
-                <a:solidFill>
-                  <a:srgbClr val="5F7183"/>
+              <a:rPr lang="en-US" sz="950" dirty="0">
+                <a:solidFill>
+                  <a:srgbClr val="1B2733"/>
                 </a:solidFill>
                 <a:latin typeface="Calibri" pitchFamily="34" charset="0"/>
                 <a:ea typeface="Calibri" pitchFamily="34" charset="-122"/>
@@ -5298,9 +5298,9 @@
               <a:buNone/>
             </a:pPr>
             <a:r>
-              <a:rPr lang="en-US" sz="750" i="1" dirty="0">
-                <a:solidFill>
-                  <a:srgbClr val="5F7183"/>
+              <a:rPr lang="en-US" sz="950" dirty="0">
+                <a:solidFill>
+                  <a:srgbClr val="1B2733"/>
                 </a:solidFill>
                 <a:latin typeface="Calibri" pitchFamily="34" charset="0"/>
                 <a:ea typeface="Calibri" pitchFamily="34" charset="-122"/>
@@ -5344,9 +5344,9 @@
               <a:buNone/>
             </a:pPr>
             <a:r>
-              <a:rPr lang="en-US" sz="750" i="1" dirty="0">
-                <a:solidFill>
-                  <a:srgbClr val="5F7183"/>
+              <a:rPr lang="en-US" sz="950" dirty="0">
+                <a:solidFill>
+                  <a:srgbClr val="1B2733"/>
                 </a:solidFill>
                 <a:latin typeface="Calibri" pitchFamily="34" charset="0"/>
                 <a:ea typeface="Calibri" pitchFamily="34" charset="-122"/>
@@ -5366,12 +5366,12 @@
         </p:nvSpPr>
         <p:spPr>
           <a:xfrm>
-            <a:off x="6223864" y="1810512"/>
-            <a:ext cx="5327752" cy="1920240"/>
+            <a:off x="6223864" y="1773936"/>
+            <a:ext cx="5327752" cy="1965960"/>
           </a:xfrm>
           <a:prstGeom prst="roundRect">
             <a:avLst>
-              <a:gd name="adj" fmla="val 1905"/>
+              <a:gd name="adj" fmla="val 1860"/>
             </a:avLst>
           </a:prstGeom>
           <a:solidFill>
@@ -5388,7 +5388,7 @@
         </p:nvSpPr>
         <p:spPr>
           <a:xfrm>
-            <a:off x="6406744" y="1975104"/>
+            <a:off x="6406744" y="1938528"/>
             <a:ext cx="310896" cy="310896"/>
           </a:xfrm>
           <a:prstGeom prst="ellipse">
@@ -5408,7 +5408,7 @@
         </p:nvSpPr>
         <p:spPr>
           <a:xfrm>
-            <a:off x="6406744" y="1975104"/>
+            <a:off x="6406744" y="1938528"/>
             <a:ext cx="310896" cy="310896"/>
           </a:xfrm>
           <a:prstGeom prst="rect">
@@ -5447,7 +5447,7 @@
         </p:nvSpPr>
         <p:spPr>
           <a:xfrm>
-            <a:off x="6790792" y="1938528"/>
+            <a:off x="6790792" y="1901952"/>
             <a:ext cx="4559656" cy="512064"/>
           </a:xfrm>
           <a:prstGeom prst="rect">
@@ -5487,7 +5487,7 @@
               <a:buNone/>
             </a:pPr>
             <a:r>
-              <a:rPr lang="en-US" sz="800" i="1" dirty="0">
+              <a:rPr lang="en-US" sz="1050" dirty="0">
                 <a:solidFill>
                   <a:srgbClr val="12B198"/>
                 </a:solidFill>
@@ -5509,8 +5509,8 @@
         </p:nvSpPr>
         <p:spPr>
           <a:xfrm>
-            <a:off x="6443320" y="2487168"/>
-            <a:ext cx="4888840" cy="1097280"/>
+            <a:off x="6443320" y="2450592"/>
+            <a:ext cx="4888840" cy="1143000"/>
           </a:xfrm>
           <a:prstGeom prst="rect">
             <a:avLst/>
@@ -5555,9 +5555,9 @@
               <a:buNone/>
             </a:pPr>
             <a:r>
-              <a:rPr lang="en-US" sz="750" i="1" dirty="0">
-                <a:solidFill>
-                  <a:srgbClr val="5F7183"/>
+              <a:rPr lang="en-US" sz="950" dirty="0">
+                <a:solidFill>
+                  <a:srgbClr val="1B2733"/>
                 </a:solidFill>
                 <a:latin typeface="Calibri" pitchFamily="34" charset="0"/>
                 <a:ea typeface="Calibri" pitchFamily="34" charset="-122"/>
@@ -5601,9 +5601,9 @@
               <a:buNone/>
             </a:pPr>
             <a:r>
-              <a:rPr lang="en-US" sz="750" i="1" dirty="0">
-                <a:solidFill>
-                  <a:srgbClr val="5F7183"/>
+              <a:rPr lang="en-US" sz="950" dirty="0">
+                <a:solidFill>
+                  <a:srgbClr val="1B2733"/>
                 </a:solidFill>
                 <a:latin typeface="Calibri" pitchFamily="34" charset="0"/>
                 <a:ea typeface="Calibri" pitchFamily="34" charset="-122"/>
@@ -5647,9 +5647,9 @@
               <a:buNone/>
             </a:pPr>
             <a:r>
-              <a:rPr lang="en-US" sz="750" i="1" dirty="0">
-                <a:solidFill>
-                  <a:srgbClr val="5F7183"/>
+              <a:rPr lang="en-US" sz="950" dirty="0">
+                <a:solidFill>
+                  <a:srgbClr val="1B2733"/>
                 </a:solidFill>
                 <a:latin typeface="Calibri" pitchFamily="34" charset="0"/>
                 <a:ea typeface="Calibri" pitchFamily="34" charset="-122"/>
@@ -5693,9 +5693,9 @@
               <a:buNone/>
             </a:pPr>
             <a:r>
-              <a:rPr lang="en-US" sz="750" i="1" dirty="0">
-                <a:solidFill>
-                  <a:srgbClr val="5F7183"/>
+              <a:rPr lang="en-US" sz="950" dirty="0">
+                <a:solidFill>
+                  <a:srgbClr val="1B2733"/>
                 </a:solidFill>
                 <a:latin typeface="Calibri" pitchFamily="34" charset="0"/>
                 <a:ea typeface="Calibri" pitchFamily="34" charset="-122"/>
@@ -5715,12 +5715,12 @@
         </p:nvSpPr>
         <p:spPr>
           <a:xfrm>
-            <a:off x="640080" y="3931920"/>
-            <a:ext cx="5327752" cy="1920240"/>
+            <a:off x="640080" y="3941064"/>
+            <a:ext cx="5327752" cy="1965960"/>
           </a:xfrm>
           <a:prstGeom prst="roundRect">
             <a:avLst>
-              <a:gd name="adj" fmla="val 1905"/>
+              <a:gd name="adj" fmla="val 1860"/>
             </a:avLst>
           </a:prstGeom>
           <a:solidFill>
@@ -5737,7 +5737,7 @@
         </p:nvSpPr>
         <p:spPr>
           <a:xfrm>
-            <a:off x="822960" y="4096512"/>
+            <a:off x="822960" y="4105656"/>
             <a:ext cx="310896" cy="310896"/>
           </a:xfrm>
           <a:prstGeom prst="ellipse">
@@ -5757,7 +5757,7 @@
         </p:nvSpPr>
         <p:spPr>
           <a:xfrm>
-            <a:off x="822960" y="4096512"/>
+            <a:off x="822960" y="4105656"/>
             <a:ext cx="310896" cy="310896"/>
           </a:xfrm>
           <a:prstGeom prst="rect">
@@ -5796,7 +5796,7 @@
         </p:nvSpPr>
         <p:spPr>
           <a:xfrm>
-            <a:off x="1207008" y="4059936"/>
+            <a:off x="1207008" y="4069080"/>
             <a:ext cx="4559656" cy="512064"/>
           </a:xfrm>
           <a:prstGeom prst="rect">
@@ -5836,7 +5836,7 @@
               <a:buNone/>
             </a:pPr>
             <a:r>
-              <a:rPr lang="en-US" sz="800" i="1" dirty="0">
+              <a:rPr lang="en-US" sz="1050" dirty="0">
                 <a:solidFill>
                   <a:srgbClr val="12B198"/>
                 </a:solidFill>
@@ -5858,8 +5858,8 @@
         </p:nvSpPr>
         <p:spPr>
           <a:xfrm>
-            <a:off x="859536" y="4608576"/>
-            <a:ext cx="4888840" cy="1097280"/>
+            <a:off x="859536" y="4617720"/>
+            <a:ext cx="4888840" cy="1143000"/>
           </a:xfrm>
           <a:prstGeom prst="rect">
             <a:avLst/>
@@ -5904,9 +5904,9 @@
               <a:buNone/>
             </a:pPr>
             <a:r>
-              <a:rPr lang="en-US" sz="750" i="1" dirty="0">
-                <a:solidFill>
-                  <a:srgbClr val="5F7183"/>
+              <a:rPr lang="en-US" sz="950" dirty="0">
+                <a:solidFill>
+                  <a:srgbClr val="1B2733"/>
                 </a:solidFill>
                 <a:latin typeface="Calibri" pitchFamily="34" charset="0"/>
                 <a:ea typeface="Calibri" pitchFamily="34" charset="-122"/>
@@ -5950,9 +5950,9 @@
               <a:buNone/>
             </a:pPr>
             <a:r>
-              <a:rPr lang="en-US" sz="750" i="1" dirty="0">
-                <a:solidFill>
-                  <a:srgbClr val="5F7183"/>
+              <a:rPr lang="en-US" sz="950" dirty="0">
+                <a:solidFill>
+                  <a:srgbClr val="1B2733"/>
                 </a:solidFill>
                 <a:latin typeface="Calibri" pitchFamily="34" charset="0"/>
                 <a:ea typeface="Calibri" pitchFamily="34" charset="-122"/>
@@ -5996,9 +5996,9 @@
               <a:buNone/>
             </a:pPr>
             <a:r>
-              <a:rPr lang="en-US" sz="750" i="1" dirty="0">
-                <a:solidFill>
-                  <a:srgbClr val="5F7183"/>
+              <a:rPr lang="en-US" sz="950" dirty="0">
+                <a:solidFill>
+                  <a:srgbClr val="1B2733"/>
                 </a:solidFill>
                 <a:latin typeface="Calibri" pitchFamily="34" charset="0"/>
                 <a:ea typeface="Calibri" pitchFamily="34" charset="-122"/>
@@ -6042,9 +6042,9 @@
               <a:buNone/>
             </a:pPr>
             <a:r>
-              <a:rPr lang="en-US" sz="750" i="1" dirty="0">
-                <a:solidFill>
-                  <a:srgbClr val="5F7183"/>
+              <a:rPr lang="en-US" sz="950" dirty="0">
+                <a:solidFill>
+                  <a:srgbClr val="1B2733"/>
                 </a:solidFill>
                 <a:latin typeface="Calibri" pitchFamily="34" charset="0"/>
                 <a:ea typeface="Calibri" pitchFamily="34" charset="-122"/>
@@ -6064,12 +6064,12 @@
         </p:nvSpPr>
         <p:spPr>
           <a:xfrm>
-            <a:off x="6223864" y="3931920"/>
-            <a:ext cx="5327752" cy="1920240"/>
+            <a:off x="6223864" y="3941064"/>
+            <a:ext cx="5327752" cy="1965960"/>
           </a:xfrm>
           <a:prstGeom prst="roundRect">
             <a:avLst>
-              <a:gd name="adj" fmla="val 1905"/>
+              <a:gd name="adj" fmla="val 1860"/>
             </a:avLst>
           </a:prstGeom>
           <a:solidFill>
@@ -6086,7 +6086,7 @@
         </p:nvSpPr>
         <p:spPr>
           <a:xfrm>
-            <a:off x="6406744" y="4096512"/>
+            <a:off x="6406744" y="4105656"/>
             <a:ext cx="310896" cy="310896"/>
           </a:xfrm>
           <a:prstGeom prst="ellipse">
@@ -6106,7 +6106,7 @@
         </p:nvSpPr>
         <p:spPr>
           <a:xfrm>
-            <a:off x="6406744" y="4096512"/>
+            <a:off x="6406744" y="4105656"/>
             <a:ext cx="310896" cy="310896"/>
           </a:xfrm>
           <a:prstGeom prst="rect">
@@ -6145,7 +6145,7 @@
         </p:nvSpPr>
         <p:spPr>
           <a:xfrm>
-            <a:off x="6790792" y="4059936"/>
+            <a:off x="6790792" y="4069080"/>
             <a:ext cx="4559656" cy="512064"/>
           </a:xfrm>
           <a:prstGeom prst="rect">
@@ -6185,7 +6185,7 @@
               <a:buNone/>
             </a:pPr>
             <a:r>
-              <a:rPr lang="en-US" sz="800" i="1" dirty="0">
+              <a:rPr lang="en-US" sz="1050" dirty="0">
                 <a:solidFill>
                   <a:srgbClr val="12B198"/>
                 </a:solidFill>
@@ -6207,8 +6207,8 @@
         </p:nvSpPr>
         <p:spPr>
           <a:xfrm>
-            <a:off x="6443320" y="4608576"/>
-            <a:ext cx="4888840" cy="1097280"/>
+            <a:off x="6443320" y="4617720"/>
+            <a:ext cx="4888840" cy="1143000"/>
           </a:xfrm>
           <a:prstGeom prst="rect">
             <a:avLst/>
@@ -6253,9 +6253,9 @@
               <a:buNone/>
             </a:pPr>
             <a:r>
-              <a:rPr lang="en-US" sz="750" i="1" dirty="0">
-                <a:solidFill>
-                  <a:srgbClr val="5F7183"/>
+              <a:rPr lang="en-US" sz="950" dirty="0">
+                <a:solidFill>
+                  <a:srgbClr val="1B2733"/>
                 </a:solidFill>
                 <a:latin typeface="Calibri" pitchFamily="34" charset="0"/>
                 <a:ea typeface="Calibri" pitchFamily="34" charset="-122"/>
@@ -6299,9 +6299,9 @@
               <a:buNone/>
             </a:pPr>
             <a:r>
-              <a:rPr lang="en-US" sz="750" i="1" dirty="0">
-                <a:solidFill>
-                  <a:srgbClr val="5F7183"/>
+              <a:rPr lang="en-US" sz="950" dirty="0">
+                <a:solidFill>
+                  <a:srgbClr val="1B2733"/>
                 </a:solidFill>
                 <a:latin typeface="Calibri" pitchFamily="34" charset="0"/>
                 <a:ea typeface="Calibri" pitchFamily="34" charset="-122"/>
@@ -6345,9 +6345,9 @@
               <a:buNone/>
             </a:pPr>
             <a:r>
-              <a:rPr lang="en-US" sz="750" i="1" dirty="0">
-                <a:solidFill>
-                  <a:srgbClr val="5F7183"/>
+              <a:rPr lang="en-US" sz="950" dirty="0">
+                <a:solidFill>
+                  <a:srgbClr val="1B2733"/>
                 </a:solidFill>
                 <a:latin typeface="Calibri" pitchFamily="34" charset="0"/>
                 <a:ea typeface="Calibri" pitchFamily="34" charset="-122"/>
@@ -6391,7 +6391,86 @@
               <a:buNone/>
             </a:pPr>
             <a:r>
-              <a:rPr lang="en-US" sz="750" i="1" dirty="0">
+              <a:rPr lang="en-US" sz="950" dirty="0">
+                <a:solidFill>
+                  <a:srgbClr val="1B2733"/>
+                </a:solidFill>
+                <a:latin typeface="Calibri" pitchFamily="34" charset="0"/>
+                <a:ea typeface="Calibri" pitchFamily="34" charset="-122"/>
+                <a:cs typeface="Calibri" pitchFamily="34" charset="-120"/>
+              </a:rPr>
+              <a:t>  Touching or seizing. Only incidental to self-defence or a lawful arrest</a:t>
+            </a:r>
+            <a:endParaRPr lang="en-US" sz="950" dirty="0"/>
+          </a:p>
+        </p:txBody>
+      </p:sp>
+      <p:sp>
+        <p:nvSpPr>
+          <p:cNvPr id="28" name="Text 25"/>
+          <p:cNvSpPr/>
+          <p:nvPr/>
+        </p:nvSpPr>
+        <p:spPr>
+          <a:xfrm>
+            <a:off x="640080" y="5961888"/>
+            <a:ext cx="10911535" cy="292608"/>
+          </a:xfrm>
+          <a:prstGeom prst="rect">
+            <a:avLst/>
+          </a:prstGeom>
+          <a:noFill/>
+          <a:ln/>
+        </p:spPr>
+        <p:txBody>
+          <a:bodyPr wrap="square" lIns="0" tIns="0" rIns="0" bIns="0" rtlCol="0" anchor="t"/>
+          <a:lstStyle/>
+          <a:p>
+            <a:pPr indent="0" marL="0">
+              <a:lnSpc>
+                <a:spcPct val="88000"/>
+              </a:lnSpc>
+              <a:buNone/>
+            </a:pPr>
+            <a:r>
+              <a:rPr lang="en-US" sz="900" b="1" dirty="0">
+                <a:solidFill>
+                  <a:srgbClr val="0D8A76"/>
+                </a:solidFill>
+                <a:latin typeface="Yu Gothic" pitchFamily="34" charset="0"/>
+                <a:ea typeface="Yu Gothic" pitchFamily="34" charset="-122"/>
+                <a:cs typeface="Yu Gothic" pitchFamily="34" charset="-120"/>
+              </a:rPr>
+              <a:t>Site SOP優先　</a:t>
+            </a:r>
+            <a:pPr indent="0" marL="0">
+              <a:lnSpc>
+                <a:spcPct val="88000"/>
+              </a:lnSpc>
+              <a:buNone/>
+            </a:pPr>
+            <a:r>
+              <a:rPr lang="en-US" sz="900" dirty="0">
+                <a:solidFill>
+                  <a:srgbClr val="1B2733"/>
+                </a:solidFill>
+                <a:latin typeface="Yu Gothic" pitchFamily="34" charset="0"/>
+                <a:ea typeface="Yu Gothic" pitchFamily="34" charset="-122"/>
+                <a:cs typeface="Yu Gothic" pitchFamily="34" charset="-120"/>
+              </a:rPr>
+              <a:t>護身用具の有無、応援要請の方法、通報の判断者は現場ごとに異なる。Site SOPに従う。</a:t>
+            </a:r>
+            <a:endParaRPr lang="en-US" sz="900" dirty="0"/>
+          </a:p>
+          <a:p>
+            <a:pPr indent="0" marL="0">
+              <a:lnSpc>
+                <a:spcPct val="88000"/>
+              </a:lnSpc>
+              <a:buNone/>
+            </a:pPr>
+            <a:r>
+              <a:rPr lang="en-US" sz="800" i="1" dirty="0">
                 <a:solidFill>
                   <a:srgbClr val="5F7183"/>
                 </a:solidFill>
@@ -6399,22 +6478,22 @@
                 <a:ea typeface="Calibri" pitchFamily="34" charset="-122"/>
                 <a:cs typeface="Calibri" pitchFamily="34" charset="-120"/>
               </a:rPr>
-              <a:t>  Touching or seizing. Only incidental to self-defence or a lawful arrest</a:t>
-            </a:r>
-            <a:endParaRPr lang="en-US" sz="950" dirty="0"/>
-          </a:p>
-        </p:txBody>
-      </p:sp>
-      <p:sp>
-        <p:nvSpPr>
-          <p:cNvPr id="28" name="Text 25"/>
-          <p:cNvSpPr/>
-          <p:nvPr/>
-        </p:nvSpPr>
-        <p:spPr>
-          <a:xfrm>
-            <a:off x="640080" y="5907024"/>
-            <a:ext cx="10911535" cy="310896"/>
+              <a:t>Protective equipment, how to call backup, and who decides on a police call differ by site.</a:t>
+            </a:r>
+            <a:endParaRPr lang="en-US" sz="900" dirty="0"/>
+          </a:p>
+        </p:txBody>
+      </p:sp>
+      <p:sp>
+        <p:nvSpPr>
+          <p:cNvPr id="29" name="Text 26"/>
+          <p:cNvSpPr/>
+          <p:nvPr/>
+        </p:nvSpPr>
+        <p:spPr>
+          <a:xfrm>
+            <a:off x="640080" y="6272784"/>
+            <a:ext cx="9905695" cy="219456"/>
           </a:xfrm>
           <a:prstGeom prst="rect">
             <a:avLst/>
@@ -6427,167 +6506,88 @@
           <a:lstStyle/>
           <a:p>
             <a:pPr indent="0" marL="0">
-              <a:lnSpc>
-                <a:spcPct val="88000"/>
-              </a:lnSpc>
-              <a:buNone/>
-            </a:pPr>
-            <a:r>
-              <a:rPr lang="en-US" sz="900" b="1" dirty="0">
-                <a:solidFill>
-                  <a:srgbClr val="0D8A76"/>
-                </a:solidFill>
-                <a:latin typeface="Yu Gothic" pitchFamily="34" charset="0"/>
-                <a:ea typeface="Yu Gothic" pitchFamily="34" charset="-122"/>
-                <a:cs typeface="Yu Gothic" pitchFamily="34" charset="-120"/>
-              </a:rPr>
-              <a:t>Site SOP優先　</a:t>
-            </a:r>
-            <a:pPr indent="0" marL="0">
-              <a:lnSpc>
-                <a:spcPct val="88000"/>
-              </a:lnSpc>
+              <a:buNone/>
+            </a:pPr>
+            <a:r>
+              <a:rPr lang="en-US" sz="750" b="1" dirty="0">
+                <a:solidFill>
+                  <a:srgbClr val="D6E0E9"/>
+                </a:solidFill>
+                <a:latin typeface="Yu Gothic" pitchFamily="34" charset="0"/>
+                <a:ea typeface="Yu Gothic" pitchFamily="34" charset="-122"/>
+                <a:cs typeface="Yu Gothic" pitchFamily="34" charset="-120"/>
+              </a:rPr>
+              <a:t>ソース　</a:t>
+            </a:r>
+            <a:pPr indent="0" marL="0">
+              <a:buNone/>
+            </a:pPr>
+            <a:r>
+              <a:rPr lang="en-US" sz="750" dirty="0">
+                <a:solidFill>
+                  <a:srgbClr val="5F7183"/>
+                </a:solidFill>
+                <a:latin typeface="Yu Gothic" pitchFamily="34" charset="0"/>
+                <a:ea typeface="Yu Gothic" pitchFamily="34" charset="-122"/>
+                <a:cs typeface="Yu Gothic" pitchFamily="34" charset="-120"/>
+              </a:rPr>
+              <a:t>警備業法、刑法、刑事訴訟法、警察官職務執行法</a:t>
+            </a:r>
+            <a:endParaRPr lang="en-US" sz="750" dirty="0"/>
+          </a:p>
+        </p:txBody>
+      </p:sp>
+      <p:sp>
+        <p:nvSpPr>
+          <p:cNvPr id="30" name="Text 27"/>
+          <p:cNvSpPr/>
+          <p:nvPr/>
+        </p:nvSpPr>
+        <p:spPr>
+          <a:xfrm>
+            <a:off x="640080" y="6492240"/>
+            <a:ext cx="8778240" cy="292608"/>
+          </a:xfrm>
+          <a:prstGeom prst="rect">
+            <a:avLst/>
+          </a:prstGeom>
+          <a:noFill/>
+          <a:ln/>
+        </p:spPr>
+        <p:txBody>
+          <a:bodyPr wrap="square" lIns="0" tIns="0" rIns="0" bIns="0" rtlCol="0" anchor="ctr"/>
+          <a:lstStyle/>
+          <a:p>
+            <a:pPr indent="0" marL="0">
               <a:buNone/>
             </a:pPr>
             <a:r>
               <a:rPr lang="en-US" sz="900" dirty="0">
                 <a:solidFill>
-                  <a:srgbClr val="1B2733"/>
-                </a:solidFill>
-                <a:latin typeface="Yu Gothic" pitchFamily="34" charset="0"/>
-                <a:ea typeface="Yu Gothic" pitchFamily="34" charset="-122"/>
-                <a:cs typeface="Yu Gothic" pitchFamily="34" charset="-120"/>
-              </a:rPr>
-              <a:t>護身用具の有無、応援要請の方法、通報の判断者は現場ごとに異なる。Site SOPに従う。</a:t>
+                  <a:srgbClr val="5F7183"/>
+                </a:solidFill>
+                <a:latin typeface="Yu Gothic" pitchFamily="34" charset="0"/>
+                <a:ea typeface="Yu Gothic" pitchFamily="34" charset="-122"/>
+                <a:cs typeface="Yu Gothic" pitchFamily="34" charset="-120"/>
+              </a:rPr>
+              <a:t>第5時限｜業務別教育2 その他当該警備業務を適正に実施するため必要な知識及び技能  </a:t>
+            </a:r>
+            <a:pPr indent="0" marL="0">
+              <a:buNone/>
+            </a:pPr>
+            <a:r>
+              <a:rPr lang="en-US" sz="850" i="1" dirty="0">
+                <a:solidFill>
+                  <a:srgbClr val="D6E0E9"/>
+                </a:solidFill>
+                <a:latin typeface="Calibri" pitchFamily="34" charset="0"/>
+                <a:ea typeface="Calibri" pitchFamily="34" charset="-122"/>
+                <a:cs typeface="Calibri" pitchFamily="34" charset="-120"/>
+              </a:rPr>
+              <a:t>Period 5 | Task-Specific Training 2 — De-escalation</a:t>
             </a:r>
             <a:endParaRPr lang="en-US" sz="900" dirty="0"/>
           </a:p>
-          <a:p>
-            <a:pPr indent="0" marL="0">
-              <a:lnSpc>
-                <a:spcPct val="88000"/>
-              </a:lnSpc>
-              <a:buNone/>
-            </a:pPr>
-            <a:r>
-              <a:rPr lang="en-US" sz="750" i="1" dirty="0">
-                <a:solidFill>
-                  <a:srgbClr val="5F7183"/>
-                </a:solidFill>
-                <a:latin typeface="Calibri" pitchFamily="34" charset="0"/>
-                <a:ea typeface="Calibri" pitchFamily="34" charset="-122"/>
-                <a:cs typeface="Calibri" pitchFamily="34" charset="-120"/>
-              </a:rPr>
-              <a:t>Protective equipment, how to call backup, and who decides on a police call differ by site.</a:t>
-            </a:r>
-            <a:endParaRPr lang="en-US" sz="900" dirty="0"/>
-          </a:p>
-        </p:txBody>
-      </p:sp>
-      <p:sp>
-        <p:nvSpPr>
-          <p:cNvPr id="29" name="Text 26"/>
-          <p:cNvSpPr/>
-          <p:nvPr/>
-        </p:nvSpPr>
-        <p:spPr>
-          <a:xfrm>
-            <a:off x="640080" y="6272784"/>
-            <a:ext cx="9905695" cy="237744"/>
-          </a:xfrm>
-          <a:prstGeom prst="rect">
-            <a:avLst/>
-          </a:prstGeom>
-          <a:noFill/>
-          <a:ln/>
-        </p:spPr>
-        <p:txBody>
-          <a:bodyPr wrap="square" lIns="0" tIns="0" rIns="0" bIns="0" rtlCol="0" anchor="t"/>
-          <a:lstStyle/>
-          <a:p>
-            <a:pPr indent="0" marL="0">
-              <a:buNone/>
-            </a:pPr>
-            <a:r>
-              <a:rPr lang="en-US" sz="750" b="1" dirty="0">
-                <a:solidFill>
-                  <a:srgbClr val="D6E0E9"/>
-                </a:solidFill>
-                <a:latin typeface="Yu Gothic" pitchFamily="34" charset="0"/>
-                <a:ea typeface="Yu Gothic" pitchFamily="34" charset="-122"/>
-                <a:cs typeface="Yu Gothic" pitchFamily="34" charset="-120"/>
-              </a:rPr>
-              <a:t>ソース　</a:t>
-            </a:r>
-            <a:pPr indent="0" marL="0">
-              <a:buNone/>
-            </a:pPr>
-            <a:r>
-              <a:rPr lang="en-US" sz="750" dirty="0">
-                <a:solidFill>
-                  <a:srgbClr val="5F7183"/>
-                </a:solidFill>
-                <a:latin typeface="Yu Gothic" pitchFamily="34" charset="0"/>
-                <a:ea typeface="Yu Gothic" pitchFamily="34" charset="-122"/>
-                <a:cs typeface="Yu Gothic" pitchFamily="34" charset="-120"/>
-              </a:rPr>
-              <a:t>警備業法、刑法、刑事訴訟法、警察官職務執行法</a:t>
-            </a:r>
-            <a:endParaRPr lang="en-US" sz="750" dirty="0"/>
-          </a:p>
-        </p:txBody>
-      </p:sp>
-      <p:sp>
-        <p:nvSpPr>
-          <p:cNvPr id="30" name="Text 27"/>
-          <p:cNvSpPr/>
-          <p:nvPr/>
-        </p:nvSpPr>
-        <p:spPr>
-          <a:xfrm>
-            <a:off x="640080" y="6382512"/>
-            <a:ext cx="8778240" cy="292608"/>
-          </a:xfrm>
-          <a:prstGeom prst="rect">
-            <a:avLst/>
-          </a:prstGeom>
-          <a:noFill/>
-          <a:ln/>
-        </p:spPr>
-        <p:txBody>
-          <a:bodyPr wrap="square" lIns="0" tIns="0" rIns="0" bIns="0" rtlCol="0" anchor="ctr"/>
-          <a:lstStyle/>
-          <a:p>
-            <a:pPr indent="0" marL="0">
-              <a:buNone/>
-            </a:pPr>
-            <a:r>
-              <a:rPr lang="en-US" sz="900" dirty="0">
-                <a:solidFill>
-                  <a:srgbClr val="5F7183"/>
-                </a:solidFill>
-                <a:latin typeface="Yu Gothic" pitchFamily="34" charset="0"/>
-                <a:ea typeface="Yu Gothic" pitchFamily="34" charset="-122"/>
-                <a:cs typeface="Yu Gothic" pitchFamily="34" charset="-120"/>
-              </a:rPr>
-              <a:t>第5時限｜業務別教育2 その他当該警備業務を適正に実施するため必要な知識及び技能  </a:t>
-            </a:r>
-            <a:pPr indent="0" marL="0">
-              <a:buNone/>
-            </a:pPr>
-            <a:r>
-              <a:rPr lang="en-US" sz="850" i="1" dirty="0">
-                <a:solidFill>
-                  <a:srgbClr val="D6E0E9"/>
-                </a:solidFill>
-                <a:latin typeface="Calibri" pitchFamily="34" charset="0"/>
-                <a:ea typeface="Calibri" pitchFamily="34" charset="-122"/>
-                <a:cs typeface="Calibri" pitchFamily="34" charset="-120"/>
-              </a:rPr>
-              <a:t>Period 5 | Task-Specific Training 2 — De-escalation</a:t>
-            </a:r>
-            <a:endParaRPr lang="en-US" sz="900" dirty="0"/>
-          </a:p>
         </p:txBody>
       </p:sp>
       <p:sp>
@@ -6598,7 +6598,7 @@
         </p:nvSpPr>
         <p:spPr>
           <a:xfrm>
-            <a:off x="10637215" y="6382512"/>
+            <a:off x="10637215" y="6492240"/>
             <a:ext cx="914400" cy="292608"/>
           </a:xfrm>
           <a:prstGeom prst="rect">
@@ -6733,7 +6733,7 @@
               <a:buNone/>
             </a:pPr>
             <a:r>
-              <a:rPr lang="en-US" sz="1250" i="1" dirty="0">
+              <a:rPr lang="en-US" sz="1350" dirty="0">
                 <a:solidFill>
                   <a:srgbClr val="12B198"/>
                 </a:solidFill>
@@ -6795,9 +6795,9 @@
               <a:buNone/>
             </a:pPr>
             <a:r>
-              <a:rPr lang="en-US" sz="1000" i="1" dirty="0">
-                <a:solidFill>
-                  <a:srgbClr val="5F7183"/>
+              <a:rPr lang="en-US" sz="1000" dirty="0">
+                <a:solidFill>
+                  <a:srgbClr val="1B2733"/>
                 </a:solidFill>
                 <a:latin typeface="Calibri" pitchFamily="34" charset="0"/>
                 <a:ea typeface="Calibri" pitchFamily="34" charset="-122"/>
@@ -6938,9 +6938,9 @@
               <a:buNone/>
             </a:pPr>
             <a:r>
-              <a:rPr lang="en-US" sz="900" i="1" dirty="0">
-                <a:solidFill>
-                  <a:srgbClr val="5F7183"/>
+              <a:rPr lang="en-US" sz="1050" dirty="0">
+                <a:solidFill>
+                  <a:srgbClr val="1B2733"/>
                 </a:solidFill>
                 <a:latin typeface="Calibri" pitchFamily="34" charset="0"/>
                 <a:ea typeface="Calibri" pitchFamily="34" charset="-122"/>
@@ -7081,9 +7081,9 @@
               <a:buNone/>
             </a:pPr>
             <a:r>
-              <a:rPr lang="en-US" sz="900" i="1" dirty="0">
-                <a:solidFill>
-                  <a:srgbClr val="5F7183"/>
+              <a:rPr lang="en-US" sz="1050" dirty="0">
+                <a:solidFill>
+                  <a:srgbClr val="1B2733"/>
                 </a:solidFill>
                 <a:latin typeface="Calibri" pitchFamily="34" charset="0"/>
                 <a:ea typeface="Calibri" pitchFamily="34" charset="-122"/>
@@ -7224,9 +7224,9 @@
               <a:buNone/>
             </a:pPr>
             <a:r>
-              <a:rPr lang="en-US" sz="900" i="1" dirty="0">
-                <a:solidFill>
-                  <a:srgbClr val="5F7183"/>
+              <a:rPr lang="en-US" sz="1050" dirty="0">
+                <a:solidFill>
+                  <a:srgbClr val="1B2733"/>
                 </a:solidFill>
                 <a:latin typeface="Calibri" pitchFamily="34" charset="0"/>
                 <a:ea typeface="Calibri" pitchFamily="34" charset="-122"/>
@@ -7367,9 +7367,9 @@
               <a:buNone/>
             </a:pPr>
             <a:r>
-              <a:rPr lang="en-US" sz="900" i="1" dirty="0">
-                <a:solidFill>
-                  <a:srgbClr val="5F7183"/>
+              <a:rPr lang="en-US" sz="1050" dirty="0">
+                <a:solidFill>
+                  <a:srgbClr val="1B2733"/>
                 </a:solidFill>
                 <a:latin typeface="Calibri" pitchFamily="34" charset="0"/>
                 <a:ea typeface="Calibri" pitchFamily="34" charset="-122"/>
@@ -7510,9 +7510,9 @@
               <a:buNone/>
             </a:pPr>
             <a:r>
-              <a:rPr lang="en-US" sz="900" i="1" dirty="0">
-                <a:solidFill>
-                  <a:srgbClr val="5F7183"/>
+              <a:rPr lang="en-US" sz="1050" dirty="0">
+                <a:solidFill>
+                  <a:srgbClr val="1B2733"/>
                 </a:solidFill>
                 <a:latin typeface="Calibri" pitchFamily="34" charset="0"/>
                 <a:ea typeface="Calibri" pitchFamily="34" charset="-122"/>
@@ -7653,9 +7653,9 @@
               <a:buNone/>
             </a:pPr>
             <a:r>
-              <a:rPr lang="en-US" sz="900" i="1" dirty="0">
-                <a:solidFill>
-                  <a:srgbClr val="5F7183"/>
+              <a:rPr lang="en-US" sz="1050" dirty="0">
+                <a:solidFill>
+                  <a:srgbClr val="1B2733"/>
                 </a:solidFill>
                 <a:latin typeface="Calibri" pitchFamily="34" charset="0"/>
                 <a:ea typeface="Calibri" pitchFamily="34" charset="-122"/>
@@ -7796,9 +7796,9 @@
               <a:buNone/>
             </a:pPr>
             <a:r>
-              <a:rPr lang="en-US" sz="900" i="1" dirty="0">
-                <a:solidFill>
-                  <a:srgbClr val="5F7183"/>
+              <a:rPr lang="en-US" sz="1050" dirty="0">
+                <a:solidFill>
+                  <a:srgbClr val="1B2733"/>
                 </a:solidFill>
                 <a:latin typeface="Calibri" pitchFamily="34" charset="0"/>
                 <a:ea typeface="Calibri" pitchFamily="34" charset="-122"/>
@@ -7939,49 +7939,49 @@
               <a:buNone/>
             </a:pPr>
             <a:r>
-              <a:rPr lang="en-US" sz="900" i="1" dirty="0">
+              <a:rPr lang="en-US" sz="1050" dirty="0">
+                <a:solidFill>
+                  <a:srgbClr val="1B2733"/>
+                </a:solidFill>
+                <a:latin typeface="Calibri" pitchFamily="34" charset="0"/>
+                <a:ea typeface="Calibri" pitchFamily="34" charset="-122"/>
+                <a:cs typeface="Calibri" pitchFamily="34" charset="-120"/>
+              </a:rPr>
+              <a:t>Refusing to leave. The request must come from the authority.</a:t>
+            </a:r>
+            <a:endParaRPr lang="en-US" sz="1150" dirty="0"/>
+          </a:p>
+        </p:txBody>
+      </p:sp>
+      <p:sp>
+        <p:nvSpPr>
+          <p:cNvPr id="37" name="Text 34"/>
+          <p:cNvSpPr/>
+          <p:nvPr/>
+        </p:nvSpPr>
+        <p:spPr>
+          <a:xfrm>
+            <a:off x="640080" y="6492240"/>
+            <a:ext cx="8778240" cy="292608"/>
+          </a:xfrm>
+          <a:prstGeom prst="rect">
+            <a:avLst/>
+          </a:prstGeom>
+          <a:noFill/>
+          <a:ln/>
+        </p:spPr>
+        <p:txBody>
+          <a:bodyPr wrap="square" lIns="0" tIns="0" rIns="0" bIns="0" rtlCol="0" anchor="ctr"/>
+          <a:lstStyle/>
+          <a:p>
+            <a:pPr indent="0" marL="0">
+              <a:buNone/>
+            </a:pPr>
+            <a:r>
+              <a:rPr lang="en-US" sz="900" dirty="0">
                 <a:solidFill>
                   <a:srgbClr val="5F7183"/>
                 </a:solidFill>
-                <a:latin typeface="Calibri" pitchFamily="34" charset="0"/>
-                <a:ea typeface="Calibri" pitchFamily="34" charset="-122"/>
-                <a:cs typeface="Calibri" pitchFamily="34" charset="-120"/>
-              </a:rPr>
-              <a:t>Refusing to leave. The request must come from the authority.</a:t>
-            </a:r>
-            <a:endParaRPr lang="en-US" sz="1150" dirty="0"/>
-          </a:p>
-        </p:txBody>
-      </p:sp>
-      <p:sp>
-        <p:nvSpPr>
-          <p:cNvPr id="37" name="Text 34"/>
-          <p:cNvSpPr/>
-          <p:nvPr/>
-        </p:nvSpPr>
-        <p:spPr>
-          <a:xfrm>
-            <a:off x="640080" y="6382512"/>
-            <a:ext cx="8778240" cy="292608"/>
-          </a:xfrm>
-          <a:prstGeom prst="rect">
-            <a:avLst/>
-          </a:prstGeom>
-          <a:noFill/>
-          <a:ln/>
-        </p:spPr>
-        <p:txBody>
-          <a:bodyPr wrap="square" lIns="0" tIns="0" rIns="0" bIns="0" rtlCol="0" anchor="ctr"/>
-          <a:lstStyle/>
-          <a:p>
-            <a:pPr indent="0" marL="0">
-              <a:buNone/>
-            </a:pPr>
-            <a:r>
-              <a:rPr lang="en-US" sz="900" dirty="0">
-                <a:solidFill>
-                  <a:srgbClr val="5F7183"/>
-                </a:solidFill>
                 <a:latin typeface="Yu Gothic" pitchFamily="34" charset="0"/>
                 <a:ea typeface="Yu Gothic" pitchFamily="34" charset="-122"/>
                 <a:cs typeface="Yu Gothic" pitchFamily="34" charset="-120"/>
@@ -8014,7 +8014,7 @@
         </p:nvSpPr>
         <p:spPr>
           <a:xfrm>
-            <a:off x="10637215" y="6382512"/>
+            <a:off x="10637215" y="6492240"/>
             <a:ext cx="914400" cy="292608"/>
           </a:xfrm>
           <a:prstGeom prst="rect">
@@ -8109,8 +8109,8 @@
         </p:nvSpPr>
         <p:spPr>
           <a:xfrm>
-            <a:off x="640080" y="384048"/>
-            <a:ext cx="8982151" cy="768096"/>
+            <a:off x="640080" y="365760"/>
+            <a:ext cx="8982151" cy="749808"/>
           </a:xfrm>
           <a:prstGeom prst="rect">
             <a:avLst/>
@@ -8149,7 +8149,7 @@
               <a:buNone/>
             </a:pPr>
             <a:r>
-              <a:rPr lang="en-US" sz="1100" i="1" dirty="0">
+              <a:rPr lang="en-US" sz="1100" dirty="0">
                 <a:solidFill>
                   <a:srgbClr val="12B198"/>
                 </a:solidFill>
@@ -8171,7 +8171,7 @@
         </p:nvSpPr>
         <p:spPr>
           <a:xfrm>
-            <a:off x="9686239" y="438912"/>
+            <a:off x="9686239" y="420624"/>
             <a:ext cx="932688" cy="310896"/>
           </a:xfrm>
           <a:prstGeom prst="roundRect">
@@ -8193,7 +8193,7 @@
         </p:nvSpPr>
         <p:spPr>
           <a:xfrm>
-            <a:off x="9686239" y="438912"/>
+            <a:off x="9686239" y="420624"/>
             <a:ext cx="932688" cy="310896"/>
           </a:xfrm>
           <a:prstGeom prst="rect">
@@ -8232,12 +8232,12 @@
         </p:nvSpPr>
         <p:spPr>
           <a:xfrm>
-            <a:off x="640080" y="1188720"/>
-            <a:ext cx="10911535" cy="530352"/>
+            <a:off x="640080" y="1115568"/>
+            <a:ext cx="10911535" cy="585216"/>
           </a:xfrm>
           <a:prstGeom prst="roundRect">
             <a:avLst>
-              <a:gd name="adj" fmla="val 6897"/>
+              <a:gd name="adj" fmla="val 6250"/>
             </a:avLst>
           </a:prstGeom>
           <a:solidFill>
@@ -8254,8 +8254,8 @@
         </p:nvSpPr>
         <p:spPr>
           <a:xfrm>
-            <a:off x="877824" y="1234440"/>
-            <a:ext cx="10436047" cy="438912"/>
+            <a:off x="877824" y="1161288"/>
+            <a:ext cx="10436047" cy="493776"/>
           </a:xfrm>
           <a:prstGeom prst="rect">
             <a:avLst/>
@@ -8291,7 +8291,7 @@
               <a:buNone/>
             </a:pPr>
             <a:r>
-              <a:rPr lang="en-US" sz="800" dirty="0">
+              <a:rPr lang="en-US" sz="900" dirty="0">
                 <a:solidFill>
                   <a:srgbClr val="0D8A76"/>
                 </a:solidFill>
@@ -8328,9 +8328,9 @@
               <a:buNone/>
             </a:pPr>
             <a:r>
-              <a:rPr lang="en-US" sz="850" i="1" dirty="0">
-                <a:solidFill>
-                  <a:srgbClr val="5F7183"/>
+              <a:rPr lang="en-US" sz="1050" dirty="0">
+                <a:solidFill>
+                  <a:srgbClr val="1B2733"/>
                 </a:solidFill>
                 <a:latin typeface="Calibri" pitchFamily="34" charset="0"/>
                 <a:ea typeface="Calibri" pitchFamily="34" charset="-122"/>
@@ -8350,12 +8350,12 @@
         </p:nvSpPr>
         <p:spPr>
           <a:xfrm>
-            <a:off x="640080" y="1810512"/>
-            <a:ext cx="5327752" cy="1920240"/>
+            <a:off x="640080" y="1773936"/>
+            <a:ext cx="5327752" cy="1965960"/>
           </a:xfrm>
           <a:prstGeom prst="roundRect">
             <a:avLst>
-              <a:gd name="adj" fmla="val 1905"/>
+              <a:gd name="adj" fmla="val 1860"/>
             </a:avLst>
           </a:prstGeom>
           <a:solidFill>
@@ -8372,7 +8372,7 @@
         </p:nvSpPr>
         <p:spPr>
           <a:xfrm>
-            <a:off x="822960" y="1975104"/>
+            <a:off x="822960" y="1938528"/>
             <a:ext cx="310896" cy="310896"/>
           </a:xfrm>
           <a:prstGeom prst="ellipse">
@@ -8392,7 +8392,7 @@
         </p:nvSpPr>
         <p:spPr>
           <a:xfrm>
-            <a:off x="822960" y="1975104"/>
+            <a:off x="822960" y="1938528"/>
             <a:ext cx="310896" cy="310896"/>
           </a:xfrm>
           <a:prstGeom prst="rect">
@@ -8431,7 +8431,7 @@
         </p:nvSpPr>
         <p:spPr>
           <a:xfrm>
-            <a:off x="1207008" y="1938528"/>
+            <a:off x="1207008" y="1901952"/>
             <a:ext cx="4559656" cy="512064"/>
           </a:xfrm>
           <a:prstGeom prst="rect">
@@ -8471,7 +8471,7 @@
               <a:buNone/>
             </a:pPr>
             <a:r>
-              <a:rPr lang="en-US" sz="800" i="1" dirty="0">
+              <a:rPr lang="en-US" sz="1050" dirty="0">
                 <a:solidFill>
                   <a:srgbClr val="12B198"/>
                 </a:solidFill>
@@ -8493,8 +8493,8 @@
         </p:nvSpPr>
         <p:spPr>
           <a:xfrm>
-            <a:off x="859536" y="2487168"/>
-            <a:ext cx="4888840" cy="1097280"/>
+            <a:off x="859536" y="2450592"/>
+            <a:ext cx="4888840" cy="1143000"/>
           </a:xfrm>
           <a:prstGeom prst="rect">
             <a:avLst/>
@@ -8539,9 +8539,9 @@
               <a:buNone/>
             </a:pPr>
             <a:r>
-              <a:rPr lang="en-US" sz="750" i="1" dirty="0">
-                <a:solidFill>
-                  <a:srgbClr val="5F7183"/>
+              <a:rPr lang="en-US" sz="950" dirty="0">
+                <a:solidFill>
+                  <a:srgbClr val="1B2733"/>
                 </a:solidFill>
                 <a:latin typeface="Calibri" pitchFamily="34" charset="0"/>
                 <a:ea typeface="Calibri" pitchFamily="34" charset="-122"/>
@@ -8585,9 +8585,9 @@
               <a:buNone/>
             </a:pPr>
             <a:r>
-              <a:rPr lang="en-US" sz="750" i="1" dirty="0">
-                <a:solidFill>
-                  <a:srgbClr val="5F7183"/>
+              <a:rPr lang="en-US" sz="950" dirty="0">
+                <a:solidFill>
+                  <a:srgbClr val="1B2733"/>
                 </a:solidFill>
                 <a:latin typeface="Calibri" pitchFamily="34" charset="0"/>
                 <a:ea typeface="Calibri" pitchFamily="34" charset="-122"/>
@@ -8631,9 +8631,9 @@
               <a:buNone/>
             </a:pPr>
             <a:r>
-              <a:rPr lang="en-US" sz="750" i="1" dirty="0">
-                <a:solidFill>
-                  <a:srgbClr val="5F7183"/>
+              <a:rPr lang="en-US" sz="950" dirty="0">
+                <a:solidFill>
+                  <a:srgbClr val="1B2733"/>
                 </a:solidFill>
                 <a:latin typeface="Calibri" pitchFamily="34" charset="0"/>
                 <a:ea typeface="Calibri" pitchFamily="34" charset="-122"/>
@@ -8677,9 +8677,9 @@
               <a:buNone/>
             </a:pPr>
             <a:r>
-              <a:rPr lang="en-US" sz="750" i="1" dirty="0">
-                <a:solidFill>
-                  <a:srgbClr val="5F7183"/>
+              <a:rPr lang="en-US" sz="950" dirty="0">
+                <a:solidFill>
+                  <a:srgbClr val="1B2733"/>
                 </a:solidFill>
                 <a:latin typeface="Calibri" pitchFamily="34" charset="0"/>
                 <a:ea typeface="Calibri" pitchFamily="34" charset="-122"/>
@@ -8699,12 +8699,12 @@
         </p:nvSpPr>
         <p:spPr>
           <a:xfrm>
-            <a:off x="6223864" y="1810512"/>
-            <a:ext cx="5327752" cy="1920240"/>
+            <a:off x="6223864" y="1773936"/>
+            <a:ext cx="5327752" cy="1965960"/>
           </a:xfrm>
           <a:prstGeom prst="roundRect">
             <a:avLst>
-              <a:gd name="adj" fmla="val 1905"/>
+              <a:gd name="adj" fmla="val 1860"/>
             </a:avLst>
           </a:prstGeom>
           <a:solidFill>
@@ -8721,7 +8721,7 @@
         </p:nvSpPr>
         <p:spPr>
           <a:xfrm>
-            <a:off x="6406744" y="1975104"/>
+            <a:off x="6406744" y="1938528"/>
             <a:ext cx="310896" cy="310896"/>
           </a:xfrm>
           <a:prstGeom prst="ellipse">
@@ -8741,7 +8741,7 @@
         </p:nvSpPr>
         <p:spPr>
           <a:xfrm>
-            <a:off x="6406744" y="1975104"/>
+            <a:off x="6406744" y="1938528"/>
             <a:ext cx="310896" cy="310896"/>
           </a:xfrm>
           <a:prstGeom prst="rect">
@@ -8780,7 +8780,7 @@
         </p:nvSpPr>
         <p:spPr>
           <a:xfrm>
-            <a:off x="6790792" y="1938528"/>
+            <a:off x="6790792" y="1901952"/>
             <a:ext cx="4559656" cy="512064"/>
           </a:xfrm>
           <a:prstGeom prst="rect">
@@ -8820,7 +8820,7 @@
               <a:buNone/>
             </a:pPr>
             <a:r>
-              <a:rPr lang="en-US" sz="800" i="1" dirty="0">
+              <a:rPr lang="en-US" sz="1050" dirty="0">
                 <a:solidFill>
                   <a:srgbClr val="12B198"/>
                 </a:solidFill>
@@ -8842,8 +8842,8 @@
         </p:nvSpPr>
         <p:spPr>
           <a:xfrm>
-            <a:off x="6443320" y="2487168"/>
-            <a:ext cx="4888840" cy="1097280"/>
+            <a:off x="6443320" y="2450592"/>
+            <a:ext cx="4888840" cy="1143000"/>
           </a:xfrm>
           <a:prstGeom prst="rect">
             <a:avLst/>
@@ -8888,9 +8888,9 @@
               <a:buNone/>
             </a:pPr>
             <a:r>
-              <a:rPr lang="en-US" sz="750" i="1" dirty="0">
-                <a:solidFill>
-                  <a:srgbClr val="5F7183"/>
+              <a:rPr lang="en-US" sz="950" dirty="0">
+                <a:solidFill>
+                  <a:srgbClr val="1B2733"/>
                 </a:solidFill>
                 <a:latin typeface="Calibri" pitchFamily="34" charset="0"/>
                 <a:ea typeface="Calibri" pitchFamily="34" charset="-122"/>
@@ -8934,9 +8934,9 @@
               <a:buNone/>
             </a:pPr>
             <a:r>
-              <a:rPr lang="en-US" sz="750" i="1" dirty="0">
-                <a:solidFill>
-                  <a:srgbClr val="5F7183"/>
+              <a:rPr lang="en-US" sz="950" dirty="0">
+                <a:solidFill>
+                  <a:srgbClr val="1B2733"/>
                 </a:solidFill>
                 <a:latin typeface="Calibri" pitchFamily="34" charset="0"/>
                 <a:ea typeface="Calibri" pitchFamily="34" charset="-122"/>
@@ -8980,9 +8980,9 @@
               <a:buNone/>
             </a:pPr>
             <a:r>
-              <a:rPr lang="en-US" sz="750" i="1" dirty="0">
-                <a:solidFill>
-                  <a:srgbClr val="5F7183"/>
+              <a:rPr lang="en-US" sz="950" dirty="0">
+                <a:solidFill>
+                  <a:srgbClr val="1B2733"/>
                 </a:solidFill>
                 <a:latin typeface="Calibri" pitchFamily="34" charset="0"/>
                 <a:ea typeface="Calibri" pitchFamily="34" charset="-122"/>
@@ -9026,9 +9026,9 @@
               <a:buNone/>
             </a:pPr>
             <a:r>
-              <a:rPr lang="en-US" sz="750" i="1" dirty="0">
-                <a:solidFill>
-                  <a:srgbClr val="5F7183"/>
+              <a:rPr lang="en-US" sz="950" dirty="0">
+                <a:solidFill>
+                  <a:srgbClr val="1B2733"/>
                 </a:solidFill>
                 <a:latin typeface="Calibri" pitchFamily="34" charset="0"/>
                 <a:ea typeface="Calibri" pitchFamily="34" charset="-122"/>
@@ -9048,12 +9048,12 @@
         </p:nvSpPr>
         <p:spPr>
           <a:xfrm>
-            <a:off x="640080" y="3931920"/>
-            <a:ext cx="5327752" cy="1920240"/>
+            <a:off x="640080" y="3941064"/>
+            <a:ext cx="5327752" cy="1965960"/>
           </a:xfrm>
           <a:prstGeom prst="roundRect">
             <a:avLst>
-              <a:gd name="adj" fmla="val 1905"/>
+              <a:gd name="adj" fmla="val 1860"/>
             </a:avLst>
           </a:prstGeom>
           <a:solidFill>
@@ -9070,7 +9070,7 @@
         </p:nvSpPr>
         <p:spPr>
           <a:xfrm>
-            <a:off x="822960" y="4096512"/>
+            <a:off x="822960" y="4105656"/>
             <a:ext cx="310896" cy="310896"/>
           </a:xfrm>
           <a:prstGeom prst="ellipse">
@@ -9090,7 +9090,7 @@
         </p:nvSpPr>
         <p:spPr>
           <a:xfrm>
-            <a:off x="822960" y="4096512"/>
+            <a:off x="822960" y="4105656"/>
             <a:ext cx="310896" cy="310896"/>
           </a:xfrm>
           <a:prstGeom prst="rect">
@@ -9129,7 +9129,7 @@
         </p:nvSpPr>
         <p:spPr>
           <a:xfrm>
-            <a:off x="1207008" y="4059936"/>
+            <a:off x="1207008" y="4069080"/>
             <a:ext cx="4559656" cy="512064"/>
           </a:xfrm>
           <a:prstGeom prst="rect">
@@ -9169,7 +9169,7 @@
               <a:buNone/>
             </a:pPr>
             <a:r>
-              <a:rPr lang="en-US" sz="800" i="1" dirty="0">
+              <a:rPr lang="en-US" sz="1050" dirty="0">
                 <a:solidFill>
                   <a:srgbClr val="12B198"/>
                 </a:solidFill>
@@ -9191,8 +9191,8 @@
         </p:nvSpPr>
         <p:spPr>
           <a:xfrm>
-            <a:off x="859536" y="4608576"/>
-            <a:ext cx="4888840" cy="1097280"/>
+            <a:off x="859536" y="4617720"/>
+            <a:ext cx="4888840" cy="1143000"/>
           </a:xfrm>
           <a:prstGeom prst="rect">
             <a:avLst/>
@@ -9237,9 +9237,9 @@
               <a:buNone/>
             </a:pPr>
             <a:r>
-              <a:rPr lang="en-US" sz="750" i="1" dirty="0">
-                <a:solidFill>
-                  <a:srgbClr val="5F7183"/>
+              <a:rPr lang="en-US" sz="950" dirty="0">
+                <a:solidFill>
+                  <a:srgbClr val="1B2733"/>
                 </a:solidFill>
                 <a:latin typeface="Calibri" pitchFamily="34" charset="0"/>
                 <a:ea typeface="Calibri" pitchFamily="34" charset="-122"/>
@@ -9283,9 +9283,9 @@
               <a:buNone/>
             </a:pPr>
             <a:r>
-              <a:rPr lang="en-US" sz="750" i="1" dirty="0">
-                <a:solidFill>
-                  <a:srgbClr val="5F7183"/>
+              <a:rPr lang="en-US" sz="950" dirty="0">
+                <a:solidFill>
+                  <a:srgbClr val="1B2733"/>
                 </a:solidFill>
                 <a:latin typeface="Calibri" pitchFamily="34" charset="0"/>
                 <a:ea typeface="Calibri" pitchFamily="34" charset="-122"/>
@@ -9329,9 +9329,9 @@
               <a:buNone/>
             </a:pPr>
             <a:r>
-              <a:rPr lang="en-US" sz="750" i="1" dirty="0">
-                <a:solidFill>
-                  <a:srgbClr val="5F7183"/>
+              <a:rPr lang="en-US" sz="950" dirty="0">
+                <a:solidFill>
+                  <a:srgbClr val="1B2733"/>
                 </a:solidFill>
                 <a:latin typeface="Calibri" pitchFamily="34" charset="0"/>
                 <a:ea typeface="Calibri" pitchFamily="34" charset="-122"/>
@@ -9375,9 +9375,9 @@
               <a:buNone/>
             </a:pPr>
             <a:r>
-              <a:rPr lang="en-US" sz="750" i="1" dirty="0">
-                <a:solidFill>
-                  <a:srgbClr val="5F7183"/>
+              <a:rPr lang="en-US" sz="950" dirty="0">
+                <a:solidFill>
+                  <a:srgbClr val="1B2733"/>
                 </a:solidFill>
                 <a:latin typeface="Calibri" pitchFamily="34" charset="0"/>
                 <a:ea typeface="Calibri" pitchFamily="34" charset="-122"/>
@@ -9397,12 +9397,12 @@
         </p:nvSpPr>
         <p:spPr>
           <a:xfrm>
-            <a:off x="6223864" y="3931920"/>
-            <a:ext cx="5327752" cy="1920240"/>
+            <a:off x="6223864" y="3941064"/>
+            <a:ext cx="5327752" cy="1965960"/>
           </a:xfrm>
           <a:prstGeom prst="roundRect">
             <a:avLst>
-              <a:gd name="adj" fmla="val 1905"/>
+              <a:gd name="adj" fmla="val 1860"/>
             </a:avLst>
           </a:prstGeom>
           <a:solidFill>
@@ -9419,7 +9419,7 @@
         </p:nvSpPr>
         <p:spPr>
           <a:xfrm>
-            <a:off x="6406744" y="4096512"/>
+            <a:off x="6406744" y="4105656"/>
             <a:ext cx="310896" cy="310896"/>
           </a:xfrm>
           <a:prstGeom prst="ellipse">
@@ -9439,7 +9439,7 @@
         </p:nvSpPr>
         <p:spPr>
           <a:xfrm>
-            <a:off x="6406744" y="4096512"/>
+            <a:off x="6406744" y="4105656"/>
             <a:ext cx="310896" cy="310896"/>
           </a:xfrm>
           <a:prstGeom prst="rect">
@@ -9478,7 +9478,7 @@
         </p:nvSpPr>
         <p:spPr>
           <a:xfrm>
-            <a:off x="6790792" y="4059936"/>
+            <a:off x="6790792" y="4069080"/>
             <a:ext cx="4559656" cy="512064"/>
           </a:xfrm>
           <a:prstGeom prst="rect">
@@ -9518,7 +9518,7 @@
               <a:buNone/>
             </a:pPr>
             <a:r>
-              <a:rPr lang="en-US" sz="800" i="1" dirty="0">
+              <a:rPr lang="en-US" sz="1050" dirty="0">
                 <a:solidFill>
                   <a:srgbClr val="12B198"/>
                 </a:solidFill>
@@ -9540,8 +9540,8 @@
         </p:nvSpPr>
         <p:spPr>
           <a:xfrm>
-            <a:off x="6443320" y="4608576"/>
-            <a:ext cx="4888840" cy="1097280"/>
+            <a:off x="6443320" y="4617720"/>
+            <a:ext cx="4888840" cy="1143000"/>
           </a:xfrm>
           <a:prstGeom prst="rect">
             <a:avLst/>
@@ -9586,9 +9586,9 @@
               <a:buNone/>
             </a:pPr>
             <a:r>
-              <a:rPr lang="en-US" sz="750" i="1" dirty="0">
-                <a:solidFill>
-                  <a:srgbClr val="5F7183"/>
+              <a:rPr lang="en-US" sz="950" dirty="0">
+                <a:solidFill>
+                  <a:srgbClr val="1B2733"/>
                 </a:solidFill>
                 <a:latin typeface="Calibri" pitchFamily="34" charset="0"/>
                 <a:ea typeface="Calibri" pitchFamily="34" charset="-122"/>
@@ -9632,9 +9632,9 @@
               <a:buNone/>
             </a:pPr>
             <a:r>
-              <a:rPr lang="en-US" sz="750" i="1" dirty="0">
-                <a:solidFill>
-                  <a:srgbClr val="5F7183"/>
+              <a:rPr lang="en-US" sz="950" dirty="0">
+                <a:solidFill>
+                  <a:srgbClr val="1B2733"/>
                 </a:solidFill>
                 <a:latin typeface="Calibri" pitchFamily="34" charset="0"/>
                 <a:ea typeface="Calibri" pitchFamily="34" charset="-122"/>
@@ -9678,9 +9678,9 @@
               <a:buNone/>
             </a:pPr>
             <a:r>
-              <a:rPr lang="en-US" sz="750" i="1" dirty="0">
-                <a:solidFill>
-                  <a:srgbClr val="5F7183"/>
+              <a:rPr lang="en-US" sz="950" dirty="0">
+                <a:solidFill>
+                  <a:srgbClr val="1B2733"/>
                 </a:solidFill>
                 <a:latin typeface="Calibri" pitchFamily="34" charset="0"/>
                 <a:ea typeface="Calibri" pitchFamily="34" charset="-122"/>
@@ -9724,7 +9724,86 @@
               <a:buNone/>
             </a:pPr>
             <a:r>
-              <a:rPr lang="en-US" sz="750" i="1" dirty="0">
+              <a:rPr lang="en-US" sz="950" dirty="0">
+                <a:solidFill>
+                  <a:srgbClr val="1B2733"/>
+                </a:solidFill>
+                <a:latin typeface="Calibri" pitchFamily="34" charset="0"/>
+                <a:ea typeface="Calibri" pitchFamily="34" charset="-122"/>
+                <a:cs typeface="Calibri" pitchFamily="34" charset="-120"/>
+              </a:rPr>
+              <a:t>  If you speak in another language, slowing down carries more than fluency</a:t>
+            </a:r>
+            <a:endParaRPr lang="en-US" sz="950" dirty="0"/>
+          </a:p>
+        </p:txBody>
+      </p:sp>
+      <p:sp>
+        <p:nvSpPr>
+          <p:cNvPr id="28" name="Text 25"/>
+          <p:cNvSpPr/>
+          <p:nvPr/>
+        </p:nvSpPr>
+        <p:spPr>
+          <a:xfrm>
+            <a:off x="640080" y="5961888"/>
+            <a:ext cx="10911535" cy="292608"/>
+          </a:xfrm>
+          <a:prstGeom prst="rect">
+            <a:avLst/>
+          </a:prstGeom>
+          <a:noFill/>
+          <a:ln/>
+        </p:spPr>
+        <p:txBody>
+          <a:bodyPr wrap="square" lIns="0" tIns="0" rIns="0" bIns="0" rtlCol="0" anchor="t"/>
+          <a:lstStyle/>
+          <a:p>
+            <a:pPr indent="0" marL="0">
+              <a:lnSpc>
+                <a:spcPct val="88000"/>
+              </a:lnSpc>
+              <a:buNone/>
+            </a:pPr>
+            <a:r>
+              <a:rPr lang="en-US" sz="900" b="1" dirty="0">
+                <a:solidFill>
+                  <a:srgbClr val="0D8A76"/>
+                </a:solidFill>
+                <a:latin typeface="Yu Gothic" pitchFamily="34" charset="0"/>
+                <a:ea typeface="Yu Gothic" pitchFamily="34" charset="-122"/>
+                <a:cs typeface="Yu Gothic" pitchFamily="34" charset="-120"/>
+              </a:rPr>
+              <a:t>Site SOP優先　</a:t>
+            </a:r>
+            <a:pPr indent="0" marL="0">
+              <a:lnSpc>
+                <a:spcPct val="88000"/>
+              </a:lnSpc>
+              <a:buNone/>
+            </a:pPr>
+            <a:r>
+              <a:rPr lang="en-US" sz="900" dirty="0">
+                <a:solidFill>
+                  <a:srgbClr val="1B2733"/>
+                </a:solidFill>
+                <a:latin typeface="Yu Gothic" pitchFamily="34" charset="0"/>
+                <a:ea typeface="Yu Gothic" pitchFamily="34" charset="-122"/>
+                <a:cs typeface="Yu Gothic" pitchFamily="34" charset="-120"/>
+              </a:rPr>
+              <a:t>応援要請の方法と、対応を交代する基準は現場ごとに異なる。Site SOPを確認する。</a:t>
+            </a:r>
+            <a:endParaRPr lang="en-US" sz="900" dirty="0"/>
+          </a:p>
+          <a:p>
+            <a:pPr indent="0" marL="0">
+              <a:lnSpc>
+                <a:spcPct val="88000"/>
+              </a:lnSpc>
+              <a:buNone/>
+            </a:pPr>
+            <a:r>
+              <a:rPr lang="en-US" sz="800" i="1" dirty="0">
                 <a:solidFill>
                   <a:srgbClr val="5F7183"/>
                 </a:solidFill>
@@ -9732,22 +9811,22 @@
                 <a:ea typeface="Calibri" pitchFamily="34" charset="-122"/>
                 <a:cs typeface="Calibri" pitchFamily="34" charset="-120"/>
               </a:rPr>
-              <a:t>  If you speak in another language, slowing down carries more than fluency</a:t>
-            </a:r>
-            <a:endParaRPr lang="en-US" sz="950" dirty="0"/>
-          </a:p>
-        </p:txBody>
-      </p:sp>
-      <p:sp>
-        <p:nvSpPr>
-          <p:cNvPr id="28" name="Text 25"/>
-          <p:cNvSpPr/>
-          <p:nvPr/>
-        </p:nvSpPr>
-        <p:spPr>
-          <a:xfrm>
-            <a:off x="640080" y="5907024"/>
-            <a:ext cx="10911535" cy="310896"/>
+              <a:t>How to call for backup, and when to hand over, differ by site. Check the Site SOP.</a:t>
+            </a:r>
+            <a:endParaRPr lang="en-US" sz="900" dirty="0"/>
+          </a:p>
+        </p:txBody>
+      </p:sp>
+      <p:sp>
+        <p:nvSpPr>
+          <p:cNvPr id="29" name="Text 26"/>
+          <p:cNvSpPr/>
+          <p:nvPr/>
+        </p:nvSpPr>
+        <p:spPr>
+          <a:xfrm>
+            <a:off x="640080" y="6272784"/>
+            <a:ext cx="9905695" cy="219456"/>
           </a:xfrm>
           <a:prstGeom prst="rect">
             <a:avLst/>
@@ -9760,167 +9839,88 @@
           <a:lstStyle/>
           <a:p>
             <a:pPr indent="0" marL="0">
-              <a:lnSpc>
-                <a:spcPct val="88000"/>
-              </a:lnSpc>
-              <a:buNone/>
-            </a:pPr>
-            <a:r>
-              <a:rPr lang="en-US" sz="900" b="1" dirty="0">
-                <a:solidFill>
-                  <a:srgbClr val="0D8A76"/>
-                </a:solidFill>
-                <a:latin typeface="Yu Gothic" pitchFamily="34" charset="0"/>
-                <a:ea typeface="Yu Gothic" pitchFamily="34" charset="-122"/>
-                <a:cs typeface="Yu Gothic" pitchFamily="34" charset="-120"/>
-              </a:rPr>
-              <a:t>Site SOP優先　</a:t>
-            </a:r>
-            <a:pPr indent="0" marL="0">
-              <a:lnSpc>
-                <a:spcPct val="88000"/>
-              </a:lnSpc>
+              <a:buNone/>
+            </a:pPr>
+            <a:r>
+              <a:rPr lang="en-US" sz="750" b="1" dirty="0">
+                <a:solidFill>
+                  <a:srgbClr val="D6E0E9"/>
+                </a:solidFill>
+                <a:latin typeface="Yu Gothic" pitchFamily="34" charset="0"/>
+                <a:ea typeface="Yu Gothic" pitchFamily="34" charset="-122"/>
+                <a:cs typeface="Yu Gothic" pitchFamily="34" charset="-120"/>
+              </a:rPr>
+              <a:t>ソース　</a:t>
+            </a:r>
+            <a:pPr indent="0" marL="0">
+              <a:buNone/>
+            </a:pPr>
+            <a:r>
+              <a:rPr lang="en-US" sz="750" dirty="0">
+                <a:solidFill>
+                  <a:srgbClr val="5F7183"/>
+                </a:solidFill>
+                <a:latin typeface="Yu Gothic" pitchFamily="34" charset="0"/>
+                <a:ea typeface="Yu Gothic" pitchFamily="34" charset="-122"/>
+                <a:cs typeface="Yu Gothic" pitchFamily="34" charset="-120"/>
+              </a:rPr>
+              <a:t>警備業法、刑法、警察庁「警備員教育」</a:t>
+            </a:r>
+            <a:endParaRPr lang="en-US" sz="750" dirty="0"/>
+          </a:p>
+        </p:txBody>
+      </p:sp>
+      <p:sp>
+        <p:nvSpPr>
+          <p:cNvPr id="30" name="Text 27"/>
+          <p:cNvSpPr/>
+          <p:nvPr/>
+        </p:nvSpPr>
+        <p:spPr>
+          <a:xfrm>
+            <a:off x="640080" y="6492240"/>
+            <a:ext cx="8778240" cy="292608"/>
+          </a:xfrm>
+          <a:prstGeom prst="rect">
+            <a:avLst/>
+          </a:prstGeom>
+          <a:noFill/>
+          <a:ln/>
+        </p:spPr>
+        <p:txBody>
+          <a:bodyPr wrap="square" lIns="0" tIns="0" rIns="0" bIns="0" rtlCol="0" anchor="ctr"/>
+          <a:lstStyle/>
+          <a:p>
+            <a:pPr indent="0" marL="0">
               <a:buNone/>
             </a:pPr>
             <a:r>
               <a:rPr lang="en-US" sz="900" dirty="0">
                 <a:solidFill>
-                  <a:srgbClr val="1B2733"/>
-                </a:solidFill>
-                <a:latin typeface="Yu Gothic" pitchFamily="34" charset="0"/>
-                <a:ea typeface="Yu Gothic" pitchFamily="34" charset="-122"/>
-                <a:cs typeface="Yu Gothic" pitchFamily="34" charset="-120"/>
-              </a:rPr>
-              <a:t>応援要請の方法と、対応を交代する基準は現場ごとに異なる。Site SOPを確認する。</a:t>
+                  <a:srgbClr val="5F7183"/>
+                </a:solidFill>
+                <a:latin typeface="Yu Gothic" pitchFamily="34" charset="0"/>
+                <a:ea typeface="Yu Gothic" pitchFamily="34" charset="-122"/>
+                <a:cs typeface="Yu Gothic" pitchFamily="34" charset="-120"/>
+              </a:rPr>
+              <a:t>第5時限｜業務別教育2 その他当該警備業務を適正に実施するため必要な知識及び技能  </a:t>
+            </a:r>
+            <a:pPr indent="0" marL="0">
+              <a:buNone/>
+            </a:pPr>
+            <a:r>
+              <a:rPr lang="en-US" sz="850" i="1" dirty="0">
+                <a:solidFill>
+                  <a:srgbClr val="D6E0E9"/>
+                </a:solidFill>
+                <a:latin typeface="Calibri" pitchFamily="34" charset="0"/>
+                <a:ea typeface="Calibri" pitchFamily="34" charset="-122"/>
+                <a:cs typeface="Calibri" pitchFamily="34" charset="-120"/>
+              </a:rPr>
+              <a:t>Period 5 | Task-Specific Training 2 — De-escalation</a:t>
             </a:r>
             <a:endParaRPr lang="en-US" sz="900" dirty="0"/>
           </a:p>
-          <a:p>
-            <a:pPr indent="0" marL="0">
-              <a:lnSpc>
-                <a:spcPct val="88000"/>
-              </a:lnSpc>
-              <a:buNone/>
-            </a:pPr>
-            <a:r>
-              <a:rPr lang="en-US" sz="750" i="1" dirty="0">
-                <a:solidFill>
-                  <a:srgbClr val="5F7183"/>
-                </a:solidFill>
-                <a:latin typeface="Calibri" pitchFamily="34" charset="0"/>
-                <a:ea typeface="Calibri" pitchFamily="34" charset="-122"/>
-                <a:cs typeface="Calibri" pitchFamily="34" charset="-120"/>
-              </a:rPr>
-              <a:t>How to call for backup, and when to hand over, differ by site. Check the Site SOP.</a:t>
-            </a:r>
-            <a:endParaRPr lang="en-US" sz="900" dirty="0"/>
-          </a:p>
-        </p:txBody>
-      </p:sp>
-      <p:sp>
-        <p:nvSpPr>
-          <p:cNvPr id="29" name="Text 26"/>
-          <p:cNvSpPr/>
-          <p:nvPr/>
-        </p:nvSpPr>
-        <p:spPr>
-          <a:xfrm>
-            <a:off x="640080" y="6272784"/>
-            <a:ext cx="9905695" cy="237744"/>
-          </a:xfrm>
-          <a:prstGeom prst="rect">
-            <a:avLst/>
-          </a:prstGeom>
-          <a:noFill/>
-          <a:ln/>
-        </p:spPr>
-        <p:txBody>
-          <a:bodyPr wrap="square" lIns="0" tIns="0" rIns="0" bIns="0" rtlCol="0" anchor="t"/>
-          <a:lstStyle/>
-          <a:p>
-            <a:pPr indent="0" marL="0">
-              <a:buNone/>
-            </a:pPr>
-            <a:r>
-              <a:rPr lang="en-US" sz="750" b="1" dirty="0">
-                <a:solidFill>
-                  <a:srgbClr val="D6E0E9"/>
-                </a:solidFill>
-                <a:latin typeface="Yu Gothic" pitchFamily="34" charset="0"/>
-                <a:ea typeface="Yu Gothic" pitchFamily="34" charset="-122"/>
-                <a:cs typeface="Yu Gothic" pitchFamily="34" charset="-120"/>
-              </a:rPr>
-              <a:t>ソース　</a:t>
-            </a:r>
-            <a:pPr indent="0" marL="0">
-              <a:buNone/>
-            </a:pPr>
-            <a:r>
-              <a:rPr lang="en-US" sz="750" dirty="0">
-                <a:solidFill>
-                  <a:srgbClr val="5F7183"/>
-                </a:solidFill>
-                <a:latin typeface="Yu Gothic" pitchFamily="34" charset="0"/>
-                <a:ea typeface="Yu Gothic" pitchFamily="34" charset="-122"/>
-                <a:cs typeface="Yu Gothic" pitchFamily="34" charset="-120"/>
-              </a:rPr>
-              <a:t>警備業法、刑法、警察庁「警備員教育」</a:t>
-            </a:r>
-            <a:endParaRPr lang="en-US" sz="750" dirty="0"/>
-          </a:p>
-        </p:txBody>
-      </p:sp>
-      <p:sp>
-        <p:nvSpPr>
-          <p:cNvPr id="30" name="Text 27"/>
-          <p:cNvSpPr/>
-          <p:nvPr/>
-        </p:nvSpPr>
-        <p:spPr>
-          <a:xfrm>
-            <a:off x="640080" y="6382512"/>
-            <a:ext cx="8778240" cy="292608"/>
-          </a:xfrm>
-          <a:prstGeom prst="rect">
-            <a:avLst/>
-          </a:prstGeom>
-          <a:noFill/>
-          <a:ln/>
-        </p:spPr>
-        <p:txBody>
-          <a:bodyPr wrap="square" lIns="0" tIns="0" rIns="0" bIns="0" rtlCol="0" anchor="ctr"/>
-          <a:lstStyle/>
-          <a:p>
-            <a:pPr indent="0" marL="0">
-              <a:buNone/>
-            </a:pPr>
-            <a:r>
-              <a:rPr lang="en-US" sz="900" dirty="0">
-                <a:solidFill>
-                  <a:srgbClr val="5F7183"/>
-                </a:solidFill>
-                <a:latin typeface="Yu Gothic" pitchFamily="34" charset="0"/>
-                <a:ea typeface="Yu Gothic" pitchFamily="34" charset="-122"/>
-                <a:cs typeface="Yu Gothic" pitchFamily="34" charset="-120"/>
-              </a:rPr>
-              <a:t>第5時限｜業務別教育2 その他当該警備業務を適正に実施するため必要な知識及び技能  </a:t>
-            </a:r>
-            <a:pPr indent="0" marL="0">
-              <a:buNone/>
-            </a:pPr>
-            <a:r>
-              <a:rPr lang="en-US" sz="850" i="1" dirty="0">
-                <a:solidFill>
-                  <a:srgbClr val="D6E0E9"/>
-                </a:solidFill>
-                <a:latin typeface="Calibri" pitchFamily="34" charset="0"/>
-                <a:ea typeface="Calibri" pitchFamily="34" charset="-122"/>
-                <a:cs typeface="Calibri" pitchFamily="34" charset="-120"/>
-              </a:rPr>
-              <a:t>Period 5 | Task-Specific Training 2 — De-escalation</a:t>
-            </a:r>
-            <a:endParaRPr lang="en-US" sz="900" dirty="0"/>
-          </a:p>
         </p:txBody>
       </p:sp>
       <p:sp>
@@ -9931,7 +9931,7 @@
         </p:nvSpPr>
         <p:spPr>
           <a:xfrm>
-            <a:off x="10637215" y="6382512"/>
+            <a:off x="10637215" y="6492240"/>
             <a:ext cx="914400" cy="292608"/>
           </a:xfrm>
           <a:prstGeom prst="rect">
@@ -10026,8 +10026,8 @@
         </p:nvSpPr>
         <p:spPr>
           <a:xfrm>
-            <a:off x="640080" y="384048"/>
-            <a:ext cx="8982151" cy="768096"/>
+            <a:off x="640080" y="365760"/>
+            <a:ext cx="8982151" cy="749808"/>
           </a:xfrm>
           <a:prstGeom prst="rect">
             <a:avLst/>
@@ -10066,7 +10066,7 @@
               <a:buNone/>
             </a:pPr>
             <a:r>
-              <a:rPr lang="en-US" sz="1100" i="1" dirty="0">
+              <a:rPr lang="en-US" sz="1100" dirty="0">
                 <a:solidFill>
                   <a:srgbClr val="12B198"/>
                 </a:solidFill>
@@ -10088,7 +10088,7 @@
         </p:nvSpPr>
         <p:spPr>
           <a:xfrm>
-            <a:off x="9686239" y="438912"/>
+            <a:off x="9686239" y="420624"/>
             <a:ext cx="932688" cy="310896"/>
           </a:xfrm>
           <a:prstGeom prst="roundRect">
@@ -10110,7 +10110,7 @@
         </p:nvSpPr>
         <p:spPr>
           <a:xfrm>
-            <a:off x="9686239" y="438912"/>
+            <a:off x="9686239" y="420624"/>
             <a:ext cx="932688" cy="310896"/>
           </a:xfrm>
           <a:prstGeom prst="rect">
@@ -10149,12 +10149,12 @@
         </p:nvSpPr>
         <p:spPr>
           <a:xfrm>
-            <a:off x="640080" y="1188720"/>
-            <a:ext cx="10911535" cy="530352"/>
+            <a:off x="640080" y="1115568"/>
+            <a:ext cx="10911535" cy="585216"/>
           </a:xfrm>
           <a:prstGeom prst="roundRect">
             <a:avLst>
-              <a:gd name="adj" fmla="val 6897"/>
+              <a:gd name="adj" fmla="val 6250"/>
             </a:avLst>
           </a:prstGeom>
           <a:solidFill>
@@ -10171,8 +10171,8 @@
         </p:nvSpPr>
         <p:spPr>
           <a:xfrm>
-            <a:off x="877824" y="1234440"/>
-            <a:ext cx="10436047" cy="438912"/>
+            <a:off x="877824" y="1161288"/>
+            <a:ext cx="10436047" cy="493776"/>
           </a:xfrm>
           <a:prstGeom prst="rect">
             <a:avLst/>
@@ -10208,7 +10208,7 @@
               <a:buNone/>
             </a:pPr>
             <a:r>
-              <a:rPr lang="en-US" sz="800" dirty="0">
+              <a:rPr lang="en-US" sz="900" dirty="0">
                 <a:solidFill>
                   <a:srgbClr val="0D8A76"/>
                 </a:solidFill>
@@ -10245,9 +10245,9 @@
               <a:buNone/>
             </a:pPr>
             <a:r>
-              <a:rPr lang="en-US" sz="850" i="1" dirty="0">
-                <a:solidFill>
-                  <a:srgbClr val="5F7183"/>
+              <a:rPr lang="en-US" sz="1050" dirty="0">
+                <a:solidFill>
+                  <a:srgbClr val="1B2733"/>
                 </a:solidFill>
                 <a:latin typeface="Calibri" pitchFamily="34" charset="0"/>
                 <a:ea typeface="Calibri" pitchFamily="34" charset="-122"/>
@@ -10267,12 +10267,12 @@
         </p:nvSpPr>
         <p:spPr>
           <a:xfrm>
-            <a:off x="640080" y="1810512"/>
-            <a:ext cx="5327752" cy="1920240"/>
+            <a:off x="640080" y="1773936"/>
+            <a:ext cx="5327752" cy="1965960"/>
           </a:xfrm>
           <a:prstGeom prst="roundRect">
             <a:avLst>
-              <a:gd name="adj" fmla="val 1905"/>
+              <a:gd name="adj" fmla="val 1860"/>
             </a:avLst>
           </a:prstGeom>
           <a:solidFill>
@@ -10289,7 +10289,7 @@
         </p:nvSpPr>
         <p:spPr>
           <a:xfrm>
-            <a:off x="822960" y="1975104"/>
+            <a:off x="822960" y="1938528"/>
             <a:ext cx="310896" cy="310896"/>
           </a:xfrm>
           <a:prstGeom prst="ellipse">
@@ -10309,7 +10309,7 @@
         </p:nvSpPr>
         <p:spPr>
           <a:xfrm>
-            <a:off x="822960" y="1975104"/>
+            <a:off x="822960" y="1938528"/>
             <a:ext cx="310896" cy="310896"/>
           </a:xfrm>
           <a:prstGeom prst="rect">
@@ -10348,7 +10348,7 @@
         </p:nvSpPr>
         <p:spPr>
           <a:xfrm>
-            <a:off x="1207008" y="1938528"/>
+            <a:off x="1207008" y="1901952"/>
             <a:ext cx="4559656" cy="512064"/>
           </a:xfrm>
           <a:prstGeom prst="rect">
@@ -10388,7 +10388,7 @@
               <a:buNone/>
             </a:pPr>
             <a:r>
-              <a:rPr lang="en-US" sz="800" i="1" dirty="0">
+              <a:rPr lang="en-US" sz="1050" dirty="0">
                 <a:solidFill>
                   <a:srgbClr val="12B198"/>
                 </a:solidFill>
@@ -10410,8 +10410,8 @@
         </p:nvSpPr>
         <p:spPr>
           <a:xfrm>
-            <a:off x="859536" y="2487168"/>
-            <a:ext cx="4888840" cy="1097280"/>
+            <a:off x="859536" y="2450592"/>
+            <a:ext cx="4888840" cy="1143000"/>
           </a:xfrm>
           <a:prstGeom prst="rect">
             <a:avLst/>
@@ -10456,9 +10456,9 @@
               <a:buNone/>
             </a:pPr>
             <a:r>
-              <a:rPr lang="en-US" sz="750" i="1" dirty="0">
-                <a:solidFill>
-                  <a:srgbClr val="5F7183"/>
+              <a:rPr lang="en-US" sz="950" dirty="0">
+                <a:solidFill>
+                  <a:srgbClr val="1B2733"/>
                 </a:solidFill>
                 <a:latin typeface="Calibri" pitchFamily="34" charset="0"/>
                 <a:ea typeface="Calibri" pitchFamily="34" charset="-122"/>
@@ -10502,9 +10502,9 @@
               <a:buNone/>
             </a:pPr>
             <a:r>
-              <a:rPr lang="en-US" sz="750" i="1" dirty="0">
-                <a:solidFill>
-                  <a:srgbClr val="5F7183"/>
+              <a:rPr lang="en-US" sz="950" dirty="0">
+                <a:solidFill>
+                  <a:srgbClr val="1B2733"/>
                 </a:solidFill>
                 <a:latin typeface="Calibri" pitchFamily="34" charset="0"/>
                 <a:ea typeface="Calibri" pitchFamily="34" charset="-122"/>
@@ -10548,9 +10548,9 @@
               <a:buNone/>
             </a:pPr>
             <a:r>
-              <a:rPr lang="en-US" sz="750" i="1" dirty="0">
-                <a:solidFill>
-                  <a:srgbClr val="5F7183"/>
+              <a:rPr lang="en-US" sz="950" dirty="0">
+                <a:solidFill>
+                  <a:srgbClr val="1B2733"/>
                 </a:solidFill>
                 <a:latin typeface="Calibri" pitchFamily="34" charset="0"/>
                 <a:ea typeface="Calibri" pitchFamily="34" charset="-122"/>
@@ -10594,9 +10594,9 @@
               <a:buNone/>
             </a:pPr>
             <a:r>
-              <a:rPr lang="en-US" sz="750" i="1" dirty="0">
-                <a:solidFill>
-                  <a:srgbClr val="5F7183"/>
+              <a:rPr lang="en-US" sz="950" dirty="0">
+                <a:solidFill>
+                  <a:srgbClr val="1B2733"/>
                 </a:solidFill>
                 <a:latin typeface="Calibri" pitchFamily="34" charset="0"/>
                 <a:ea typeface="Calibri" pitchFamily="34" charset="-122"/>
@@ -10616,12 +10616,12 @@
         </p:nvSpPr>
         <p:spPr>
           <a:xfrm>
-            <a:off x="6223864" y="1810512"/>
-            <a:ext cx="5327752" cy="1920240"/>
+            <a:off x="6223864" y="1773936"/>
+            <a:ext cx="5327752" cy="1965960"/>
           </a:xfrm>
           <a:prstGeom prst="roundRect">
             <a:avLst>
-              <a:gd name="adj" fmla="val 1905"/>
+              <a:gd name="adj" fmla="val 1860"/>
             </a:avLst>
           </a:prstGeom>
           <a:solidFill>
@@ -10638,7 +10638,7 @@
         </p:nvSpPr>
         <p:spPr>
           <a:xfrm>
-            <a:off x="6406744" y="1975104"/>
+            <a:off x="6406744" y="1938528"/>
             <a:ext cx="310896" cy="310896"/>
           </a:xfrm>
           <a:prstGeom prst="ellipse">
@@ -10658,7 +10658,7 @@
         </p:nvSpPr>
         <p:spPr>
           <a:xfrm>
-            <a:off x="6406744" y="1975104"/>
+            <a:off x="6406744" y="1938528"/>
             <a:ext cx="310896" cy="310896"/>
           </a:xfrm>
           <a:prstGeom prst="rect">
@@ -10697,7 +10697,7 @@
         </p:nvSpPr>
         <p:spPr>
           <a:xfrm>
-            <a:off x="6790792" y="1938528"/>
+            <a:off x="6790792" y="1901952"/>
             <a:ext cx="4559656" cy="512064"/>
           </a:xfrm>
           <a:prstGeom prst="rect">
@@ -10737,7 +10737,7 @@
               <a:buNone/>
             </a:pPr>
             <a:r>
-              <a:rPr lang="en-US" sz="800" i="1" dirty="0">
+              <a:rPr lang="en-US" sz="1050" dirty="0">
                 <a:solidFill>
                   <a:srgbClr val="12B198"/>
                 </a:solidFill>
@@ -10759,8 +10759,8 @@
         </p:nvSpPr>
         <p:spPr>
           <a:xfrm>
-            <a:off x="6443320" y="2487168"/>
-            <a:ext cx="4888840" cy="1097280"/>
+            <a:off x="6443320" y="2450592"/>
+            <a:ext cx="4888840" cy="1143000"/>
           </a:xfrm>
           <a:prstGeom prst="rect">
             <a:avLst/>
@@ -10805,9 +10805,9 @@
               <a:buNone/>
             </a:pPr>
             <a:r>
-              <a:rPr lang="en-US" sz="750" i="1" dirty="0">
-                <a:solidFill>
-                  <a:srgbClr val="5F7183"/>
+              <a:rPr lang="en-US" sz="950" dirty="0">
+                <a:solidFill>
+                  <a:srgbClr val="1B2733"/>
                 </a:solidFill>
                 <a:latin typeface="Calibri" pitchFamily="34" charset="0"/>
                 <a:ea typeface="Calibri" pitchFamily="34" charset="-122"/>
@@ -10851,9 +10851,9 @@
               <a:buNone/>
             </a:pPr>
             <a:r>
-              <a:rPr lang="en-US" sz="750" i="1" dirty="0">
-                <a:solidFill>
-                  <a:srgbClr val="5F7183"/>
+              <a:rPr lang="en-US" sz="950" dirty="0">
+                <a:solidFill>
+                  <a:srgbClr val="1B2733"/>
                 </a:solidFill>
                 <a:latin typeface="Calibri" pitchFamily="34" charset="0"/>
                 <a:ea typeface="Calibri" pitchFamily="34" charset="-122"/>
@@ -10897,9 +10897,9 @@
               <a:buNone/>
             </a:pPr>
             <a:r>
-              <a:rPr lang="en-US" sz="750" i="1" dirty="0">
-                <a:solidFill>
-                  <a:srgbClr val="5F7183"/>
+              <a:rPr lang="en-US" sz="950" dirty="0">
+                <a:solidFill>
+                  <a:srgbClr val="1B2733"/>
                 </a:solidFill>
                 <a:latin typeface="Calibri" pitchFamily="34" charset="0"/>
                 <a:ea typeface="Calibri" pitchFamily="34" charset="-122"/>
@@ -10943,9 +10943,9 @@
               <a:buNone/>
             </a:pPr>
             <a:r>
-              <a:rPr lang="en-US" sz="750" i="1" dirty="0">
-                <a:solidFill>
-                  <a:srgbClr val="5F7183"/>
+              <a:rPr lang="en-US" sz="950" dirty="0">
+                <a:solidFill>
+                  <a:srgbClr val="1B2733"/>
                 </a:solidFill>
                 <a:latin typeface="Calibri" pitchFamily="34" charset="0"/>
                 <a:ea typeface="Calibri" pitchFamily="34" charset="-122"/>
@@ -10965,12 +10965,12 @@
         </p:nvSpPr>
         <p:spPr>
           <a:xfrm>
-            <a:off x="640080" y="3931920"/>
-            <a:ext cx="5327752" cy="1920240"/>
+            <a:off x="640080" y="3941064"/>
+            <a:ext cx="5327752" cy="1965960"/>
           </a:xfrm>
           <a:prstGeom prst="roundRect">
             <a:avLst>
-              <a:gd name="adj" fmla="val 1905"/>
+              <a:gd name="adj" fmla="val 1860"/>
             </a:avLst>
           </a:prstGeom>
           <a:solidFill>
@@ -10987,7 +10987,7 @@
         </p:nvSpPr>
         <p:spPr>
           <a:xfrm>
-            <a:off x="822960" y="4096512"/>
+            <a:off x="822960" y="4105656"/>
             <a:ext cx="310896" cy="310896"/>
           </a:xfrm>
           <a:prstGeom prst="ellipse">
@@ -11007,7 +11007,7 @@
         </p:nvSpPr>
         <p:spPr>
           <a:xfrm>
-            <a:off x="822960" y="4096512"/>
+            <a:off x="822960" y="4105656"/>
             <a:ext cx="310896" cy="310896"/>
           </a:xfrm>
           <a:prstGeom prst="rect">
@@ -11046,7 +11046,7 @@
         </p:nvSpPr>
         <p:spPr>
           <a:xfrm>
-            <a:off x="1207008" y="4059936"/>
+            <a:off x="1207008" y="4069080"/>
             <a:ext cx="4559656" cy="512064"/>
           </a:xfrm>
           <a:prstGeom prst="rect">
@@ -11086,7 +11086,7 @@
               <a:buNone/>
             </a:pPr>
             <a:r>
-              <a:rPr lang="en-US" sz="800" i="1" dirty="0">
+              <a:rPr lang="en-US" sz="1050" dirty="0">
                 <a:solidFill>
                   <a:srgbClr val="12B198"/>
                 </a:solidFill>
@@ -11108,8 +11108,8 @@
         </p:nvSpPr>
         <p:spPr>
           <a:xfrm>
-            <a:off x="859536" y="4608576"/>
-            <a:ext cx="4888840" cy="1097280"/>
+            <a:off x="859536" y="4617720"/>
+            <a:ext cx="4888840" cy="1143000"/>
           </a:xfrm>
           <a:prstGeom prst="rect">
             <a:avLst/>
@@ -11154,9 +11154,9 @@
               <a:buNone/>
             </a:pPr>
             <a:r>
-              <a:rPr lang="en-US" sz="750" i="1" dirty="0">
-                <a:solidFill>
-                  <a:srgbClr val="5F7183"/>
+              <a:rPr lang="en-US" sz="950" dirty="0">
+                <a:solidFill>
+                  <a:srgbClr val="1B2733"/>
                 </a:solidFill>
                 <a:latin typeface="Calibri" pitchFamily="34" charset="0"/>
                 <a:ea typeface="Calibri" pitchFamily="34" charset="-122"/>
@@ -11200,9 +11200,9 @@
               <a:buNone/>
             </a:pPr>
             <a:r>
-              <a:rPr lang="en-US" sz="750" i="1" dirty="0">
-                <a:solidFill>
-                  <a:srgbClr val="5F7183"/>
+              <a:rPr lang="en-US" sz="950" dirty="0">
+                <a:solidFill>
+                  <a:srgbClr val="1B2733"/>
                 </a:solidFill>
                 <a:latin typeface="Calibri" pitchFamily="34" charset="0"/>
                 <a:ea typeface="Calibri" pitchFamily="34" charset="-122"/>
@@ -11246,9 +11246,9 @@
               <a:buNone/>
             </a:pPr>
             <a:r>
-              <a:rPr lang="en-US" sz="750" i="1" dirty="0">
-                <a:solidFill>
-                  <a:srgbClr val="5F7183"/>
+              <a:rPr lang="en-US" sz="950" dirty="0">
+                <a:solidFill>
+                  <a:srgbClr val="1B2733"/>
                 </a:solidFill>
                 <a:latin typeface="Calibri" pitchFamily="34" charset="0"/>
                 <a:ea typeface="Calibri" pitchFamily="34" charset="-122"/>
@@ -11292,9 +11292,9 @@
               <a:buNone/>
             </a:pPr>
             <a:r>
-              <a:rPr lang="en-US" sz="750" i="1" dirty="0">
-                <a:solidFill>
-                  <a:srgbClr val="5F7183"/>
+              <a:rPr lang="en-US" sz="950" dirty="0">
+                <a:solidFill>
+                  <a:srgbClr val="1B2733"/>
                 </a:solidFill>
                 <a:latin typeface="Calibri" pitchFamily="34" charset="0"/>
                 <a:ea typeface="Calibri" pitchFamily="34" charset="-122"/>
@@ -11314,12 +11314,12 @@
         </p:nvSpPr>
         <p:spPr>
           <a:xfrm>
-            <a:off x="6223864" y="3931920"/>
-            <a:ext cx="5327752" cy="1920240"/>
+            <a:off x="6223864" y="3941064"/>
+            <a:ext cx="5327752" cy="1965960"/>
           </a:xfrm>
           <a:prstGeom prst="roundRect">
             <a:avLst>
-              <a:gd name="adj" fmla="val 1905"/>
+              <a:gd name="adj" fmla="val 1860"/>
             </a:avLst>
           </a:prstGeom>
           <a:solidFill>
@@ -11336,7 +11336,7 @@
         </p:nvSpPr>
         <p:spPr>
           <a:xfrm>
-            <a:off x="6406744" y="4096512"/>
+            <a:off x="6406744" y="4105656"/>
             <a:ext cx="310896" cy="310896"/>
           </a:xfrm>
           <a:prstGeom prst="ellipse">
@@ -11356,7 +11356,7 @@
         </p:nvSpPr>
         <p:spPr>
           <a:xfrm>
-            <a:off x="6406744" y="4096512"/>
+            <a:off x="6406744" y="4105656"/>
             <a:ext cx="310896" cy="310896"/>
           </a:xfrm>
           <a:prstGeom prst="rect">
@@ -11395,7 +11395,7 @@
         </p:nvSpPr>
         <p:spPr>
           <a:xfrm>
-            <a:off x="6790792" y="4059936"/>
+            <a:off x="6790792" y="4069080"/>
             <a:ext cx="4559656" cy="512064"/>
           </a:xfrm>
           <a:prstGeom prst="rect">
@@ -11435,7 +11435,7 @@
               <a:buNone/>
             </a:pPr>
             <a:r>
-              <a:rPr lang="en-US" sz="800" i="1" dirty="0">
+              <a:rPr lang="en-US" sz="1050" dirty="0">
                 <a:solidFill>
                   <a:srgbClr val="12B198"/>
                 </a:solidFill>
@@ -11457,8 +11457,8 @@
         </p:nvSpPr>
         <p:spPr>
           <a:xfrm>
-            <a:off x="6443320" y="4608576"/>
-            <a:ext cx="4888840" cy="1097280"/>
+            <a:off x="6443320" y="4617720"/>
+            <a:ext cx="4888840" cy="1143000"/>
           </a:xfrm>
           <a:prstGeom prst="rect">
             <a:avLst/>
@@ -11503,9 +11503,9 @@
               <a:buNone/>
             </a:pPr>
             <a:r>
-              <a:rPr lang="en-US" sz="750" i="1" dirty="0">
-                <a:solidFill>
-                  <a:srgbClr val="5F7183"/>
+              <a:rPr lang="en-US" sz="950" dirty="0">
+                <a:solidFill>
+                  <a:srgbClr val="1B2733"/>
                 </a:solidFill>
                 <a:latin typeface="Calibri" pitchFamily="34" charset="0"/>
                 <a:ea typeface="Calibri" pitchFamily="34" charset="-122"/>
@@ -11549,9 +11549,9 @@
               <a:buNone/>
             </a:pPr>
             <a:r>
-              <a:rPr lang="en-US" sz="750" i="1" dirty="0">
-                <a:solidFill>
-                  <a:srgbClr val="5F7183"/>
+              <a:rPr lang="en-US" sz="950" dirty="0">
+                <a:solidFill>
+                  <a:srgbClr val="1B2733"/>
                 </a:solidFill>
                 <a:latin typeface="Calibri" pitchFamily="34" charset="0"/>
                 <a:ea typeface="Calibri" pitchFamily="34" charset="-122"/>
@@ -11595,9 +11595,9 @@
               <a:buNone/>
             </a:pPr>
             <a:r>
-              <a:rPr lang="en-US" sz="750" i="1" dirty="0">
-                <a:solidFill>
-                  <a:srgbClr val="5F7183"/>
+              <a:rPr lang="en-US" sz="950" dirty="0">
+                <a:solidFill>
+                  <a:srgbClr val="1B2733"/>
                 </a:solidFill>
                 <a:latin typeface="Calibri" pitchFamily="34" charset="0"/>
                 <a:ea typeface="Calibri" pitchFamily="34" charset="-122"/>
@@ -11641,7 +11641,86 @@
               <a:buNone/>
             </a:pPr>
             <a:r>
-              <a:rPr lang="en-US" sz="750" i="1" dirty="0">
+              <a:rPr lang="en-US" sz="950" dirty="0">
+                <a:solidFill>
+                  <a:srgbClr val="1B2733"/>
+                </a:solidFill>
+                <a:latin typeface="Calibri" pitchFamily="34" charset="0"/>
+                <a:ea typeface="Calibri" pitchFamily="34" charset="-122"/>
+                <a:cs typeface="Calibri" pitchFamily="34" charset="-120"/>
+              </a:rPr>
+              <a:t>  If it is not working, disengage</a:t>
+            </a:r>
+            <a:endParaRPr lang="en-US" sz="950" dirty="0"/>
+          </a:p>
+        </p:txBody>
+      </p:sp>
+      <p:sp>
+        <p:nvSpPr>
+          <p:cNvPr id="28" name="Text 25"/>
+          <p:cNvSpPr/>
+          <p:nvPr/>
+        </p:nvSpPr>
+        <p:spPr>
+          <a:xfrm>
+            <a:off x="640080" y="5961888"/>
+            <a:ext cx="10911535" cy="292608"/>
+          </a:xfrm>
+          <a:prstGeom prst="rect">
+            <a:avLst/>
+          </a:prstGeom>
+          <a:noFill/>
+          <a:ln/>
+        </p:spPr>
+        <p:txBody>
+          <a:bodyPr wrap="square" lIns="0" tIns="0" rIns="0" bIns="0" rtlCol="0" anchor="t"/>
+          <a:lstStyle/>
+          <a:p>
+            <a:pPr indent="0" marL="0">
+              <a:lnSpc>
+                <a:spcPct val="88000"/>
+              </a:lnSpc>
+              <a:buNone/>
+            </a:pPr>
+            <a:r>
+              <a:rPr lang="en-US" sz="900" b="1" dirty="0">
+                <a:solidFill>
+                  <a:srgbClr val="0D8A76"/>
+                </a:solidFill>
+                <a:latin typeface="Yu Gothic" pitchFamily="34" charset="0"/>
+                <a:ea typeface="Yu Gothic" pitchFamily="34" charset="-122"/>
+                <a:cs typeface="Yu Gothic" pitchFamily="34" charset="-120"/>
+              </a:rPr>
+              <a:t>Site SOP優先　</a:t>
+            </a:r>
+            <a:pPr indent="0" marL="0">
+              <a:lnSpc>
+                <a:spcPct val="88000"/>
+              </a:lnSpc>
+              <a:buNone/>
+            </a:pPr>
+            <a:r>
+              <a:rPr lang="en-US" sz="900" dirty="0">
+                <a:solidFill>
+                  <a:srgbClr val="1B2733"/>
+                </a:solidFill>
+                <a:latin typeface="Yu Gothic" pitchFamily="34" charset="0"/>
+                <a:ea typeface="Yu Gothic" pitchFamily="34" charset="-122"/>
+                <a:cs typeface="Yu Gothic" pitchFamily="34" charset="-120"/>
+              </a:rPr>
+              <a:t>離脱後の通報基準と、クライアントへの報告方法は現場ごとに異なる。Site SOPによる。</a:t>
+            </a:r>
+            <a:endParaRPr lang="en-US" sz="900" dirty="0"/>
+          </a:p>
+          <a:p>
+            <a:pPr indent="0" marL="0">
+              <a:lnSpc>
+                <a:spcPct val="88000"/>
+              </a:lnSpc>
+              <a:buNone/>
+            </a:pPr>
+            <a:r>
+              <a:rPr lang="en-US" sz="800" i="1" dirty="0">
                 <a:solidFill>
                   <a:srgbClr val="5F7183"/>
                 </a:solidFill>
@@ -11649,22 +11728,22 @@
                 <a:ea typeface="Calibri" pitchFamily="34" charset="-122"/>
                 <a:cs typeface="Calibri" pitchFamily="34" charset="-120"/>
               </a:rPr>
-              <a:t>  If it is not working, disengage</a:t>
-            </a:r>
-            <a:endParaRPr lang="en-US" sz="950" dirty="0"/>
-          </a:p>
-        </p:txBody>
-      </p:sp>
-      <p:sp>
-        <p:nvSpPr>
-          <p:cNvPr id="28" name="Text 25"/>
-          <p:cNvSpPr/>
-          <p:nvPr/>
-        </p:nvSpPr>
-        <p:spPr>
-          <a:xfrm>
-            <a:off x="640080" y="5907024"/>
-            <a:ext cx="10911535" cy="310896"/>
+              <a:t>When to call police after disengaging, and how to inform the client, differ by site.</a:t>
+            </a:r>
+            <a:endParaRPr lang="en-US" sz="900" dirty="0"/>
+          </a:p>
+        </p:txBody>
+      </p:sp>
+      <p:sp>
+        <p:nvSpPr>
+          <p:cNvPr id="29" name="Text 26"/>
+          <p:cNvSpPr/>
+          <p:nvPr/>
+        </p:nvSpPr>
+        <p:spPr>
+          <a:xfrm>
+            <a:off x="640080" y="6272784"/>
+            <a:ext cx="9905695" cy="219456"/>
           </a:xfrm>
           <a:prstGeom prst="rect">
             <a:avLst/>
@@ -11677,167 +11756,88 @@
           <a:lstStyle/>
           <a:p>
             <a:pPr indent="0" marL="0">
-              <a:lnSpc>
-                <a:spcPct val="88000"/>
-              </a:lnSpc>
-              <a:buNone/>
-            </a:pPr>
-            <a:r>
-              <a:rPr lang="en-US" sz="900" b="1" dirty="0">
-                <a:solidFill>
-                  <a:srgbClr val="0D8A76"/>
-                </a:solidFill>
-                <a:latin typeface="Yu Gothic" pitchFamily="34" charset="0"/>
-                <a:ea typeface="Yu Gothic" pitchFamily="34" charset="-122"/>
-                <a:cs typeface="Yu Gothic" pitchFamily="34" charset="-120"/>
-              </a:rPr>
-              <a:t>Site SOP優先　</a:t>
-            </a:r>
-            <a:pPr indent="0" marL="0">
-              <a:lnSpc>
-                <a:spcPct val="88000"/>
-              </a:lnSpc>
+              <a:buNone/>
+            </a:pPr>
+            <a:r>
+              <a:rPr lang="en-US" sz="750" b="1" dirty="0">
+                <a:solidFill>
+                  <a:srgbClr val="D6E0E9"/>
+                </a:solidFill>
+                <a:latin typeface="Yu Gothic" pitchFamily="34" charset="0"/>
+                <a:ea typeface="Yu Gothic" pitchFamily="34" charset="-122"/>
+                <a:cs typeface="Yu Gothic" pitchFamily="34" charset="-120"/>
+              </a:rPr>
+              <a:t>ソース　</a:t>
+            </a:r>
+            <a:pPr indent="0" marL="0">
+              <a:buNone/>
+            </a:pPr>
+            <a:r>
+              <a:rPr lang="en-US" sz="750" dirty="0">
+                <a:solidFill>
+                  <a:srgbClr val="5F7183"/>
+                </a:solidFill>
+                <a:latin typeface="Yu Gothic" pitchFamily="34" charset="0"/>
+                <a:ea typeface="Yu Gothic" pitchFamily="34" charset="-122"/>
+                <a:cs typeface="Yu Gothic" pitchFamily="34" charset="-120"/>
+              </a:rPr>
+              <a:t>警備業法、刑法、警察庁「警備員教育」</a:t>
+            </a:r>
+            <a:endParaRPr lang="en-US" sz="750" dirty="0"/>
+          </a:p>
+        </p:txBody>
+      </p:sp>
+      <p:sp>
+        <p:nvSpPr>
+          <p:cNvPr id="30" name="Text 27"/>
+          <p:cNvSpPr/>
+          <p:nvPr/>
+        </p:nvSpPr>
+        <p:spPr>
+          <a:xfrm>
+            <a:off x="640080" y="6492240"/>
+            <a:ext cx="8778240" cy="292608"/>
+          </a:xfrm>
+          <a:prstGeom prst="rect">
+            <a:avLst/>
+          </a:prstGeom>
+          <a:noFill/>
+          <a:ln/>
+        </p:spPr>
+        <p:txBody>
+          <a:bodyPr wrap="square" lIns="0" tIns="0" rIns="0" bIns="0" rtlCol="0" anchor="ctr"/>
+          <a:lstStyle/>
+          <a:p>
+            <a:pPr indent="0" marL="0">
               <a:buNone/>
             </a:pPr>
             <a:r>
               <a:rPr lang="en-US" sz="900" dirty="0">
                 <a:solidFill>
-                  <a:srgbClr val="1B2733"/>
-                </a:solidFill>
-                <a:latin typeface="Yu Gothic" pitchFamily="34" charset="0"/>
-                <a:ea typeface="Yu Gothic" pitchFamily="34" charset="-122"/>
-                <a:cs typeface="Yu Gothic" pitchFamily="34" charset="-120"/>
-              </a:rPr>
-              <a:t>離脱後の通報基準と、クライアントへの報告方法は現場ごとに異なる。Site SOPによる。</a:t>
+                  <a:srgbClr val="5F7183"/>
+                </a:solidFill>
+                <a:latin typeface="Yu Gothic" pitchFamily="34" charset="0"/>
+                <a:ea typeface="Yu Gothic" pitchFamily="34" charset="-122"/>
+                <a:cs typeface="Yu Gothic" pitchFamily="34" charset="-120"/>
+              </a:rPr>
+              <a:t>第5時限｜業務別教育2 その他当該警備業務を適正に実施するため必要な知識及び技能  </a:t>
+            </a:r>
+            <a:pPr indent="0" marL="0">
+              <a:buNone/>
+            </a:pPr>
+            <a:r>
+              <a:rPr lang="en-US" sz="850" i="1" dirty="0">
+                <a:solidFill>
+                  <a:srgbClr val="D6E0E9"/>
+                </a:solidFill>
+                <a:latin typeface="Calibri" pitchFamily="34" charset="0"/>
+                <a:ea typeface="Calibri" pitchFamily="34" charset="-122"/>
+                <a:cs typeface="Calibri" pitchFamily="34" charset="-120"/>
+              </a:rPr>
+              <a:t>Period 5 | Task-Specific Training 2 — De-escalation</a:t>
             </a:r>
             <a:endParaRPr lang="en-US" sz="900" dirty="0"/>
           </a:p>
-          <a:p>
-            <a:pPr indent="0" marL="0">
-              <a:lnSpc>
-                <a:spcPct val="88000"/>
-              </a:lnSpc>
-              <a:buNone/>
-            </a:pPr>
-            <a:r>
-              <a:rPr lang="en-US" sz="750" i="1" dirty="0">
-                <a:solidFill>
-                  <a:srgbClr val="5F7183"/>
-                </a:solidFill>
-                <a:latin typeface="Calibri" pitchFamily="34" charset="0"/>
-                <a:ea typeface="Calibri" pitchFamily="34" charset="-122"/>
-                <a:cs typeface="Calibri" pitchFamily="34" charset="-120"/>
-              </a:rPr>
-              <a:t>When to call police after disengaging, and how to inform the client, differ by site.</a:t>
-            </a:r>
-            <a:endParaRPr lang="en-US" sz="900" dirty="0"/>
-          </a:p>
-        </p:txBody>
-      </p:sp>
-      <p:sp>
-        <p:nvSpPr>
-          <p:cNvPr id="29" name="Text 26"/>
-          <p:cNvSpPr/>
-          <p:nvPr/>
-        </p:nvSpPr>
-        <p:spPr>
-          <a:xfrm>
-            <a:off x="640080" y="6272784"/>
-            <a:ext cx="9905695" cy="237744"/>
-          </a:xfrm>
-          <a:prstGeom prst="rect">
-            <a:avLst/>
-          </a:prstGeom>
-          <a:noFill/>
-          <a:ln/>
-        </p:spPr>
-        <p:txBody>
-          <a:bodyPr wrap="square" lIns="0" tIns="0" rIns="0" bIns="0" rtlCol="0" anchor="t"/>
-          <a:lstStyle/>
-          <a:p>
-            <a:pPr indent="0" marL="0">
-              <a:buNone/>
-            </a:pPr>
-            <a:r>
-              <a:rPr lang="en-US" sz="750" b="1" dirty="0">
-                <a:solidFill>
-                  <a:srgbClr val="D6E0E9"/>
-                </a:solidFill>
-                <a:latin typeface="Yu Gothic" pitchFamily="34" charset="0"/>
-                <a:ea typeface="Yu Gothic" pitchFamily="34" charset="-122"/>
-                <a:cs typeface="Yu Gothic" pitchFamily="34" charset="-120"/>
-              </a:rPr>
-              <a:t>ソース　</a:t>
-            </a:r>
-            <a:pPr indent="0" marL="0">
-              <a:buNone/>
-            </a:pPr>
-            <a:r>
-              <a:rPr lang="en-US" sz="750" dirty="0">
-                <a:solidFill>
-                  <a:srgbClr val="5F7183"/>
-                </a:solidFill>
-                <a:latin typeface="Yu Gothic" pitchFamily="34" charset="0"/>
-                <a:ea typeface="Yu Gothic" pitchFamily="34" charset="-122"/>
-                <a:cs typeface="Yu Gothic" pitchFamily="34" charset="-120"/>
-              </a:rPr>
-              <a:t>警備業法、刑法、警察庁「警備員教育」</a:t>
-            </a:r>
-            <a:endParaRPr lang="en-US" sz="750" dirty="0"/>
-          </a:p>
-        </p:txBody>
-      </p:sp>
-      <p:sp>
-        <p:nvSpPr>
-          <p:cNvPr id="30" name="Text 27"/>
-          <p:cNvSpPr/>
-          <p:nvPr/>
-        </p:nvSpPr>
-        <p:spPr>
-          <a:xfrm>
-            <a:off x="640080" y="6382512"/>
-            <a:ext cx="8778240" cy="292608"/>
-          </a:xfrm>
-          <a:prstGeom prst="rect">
-            <a:avLst/>
-          </a:prstGeom>
-          <a:noFill/>
-          <a:ln/>
-        </p:spPr>
-        <p:txBody>
-          <a:bodyPr wrap="square" lIns="0" tIns="0" rIns="0" bIns="0" rtlCol="0" anchor="ctr"/>
-          <a:lstStyle/>
-          <a:p>
-            <a:pPr indent="0" marL="0">
-              <a:buNone/>
-            </a:pPr>
-            <a:r>
-              <a:rPr lang="en-US" sz="900" dirty="0">
-                <a:solidFill>
-                  <a:srgbClr val="5F7183"/>
-                </a:solidFill>
-                <a:latin typeface="Yu Gothic" pitchFamily="34" charset="0"/>
-                <a:ea typeface="Yu Gothic" pitchFamily="34" charset="-122"/>
-                <a:cs typeface="Yu Gothic" pitchFamily="34" charset="-120"/>
-              </a:rPr>
-              <a:t>第5時限｜業務別教育2 その他当該警備業務を適正に実施するため必要な知識及び技能  </a:t>
-            </a:r>
-            <a:pPr indent="0" marL="0">
-              <a:buNone/>
-            </a:pPr>
-            <a:r>
-              <a:rPr lang="en-US" sz="850" i="1" dirty="0">
-                <a:solidFill>
-                  <a:srgbClr val="D6E0E9"/>
-                </a:solidFill>
-                <a:latin typeface="Calibri" pitchFamily="34" charset="0"/>
-                <a:ea typeface="Calibri" pitchFamily="34" charset="-122"/>
-                <a:cs typeface="Calibri" pitchFamily="34" charset="-120"/>
-              </a:rPr>
-              <a:t>Period 5 | Task-Specific Training 2 — De-escalation</a:t>
-            </a:r>
-            <a:endParaRPr lang="en-US" sz="900" dirty="0"/>
-          </a:p>
         </p:txBody>
       </p:sp>
       <p:sp>
@@ -11848,7 +11848,7 @@
         </p:nvSpPr>
         <p:spPr>
           <a:xfrm>
-            <a:off x="10637215" y="6382512"/>
+            <a:off x="10637215" y="6492240"/>
             <a:ext cx="914400" cy="292608"/>
           </a:xfrm>
           <a:prstGeom prst="rect">
@@ -11943,8 +11943,8 @@
         </p:nvSpPr>
         <p:spPr>
           <a:xfrm>
-            <a:off x="640080" y="384048"/>
-            <a:ext cx="8982151" cy="768096"/>
+            <a:off x="640080" y="365760"/>
+            <a:ext cx="8982151" cy="749808"/>
           </a:xfrm>
           <a:prstGeom prst="rect">
             <a:avLst/>
@@ -11983,7 +11983,7 @@
               <a:buNone/>
             </a:pPr>
             <a:r>
-              <a:rPr lang="en-US" sz="1100" i="1" dirty="0">
+              <a:rPr lang="en-US" sz="1100" dirty="0">
                 <a:solidFill>
                   <a:srgbClr val="12B198"/>
                 </a:solidFill>
@@ -12005,7 +12005,7 @@
         </p:nvSpPr>
         <p:spPr>
           <a:xfrm>
-            <a:off x="9686239" y="438912"/>
+            <a:off x="9686239" y="420624"/>
             <a:ext cx="932688" cy="310896"/>
           </a:xfrm>
           <a:prstGeom prst="roundRect">
@@ -12027,7 +12027,7 @@
         </p:nvSpPr>
         <p:spPr>
           <a:xfrm>
-            <a:off x="9686239" y="438912"/>
+            <a:off x="9686239" y="420624"/>
             <a:ext cx="932688" cy="310896"/>
           </a:xfrm>
           <a:prstGeom prst="rect">
@@ -12066,12 +12066,12 @@
         </p:nvSpPr>
         <p:spPr>
           <a:xfrm>
-            <a:off x="640080" y="1188720"/>
-            <a:ext cx="10911535" cy="530352"/>
+            <a:off x="640080" y="1115568"/>
+            <a:ext cx="10911535" cy="585216"/>
           </a:xfrm>
           <a:prstGeom prst="roundRect">
             <a:avLst>
-              <a:gd name="adj" fmla="val 6897"/>
+              <a:gd name="adj" fmla="val 6250"/>
             </a:avLst>
           </a:prstGeom>
           <a:solidFill>
@@ -12088,8 +12088,8 @@
         </p:nvSpPr>
         <p:spPr>
           <a:xfrm>
-            <a:off x="877824" y="1234440"/>
-            <a:ext cx="10436047" cy="438912"/>
+            <a:off x="877824" y="1161288"/>
+            <a:ext cx="10436047" cy="493776"/>
           </a:xfrm>
           <a:prstGeom prst="rect">
             <a:avLst/>
@@ -12125,7 +12125,7 @@
               <a:buNone/>
             </a:pPr>
             <a:r>
-              <a:rPr lang="en-US" sz="800" dirty="0">
+              <a:rPr lang="en-US" sz="900" dirty="0">
                 <a:solidFill>
                   <a:srgbClr val="0D8A76"/>
                 </a:solidFill>
@@ -12162,9 +12162,9 @@
               <a:buNone/>
             </a:pPr>
             <a:r>
-              <a:rPr lang="en-US" sz="850" i="1" dirty="0">
-                <a:solidFill>
-                  <a:srgbClr val="5F7183"/>
+              <a:rPr lang="en-US" sz="1050" dirty="0">
+                <a:solidFill>
+                  <a:srgbClr val="1B2733"/>
                 </a:solidFill>
                 <a:latin typeface="Calibri" pitchFamily="34" charset="0"/>
                 <a:ea typeface="Calibri" pitchFamily="34" charset="-122"/>
@@ -12184,12 +12184,12 @@
         </p:nvSpPr>
         <p:spPr>
           <a:xfrm>
-            <a:off x="640080" y="1810512"/>
-            <a:ext cx="5327752" cy="1920240"/>
+            <a:off x="640080" y="1773936"/>
+            <a:ext cx="5327752" cy="1965960"/>
           </a:xfrm>
           <a:prstGeom prst="roundRect">
             <a:avLst>
-              <a:gd name="adj" fmla="val 1905"/>
+              <a:gd name="adj" fmla="val 1860"/>
             </a:avLst>
           </a:prstGeom>
           <a:solidFill>
@@ -12206,7 +12206,7 @@
         </p:nvSpPr>
         <p:spPr>
           <a:xfrm>
-            <a:off x="822960" y="1975104"/>
+            <a:off x="822960" y="1938528"/>
             <a:ext cx="310896" cy="310896"/>
           </a:xfrm>
           <a:prstGeom prst="ellipse">
@@ -12226,7 +12226,7 @@
         </p:nvSpPr>
         <p:spPr>
           <a:xfrm>
-            <a:off x="822960" y="1975104"/>
+            <a:off x="822960" y="1938528"/>
             <a:ext cx="310896" cy="310896"/>
           </a:xfrm>
           <a:prstGeom prst="rect">
@@ -12265,7 +12265,7 @@
         </p:nvSpPr>
         <p:spPr>
           <a:xfrm>
-            <a:off x="1207008" y="1938528"/>
+            <a:off x="1207008" y="1901952"/>
             <a:ext cx="4559656" cy="512064"/>
           </a:xfrm>
           <a:prstGeom prst="rect">
@@ -12305,7 +12305,7 @@
               <a:buNone/>
             </a:pPr>
             <a:r>
-              <a:rPr lang="en-US" sz="800" i="1" dirty="0">
+              <a:rPr lang="en-US" sz="1050" dirty="0">
                 <a:solidFill>
                   <a:srgbClr val="12B198"/>
                 </a:solidFill>
@@ -12327,8 +12327,8 @@
         </p:nvSpPr>
         <p:spPr>
           <a:xfrm>
-            <a:off x="859536" y="2487168"/>
-            <a:ext cx="4888840" cy="1097280"/>
+            <a:off x="859536" y="2450592"/>
+            <a:ext cx="4888840" cy="1143000"/>
           </a:xfrm>
           <a:prstGeom prst="rect">
             <a:avLst/>
@@ -12373,9 +12373,9 @@
               <a:buNone/>
             </a:pPr>
             <a:r>
-              <a:rPr lang="en-US" sz="750" i="1" dirty="0">
-                <a:solidFill>
-                  <a:srgbClr val="5F7183"/>
+              <a:rPr lang="en-US" sz="950" dirty="0">
+                <a:solidFill>
+                  <a:srgbClr val="1B2733"/>
                 </a:solidFill>
                 <a:latin typeface="Calibri" pitchFamily="34" charset="0"/>
                 <a:ea typeface="Calibri" pitchFamily="34" charset="-122"/>
@@ -12419,9 +12419,9 @@
               <a:buNone/>
             </a:pPr>
             <a:r>
-              <a:rPr lang="en-US" sz="750" i="1" dirty="0">
-                <a:solidFill>
-                  <a:srgbClr val="5F7183"/>
+              <a:rPr lang="en-US" sz="950" dirty="0">
+                <a:solidFill>
+                  <a:srgbClr val="1B2733"/>
                 </a:solidFill>
                 <a:latin typeface="Calibri" pitchFamily="34" charset="0"/>
                 <a:ea typeface="Calibri" pitchFamily="34" charset="-122"/>
@@ -12465,9 +12465,9 @@
               <a:buNone/>
             </a:pPr>
             <a:r>
-              <a:rPr lang="en-US" sz="750" i="1" dirty="0">
-                <a:solidFill>
-                  <a:srgbClr val="5F7183"/>
+              <a:rPr lang="en-US" sz="950" dirty="0">
+                <a:solidFill>
+                  <a:srgbClr val="1B2733"/>
                 </a:solidFill>
                 <a:latin typeface="Calibri" pitchFamily="34" charset="0"/>
                 <a:ea typeface="Calibri" pitchFamily="34" charset="-122"/>
@@ -12511,9 +12511,9 @@
               <a:buNone/>
             </a:pPr>
             <a:r>
-              <a:rPr lang="en-US" sz="750" i="1" dirty="0">
-                <a:solidFill>
-                  <a:srgbClr val="5F7183"/>
+              <a:rPr lang="en-US" sz="950" dirty="0">
+                <a:solidFill>
+                  <a:srgbClr val="1B2733"/>
                 </a:solidFill>
                 <a:latin typeface="Calibri" pitchFamily="34" charset="0"/>
                 <a:ea typeface="Calibri" pitchFamily="34" charset="-122"/>
@@ -12533,12 +12533,12 @@
         </p:nvSpPr>
         <p:spPr>
           <a:xfrm>
-            <a:off x="6223864" y="1810512"/>
-            <a:ext cx="5327752" cy="1920240"/>
+            <a:off x="6223864" y="1773936"/>
+            <a:ext cx="5327752" cy="1965960"/>
           </a:xfrm>
           <a:prstGeom prst="roundRect">
             <a:avLst>
-              <a:gd name="adj" fmla="val 1905"/>
+              <a:gd name="adj" fmla="val 1860"/>
             </a:avLst>
           </a:prstGeom>
           <a:solidFill>
@@ -12555,7 +12555,7 @@
         </p:nvSpPr>
         <p:spPr>
           <a:xfrm>
-            <a:off x="6406744" y="1975104"/>
+            <a:off x="6406744" y="1938528"/>
             <a:ext cx="310896" cy="310896"/>
           </a:xfrm>
           <a:prstGeom prst="ellipse">
@@ -12575,7 +12575,7 @@
         </p:nvSpPr>
         <p:spPr>
           <a:xfrm>
-            <a:off x="6406744" y="1975104"/>
+            <a:off x="6406744" y="1938528"/>
             <a:ext cx="310896" cy="310896"/>
           </a:xfrm>
           <a:prstGeom prst="rect">
@@ -12614,7 +12614,7 @@
         </p:nvSpPr>
         <p:spPr>
           <a:xfrm>
-            <a:off x="6790792" y="1938528"/>
+            <a:off x="6790792" y="1901952"/>
             <a:ext cx="4559656" cy="512064"/>
           </a:xfrm>
           <a:prstGeom prst="rect">
@@ -12654,7 +12654,7 @@
               <a:buNone/>
             </a:pPr>
             <a:r>
-              <a:rPr lang="en-US" sz="800" i="1" dirty="0">
+              <a:rPr lang="en-US" sz="1050" dirty="0">
                 <a:solidFill>
                   <a:srgbClr val="12B198"/>
                 </a:solidFill>
@@ -12676,8 +12676,8 @@
         </p:nvSpPr>
         <p:spPr>
           <a:xfrm>
-            <a:off x="6443320" y="2487168"/>
-            <a:ext cx="4888840" cy="1097280"/>
+            <a:off x="6443320" y="2450592"/>
+            <a:ext cx="4888840" cy="1143000"/>
           </a:xfrm>
           <a:prstGeom prst="rect">
             <a:avLst/>
@@ -12722,9 +12722,9 @@
               <a:buNone/>
             </a:pPr>
             <a:r>
-              <a:rPr lang="en-US" sz="750" i="1" dirty="0">
-                <a:solidFill>
-                  <a:srgbClr val="5F7183"/>
+              <a:rPr lang="en-US" sz="950" dirty="0">
+                <a:solidFill>
+                  <a:srgbClr val="1B2733"/>
                 </a:solidFill>
                 <a:latin typeface="Calibri" pitchFamily="34" charset="0"/>
                 <a:ea typeface="Calibri" pitchFamily="34" charset="-122"/>
@@ -12768,9 +12768,9 @@
               <a:buNone/>
             </a:pPr>
             <a:r>
-              <a:rPr lang="en-US" sz="750" i="1" dirty="0">
-                <a:solidFill>
-                  <a:srgbClr val="5F7183"/>
+              <a:rPr lang="en-US" sz="950" dirty="0">
+                <a:solidFill>
+                  <a:srgbClr val="1B2733"/>
                 </a:solidFill>
                 <a:latin typeface="Calibri" pitchFamily="34" charset="0"/>
                 <a:ea typeface="Calibri" pitchFamily="34" charset="-122"/>
@@ -12814,9 +12814,9 @@
               <a:buNone/>
             </a:pPr>
             <a:r>
-              <a:rPr lang="en-US" sz="750" i="1" dirty="0">
-                <a:solidFill>
-                  <a:srgbClr val="5F7183"/>
+              <a:rPr lang="en-US" sz="950" dirty="0">
+                <a:solidFill>
+                  <a:srgbClr val="1B2733"/>
                 </a:solidFill>
                 <a:latin typeface="Calibri" pitchFamily="34" charset="0"/>
                 <a:ea typeface="Calibri" pitchFamily="34" charset="-122"/>
@@ -12860,9 +12860,9 @@
               <a:buNone/>
             </a:pPr>
             <a:r>
-              <a:rPr lang="en-US" sz="750" i="1" dirty="0">
-                <a:solidFill>
-                  <a:srgbClr val="5F7183"/>
+              <a:rPr lang="en-US" sz="950" dirty="0">
+                <a:solidFill>
+                  <a:srgbClr val="1B2733"/>
                 </a:solidFill>
                 <a:latin typeface="Calibri" pitchFamily="34" charset="0"/>
                 <a:ea typeface="Calibri" pitchFamily="34" charset="-122"/>
@@ -12882,12 +12882,12 @@
         </p:nvSpPr>
         <p:spPr>
           <a:xfrm>
-            <a:off x="640080" y="3931920"/>
-            <a:ext cx="5327752" cy="1920240"/>
+            <a:off x="640080" y="3941064"/>
+            <a:ext cx="5327752" cy="1965960"/>
           </a:xfrm>
           <a:prstGeom prst="roundRect">
             <a:avLst>
-              <a:gd name="adj" fmla="val 1905"/>
+              <a:gd name="adj" fmla="val 1860"/>
             </a:avLst>
           </a:prstGeom>
           <a:solidFill>
@@ -12904,7 +12904,7 @@
         </p:nvSpPr>
         <p:spPr>
           <a:xfrm>
-            <a:off x="822960" y="4096512"/>
+            <a:off x="822960" y="4105656"/>
             <a:ext cx="310896" cy="310896"/>
           </a:xfrm>
           <a:prstGeom prst="ellipse">
@@ -12924,7 +12924,7 @@
         </p:nvSpPr>
         <p:spPr>
           <a:xfrm>
-            <a:off x="822960" y="4096512"/>
+            <a:off x="822960" y="4105656"/>
             <a:ext cx="310896" cy="310896"/>
           </a:xfrm>
           <a:prstGeom prst="rect">
@@ -12963,7 +12963,7 @@
         </p:nvSpPr>
         <p:spPr>
           <a:xfrm>
-            <a:off x="1207008" y="4059936"/>
+            <a:off x="1207008" y="4069080"/>
             <a:ext cx="4559656" cy="512064"/>
           </a:xfrm>
           <a:prstGeom prst="rect">
@@ -13003,7 +13003,7 @@
               <a:buNone/>
             </a:pPr>
             <a:r>
-              <a:rPr lang="en-US" sz="800" i="1" dirty="0">
+              <a:rPr lang="en-US" sz="1050" dirty="0">
                 <a:solidFill>
                   <a:srgbClr val="12B198"/>
                 </a:solidFill>
@@ -13025,8 +13025,8 @@
         </p:nvSpPr>
         <p:spPr>
           <a:xfrm>
-            <a:off x="859536" y="4608576"/>
-            <a:ext cx="4888840" cy="1097280"/>
+            <a:off x="859536" y="4617720"/>
+            <a:ext cx="4888840" cy="1143000"/>
           </a:xfrm>
           <a:prstGeom prst="rect">
             <a:avLst/>
@@ -13071,9 +13071,9 @@
               <a:buNone/>
             </a:pPr>
             <a:r>
-              <a:rPr lang="en-US" sz="750" i="1" dirty="0">
-                <a:solidFill>
-                  <a:srgbClr val="5F7183"/>
+              <a:rPr lang="en-US" sz="950" dirty="0">
+                <a:solidFill>
+                  <a:srgbClr val="1B2733"/>
                 </a:solidFill>
                 <a:latin typeface="Calibri" pitchFamily="34" charset="0"/>
                 <a:ea typeface="Calibri" pitchFamily="34" charset="-122"/>
@@ -13117,9 +13117,9 @@
               <a:buNone/>
             </a:pPr>
             <a:r>
-              <a:rPr lang="en-US" sz="750" i="1" dirty="0">
-                <a:solidFill>
-                  <a:srgbClr val="5F7183"/>
+              <a:rPr lang="en-US" sz="950" dirty="0">
+                <a:solidFill>
+                  <a:srgbClr val="1B2733"/>
                 </a:solidFill>
                 <a:latin typeface="Calibri" pitchFamily="34" charset="0"/>
                 <a:ea typeface="Calibri" pitchFamily="34" charset="-122"/>
@@ -13163,9 +13163,9 @@
               <a:buNone/>
             </a:pPr>
             <a:r>
-              <a:rPr lang="en-US" sz="750" i="1" dirty="0">
-                <a:solidFill>
-                  <a:srgbClr val="5F7183"/>
+              <a:rPr lang="en-US" sz="950" dirty="0">
+                <a:solidFill>
+                  <a:srgbClr val="1B2733"/>
                 </a:solidFill>
                 <a:latin typeface="Calibri" pitchFamily="34" charset="0"/>
                 <a:ea typeface="Calibri" pitchFamily="34" charset="-122"/>
@@ -13209,9 +13209,9 @@
               <a:buNone/>
             </a:pPr>
             <a:r>
-              <a:rPr lang="en-US" sz="750" i="1" dirty="0">
-                <a:solidFill>
-                  <a:srgbClr val="5F7183"/>
+              <a:rPr lang="en-US" sz="950" dirty="0">
+                <a:solidFill>
+                  <a:srgbClr val="1B2733"/>
                 </a:solidFill>
                 <a:latin typeface="Calibri" pitchFamily="34" charset="0"/>
                 <a:ea typeface="Calibri" pitchFamily="34" charset="-122"/>
@@ -13231,12 +13231,12 @@
         </p:nvSpPr>
         <p:spPr>
           <a:xfrm>
-            <a:off x="6223864" y="3931920"/>
-            <a:ext cx="5327752" cy="1920240"/>
+            <a:off x="6223864" y="3941064"/>
+            <a:ext cx="5327752" cy="1965960"/>
           </a:xfrm>
           <a:prstGeom prst="roundRect">
             <a:avLst>
-              <a:gd name="adj" fmla="val 1905"/>
+              <a:gd name="adj" fmla="val 1860"/>
             </a:avLst>
           </a:prstGeom>
           <a:solidFill>
@@ -13253,7 +13253,7 @@
         </p:nvSpPr>
         <p:spPr>
           <a:xfrm>
-            <a:off x="6406744" y="4096512"/>
+            <a:off x="6406744" y="4105656"/>
             <a:ext cx="310896" cy="310896"/>
           </a:xfrm>
           <a:prstGeom prst="ellipse">
@@ -13273,7 +13273,7 @@
         </p:nvSpPr>
         <p:spPr>
           <a:xfrm>
-            <a:off x="6406744" y="4096512"/>
+            <a:off x="6406744" y="4105656"/>
             <a:ext cx="310896" cy="310896"/>
           </a:xfrm>
           <a:prstGeom prst="rect">
@@ -13312,7 +13312,7 @@
         </p:nvSpPr>
         <p:spPr>
           <a:xfrm>
-            <a:off x="6790792" y="4059936"/>
+            <a:off x="6790792" y="4069080"/>
             <a:ext cx="4559656" cy="512064"/>
           </a:xfrm>
           <a:prstGeom prst="rect">
@@ -13352,7 +13352,7 @@
               <a:buNone/>
             </a:pPr>
             <a:r>
-              <a:rPr lang="en-US" sz="800" i="1" dirty="0">
+              <a:rPr lang="en-US" sz="1050" dirty="0">
                 <a:solidFill>
                   <a:srgbClr val="12B198"/>
                 </a:solidFill>
@@ -13374,8 +13374,8 @@
         </p:nvSpPr>
         <p:spPr>
           <a:xfrm>
-            <a:off x="6443320" y="4608576"/>
-            <a:ext cx="4888840" cy="1097280"/>
+            <a:off x="6443320" y="4617720"/>
+            <a:ext cx="4888840" cy="1143000"/>
           </a:xfrm>
           <a:prstGeom prst="rect">
             <a:avLst/>
@@ -13420,9 +13420,9 @@
               <a:buNone/>
             </a:pPr>
             <a:r>
-              <a:rPr lang="en-US" sz="750" i="1" dirty="0">
-                <a:solidFill>
-                  <a:srgbClr val="5F7183"/>
+              <a:rPr lang="en-US" sz="950" dirty="0">
+                <a:solidFill>
+                  <a:srgbClr val="1B2733"/>
                 </a:solidFill>
                 <a:latin typeface="Calibri" pitchFamily="34" charset="0"/>
                 <a:ea typeface="Calibri" pitchFamily="34" charset="-122"/>
@@ -13466,9 +13466,9 @@
               <a:buNone/>
             </a:pPr>
             <a:r>
-              <a:rPr lang="en-US" sz="750" i="1" dirty="0">
-                <a:solidFill>
-                  <a:srgbClr val="5F7183"/>
+              <a:rPr lang="en-US" sz="950" dirty="0">
+                <a:solidFill>
+                  <a:srgbClr val="1B2733"/>
                 </a:solidFill>
                 <a:latin typeface="Calibri" pitchFamily="34" charset="0"/>
                 <a:ea typeface="Calibri" pitchFamily="34" charset="-122"/>
@@ -13512,9 +13512,9 @@
               <a:buNone/>
             </a:pPr>
             <a:r>
-              <a:rPr lang="en-US" sz="750" i="1" dirty="0">
-                <a:solidFill>
-                  <a:srgbClr val="5F7183"/>
+              <a:rPr lang="en-US" sz="950" dirty="0">
+                <a:solidFill>
+                  <a:srgbClr val="1B2733"/>
                 </a:solidFill>
                 <a:latin typeface="Calibri" pitchFamily="34" charset="0"/>
                 <a:ea typeface="Calibri" pitchFamily="34" charset="-122"/>
@@ -13558,7 +13558,86 @@
               <a:buNone/>
             </a:pPr>
             <a:r>
-              <a:rPr lang="en-US" sz="750" i="1" dirty="0">
+              <a:rPr lang="en-US" sz="950" dirty="0">
+                <a:solidFill>
+                  <a:srgbClr val="1B2733"/>
+                </a:solidFill>
+                <a:latin typeface="Calibri" pitchFamily="34" charset="0"/>
+                <a:ea typeface="Calibri" pitchFamily="34" charset="-122"/>
+                <a:cs typeface="Calibri" pitchFamily="34" charset="-120"/>
+              </a:rPr>
+              <a:t>  When you refuse, say what you can do instead</a:t>
+            </a:r>
+            <a:endParaRPr lang="en-US" sz="950" dirty="0"/>
+          </a:p>
+        </p:txBody>
+      </p:sp>
+      <p:sp>
+        <p:nvSpPr>
+          <p:cNvPr id="28" name="Text 25"/>
+          <p:cNvSpPr/>
+          <p:nvPr/>
+        </p:nvSpPr>
+        <p:spPr>
+          <a:xfrm>
+            <a:off x="640080" y="5961888"/>
+            <a:ext cx="10911535" cy="292608"/>
+          </a:xfrm>
+          <a:prstGeom prst="rect">
+            <a:avLst/>
+          </a:prstGeom>
+          <a:noFill/>
+          <a:ln/>
+        </p:spPr>
+        <p:txBody>
+          <a:bodyPr wrap="square" lIns="0" tIns="0" rIns="0" bIns="0" rtlCol="0" anchor="t"/>
+          <a:lstStyle/>
+          <a:p>
+            <a:pPr indent="0" marL="0">
+              <a:lnSpc>
+                <a:spcPct val="88000"/>
+              </a:lnSpc>
+              <a:buNone/>
+            </a:pPr>
+            <a:r>
+              <a:rPr lang="en-US" sz="900" b="1" dirty="0">
+                <a:solidFill>
+                  <a:srgbClr val="0D8A76"/>
+                </a:solidFill>
+                <a:latin typeface="Yu Gothic" pitchFamily="34" charset="0"/>
+                <a:ea typeface="Yu Gothic" pitchFamily="34" charset="-122"/>
+                <a:cs typeface="Yu Gothic" pitchFamily="34" charset="-120"/>
+              </a:rPr>
+              <a:t>Site SOP優先　</a:t>
+            </a:r>
+            <a:pPr indent="0" marL="0">
+              <a:lnSpc>
+                <a:spcPct val="88000"/>
+              </a:lnSpc>
+              <a:buNone/>
+            </a:pPr>
+            <a:r>
+              <a:rPr lang="en-US" sz="900" dirty="0">
+                <a:solidFill>
+                  <a:srgbClr val="1B2733"/>
+                </a:solidFill>
+                <a:latin typeface="Yu Gothic" pitchFamily="34" charset="0"/>
+                <a:ea typeface="Yu Gothic" pitchFamily="34" charset="-122"/>
+                <a:cs typeface="Yu Gothic" pitchFamily="34" charset="-120"/>
+              </a:rPr>
+              <a:t>来訪者の確認方法、例外の承認者、緊急時の入館手順は現場ごとに異なる。Site SOPによる。</a:t>
+            </a:r>
+            <a:endParaRPr lang="en-US" sz="900" dirty="0"/>
+          </a:p>
+          <a:p>
+            <a:pPr indent="0" marL="0">
+              <a:lnSpc>
+                <a:spcPct val="88000"/>
+              </a:lnSpc>
+              <a:buNone/>
+            </a:pPr>
+            <a:r>
+              <a:rPr lang="en-US" sz="800" i="1" dirty="0">
                 <a:solidFill>
                   <a:srgbClr val="5F7183"/>
                 </a:solidFill>
@@ -13566,22 +13645,22 @@
                 <a:ea typeface="Calibri" pitchFamily="34" charset="-122"/>
                 <a:cs typeface="Calibri" pitchFamily="34" charset="-120"/>
               </a:rPr>
-              <a:t>  When you refuse, say what you can do instead</a:t>
-            </a:r>
-            <a:endParaRPr lang="en-US" sz="950" dirty="0"/>
-          </a:p>
-        </p:txBody>
-      </p:sp>
-      <p:sp>
-        <p:nvSpPr>
-          <p:cNvPr id="28" name="Text 25"/>
-          <p:cNvSpPr/>
-          <p:nvPr/>
-        </p:nvSpPr>
-        <p:spPr>
-          <a:xfrm>
-            <a:off x="640080" y="5907024"/>
-            <a:ext cx="10911535" cy="310896"/>
+              <a:t>Visitor verification, who may approve exceptions, and emergency entry differ by site.</a:t>
+            </a:r>
+            <a:endParaRPr lang="en-US" sz="900" dirty="0"/>
+          </a:p>
+        </p:txBody>
+      </p:sp>
+      <p:sp>
+        <p:nvSpPr>
+          <p:cNvPr id="29" name="Text 26"/>
+          <p:cNvSpPr/>
+          <p:nvPr/>
+        </p:nvSpPr>
+        <p:spPr>
+          <a:xfrm>
+            <a:off x="640080" y="6272784"/>
+            <a:ext cx="9905695" cy="219456"/>
           </a:xfrm>
           <a:prstGeom prst="rect">
             <a:avLst/>
@@ -13594,167 +13673,88 @@
           <a:lstStyle/>
           <a:p>
             <a:pPr indent="0" marL="0">
-              <a:lnSpc>
-                <a:spcPct val="88000"/>
-              </a:lnSpc>
-              <a:buNone/>
-            </a:pPr>
-            <a:r>
-              <a:rPr lang="en-US" sz="900" b="1" dirty="0">
-                <a:solidFill>
-                  <a:srgbClr val="0D8A76"/>
-                </a:solidFill>
-                <a:latin typeface="Yu Gothic" pitchFamily="34" charset="0"/>
-                <a:ea typeface="Yu Gothic" pitchFamily="34" charset="-122"/>
-                <a:cs typeface="Yu Gothic" pitchFamily="34" charset="-120"/>
-              </a:rPr>
-              <a:t>Site SOP優先　</a:t>
-            </a:r>
-            <a:pPr indent="0" marL="0">
-              <a:lnSpc>
-                <a:spcPct val="88000"/>
-              </a:lnSpc>
+              <a:buNone/>
+            </a:pPr>
+            <a:r>
+              <a:rPr lang="en-US" sz="750" b="1" dirty="0">
+                <a:solidFill>
+                  <a:srgbClr val="D6E0E9"/>
+                </a:solidFill>
+                <a:latin typeface="Yu Gothic" pitchFamily="34" charset="0"/>
+                <a:ea typeface="Yu Gothic" pitchFamily="34" charset="-122"/>
+                <a:cs typeface="Yu Gothic" pitchFamily="34" charset="-120"/>
+              </a:rPr>
+              <a:t>ソース　</a:t>
+            </a:r>
+            <a:pPr indent="0" marL="0">
+              <a:buNone/>
+            </a:pPr>
+            <a:r>
+              <a:rPr lang="en-US" sz="750" dirty="0">
+                <a:solidFill>
+                  <a:srgbClr val="5F7183"/>
+                </a:solidFill>
+                <a:latin typeface="Yu Gothic" pitchFamily="34" charset="0"/>
+                <a:ea typeface="Yu Gothic" pitchFamily="34" charset="-122"/>
+                <a:cs typeface="Yu Gothic" pitchFamily="34" charset="-120"/>
+              </a:rPr>
+              <a:t>個人情報保護法、不正競争防止法、経済産業省「営業秘密管理指針」</a:t>
+            </a:r>
+            <a:endParaRPr lang="en-US" sz="750" dirty="0"/>
+          </a:p>
+        </p:txBody>
+      </p:sp>
+      <p:sp>
+        <p:nvSpPr>
+          <p:cNvPr id="30" name="Text 27"/>
+          <p:cNvSpPr/>
+          <p:nvPr/>
+        </p:nvSpPr>
+        <p:spPr>
+          <a:xfrm>
+            <a:off x="640080" y="6492240"/>
+            <a:ext cx="8778240" cy="292608"/>
+          </a:xfrm>
+          <a:prstGeom prst="rect">
+            <a:avLst/>
+          </a:prstGeom>
+          <a:noFill/>
+          <a:ln/>
+        </p:spPr>
+        <p:txBody>
+          <a:bodyPr wrap="square" lIns="0" tIns="0" rIns="0" bIns="0" rtlCol="0" anchor="ctr"/>
+          <a:lstStyle/>
+          <a:p>
+            <a:pPr indent="0" marL="0">
               <a:buNone/>
             </a:pPr>
             <a:r>
               <a:rPr lang="en-US" sz="900" dirty="0">
                 <a:solidFill>
-                  <a:srgbClr val="1B2733"/>
-                </a:solidFill>
-                <a:latin typeface="Yu Gothic" pitchFamily="34" charset="0"/>
-                <a:ea typeface="Yu Gothic" pitchFamily="34" charset="-122"/>
-                <a:cs typeface="Yu Gothic" pitchFamily="34" charset="-120"/>
-              </a:rPr>
-              <a:t>来訪者の確認方法、例外の承認者、緊急時の入館手順は現場ごとに異なる。Site SOPによる。</a:t>
+                  <a:srgbClr val="5F7183"/>
+                </a:solidFill>
+                <a:latin typeface="Yu Gothic" pitchFamily="34" charset="0"/>
+                <a:ea typeface="Yu Gothic" pitchFamily="34" charset="-122"/>
+                <a:cs typeface="Yu Gothic" pitchFamily="34" charset="-120"/>
+              </a:rPr>
+              <a:t>第5時限｜業務別教育2 その他当該警備業務を適正に実施するため必要な知識及び技能  </a:t>
+            </a:r>
+            <a:pPr indent="0" marL="0">
+              <a:buNone/>
+            </a:pPr>
+            <a:r>
+              <a:rPr lang="en-US" sz="850" i="1" dirty="0">
+                <a:solidFill>
+                  <a:srgbClr val="D6E0E9"/>
+                </a:solidFill>
+                <a:latin typeface="Calibri" pitchFamily="34" charset="0"/>
+                <a:ea typeface="Calibri" pitchFamily="34" charset="-122"/>
+                <a:cs typeface="Calibri" pitchFamily="34" charset="-120"/>
+              </a:rPr>
+              <a:t>Period 5 | Task-Specific Training 2 — De-escalation</a:t>
             </a:r>
             <a:endParaRPr lang="en-US" sz="900" dirty="0"/>
           </a:p>
-          <a:p>
-            <a:pPr indent="0" marL="0">
-              <a:lnSpc>
-                <a:spcPct val="88000"/>
-              </a:lnSpc>
-              <a:buNone/>
-            </a:pPr>
-            <a:r>
-              <a:rPr lang="en-US" sz="750" i="1" dirty="0">
-                <a:solidFill>
-                  <a:srgbClr val="5F7183"/>
-                </a:solidFill>
-                <a:latin typeface="Calibri" pitchFamily="34" charset="0"/>
-                <a:ea typeface="Calibri" pitchFamily="34" charset="-122"/>
-                <a:cs typeface="Calibri" pitchFamily="34" charset="-120"/>
-              </a:rPr>
-              <a:t>Visitor verification, who may approve exceptions, and emergency entry differ by site.</a:t>
-            </a:r>
-            <a:endParaRPr lang="en-US" sz="900" dirty="0"/>
-          </a:p>
-        </p:txBody>
-      </p:sp>
-      <p:sp>
-        <p:nvSpPr>
-          <p:cNvPr id="29" name="Text 26"/>
-          <p:cNvSpPr/>
-          <p:nvPr/>
-        </p:nvSpPr>
-        <p:spPr>
-          <a:xfrm>
-            <a:off x="640080" y="6272784"/>
-            <a:ext cx="9905695" cy="237744"/>
-          </a:xfrm>
-          <a:prstGeom prst="rect">
-            <a:avLst/>
-          </a:prstGeom>
-          <a:noFill/>
-          <a:ln/>
-        </p:spPr>
-        <p:txBody>
-          <a:bodyPr wrap="square" lIns="0" tIns="0" rIns="0" bIns="0" rtlCol="0" anchor="t"/>
-          <a:lstStyle/>
-          <a:p>
-            <a:pPr indent="0" marL="0">
-              <a:buNone/>
-            </a:pPr>
-            <a:r>
-              <a:rPr lang="en-US" sz="750" b="1" dirty="0">
-                <a:solidFill>
-                  <a:srgbClr val="D6E0E9"/>
-                </a:solidFill>
-                <a:latin typeface="Yu Gothic" pitchFamily="34" charset="0"/>
-                <a:ea typeface="Yu Gothic" pitchFamily="34" charset="-122"/>
-                <a:cs typeface="Yu Gothic" pitchFamily="34" charset="-120"/>
-              </a:rPr>
-              <a:t>ソース　</a:t>
-            </a:r>
-            <a:pPr indent="0" marL="0">
-              <a:buNone/>
-            </a:pPr>
-            <a:r>
-              <a:rPr lang="en-US" sz="750" dirty="0">
-                <a:solidFill>
-                  <a:srgbClr val="5F7183"/>
-                </a:solidFill>
-                <a:latin typeface="Yu Gothic" pitchFamily="34" charset="0"/>
-                <a:ea typeface="Yu Gothic" pitchFamily="34" charset="-122"/>
-                <a:cs typeface="Yu Gothic" pitchFamily="34" charset="-120"/>
-              </a:rPr>
-              <a:t>個人情報保護法、不正競争防止法、経済産業省「営業秘密管理指針」</a:t>
-            </a:r>
-            <a:endParaRPr lang="en-US" sz="750" dirty="0"/>
-          </a:p>
-        </p:txBody>
-      </p:sp>
-      <p:sp>
-        <p:nvSpPr>
-          <p:cNvPr id="30" name="Text 27"/>
-          <p:cNvSpPr/>
-          <p:nvPr/>
-        </p:nvSpPr>
-        <p:spPr>
-          <a:xfrm>
-            <a:off x="640080" y="6382512"/>
-            <a:ext cx="8778240" cy="292608"/>
-          </a:xfrm>
-          <a:prstGeom prst="rect">
-            <a:avLst/>
-          </a:prstGeom>
-          <a:noFill/>
-          <a:ln/>
-        </p:spPr>
-        <p:txBody>
-          <a:bodyPr wrap="square" lIns="0" tIns="0" rIns="0" bIns="0" rtlCol="0" anchor="ctr"/>
-          <a:lstStyle/>
-          <a:p>
-            <a:pPr indent="0" marL="0">
-              <a:buNone/>
-            </a:pPr>
-            <a:r>
-              <a:rPr lang="en-US" sz="900" dirty="0">
-                <a:solidFill>
-                  <a:srgbClr val="5F7183"/>
-                </a:solidFill>
-                <a:latin typeface="Yu Gothic" pitchFamily="34" charset="0"/>
-                <a:ea typeface="Yu Gothic" pitchFamily="34" charset="-122"/>
-                <a:cs typeface="Yu Gothic" pitchFamily="34" charset="-120"/>
-              </a:rPr>
-              <a:t>第5時限｜業務別教育2 その他当該警備業務を適正に実施するため必要な知識及び技能  </a:t>
-            </a:r>
-            <a:pPr indent="0" marL="0">
-              <a:buNone/>
-            </a:pPr>
-            <a:r>
-              <a:rPr lang="en-US" sz="850" i="1" dirty="0">
-                <a:solidFill>
-                  <a:srgbClr val="D6E0E9"/>
-                </a:solidFill>
-                <a:latin typeface="Calibri" pitchFamily="34" charset="0"/>
-                <a:ea typeface="Calibri" pitchFamily="34" charset="-122"/>
-                <a:cs typeface="Calibri" pitchFamily="34" charset="-120"/>
-              </a:rPr>
-              <a:t>Period 5 | Task-Specific Training 2 — De-escalation</a:t>
-            </a:r>
-            <a:endParaRPr lang="en-US" sz="900" dirty="0"/>
-          </a:p>
         </p:txBody>
       </p:sp>
       <p:sp>
@@ -13765,7 +13765,7 @@
         </p:nvSpPr>
         <p:spPr>
           <a:xfrm>
-            <a:off x="10637215" y="6382512"/>
+            <a:off x="10637215" y="6492240"/>
             <a:ext cx="914400" cy="292608"/>
           </a:xfrm>
           <a:prstGeom prst="rect">
@@ -13860,8 +13860,8 @@
         </p:nvSpPr>
         <p:spPr>
           <a:xfrm>
-            <a:off x="640080" y="384048"/>
-            <a:ext cx="8982151" cy="768096"/>
+            <a:off x="640080" y="365760"/>
+            <a:ext cx="8982151" cy="749808"/>
           </a:xfrm>
           <a:prstGeom prst="rect">
             <a:avLst/>
@@ -13900,7 +13900,7 @@
               <a:buNone/>
             </a:pPr>
             <a:r>
-              <a:rPr lang="en-US" sz="1100" i="1" dirty="0">
+              <a:rPr lang="en-US" sz="1100" dirty="0">
                 <a:solidFill>
                   <a:srgbClr val="12B198"/>
                 </a:solidFill>
@@ -13922,7 +13922,7 @@
         </p:nvSpPr>
         <p:spPr>
           <a:xfrm>
-            <a:off x="9686239" y="438912"/>
+            <a:off x="9686239" y="420624"/>
             <a:ext cx="932688" cy="310896"/>
           </a:xfrm>
           <a:prstGeom prst="roundRect">
@@ -13944,7 +13944,7 @@
         </p:nvSpPr>
         <p:spPr>
           <a:xfrm>
-            <a:off x="9686239" y="438912"/>
+            <a:off x="9686239" y="420624"/>
             <a:ext cx="932688" cy="310896"/>
           </a:xfrm>
           <a:prstGeom prst="rect">
@@ -13983,12 +13983,12 @@
         </p:nvSpPr>
         <p:spPr>
           <a:xfrm>
-            <a:off x="640080" y="1188720"/>
-            <a:ext cx="10911535" cy="530352"/>
+            <a:off x="640080" y="1115568"/>
+            <a:ext cx="10911535" cy="585216"/>
           </a:xfrm>
           <a:prstGeom prst="roundRect">
             <a:avLst>
-              <a:gd name="adj" fmla="val 6897"/>
+              <a:gd name="adj" fmla="val 6250"/>
             </a:avLst>
           </a:prstGeom>
           <a:solidFill>
@@ -14005,8 +14005,8 @@
         </p:nvSpPr>
         <p:spPr>
           <a:xfrm>
-            <a:off x="877824" y="1234440"/>
-            <a:ext cx="10436047" cy="438912"/>
+            <a:off x="877824" y="1161288"/>
+            <a:ext cx="10436047" cy="493776"/>
           </a:xfrm>
           <a:prstGeom prst="rect">
             <a:avLst/>
@@ -14042,7 +14042,7 @@
               <a:buNone/>
             </a:pPr>
             <a:r>
-              <a:rPr lang="en-US" sz="800" dirty="0">
+              <a:rPr lang="en-US" sz="900" dirty="0">
                 <a:solidFill>
                   <a:srgbClr val="0D8A76"/>
                 </a:solidFill>
@@ -14079,9 +14079,9 @@
               <a:buNone/>
             </a:pPr>
             <a:r>
-              <a:rPr lang="en-US" sz="850" i="1" dirty="0">
-                <a:solidFill>
-                  <a:srgbClr val="5F7183"/>
+              <a:rPr lang="en-US" sz="1050" dirty="0">
+                <a:solidFill>
+                  <a:srgbClr val="1B2733"/>
                 </a:solidFill>
                 <a:latin typeface="Calibri" pitchFamily="34" charset="0"/>
                 <a:ea typeface="Calibri" pitchFamily="34" charset="-122"/>
@@ -14101,12 +14101,12 @@
         </p:nvSpPr>
         <p:spPr>
           <a:xfrm>
-            <a:off x="640080" y="1810512"/>
-            <a:ext cx="5327752" cy="1920240"/>
+            <a:off x="640080" y="1773936"/>
+            <a:ext cx="5327752" cy="1965960"/>
           </a:xfrm>
           <a:prstGeom prst="roundRect">
             <a:avLst>
-              <a:gd name="adj" fmla="val 1905"/>
+              <a:gd name="adj" fmla="val 1860"/>
             </a:avLst>
           </a:prstGeom>
           <a:solidFill>
@@ -14123,7 +14123,7 @@
         </p:nvSpPr>
         <p:spPr>
           <a:xfrm>
-            <a:off x="822960" y="1975104"/>
+            <a:off x="822960" y="1938528"/>
             <a:ext cx="310896" cy="310896"/>
           </a:xfrm>
           <a:prstGeom prst="ellipse">
@@ -14143,7 +14143,7 @@
         </p:nvSpPr>
         <p:spPr>
           <a:xfrm>
-            <a:off x="822960" y="1975104"/>
+            <a:off x="822960" y="1938528"/>
             <a:ext cx="310896" cy="310896"/>
           </a:xfrm>
           <a:prstGeom prst="rect">
@@ -14182,7 +14182,7 @@
         </p:nvSpPr>
         <p:spPr>
           <a:xfrm>
-            <a:off x="1207008" y="1938528"/>
+            <a:off x="1207008" y="1901952"/>
             <a:ext cx="4559656" cy="512064"/>
           </a:xfrm>
           <a:prstGeom prst="rect">
@@ -14222,7 +14222,7 @@
               <a:buNone/>
             </a:pPr>
             <a:r>
-              <a:rPr lang="en-US" sz="800" i="1" dirty="0">
+              <a:rPr lang="en-US" sz="1050" dirty="0">
                 <a:solidFill>
                   <a:srgbClr val="12B198"/>
                 </a:solidFill>
@@ -14244,8 +14244,8 @@
         </p:nvSpPr>
         <p:spPr>
           <a:xfrm>
-            <a:off x="859536" y="2487168"/>
-            <a:ext cx="4888840" cy="1097280"/>
+            <a:off x="859536" y="2450592"/>
+            <a:ext cx="4888840" cy="1143000"/>
           </a:xfrm>
           <a:prstGeom prst="rect">
             <a:avLst/>
@@ -14290,9 +14290,9 @@
               <a:buNone/>
             </a:pPr>
             <a:r>
-              <a:rPr lang="en-US" sz="750" i="1" dirty="0">
-                <a:solidFill>
-                  <a:srgbClr val="5F7183"/>
+              <a:rPr lang="en-US" sz="950" dirty="0">
+                <a:solidFill>
+                  <a:srgbClr val="1B2733"/>
                 </a:solidFill>
                 <a:latin typeface="Calibri" pitchFamily="34" charset="0"/>
                 <a:ea typeface="Calibri" pitchFamily="34" charset="-122"/>
@@ -14336,9 +14336,9 @@
               <a:buNone/>
             </a:pPr>
             <a:r>
-              <a:rPr lang="en-US" sz="750" i="1" dirty="0">
-                <a:solidFill>
-                  <a:srgbClr val="5F7183"/>
+              <a:rPr lang="en-US" sz="950" dirty="0">
+                <a:solidFill>
+                  <a:srgbClr val="1B2733"/>
                 </a:solidFill>
                 <a:latin typeface="Calibri" pitchFamily="34" charset="0"/>
                 <a:ea typeface="Calibri" pitchFamily="34" charset="-122"/>
@@ -14382,9 +14382,9 @@
               <a:buNone/>
             </a:pPr>
             <a:r>
-              <a:rPr lang="en-US" sz="750" i="1" dirty="0">
-                <a:solidFill>
-                  <a:srgbClr val="5F7183"/>
+              <a:rPr lang="en-US" sz="950" dirty="0">
+                <a:solidFill>
+                  <a:srgbClr val="1B2733"/>
                 </a:solidFill>
                 <a:latin typeface="Calibri" pitchFamily="34" charset="0"/>
                 <a:ea typeface="Calibri" pitchFamily="34" charset="-122"/>
@@ -14428,9 +14428,9 @@
               <a:buNone/>
             </a:pPr>
             <a:r>
-              <a:rPr lang="en-US" sz="750" i="1" dirty="0">
-                <a:solidFill>
-                  <a:srgbClr val="5F7183"/>
+              <a:rPr lang="en-US" sz="950" dirty="0">
+                <a:solidFill>
+                  <a:srgbClr val="1B2733"/>
                 </a:solidFill>
                 <a:latin typeface="Calibri" pitchFamily="34" charset="0"/>
                 <a:ea typeface="Calibri" pitchFamily="34" charset="-122"/>
@@ -14450,12 +14450,12 @@
         </p:nvSpPr>
         <p:spPr>
           <a:xfrm>
-            <a:off x="6223864" y="1810512"/>
-            <a:ext cx="5327752" cy="1920240"/>
+            <a:off x="6223864" y="1773936"/>
+            <a:ext cx="5327752" cy="1965960"/>
           </a:xfrm>
           <a:prstGeom prst="roundRect">
             <a:avLst>
-              <a:gd name="adj" fmla="val 1905"/>
+              <a:gd name="adj" fmla="val 1860"/>
             </a:avLst>
           </a:prstGeom>
           <a:solidFill>
@@ -14472,7 +14472,7 @@
         </p:nvSpPr>
         <p:spPr>
           <a:xfrm>
-            <a:off x="6406744" y="1975104"/>
+            <a:off x="6406744" y="1938528"/>
             <a:ext cx="310896" cy="310896"/>
           </a:xfrm>
           <a:prstGeom prst="ellipse">
@@ -14492,7 +14492,7 @@
         </p:nvSpPr>
         <p:spPr>
           <a:xfrm>
-            <a:off x="6406744" y="1975104"/>
+            <a:off x="6406744" y="1938528"/>
             <a:ext cx="310896" cy="310896"/>
           </a:xfrm>
           <a:prstGeom prst="rect">
@@ -14531,7 +14531,7 @@
         </p:nvSpPr>
         <p:spPr>
           <a:xfrm>
-            <a:off x="6790792" y="1938528"/>
+            <a:off x="6790792" y="1901952"/>
             <a:ext cx="4559656" cy="512064"/>
           </a:xfrm>
           <a:prstGeom prst="rect">
@@ -14571,7 +14571,7 @@
               <a:buNone/>
             </a:pPr>
             <a:r>
-              <a:rPr lang="en-US" sz="800" i="1" dirty="0">
+              <a:rPr lang="en-US" sz="1050" dirty="0">
                 <a:solidFill>
                   <a:srgbClr val="12B198"/>
                 </a:solidFill>
@@ -14593,8 +14593,8 @@
         </p:nvSpPr>
         <p:spPr>
           <a:xfrm>
-            <a:off x="6443320" y="2487168"/>
-            <a:ext cx="4888840" cy="1097280"/>
+            <a:off x="6443320" y="2450592"/>
+            <a:ext cx="4888840" cy="1143000"/>
           </a:xfrm>
           <a:prstGeom prst="rect">
             <a:avLst/>
@@ -14639,9 +14639,9 @@
               <a:buNone/>
             </a:pPr>
             <a:r>
-              <a:rPr lang="en-US" sz="750" i="1" dirty="0">
-                <a:solidFill>
-                  <a:srgbClr val="5F7183"/>
+              <a:rPr lang="en-US" sz="950" dirty="0">
+                <a:solidFill>
+                  <a:srgbClr val="1B2733"/>
                 </a:solidFill>
                 <a:latin typeface="Calibri" pitchFamily="34" charset="0"/>
                 <a:ea typeface="Calibri" pitchFamily="34" charset="-122"/>
@@ -14685,9 +14685,9 @@
               <a:buNone/>
             </a:pPr>
             <a:r>
-              <a:rPr lang="en-US" sz="750" i="1" dirty="0">
-                <a:solidFill>
-                  <a:srgbClr val="5F7183"/>
+              <a:rPr lang="en-US" sz="950" dirty="0">
+                <a:solidFill>
+                  <a:srgbClr val="1B2733"/>
                 </a:solidFill>
                 <a:latin typeface="Calibri" pitchFamily="34" charset="0"/>
                 <a:ea typeface="Calibri" pitchFamily="34" charset="-122"/>
@@ -14731,9 +14731,9 @@
               <a:buNone/>
             </a:pPr>
             <a:r>
-              <a:rPr lang="en-US" sz="750" i="1" dirty="0">
-                <a:solidFill>
-                  <a:srgbClr val="5F7183"/>
+              <a:rPr lang="en-US" sz="950" dirty="0">
+                <a:solidFill>
+                  <a:srgbClr val="1B2733"/>
                 </a:solidFill>
                 <a:latin typeface="Calibri" pitchFamily="34" charset="0"/>
                 <a:ea typeface="Calibri" pitchFamily="34" charset="-122"/>
@@ -14777,9 +14777,9 @@
               <a:buNone/>
             </a:pPr>
             <a:r>
-              <a:rPr lang="en-US" sz="750" i="1" dirty="0">
-                <a:solidFill>
-                  <a:srgbClr val="5F7183"/>
+              <a:rPr lang="en-US" sz="950" dirty="0">
+                <a:solidFill>
+                  <a:srgbClr val="1B2733"/>
                 </a:solidFill>
                 <a:latin typeface="Calibri" pitchFamily="34" charset="0"/>
                 <a:ea typeface="Calibri" pitchFamily="34" charset="-122"/>
@@ -14799,12 +14799,12 @@
         </p:nvSpPr>
         <p:spPr>
           <a:xfrm>
-            <a:off x="640080" y="3931920"/>
-            <a:ext cx="5327752" cy="1920240"/>
+            <a:off x="640080" y="3941064"/>
+            <a:ext cx="5327752" cy="1965960"/>
           </a:xfrm>
           <a:prstGeom prst="roundRect">
             <a:avLst>
-              <a:gd name="adj" fmla="val 1905"/>
+              <a:gd name="adj" fmla="val 1860"/>
             </a:avLst>
           </a:prstGeom>
           <a:solidFill>
@@ -14821,7 +14821,7 @@
         </p:nvSpPr>
         <p:spPr>
           <a:xfrm>
-            <a:off x="822960" y="4096512"/>
+            <a:off x="822960" y="4105656"/>
             <a:ext cx="310896" cy="310896"/>
           </a:xfrm>
           <a:prstGeom prst="ellipse">
@@ -14841,7 +14841,7 @@
         </p:nvSpPr>
         <p:spPr>
           <a:xfrm>
-            <a:off x="822960" y="4096512"/>
+            <a:off x="822960" y="4105656"/>
             <a:ext cx="310896" cy="310896"/>
           </a:xfrm>
           <a:prstGeom prst="rect">
@@ -14880,7 +14880,7 @@
         </p:nvSpPr>
         <p:spPr>
           <a:xfrm>
-            <a:off x="1207008" y="4059936"/>
+            <a:off x="1207008" y="4069080"/>
             <a:ext cx="4559656" cy="512064"/>
           </a:xfrm>
           <a:prstGeom prst="rect">
@@ -14920,7 +14920,7 @@
               <a:buNone/>
             </a:pPr>
             <a:r>
-              <a:rPr lang="en-US" sz="800" i="1" dirty="0">
+              <a:rPr lang="en-US" sz="1050" dirty="0">
                 <a:solidFill>
                   <a:srgbClr val="12B198"/>
                 </a:solidFill>
@@ -14942,8 +14942,8 @@
         </p:nvSpPr>
         <p:spPr>
           <a:xfrm>
-            <a:off x="859536" y="4608576"/>
-            <a:ext cx="4888840" cy="1097280"/>
+            <a:off x="859536" y="4617720"/>
+            <a:ext cx="4888840" cy="1143000"/>
           </a:xfrm>
           <a:prstGeom prst="rect">
             <a:avLst/>
@@ -14988,9 +14988,9 @@
               <a:buNone/>
             </a:pPr>
             <a:r>
-              <a:rPr lang="en-US" sz="750" i="1" dirty="0">
-                <a:solidFill>
-                  <a:srgbClr val="5F7183"/>
+              <a:rPr lang="en-US" sz="950" dirty="0">
+                <a:solidFill>
+                  <a:srgbClr val="1B2733"/>
                 </a:solidFill>
                 <a:latin typeface="Calibri" pitchFamily="34" charset="0"/>
                 <a:ea typeface="Calibri" pitchFamily="34" charset="-122"/>
@@ -15034,9 +15034,9 @@
               <a:buNone/>
             </a:pPr>
             <a:r>
-              <a:rPr lang="en-US" sz="750" i="1" dirty="0">
-                <a:solidFill>
-                  <a:srgbClr val="5F7183"/>
+              <a:rPr lang="en-US" sz="950" dirty="0">
+                <a:solidFill>
+                  <a:srgbClr val="1B2733"/>
                 </a:solidFill>
                 <a:latin typeface="Calibri" pitchFamily="34" charset="0"/>
                 <a:ea typeface="Calibri" pitchFamily="34" charset="-122"/>
@@ -15080,9 +15080,9 @@
               <a:buNone/>
             </a:pPr>
             <a:r>
-              <a:rPr lang="en-US" sz="750" i="1" dirty="0">
-                <a:solidFill>
-                  <a:srgbClr val="5F7183"/>
+              <a:rPr lang="en-US" sz="950" dirty="0">
+                <a:solidFill>
+                  <a:srgbClr val="1B2733"/>
                 </a:solidFill>
                 <a:latin typeface="Calibri" pitchFamily="34" charset="0"/>
                 <a:ea typeface="Calibri" pitchFamily="34" charset="-122"/>
@@ -15126,9 +15126,9 @@
               <a:buNone/>
             </a:pPr>
             <a:r>
-              <a:rPr lang="en-US" sz="750" i="1" dirty="0">
-                <a:solidFill>
-                  <a:srgbClr val="5F7183"/>
+              <a:rPr lang="en-US" sz="950" dirty="0">
+                <a:solidFill>
+                  <a:srgbClr val="1B2733"/>
                 </a:solidFill>
                 <a:latin typeface="Calibri" pitchFamily="34" charset="0"/>
                 <a:ea typeface="Calibri" pitchFamily="34" charset="-122"/>
@@ -15148,12 +15148,12 @@
         </p:nvSpPr>
         <p:spPr>
           <a:xfrm>
-            <a:off x="6223864" y="3931920"/>
-            <a:ext cx="5327752" cy="1920240"/>
+            <a:off x="6223864" y="3941064"/>
+            <a:ext cx="5327752" cy="1965960"/>
           </a:xfrm>
           <a:prstGeom prst="roundRect">
             <a:avLst>
-              <a:gd name="adj" fmla="val 1905"/>
+              <a:gd name="adj" fmla="val 1860"/>
             </a:avLst>
           </a:prstGeom>
           <a:solidFill>
@@ -15170,7 +15170,7 @@
         </p:nvSpPr>
         <p:spPr>
           <a:xfrm>
-            <a:off x="6406744" y="4096512"/>
+            <a:off x="6406744" y="4105656"/>
             <a:ext cx="310896" cy="310896"/>
           </a:xfrm>
           <a:prstGeom prst="ellipse">
@@ -15190,7 +15190,7 @@
         </p:nvSpPr>
         <p:spPr>
           <a:xfrm>
-            <a:off x="6406744" y="4096512"/>
+            <a:off x="6406744" y="4105656"/>
             <a:ext cx="310896" cy="310896"/>
           </a:xfrm>
           <a:prstGeom prst="rect">
@@ -15229,7 +15229,7 @@
         </p:nvSpPr>
         <p:spPr>
           <a:xfrm>
-            <a:off x="6790792" y="4059936"/>
+            <a:off x="6790792" y="4069080"/>
             <a:ext cx="4559656" cy="512064"/>
           </a:xfrm>
           <a:prstGeom prst="rect">
@@ -15269,7 +15269,7 @@
               <a:buNone/>
             </a:pPr>
             <a:r>
-              <a:rPr lang="en-US" sz="800" i="1" dirty="0">
+              <a:rPr lang="en-US" sz="1050" dirty="0">
                 <a:solidFill>
                   <a:srgbClr val="12B198"/>
                 </a:solidFill>
@@ -15291,8 +15291,8 @@
         </p:nvSpPr>
         <p:spPr>
           <a:xfrm>
-            <a:off x="6443320" y="4608576"/>
-            <a:ext cx="4888840" cy="1097280"/>
+            <a:off x="6443320" y="4617720"/>
+            <a:ext cx="4888840" cy="1143000"/>
           </a:xfrm>
           <a:prstGeom prst="rect">
             <a:avLst/>
@@ -15337,9 +15337,9 @@
               <a:buNone/>
             </a:pPr>
             <a:r>
-              <a:rPr lang="en-US" sz="750" i="1" dirty="0">
-                <a:solidFill>
-                  <a:srgbClr val="5F7183"/>
+              <a:rPr lang="en-US" sz="950" dirty="0">
+                <a:solidFill>
+                  <a:srgbClr val="1B2733"/>
                 </a:solidFill>
                 <a:latin typeface="Calibri" pitchFamily="34" charset="0"/>
                 <a:ea typeface="Calibri" pitchFamily="34" charset="-122"/>
@@ -15383,9 +15383,9 @@
               <a:buNone/>
             </a:pPr>
             <a:r>
-              <a:rPr lang="en-US" sz="750" i="1" dirty="0">
-                <a:solidFill>
-                  <a:srgbClr val="5F7183"/>
+              <a:rPr lang="en-US" sz="950" dirty="0">
+                <a:solidFill>
+                  <a:srgbClr val="1B2733"/>
                 </a:solidFill>
                 <a:latin typeface="Calibri" pitchFamily="34" charset="0"/>
                 <a:ea typeface="Calibri" pitchFamily="34" charset="-122"/>
@@ -15429,9 +15429,9 @@
               <a:buNone/>
             </a:pPr>
             <a:r>
-              <a:rPr lang="en-US" sz="750" i="1" dirty="0">
-                <a:solidFill>
-                  <a:srgbClr val="5F7183"/>
+              <a:rPr lang="en-US" sz="950" dirty="0">
+                <a:solidFill>
+                  <a:srgbClr val="1B2733"/>
                 </a:solidFill>
                 <a:latin typeface="Calibri" pitchFamily="34" charset="0"/>
                 <a:ea typeface="Calibri" pitchFamily="34" charset="-122"/>
@@ -15475,7 +15475,86 @@
               <a:buNone/>
             </a:pPr>
             <a:r>
-              <a:rPr lang="en-US" sz="750" i="1" dirty="0">
+              <a:rPr lang="en-US" sz="950" dirty="0">
+                <a:solidFill>
+                  <a:srgbClr val="1B2733"/>
+                </a:solidFill>
+                <a:latin typeface="Calibri" pitchFamily="34" charset="0"/>
+                <a:ea typeface="Calibri" pitchFamily="34" charset="-122"/>
+                <a:cs typeface="Calibri" pitchFamily="34" charset="-120"/>
+              </a:rPr>
+              <a:t>  Name a specific person to call for help and for the ambulance</a:t>
+            </a:r>
+            <a:endParaRPr lang="en-US" sz="950" dirty="0"/>
+          </a:p>
+        </p:txBody>
+      </p:sp>
+      <p:sp>
+        <p:nvSpPr>
+          <p:cNvPr id="28" name="Text 25"/>
+          <p:cNvSpPr/>
+          <p:nvPr/>
+        </p:nvSpPr>
+        <p:spPr>
+          <a:xfrm>
+            <a:off x="640080" y="5961888"/>
+            <a:ext cx="10911535" cy="292608"/>
+          </a:xfrm>
+          <a:prstGeom prst="rect">
+            <a:avLst/>
+          </a:prstGeom>
+          <a:noFill/>
+          <a:ln/>
+        </p:spPr>
+        <p:txBody>
+          <a:bodyPr wrap="square" lIns="0" tIns="0" rIns="0" bIns="0" rtlCol="0" anchor="t"/>
+          <a:lstStyle/>
+          <a:p>
+            <a:pPr indent="0" marL="0">
+              <a:lnSpc>
+                <a:spcPct val="88000"/>
+              </a:lnSpc>
+              <a:buNone/>
+            </a:pPr>
+            <a:r>
+              <a:rPr lang="en-US" sz="900" b="1" dirty="0">
+                <a:solidFill>
+                  <a:srgbClr val="0D8A76"/>
+                </a:solidFill>
+                <a:latin typeface="Yu Gothic" pitchFamily="34" charset="0"/>
+                <a:ea typeface="Yu Gothic" pitchFamily="34" charset="-122"/>
+                <a:cs typeface="Yu Gothic" pitchFamily="34" charset="-120"/>
+              </a:rPr>
+              <a:t>Site SOP優先　</a:t>
+            </a:r>
+            <a:pPr indent="0" marL="0">
+              <a:lnSpc>
+                <a:spcPct val="88000"/>
+              </a:lnSpc>
+              <a:buNone/>
+            </a:pPr>
+            <a:r>
+              <a:rPr lang="en-US" sz="900" dirty="0">
+                <a:solidFill>
+                  <a:srgbClr val="1B2733"/>
+                </a:solidFill>
+                <a:latin typeface="Yu Gothic" pitchFamily="34" charset="0"/>
+                <a:ea typeface="Yu Gothic" pitchFamily="34" charset="-122"/>
+                <a:cs typeface="Yu Gothic" pitchFamily="34" charset="-120"/>
+              </a:rPr>
+              <a:t>広報窓口、人事窓口、救急対応の連絡先は現場ごとに異なる。Site SOPを確認する。</a:t>
+            </a:r>
+            <a:endParaRPr lang="en-US" sz="900" dirty="0"/>
+          </a:p>
+          <a:p>
+            <a:pPr indent="0" marL="0">
+              <a:lnSpc>
+                <a:spcPct val="88000"/>
+              </a:lnSpc>
+              <a:buNone/>
+            </a:pPr>
+            <a:r>
+              <a:rPr lang="en-US" sz="800" i="1" dirty="0">
                 <a:solidFill>
                   <a:srgbClr val="5F7183"/>
                 </a:solidFill>
@@ -15483,22 +15562,22 @@
                 <a:ea typeface="Calibri" pitchFamily="34" charset="-122"/>
                 <a:cs typeface="Calibri" pitchFamily="34" charset="-120"/>
               </a:rPr>
-              <a:t>  Name a specific person to call for help and for the ambulance</a:t>
-            </a:r>
-            <a:endParaRPr lang="en-US" sz="950" dirty="0"/>
-          </a:p>
-        </p:txBody>
-      </p:sp>
-      <p:sp>
-        <p:nvSpPr>
-          <p:cNvPr id="28" name="Text 25"/>
-          <p:cNvSpPr/>
-          <p:nvPr/>
-        </p:nvSpPr>
-        <p:spPr>
-          <a:xfrm>
-            <a:off x="640080" y="5907024"/>
-            <a:ext cx="10911535" cy="310896"/>
+              <a:t>Contacts for communications, HR and medical response differ by site.</a:t>
+            </a:r>
+            <a:endParaRPr lang="en-US" sz="900" dirty="0"/>
+          </a:p>
+        </p:txBody>
+      </p:sp>
+      <p:sp>
+        <p:nvSpPr>
+          <p:cNvPr id="29" name="Text 26"/>
+          <p:cNvSpPr/>
+          <p:nvPr/>
+        </p:nvSpPr>
+        <p:spPr>
+          <a:xfrm>
+            <a:off x="640080" y="6272784"/>
+            <a:ext cx="9905695" cy="219456"/>
           </a:xfrm>
           <a:prstGeom prst="rect">
             <a:avLst/>
@@ -15511,167 +15590,88 @@
           <a:lstStyle/>
           <a:p>
             <a:pPr indent="0" marL="0">
-              <a:lnSpc>
-                <a:spcPct val="88000"/>
-              </a:lnSpc>
-              <a:buNone/>
-            </a:pPr>
-            <a:r>
-              <a:rPr lang="en-US" sz="900" b="1" dirty="0">
-                <a:solidFill>
-                  <a:srgbClr val="0D8A76"/>
-                </a:solidFill>
-                <a:latin typeface="Yu Gothic" pitchFamily="34" charset="0"/>
-                <a:ea typeface="Yu Gothic" pitchFamily="34" charset="-122"/>
-                <a:cs typeface="Yu Gothic" pitchFamily="34" charset="-120"/>
-              </a:rPr>
-              <a:t>Site SOP優先　</a:t>
-            </a:r>
-            <a:pPr indent="0" marL="0">
-              <a:lnSpc>
-                <a:spcPct val="88000"/>
-              </a:lnSpc>
+              <a:buNone/>
+            </a:pPr>
+            <a:r>
+              <a:rPr lang="en-US" sz="750" b="1" dirty="0">
+                <a:solidFill>
+                  <a:srgbClr val="D6E0E9"/>
+                </a:solidFill>
+                <a:latin typeface="Yu Gothic" pitchFamily="34" charset="0"/>
+                <a:ea typeface="Yu Gothic" pitchFamily="34" charset="-122"/>
+                <a:cs typeface="Yu Gothic" pitchFamily="34" charset="-120"/>
+              </a:rPr>
+              <a:t>ソース　</a:t>
+            </a:r>
+            <a:pPr indent="0" marL="0">
+              <a:buNone/>
+            </a:pPr>
+            <a:r>
+              <a:rPr lang="en-US" sz="750" dirty="0">
+                <a:solidFill>
+                  <a:srgbClr val="5F7183"/>
+                </a:solidFill>
+                <a:latin typeface="Yu Gothic" pitchFamily="34" charset="0"/>
+                <a:ea typeface="Yu Gothic" pitchFamily="34" charset="-122"/>
+                <a:cs typeface="Yu Gothic" pitchFamily="34" charset="-120"/>
+              </a:rPr>
+              <a:t>警備業法、刑法、警察庁「警備員教育」</a:t>
+            </a:r>
+            <a:endParaRPr lang="en-US" sz="750" dirty="0"/>
+          </a:p>
+        </p:txBody>
+      </p:sp>
+      <p:sp>
+        <p:nvSpPr>
+          <p:cNvPr id="30" name="Text 27"/>
+          <p:cNvSpPr/>
+          <p:nvPr/>
+        </p:nvSpPr>
+        <p:spPr>
+          <a:xfrm>
+            <a:off x="640080" y="6492240"/>
+            <a:ext cx="8778240" cy="292608"/>
+          </a:xfrm>
+          <a:prstGeom prst="rect">
+            <a:avLst/>
+          </a:prstGeom>
+          <a:noFill/>
+          <a:ln/>
+        </p:spPr>
+        <p:txBody>
+          <a:bodyPr wrap="square" lIns="0" tIns="0" rIns="0" bIns="0" rtlCol="0" anchor="ctr"/>
+          <a:lstStyle/>
+          <a:p>
+            <a:pPr indent="0" marL="0">
               <a:buNone/>
             </a:pPr>
             <a:r>
               <a:rPr lang="en-US" sz="900" dirty="0">
                 <a:solidFill>
-                  <a:srgbClr val="1B2733"/>
-                </a:solidFill>
-                <a:latin typeface="Yu Gothic" pitchFamily="34" charset="0"/>
-                <a:ea typeface="Yu Gothic" pitchFamily="34" charset="-122"/>
-                <a:cs typeface="Yu Gothic" pitchFamily="34" charset="-120"/>
-              </a:rPr>
-              <a:t>広報窓口、人事窓口、救急対応の連絡先は現場ごとに異なる。Site SOPを確認する。</a:t>
+                  <a:srgbClr val="5F7183"/>
+                </a:solidFill>
+                <a:latin typeface="Yu Gothic" pitchFamily="34" charset="0"/>
+                <a:ea typeface="Yu Gothic" pitchFamily="34" charset="-122"/>
+                <a:cs typeface="Yu Gothic" pitchFamily="34" charset="-120"/>
+              </a:rPr>
+              <a:t>第5時限｜業務別教育2 その他当該警備業務を適正に実施するため必要な知識及び技能  </a:t>
+            </a:r>
+            <a:pPr indent="0" marL="0">
+              <a:buNone/>
+            </a:pPr>
+            <a:r>
+              <a:rPr lang="en-US" sz="850" i="1" dirty="0">
+                <a:solidFill>
+                  <a:srgbClr val="D6E0E9"/>
+                </a:solidFill>
+                <a:latin typeface="Calibri" pitchFamily="34" charset="0"/>
+                <a:ea typeface="Calibri" pitchFamily="34" charset="-122"/>
+                <a:cs typeface="Calibri" pitchFamily="34" charset="-120"/>
+              </a:rPr>
+              <a:t>Period 5 | Task-Specific Training 2 — De-escalation</a:t>
             </a:r>
             <a:endParaRPr lang="en-US" sz="900" dirty="0"/>
           </a:p>
-          <a:p>
-            <a:pPr indent="0" marL="0">
-              <a:lnSpc>
-                <a:spcPct val="88000"/>
-              </a:lnSpc>
-              <a:buNone/>
-            </a:pPr>
-            <a:r>
-              <a:rPr lang="en-US" sz="750" i="1" dirty="0">
-                <a:solidFill>
-                  <a:srgbClr val="5F7183"/>
-                </a:solidFill>
-                <a:latin typeface="Calibri" pitchFamily="34" charset="0"/>
-                <a:ea typeface="Calibri" pitchFamily="34" charset="-122"/>
-                <a:cs typeface="Calibri" pitchFamily="34" charset="-120"/>
-              </a:rPr>
-              <a:t>Contacts for communications, HR and medical response differ by site.</a:t>
-            </a:r>
-            <a:endParaRPr lang="en-US" sz="900" dirty="0"/>
-          </a:p>
-        </p:txBody>
-      </p:sp>
-      <p:sp>
-        <p:nvSpPr>
-          <p:cNvPr id="29" name="Text 26"/>
-          <p:cNvSpPr/>
-          <p:nvPr/>
-        </p:nvSpPr>
-        <p:spPr>
-          <a:xfrm>
-            <a:off x="640080" y="6272784"/>
-            <a:ext cx="9905695" cy="237744"/>
-          </a:xfrm>
-          <a:prstGeom prst="rect">
-            <a:avLst/>
-          </a:prstGeom>
-          <a:noFill/>
-          <a:ln/>
-        </p:spPr>
-        <p:txBody>
-          <a:bodyPr wrap="square" lIns="0" tIns="0" rIns="0" bIns="0" rtlCol="0" anchor="t"/>
-          <a:lstStyle/>
-          <a:p>
-            <a:pPr indent="0" marL="0">
-              <a:buNone/>
-            </a:pPr>
-            <a:r>
-              <a:rPr lang="en-US" sz="750" b="1" dirty="0">
-                <a:solidFill>
-                  <a:srgbClr val="D6E0E9"/>
-                </a:solidFill>
-                <a:latin typeface="Yu Gothic" pitchFamily="34" charset="0"/>
-                <a:ea typeface="Yu Gothic" pitchFamily="34" charset="-122"/>
-                <a:cs typeface="Yu Gothic" pitchFamily="34" charset="-120"/>
-              </a:rPr>
-              <a:t>ソース　</a:t>
-            </a:r>
-            <a:pPr indent="0" marL="0">
-              <a:buNone/>
-            </a:pPr>
-            <a:r>
-              <a:rPr lang="en-US" sz="750" dirty="0">
-                <a:solidFill>
-                  <a:srgbClr val="5F7183"/>
-                </a:solidFill>
-                <a:latin typeface="Yu Gothic" pitchFamily="34" charset="0"/>
-                <a:ea typeface="Yu Gothic" pitchFamily="34" charset="-122"/>
-                <a:cs typeface="Yu Gothic" pitchFamily="34" charset="-120"/>
-              </a:rPr>
-              <a:t>警備業法、刑法、警察庁「警備員教育」</a:t>
-            </a:r>
-            <a:endParaRPr lang="en-US" sz="750" dirty="0"/>
-          </a:p>
-        </p:txBody>
-      </p:sp>
-      <p:sp>
-        <p:nvSpPr>
-          <p:cNvPr id="30" name="Text 27"/>
-          <p:cNvSpPr/>
-          <p:nvPr/>
-        </p:nvSpPr>
-        <p:spPr>
-          <a:xfrm>
-            <a:off x="640080" y="6382512"/>
-            <a:ext cx="8778240" cy="292608"/>
-          </a:xfrm>
-          <a:prstGeom prst="rect">
-            <a:avLst/>
-          </a:prstGeom>
-          <a:noFill/>
-          <a:ln/>
-        </p:spPr>
-        <p:txBody>
-          <a:bodyPr wrap="square" lIns="0" tIns="0" rIns="0" bIns="0" rtlCol="0" anchor="ctr"/>
-          <a:lstStyle/>
-          <a:p>
-            <a:pPr indent="0" marL="0">
-              <a:buNone/>
-            </a:pPr>
-            <a:r>
-              <a:rPr lang="en-US" sz="900" dirty="0">
-                <a:solidFill>
-                  <a:srgbClr val="5F7183"/>
-                </a:solidFill>
-                <a:latin typeface="Yu Gothic" pitchFamily="34" charset="0"/>
-                <a:ea typeface="Yu Gothic" pitchFamily="34" charset="-122"/>
-                <a:cs typeface="Yu Gothic" pitchFamily="34" charset="-120"/>
-              </a:rPr>
-              <a:t>第5時限｜業務別教育2 その他当該警備業務を適正に実施するため必要な知識及び技能  </a:t>
-            </a:r>
-            <a:pPr indent="0" marL="0">
-              <a:buNone/>
-            </a:pPr>
-            <a:r>
-              <a:rPr lang="en-US" sz="850" i="1" dirty="0">
-                <a:solidFill>
-                  <a:srgbClr val="D6E0E9"/>
-                </a:solidFill>
-                <a:latin typeface="Calibri" pitchFamily="34" charset="0"/>
-                <a:ea typeface="Calibri" pitchFamily="34" charset="-122"/>
-                <a:cs typeface="Calibri" pitchFamily="34" charset="-120"/>
-              </a:rPr>
-              <a:t>Period 5 | Task-Specific Training 2 — De-escalation</a:t>
-            </a:r>
-            <a:endParaRPr lang="en-US" sz="900" dirty="0"/>
-          </a:p>
         </p:txBody>
       </p:sp>
       <p:sp>
@@ -15682,7 +15682,7 @@
         </p:nvSpPr>
         <p:spPr>
           <a:xfrm>
-            <a:off x="10637215" y="6382512"/>
+            <a:off x="10637215" y="6492240"/>
             <a:ext cx="914400" cy="292608"/>
           </a:xfrm>
           <a:prstGeom prst="rect">
@@ -15777,8 +15777,8 @@
         </p:nvSpPr>
         <p:spPr>
           <a:xfrm>
-            <a:off x="640080" y="384048"/>
-            <a:ext cx="8982151" cy="768096"/>
+            <a:off x="640080" y="365760"/>
+            <a:ext cx="8982151" cy="749808"/>
           </a:xfrm>
           <a:prstGeom prst="rect">
             <a:avLst/>
@@ -15817,7 +15817,7 @@
               <a:buNone/>
             </a:pPr>
             <a:r>
-              <a:rPr lang="en-US" sz="1100" i="1" dirty="0">
+              <a:rPr lang="en-US" sz="1100" dirty="0">
                 <a:solidFill>
                   <a:srgbClr val="12B198"/>
                 </a:solidFill>
@@ -15839,7 +15839,7 @@
         </p:nvSpPr>
         <p:spPr>
           <a:xfrm>
-            <a:off x="9686239" y="438912"/>
+            <a:off x="9686239" y="420624"/>
             <a:ext cx="932688" cy="310896"/>
           </a:xfrm>
           <a:prstGeom prst="roundRect">
@@ -15861,7 +15861,7 @@
         </p:nvSpPr>
         <p:spPr>
           <a:xfrm>
-            <a:off x="9686239" y="438912"/>
+            <a:off x="9686239" y="420624"/>
             <a:ext cx="932688" cy="310896"/>
           </a:xfrm>
           <a:prstGeom prst="rect">
@@ -15900,7 +15900,7 @@
         </p:nvSpPr>
         <p:spPr>
           <a:xfrm>
-            <a:off x="640080" y="1188720"/>
+            <a:off x="640080" y="1115568"/>
             <a:ext cx="10911535" cy="1124712"/>
           </a:xfrm>
           <a:prstGeom prst="roundRect">
@@ -15922,7 +15922,7 @@
         </p:nvSpPr>
         <p:spPr>
           <a:xfrm>
-            <a:off x="950976" y="1316736"/>
+            <a:off x="950976" y="1243584"/>
             <a:ext cx="10289743" cy="868680"/>
           </a:xfrm>
           <a:prstGeom prst="rect">
@@ -15999,9 +15999,9 @@
               <a:buNone/>
             </a:pPr>
             <a:r>
-              <a:rPr lang="en-US" sz="800" i="1" dirty="0">
-                <a:solidFill>
-                  <a:srgbClr val="9FD8CD"/>
+              <a:rPr lang="en-US" sz="1000" dirty="0">
+                <a:solidFill>
+                  <a:srgbClr val="DCEFEB"/>
                 </a:solidFill>
                 <a:latin typeface="Calibri" pitchFamily="34" charset="0"/>
                 <a:ea typeface="Calibri" pitchFamily="34" charset="-122"/>
@@ -16021,7 +16021,7 @@
         </p:nvSpPr>
         <p:spPr>
           <a:xfrm>
-            <a:off x="640080" y="2459736"/>
+            <a:off x="640080" y="2386584"/>
             <a:ext cx="10911535" cy="566928"/>
           </a:xfrm>
           <a:prstGeom prst="rect">
@@ -16078,9 +16078,9 @@
               <a:buNone/>
             </a:pPr>
             <a:r>
-              <a:rPr lang="en-US" sz="850" i="1" dirty="0">
-                <a:solidFill>
-                  <a:srgbClr val="5F7183"/>
+              <a:rPr lang="en-US" sz="1050" dirty="0">
+                <a:solidFill>
+                  <a:srgbClr val="1B2733"/>
                 </a:solidFill>
                 <a:latin typeface="Calibri" pitchFamily="34" charset="0"/>
                 <a:ea typeface="Calibri" pitchFamily="34" charset="-122"/>
@@ -16100,12 +16100,12 @@
         </p:nvSpPr>
         <p:spPr>
           <a:xfrm>
-            <a:off x="640080" y="3081528"/>
-            <a:ext cx="5327752" cy="836676"/>
+            <a:off x="640080" y="3008376"/>
+            <a:ext cx="5327752" cy="900684"/>
           </a:xfrm>
           <a:prstGeom prst="roundRect">
             <a:avLst>
-              <a:gd name="adj" fmla="val 4372"/>
+              <a:gd name="adj" fmla="val 4061"/>
             </a:avLst>
           </a:prstGeom>
           <a:solidFill>
@@ -16122,7 +16122,7 @@
         </p:nvSpPr>
         <p:spPr>
           <a:xfrm>
-            <a:off x="804672" y="3353562"/>
+            <a:off x="804672" y="3312414"/>
             <a:ext cx="292608" cy="292608"/>
           </a:xfrm>
           <a:prstGeom prst="ellipse">
@@ -16142,7 +16142,7 @@
         </p:nvSpPr>
         <p:spPr>
           <a:xfrm>
-            <a:off x="804672" y="3353562"/>
+            <a:off x="804672" y="3312414"/>
             <a:ext cx="292608" cy="292608"/>
           </a:xfrm>
           <a:prstGeom prst="rect">
@@ -16181,8 +16181,8 @@
         </p:nvSpPr>
         <p:spPr>
           <a:xfrm>
-            <a:off x="1188720" y="3136392"/>
-            <a:ext cx="4596232" cy="726948"/>
+            <a:off x="1188720" y="3063240"/>
+            <a:ext cx="4596232" cy="790956"/>
           </a:xfrm>
           <a:prstGeom prst="rect">
             <a:avLst/>
@@ -16221,9 +16221,9 @@
               <a:buNone/>
             </a:pPr>
             <a:r>
-              <a:rPr lang="en-US" sz="800" i="1" dirty="0">
-                <a:solidFill>
-                  <a:srgbClr val="5F7183"/>
+              <a:rPr lang="en-US" sz="1050" dirty="0">
+                <a:solidFill>
+                  <a:srgbClr val="1B2733"/>
                 </a:solidFill>
                 <a:latin typeface="Calibri" pitchFamily="34" charset="0"/>
                 <a:ea typeface="Calibri" pitchFamily="34" charset="-122"/>
@@ -16243,12 +16243,12 @@
         </p:nvSpPr>
         <p:spPr>
           <a:xfrm>
-            <a:off x="6223864" y="3081528"/>
-            <a:ext cx="5327752" cy="836676"/>
+            <a:off x="6223864" y="3008376"/>
+            <a:ext cx="5327752" cy="900684"/>
           </a:xfrm>
           <a:prstGeom prst="roundRect">
             <a:avLst>
-              <a:gd name="adj" fmla="val 4372"/>
+              <a:gd name="adj" fmla="val 4061"/>
             </a:avLst>
           </a:prstGeom>
           <a:solidFill>
@@ -16265,7 +16265,7 @@
         </p:nvSpPr>
         <p:spPr>
           <a:xfrm>
-            <a:off x="6388456" y="3353562"/>
+            <a:off x="6388456" y="3312414"/>
             <a:ext cx="292608" cy="292608"/>
           </a:xfrm>
           <a:prstGeom prst="ellipse">
@@ -16285,7 +16285,7 @@
         </p:nvSpPr>
         <p:spPr>
           <a:xfrm>
-            <a:off x="6388456" y="3353562"/>
+            <a:off x="6388456" y="3312414"/>
             <a:ext cx="292608" cy="292608"/>
           </a:xfrm>
           <a:prstGeom prst="rect">
@@ -16324,8 +16324,8 @@
         </p:nvSpPr>
         <p:spPr>
           <a:xfrm>
-            <a:off x="6772504" y="3136392"/>
-            <a:ext cx="4596232" cy="726948"/>
+            <a:off x="6772504" y="3063240"/>
+            <a:ext cx="4596232" cy="790956"/>
           </a:xfrm>
           <a:prstGeom prst="rect">
             <a:avLst/>
@@ -16364,9 +16364,9 @@
               <a:buNone/>
             </a:pPr>
             <a:r>
-              <a:rPr lang="en-US" sz="800" i="1" dirty="0">
-                <a:solidFill>
-                  <a:srgbClr val="5F7183"/>
+              <a:rPr lang="en-US" sz="1050" dirty="0">
+                <a:solidFill>
+                  <a:srgbClr val="1B2733"/>
                 </a:solidFill>
                 <a:latin typeface="Calibri" pitchFamily="34" charset="0"/>
                 <a:ea typeface="Calibri" pitchFamily="34" charset="-122"/>
@@ -16386,12 +16386,12 @@
         </p:nvSpPr>
         <p:spPr>
           <a:xfrm>
-            <a:off x="640080" y="4027932"/>
-            <a:ext cx="5327752" cy="836676"/>
+            <a:off x="640080" y="4018788"/>
+            <a:ext cx="5327752" cy="900684"/>
           </a:xfrm>
           <a:prstGeom prst="roundRect">
             <a:avLst>
-              <a:gd name="adj" fmla="val 4372"/>
+              <a:gd name="adj" fmla="val 4061"/>
             </a:avLst>
           </a:prstGeom>
           <a:solidFill>
@@ -16408,7 +16408,7 @@
         </p:nvSpPr>
         <p:spPr>
           <a:xfrm>
-            <a:off x="804672" y="4299966"/>
+            <a:off x="804672" y="4322826"/>
             <a:ext cx="292608" cy="292608"/>
           </a:xfrm>
           <a:prstGeom prst="ellipse">
@@ -16428,7 +16428,7 @@
         </p:nvSpPr>
         <p:spPr>
           <a:xfrm>
-            <a:off x="804672" y="4299966"/>
+            <a:off x="804672" y="4322826"/>
             <a:ext cx="292608" cy="292608"/>
           </a:xfrm>
           <a:prstGeom prst="rect">
@@ -16467,8 +16467,8 @@
         </p:nvSpPr>
         <p:spPr>
           <a:xfrm>
-            <a:off x="1188720" y="4082796"/>
-            <a:ext cx="4596232" cy="726948"/>
+            <a:off x="1188720" y="4073652"/>
+            <a:ext cx="4596232" cy="790956"/>
           </a:xfrm>
           <a:prstGeom prst="rect">
             <a:avLst/>
@@ -16507,9 +16507,9 @@
               <a:buNone/>
             </a:pPr>
             <a:r>
-              <a:rPr lang="en-US" sz="800" i="1" dirty="0">
-                <a:solidFill>
-                  <a:srgbClr val="5F7183"/>
+              <a:rPr lang="en-US" sz="1050" dirty="0">
+                <a:solidFill>
+                  <a:srgbClr val="1B2733"/>
                 </a:solidFill>
                 <a:latin typeface="Calibri" pitchFamily="34" charset="0"/>
                 <a:ea typeface="Calibri" pitchFamily="34" charset="-122"/>
@@ -16529,12 +16529,12 @@
         </p:nvSpPr>
         <p:spPr>
           <a:xfrm>
-            <a:off x="6223864" y="4027932"/>
-            <a:ext cx="5327752" cy="836676"/>
+            <a:off x="6223864" y="4018788"/>
+            <a:ext cx="5327752" cy="900684"/>
           </a:xfrm>
           <a:prstGeom prst="roundRect">
             <a:avLst>
-              <a:gd name="adj" fmla="val 4372"/>
+              <a:gd name="adj" fmla="val 4061"/>
             </a:avLst>
           </a:prstGeom>
           <a:solidFill>
@@ -16551,7 +16551,7 @@
         </p:nvSpPr>
         <p:spPr>
           <a:xfrm>
-            <a:off x="6388456" y="4299966"/>
+            <a:off x="6388456" y="4322826"/>
             <a:ext cx="292608" cy="292608"/>
           </a:xfrm>
           <a:prstGeom prst="ellipse">
@@ -16571,7 +16571,7 @@
         </p:nvSpPr>
         <p:spPr>
           <a:xfrm>
-            <a:off x="6388456" y="4299966"/>
+            <a:off x="6388456" y="4322826"/>
             <a:ext cx="292608" cy="292608"/>
           </a:xfrm>
           <a:prstGeom prst="rect">
@@ -16610,8 +16610,8 @@
         </p:nvSpPr>
         <p:spPr>
           <a:xfrm>
-            <a:off x="6772504" y="4082796"/>
-            <a:ext cx="4596232" cy="726948"/>
+            <a:off x="6772504" y="4073652"/>
+            <a:ext cx="4596232" cy="790956"/>
           </a:xfrm>
           <a:prstGeom prst="rect">
             <a:avLst/>
@@ -16650,9 +16650,9 @@
               <a:buNone/>
             </a:pPr>
             <a:r>
-              <a:rPr lang="en-US" sz="800" i="1" dirty="0">
-                <a:solidFill>
-                  <a:srgbClr val="5F7183"/>
+              <a:rPr lang="en-US" sz="1050" dirty="0">
+                <a:solidFill>
+                  <a:srgbClr val="1B2733"/>
                 </a:solidFill>
                 <a:latin typeface="Calibri" pitchFamily="34" charset="0"/>
                 <a:ea typeface="Calibri" pitchFamily="34" charset="-122"/>
@@ -16672,7 +16672,7 @@
         </p:nvSpPr>
         <p:spPr>
           <a:xfrm>
-            <a:off x="640080" y="4919472"/>
+            <a:off x="640080" y="4974336"/>
             <a:ext cx="10911535" cy="420624"/>
           </a:xfrm>
           <a:prstGeom prst="roundRect">
@@ -16694,7 +16694,7 @@
         </p:nvSpPr>
         <p:spPr>
           <a:xfrm>
-            <a:off x="877824" y="4946904"/>
+            <a:off x="877824" y="5001768"/>
             <a:ext cx="10436047" cy="365760"/>
           </a:xfrm>
           <a:prstGeom prst="rect">
@@ -16751,9 +16751,9 @@
               <a:buNone/>
             </a:pPr>
             <a:r>
-              <a:rPr lang="en-US" sz="750" i="1" dirty="0">
-                <a:solidFill>
-                  <a:srgbClr val="5F7183"/>
+              <a:rPr lang="en-US" sz="950" dirty="0">
+                <a:solidFill>
+                  <a:srgbClr val="1B2733"/>
                 </a:solidFill>
                 <a:latin typeface="Calibri" pitchFamily="34" charset="0"/>
                 <a:ea typeface="Calibri" pitchFamily="34" charset="-122"/>
@@ -16773,7 +16773,7 @@
         </p:nvSpPr>
         <p:spPr>
           <a:xfrm>
-            <a:off x="640080" y="5394960"/>
+            <a:off x="640080" y="5449824"/>
             <a:ext cx="10911535" cy="420624"/>
           </a:xfrm>
           <a:prstGeom prst="roundRect">
@@ -16795,7 +16795,7 @@
         </p:nvSpPr>
         <p:spPr>
           <a:xfrm>
-            <a:off x="877824" y="5422392"/>
+            <a:off x="877824" y="5477256"/>
             <a:ext cx="10436047" cy="365760"/>
           </a:xfrm>
           <a:prstGeom prst="rect">
@@ -16852,7 +16852,86 @@
               <a:buNone/>
             </a:pPr>
             <a:r>
-              <a:rPr lang="en-US" sz="750" i="1" dirty="0">
+              <a:rPr lang="en-US" sz="950" dirty="0">
+                <a:solidFill>
+                  <a:srgbClr val="1B2733"/>
+                </a:solidFill>
+                <a:latin typeface="Calibri" pitchFamily="34" charset="0"/>
+                <a:ea typeface="Calibri" pitchFamily="34" charset="-122"/>
+                <a:cs typeface="Calibri" pitchFamily="34" charset="-120"/>
+              </a:rPr>
+              <a:t>Another visitor cuts in: "Isn't that the wrong way to handle it?"</a:t>
+            </a:r>
+            <a:endParaRPr lang="en-US" sz="850" dirty="0"/>
+          </a:p>
+        </p:txBody>
+      </p:sp>
+      <p:sp>
+        <p:nvSpPr>
+          <p:cNvPr id="29" name="Text 26"/>
+          <p:cNvSpPr/>
+          <p:nvPr/>
+        </p:nvSpPr>
+        <p:spPr>
+          <a:xfrm>
+            <a:off x="640080" y="5961888"/>
+            <a:ext cx="10911535" cy="292608"/>
+          </a:xfrm>
+          <a:prstGeom prst="rect">
+            <a:avLst/>
+          </a:prstGeom>
+          <a:noFill/>
+          <a:ln/>
+        </p:spPr>
+        <p:txBody>
+          <a:bodyPr wrap="square" lIns="0" tIns="0" rIns="0" bIns="0" rtlCol="0" anchor="t"/>
+          <a:lstStyle/>
+          <a:p>
+            <a:pPr indent="0" marL="0">
+              <a:lnSpc>
+                <a:spcPct val="88000"/>
+              </a:lnSpc>
+              <a:buNone/>
+            </a:pPr>
+            <a:r>
+              <a:rPr lang="en-US" sz="900" b="1" dirty="0">
+                <a:solidFill>
+                  <a:srgbClr val="0D8A76"/>
+                </a:solidFill>
+                <a:latin typeface="Yu Gothic" pitchFamily="34" charset="0"/>
+                <a:ea typeface="Yu Gothic" pitchFamily="34" charset="-122"/>
+                <a:cs typeface="Yu Gothic" pitchFamily="34" charset="-120"/>
+              </a:rPr>
+              <a:t>Site SOP優先　</a:t>
+            </a:r>
+            <a:pPr indent="0" marL="0">
+              <a:lnSpc>
+                <a:spcPct val="88000"/>
+              </a:lnSpc>
+              <a:buNone/>
+            </a:pPr>
+            <a:r>
+              <a:rPr lang="en-US" sz="900" dirty="0">
+                <a:solidFill>
+                  <a:srgbClr val="1B2733"/>
+                </a:solidFill>
+                <a:latin typeface="Yu Gothic" pitchFamily="34" charset="0"/>
+                <a:ea typeface="Yu Gothic" pitchFamily="34" charset="-122"/>
+                <a:cs typeface="Yu Gothic" pitchFamily="34" charset="-120"/>
+              </a:rPr>
+              <a:t>来訪者の確認方法と、例外を認められる者は現場ごとに異なる。Site SOPによる。</a:t>
+            </a:r>
+            <a:endParaRPr lang="en-US" sz="900" dirty="0"/>
+          </a:p>
+          <a:p>
+            <a:pPr indent="0" marL="0">
+              <a:lnSpc>
+                <a:spcPct val="88000"/>
+              </a:lnSpc>
+              <a:buNone/>
+            </a:pPr>
+            <a:r>
+              <a:rPr lang="en-US" sz="800" i="1" dirty="0">
                 <a:solidFill>
                   <a:srgbClr val="5F7183"/>
                 </a:solidFill>
@@ -16860,22 +16939,22 @@
                 <a:ea typeface="Calibri" pitchFamily="34" charset="-122"/>
                 <a:cs typeface="Calibri" pitchFamily="34" charset="-120"/>
               </a:rPr>
-              <a:t>Another visitor cuts in: "Isn't that the wrong way to handle it?"</a:t>
-            </a:r>
-            <a:endParaRPr lang="en-US" sz="850" dirty="0"/>
-          </a:p>
-        </p:txBody>
-      </p:sp>
-      <p:sp>
-        <p:nvSpPr>
-          <p:cNvPr id="29" name="Text 26"/>
-          <p:cNvSpPr/>
-          <p:nvPr/>
-        </p:nvSpPr>
-        <p:spPr>
-          <a:xfrm>
-            <a:off x="640080" y="5907024"/>
-            <a:ext cx="10911535" cy="310896"/>
+              <a:t>Verification methods and who may approve an exception differ by site.</a:t>
+            </a:r>
+            <a:endParaRPr lang="en-US" sz="900" dirty="0"/>
+          </a:p>
+        </p:txBody>
+      </p:sp>
+      <p:sp>
+        <p:nvSpPr>
+          <p:cNvPr id="30" name="Text 27"/>
+          <p:cNvSpPr/>
+          <p:nvPr/>
+        </p:nvSpPr>
+        <p:spPr>
+          <a:xfrm>
+            <a:off x="640080" y="6272784"/>
+            <a:ext cx="9905695" cy="219456"/>
           </a:xfrm>
           <a:prstGeom prst="rect">
             <a:avLst/>
@@ -16888,167 +16967,88 @@
           <a:lstStyle/>
           <a:p>
             <a:pPr indent="0" marL="0">
-              <a:lnSpc>
-                <a:spcPct val="88000"/>
-              </a:lnSpc>
-              <a:buNone/>
-            </a:pPr>
-            <a:r>
-              <a:rPr lang="en-US" sz="900" b="1" dirty="0">
-                <a:solidFill>
-                  <a:srgbClr val="0D8A76"/>
-                </a:solidFill>
-                <a:latin typeface="Yu Gothic" pitchFamily="34" charset="0"/>
-                <a:ea typeface="Yu Gothic" pitchFamily="34" charset="-122"/>
-                <a:cs typeface="Yu Gothic" pitchFamily="34" charset="-120"/>
-              </a:rPr>
-              <a:t>Site SOP優先　</a:t>
-            </a:r>
-            <a:pPr indent="0" marL="0">
-              <a:lnSpc>
-                <a:spcPct val="88000"/>
-              </a:lnSpc>
+              <a:buNone/>
+            </a:pPr>
+            <a:r>
+              <a:rPr lang="en-US" sz="750" b="1" dirty="0">
+                <a:solidFill>
+                  <a:srgbClr val="D6E0E9"/>
+                </a:solidFill>
+                <a:latin typeface="Yu Gothic" pitchFamily="34" charset="0"/>
+                <a:ea typeface="Yu Gothic" pitchFamily="34" charset="-122"/>
+                <a:cs typeface="Yu Gothic" pitchFamily="34" charset="-120"/>
+              </a:rPr>
+              <a:t>ソース　</a:t>
+            </a:r>
+            <a:pPr indent="0" marL="0">
+              <a:buNone/>
+            </a:pPr>
+            <a:r>
+              <a:rPr lang="en-US" sz="750" dirty="0">
+                <a:solidFill>
+                  <a:srgbClr val="5F7183"/>
+                </a:solidFill>
+                <a:latin typeface="Yu Gothic" pitchFamily="34" charset="0"/>
+                <a:ea typeface="Yu Gothic" pitchFamily="34" charset="-122"/>
+                <a:cs typeface="Yu Gothic" pitchFamily="34" charset="-120"/>
+              </a:rPr>
+              <a:t>警備業法、刑法、警察庁「警備員教育」</a:t>
+            </a:r>
+            <a:endParaRPr lang="en-US" sz="750" dirty="0"/>
+          </a:p>
+        </p:txBody>
+      </p:sp>
+      <p:sp>
+        <p:nvSpPr>
+          <p:cNvPr id="31" name="Text 28"/>
+          <p:cNvSpPr/>
+          <p:nvPr/>
+        </p:nvSpPr>
+        <p:spPr>
+          <a:xfrm>
+            <a:off x="640080" y="6492240"/>
+            <a:ext cx="8778240" cy="292608"/>
+          </a:xfrm>
+          <a:prstGeom prst="rect">
+            <a:avLst/>
+          </a:prstGeom>
+          <a:noFill/>
+          <a:ln/>
+        </p:spPr>
+        <p:txBody>
+          <a:bodyPr wrap="square" lIns="0" tIns="0" rIns="0" bIns="0" rtlCol="0" anchor="ctr"/>
+          <a:lstStyle/>
+          <a:p>
+            <a:pPr indent="0" marL="0">
               <a:buNone/>
             </a:pPr>
             <a:r>
               <a:rPr lang="en-US" sz="900" dirty="0">
                 <a:solidFill>
-                  <a:srgbClr val="1B2733"/>
-                </a:solidFill>
-                <a:latin typeface="Yu Gothic" pitchFamily="34" charset="0"/>
-                <a:ea typeface="Yu Gothic" pitchFamily="34" charset="-122"/>
-                <a:cs typeface="Yu Gothic" pitchFamily="34" charset="-120"/>
-              </a:rPr>
-              <a:t>来訪者の確認方法と、例外を認められる者は現場ごとに異なる。Site SOPによる。</a:t>
+                  <a:srgbClr val="5F7183"/>
+                </a:solidFill>
+                <a:latin typeface="Yu Gothic" pitchFamily="34" charset="0"/>
+                <a:ea typeface="Yu Gothic" pitchFamily="34" charset="-122"/>
+                <a:cs typeface="Yu Gothic" pitchFamily="34" charset="-120"/>
+              </a:rPr>
+              <a:t>第5時限｜業務別教育2 その他当該警備業務を適正に実施するため必要な知識及び技能  </a:t>
+            </a:r>
+            <a:pPr indent="0" marL="0">
+              <a:buNone/>
+            </a:pPr>
+            <a:r>
+              <a:rPr lang="en-US" sz="850" i="1" dirty="0">
+                <a:solidFill>
+                  <a:srgbClr val="D6E0E9"/>
+                </a:solidFill>
+                <a:latin typeface="Calibri" pitchFamily="34" charset="0"/>
+                <a:ea typeface="Calibri" pitchFamily="34" charset="-122"/>
+                <a:cs typeface="Calibri" pitchFamily="34" charset="-120"/>
+              </a:rPr>
+              <a:t>Period 5 | Task-Specific Training 2 — De-escalation</a:t>
             </a:r>
             <a:endParaRPr lang="en-US" sz="900" dirty="0"/>
           </a:p>
-          <a:p>
-            <a:pPr indent="0" marL="0">
-              <a:lnSpc>
-                <a:spcPct val="88000"/>
-              </a:lnSpc>
-              <a:buNone/>
-            </a:pPr>
-            <a:r>
-              <a:rPr lang="en-US" sz="750" i="1" dirty="0">
-                <a:solidFill>
-                  <a:srgbClr val="5F7183"/>
-                </a:solidFill>
-                <a:latin typeface="Calibri" pitchFamily="34" charset="0"/>
-                <a:ea typeface="Calibri" pitchFamily="34" charset="-122"/>
-                <a:cs typeface="Calibri" pitchFamily="34" charset="-120"/>
-              </a:rPr>
-              <a:t>Verification methods and who may approve an exception differ by site.</a:t>
-            </a:r>
-            <a:endParaRPr lang="en-US" sz="900" dirty="0"/>
-          </a:p>
-        </p:txBody>
-      </p:sp>
-      <p:sp>
-        <p:nvSpPr>
-          <p:cNvPr id="30" name="Text 27"/>
-          <p:cNvSpPr/>
-          <p:nvPr/>
-        </p:nvSpPr>
-        <p:spPr>
-          <a:xfrm>
-            <a:off x="640080" y="6272784"/>
-            <a:ext cx="9905695" cy="237744"/>
-          </a:xfrm>
-          <a:prstGeom prst="rect">
-            <a:avLst/>
-          </a:prstGeom>
-          <a:noFill/>
-          <a:ln/>
-        </p:spPr>
-        <p:txBody>
-          <a:bodyPr wrap="square" lIns="0" tIns="0" rIns="0" bIns="0" rtlCol="0" anchor="t"/>
-          <a:lstStyle/>
-          <a:p>
-            <a:pPr indent="0" marL="0">
-              <a:buNone/>
-            </a:pPr>
-            <a:r>
-              <a:rPr lang="en-US" sz="750" b="1" dirty="0">
-                <a:solidFill>
-                  <a:srgbClr val="D6E0E9"/>
-                </a:solidFill>
-                <a:latin typeface="Yu Gothic" pitchFamily="34" charset="0"/>
-                <a:ea typeface="Yu Gothic" pitchFamily="34" charset="-122"/>
-                <a:cs typeface="Yu Gothic" pitchFamily="34" charset="-120"/>
-              </a:rPr>
-              <a:t>ソース　</a:t>
-            </a:r>
-            <a:pPr indent="0" marL="0">
-              <a:buNone/>
-            </a:pPr>
-            <a:r>
-              <a:rPr lang="en-US" sz="750" dirty="0">
-                <a:solidFill>
-                  <a:srgbClr val="5F7183"/>
-                </a:solidFill>
-                <a:latin typeface="Yu Gothic" pitchFamily="34" charset="0"/>
-                <a:ea typeface="Yu Gothic" pitchFamily="34" charset="-122"/>
-                <a:cs typeface="Yu Gothic" pitchFamily="34" charset="-120"/>
-              </a:rPr>
-              <a:t>警備業法、刑法、警察庁「警備員教育」</a:t>
-            </a:r>
-            <a:endParaRPr lang="en-US" sz="750" dirty="0"/>
-          </a:p>
-        </p:txBody>
-      </p:sp>
-      <p:sp>
-        <p:nvSpPr>
-          <p:cNvPr id="31" name="Text 28"/>
-          <p:cNvSpPr/>
-          <p:nvPr/>
-        </p:nvSpPr>
-        <p:spPr>
-          <a:xfrm>
-            <a:off x="640080" y="6382512"/>
-            <a:ext cx="8778240" cy="292608"/>
-          </a:xfrm>
-          <a:prstGeom prst="rect">
-            <a:avLst/>
-          </a:prstGeom>
-          <a:noFill/>
-          <a:ln/>
-        </p:spPr>
-        <p:txBody>
-          <a:bodyPr wrap="square" lIns="0" tIns="0" rIns="0" bIns="0" rtlCol="0" anchor="ctr"/>
-          <a:lstStyle/>
-          <a:p>
-            <a:pPr indent="0" marL="0">
-              <a:buNone/>
-            </a:pPr>
-            <a:r>
-              <a:rPr lang="en-US" sz="900" dirty="0">
-                <a:solidFill>
-                  <a:srgbClr val="5F7183"/>
-                </a:solidFill>
-                <a:latin typeface="Yu Gothic" pitchFamily="34" charset="0"/>
-                <a:ea typeface="Yu Gothic" pitchFamily="34" charset="-122"/>
-                <a:cs typeface="Yu Gothic" pitchFamily="34" charset="-120"/>
-              </a:rPr>
-              <a:t>第5時限｜業務別教育2 その他当該警備業務を適正に実施するため必要な知識及び技能  </a:t>
-            </a:r>
-            <a:pPr indent="0" marL="0">
-              <a:buNone/>
-            </a:pPr>
-            <a:r>
-              <a:rPr lang="en-US" sz="850" i="1" dirty="0">
-                <a:solidFill>
-                  <a:srgbClr val="D6E0E9"/>
-                </a:solidFill>
-                <a:latin typeface="Calibri" pitchFamily="34" charset="0"/>
-                <a:ea typeface="Calibri" pitchFamily="34" charset="-122"/>
-                <a:cs typeface="Calibri" pitchFamily="34" charset="-120"/>
-              </a:rPr>
-              <a:t>Period 5 | Task-Specific Training 2 — De-escalation</a:t>
-            </a:r>
-            <a:endParaRPr lang="en-US" sz="900" dirty="0"/>
-          </a:p>
         </p:txBody>
       </p:sp>
       <p:sp>
@@ -17059,7 +17059,7 @@
         </p:nvSpPr>
         <p:spPr>
           <a:xfrm>
-            <a:off x="10637215" y="6382512"/>
+            <a:off x="10637215" y="6492240"/>
             <a:ext cx="914400" cy="292608"/>
           </a:xfrm>
           <a:prstGeom prst="rect">
@@ -17154,8 +17154,8 @@
         </p:nvSpPr>
         <p:spPr>
           <a:xfrm>
-            <a:off x="640080" y="384048"/>
-            <a:ext cx="8982151" cy="768096"/>
+            <a:off x="640080" y="365760"/>
+            <a:ext cx="8982151" cy="749808"/>
           </a:xfrm>
           <a:prstGeom prst="rect">
             <a:avLst/>
@@ -17194,7 +17194,7 @@
               <a:buNone/>
             </a:pPr>
             <a:r>
-              <a:rPr lang="en-US" sz="1100" i="1" dirty="0">
+              <a:rPr lang="en-US" sz="1100" dirty="0">
                 <a:solidFill>
                   <a:srgbClr val="12B198"/>
                 </a:solidFill>
@@ -17216,7 +17216,7 @@
         </p:nvSpPr>
         <p:spPr>
           <a:xfrm>
-            <a:off x="9686239" y="438912"/>
+            <a:off x="9686239" y="420624"/>
             <a:ext cx="932688" cy="310896"/>
           </a:xfrm>
           <a:prstGeom prst="roundRect">
@@ -17238,7 +17238,7 @@
         </p:nvSpPr>
         <p:spPr>
           <a:xfrm>
-            <a:off x="9686239" y="438912"/>
+            <a:off x="9686239" y="420624"/>
             <a:ext cx="932688" cy="310896"/>
           </a:xfrm>
           <a:prstGeom prst="rect">
@@ -17277,12 +17277,12 @@
         </p:nvSpPr>
         <p:spPr>
           <a:xfrm>
-            <a:off x="640080" y="1188720"/>
-            <a:ext cx="10911535" cy="683514"/>
+            <a:off x="640080" y="1115568"/>
+            <a:ext cx="10911535" cy="715518"/>
           </a:xfrm>
           <a:prstGeom prst="roundRect">
             <a:avLst>
-              <a:gd name="adj" fmla="val 5351"/>
+              <a:gd name="adj" fmla="val 5112"/>
             </a:avLst>
           </a:prstGeom>
           <a:solidFill>
@@ -17299,7 +17299,7 @@
         </p:nvSpPr>
         <p:spPr>
           <a:xfrm>
-            <a:off x="841248" y="1356741"/>
+            <a:off x="841248" y="1299591"/>
             <a:ext cx="347472" cy="347472"/>
           </a:xfrm>
           <a:prstGeom prst="ellipse">
@@ -17319,7 +17319,7 @@
         </p:nvSpPr>
         <p:spPr>
           <a:xfrm>
-            <a:off x="841248" y="1356741"/>
+            <a:off x="841248" y="1299591"/>
             <a:ext cx="347472" cy="347472"/>
           </a:xfrm>
           <a:prstGeom prst="rect">
@@ -17358,8 +17358,8 @@
         </p:nvSpPr>
         <p:spPr>
           <a:xfrm>
-            <a:off x="1280160" y="1252728"/>
-            <a:ext cx="10033711" cy="555498"/>
+            <a:off x="1280160" y="1179576"/>
+            <a:ext cx="10033711" cy="587502"/>
           </a:xfrm>
           <a:prstGeom prst="rect">
             <a:avLst/>
@@ -17378,7 +17378,7 @@
               <a:buNone/>
             </a:pPr>
             <a:r>
-              <a:rPr lang="en-US" sz="900" dirty="0">
+              <a:rPr lang="en-US" sz="950" dirty="0">
                 <a:solidFill>
                   <a:srgbClr val="5F7183"/>
                 </a:solidFill>
@@ -17388,7 +17388,7 @@
               </a:rPr>
               <a:t>問1　A と B、どちらを選ぶか</a:t>
             </a:r>
-            <a:endParaRPr lang="en-US" sz="900" dirty="0"/>
+            <a:endParaRPr lang="en-US" sz="950" dirty="0"/>
           </a:p>
           <a:p>
             <a:pPr indent="0" marL="0">
@@ -17408,7 +17408,7 @@
               </a:rPr>
               <a:t>B を選ぶ。A は拒否のみで、相手が引き下がれる形が残らない。</a:t>
             </a:r>
-            <a:endParaRPr lang="en-US" sz="900" dirty="0"/>
+            <a:endParaRPr lang="en-US" sz="950" dirty="0"/>
           </a:p>
           <a:p>
             <a:pPr indent="0" marL="0">
@@ -17418,9 +17418,9 @@
               <a:buNone/>
             </a:pPr>
             <a:r>
-              <a:rPr lang="en-US" sz="800" i="1" dirty="0">
-                <a:solidFill>
-                  <a:srgbClr val="5F7183"/>
+              <a:rPr lang="en-US" sz="1100" dirty="0">
+                <a:solidFill>
+                  <a:srgbClr val="1B2733"/>
                 </a:solidFill>
                 <a:latin typeface="Calibri" pitchFamily="34" charset="0"/>
                 <a:ea typeface="Calibri" pitchFamily="34" charset="-122"/>
@@ -17428,7 +17428,7 @@
               </a:rPr>
               <a:t>Choose B. A is a bare refusal that leaves the person no way to step back.</a:t>
             </a:r>
-            <a:endParaRPr lang="en-US" sz="900" dirty="0"/>
+            <a:endParaRPr lang="en-US" sz="950" dirty="0"/>
           </a:p>
         </p:txBody>
       </p:sp>
@@ -17440,12 +17440,12 @@
         </p:nvSpPr>
         <p:spPr>
           <a:xfrm>
-            <a:off x="640080" y="1972818"/>
-            <a:ext cx="10911535" cy="683514"/>
+            <a:off x="640080" y="1931670"/>
+            <a:ext cx="10911535" cy="715518"/>
           </a:xfrm>
           <a:prstGeom prst="roundRect">
             <a:avLst>
-              <a:gd name="adj" fmla="val 5351"/>
+              <a:gd name="adj" fmla="val 5112"/>
             </a:avLst>
           </a:prstGeom>
           <a:solidFill>
@@ -17462,7 +17462,7 @@
         </p:nvSpPr>
         <p:spPr>
           <a:xfrm>
-            <a:off x="841248" y="2140839"/>
+            <a:off x="841248" y="2115693"/>
             <a:ext cx="347472" cy="347472"/>
           </a:xfrm>
           <a:prstGeom prst="ellipse">
@@ -17482,7 +17482,7 @@
         </p:nvSpPr>
         <p:spPr>
           <a:xfrm>
-            <a:off x="841248" y="2140839"/>
+            <a:off x="841248" y="2115693"/>
             <a:ext cx="347472" cy="347472"/>
           </a:xfrm>
           <a:prstGeom prst="rect">
@@ -17521,8 +17521,8 @@
         </p:nvSpPr>
         <p:spPr>
           <a:xfrm>
-            <a:off x="1280160" y="2036826"/>
-            <a:ext cx="10033711" cy="555498"/>
+            <a:off x="1280160" y="1995678"/>
+            <a:ext cx="10033711" cy="587502"/>
           </a:xfrm>
           <a:prstGeom prst="rect">
             <a:avLst/>
@@ -17541,7 +17541,7 @@
               <a:buNone/>
             </a:pPr>
             <a:r>
-              <a:rPr lang="en-US" sz="900" dirty="0">
+              <a:rPr lang="en-US" sz="950" dirty="0">
                 <a:solidFill>
                   <a:srgbClr val="5F7183"/>
                 </a:solidFill>
@@ -17551,7 +17551,7 @@
               </a:rPr>
               <a:t>問2　C と D、どちらを選ぶか</a:t>
             </a:r>
-            <a:endParaRPr lang="en-US" sz="900" dirty="0"/>
+            <a:endParaRPr lang="en-US" sz="950" dirty="0"/>
           </a:p>
           <a:p>
             <a:pPr indent="0" marL="0">
@@ -17571,7 +17571,7 @@
               </a:rPr>
               <a:t>D を選ぶ。C は相手の状態を否定している。最良は B のあと D。</a:t>
             </a:r>
-            <a:endParaRPr lang="en-US" sz="900" dirty="0"/>
+            <a:endParaRPr lang="en-US" sz="950" dirty="0"/>
           </a:p>
           <a:p>
             <a:pPr indent="0" marL="0">
@@ -17581,9 +17581,9 @@
               <a:buNone/>
             </a:pPr>
             <a:r>
-              <a:rPr lang="en-US" sz="800" i="1" dirty="0">
-                <a:solidFill>
-                  <a:srgbClr val="5F7183"/>
+              <a:rPr lang="en-US" sz="1100" dirty="0">
+                <a:solidFill>
+                  <a:srgbClr val="1B2733"/>
                 </a:solidFill>
                 <a:latin typeface="Calibri" pitchFamily="34" charset="0"/>
                 <a:ea typeface="Calibri" pitchFamily="34" charset="-122"/>
@@ -17591,7 +17591,7 @@
               </a:rPr>
               <a:t>Choose D. C denies how they feel. The best sequence is B, then D.</a:t>
             </a:r>
-            <a:endParaRPr lang="en-US" sz="900" dirty="0"/>
+            <a:endParaRPr lang="en-US" sz="950" dirty="0"/>
           </a:p>
         </p:txBody>
       </p:sp>
@@ -17603,12 +17603,12 @@
         </p:nvSpPr>
         <p:spPr>
           <a:xfrm>
-            <a:off x="640080" y="2756916"/>
-            <a:ext cx="10911535" cy="683514"/>
+            <a:off x="640080" y="2747772"/>
+            <a:ext cx="10911535" cy="715518"/>
           </a:xfrm>
           <a:prstGeom prst="roundRect">
             <a:avLst>
-              <a:gd name="adj" fmla="val 5351"/>
+              <a:gd name="adj" fmla="val 5112"/>
             </a:avLst>
           </a:prstGeom>
           <a:solidFill>
@@ -17625,7 +17625,7 @@
         </p:nvSpPr>
         <p:spPr>
           <a:xfrm>
-            <a:off x="841248" y="2924937"/>
+            <a:off x="841248" y="2931795"/>
             <a:ext cx="347472" cy="347472"/>
           </a:xfrm>
           <a:prstGeom prst="ellipse">
@@ -17645,7 +17645,7 @@
         </p:nvSpPr>
         <p:spPr>
           <a:xfrm>
-            <a:off x="841248" y="2924937"/>
+            <a:off x="841248" y="2931795"/>
             <a:ext cx="347472" cy="347472"/>
           </a:xfrm>
           <a:prstGeom prst="rect">
@@ -17684,8 +17684,8 @@
         </p:nvSpPr>
         <p:spPr>
           <a:xfrm>
-            <a:off x="1280160" y="2820924"/>
-            <a:ext cx="10033711" cy="555498"/>
+            <a:off x="1280160" y="2811780"/>
+            <a:ext cx="10033711" cy="587502"/>
           </a:xfrm>
           <a:prstGeom prst="rect">
             <a:avLst/>
@@ -17704,7 +17704,7 @@
               <a:buNone/>
             </a:pPr>
             <a:r>
-              <a:rPr lang="en-US" sz="900" dirty="0">
+              <a:rPr lang="en-US" sz="950" dirty="0">
                 <a:solidFill>
                   <a:srgbClr val="5F7183"/>
                 </a:solidFill>
@@ -17714,7 +17714,7 @@
               </a:rPr>
               <a:t>問3　予定表の同姓は根拠になるか</a:t>
             </a:r>
-            <a:endParaRPr lang="en-US" sz="900" dirty="0"/>
+            <a:endParaRPr lang="en-US" sz="950" dirty="0"/>
           </a:p>
           <a:p>
             <a:pPr indent="0" marL="0">
@@ -17734,7 +17734,7 @@
               </a:rPr>
               <a:t>ならない。同姓の別人がありうる。断定せず、役員名を聞いて確認に回す。</a:t>
             </a:r>
-            <a:endParaRPr lang="en-US" sz="900" dirty="0"/>
+            <a:endParaRPr lang="en-US" sz="950" dirty="0"/>
           </a:p>
           <a:p>
             <a:pPr indent="0" marL="0">
@@ -17744,9 +17744,9 @@
               <a:buNone/>
             </a:pPr>
             <a:r>
-              <a:rPr lang="en-US" sz="800" i="1" dirty="0">
-                <a:solidFill>
-                  <a:srgbClr val="5F7183"/>
+              <a:rPr lang="en-US" sz="1100" dirty="0">
+                <a:solidFill>
+                  <a:srgbClr val="1B2733"/>
                 </a:solidFill>
                 <a:latin typeface="Calibri" pitchFamily="34" charset="0"/>
                 <a:ea typeface="Calibri" pitchFamily="34" charset="-122"/>
@@ -17754,7 +17754,7 @@
               </a:rPr>
               <a:t>No. It could be a different person with the same name. Do not conclude — ask the name and verify.</a:t>
             </a:r>
-            <a:endParaRPr lang="en-US" sz="900" dirty="0"/>
+            <a:endParaRPr lang="en-US" sz="950" dirty="0"/>
           </a:p>
         </p:txBody>
       </p:sp>
@@ -17766,12 +17766,12 @@
         </p:nvSpPr>
         <p:spPr>
           <a:xfrm>
-            <a:off x="640080" y="3541014"/>
-            <a:ext cx="10911535" cy="683514"/>
+            <a:off x="640080" y="3563874"/>
+            <a:ext cx="10911535" cy="715518"/>
           </a:xfrm>
           <a:prstGeom prst="roundRect">
             <a:avLst>
-              <a:gd name="adj" fmla="val 5351"/>
+              <a:gd name="adj" fmla="val 5112"/>
             </a:avLst>
           </a:prstGeom>
           <a:solidFill>
@@ -17788,7 +17788,7 @@
         </p:nvSpPr>
         <p:spPr>
           <a:xfrm>
-            <a:off x="841248" y="3709035"/>
+            <a:off x="841248" y="3747897"/>
             <a:ext cx="347472" cy="347472"/>
           </a:xfrm>
           <a:prstGeom prst="ellipse">
@@ -17808,7 +17808,7 @@
         </p:nvSpPr>
         <p:spPr>
           <a:xfrm>
-            <a:off x="841248" y="3709035"/>
+            <a:off x="841248" y="3747897"/>
             <a:ext cx="347472" cy="347472"/>
           </a:xfrm>
           <a:prstGeom prst="rect">
@@ -17847,8 +17847,8 @@
         </p:nvSpPr>
         <p:spPr>
           <a:xfrm>
-            <a:off x="1280160" y="3605022"/>
-            <a:ext cx="10033711" cy="555498"/>
+            <a:off x="1280160" y="3627882"/>
+            <a:ext cx="10033711" cy="587502"/>
           </a:xfrm>
           <a:prstGeom prst="rect">
             <a:avLst/>
@@ -17867,7 +17867,7 @@
               <a:buNone/>
             </a:pPr>
             <a:r>
-              <a:rPr lang="en-US" sz="900" dirty="0">
+              <a:rPr lang="en-US" sz="950" dirty="0">
                 <a:solidFill>
                   <a:srgbClr val="5F7183"/>
                 </a:solidFill>
@@ -17877,7 +17877,7 @@
               </a:rPr>
               <a:t>問4　周囲に来訪者がいることは</a:t>
             </a:r>
-            <a:endParaRPr lang="en-US" sz="900" dirty="0"/>
+            <a:endParaRPr lang="en-US" sz="950" dirty="0"/>
           </a:p>
           <a:p>
             <a:pPr indent="0" marL="0">
@@ -17897,7 +17897,7 @@
               </a:rPr>
               <a:t>Reputation の問題。声を下げるのはこちら側から。別室や待機場所へ誘導する。</a:t>
             </a:r>
-            <a:endParaRPr lang="en-US" sz="900" dirty="0"/>
+            <a:endParaRPr lang="en-US" sz="950" dirty="0"/>
           </a:p>
           <a:p>
             <a:pPr indent="0" marL="0">
@@ -17907,9 +17907,9 @@
               <a:buNone/>
             </a:pPr>
             <a:r>
-              <a:rPr lang="en-US" sz="800" i="1" dirty="0">
-                <a:solidFill>
-                  <a:srgbClr val="5F7183"/>
+              <a:rPr lang="en-US" sz="1100" dirty="0">
+                <a:solidFill>
+                  <a:srgbClr val="1B2733"/>
                 </a:solidFill>
                 <a:latin typeface="Calibri" pitchFamily="34" charset="0"/>
                 <a:ea typeface="Calibri" pitchFamily="34" charset="-122"/>
@@ -17917,7 +17917,7 @@
               </a:rPr>
               <a:t>A Reputation issue. You lower your voice first, and move them to a waiting area.</a:t>
             </a:r>
-            <a:endParaRPr lang="en-US" sz="900" dirty="0"/>
+            <a:endParaRPr lang="en-US" sz="950" dirty="0"/>
           </a:p>
         </p:txBody>
       </p:sp>
@@ -17929,7 +17929,7 @@
         </p:nvSpPr>
         <p:spPr>
           <a:xfrm>
-            <a:off x="640080" y="4334256"/>
+            <a:off x="640080" y="4389120"/>
             <a:ext cx="10911535" cy="420624"/>
           </a:xfrm>
           <a:prstGeom prst="roundRect">
@@ -17951,7 +17951,7 @@
         </p:nvSpPr>
         <p:spPr>
           <a:xfrm>
-            <a:off x="859536" y="4361688"/>
+            <a:off x="859536" y="4416552"/>
             <a:ext cx="10472623" cy="365760"/>
           </a:xfrm>
           <a:prstGeom prst="rect">
@@ -18025,9 +18025,9 @@
               <a:buNone/>
             </a:pPr>
             <a:r>
-              <a:rPr lang="en-US" sz="750" i="1" dirty="0">
-                <a:solidFill>
-                  <a:srgbClr val="5F7183"/>
+              <a:rPr lang="en-US" sz="950" dirty="0">
+                <a:solidFill>
+                  <a:srgbClr val="1B2733"/>
                 </a:solidFill>
                 <a:latin typeface="Calibri" pitchFamily="34" charset="0"/>
                 <a:ea typeface="Calibri" pitchFamily="34" charset="-122"/>
@@ -18047,7 +18047,7 @@
         </p:nvSpPr>
         <p:spPr>
           <a:xfrm>
-            <a:off x="640080" y="4828032"/>
+            <a:off x="640080" y="4882896"/>
             <a:ext cx="10911535" cy="420624"/>
           </a:xfrm>
           <a:prstGeom prst="roundRect">
@@ -18069,7 +18069,7 @@
         </p:nvSpPr>
         <p:spPr>
           <a:xfrm>
-            <a:off x="859536" y="4855464"/>
+            <a:off x="859536" y="4910328"/>
             <a:ext cx="10472623" cy="365760"/>
           </a:xfrm>
           <a:prstGeom prst="rect">
@@ -18143,9 +18143,9 @@
               <a:buNone/>
             </a:pPr>
             <a:r>
-              <a:rPr lang="en-US" sz="750" i="1" dirty="0">
-                <a:solidFill>
-                  <a:srgbClr val="5F7183"/>
+              <a:rPr lang="en-US" sz="950" dirty="0">
+                <a:solidFill>
+                  <a:srgbClr val="1B2733"/>
                 </a:solidFill>
                 <a:latin typeface="Calibri" pitchFamily="34" charset="0"/>
                 <a:ea typeface="Calibri" pitchFamily="34" charset="-122"/>
@@ -18165,7 +18165,7 @@
         </p:nvSpPr>
         <p:spPr>
           <a:xfrm>
-            <a:off x="640080" y="5358384"/>
+            <a:off x="640080" y="5413248"/>
             <a:ext cx="10911535" cy="457200"/>
           </a:xfrm>
           <a:prstGeom prst="roundRect">
@@ -18187,7 +18187,7 @@
         </p:nvSpPr>
         <p:spPr>
           <a:xfrm>
-            <a:off x="859536" y="5385816"/>
+            <a:off x="859536" y="5440680"/>
             <a:ext cx="10472623" cy="402336"/>
           </a:xfrm>
           <a:prstGeom prst="rect">
@@ -18244,9 +18244,9 @@
               <a:buNone/>
             </a:pPr>
             <a:r>
-              <a:rPr lang="en-US" sz="750" i="1" dirty="0">
-                <a:solidFill>
-                  <a:srgbClr val="9FD8CD"/>
+              <a:rPr lang="en-US" sz="950" dirty="0">
+                <a:solidFill>
+                  <a:srgbClr val="DCEFEB"/>
                 </a:solidFill>
                 <a:latin typeface="Calibri" pitchFamily="34" charset="0"/>
                 <a:ea typeface="Calibri" pitchFamily="34" charset="-122"/>
@@ -18266,8 +18266,8 @@
         </p:nvSpPr>
         <p:spPr>
           <a:xfrm>
-            <a:off x="640080" y="5907024"/>
-            <a:ext cx="10911535" cy="310896"/>
+            <a:off x="640080" y="5961888"/>
+            <a:ext cx="10911535" cy="292608"/>
           </a:xfrm>
           <a:prstGeom prst="rect">
             <a:avLst/>
@@ -18323,7 +18323,7 @@
               <a:buNone/>
             </a:pPr>
             <a:r>
-              <a:rPr lang="en-US" sz="750" i="1" dirty="0">
+              <a:rPr lang="en-US" sz="800" i="1" dirty="0">
                 <a:solidFill>
                   <a:srgbClr val="5F7183"/>
                 </a:solidFill>
@@ -18346,7 +18346,7 @@
         <p:spPr>
           <a:xfrm>
             <a:off x="640080" y="6272784"/>
-            <a:ext cx="9905695" cy="237744"/>
+            <a:ext cx="9905695" cy="219456"/>
           </a:xfrm>
           <a:prstGeom prst="rect">
             <a:avLst/>
@@ -18398,7 +18398,7 @@
         </p:nvSpPr>
         <p:spPr>
           <a:xfrm>
-            <a:off x="640080" y="6382512"/>
+            <a:off x="640080" y="6492240"/>
             <a:ext cx="8778240" cy="292608"/>
           </a:xfrm>
           <a:prstGeom prst="rect">
@@ -18451,7 +18451,7 @@
         </p:nvSpPr>
         <p:spPr>
           <a:xfrm>
-            <a:off x="10637215" y="6382512"/>
+            <a:off x="10637215" y="6492240"/>
             <a:ext cx="914400" cy="292608"/>
           </a:xfrm>
           <a:prstGeom prst="rect">

--- a/decks/04_5限_De-escalation.pptx
+++ b/decks/04_5限_De-escalation.pptx
@@ -2832,7 +2832,7 @@
                 <a:ea typeface="Calibri" pitchFamily="34" charset="-122"/>
                 <a:cs typeface="Calibri" pitchFamily="34" charset="-120"/>
               </a:rPr>
-              <a:t>What You'll Learn　</a:t>
+              <a:t>What You'll Learn  </a:t>
             </a:r>
             <a:pPr indent="0" marL="0">
               <a:lnSpc>
@@ -2861,7 +2861,7 @@
               <a:buNone/>
             </a:pPr>
             <a:r>
-              <a:rPr lang="en-US" sz="1250" dirty="0">
+              <a:rPr lang="en-US" sz="1300" dirty="0">
                 <a:solidFill>
                   <a:srgbClr val="1B2733"/>
                 </a:solidFill>
@@ -3004,7 +3004,7 @@
               <a:buNone/>
             </a:pPr>
             <a:r>
-              <a:rPr lang="en-US" sz="1400" dirty="0">
+              <a:rPr lang="en-US" sz="1500" dirty="0">
                 <a:solidFill>
                   <a:srgbClr val="12B198"/>
                 </a:solidFill>
@@ -3072,7 +3072,7 @@
               <a:buNone/>
             </a:pPr>
             <a:r>
-              <a:rPr lang="en-US" sz="1350" dirty="0">
+              <a:rPr lang="en-US" sz="1400" dirty="0">
                 <a:solidFill>
                   <a:srgbClr val="1B2733"/>
                 </a:solidFill>
@@ -3118,7 +3118,7 @@
               <a:buNone/>
             </a:pPr>
             <a:r>
-              <a:rPr lang="en-US" sz="1350" dirty="0">
+              <a:rPr lang="en-US" sz="1400" dirty="0">
                 <a:solidFill>
                   <a:srgbClr val="1B2733"/>
                 </a:solidFill>
@@ -3164,7 +3164,7 @@
               <a:buNone/>
             </a:pPr>
             <a:r>
-              <a:rPr lang="en-US" sz="1350" dirty="0">
+              <a:rPr lang="en-US" sz="1400" dirty="0">
                 <a:solidFill>
                   <a:srgbClr val="1B2733"/>
                 </a:solidFill>
@@ -3210,7 +3210,7 @@
               <a:buNone/>
             </a:pPr>
             <a:r>
-              <a:rPr lang="en-US" sz="1350" dirty="0">
+              <a:rPr lang="en-US" sz="1400" dirty="0">
                 <a:solidFill>
                   <a:srgbClr val="1B2733"/>
                 </a:solidFill>
@@ -3353,7 +3353,7 @@
               <a:buNone/>
             </a:pPr>
             <a:r>
-              <a:rPr lang="en-US" sz="1400" dirty="0">
+              <a:rPr lang="en-US" sz="1500" dirty="0">
                 <a:solidFill>
                   <a:srgbClr val="12B198"/>
                 </a:solidFill>
@@ -3421,7 +3421,7 @@
               <a:buNone/>
             </a:pPr>
             <a:r>
-              <a:rPr lang="en-US" sz="1350" dirty="0">
+              <a:rPr lang="en-US" sz="1400" dirty="0">
                 <a:solidFill>
                   <a:srgbClr val="1B2733"/>
                 </a:solidFill>
@@ -3467,7 +3467,7 @@
               <a:buNone/>
             </a:pPr>
             <a:r>
-              <a:rPr lang="en-US" sz="1350" dirty="0">
+              <a:rPr lang="en-US" sz="1400" dirty="0">
                 <a:solidFill>
                   <a:srgbClr val="1B2733"/>
                 </a:solidFill>
@@ -3513,7 +3513,7 @@
               <a:buNone/>
             </a:pPr>
             <a:r>
-              <a:rPr lang="en-US" sz="1350" dirty="0">
+              <a:rPr lang="en-US" sz="1400" dirty="0">
                 <a:solidFill>
                   <a:srgbClr val="1B2733"/>
                 </a:solidFill>
@@ -3559,7 +3559,7 @@
               <a:buNone/>
             </a:pPr>
             <a:r>
-              <a:rPr lang="en-US" sz="1350" dirty="0">
+              <a:rPr lang="en-US" sz="1400" dirty="0">
                 <a:solidFill>
                   <a:srgbClr val="1B2733"/>
                 </a:solidFill>
@@ -4105,7 +4105,7 @@
               <a:buNone/>
             </a:pPr>
             <a:r>
-              <a:rPr lang="en-US" sz="1400" dirty="0">
+              <a:rPr lang="en-US" sz="1500" dirty="0">
                 <a:solidFill>
                   <a:srgbClr val="12B198"/>
                 </a:solidFill>
@@ -4173,7 +4173,7 @@
               <a:buNone/>
             </a:pPr>
             <a:r>
-              <a:rPr lang="en-US" sz="1350" dirty="0">
+              <a:rPr lang="en-US" sz="1400" dirty="0">
                 <a:solidFill>
                   <a:srgbClr val="1B2733"/>
                 </a:solidFill>
@@ -4219,7 +4219,7 @@
               <a:buNone/>
             </a:pPr>
             <a:r>
-              <a:rPr lang="en-US" sz="1350" dirty="0">
+              <a:rPr lang="en-US" sz="1400" dirty="0">
                 <a:solidFill>
                   <a:srgbClr val="1B2733"/>
                 </a:solidFill>
@@ -4265,7 +4265,7 @@
               <a:buNone/>
             </a:pPr>
             <a:r>
-              <a:rPr lang="en-US" sz="1350" dirty="0">
+              <a:rPr lang="en-US" sz="1400" dirty="0">
                 <a:solidFill>
                   <a:srgbClr val="1B2733"/>
                 </a:solidFill>
@@ -4311,7 +4311,7 @@
               <a:buNone/>
             </a:pPr>
             <a:r>
-              <a:rPr lang="en-US" sz="1350" dirty="0">
+              <a:rPr lang="en-US" sz="1400" dirty="0">
                 <a:solidFill>
                   <a:srgbClr val="1B2733"/>
                 </a:solidFill>
@@ -4454,7 +4454,7 @@
               <a:buNone/>
             </a:pPr>
             <a:r>
-              <a:rPr lang="en-US" sz="1400" dirty="0">
+              <a:rPr lang="en-US" sz="1500" dirty="0">
                 <a:solidFill>
                   <a:srgbClr val="12B198"/>
                 </a:solidFill>
@@ -4522,7 +4522,7 @@
               <a:buNone/>
             </a:pPr>
             <a:r>
-              <a:rPr lang="en-US" sz="1350" dirty="0">
+              <a:rPr lang="en-US" sz="1400" dirty="0">
                 <a:solidFill>
                   <a:srgbClr val="1B2733"/>
                 </a:solidFill>
@@ -4568,7 +4568,7 @@
               <a:buNone/>
             </a:pPr>
             <a:r>
-              <a:rPr lang="en-US" sz="1350" dirty="0">
+              <a:rPr lang="en-US" sz="1400" dirty="0">
                 <a:solidFill>
                   <a:srgbClr val="1B2733"/>
                 </a:solidFill>
@@ -4614,7 +4614,7 @@
               <a:buNone/>
             </a:pPr>
             <a:r>
-              <a:rPr lang="en-US" sz="1350" dirty="0">
+              <a:rPr lang="en-US" sz="1400" dirty="0">
                 <a:solidFill>
                   <a:srgbClr val="1B2733"/>
                 </a:solidFill>
@@ -4660,7 +4660,7 @@
               <a:buNone/>
             </a:pPr>
             <a:r>
-              <a:rPr lang="en-US" sz="1350" dirty="0">
+              <a:rPr lang="en-US" sz="1400" dirty="0">
                 <a:solidFill>
                   <a:srgbClr val="1B2733"/>
                 </a:solidFill>
@@ -5152,7 +5152,7 @@
                 <a:ea typeface="Calibri" pitchFamily="34" charset="-122"/>
                 <a:cs typeface="Calibri" pitchFamily="34" charset="-120"/>
               </a:rPr>
-              <a:t>What You'll Learn　</a:t>
+              <a:t>What You'll Learn  </a:t>
             </a:r>
             <a:pPr indent="0" marL="0">
               <a:lnSpc>
@@ -5181,7 +5181,7 @@
               <a:buNone/>
             </a:pPr>
             <a:r>
-              <a:rPr lang="en-US" sz="1250" dirty="0">
+              <a:rPr lang="en-US" sz="1300" dirty="0">
                 <a:solidFill>
                   <a:srgbClr val="1B2733"/>
                 </a:solidFill>
@@ -5324,7 +5324,7 @@
               <a:buNone/>
             </a:pPr>
             <a:r>
-              <a:rPr lang="en-US" sz="1400" dirty="0">
+              <a:rPr lang="en-US" sz="1500" dirty="0">
                 <a:solidFill>
                   <a:srgbClr val="12B198"/>
                 </a:solidFill>
@@ -5392,7 +5392,7 @@
               <a:buNone/>
             </a:pPr>
             <a:r>
-              <a:rPr lang="en-US" sz="1350" dirty="0">
+              <a:rPr lang="en-US" sz="1400" dirty="0">
                 <a:solidFill>
                   <a:srgbClr val="1B2733"/>
                 </a:solidFill>
@@ -5438,7 +5438,7 @@
               <a:buNone/>
             </a:pPr>
             <a:r>
-              <a:rPr lang="en-US" sz="1350" dirty="0">
+              <a:rPr lang="en-US" sz="1400" dirty="0">
                 <a:solidFill>
                   <a:srgbClr val="1B2733"/>
                 </a:solidFill>
@@ -5484,7 +5484,7 @@
               <a:buNone/>
             </a:pPr>
             <a:r>
-              <a:rPr lang="en-US" sz="1350" dirty="0">
+              <a:rPr lang="en-US" sz="1400" dirty="0">
                 <a:solidFill>
                   <a:srgbClr val="1B2733"/>
                 </a:solidFill>
@@ -5530,7 +5530,7 @@
               <a:buNone/>
             </a:pPr>
             <a:r>
-              <a:rPr lang="en-US" sz="1350" dirty="0">
+              <a:rPr lang="en-US" sz="1400" dirty="0">
                 <a:solidFill>
                   <a:srgbClr val="1B2733"/>
                 </a:solidFill>
@@ -5673,7 +5673,7 @@
               <a:buNone/>
             </a:pPr>
             <a:r>
-              <a:rPr lang="en-US" sz="1400" dirty="0">
+              <a:rPr lang="en-US" sz="1500" dirty="0">
                 <a:solidFill>
                   <a:srgbClr val="12B198"/>
                 </a:solidFill>
@@ -5741,7 +5741,7 @@
               <a:buNone/>
             </a:pPr>
             <a:r>
-              <a:rPr lang="en-US" sz="1350" dirty="0">
+              <a:rPr lang="en-US" sz="1400" dirty="0">
                 <a:solidFill>
                   <a:srgbClr val="1B2733"/>
                 </a:solidFill>
@@ -5787,7 +5787,7 @@
               <a:buNone/>
             </a:pPr>
             <a:r>
-              <a:rPr lang="en-US" sz="1350" dirty="0">
+              <a:rPr lang="en-US" sz="1400" dirty="0">
                 <a:solidFill>
                   <a:srgbClr val="1B2733"/>
                 </a:solidFill>
@@ -5833,7 +5833,7 @@
               <a:buNone/>
             </a:pPr>
             <a:r>
-              <a:rPr lang="en-US" sz="1350" dirty="0">
+              <a:rPr lang="en-US" sz="1400" dirty="0">
                 <a:solidFill>
                   <a:srgbClr val="1B2733"/>
                 </a:solidFill>
@@ -5879,7 +5879,7 @@
               <a:buNone/>
             </a:pPr>
             <a:r>
-              <a:rPr lang="en-US" sz="1350" dirty="0">
+              <a:rPr lang="en-US" sz="1400" dirty="0">
                 <a:solidFill>
                   <a:srgbClr val="1B2733"/>
                 </a:solidFill>
@@ -6425,7 +6425,7 @@
               <a:buNone/>
             </a:pPr>
             <a:r>
-              <a:rPr lang="en-US" sz="1400" dirty="0">
+              <a:rPr lang="en-US" sz="1500" dirty="0">
                 <a:solidFill>
                   <a:srgbClr val="12B198"/>
                 </a:solidFill>
@@ -6493,7 +6493,7 @@
               <a:buNone/>
             </a:pPr>
             <a:r>
-              <a:rPr lang="en-US" sz="1350" dirty="0">
+              <a:rPr lang="en-US" sz="1400" dirty="0">
                 <a:solidFill>
                   <a:srgbClr val="1B2733"/>
                 </a:solidFill>
@@ -6539,7 +6539,7 @@
               <a:buNone/>
             </a:pPr>
             <a:r>
-              <a:rPr lang="en-US" sz="1350" dirty="0">
+              <a:rPr lang="en-US" sz="1400" dirty="0">
                 <a:solidFill>
                   <a:srgbClr val="1B2733"/>
                 </a:solidFill>
@@ -6585,7 +6585,7 @@
               <a:buNone/>
             </a:pPr>
             <a:r>
-              <a:rPr lang="en-US" sz="1350" dirty="0">
+              <a:rPr lang="en-US" sz="1400" dirty="0">
                 <a:solidFill>
                   <a:srgbClr val="1B2733"/>
                 </a:solidFill>
@@ -6631,7 +6631,7 @@
               <a:buNone/>
             </a:pPr>
             <a:r>
-              <a:rPr lang="en-US" sz="1350" dirty="0">
+              <a:rPr lang="en-US" sz="1400" dirty="0">
                 <a:solidFill>
                   <a:srgbClr val="1B2733"/>
                 </a:solidFill>
@@ -6774,7 +6774,7 @@
               <a:buNone/>
             </a:pPr>
             <a:r>
-              <a:rPr lang="en-US" sz="1400" dirty="0">
+              <a:rPr lang="en-US" sz="1500" dirty="0">
                 <a:solidFill>
                   <a:srgbClr val="12B198"/>
                 </a:solidFill>
@@ -6842,7 +6842,7 @@
               <a:buNone/>
             </a:pPr>
             <a:r>
-              <a:rPr lang="en-US" sz="1350" dirty="0">
+              <a:rPr lang="en-US" sz="1400" dirty="0">
                 <a:solidFill>
                   <a:srgbClr val="1B2733"/>
                 </a:solidFill>
@@ -6888,7 +6888,7 @@
               <a:buNone/>
             </a:pPr>
             <a:r>
-              <a:rPr lang="en-US" sz="1350" dirty="0">
+              <a:rPr lang="en-US" sz="1400" dirty="0">
                 <a:solidFill>
                   <a:srgbClr val="1B2733"/>
                 </a:solidFill>
@@ -6934,7 +6934,7 @@
               <a:buNone/>
             </a:pPr>
             <a:r>
-              <a:rPr lang="en-US" sz="1350" dirty="0">
+              <a:rPr lang="en-US" sz="1400" dirty="0">
                 <a:solidFill>
                   <a:srgbClr val="1B2733"/>
                 </a:solidFill>
@@ -6980,7 +6980,7 @@
               <a:buNone/>
             </a:pPr>
             <a:r>
-              <a:rPr lang="en-US" sz="1350" dirty="0">
+              <a:rPr lang="en-US" sz="1400" dirty="0">
                 <a:solidFill>
                   <a:srgbClr val="1B2733"/>
                 </a:solidFill>
@@ -7504,7 +7504,7 @@
               <a:buNone/>
             </a:pPr>
             <a:r>
-              <a:rPr lang="en-US" sz="1350" dirty="0">
+              <a:rPr lang="en-US" sz="1450" dirty="0">
                 <a:solidFill>
                   <a:srgbClr val="DCEFEB"/>
                 </a:solidFill>
@@ -7583,7 +7583,7 @@
               <a:buNone/>
             </a:pPr>
             <a:r>
-              <a:rPr lang="en-US" sz="1350" dirty="0">
+              <a:rPr lang="en-US" sz="1500" dirty="0">
                 <a:solidFill>
                   <a:srgbClr val="1B2733"/>
                 </a:solidFill>
@@ -7726,7 +7726,7 @@
               <a:buNone/>
             </a:pPr>
             <a:r>
-              <a:rPr lang="en-US" sz="1350" dirty="0">
+              <a:rPr lang="en-US" sz="1400" dirty="0">
                 <a:solidFill>
                   <a:srgbClr val="1B2733"/>
                 </a:solidFill>
@@ -7869,7 +7869,7 @@
               <a:buNone/>
             </a:pPr>
             <a:r>
-              <a:rPr lang="en-US" sz="1350" dirty="0">
+              <a:rPr lang="en-US" sz="1400" dirty="0">
                 <a:solidFill>
                   <a:srgbClr val="1B2733"/>
                 </a:solidFill>
@@ -8012,7 +8012,7 @@
               <a:buNone/>
             </a:pPr>
             <a:r>
-              <a:rPr lang="en-US" sz="1350" dirty="0">
+              <a:rPr lang="en-US" sz="1400" dirty="0">
                 <a:solidFill>
                   <a:srgbClr val="1B2733"/>
                 </a:solidFill>
@@ -8155,7 +8155,7 @@
               <a:buNone/>
             </a:pPr>
             <a:r>
-              <a:rPr lang="en-US" sz="1350" dirty="0">
+              <a:rPr lang="en-US" sz="1400" dirty="0">
                 <a:solidFill>
                   <a:srgbClr val="1B2733"/>
                 </a:solidFill>
@@ -8256,7 +8256,7 @@
               <a:buNone/>
             </a:pPr>
             <a:r>
-              <a:rPr lang="en-US" sz="1250" dirty="0">
+              <a:rPr lang="en-US" sz="1350" dirty="0">
                 <a:solidFill>
                   <a:srgbClr val="1B2733"/>
                 </a:solidFill>
@@ -8357,7 +8357,7 @@
               <a:buNone/>
             </a:pPr>
             <a:r>
-              <a:rPr lang="en-US" sz="1250" dirty="0">
+              <a:rPr lang="en-US" sz="1350" dirty="0">
                 <a:solidFill>
                   <a:srgbClr val="1B2733"/>
                 </a:solidFill>
@@ -8923,7 +8923,7 @@
               <a:buNone/>
             </a:pPr>
             <a:r>
-              <a:rPr lang="en-US" sz="1400" dirty="0">
+              <a:rPr lang="en-US" sz="1500" dirty="0">
                 <a:solidFill>
                   <a:srgbClr val="1B2733"/>
                 </a:solidFill>
@@ -9086,7 +9086,7 @@
               <a:buNone/>
             </a:pPr>
             <a:r>
-              <a:rPr lang="en-US" sz="1400" dirty="0">
+              <a:rPr lang="en-US" sz="1500" dirty="0">
                 <a:solidFill>
                   <a:srgbClr val="1B2733"/>
                 </a:solidFill>
@@ -9249,7 +9249,7 @@
               <a:buNone/>
             </a:pPr>
             <a:r>
-              <a:rPr lang="en-US" sz="1400" dirty="0">
+              <a:rPr lang="en-US" sz="1500" dirty="0">
                 <a:solidFill>
                   <a:srgbClr val="1B2733"/>
                 </a:solidFill>
@@ -9412,7 +9412,7 @@
               <a:buNone/>
             </a:pPr>
             <a:r>
-              <a:rPr lang="en-US" sz="1400" dirty="0">
+              <a:rPr lang="en-US" sz="1500" dirty="0">
                 <a:solidFill>
                   <a:srgbClr val="1B2733"/>
                 </a:solidFill>
@@ -9530,7 +9530,7 @@
               <a:buNone/>
             </a:pPr>
             <a:r>
-              <a:rPr lang="en-US" sz="1250" dirty="0">
+              <a:rPr lang="en-US" sz="1350" dirty="0">
                 <a:solidFill>
                   <a:srgbClr val="1B2733"/>
                 </a:solidFill>
@@ -9648,7 +9648,7 @@
               <a:buNone/>
             </a:pPr>
             <a:r>
-              <a:rPr lang="en-US" sz="1250" dirty="0">
+              <a:rPr lang="en-US" sz="1350" dirty="0">
                 <a:solidFill>
                   <a:srgbClr val="1B2733"/>
                 </a:solidFill>
@@ -9749,7 +9749,7 @@
               <a:buNone/>
             </a:pPr>
             <a:r>
-              <a:rPr lang="en-US" sz="1200" dirty="0">
+              <a:rPr lang="en-US" sz="1300" dirty="0">
                 <a:solidFill>
                   <a:srgbClr val="DCEFEB"/>
                 </a:solidFill>
@@ -10273,7 +10273,7 @@
               <a:buNone/>
             </a:pPr>
             <a:r>
-              <a:rPr lang="en-US" sz="1350" dirty="0">
+              <a:rPr lang="en-US" sz="1450" dirty="0">
                 <a:solidFill>
                   <a:srgbClr val="DCEFEB"/>
                 </a:solidFill>
@@ -10352,7 +10352,7 @@
               <a:buNone/>
             </a:pPr>
             <a:r>
-              <a:rPr lang="en-US" sz="1350" dirty="0">
+              <a:rPr lang="en-US" sz="1500" dirty="0">
                 <a:solidFill>
                   <a:srgbClr val="1B2733"/>
                 </a:solidFill>
@@ -10495,7 +10495,7 @@
               <a:buNone/>
             </a:pPr>
             <a:r>
-              <a:rPr lang="en-US" sz="1350" dirty="0">
+              <a:rPr lang="en-US" sz="1400" dirty="0">
                 <a:solidFill>
                   <a:srgbClr val="1B2733"/>
                 </a:solidFill>
@@ -10638,7 +10638,7 @@
               <a:buNone/>
             </a:pPr>
             <a:r>
-              <a:rPr lang="en-US" sz="1350" dirty="0">
+              <a:rPr lang="en-US" sz="1400" dirty="0">
                 <a:solidFill>
                   <a:srgbClr val="1B2733"/>
                 </a:solidFill>
@@ -10781,7 +10781,7 @@
               <a:buNone/>
             </a:pPr>
             <a:r>
-              <a:rPr lang="en-US" sz="1350" dirty="0">
+              <a:rPr lang="en-US" sz="1400" dirty="0">
                 <a:solidFill>
                   <a:srgbClr val="1B2733"/>
                 </a:solidFill>
@@ -10924,7 +10924,7 @@
               <a:buNone/>
             </a:pPr>
             <a:r>
-              <a:rPr lang="en-US" sz="1350" dirty="0">
+              <a:rPr lang="en-US" sz="1400" dirty="0">
                 <a:solidFill>
                   <a:srgbClr val="1B2733"/>
                 </a:solidFill>
@@ -11025,7 +11025,7 @@
               <a:buNone/>
             </a:pPr>
             <a:r>
-              <a:rPr lang="en-US" sz="1250" dirty="0">
+              <a:rPr lang="en-US" sz="1350" dirty="0">
                 <a:solidFill>
                   <a:srgbClr val="1B2733"/>
                 </a:solidFill>
@@ -11126,7 +11126,7 @@
               <a:buNone/>
             </a:pPr>
             <a:r>
-              <a:rPr lang="en-US" sz="1250" dirty="0">
+              <a:rPr lang="en-US" sz="1350" dirty="0">
                 <a:solidFill>
                   <a:srgbClr val="1B2733"/>
                 </a:solidFill>
@@ -11692,7 +11692,7 @@
               <a:buNone/>
             </a:pPr>
             <a:r>
-              <a:rPr lang="en-US" sz="1400" dirty="0">
+              <a:rPr lang="en-US" sz="1500" dirty="0">
                 <a:solidFill>
                   <a:srgbClr val="1B2733"/>
                 </a:solidFill>
@@ -11855,7 +11855,7 @@
               <a:buNone/>
             </a:pPr>
             <a:r>
-              <a:rPr lang="en-US" sz="1400" dirty="0">
+              <a:rPr lang="en-US" sz="1500" dirty="0">
                 <a:solidFill>
                   <a:srgbClr val="1B2733"/>
                 </a:solidFill>
@@ -12018,7 +12018,7 @@
               <a:buNone/>
             </a:pPr>
             <a:r>
-              <a:rPr lang="en-US" sz="1400" dirty="0">
+              <a:rPr lang="en-US" sz="1500" dirty="0">
                 <a:solidFill>
                   <a:srgbClr val="1B2733"/>
                 </a:solidFill>
@@ -12181,7 +12181,7 @@
               <a:buNone/>
             </a:pPr>
             <a:r>
-              <a:rPr lang="en-US" sz="1400" dirty="0">
+              <a:rPr lang="en-US" sz="1500" dirty="0">
                 <a:solidFill>
                   <a:srgbClr val="1B2733"/>
                 </a:solidFill>
@@ -12299,7 +12299,7 @@
               <a:buNone/>
             </a:pPr>
             <a:r>
-              <a:rPr lang="en-US" sz="1250" dirty="0">
+              <a:rPr lang="en-US" sz="1350" dirty="0">
                 <a:solidFill>
                   <a:srgbClr val="1B2733"/>
                 </a:solidFill>
@@ -12417,7 +12417,7 @@
               <a:buNone/>
             </a:pPr>
             <a:r>
-              <a:rPr lang="en-US" sz="1250" dirty="0">
+              <a:rPr lang="en-US" sz="1350" dirty="0">
                 <a:solidFill>
                   <a:srgbClr val="1B2733"/>
                 </a:solidFill>
@@ -12909,7 +12909,7 @@
                 <a:ea typeface="Calibri" pitchFamily="34" charset="-122"/>
                 <a:cs typeface="Calibri" pitchFamily="34" charset="-120"/>
               </a:rPr>
-              <a:t>What You'll Learn　</a:t>
+              <a:t>What You'll Learn  </a:t>
             </a:r>
             <a:pPr indent="0" marL="0">
               <a:lnSpc>
@@ -12938,7 +12938,7 @@
               <a:buNone/>
             </a:pPr>
             <a:r>
-              <a:rPr lang="en-US" sz="1250" dirty="0">
+              <a:rPr lang="en-US" sz="1300" dirty="0">
                 <a:solidFill>
                   <a:srgbClr val="1B2733"/>
                 </a:solidFill>
@@ -13081,7 +13081,7 @@
               <a:buNone/>
             </a:pPr>
             <a:r>
-              <a:rPr lang="en-US" sz="1400" dirty="0">
+              <a:rPr lang="en-US" sz="1500" dirty="0">
                 <a:solidFill>
                   <a:srgbClr val="12B198"/>
                 </a:solidFill>
@@ -13149,7 +13149,7 @@
               <a:buNone/>
             </a:pPr>
             <a:r>
-              <a:rPr lang="en-US" sz="1350" dirty="0">
+              <a:rPr lang="en-US" sz="1400" dirty="0">
                 <a:solidFill>
                   <a:srgbClr val="1B2733"/>
                 </a:solidFill>
@@ -13195,7 +13195,7 @@
               <a:buNone/>
             </a:pPr>
             <a:r>
-              <a:rPr lang="en-US" sz="1350" dirty="0">
+              <a:rPr lang="en-US" sz="1400" dirty="0">
                 <a:solidFill>
                   <a:srgbClr val="1B2733"/>
                 </a:solidFill>
@@ -13241,7 +13241,7 @@
               <a:buNone/>
             </a:pPr>
             <a:r>
-              <a:rPr lang="en-US" sz="1350" dirty="0">
+              <a:rPr lang="en-US" sz="1400" dirty="0">
                 <a:solidFill>
                   <a:srgbClr val="1B2733"/>
                 </a:solidFill>
@@ -13287,7 +13287,7 @@
               <a:buNone/>
             </a:pPr>
             <a:r>
-              <a:rPr lang="en-US" sz="1350" dirty="0">
+              <a:rPr lang="en-US" sz="1400" dirty="0">
                 <a:solidFill>
                   <a:srgbClr val="1B2733"/>
                 </a:solidFill>
@@ -13430,7 +13430,7 @@
               <a:buNone/>
             </a:pPr>
             <a:r>
-              <a:rPr lang="en-US" sz="1400" dirty="0">
+              <a:rPr lang="en-US" sz="1500" dirty="0">
                 <a:solidFill>
                   <a:srgbClr val="12B198"/>
                 </a:solidFill>
@@ -13498,7 +13498,7 @@
               <a:buNone/>
             </a:pPr>
             <a:r>
-              <a:rPr lang="en-US" sz="1350" dirty="0">
+              <a:rPr lang="en-US" sz="1400" dirty="0">
                 <a:solidFill>
                   <a:srgbClr val="1B2733"/>
                 </a:solidFill>
@@ -13544,7 +13544,7 @@
               <a:buNone/>
             </a:pPr>
             <a:r>
-              <a:rPr lang="en-US" sz="1350" dirty="0">
+              <a:rPr lang="en-US" sz="1400" dirty="0">
                 <a:solidFill>
                   <a:srgbClr val="1B2733"/>
                 </a:solidFill>
@@ -13590,7 +13590,7 @@
               <a:buNone/>
             </a:pPr>
             <a:r>
-              <a:rPr lang="en-US" sz="1350" dirty="0">
+              <a:rPr lang="en-US" sz="1400" dirty="0">
                 <a:solidFill>
                   <a:srgbClr val="1B2733"/>
                 </a:solidFill>
@@ -13636,7 +13636,7 @@
               <a:buNone/>
             </a:pPr>
             <a:r>
-              <a:rPr lang="en-US" sz="1350" dirty="0">
+              <a:rPr lang="en-US" sz="1400" dirty="0">
                 <a:solidFill>
                   <a:srgbClr val="1B2733"/>
                 </a:solidFill>
@@ -14182,7 +14182,7 @@
               <a:buNone/>
             </a:pPr>
             <a:r>
-              <a:rPr lang="en-US" sz="1400" dirty="0">
+              <a:rPr lang="en-US" sz="1500" dirty="0">
                 <a:solidFill>
                   <a:srgbClr val="12B198"/>
                 </a:solidFill>
@@ -14250,7 +14250,7 @@
               <a:buNone/>
             </a:pPr>
             <a:r>
-              <a:rPr lang="en-US" sz="1350" dirty="0">
+              <a:rPr lang="en-US" sz="1400" dirty="0">
                 <a:solidFill>
                   <a:srgbClr val="1B2733"/>
                 </a:solidFill>
@@ -14296,7 +14296,7 @@
               <a:buNone/>
             </a:pPr>
             <a:r>
-              <a:rPr lang="en-US" sz="1350" dirty="0">
+              <a:rPr lang="en-US" sz="1400" dirty="0">
                 <a:solidFill>
                   <a:srgbClr val="1B2733"/>
                 </a:solidFill>
@@ -14342,7 +14342,7 @@
               <a:buNone/>
             </a:pPr>
             <a:r>
-              <a:rPr lang="en-US" sz="1350" dirty="0">
+              <a:rPr lang="en-US" sz="1400" dirty="0">
                 <a:solidFill>
                   <a:srgbClr val="1B2733"/>
                 </a:solidFill>
@@ -14388,7 +14388,7 @@
               <a:buNone/>
             </a:pPr>
             <a:r>
-              <a:rPr lang="en-US" sz="1350" dirty="0">
+              <a:rPr lang="en-US" sz="1400" dirty="0">
                 <a:solidFill>
                   <a:srgbClr val="1B2733"/>
                 </a:solidFill>
@@ -14531,7 +14531,7 @@
               <a:buNone/>
             </a:pPr>
             <a:r>
-              <a:rPr lang="en-US" sz="1400" dirty="0">
+              <a:rPr lang="en-US" sz="1500" dirty="0">
                 <a:solidFill>
                   <a:srgbClr val="12B198"/>
                 </a:solidFill>
@@ -14599,7 +14599,7 @@
               <a:buNone/>
             </a:pPr>
             <a:r>
-              <a:rPr lang="en-US" sz="1350" dirty="0">
+              <a:rPr lang="en-US" sz="1400" dirty="0">
                 <a:solidFill>
                   <a:srgbClr val="1B2733"/>
                 </a:solidFill>
@@ -14645,7 +14645,7 @@
               <a:buNone/>
             </a:pPr>
             <a:r>
-              <a:rPr lang="en-US" sz="1350" dirty="0">
+              <a:rPr lang="en-US" sz="1400" dirty="0">
                 <a:solidFill>
                   <a:srgbClr val="1B2733"/>
                 </a:solidFill>
@@ -14691,7 +14691,7 @@
               <a:buNone/>
             </a:pPr>
             <a:r>
-              <a:rPr lang="en-US" sz="1350" dirty="0">
+              <a:rPr lang="en-US" sz="1400" dirty="0">
                 <a:solidFill>
                   <a:srgbClr val="1B2733"/>
                 </a:solidFill>
@@ -14737,7 +14737,7 @@
               <a:buNone/>
             </a:pPr>
             <a:r>
-              <a:rPr lang="en-US" sz="1350" dirty="0">
+              <a:rPr lang="en-US" sz="1400" dirty="0">
                 <a:solidFill>
                   <a:srgbClr val="1B2733"/>
                 </a:solidFill>
@@ -15284,7 +15284,7 @@
               <a:buNone/>
             </a:pPr>
             <a:r>
-              <a:rPr lang="en-US" sz="1400" dirty="0">
+              <a:rPr lang="en-US" sz="1500" dirty="0">
                 <a:solidFill>
                   <a:srgbClr val="1B2733"/>
                 </a:solidFill>
@@ -15427,7 +15427,7 @@
               <a:buNone/>
             </a:pPr>
             <a:r>
-              <a:rPr lang="en-US" sz="1400" dirty="0">
+              <a:rPr lang="en-US" sz="1500" dirty="0">
                 <a:solidFill>
                   <a:srgbClr val="1B2733"/>
                 </a:solidFill>
@@ -15570,7 +15570,7 @@
               <a:buNone/>
             </a:pPr>
             <a:r>
-              <a:rPr lang="en-US" sz="1400" dirty="0">
+              <a:rPr lang="en-US" sz="1500" dirty="0">
                 <a:solidFill>
                   <a:srgbClr val="1B2733"/>
                 </a:solidFill>
@@ -15713,7 +15713,7 @@
               <a:buNone/>
             </a:pPr>
             <a:r>
-              <a:rPr lang="en-US" sz="1400" dirty="0">
+              <a:rPr lang="en-US" sz="1500" dirty="0">
                 <a:solidFill>
                   <a:srgbClr val="1B2733"/>
                 </a:solidFill>
@@ -16066,7 +16066,7 @@
               <a:buNone/>
             </a:pPr>
             <a:r>
-              <a:rPr lang="en-US" sz="1400" dirty="0">
+              <a:rPr lang="en-US" sz="1500" dirty="0">
                 <a:solidFill>
                   <a:srgbClr val="1B2733"/>
                 </a:solidFill>
@@ -16209,7 +16209,7 @@
               <a:buNone/>
             </a:pPr>
             <a:r>
-              <a:rPr lang="en-US" sz="1400" dirty="0">
+              <a:rPr lang="en-US" sz="1500" dirty="0">
                 <a:solidFill>
                   <a:srgbClr val="1B2733"/>
                 </a:solidFill>
@@ -16352,7 +16352,7 @@
               <a:buNone/>
             </a:pPr>
             <a:r>
-              <a:rPr lang="en-US" sz="1400" dirty="0">
+              <a:rPr lang="en-US" sz="1500" dirty="0">
                 <a:solidFill>
                   <a:srgbClr val="1B2733"/>
                 </a:solidFill>
@@ -16495,7 +16495,7 @@
               <a:buNone/>
             </a:pPr>
             <a:r>
-              <a:rPr lang="en-US" sz="1400" dirty="0">
+              <a:rPr lang="en-US" sz="1500" dirty="0">
                 <a:solidFill>
                   <a:srgbClr val="1B2733"/>
                 </a:solidFill>
@@ -16855,7 +16855,7 @@
                 <a:ea typeface="Calibri" pitchFamily="34" charset="-122"/>
                 <a:cs typeface="Calibri" pitchFamily="34" charset="-120"/>
               </a:rPr>
-              <a:t>What You'll Learn　</a:t>
+              <a:t>What You'll Learn  </a:t>
             </a:r>
             <a:pPr indent="0" marL="0">
               <a:lnSpc>
@@ -16884,7 +16884,7 @@
               <a:buNone/>
             </a:pPr>
             <a:r>
-              <a:rPr lang="en-US" sz="1250" dirty="0">
+              <a:rPr lang="en-US" sz="1300" dirty="0">
                 <a:solidFill>
                   <a:srgbClr val="1B2733"/>
                 </a:solidFill>
@@ -17027,7 +17027,7 @@
               <a:buNone/>
             </a:pPr>
             <a:r>
-              <a:rPr lang="en-US" sz="1400" dirty="0">
+              <a:rPr lang="en-US" sz="1500" dirty="0">
                 <a:solidFill>
                   <a:srgbClr val="12B198"/>
                 </a:solidFill>
@@ -17095,7 +17095,7 @@
               <a:buNone/>
             </a:pPr>
             <a:r>
-              <a:rPr lang="en-US" sz="1350" dirty="0">
+              <a:rPr lang="en-US" sz="1400" dirty="0">
                 <a:solidFill>
                   <a:srgbClr val="1B2733"/>
                 </a:solidFill>
@@ -17141,7 +17141,7 @@
               <a:buNone/>
             </a:pPr>
             <a:r>
-              <a:rPr lang="en-US" sz="1350" dirty="0">
+              <a:rPr lang="en-US" sz="1400" dirty="0">
                 <a:solidFill>
                   <a:srgbClr val="1B2733"/>
                 </a:solidFill>
@@ -17187,7 +17187,7 @@
               <a:buNone/>
             </a:pPr>
             <a:r>
-              <a:rPr lang="en-US" sz="1350" dirty="0">
+              <a:rPr lang="en-US" sz="1400" dirty="0">
                 <a:solidFill>
                   <a:srgbClr val="1B2733"/>
                 </a:solidFill>
@@ -17233,7 +17233,7 @@
               <a:buNone/>
             </a:pPr>
             <a:r>
-              <a:rPr lang="en-US" sz="1350" dirty="0">
+              <a:rPr lang="en-US" sz="1400" dirty="0">
                 <a:solidFill>
                   <a:srgbClr val="1B2733"/>
                 </a:solidFill>
@@ -17376,7 +17376,7 @@
               <a:buNone/>
             </a:pPr>
             <a:r>
-              <a:rPr lang="en-US" sz="1400" dirty="0">
+              <a:rPr lang="en-US" sz="1500" dirty="0">
                 <a:solidFill>
                   <a:srgbClr val="12B198"/>
                 </a:solidFill>
@@ -17444,7 +17444,7 @@
               <a:buNone/>
             </a:pPr>
             <a:r>
-              <a:rPr lang="en-US" sz="1350" dirty="0">
+              <a:rPr lang="en-US" sz="1400" dirty="0">
                 <a:solidFill>
                   <a:srgbClr val="1B2733"/>
                 </a:solidFill>
@@ -17490,7 +17490,7 @@
               <a:buNone/>
             </a:pPr>
             <a:r>
-              <a:rPr lang="en-US" sz="1350" dirty="0">
+              <a:rPr lang="en-US" sz="1400" dirty="0">
                 <a:solidFill>
                   <a:srgbClr val="1B2733"/>
                 </a:solidFill>
@@ -17536,7 +17536,7 @@
               <a:buNone/>
             </a:pPr>
             <a:r>
-              <a:rPr lang="en-US" sz="1350" dirty="0">
+              <a:rPr lang="en-US" sz="1400" dirty="0">
                 <a:solidFill>
                   <a:srgbClr val="1B2733"/>
                 </a:solidFill>
@@ -17582,7 +17582,7 @@
               <a:buNone/>
             </a:pPr>
             <a:r>
-              <a:rPr lang="en-US" sz="1350" dirty="0">
+              <a:rPr lang="en-US" sz="1400" dirty="0">
                 <a:solidFill>
                   <a:srgbClr val="1B2733"/>
                 </a:solidFill>
@@ -18128,7 +18128,7 @@
               <a:buNone/>
             </a:pPr>
             <a:r>
-              <a:rPr lang="en-US" sz="1400" dirty="0">
+              <a:rPr lang="en-US" sz="1500" dirty="0">
                 <a:solidFill>
                   <a:srgbClr val="12B198"/>
                 </a:solidFill>
@@ -18196,7 +18196,7 @@
               <a:buNone/>
             </a:pPr>
             <a:r>
-              <a:rPr lang="en-US" sz="1350" dirty="0">
+              <a:rPr lang="en-US" sz="1400" dirty="0">
                 <a:solidFill>
                   <a:srgbClr val="1B2733"/>
                 </a:solidFill>
@@ -18242,7 +18242,7 @@
               <a:buNone/>
             </a:pPr>
             <a:r>
-              <a:rPr lang="en-US" sz="1350" dirty="0">
+              <a:rPr lang="en-US" sz="1400" dirty="0">
                 <a:solidFill>
                   <a:srgbClr val="1B2733"/>
                 </a:solidFill>
@@ -18288,7 +18288,7 @@
               <a:buNone/>
             </a:pPr>
             <a:r>
-              <a:rPr lang="en-US" sz="1350" dirty="0">
+              <a:rPr lang="en-US" sz="1400" dirty="0">
                 <a:solidFill>
                   <a:srgbClr val="1B2733"/>
                 </a:solidFill>
@@ -18334,7 +18334,7 @@
               <a:buNone/>
             </a:pPr>
             <a:r>
-              <a:rPr lang="en-US" sz="1350" dirty="0">
+              <a:rPr lang="en-US" sz="1400" dirty="0">
                 <a:solidFill>
                   <a:srgbClr val="1B2733"/>
                 </a:solidFill>
@@ -18477,7 +18477,7 @@
               <a:buNone/>
             </a:pPr>
             <a:r>
-              <a:rPr lang="en-US" sz="1400" dirty="0">
+              <a:rPr lang="en-US" sz="1500" dirty="0">
                 <a:solidFill>
                   <a:srgbClr val="12B198"/>
                 </a:solidFill>
@@ -18545,7 +18545,7 @@
               <a:buNone/>
             </a:pPr>
             <a:r>
-              <a:rPr lang="en-US" sz="1350" dirty="0">
+              <a:rPr lang="en-US" sz="1400" dirty="0">
                 <a:solidFill>
                   <a:srgbClr val="1B2733"/>
                 </a:solidFill>
@@ -18591,7 +18591,7 @@
               <a:buNone/>
             </a:pPr>
             <a:r>
-              <a:rPr lang="en-US" sz="1350" dirty="0">
+              <a:rPr lang="en-US" sz="1400" dirty="0">
                 <a:solidFill>
                   <a:srgbClr val="1B2733"/>
                 </a:solidFill>
@@ -18637,7 +18637,7 @@
               <a:buNone/>
             </a:pPr>
             <a:r>
-              <a:rPr lang="en-US" sz="1350" dirty="0">
+              <a:rPr lang="en-US" sz="1400" dirty="0">
                 <a:solidFill>
                   <a:srgbClr val="1B2733"/>
                 </a:solidFill>
@@ -18683,7 +18683,7 @@
               <a:buNone/>
             </a:pPr>
             <a:r>
-              <a:rPr lang="en-US" sz="1350" dirty="0">
+              <a:rPr lang="en-US" sz="1400" dirty="0">
                 <a:solidFill>
                   <a:srgbClr val="1B2733"/>
                 </a:solidFill>
@@ -19175,7 +19175,7 @@
                 <a:ea typeface="Calibri" pitchFamily="34" charset="-122"/>
                 <a:cs typeface="Calibri" pitchFamily="34" charset="-120"/>
               </a:rPr>
-              <a:t>What You'll Learn　</a:t>
+              <a:t>What You'll Learn  </a:t>
             </a:r>
             <a:pPr indent="0" marL="0">
               <a:lnSpc>
@@ -19204,7 +19204,7 @@
               <a:buNone/>
             </a:pPr>
             <a:r>
-              <a:rPr lang="en-US" sz="1250" dirty="0">
+              <a:rPr lang="en-US" sz="1300" dirty="0">
                 <a:solidFill>
                   <a:srgbClr val="1B2733"/>
                 </a:solidFill>
@@ -19347,7 +19347,7 @@
               <a:buNone/>
             </a:pPr>
             <a:r>
-              <a:rPr lang="en-US" sz="1400" dirty="0">
+              <a:rPr lang="en-US" sz="1500" dirty="0">
                 <a:solidFill>
                   <a:srgbClr val="12B198"/>
                 </a:solidFill>
@@ -19415,7 +19415,7 @@
               <a:buNone/>
             </a:pPr>
             <a:r>
-              <a:rPr lang="en-US" sz="1350" dirty="0">
+              <a:rPr lang="en-US" sz="1400" dirty="0">
                 <a:solidFill>
                   <a:srgbClr val="1B2733"/>
                 </a:solidFill>
@@ -19461,7 +19461,7 @@
               <a:buNone/>
             </a:pPr>
             <a:r>
-              <a:rPr lang="en-US" sz="1350" dirty="0">
+              <a:rPr lang="en-US" sz="1400" dirty="0">
                 <a:solidFill>
                   <a:srgbClr val="1B2733"/>
                 </a:solidFill>
@@ -19507,7 +19507,7 @@
               <a:buNone/>
             </a:pPr>
             <a:r>
-              <a:rPr lang="en-US" sz="1350" dirty="0">
+              <a:rPr lang="en-US" sz="1400" dirty="0">
                 <a:solidFill>
                   <a:srgbClr val="1B2733"/>
                 </a:solidFill>
@@ -19553,7 +19553,7 @@
               <a:buNone/>
             </a:pPr>
             <a:r>
-              <a:rPr lang="en-US" sz="1350" dirty="0">
+              <a:rPr lang="en-US" sz="1400" dirty="0">
                 <a:solidFill>
                   <a:srgbClr val="1B2733"/>
                 </a:solidFill>
@@ -19696,7 +19696,7 @@
               <a:buNone/>
             </a:pPr>
             <a:r>
-              <a:rPr lang="en-US" sz="1400" dirty="0">
+              <a:rPr lang="en-US" sz="1500" dirty="0">
                 <a:solidFill>
                   <a:srgbClr val="12B198"/>
                 </a:solidFill>
@@ -19764,7 +19764,7 @@
               <a:buNone/>
             </a:pPr>
             <a:r>
-              <a:rPr lang="en-US" sz="1350" dirty="0">
+              <a:rPr lang="en-US" sz="1400" dirty="0">
                 <a:solidFill>
                   <a:srgbClr val="1B2733"/>
                 </a:solidFill>
@@ -19810,7 +19810,7 @@
               <a:buNone/>
             </a:pPr>
             <a:r>
-              <a:rPr lang="en-US" sz="1350" dirty="0">
+              <a:rPr lang="en-US" sz="1400" dirty="0">
                 <a:solidFill>
                   <a:srgbClr val="1B2733"/>
                 </a:solidFill>
@@ -19856,7 +19856,7 @@
               <a:buNone/>
             </a:pPr>
             <a:r>
-              <a:rPr lang="en-US" sz="1350" dirty="0">
+              <a:rPr lang="en-US" sz="1400" dirty="0">
                 <a:solidFill>
                   <a:srgbClr val="1B2733"/>
                 </a:solidFill>
@@ -19902,7 +19902,7 @@
               <a:buNone/>
             </a:pPr>
             <a:r>
-              <a:rPr lang="en-US" sz="1350" dirty="0">
+              <a:rPr lang="en-US" sz="1400" dirty="0">
                 <a:solidFill>
                   <a:srgbClr val="1B2733"/>
                 </a:solidFill>
@@ -20448,7 +20448,7 @@
               <a:buNone/>
             </a:pPr>
             <a:r>
-              <a:rPr lang="en-US" sz="1400" dirty="0">
+              <a:rPr lang="en-US" sz="1500" dirty="0">
                 <a:solidFill>
                   <a:srgbClr val="12B198"/>
                 </a:solidFill>
@@ -20516,7 +20516,7 @@
               <a:buNone/>
             </a:pPr>
             <a:r>
-              <a:rPr lang="en-US" sz="1350" dirty="0">
+              <a:rPr lang="en-US" sz="1400" dirty="0">
                 <a:solidFill>
                   <a:srgbClr val="1B2733"/>
                 </a:solidFill>
@@ -20562,7 +20562,7 @@
               <a:buNone/>
             </a:pPr>
             <a:r>
-              <a:rPr lang="en-US" sz="1350" dirty="0">
+              <a:rPr lang="en-US" sz="1400" dirty="0">
                 <a:solidFill>
                   <a:srgbClr val="1B2733"/>
                 </a:solidFill>
@@ -20608,7 +20608,7 @@
               <a:buNone/>
             </a:pPr>
             <a:r>
-              <a:rPr lang="en-US" sz="1350" dirty="0">
+              <a:rPr lang="en-US" sz="1400" dirty="0">
                 <a:solidFill>
                   <a:srgbClr val="1B2733"/>
                 </a:solidFill>
@@ -20654,7 +20654,7 @@
               <a:buNone/>
             </a:pPr>
             <a:r>
-              <a:rPr lang="en-US" sz="1350" dirty="0">
+              <a:rPr lang="en-US" sz="1400" dirty="0">
                 <a:solidFill>
                   <a:srgbClr val="1B2733"/>
                 </a:solidFill>
@@ -20797,7 +20797,7 @@
               <a:buNone/>
             </a:pPr>
             <a:r>
-              <a:rPr lang="en-US" sz="1400" dirty="0">
+              <a:rPr lang="en-US" sz="1500" dirty="0">
                 <a:solidFill>
                   <a:srgbClr val="12B198"/>
                 </a:solidFill>
@@ -20865,7 +20865,7 @@
               <a:buNone/>
             </a:pPr>
             <a:r>
-              <a:rPr lang="en-US" sz="1350" dirty="0">
+              <a:rPr lang="en-US" sz="1400" dirty="0">
                 <a:solidFill>
                   <a:srgbClr val="1B2733"/>
                 </a:solidFill>
@@ -20911,7 +20911,7 @@
               <a:buNone/>
             </a:pPr>
             <a:r>
-              <a:rPr lang="en-US" sz="1350" dirty="0">
+              <a:rPr lang="en-US" sz="1400" dirty="0">
                 <a:solidFill>
                   <a:srgbClr val="1B2733"/>
                 </a:solidFill>
@@ -20957,7 +20957,7 @@
               <a:buNone/>
             </a:pPr>
             <a:r>
-              <a:rPr lang="en-US" sz="1350" dirty="0">
+              <a:rPr lang="en-US" sz="1400" dirty="0">
                 <a:solidFill>
                   <a:srgbClr val="1B2733"/>
                 </a:solidFill>
@@ -21003,7 +21003,7 @@
               <a:buNone/>
             </a:pPr>
             <a:r>
-              <a:rPr lang="en-US" sz="1350" dirty="0">
+              <a:rPr lang="en-US" sz="1400" dirty="0">
                 <a:solidFill>
                   <a:srgbClr val="1B2733"/>
                 </a:solidFill>
